--- a/downloads/presentations/modules/ops-210.pptx
+++ b/downloads/presentations/modules/ops-210.pptx
@@ -614,7 +614,8 @@
               <a:rPr lang="en-US" dirty="0"/>
               <a:t>Public Health Example
 An AI-supported case summary may pull together lab reports, case notes, hospitalization information, and prior reports for the same person. If the person matching process incorrectly combines two people, the summary may include information that belongs to someone else. If the process misses a prior record, the summary may omit important history. The investigator needs visibility into linkage confidence and source records.
-An outbreak detection workflow may link complaints, lab results, facility inspections, and geographic data. Entity resolution may be needed to identify whether different facility names refer to the same establishment. AI-generated cluster summaries can be misleading if the facility resolution process is weak.</a:t>
+An outbreak detection workflow may link complaints, lab results, facility inspections, and geographic data. Entity resolution may be needed to identify whether different facility names refer to the same establishment. AI-generated cluster summaries can be misleading if the facility resolution process is weak.
+Application guidance: Connect the concept to public health purpose, responsible use, required safeguards, documentation, and the next action a department should take.</a:t>
             </a:r>
             <a:endParaRPr lang="en-US" dirty="0"/>
           </a:p>
@@ -705,7 +706,8 @@
               <a:t>Technical Deep Dive
 Matching design begins with the entity being matched and the decision that depends on the match. Person matching may use name, date of birth, address, phone, medical record number, email, sex, or other identifiers. Facility matching may use name, address, license number, geocode, and ownership information. Event matching may use dates, locations, condition, exposure, and related records.
 Thresholds determine when records are automatically linked, automatically separated, or sent for review. Low thresholds may increase false matches. High thresholds may increase missed matches. The right balance depends on the use case. A workflow that affects individual services may need a different tolerance for error than an aggregate trend analysis.
-AI readiness requires documentation of matching methods, fields, thresholds, review processes, error rates, and known limitations. If an AI tool uses linked records, staff should know whether linkage is deterministic, probabilistic, manual, or hybrid. They should also know whether uncertain matches are visible to users and whether AI outputs indicate linkage uncertainty.</a:t>
+AI readiness requires documentation of matching methods, fields, thresholds, review processes, error rates, and known limitations. If an AI tool uses linked records, staff should know whether linkage is deterministic, probabilistic, manual, or hybrid. They should also know whether uncertain matches are visible to users and whether AI outputs indicate linkage uncertainty.
+Application guidance: Connect the concept to public health purpose, responsible use, required safeguards, documentation, and the next action a department should take.</a:t>
             </a:r>
             <a:endParaRPr lang="en-US" dirty="0"/>
           </a:p>
@@ -796,7 +798,8 @@
               <a:t>Risks, Failure Modes, and Guardrails
 False matches. False matches can combine data from different people or entities. Guardrails include conservative thresholds for consequential uses, clerical review, and source display.
 Missed matches. Missed matches can fragment histories and create duplicate work. Guardrails include matching quality monitoring, feedback loops, and review queues.
-Equity variation. Matching may perform differently across populations. Guardrails include subgroup evaluation, alternative identifiers, and review of naming and address patterns.</a:t>
+Equity variation. Matching may perform differently across populations. Guardrails include subgroup evaluation, alternative identifiers, and review of naming and address patterns.
+Application guidance: Identify what could go wrong, who could be affected, what safeguards are needed, and what evidence should be reviewed before use expands.</a:t>
             </a:r>
             <a:endParaRPr lang="en-US" dirty="0"/>
           </a:p>
@@ -885,7 +888,8 @@
             <a:r>
               <a:rPr lang="en-US" dirty="0"/>
               <a:t>Risks, Failure Modes, and Guardrails
-Hidden linkage uncertainty. AI outputs may present linked data as certain. Guardrails include confidence indicators, source records, and user review of uncertain matches.</a:t>
+Hidden linkage uncertainty. AI outputs may present linked data as certain. Guardrails include confidence indicators, source records, and user review of uncertain matches.
+Application guidance: Identify what could go wrong, who could be affected, what safeguards are needed, and what evidence should be reviewed before use expands.</a:t>
             </a:r>
             <a:endParaRPr lang="en-US" dirty="0"/>
           </a:p>
@@ -974,7 +978,8 @@
             <a:r>
               <a:rPr lang="en-US" dirty="0"/>
               <a:t>Application to AI-Supported Workflows
-Generative AI may summarize linked records, so source attribution and linkage confidence should be visible. Predictive analytics may use features created from linked records, making match quality part of model validity. NLP may extract identifiers from text to support linkage, which requires privacy and accuracy review. Agentic AI should not automatically merge or update records without strong approval and rollback procedures.</a:t>
+Generative AI may summarize linked records, so source attribution and linkage confidence should be visible. Predictive analytics may use features created from linked records, making match quality part of model validity. NLP may extract identifiers from text to support linkage, which requires privacy and accuracy review. Agentic AI should not automatically merge or update records without strong approval and rollback procedures.
+Application guidance: Use the concept to clarify workflow changes, dependencies, staffing, procurement requirements, training needs, and implementation checkpoints.</a:t>
             </a:r>
             <a:endParaRPr lang="en-US" dirty="0"/>
           </a:p>
@@ -1065,7 +1070,8 @@
               <a:t>Reflection Questions
 Which workflows in your agency depend on matching records across systems?
 What fields are used for matching, and how complete are they?
-Which populations may be more likely to experience missed or incorrect matches?</a:t>
+Which populations may be more likely to experience missed or incorrect matches?
+Application guidance: Connect the concept to public health purpose, responsible use, required safeguards, documentation, and the next action a department should take.</a:t>
             </a:r>
             <a:endParaRPr lang="en-US" dirty="0"/>
           </a:p>
@@ -1155,7 +1161,8 @@
               <a:rPr lang="en-US" dirty="0"/>
               <a:t>Reflection Questions
 What happens when records are incorrectly merged or not merged?
-Where should human review be required?</a:t>
+Where should human review be required?
+Application guidance: Connect the concept to public health purpose, responsible use, required safeguards, documentation, and the next action a department should take.</a:t>
             </a:r>
             <a:endParaRPr lang="en-US" dirty="0"/>
           </a:p>
@@ -1244,7 +1251,8 @@
             <a:r>
               <a:rPr lang="en-US" dirty="0"/>
               <a:t>Practical Exercise
-Create a linkage risk review for one AI-supported public health workflow. Include the matching purpose, data sources, matching fields, known field quality issues, match method, thresholds, clerical review process, false match risks, missed match risks, equity considerations, and AI output affected.</a:t>
+Create a linkage risk review for one AI-supported public health workflow. Include the matching purpose, data sources, matching fields, known field quality issues, match method, thresholds, clerical review process, false match risks, missed match risks, equity considerations, and AI output affected.
+Application guidance: Use the assignment to test whether you can explain the concept, apply it to a realistic public health situation, and identify what would need review before the work moves forward.</a:t>
             </a:r>
             <a:endParaRPr lang="en-US" dirty="0"/>
           </a:p>
@@ -1335,7 +1343,8 @@
               <a:t>Expected Artifact or Evidence
 Linkage risk review
 Deduplication workflow map
-Match review questions</a:t>
+Match review questions
+Application guidance: Connect the concept to public health purpose, responsible use, required safeguards, documentation, and the next action a department should take.</a:t>
             </a:r>
             <a:endParaRPr lang="en-US" dirty="0"/>
           </a:p>
@@ -1424,7 +1433,8 @@
             <a:r>
               <a:rPr lang="en-US" dirty="0"/>
               <a:t>Expected Artifact or Evidence
-Equity and escalation notes</a:t>
+Equity and escalation notes
+Application guidance: Connect the concept to public health purpose, responsible use, required safeguards, documentation, and the next action a department should take.</a:t>
             </a:r>
             <a:endParaRPr lang="en-US" dirty="0"/>
           </a:p>
@@ -1608,7 +1618,8 @@
 Linkage risk review
 Deduplication workflow map
 Match review questions
-Equity and escalation notes</a:t>
+Equity and escalation notes
+Application guidance: Use the assignment to test whether you can explain the concept, apply it to a realistic public health situation, and identify what would need review before the work moves forward.</a:t>
             </a:r>
             <a:endParaRPr lang="en-US" dirty="0"/>
           </a:p>
@@ -1701,7 +1712,8 @@
 2. What is a missed match?
 3. Why does record linkage matter for AI?
 4. Who may need to review uncertain matches?
-5. What is strong completion evidence for this module?</a:t>
+5. What is strong completion evidence for this module?
+Application guidance: Use the assignment to test whether you can explain the concept, apply it to a realistic public health situation, and identify what would need review before the work moves forward.</a:t>
             </a:r>
             <a:endParaRPr lang="en-US" dirty="0"/>
           </a:p>
@@ -1793,7 +1805,8 @@
 Public health IIS and surveillance data quality resources
 CDC data modernization resources
 Health information exchange data quality materials
-Agency matching and deduplication procedures</a:t>
+Agency matching and deduplication procedures
+Application guidance: Connect the concept to public health purpose, responsible use, required safeguards, documentation, and the next action a department should take.</a:t>
             </a:r>
             <a:endParaRPr lang="en-US" dirty="0"/>
           </a:p>
@@ -2072,7 +2085,8 @@
 Distinguish between deterministic matching, probabilistic matching, entity resolution, and deduplication.
 Identify risks from false matches and missed matches.
 Describe how thresholds, clerical review, and data quality affect matching.
-Produce a linkage risk review for an AI-supported workflow.</a:t>
+Produce a linkage risk review for an AI-supported workflow.
+Application guidance: Use the assignment to test whether you can explain the concept, apply it to a realistic public health situation, and identify what would need review before the work moves forward.</a:t>
             </a:r>
             <a:endParaRPr lang="en-US" dirty="0"/>
           </a:p>
@@ -2161,7 +2175,8 @@
             <a:r>
               <a:rPr lang="en-US" dirty="0"/>
               <a:t>Module Overview
-Record linkage and entity resolution help public health systems determine whether records refer to the same person, provider, facility, address, organization, event, or outbreak. AI tools often rely on linked data even when the linkage process is invisible to users. This module teaches learners how matching and deduplication affect AI outputs, surveillance quality, and equity.</a:t>
+Record linkage and entity resolution help public health systems determine whether records refer to the same person, provider, facility, address, organization, event, or outbreak. AI tools often rely on linked data even when the linkage process is invisible to users. This module teaches learners how matching and deduplication affect AI outputs, surveillance quality, and equity.
+Application guidance: Connect the concept to public health purpose, responsible use, required safeguards, documentation, and the next action a department should take.</a:t>
             </a:r>
             <a:endParaRPr lang="en-US" dirty="0"/>
           </a:p>
@@ -2252,7 +2267,8 @@
               <a:t>Why This Topic Matters for Public Health AI
 Record linkage matters because public health work often depends on combining information across systems. A surveillance system may need to associate a lab report with an existing case. An IIS may need to match vaccination records from multiple providers. A vital records linkage may support maternal and child health analysis. An AI tool using these linked records may summarize history, predict risk, classify cases, or identify duplicates. If linkage is wrong, the AI output may be wrong.
 False matches and missed matches have different consequences. A false match can combine information from different people or events, creating privacy, safety, and accuracy risks. A missed match can split one person or event into multiple records, leading to duplicate work, incomplete histories, or undercounting. Both errors can affect public health decisions.
-Linkage can also create equity risks. Names, addresses, phone numbers, language, housing status, migration patterns, and documentation practices vary across communities. Matching rules that work well for one population may perform poorly for another. AI workflows that rely on linked data should therefore include subgroup and equity review.</a:t>
+Linkage can also create equity risks. Names, addresses, phone numbers, language, housing status, migration patterns, and documentation practices vary across communities. Matching rules that work well for one population may perform poorly for another. AI workflows that rely on linked data should therefore include subgroup and equity review.
+Application guidance: Connect the concept to public health purpose, responsible use, required safeguards, documentation, and the next action a department should take.</a:t>
             </a:r>
             <a:endParaRPr lang="en-US" dirty="0"/>
           </a:p>
@@ -2343,7 +2359,8 @@
               <a:t>Core Concepts
 Record linkage. Record linkage is the process of determining whether records from one or more sources refer to the same entity. The entity may be a person, provider, facility, address, organization, event, or outbreak.
 Entity resolution. Entity resolution is the broader process of identifying, matching, merging, separating, and managing records about the same entity. It includes matching rules, thresholds, review processes, and stewardship.
-Deterministic matching. Deterministic matching uses exact or rule-based agreement across selected fields. It is easier to explain but may miss matches when fields are incomplete or inconsistent.</a:t>
+Deterministic matching. Deterministic matching uses exact or rule-based agreement across selected fields. It is easier to explain but may miss matches when fields are incomplete or inconsistent.
+Application guidance: Connect the concept to public health purpose, responsible use, required safeguards, documentation, and the next action a department should take.</a:t>
             </a:r>
             <a:endParaRPr lang="en-US" dirty="0"/>
           </a:p>
@@ -2433,7 +2450,8 @@
               <a:rPr lang="en-US" dirty="0"/>
               <a:t>Core Concepts
 Probabilistic matching. Probabilistic matching estimates the likelihood that records refer to the same entity even when fields differ. It can improve recall but requires thresholds, validation, and review.
-Clerical review. Clerical review is human review of uncertain matches. It is essential when automatic matching is not reliable enough for the downstream use.</a:t>
+Clerical review. Clerical review is human review of uncertain matches. It is essential when automatic matching is not reliable enough for the downstream use.
+Application guidance: Connect the concept to public health purpose, responsible use, required safeguards, documentation, and the next action a department should take.</a:t>
             </a:r>
             <a:endParaRPr lang="en-US" dirty="0"/>
           </a:p>
@@ -3204,8 +3222,8 @@
         </p:nvSpPr>
         <p:spPr>
           <a:xfrm>
-            <a:off x="9966960" y="6537960"/>
-            <a:ext cx="1645920" cy="201168"/>
+            <a:off x="9646920" y="6537960"/>
+            <a:ext cx="1965960" cy="201168"/>
           </a:xfrm>
           <a:prstGeom prst="rect">
             <a:avLst/>
@@ -3229,7 +3247,7 @@
                 <a:ea typeface="Aptos" pitchFamily="34" charset="-122"/>
                 <a:cs typeface="Aptos" pitchFamily="34" charset="-120"/>
               </a:rPr>
-              <a:t>Â© Paula Soper</a:t>
+              <a:t>Copyright Paula Soper</a:t>
             </a:r>
             <a:endParaRPr lang="en-US" sz="800" dirty="0"/>
           </a:p>
@@ -3276,77 +3294,13 @@
       </p:sp>
       <p:sp>
         <p:nvSpPr>
-          <p:cNvPr id="8" name="Shape 6"/>
+          <p:cNvPr id="8" name="Text 6"/>
           <p:cNvSpPr/>
           <p:nvPr/>
         </p:nvSpPr>
         <p:spPr>
           <a:xfrm>
             <a:off x="640080" y="658368"/>
-            <a:ext cx="420624" cy="420624"/>
-          </a:xfrm>
-          <a:prstGeom prst="ellipse">
-            <a:avLst/>
-          </a:prstGeom>
-          <a:solidFill>
-            <a:srgbClr val="0068B7"/>
-          </a:solidFill>
-          <a:ln w="12700">
-            <a:solidFill>
-              <a:srgbClr val="0068B7"/>
-            </a:solidFill>
-            <a:prstDash val="solid"/>
-          </a:ln>
-        </p:spPr>
-      </p:sp>
-      <p:sp>
-        <p:nvSpPr>
-          <p:cNvPr id="9" name="Text 7"/>
-          <p:cNvSpPr/>
-          <p:nvPr/>
-        </p:nvSpPr>
-        <p:spPr>
-          <a:xfrm>
-            <a:off x="640080" y="731520"/>
-            <a:ext cx="420624" cy="164592"/>
-          </a:xfrm>
-          <a:prstGeom prst="rect">
-            <a:avLst/>
-          </a:prstGeom>
-          <a:noFill/>
-          <a:ln/>
-        </p:spPr>
-        <p:txBody>
-          <a:bodyPr wrap="square" lIns="0" tIns="0" rIns="0" bIns="0" rtlCol="0" anchor="ctr"/>
-          <a:lstStyle/>
-          <a:p>
-            <a:pPr algn="ctr" indent="0" marL="0">
-              <a:buNone/>
-            </a:pPr>
-            <a:r>
-              <a:rPr lang="en-US" sz="1100" b="1" dirty="0">
-                <a:solidFill>
-                  <a:srgbClr val="FFFFFF"/>
-                </a:solidFill>
-                <a:latin typeface="Aptos" pitchFamily="34" charset="0"/>
-                <a:ea typeface="Aptos" pitchFamily="34" charset="-122"/>
-                <a:cs typeface="Aptos" pitchFamily="34" charset="-120"/>
-              </a:rPr>
-              <a:t>5</a:t>
-            </a:r>
-            <a:endParaRPr lang="en-US" sz="1100" dirty="0"/>
-          </a:p>
-        </p:txBody>
-      </p:sp>
-      <p:sp>
-        <p:nvSpPr>
-          <p:cNvPr id="10" name="Text 8"/>
-          <p:cNvSpPr/>
-          <p:nvPr/>
-        </p:nvSpPr>
-        <p:spPr>
-          <a:xfrm>
-            <a:off x="640080" y="621792"/>
             <a:ext cx="10881360" cy="713232"/>
           </a:xfrm>
           <a:prstGeom prst="rect">
@@ -3381,14 +3335,14 @@
       </p:sp>
       <p:sp>
         <p:nvSpPr>
-          <p:cNvPr id="11" name="Text 9"/>
+          <p:cNvPr id="9" name="Text 7"/>
           <p:cNvSpPr/>
           <p:nvPr/>
         </p:nvSpPr>
         <p:spPr>
           <a:xfrm>
             <a:off x="868680" y="1508760"/>
-            <a:ext cx="6537960" cy="4160520"/>
+            <a:ext cx="6309360" cy="4160520"/>
           </a:xfrm>
           <a:prstGeom prst="rect">
             <a:avLst/>
@@ -3447,18 +3401,18 @@
       </p:sp>
       <p:sp>
         <p:nvSpPr>
-          <p:cNvPr id="12" name="Shape 10"/>
-          <p:cNvSpPr/>
-          <p:nvPr/>
-        </p:nvSpPr>
-        <p:spPr>
-          <a:xfrm>
-            <a:off x="7909560" y="1417320"/>
-            <a:ext cx="3154680" cy="1828800"/>
+          <p:cNvPr id="10" name="Shape 8"/>
+          <p:cNvSpPr/>
+          <p:nvPr/>
+        </p:nvSpPr>
+        <p:spPr>
+          <a:xfrm>
+            <a:off x="7635240" y="1325880"/>
+            <a:ext cx="3474720" cy="1325880"/>
           </a:xfrm>
           <a:prstGeom prst="roundRect">
             <a:avLst>
-              <a:gd name="adj" fmla="val 6000"/>
+              <a:gd name="adj" fmla="val 8276"/>
             </a:avLst>
           </a:prstGeom>
           <a:solidFill>
@@ -3474,14 +3428,14 @@
       </p:sp>
       <p:sp>
         <p:nvSpPr>
-          <p:cNvPr id="13" name="Text 11"/>
-          <p:cNvSpPr/>
-          <p:nvPr/>
-        </p:nvSpPr>
-        <p:spPr>
-          <a:xfrm>
-            <a:off x="8074152" y="1563624"/>
-            <a:ext cx="2825496" cy="256032"/>
+          <p:cNvPr id="11" name="Text 9"/>
+          <p:cNvSpPr/>
+          <p:nvPr/>
+        </p:nvSpPr>
+        <p:spPr>
+          <a:xfrm>
+            <a:off x="7799832" y="1472184"/>
+            <a:ext cx="3145536" cy="256032"/>
           </a:xfrm>
           <a:prstGeom prst="rect">
             <a:avLst/>
@@ -3505,7 +3459,7 @@
                 <a:ea typeface="Aptos" pitchFamily="34" charset="-122"/>
                 <a:cs typeface="Aptos" pitchFamily="34" charset="-120"/>
               </a:rPr>
-              <a:t>Key idea</a:t>
+              <a:t>Core concept</a:t>
             </a:r>
             <a:endParaRPr lang="en-US" sz="1300" dirty="0"/>
           </a:p>
@@ -3513,14 +3467,14 @@
       </p:sp>
       <p:sp>
         <p:nvSpPr>
-          <p:cNvPr id="14" name="Text 12"/>
-          <p:cNvSpPr/>
-          <p:nvPr/>
-        </p:nvSpPr>
-        <p:spPr>
-          <a:xfrm>
-            <a:off x="8074152" y="1920240"/>
-            <a:ext cx="2825496" cy="1188720"/>
+          <p:cNvPr id="12" name="Text 10"/>
+          <p:cNvSpPr/>
+          <p:nvPr/>
+        </p:nvSpPr>
+        <p:spPr>
+          <a:xfrm>
+            <a:off x="7799832" y="1828800"/>
+            <a:ext cx="3145536" cy="685800"/>
           </a:xfrm>
           <a:prstGeom prst="rect">
             <a:avLst/>
@@ -3554,18 +3508,159 @@
       </p:sp>
       <p:sp>
         <p:nvSpPr>
-          <p:cNvPr id="15" name="Shape 13"/>
-          <p:cNvSpPr/>
-          <p:nvPr/>
-        </p:nvSpPr>
-        <p:spPr>
-          <a:xfrm>
-            <a:off x="7909560" y="3520440"/>
-            <a:ext cx="3154680" cy="1737360"/>
+          <p:cNvPr id="13" name="Shape 11"/>
+          <p:cNvSpPr/>
+          <p:nvPr/>
+        </p:nvSpPr>
+        <p:spPr>
+          <a:xfrm>
+            <a:off x="7635240" y="2788920"/>
+            <a:ext cx="3474720" cy="1536192"/>
           </a:xfrm>
           <a:prstGeom prst="roundRect">
             <a:avLst>
-              <a:gd name="adj" fmla="val 6316"/>
+              <a:gd name="adj" fmla="val 7143"/>
+            </a:avLst>
+          </a:prstGeom>
+          <a:solidFill>
+            <a:srgbClr val="FFFFFF">
+              <a:alpha val="88000"/>
+            </a:srgbClr>
+          </a:solidFill>
+          <a:ln w="12700">
+            <a:solidFill>
+              <a:srgbClr val="D6E8F2"/>
+            </a:solidFill>
+            <a:prstDash val="solid"/>
+          </a:ln>
+        </p:spPr>
+      </p:sp>
+      <p:sp>
+        <p:nvSpPr>
+          <p:cNvPr id="14" name="Shape 12"/>
+          <p:cNvSpPr/>
+          <p:nvPr/>
+        </p:nvSpPr>
+        <p:spPr>
+          <a:xfrm>
+            <a:off x="8074152" y="3291840"/>
+            <a:ext cx="2596896" cy="749808"/>
+          </a:xfrm>
+          <a:prstGeom prst="rect">
+            <a:avLst/>
+          </a:prstGeom>
+          <a:solidFill>
+            <a:srgbClr val="EAF6F8"/>
+          </a:solidFill>
+          <a:ln w="12700">
+            <a:solidFill>
+              <a:srgbClr val="8ABBD8"/>
+            </a:solidFill>
+            <a:prstDash val="solid"/>
+          </a:ln>
+        </p:spPr>
+      </p:sp>
+      <p:sp>
+        <p:nvSpPr>
+          <p:cNvPr id="15" name="Shape 13"/>
+          <p:cNvSpPr/>
+          <p:nvPr/>
+        </p:nvSpPr>
+        <p:spPr>
+          <a:xfrm>
+            <a:off x="8202168" y="3721608"/>
+            <a:ext cx="2340864" cy="0"/>
+          </a:xfrm>
+          <a:prstGeom prst="line">
+            <a:avLst/>
+          </a:prstGeom>
+          <a:noFill/>
+          <a:ln w="19050">
+            <a:solidFill>
+              <a:srgbClr val="0068B7"/>
+            </a:solidFill>
+            <a:prstDash val="solid"/>
+          </a:ln>
+        </p:spPr>
+      </p:sp>
+      <p:sp>
+        <p:nvSpPr>
+          <p:cNvPr id="16" name="Shape 14"/>
+          <p:cNvSpPr/>
+          <p:nvPr/>
+        </p:nvSpPr>
+        <p:spPr>
+          <a:xfrm>
+            <a:off x="9198864" y="4206240"/>
+            <a:ext cx="347472" cy="347472"/>
+          </a:xfrm>
+          <a:prstGeom prst="ellipse">
+            <a:avLst/>
+          </a:prstGeom>
+          <a:solidFill>
+            <a:srgbClr val="2F8A28"/>
+          </a:solidFill>
+          <a:ln w="12700">
+            <a:solidFill>
+              <a:srgbClr val="2F8A28"/>
+            </a:solidFill>
+            <a:prstDash val="solid"/>
+          </a:ln>
+        </p:spPr>
+      </p:sp>
+      <p:sp>
+        <p:nvSpPr>
+          <p:cNvPr id="17" name="Text 15"/>
+          <p:cNvSpPr/>
+          <p:nvPr/>
+        </p:nvSpPr>
+        <p:spPr>
+          <a:xfrm>
+            <a:off x="7909560" y="3977640"/>
+            <a:ext cx="2926080" cy="182880"/>
+          </a:xfrm>
+          <a:prstGeom prst="rect">
+            <a:avLst/>
+          </a:prstGeom>
+          <a:noFill/>
+          <a:ln/>
+        </p:spPr>
+        <p:txBody>
+          <a:bodyPr wrap="square" lIns="0" tIns="0" rIns="0" bIns="0" rtlCol="0" anchor="ctr"/>
+          <a:lstStyle/>
+          <a:p>
+            <a:pPr algn="ctr" indent="0" marL="0">
+              <a:buNone/>
+            </a:pPr>
+            <a:r>
+              <a:rPr lang="en-US" sz="1000" dirty="0">
+                <a:solidFill>
+                  <a:srgbClr val="003A63"/>
+                </a:solidFill>
+                <a:latin typeface="Aptos" pitchFamily="34" charset="0"/>
+                <a:ea typeface="Aptos" pitchFamily="34" charset="-122"/>
+                <a:cs typeface="Aptos" pitchFamily="34" charset="-120"/>
+              </a:rPr>
+              <a:t>Concept to action</a:t>
+            </a:r>
+            <a:endParaRPr lang="en-US" sz="1000" dirty="0"/>
+          </a:p>
+        </p:txBody>
+      </p:sp>
+      <p:sp>
+        <p:nvSpPr>
+          <p:cNvPr id="18" name="Shape 16"/>
+          <p:cNvSpPr/>
+          <p:nvPr/>
+        </p:nvSpPr>
+        <p:spPr>
+          <a:xfrm>
+            <a:off x="7635240" y="4498848"/>
+            <a:ext cx="3474720" cy="1143000"/>
+          </a:xfrm>
+          <a:prstGeom prst="roundRect">
+            <a:avLst>
+              <a:gd name="adj" fmla="val 9600"/>
             </a:avLst>
           </a:prstGeom>
           <a:solidFill>
@@ -3581,14 +3676,14 @@
       </p:sp>
       <p:sp>
         <p:nvSpPr>
-          <p:cNvPr id="16" name="Text 14"/>
-          <p:cNvSpPr/>
-          <p:nvPr/>
-        </p:nvSpPr>
-        <p:spPr>
-          <a:xfrm>
-            <a:off x="8074152" y="3666744"/>
-            <a:ext cx="2825496" cy="256032"/>
+          <p:cNvPr id="19" name="Text 17"/>
+          <p:cNvSpPr/>
+          <p:nvPr/>
+        </p:nvSpPr>
+        <p:spPr>
+          <a:xfrm>
+            <a:off x="7799832" y="4645152"/>
+            <a:ext cx="3145536" cy="256032"/>
           </a:xfrm>
           <a:prstGeom prst="rect">
             <a:avLst/>
@@ -3612,7 +3707,7 @@
                 <a:ea typeface="Aptos" pitchFamily="34" charset="-122"/>
                 <a:cs typeface="Aptos" pitchFamily="34" charset="-120"/>
               </a:rPr>
-              <a:t>Use this for</a:t>
+              <a:t>Apply it</a:t>
             </a:r>
             <a:endParaRPr lang="en-US" sz="1300" dirty="0"/>
           </a:p>
@@ -3620,14 +3715,14 @@
       </p:sp>
       <p:sp>
         <p:nvSpPr>
-          <p:cNvPr id="17" name="Text 15"/>
-          <p:cNvSpPr/>
-          <p:nvPr/>
-        </p:nvSpPr>
-        <p:spPr>
-          <a:xfrm>
-            <a:off x="8074152" y="4023360"/>
-            <a:ext cx="2825496" cy="1097280"/>
+          <p:cNvPr id="20" name="Text 18"/>
+          <p:cNvSpPr/>
+          <p:nvPr/>
+        </p:nvSpPr>
+        <p:spPr>
+          <a:xfrm>
+            <a:off x="7799832" y="5001768"/>
+            <a:ext cx="3145536" cy="502920"/>
           </a:xfrm>
           <a:prstGeom prst="rect">
             <a:avLst/>
@@ -3653,7 +3748,7 @@
                 <a:ea typeface="Aptos" pitchFamily="34" charset="-122"/>
                 <a:cs typeface="Aptos" pitchFamily="34" charset="-120"/>
               </a:rPr>
-              <a:t>Connect the concept to public health decisions, safeguards, documentation, or implementation work.</a:t>
+              <a:t>Connect the concept to public health purpose, responsible use, required safeguards, documentation, and the next action a department should take.</a:t>
             </a:r>
             <a:endParaRPr lang="en-US" sz="1550" dirty="0"/>
           </a:p>
@@ -3827,8 +3922,8 @@
         </p:nvSpPr>
         <p:spPr>
           <a:xfrm>
-            <a:off x="9966960" y="6537960"/>
-            <a:ext cx="1645920" cy="201168"/>
+            <a:off x="9646920" y="6537960"/>
+            <a:ext cx="1965960" cy="201168"/>
           </a:xfrm>
           <a:prstGeom prst="rect">
             <a:avLst/>
@@ -3852,7 +3947,7 @@
                 <a:ea typeface="Aptos" pitchFamily="34" charset="-122"/>
                 <a:cs typeface="Aptos" pitchFamily="34" charset="-120"/>
               </a:rPr>
-              <a:t>Â© Paula Soper</a:t>
+              <a:t>Copyright Paula Soper</a:t>
             </a:r>
             <a:endParaRPr lang="en-US" sz="800" dirty="0"/>
           </a:p>
@@ -3899,77 +3994,13 @@
       </p:sp>
       <p:sp>
         <p:nvSpPr>
-          <p:cNvPr id="8" name="Shape 6"/>
+          <p:cNvPr id="8" name="Text 6"/>
           <p:cNvSpPr/>
           <p:nvPr/>
         </p:nvSpPr>
         <p:spPr>
           <a:xfrm>
             <a:off x="640080" y="658368"/>
-            <a:ext cx="420624" cy="420624"/>
-          </a:xfrm>
-          <a:prstGeom prst="ellipse">
-            <a:avLst/>
-          </a:prstGeom>
-          <a:solidFill>
-            <a:srgbClr val="0068B7"/>
-          </a:solidFill>
-          <a:ln w="12700">
-            <a:solidFill>
-              <a:srgbClr val="0068B7"/>
-            </a:solidFill>
-            <a:prstDash val="solid"/>
-          </a:ln>
-        </p:spPr>
-      </p:sp>
-      <p:sp>
-        <p:nvSpPr>
-          <p:cNvPr id="9" name="Text 7"/>
-          <p:cNvSpPr/>
-          <p:nvPr/>
-        </p:nvSpPr>
-        <p:spPr>
-          <a:xfrm>
-            <a:off x="640080" y="731520"/>
-            <a:ext cx="420624" cy="164592"/>
-          </a:xfrm>
-          <a:prstGeom prst="rect">
-            <a:avLst/>
-          </a:prstGeom>
-          <a:noFill/>
-          <a:ln/>
-        </p:spPr>
-        <p:txBody>
-          <a:bodyPr wrap="square" lIns="0" tIns="0" rIns="0" bIns="0" rtlCol="0" anchor="ctr"/>
-          <a:lstStyle/>
-          <a:p>
-            <a:pPr algn="ctr" indent="0" marL="0">
-              <a:buNone/>
-            </a:pPr>
-            <a:r>
-              <a:rPr lang="en-US" sz="1100" b="1" dirty="0">
-                <a:solidFill>
-                  <a:srgbClr val="FFFFFF"/>
-                </a:solidFill>
-                <a:latin typeface="Aptos" pitchFamily="34" charset="0"/>
-                <a:ea typeface="Aptos" pitchFamily="34" charset="-122"/>
-                <a:cs typeface="Aptos" pitchFamily="34" charset="-120"/>
-              </a:rPr>
-              <a:t>6</a:t>
-            </a:r>
-            <a:endParaRPr lang="en-US" sz="1100" dirty="0"/>
-          </a:p>
-        </p:txBody>
-      </p:sp>
-      <p:sp>
-        <p:nvSpPr>
-          <p:cNvPr id="10" name="Text 8"/>
-          <p:cNvSpPr/>
-          <p:nvPr/>
-        </p:nvSpPr>
-        <p:spPr>
-          <a:xfrm>
-            <a:off x="640080" y="621792"/>
             <a:ext cx="10881360" cy="713232"/>
           </a:xfrm>
           <a:prstGeom prst="rect">
@@ -4004,14 +4035,14 @@
       </p:sp>
       <p:sp>
         <p:nvSpPr>
-          <p:cNvPr id="11" name="Text 9"/>
+          <p:cNvPr id="9" name="Text 7"/>
           <p:cNvSpPr/>
           <p:nvPr/>
         </p:nvSpPr>
         <p:spPr>
           <a:xfrm>
             <a:off x="868680" y="1508760"/>
-            <a:ext cx="6537960" cy="4160520"/>
+            <a:ext cx="6309360" cy="4160520"/>
           </a:xfrm>
           <a:prstGeom prst="rect">
             <a:avLst/>
@@ -4070,18 +4101,18 @@
       </p:sp>
       <p:sp>
         <p:nvSpPr>
-          <p:cNvPr id="12" name="Shape 10"/>
-          <p:cNvSpPr/>
-          <p:nvPr/>
-        </p:nvSpPr>
-        <p:spPr>
-          <a:xfrm>
-            <a:off x="7909560" y="1417320"/>
-            <a:ext cx="3154680" cy="1828800"/>
+          <p:cNvPr id="10" name="Shape 8"/>
+          <p:cNvSpPr/>
+          <p:nvPr/>
+        </p:nvSpPr>
+        <p:spPr>
+          <a:xfrm>
+            <a:off x="7635240" y="1325880"/>
+            <a:ext cx="3474720" cy="1325880"/>
           </a:xfrm>
           <a:prstGeom prst="roundRect">
             <a:avLst>
-              <a:gd name="adj" fmla="val 6000"/>
+              <a:gd name="adj" fmla="val 8276"/>
             </a:avLst>
           </a:prstGeom>
           <a:solidFill>
@@ -4097,14 +4128,14 @@
       </p:sp>
       <p:sp>
         <p:nvSpPr>
-          <p:cNvPr id="13" name="Text 11"/>
-          <p:cNvSpPr/>
-          <p:nvPr/>
-        </p:nvSpPr>
-        <p:spPr>
-          <a:xfrm>
-            <a:off x="8074152" y="1563624"/>
-            <a:ext cx="2825496" cy="256032"/>
+          <p:cNvPr id="11" name="Text 9"/>
+          <p:cNvSpPr/>
+          <p:nvPr/>
+        </p:nvSpPr>
+        <p:spPr>
+          <a:xfrm>
+            <a:off x="7799832" y="1472184"/>
+            <a:ext cx="3145536" cy="256032"/>
           </a:xfrm>
           <a:prstGeom prst="rect">
             <a:avLst/>
@@ -4128,7 +4159,7 @@
                 <a:ea typeface="Aptos" pitchFamily="34" charset="-122"/>
                 <a:cs typeface="Aptos" pitchFamily="34" charset="-120"/>
               </a:rPr>
-              <a:t>Key idea</a:t>
+              <a:t>Core concept</a:t>
             </a:r>
             <a:endParaRPr lang="en-US" sz="1300" dirty="0"/>
           </a:p>
@@ -4136,14 +4167,14 @@
       </p:sp>
       <p:sp>
         <p:nvSpPr>
-          <p:cNvPr id="14" name="Text 12"/>
-          <p:cNvSpPr/>
-          <p:nvPr/>
-        </p:nvSpPr>
-        <p:spPr>
-          <a:xfrm>
-            <a:off x="8074152" y="1920240"/>
-            <a:ext cx="2825496" cy="1188720"/>
+          <p:cNvPr id="12" name="Text 10"/>
+          <p:cNvSpPr/>
+          <p:nvPr/>
+        </p:nvSpPr>
+        <p:spPr>
+          <a:xfrm>
+            <a:off x="7799832" y="1828800"/>
+            <a:ext cx="3145536" cy="685800"/>
           </a:xfrm>
           <a:prstGeom prst="rect">
             <a:avLst/>
@@ -4177,18 +4208,159 @@
       </p:sp>
       <p:sp>
         <p:nvSpPr>
-          <p:cNvPr id="15" name="Shape 13"/>
-          <p:cNvSpPr/>
-          <p:nvPr/>
-        </p:nvSpPr>
-        <p:spPr>
-          <a:xfrm>
-            <a:off x="7909560" y="3520440"/>
-            <a:ext cx="3154680" cy="1737360"/>
+          <p:cNvPr id="13" name="Shape 11"/>
+          <p:cNvSpPr/>
+          <p:nvPr/>
+        </p:nvSpPr>
+        <p:spPr>
+          <a:xfrm>
+            <a:off x="7635240" y="2788920"/>
+            <a:ext cx="3474720" cy="1536192"/>
           </a:xfrm>
           <a:prstGeom prst="roundRect">
             <a:avLst>
-              <a:gd name="adj" fmla="val 6316"/>
+              <a:gd name="adj" fmla="val 7143"/>
+            </a:avLst>
+          </a:prstGeom>
+          <a:solidFill>
+            <a:srgbClr val="FFFFFF">
+              <a:alpha val="88000"/>
+            </a:srgbClr>
+          </a:solidFill>
+          <a:ln w="12700">
+            <a:solidFill>
+              <a:srgbClr val="D6E8F2"/>
+            </a:solidFill>
+            <a:prstDash val="solid"/>
+          </a:ln>
+        </p:spPr>
+      </p:sp>
+      <p:sp>
+        <p:nvSpPr>
+          <p:cNvPr id="14" name="Shape 12"/>
+          <p:cNvSpPr/>
+          <p:nvPr/>
+        </p:nvSpPr>
+        <p:spPr>
+          <a:xfrm>
+            <a:off x="8074152" y="3291840"/>
+            <a:ext cx="2596896" cy="749808"/>
+          </a:xfrm>
+          <a:prstGeom prst="rect">
+            <a:avLst/>
+          </a:prstGeom>
+          <a:solidFill>
+            <a:srgbClr val="EAF6F8"/>
+          </a:solidFill>
+          <a:ln w="12700">
+            <a:solidFill>
+              <a:srgbClr val="8ABBD8"/>
+            </a:solidFill>
+            <a:prstDash val="solid"/>
+          </a:ln>
+        </p:spPr>
+      </p:sp>
+      <p:sp>
+        <p:nvSpPr>
+          <p:cNvPr id="15" name="Shape 13"/>
+          <p:cNvSpPr/>
+          <p:nvPr/>
+        </p:nvSpPr>
+        <p:spPr>
+          <a:xfrm>
+            <a:off x="8202168" y="3721608"/>
+            <a:ext cx="2340864" cy="0"/>
+          </a:xfrm>
+          <a:prstGeom prst="line">
+            <a:avLst/>
+          </a:prstGeom>
+          <a:noFill/>
+          <a:ln w="19050">
+            <a:solidFill>
+              <a:srgbClr val="0068B7"/>
+            </a:solidFill>
+            <a:prstDash val="solid"/>
+          </a:ln>
+        </p:spPr>
+      </p:sp>
+      <p:sp>
+        <p:nvSpPr>
+          <p:cNvPr id="16" name="Shape 14"/>
+          <p:cNvSpPr/>
+          <p:nvPr/>
+        </p:nvSpPr>
+        <p:spPr>
+          <a:xfrm>
+            <a:off x="9198864" y="4206240"/>
+            <a:ext cx="347472" cy="347472"/>
+          </a:xfrm>
+          <a:prstGeom prst="ellipse">
+            <a:avLst/>
+          </a:prstGeom>
+          <a:solidFill>
+            <a:srgbClr val="2F8A28"/>
+          </a:solidFill>
+          <a:ln w="12700">
+            <a:solidFill>
+              <a:srgbClr val="2F8A28"/>
+            </a:solidFill>
+            <a:prstDash val="solid"/>
+          </a:ln>
+        </p:spPr>
+      </p:sp>
+      <p:sp>
+        <p:nvSpPr>
+          <p:cNvPr id="17" name="Text 15"/>
+          <p:cNvSpPr/>
+          <p:nvPr/>
+        </p:nvSpPr>
+        <p:spPr>
+          <a:xfrm>
+            <a:off x="7909560" y="3977640"/>
+            <a:ext cx="2926080" cy="182880"/>
+          </a:xfrm>
+          <a:prstGeom prst="rect">
+            <a:avLst/>
+          </a:prstGeom>
+          <a:noFill/>
+          <a:ln/>
+        </p:spPr>
+        <p:txBody>
+          <a:bodyPr wrap="square" lIns="0" tIns="0" rIns="0" bIns="0" rtlCol="0" anchor="ctr"/>
+          <a:lstStyle/>
+          <a:p>
+            <a:pPr algn="ctr" indent="0" marL="0">
+              <a:buNone/>
+            </a:pPr>
+            <a:r>
+              <a:rPr lang="en-US" sz="1000" dirty="0">
+                <a:solidFill>
+                  <a:srgbClr val="003A63"/>
+                </a:solidFill>
+                <a:latin typeface="Aptos" pitchFamily="34" charset="0"/>
+                <a:ea typeface="Aptos" pitchFamily="34" charset="-122"/>
+                <a:cs typeface="Aptos" pitchFamily="34" charset="-120"/>
+              </a:rPr>
+              <a:t>Concept to action</a:t>
+            </a:r>
+            <a:endParaRPr lang="en-US" sz="1000" dirty="0"/>
+          </a:p>
+        </p:txBody>
+      </p:sp>
+      <p:sp>
+        <p:nvSpPr>
+          <p:cNvPr id="18" name="Shape 16"/>
+          <p:cNvSpPr/>
+          <p:nvPr/>
+        </p:nvSpPr>
+        <p:spPr>
+          <a:xfrm>
+            <a:off x="7635240" y="4498848"/>
+            <a:ext cx="3474720" cy="1143000"/>
+          </a:xfrm>
+          <a:prstGeom prst="roundRect">
+            <a:avLst>
+              <a:gd name="adj" fmla="val 9600"/>
             </a:avLst>
           </a:prstGeom>
           <a:solidFill>
@@ -4204,14 +4376,14 @@
       </p:sp>
       <p:sp>
         <p:nvSpPr>
-          <p:cNvPr id="16" name="Text 14"/>
-          <p:cNvSpPr/>
-          <p:nvPr/>
-        </p:nvSpPr>
-        <p:spPr>
-          <a:xfrm>
-            <a:off x="8074152" y="3666744"/>
-            <a:ext cx="2825496" cy="256032"/>
+          <p:cNvPr id="19" name="Text 17"/>
+          <p:cNvSpPr/>
+          <p:nvPr/>
+        </p:nvSpPr>
+        <p:spPr>
+          <a:xfrm>
+            <a:off x="7799832" y="4645152"/>
+            <a:ext cx="3145536" cy="256032"/>
           </a:xfrm>
           <a:prstGeom prst="rect">
             <a:avLst/>
@@ -4235,7 +4407,7 @@
                 <a:ea typeface="Aptos" pitchFamily="34" charset="-122"/>
                 <a:cs typeface="Aptos" pitchFamily="34" charset="-120"/>
               </a:rPr>
-              <a:t>Use this for</a:t>
+              <a:t>Apply it</a:t>
             </a:r>
             <a:endParaRPr lang="en-US" sz="1300" dirty="0"/>
           </a:p>
@@ -4243,14 +4415,14 @@
       </p:sp>
       <p:sp>
         <p:nvSpPr>
-          <p:cNvPr id="17" name="Text 15"/>
-          <p:cNvSpPr/>
-          <p:nvPr/>
-        </p:nvSpPr>
-        <p:spPr>
-          <a:xfrm>
-            <a:off x="8074152" y="4023360"/>
-            <a:ext cx="2825496" cy="1097280"/>
+          <p:cNvPr id="20" name="Text 18"/>
+          <p:cNvSpPr/>
+          <p:nvPr/>
+        </p:nvSpPr>
+        <p:spPr>
+          <a:xfrm>
+            <a:off x="7799832" y="5001768"/>
+            <a:ext cx="3145536" cy="502920"/>
           </a:xfrm>
           <a:prstGeom prst="rect">
             <a:avLst/>
@@ -4276,7 +4448,7 @@
                 <a:ea typeface="Aptos" pitchFamily="34" charset="-122"/>
                 <a:cs typeface="Aptos" pitchFamily="34" charset="-120"/>
               </a:rPr>
-              <a:t>Connect the concept to public health decisions, safeguards, documentation, or implementation work.</a:t>
+              <a:t>Connect the concept to public health purpose, responsible use, required safeguards, documentation, and the next action a department should take.</a:t>
             </a:r>
             <a:endParaRPr lang="en-US" sz="1550" dirty="0"/>
           </a:p>
@@ -4450,8 +4622,8 @@
         </p:nvSpPr>
         <p:spPr>
           <a:xfrm>
-            <a:off x="9966960" y="6537960"/>
-            <a:ext cx="1645920" cy="201168"/>
+            <a:off x="9646920" y="6537960"/>
+            <a:ext cx="1965960" cy="201168"/>
           </a:xfrm>
           <a:prstGeom prst="rect">
             <a:avLst/>
@@ -4475,7 +4647,7 @@
                 <a:ea typeface="Aptos" pitchFamily="34" charset="-122"/>
                 <a:cs typeface="Aptos" pitchFamily="34" charset="-120"/>
               </a:rPr>
-              <a:t>Â© Paula Soper</a:t>
+              <a:t>Copyright Paula Soper</a:t>
             </a:r>
             <a:endParaRPr lang="en-US" sz="800" dirty="0"/>
           </a:p>
@@ -4522,77 +4694,13 @@
       </p:sp>
       <p:sp>
         <p:nvSpPr>
-          <p:cNvPr id="8" name="Shape 6"/>
+          <p:cNvPr id="8" name="Text 6"/>
           <p:cNvSpPr/>
           <p:nvPr/>
         </p:nvSpPr>
         <p:spPr>
           <a:xfrm>
             <a:off x="640080" y="658368"/>
-            <a:ext cx="420624" cy="420624"/>
-          </a:xfrm>
-          <a:prstGeom prst="ellipse">
-            <a:avLst/>
-          </a:prstGeom>
-          <a:solidFill>
-            <a:srgbClr val="0068B7"/>
-          </a:solidFill>
-          <a:ln w="12700">
-            <a:solidFill>
-              <a:srgbClr val="0068B7"/>
-            </a:solidFill>
-            <a:prstDash val="solid"/>
-          </a:ln>
-        </p:spPr>
-      </p:sp>
-      <p:sp>
-        <p:nvSpPr>
-          <p:cNvPr id="9" name="Text 7"/>
-          <p:cNvSpPr/>
-          <p:nvPr/>
-        </p:nvSpPr>
-        <p:spPr>
-          <a:xfrm>
-            <a:off x="640080" y="731520"/>
-            <a:ext cx="420624" cy="164592"/>
-          </a:xfrm>
-          <a:prstGeom prst="rect">
-            <a:avLst/>
-          </a:prstGeom>
-          <a:noFill/>
-          <a:ln/>
-        </p:spPr>
-        <p:txBody>
-          <a:bodyPr wrap="square" lIns="0" tIns="0" rIns="0" bIns="0" rtlCol="0" anchor="ctr"/>
-          <a:lstStyle/>
-          <a:p>
-            <a:pPr algn="ctr" indent="0" marL="0">
-              <a:buNone/>
-            </a:pPr>
-            <a:r>
-              <a:rPr lang="en-US" sz="1100" b="1" dirty="0">
-                <a:solidFill>
-                  <a:srgbClr val="FFFFFF"/>
-                </a:solidFill>
-                <a:latin typeface="Aptos" pitchFamily="34" charset="0"/>
-                <a:ea typeface="Aptos" pitchFamily="34" charset="-122"/>
-                <a:cs typeface="Aptos" pitchFamily="34" charset="-120"/>
-              </a:rPr>
-              <a:t>7</a:t>
-            </a:r>
-            <a:endParaRPr lang="en-US" sz="1100" dirty="0"/>
-          </a:p>
-        </p:txBody>
-      </p:sp>
-      <p:sp>
-        <p:nvSpPr>
-          <p:cNvPr id="10" name="Text 8"/>
-          <p:cNvSpPr/>
-          <p:nvPr/>
-        </p:nvSpPr>
-        <p:spPr>
-          <a:xfrm>
-            <a:off x="640080" y="621792"/>
             <a:ext cx="10881360" cy="713232"/>
           </a:xfrm>
           <a:prstGeom prst="rect">
@@ -4627,14 +4735,14 @@
       </p:sp>
       <p:sp>
         <p:nvSpPr>
-          <p:cNvPr id="11" name="Text 9"/>
+          <p:cNvPr id="9" name="Text 7"/>
           <p:cNvSpPr/>
           <p:nvPr/>
         </p:nvSpPr>
         <p:spPr>
           <a:xfrm>
             <a:off x="868680" y="1508760"/>
-            <a:ext cx="6537960" cy="4160520"/>
+            <a:ext cx="6309360" cy="4160520"/>
           </a:xfrm>
           <a:prstGeom prst="rect">
             <a:avLst/>
@@ -4693,18 +4801,18 @@
       </p:sp>
       <p:sp>
         <p:nvSpPr>
-          <p:cNvPr id="12" name="Shape 10"/>
-          <p:cNvSpPr/>
-          <p:nvPr/>
-        </p:nvSpPr>
-        <p:spPr>
-          <a:xfrm>
-            <a:off x="7909560" y="1417320"/>
-            <a:ext cx="3154680" cy="1828800"/>
+          <p:cNvPr id="10" name="Shape 8"/>
+          <p:cNvSpPr/>
+          <p:nvPr/>
+        </p:nvSpPr>
+        <p:spPr>
+          <a:xfrm>
+            <a:off x="7635240" y="1325880"/>
+            <a:ext cx="3474720" cy="1325880"/>
           </a:xfrm>
           <a:prstGeom prst="roundRect">
             <a:avLst>
-              <a:gd name="adj" fmla="val 6000"/>
+              <a:gd name="adj" fmla="val 8276"/>
             </a:avLst>
           </a:prstGeom>
           <a:solidFill>
@@ -4720,14 +4828,14 @@
       </p:sp>
       <p:sp>
         <p:nvSpPr>
-          <p:cNvPr id="13" name="Text 11"/>
-          <p:cNvSpPr/>
-          <p:nvPr/>
-        </p:nvSpPr>
-        <p:spPr>
-          <a:xfrm>
-            <a:off x="8074152" y="1563624"/>
-            <a:ext cx="2825496" cy="256032"/>
+          <p:cNvPr id="11" name="Text 9"/>
+          <p:cNvSpPr/>
+          <p:nvPr/>
+        </p:nvSpPr>
+        <p:spPr>
+          <a:xfrm>
+            <a:off x="7799832" y="1472184"/>
+            <a:ext cx="3145536" cy="256032"/>
           </a:xfrm>
           <a:prstGeom prst="rect">
             <a:avLst/>
@@ -4751,7 +4859,7 @@
                 <a:ea typeface="Aptos" pitchFamily="34" charset="-122"/>
                 <a:cs typeface="Aptos" pitchFamily="34" charset="-120"/>
               </a:rPr>
-              <a:t>Key idea</a:t>
+              <a:t>Risk check</a:t>
             </a:r>
             <a:endParaRPr lang="en-US" sz="1300" dirty="0"/>
           </a:p>
@@ -4759,14 +4867,14 @@
       </p:sp>
       <p:sp>
         <p:nvSpPr>
-          <p:cNvPr id="14" name="Text 12"/>
-          <p:cNvSpPr/>
-          <p:nvPr/>
-        </p:nvSpPr>
-        <p:spPr>
-          <a:xfrm>
-            <a:off x="8074152" y="1920240"/>
-            <a:ext cx="2825496" cy="1188720"/>
+          <p:cNvPr id="12" name="Text 10"/>
+          <p:cNvSpPr/>
+          <p:nvPr/>
+        </p:nvSpPr>
+        <p:spPr>
+          <a:xfrm>
+            <a:off x="7799832" y="1828800"/>
+            <a:ext cx="3145536" cy="685800"/>
           </a:xfrm>
           <a:prstGeom prst="rect">
             <a:avLst/>
@@ -4800,18 +4908,171 @@
       </p:sp>
       <p:sp>
         <p:nvSpPr>
-          <p:cNvPr id="15" name="Shape 13"/>
-          <p:cNvSpPr/>
-          <p:nvPr/>
-        </p:nvSpPr>
-        <p:spPr>
-          <a:xfrm>
-            <a:off x="7909560" y="3520440"/>
-            <a:ext cx="3154680" cy="1737360"/>
+          <p:cNvPr id="13" name="Shape 11"/>
+          <p:cNvSpPr/>
+          <p:nvPr/>
+        </p:nvSpPr>
+        <p:spPr>
+          <a:xfrm>
+            <a:off x="7635240" y="2788920"/>
+            <a:ext cx="3474720" cy="1536192"/>
           </a:xfrm>
           <a:prstGeom prst="roundRect">
             <a:avLst>
-              <a:gd name="adj" fmla="val 6316"/>
+              <a:gd name="adj" fmla="val 7143"/>
+            </a:avLst>
+          </a:prstGeom>
+          <a:solidFill>
+            <a:srgbClr val="FFFFFF">
+              <a:alpha val="88000"/>
+            </a:srgbClr>
+          </a:solidFill>
+          <a:ln w="12700">
+            <a:solidFill>
+              <a:srgbClr val="D6E8F2"/>
+            </a:solidFill>
+            <a:prstDash val="solid"/>
+          </a:ln>
+        </p:spPr>
+      </p:sp>
+      <p:sp>
+        <p:nvSpPr>
+          <p:cNvPr id="14" name="Shape 12"/>
+          <p:cNvSpPr/>
+          <p:nvPr/>
+        </p:nvSpPr>
+        <p:spPr>
+          <a:xfrm>
+            <a:off x="8046720" y="3108960"/>
+            <a:ext cx="2651760" cy="896112"/>
+          </a:xfrm>
+          <a:prstGeom prst="arc">
+            <a:avLst/>
+          </a:prstGeom>
+          <a:noFill/>
+          <a:ln w="25400">
+            <a:solidFill>
+              <a:srgbClr val="0068B7"/>
+            </a:solidFill>
+            <a:prstDash val="solid"/>
+          </a:ln>
+        </p:spPr>
+      </p:sp>
+      <p:sp>
+        <p:nvSpPr>
+          <p:cNvPr id="15" name="Text 13"/>
+          <p:cNvSpPr/>
+          <p:nvPr/>
+        </p:nvSpPr>
+        <p:spPr>
+          <a:xfrm>
+            <a:off x="7909560" y="3099816"/>
+            <a:ext cx="2926080" cy="256032"/>
+          </a:xfrm>
+          <a:prstGeom prst="rect">
+            <a:avLst/>
+          </a:prstGeom>
+          <a:noFill/>
+          <a:ln/>
+        </p:spPr>
+        <p:txBody>
+          <a:bodyPr wrap="square" lIns="0" tIns="0" rIns="0" bIns="0" rtlCol="0" anchor="ctr"/>
+          <a:lstStyle/>
+          <a:p>
+            <a:pPr algn="ctr" indent="0" marL="0">
+              <a:buNone/>
+            </a:pPr>
+            <a:r>
+              <a:rPr lang="en-US" sz="1500" b="1" dirty="0">
+                <a:solidFill>
+                  <a:srgbClr val="003A63"/>
+                </a:solidFill>
+                <a:latin typeface="Aptos" pitchFamily="34" charset="0"/>
+                <a:ea typeface="Aptos" pitchFamily="34" charset="-122"/>
+                <a:cs typeface="Aptos" pitchFamily="34" charset="-120"/>
+              </a:rPr>
+              <a:t>Risk</a:t>
+            </a:r>
+            <a:endParaRPr lang="en-US" sz="1500" dirty="0"/>
+          </a:p>
+        </p:txBody>
+      </p:sp>
+      <p:sp>
+        <p:nvSpPr>
+          <p:cNvPr id="16" name="Shape 14"/>
+          <p:cNvSpPr/>
+          <p:nvPr/>
+        </p:nvSpPr>
+        <p:spPr>
+          <a:xfrm>
+            <a:off x="8366760" y="3639312"/>
+            <a:ext cx="2011680" cy="0"/>
+          </a:xfrm>
+          <a:prstGeom prst="line">
+            <a:avLst/>
+          </a:prstGeom>
+          <a:noFill/>
+          <a:ln w="63500">
+            <a:solidFill>
+              <a:srgbClr val="2F8A28"/>
+            </a:solidFill>
+            <a:prstDash val="solid"/>
+          </a:ln>
+        </p:spPr>
+      </p:sp>
+      <p:sp>
+        <p:nvSpPr>
+          <p:cNvPr id="17" name="Text 15"/>
+          <p:cNvSpPr/>
+          <p:nvPr/>
+        </p:nvSpPr>
+        <p:spPr>
+          <a:xfrm>
+            <a:off x="7909560" y="3849624"/>
+            <a:ext cx="2926080" cy="164592"/>
+          </a:xfrm>
+          <a:prstGeom prst="rect">
+            <a:avLst/>
+          </a:prstGeom>
+          <a:noFill/>
+          <a:ln/>
+        </p:spPr>
+        <p:txBody>
+          <a:bodyPr wrap="square" lIns="0" tIns="0" rIns="0" bIns="0" rtlCol="0" anchor="ctr"/>
+          <a:lstStyle/>
+          <a:p>
+            <a:pPr algn="ctr" indent="0" marL="0">
+              <a:buNone/>
+            </a:pPr>
+            <a:r>
+              <a:rPr lang="en-US" sz="900" dirty="0">
+                <a:solidFill>
+                  <a:srgbClr val="003A63"/>
+                </a:solidFill>
+                <a:latin typeface="Aptos" pitchFamily="34" charset="0"/>
+                <a:ea typeface="Aptos" pitchFamily="34" charset="-122"/>
+                <a:cs typeface="Aptos" pitchFamily="34" charset="-120"/>
+              </a:rPr>
+              <a:t>Human review</a:t>
+            </a:r>
+            <a:endParaRPr lang="en-US" sz="900" dirty="0"/>
+          </a:p>
+        </p:txBody>
+      </p:sp>
+      <p:sp>
+        <p:nvSpPr>
+          <p:cNvPr id="18" name="Shape 16"/>
+          <p:cNvSpPr/>
+          <p:nvPr/>
+        </p:nvSpPr>
+        <p:spPr>
+          <a:xfrm>
+            <a:off x="7635240" y="4498848"/>
+            <a:ext cx="3474720" cy="1143000"/>
+          </a:xfrm>
+          <a:prstGeom prst="roundRect">
+            <a:avLst>
+              <a:gd name="adj" fmla="val 9600"/>
             </a:avLst>
           </a:prstGeom>
           <a:solidFill>
@@ -4827,14 +5088,14 @@
       </p:sp>
       <p:sp>
         <p:nvSpPr>
-          <p:cNvPr id="16" name="Text 14"/>
-          <p:cNvSpPr/>
-          <p:nvPr/>
-        </p:nvSpPr>
-        <p:spPr>
-          <a:xfrm>
-            <a:off x="8074152" y="3666744"/>
-            <a:ext cx="2825496" cy="256032"/>
+          <p:cNvPr id="19" name="Text 17"/>
+          <p:cNvSpPr/>
+          <p:nvPr/>
+        </p:nvSpPr>
+        <p:spPr>
+          <a:xfrm>
+            <a:off x="7799832" y="4645152"/>
+            <a:ext cx="3145536" cy="256032"/>
           </a:xfrm>
           <a:prstGeom prst="rect">
             <a:avLst/>
@@ -4858,7 +5119,7 @@
                 <a:ea typeface="Aptos" pitchFamily="34" charset="-122"/>
                 <a:cs typeface="Aptos" pitchFamily="34" charset="-120"/>
               </a:rPr>
-              <a:t>Use this for</a:t>
+              <a:t>Safeguard to plan</a:t>
             </a:r>
             <a:endParaRPr lang="en-US" sz="1300" dirty="0"/>
           </a:p>
@@ -4866,14 +5127,14 @@
       </p:sp>
       <p:sp>
         <p:nvSpPr>
-          <p:cNvPr id="17" name="Text 15"/>
-          <p:cNvSpPr/>
-          <p:nvPr/>
-        </p:nvSpPr>
-        <p:spPr>
-          <a:xfrm>
-            <a:off x="8074152" y="4023360"/>
-            <a:ext cx="2825496" cy="1097280"/>
+          <p:cNvPr id="20" name="Text 18"/>
+          <p:cNvSpPr/>
+          <p:nvPr/>
+        </p:nvSpPr>
+        <p:spPr>
+          <a:xfrm>
+            <a:off x="7799832" y="5001768"/>
+            <a:ext cx="3145536" cy="502920"/>
           </a:xfrm>
           <a:prstGeom prst="rect">
             <a:avLst/>
@@ -4899,7 +5160,7 @@
                 <a:ea typeface="Aptos" pitchFamily="34" charset="-122"/>
                 <a:cs typeface="Aptos" pitchFamily="34" charset="-120"/>
               </a:rPr>
-              <a:t>Connect the concept to public health decisions, safeguards, documentation, or implementation work.</a:t>
+              <a:t>Identify what could go wrong, who could be affected, what safeguards are needed, and what evidence should be reviewed before use expands.</a:t>
             </a:r>
             <a:endParaRPr lang="en-US" sz="1550" dirty="0"/>
           </a:p>
@@ -5073,8 +5334,8 @@
         </p:nvSpPr>
         <p:spPr>
           <a:xfrm>
-            <a:off x="9966960" y="6537960"/>
-            <a:ext cx="1645920" cy="201168"/>
+            <a:off x="9646920" y="6537960"/>
+            <a:ext cx="1965960" cy="201168"/>
           </a:xfrm>
           <a:prstGeom prst="rect">
             <a:avLst/>
@@ -5098,7 +5359,7 @@
                 <a:ea typeface="Aptos" pitchFamily="34" charset="-122"/>
                 <a:cs typeface="Aptos" pitchFamily="34" charset="-120"/>
               </a:rPr>
-              <a:t>Â© Paula Soper</a:t>
+              <a:t>Copyright Paula Soper</a:t>
             </a:r>
             <a:endParaRPr lang="en-US" sz="800" dirty="0"/>
           </a:p>
@@ -5193,7 +5454,7 @@
         <p:spPr>
           <a:xfrm>
             <a:off x="868680" y="1508760"/>
-            <a:ext cx="6537960" cy="4160520"/>
+            <a:ext cx="6309360" cy="4160520"/>
           </a:xfrm>
           <a:prstGeom prst="rect">
             <a:avLst/>
@@ -5258,12 +5519,12 @@
         </p:nvSpPr>
         <p:spPr>
           <a:xfrm>
-            <a:off x="7909560" y="1417320"/>
-            <a:ext cx="3154680" cy="1828800"/>
+            <a:off x="7635240" y="1325880"/>
+            <a:ext cx="3474720" cy="1325880"/>
           </a:xfrm>
           <a:prstGeom prst="roundRect">
             <a:avLst>
-              <a:gd name="adj" fmla="val 6000"/>
+              <a:gd name="adj" fmla="val 8276"/>
             </a:avLst>
           </a:prstGeom>
           <a:solidFill>
@@ -5285,8 +5546,8 @@
         </p:nvSpPr>
         <p:spPr>
           <a:xfrm>
-            <a:off x="8074152" y="1563624"/>
-            <a:ext cx="2825496" cy="256032"/>
+            <a:off x="7799832" y="1472184"/>
+            <a:ext cx="3145536" cy="256032"/>
           </a:xfrm>
           <a:prstGeom prst="rect">
             <a:avLst/>
@@ -5310,7 +5571,7 @@
                 <a:ea typeface="Aptos" pitchFamily="34" charset="-122"/>
                 <a:cs typeface="Aptos" pitchFamily="34" charset="-120"/>
               </a:rPr>
-              <a:t>Key idea</a:t>
+              <a:t>Risk check</a:t>
             </a:r>
             <a:endParaRPr lang="en-US" sz="1300" dirty="0"/>
           </a:p>
@@ -5324,8 +5585,8 @@
         </p:nvSpPr>
         <p:spPr>
           <a:xfrm>
-            <a:off x="8074152" y="1920240"/>
-            <a:ext cx="2825496" cy="1188720"/>
+            <a:off x="7799832" y="1828800"/>
+            <a:ext cx="3145536" cy="685800"/>
           </a:xfrm>
           <a:prstGeom prst="rect">
             <a:avLst/>
@@ -5365,12 +5626,165 @@
         </p:nvSpPr>
         <p:spPr>
           <a:xfrm>
-            <a:off x="7909560" y="3520440"/>
-            <a:ext cx="3154680" cy="1737360"/>
+            <a:off x="7635240" y="2788920"/>
+            <a:ext cx="3474720" cy="1536192"/>
           </a:xfrm>
           <a:prstGeom prst="roundRect">
             <a:avLst>
-              <a:gd name="adj" fmla="val 6316"/>
+              <a:gd name="adj" fmla="val 7143"/>
+            </a:avLst>
+          </a:prstGeom>
+          <a:solidFill>
+            <a:srgbClr val="FFFFFF">
+              <a:alpha val="88000"/>
+            </a:srgbClr>
+          </a:solidFill>
+          <a:ln w="12700">
+            <a:solidFill>
+              <a:srgbClr val="D6E8F2"/>
+            </a:solidFill>
+            <a:prstDash val="solid"/>
+          </a:ln>
+        </p:spPr>
+      </p:sp>
+      <p:sp>
+        <p:nvSpPr>
+          <p:cNvPr id="14" name="Shape 12"/>
+          <p:cNvSpPr/>
+          <p:nvPr/>
+        </p:nvSpPr>
+        <p:spPr>
+          <a:xfrm>
+            <a:off x="8046720" y="3108960"/>
+            <a:ext cx="2651760" cy="896112"/>
+          </a:xfrm>
+          <a:prstGeom prst="arc">
+            <a:avLst/>
+          </a:prstGeom>
+          <a:noFill/>
+          <a:ln w="25400">
+            <a:solidFill>
+              <a:srgbClr val="0068B7"/>
+            </a:solidFill>
+            <a:prstDash val="solid"/>
+          </a:ln>
+        </p:spPr>
+      </p:sp>
+      <p:sp>
+        <p:nvSpPr>
+          <p:cNvPr id="15" name="Text 13"/>
+          <p:cNvSpPr/>
+          <p:nvPr/>
+        </p:nvSpPr>
+        <p:spPr>
+          <a:xfrm>
+            <a:off x="7909560" y="3099816"/>
+            <a:ext cx="2926080" cy="256032"/>
+          </a:xfrm>
+          <a:prstGeom prst="rect">
+            <a:avLst/>
+          </a:prstGeom>
+          <a:noFill/>
+          <a:ln/>
+        </p:spPr>
+        <p:txBody>
+          <a:bodyPr wrap="square" lIns="0" tIns="0" rIns="0" bIns="0" rtlCol="0" anchor="ctr"/>
+          <a:lstStyle/>
+          <a:p>
+            <a:pPr algn="ctr" indent="0" marL="0">
+              <a:buNone/>
+            </a:pPr>
+            <a:r>
+              <a:rPr lang="en-US" sz="1500" b="1" dirty="0">
+                <a:solidFill>
+                  <a:srgbClr val="003A63"/>
+                </a:solidFill>
+                <a:latin typeface="Aptos" pitchFamily="34" charset="0"/>
+                <a:ea typeface="Aptos" pitchFamily="34" charset="-122"/>
+                <a:cs typeface="Aptos" pitchFamily="34" charset="-120"/>
+              </a:rPr>
+              <a:t>Risk</a:t>
+            </a:r>
+            <a:endParaRPr lang="en-US" sz="1500" dirty="0"/>
+          </a:p>
+        </p:txBody>
+      </p:sp>
+      <p:sp>
+        <p:nvSpPr>
+          <p:cNvPr id="16" name="Shape 14"/>
+          <p:cNvSpPr/>
+          <p:nvPr/>
+        </p:nvSpPr>
+        <p:spPr>
+          <a:xfrm>
+            <a:off x="8366760" y="3639312"/>
+            <a:ext cx="2011680" cy="0"/>
+          </a:xfrm>
+          <a:prstGeom prst="line">
+            <a:avLst/>
+          </a:prstGeom>
+          <a:noFill/>
+          <a:ln w="63500">
+            <a:solidFill>
+              <a:srgbClr val="2F8A28"/>
+            </a:solidFill>
+            <a:prstDash val="solid"/>
+          </a:ln>
+        </p:spPr>
+      </p:sp>
+      <p:sp>
+        <p:nvSpPr>
+          <p:cNvPr id="17" name="Text 15"/>
+          <p:cNvSpPr/>
+          <p:nvPr/>
+        </p:nvSpPr>
+        <p:spPr>
+          <a:xfrm>
+            <a:off x="7909560" y="3849624"/>
+            <a:ext cx="2926080" cy="164592"/>
+          </a:xfrm>
+          <a:prstGeom prst="rect">
+            <a:avLst/>
+          </a:prstGeom>
+          <a:noFill/>
+          <a:ln/>
+        </p:spPr>
+        <p:txBody>
+          <a:bodyPr wrap="square" lIns="0" tIns="0" rIns="0" bIns="0" rtlCol="0" anchor="ctr"/>
+          <a:lstStyle/>
+          <a:p>
+            <a:pPr algn="ctr" indent="0" marL="0">
+              <a:buNone/>
+            </a:pPr>
+            <a:r>
+              <a:rPr lang="en-US" sz="900" dirty="0">
+                <a:solidFill>
+                  <a:srgbClr val="003A63"/>
+                </a:solidFill>
+                <a:latin typeface="Aptos" pitchFamily="34" charset="0"/>
+                <a:ea typeface="Aptos" pitchFamily="34" charset="-122"/>
+                <a:cs typeface="Aptos" pitchFamily="34" charset="-120"/>
+              </a:rPr>
+              <a:t>Human review</a:t>
+            </a:r>
+            <a:endParaRPr lang="en-US" sz="900" dirty="0"/>
+          </a:p>
+        </p:txBody>
+      </p:sp>
+      <p:sp>
+        <p:nvSpPr>
+          <p:cNvPr id="18" name="Shape 16"/>
+          <p:cNvSpPr/>
+          <p:nvPr/>
+        </p:nvSpPr>
+        <p:spPr>
+          <a:xfrm>
+            <a:off x="7635240" y="4498848"/>
+            <a:ext cx="3474720" cy="1143000"/>
+          </a:xfrm>
+          <a:prstGeom prst="roundRect">
+            <a:avLst>
+              <a:gd name="adj" fmla="val 9600"/>
             </a:avLst>
           </a:prstGeom>
           <a:solidFill>
@@ -5386,14 +5800,14 @@
       </p:sp>
       <p:sp>
         <p:nvSpPr>
-          <p:cNvPr id="14" name="Text 12"/>
-          <p:cNvSpPr/>
-          <p:nvPr/>
-        </p:nvSpPr>
-        <p:spPr>
-          <a:xfrm>
-            <a:off x="8074152" y="3666744"/>
-            <a:ext cx="2825496" cy="256032"/>
+          <p:cNvPr id="19" name="Text 17"/>
+          <p:cNvSpPr/>
+          <p:nvPr/>
+        </p:nvSpPr>
+        <p:spPr>
+          <a:xfrm>
+            <a:off x="7799832" y="4645152"/>
+            <a:ext cx="3145536" cy="256032"/>
           </a:xfrm>
           <a:prstGeom prst="rect">
             <a:avLst/>
@@ -5417,7 +5831,7 @@
                 <a:ea typeface="Aptos" pitchFamily="34" charset="-122"/>
                 <a:cs typeface="Aptos" pitchFamily="34" charset="-120"/>
               </a:rPr>
-              <a:t>Use this for</a:t>
+              <a:t>Safeguard to plan</a:t>
             </a:r>
             <a:endParaRPr lang="en-US" sz="1300" dirty="0"/>
           </a:p>
@@ -5425,14 +5839,14 @@
       </p:sp>
       <p:sp>
         <p:nvSpPr>
-          <p:cNvPr id="15" name="Text 13"/>
-          <p:cNvSpPr/>
-          <p:nvPr/>
-        </p:nvSpPr>
-        <p:spPr>
-          <a:xfrm>
-            <a:off x="8074152" y="4023360"/>
-            <a:ext cx="2825496" cy="1097280"/>
+          <p:cNvPr id="20" name="Text 18"/>
+          <p:cNvSpPr/>
+          <p:nvPr/>
+        </p:nvSpPr>
+        <p:spPr>
+          <a:xfrm>
+            <a:off x="7799832" y="5001768"/>
+            <a:ext cx="3145536" cy="502920"/>
           </a:xfrm>
           <a:prstGeom prst="rect">
             <a:avLst/>
@@ -5458,7 +5872,7 @@
                 <a:ea typeface="Aptos" pitchFamily="34" charset="-122"/>
                 <a:cs typeface="Aptos" pitchFamily="34" charset="-120"/>
               </a:rPr>
-              <a:t>Connect the concept to public health decisions, safeguards, documentation, or implementation work.</a:t>
+              <a:t>Identify what could go wrong, who could be affected, what safeguards are needed, and what evidence should be reviewed before use expands.</a:t>
             </a:r>
             <a:endParaRPr lang="en-US" sz="1550" dirty="0"/>
           </a:p>
@@ -5632,8 +6046,8 @@
         </p:nvSpPr>
         <p:spPr>
           <a:xfrm>
-            <a:off x="9966960" y="6537960"/>
-            <a:ext cx="1645920" cy="201168"/>
+            <a:off x="9646920" y="6537960"/>
+            <a:ext cx="1965960" cy="201168"/>
           </a:xfrm>
           <a:prstGeom prst="rect">
             <a:avLst/>
@@ -5657,7 +6071,7 @@
                 <a:ea typeface="Aptos" pitchFamily="34" charset="-122"/>
                 <a:cs typeface="Aptos" pitchFamily="34" charset="-120"/>
               </a:rPr>
-              <a:t>Â© Paula Soper</a:t>
+              <a:t>Copyright Paula Soper</a:t>
             </a:r>
             <a:endParaRPr lang="en-US" sz="800" dirty="0"/>
           </a:p>
@@ -5704,17 +6118,262 @@
       </p:sp>
       <p:sp>
         <p:nvSpPr>
-          <p:cNvPr id="8" name="Shape 6"/>
+          <p:cNvPr id="8" name="Text 6"/>
           <p:cNvSpPr/>
           <p:nvPr/>
         </p:nvSpPr>
         <p:spPr>
           <a:xfrm>
             <a:off x="640080" y="658368"/>
-            <a:ext cx="420624" cy="420624"/>
-          </a:xfrm>
-          <a:prstGeom prst="ellipse">
-            <a:avLst/>
+            <a:ext cx="10881360" cy="713232"/>
+          </a:xfrm>
+          <a:prstGeom prst="rect">
+            <a:avLst/>
+          </a:prstGeom>
+          <a:noFill/>
+          <a:ln/>
+        </p:spPr>
+        <p:txBody>
+          <a:bodyPr wrap="square" lIns="0" tIns="0" rIns="0" bIns="0" rtlCol="0" anchor="ctr">
+            <a:normAutofit/>
+          </a:bodyPr>
+          <a:lstStyle/>
+          <a:p>
+            <a:pPr indent="0" marL="0">
+              <a:buNone/>
+            </a:pPr>
+            <a:r>
+              <a:rPr lang="en-US" sz="3400" b="1" dirty="0">
+                <a:solidFill>
+                  <a:srgbClr val="003A63"/>
+                </a:solidFill>
+                <a:latin typeface="Aptos Display" pitchFamily="34" charset="0"/>
+                <a:ea typeface="Aptos Display" pitchFamily="34" charset="-122"/>
+                <a:cs typeface="Aptos Display" pitchFamily="34" charset="-120"/>
+              </a:rPr>
+              <a:t>Application to AI-Supported Workflows</a:t>
+            </a:r>
+            <a:endParaRPr lang="en-US" sz="3400" dirty="0"/>
+          </a:p>
+        </p:txBody>
+      </p:sp>
+      <p:sp>
+        <p:nvSpPr>
+          <p:cNvPr id="9" name="Text 7"/>
+          <p:cNvSpPr/>
+          <p:nvPr/>
+        </p:nvSpPr>
+        <p:spPr>
+          <a:xfrm>
+            <a:off x="868680" y="1508760"/>
+            <a:ext cx="6309360" cy="4160520"/>
+          </a:xfrm>
+          <a:prstGeom prst="rect">
+            <a:avLst/>
+          </a:prstGeom>
+          <a:noFill/>
+          <a:ln/>
+        </p:spPr>
+        <p:txBody>
+          <a:bodyPr wrap="square" lIns="635" tIns="635" rIns="635" bIns="635" rtlCol="0" anchor="t">
+            <a:normAutofit/>
+          </a:bodyPr>
+          <a:lstStyle/>
+          <a:p>
+            <a:r>
+              <a:rPr lang="en-US" sz="2100" dirty="0">
+                <a:solidFill>
+                  <a:srgbClr val="17364A"/>
+                </a:solidFill>
+                <a:latin typeface="Aptos" pitchFamily="34" charset="0"/>
+                <a:ea typeface="Aptos" pitchFamily="34" charset="-122"/>
+                <a:cs typeface="Aptos" pitchFamily="34" charset="-120"/>
+              </a:rPr>
+              <a:t>Generative AI may summarize linked records, so source attribution and linkage confidence should be.</a:t>
+            </a:r>
+            <a:endParaRPr lang="en-US" sz="2100" dirty="0"/>
+          </a:p>
+          <a:p>
+            <a:r>
+              <a:rPr lang="en-US" sz="2100" dirty="0">
+                <a:solidFill>
+                  <a:srgbClr val="17364A"/>
+                </a:solidFill>
+                <a:latin typeface="Aptos" pitchFamily="34" charset="0"/>
+                <a:ea typeface="Aptos" pitchFamily="34" charset="-122"/>
+                <a:cs typeface="Aptos" pitchFamily="34" charset="-120"/>
+              </a:rPr>
+              <a:t>Predictive analytics may use features created from linked records, making match quality part of model.</a:t>
+            </a:r>
+            <a:endParaRPr lang="en-US" sz="2100" dirty="0"/>
+          </a:p>
+          <a:p>
+            <a:r>
+              <a:rPr lang="en-US" sz="2100" dirty="0">
+                <a:solidFill>
+                  <a:srgbClr val="17364A"/>
+                </a:solidFill>
+                <a:latin typeface="Aptos" pitchFamily="34" charset="0"/>
+                <a:ea typeface="Aptos" pitchFamily="34" charset="-122"/>
+                <a:cs typeface="Aptos" pitchFamily="34" charset="-120"/>
+              </a:rPr>
+              <a:t>NLP may extract identifiers from text to support linkage, which requires privacy and accuracy review.</a:t>
+            </a:r>
+            <a:endParaRPr lang="en-US" sz="2100" dirty="0"/>
+          </a:p>
+        </p:txBody>
+      </p:sp>
+      <p:sp>
+        <p:nvSpPr>
+          <p:cNvPr id="10" name="Shape 8"/>
+          <p:cNvSpPr/>
+          <p:nvPr/>
+        </p:nvSpPr>
+        <p:spPr>
+          <a:xfrm>
+            <a:off x="7635240" y="1325880"/>
+            <a:ext cx="3474720" cy="1325880"/>
+          </a:xfrm>
+          <a:prstGeom prst="roundRect">
+            <a:avLst>
+              <a:gd name="adj" fmla="val 8276"/>
+            </a:avLst>
+          </a:prstGeom>
+          <a:solidFill>
+            <a:srgbClr val="EEF8ED"/>
+          </a:solidFill>
+          <a:ln w="12700">
+            <a:solidFill>
+              <a:srgbClr val="B9D7E6"/>
+            </a:solidFill>
+            <a:prstDash val="solid"/>
+          </a:ln>
+        </p:spPr>
+      </p:sp>
+      <p:sp>
+        <p:nvSpPr>
+          <p:cNvPr id="11" name="Text 9"/>
+          <p:cNvSpPr/>
+          <p:nvPr/>
+        </p:nvSpPr>
+        <p:spPr>
+          <a:xfrm>
+            <a:off x="7799832" y="1472184"/>
+            <a:ext cx="3145536" cy="256032"/>
+          </a:xfrm>
+          <a:prstGeom prst="rect">
+            <a:avLst/>
+          </a:prstGeom>
+          <a:noFill/>
+          <a:ln/>
+        </p:spPr>
+        <p:txBody>
+          <a:bodyPr wrap="square" lIns="0" tIns="0" rIns="0" bIns="0" rtlCol="0" anchor="ctr"/>
+          <a:lstStyle/>
+          <a:p>
+            <a:pPr indent="0" marL="0">
+              <a:buNone/>
+            </a:pPr>
+            <a:r>
+              <a:rPr lang="en-US" sz="1300" b="1" dirty="0">
+                <a:solidFill>
+                  <a:srgbClr val="0068B7"/>
+                </a:solidFill>
+                <a:latin typeface="Aptos" pitchFamily="34" charset="0"/>
+                <a:ea typeface="Aptos" pitchFamily="34" charset="-122"/>
+                <a:cs typeface="Aptos" pitchFamily="34" charset="-120"/>
+              </a:rPr>
+              <a:t>Implementation cue</a:t>
+            </a:r>
+            <a:endParaRPr lang="en-US" sz="1300" dirty="0"/>
+          </a:p>
+        </p:txBody>
+      </p:sp>
+      <p:sp>
+        <p:nvSpPr>
+          <p:cNvPr id="12" name="Text 10"/>
+          <p:cNvSpPr/>
+          <p:nvPr/>
+        </p:nvSpPr>
+        <p:spPr>
+          <a:xfrm>
+            <a:off x="7799832" y="1828800"/>
+            <a:ext cx="3145536" cy="685800"/>
+          </a:xfrm>
+          <a:prstGeom prst="rect">
+            <a:avLst/>
+          </a:prstGeom>
+          <a:noFill/>
+          <a:ln/>
+        </p:spPr>
+        <p:txBody>
+          <a:bodyPr wrap="square" lIns="0" tIns="0" rIns="0" bIns="0" rtlCol="0" anchor="t">
+            <a:normAutofit/>
+          </a:bodyPr>
+          <a:lstStyle/>
+          <a:p>
+            <a:pPr indent="0" marL="0">
+              <a:buNone/>
+            </a:pPr>
+            <a:r>
+              <a:rPr lang="en-US" sz="1550" dirty="0">
+                <a:solidFill>
+                  <a:srgbClr val="17364A"/>
+                </a:solidFill>
+                <a:latin typeface="Aptos" pitchFamily="34" charset="0"/>
+                <a:ea typeface="Aptos" pitchFamily="34" charset="-122"/>
+                <a:cs typeface="Aptos" pitchFamily="34" charset="-120"/>
+              </a:rPr>
+              <a:t>Generative AI may summarize linked records, so source attribution and linkage confidence should be.</a:t>
+            </a:r>
+            <a:endParaRPr lang="en-US" sz="1550" dirty="0"/>
+          </a:p>
+        </p:txBody>
+      </p:sp>
+      <p:sp>
+        <p:nvSpPr>
+          <p:cNvPr id="13" name="Shape 11"/>
+          <p:cNvSpPr/>
+          <p:nvPr/>
+        </p:nvSpPr>
+        <p:spPr>
+          <a:xfrm>
+            <a:off x="7635240" y="2788920"/>
+            <a:ext cx="3474720" cy="1536192"/>
+          </a:xfrm>
+          <a:prstGeom prst="roundRect">
+            <a:avLst>
+              <a:gd name="adj" fmla="val 7143"/>
+            </a:avLst>
+          </a:prstGeom>
+          <a:solidFill>
+            <a:srgbClr val="FFFFFF">
+              <a:alpha val="88000"/>
+            </a:srgbClr>
+          </a:solidFill>
+          <a:ln w="12700">
+            <a:solidFill>
+              <a:srgbClr val="D6E8F2"/>
+            </a:solidFill>
+            <a:prstDash val="solid"/>
+          </a:ln>
+        </p:spPr>
+      </p:sp>
+      <p:sp>
+        <p:nvSpPr>
+          <p:cNvPr id="14" name="Shape 12"/>
+          <p:cNvSpPr/>
+          <p:nvPr/>
+        </p:nvSpPr>
+        <p:spPr>
+          <a:xfrm>
+            <a:off x="7927848" y="3319272"/>
+            <a:ext cx="792480" cy="749808"/>
+          </a:xfrm>
+          <a:prstGeom prst="roundRect">
+            <a:avLst>
+              <a:gd name="adj" fmla="val 14634"/>
+            </a:avLst>
           </a:prstGeom>
           <a:solidFill>
             <a:srgbClr val="0068B7"/>
@@ -5729,53 +6388,14 @@
       </p:sp>
       <p:sp>
         <p:nvSpPr>
-          <p:cNvPr id="9" name="Text 7"/>
-          <p:cNvSpPr/>
-          <p:nvPr/>
-        </p:nvSpPr>
-        <p:spPr>
-          <a:xfrm>
-            <a:off x="640080" y="731520"/>
-            <a:ext cx="420624" cy="164592"/>
-          </a:xfrm>
-          <a:prstGeom prst="rect">
-            <a:avLst/>
-          </a:prstGeom>
-          <a:noFill/>
-          <a:ln/>
-        </p:spPr>
-        <p:txBody>
-          <a:bodyPr wrap="square" lIns="0" tIns="0" rIns="0" bIns="0" rtlCol="0" anchor="ctr"/>
-          <a:lstStyle/>
-          <a:p>
-            <a:pPr algn="ctr" indent="0" marL="0">
-              <a:buNone/>
-            </a:pPr>
-            <a:r>
-              <a:rPr lang="en-US" sz="1100" b="1" dirty="0">
-                <a:solidFill>
-                  <a:srgbClr val="FFFFFF"/>
-                </a:solidFill>
-                <a:latin typeface="Aptos" pitchFamily="34" charset="0"/>
-                <a:ea typeface="Aptos" pitchFamily="34" charset="-122"/>
-                <a:cs typeface="Aptos" pitchFamily="34" charset="-120"/>
-              </a:rPr>
-              <a:t>8</a:t>
-            </a:r>
-            <a:endParaRPr lang="en-US" sz="1100" dirty="0"/>
-          </a:p>
-        </p:txBody>
-      </p:sp>
-      <p:sp>
-        <p:nvSpPr>
-          <p:cNvPr id="10" name="Text 8"/>
-          <p:cNvSpPr/>
-          <p:nvPr/>
-        </p:nvSpPr>
-        <p:spPr>
-          <a:xfrm>
-            <a:off x="640080" y="621792"/>
-            <a:ext cx="10881360" cy="713232"/>
+          <p:cNvPr id="15" name="Text 13"/>
+          <p:cNvSpPr/>
+          <p:nvPr/>
+        </p:nvSpPr>
+        <p:spPr>
+          <a:xfrm>
+            <a:off x="8001000" y="3511296"/>
+            <a:ext cx="646176" cy="310896"/>
           </a:xfrm>
           <a:prstGeom prst="rect">
             <a:avLst/>
@@ -5789,112 +6409,46 @@
           </a:bodyPr>
           <a:lstStyle/>
           <a:p>
-            <a:pPr indent="0" marL="0">
-              <a:buNone/>
-            </a:pPr>
-            <a:r>
-              <a:rPr lang="en-US" sz="3400" b="1" dirty="0">
-                <a:solidFill>
-                  <a:srgbClr val="003A63"/>
-                </a:solidFill>
-                <a:latin typeface="Aptos Display" pitchFamily="34" charset="0"/>
-                <a:ea typeface="Aptos Display" pitchFamily="34" charset="-122"/>
-                <a:cs typeface="Aptos Display" pitchFamily="34" charset="-120"/>
-              </a:rPr>
-              <a:t>Application to AI-Supported Workflows</a:t>
-            </a:r>
-            <a:endParaRPr lang="en-US" sz="3400" dirty="0"/>
-          </a:p>
-        </p:txBody>
-      </p:sp>
-      <p:sp>
-        <p:nvSpPr>
-          <p:cNvPr id="11" name="Text 9"/>
-          <p:cNvSpPr/>
-          <p:nvPr/>
-        </p:nvSpPr>
-        <p:spPr>
-          <a:xfrm>
-            <a:off x="868680" y="1508760"/>
-            <a:ext cx="6537960" cy="4160520"/>
-          </a:xfrm>
-          <a:prstGeom prst="rect">
-            <a:avLst/>
-          </a:prstGeom>
-          <a:noFill/>
-          <a:ln/>
-        </p:spPr>
-        <p:txBody>
-          <a:bodyPr wrap="square" lIns="635" tIns="635" rIns="635" bIns="635" rtlCol="0" anchor="t">
-            <a:normAutofit/>
-          </a:bodyPr>
-          <a:lstStyle/>
-          <a:p>
-            <a:r>
-              <a:rPr lang="en-US" sz="2100" dirty="0">
-                <a:solidFill>
-                  <a:srgbClr val="17364A"/>
-                </a:solidFill>
-                <a:latin typeface="Aptos" pitchFamily="34" charset="0"/>
-                <a:ea typeface="Aptos" pitchFamily="34" charset="-122"/>
-                <a:cs typeface="Aptos" pitchFamily="34" charset="-120"/>
-              </a:rPr>
-              <a:t>Generative AI may summarize linked records, so source attribution and linkage confidence should be.</a:t>
-            </a:r>
-            <a:endParaRPr lang="en-US" sz="2100" dirty="0"/>
-          </a:p>
-          <a:p>
-            <a:r>
-              <a:rPr lang="en-US" sz="2100" dirty="0">
-                <a:solidFill>
-                  <a:srgbClr val="17364A"/>
-                </a:solidFill>
-                <a:latin typeface="Aptos" pitchFamily="34" charset="0"/>
-                <a:ea typeface="Aptos" pitchFamily="34" charset="-122"/>
-                <a:cs typeface="Aptos" pitchFamily="34" charset="-120"/>
-              </a:rPr>
-              <a:t>Predictive analytics may use features created from linked records, making match quality part of model.</a:t>
-            </a:r>
-            <a:endParaRPr lang="en-US" sz="2100" dirty="0"/>
-          </a:p>
-          <a:p>
-            <a:r>
-              <a:rPr lang="en-US" sz="2100" dirty="0">
-                <a:solidFill>
-                  <a:srgbClr val="17364A"/>
-                </a:solidFill>
-                <a:latin typeface="Aptos" pitchFamily="34" charset="0"/>
-                <a:ea typeface="Aptos" pitchFamily="34" charset="-122"/>
-                <a:cs typeface="Aptos" pitchFamily="34" charset="-120"/>
-              </a:rPr>
-              <a:t>NLP may extract identifiers from text to support linkage, which requires privacy and accuracy review.</a:t>
-            </a:r>
-            <a:endParaRPr lang="en-US" sz="2100" dirty="0"/>
-          </a:p>
-        </p:txBody>
-      </p:sp>
-      <p:sp>
-        <p:nvSpPr>
-          <p:cNvPr id="12" name="Shape 10"/>
-          <p:cNvSpPr/>
-          <p:nvPr/>
-        </p:nvSpPr>
-        <p:spPr>
-          <a:xfrm>
-            <a:off x="7909560" y="1417320"/>
-            <a:ext cx="3154680" cy="1828800"/>
+            <a:pPr algn="ctr" indent="0" marL="0">
+              <a:buNone/>
+            </a:pPr>
+            <a:r>
+              <a:rPr lang="en-US" sz="1500" b="1" dirty="0">
+                <a:solidFill>
+                  <a:srgbClr val="FFFFFF"/>
+                </a:solidFill>
+                <a:latin typeface="Aptos" pitchFamily="34" charset="0"/>
+                <a:ea typeface="Aptos" pitchFamily="34" charset="-122"/>
+                <a:cs typeface="Aptos" pitchFamily="34" charset="-120"/>
+              </a:rPr>
+              <a:t>Plan</a:t>
+            </a:r>
+            <a:endParaRPr lang="en-US" sz="1500" dirty="0"/>
+          </a:p>
+        </p:txBody>
+      </p:sp>
+      <p:sp>
+        <p:nvSpPr>
+          <p:cNvPr id="16" name="Shape 14"/>
+          <p:cNvSpPr/>
+          <p:nvPr/>
+        </p:nvSpPr>
+        <p:spPr>
+          <a:xfrm>
+            <a:off x="8976360" y="3319272"/>
+            <a:ext cx="792480" cy="749808"/>
           </a:xfrm>
           <a:prstGeom prst="roundRect">
             <a:avLst>
-              <a:gd name="adj" fmla="val 6000"/>
+              <a:gd name="adj" fmla="val 14634"/>
             </a:avLst>
           </a:prstGeom>
           <a:solidFill>
-            <a:srgbClr val="EEF8ED"/>
+            <a:srgbClr val="2F8A28"/>
           </a:solidFill>
           <a:ln w="12700">
             <a:solidFill>
-              <a:srgbClr val="B9D7E6"/>
+              <a:srgbClr val="2F8A28"/>
             </a:solidFill>
             <a:prstDash val="solid"/>
           </a:ln>
@@ -5902,98 +6456,189 @@
       </p:sp>
       <p:sp>
         <p:nvSpPr>
-          <p:cNvPr id="13" name="Text 11"/>
-          <p:cNvSpPr/>
-          <p:nvPr/>
-        </p:nvSpPr>
-        <p:spPr>
-          <a:xfrm>
-            <a:off x="8074152" y="1563624"/>
-            <a:ext cx="2825496" cy="256032"/>
-          </a:xfrm>
-          <a:prstGeom prst="rect">
-            <a:avLst/>
-          </a:prstGeom>
-          <a:noFill/>
-          <a:ln/>
-        </p:spPr>
-        <p:txBody>
-          <a:bodyPr wrap="square" lIns="0" tIns="0" rIns="0" bIns="0" rtlCol="0" anchor="ctr"/>
-          <a:lstStyle/>
-          <a:p>
-            <a:pPr indent="0" marL="0">
-              <a:buNone/>
-            </a:pPr>
-            <a:r>
-              <a:rPr lang="en-US" sz="1300" b="1" dirty="0">
-                <a:solidFill>
-                  <a:srgbClr val="0068B7"/>
-                </a:solidFill>
-                <a:latin typeface="Aptos" pitchFamily="34" charset="0"/>
-                <a:ea typeface="Aptos" pitchFamily="34" charset="-122"/>
-                <a:cs typeface="Aptos" pitchFamily="34" charset="-120"/>
-              </a:rPr>
-              <a:t>Key idea</a:t>
-            </a:r>
-            <a:endParaRPr lang="en-US" sz="1300" dirty="0"/>
-          </a:p>
-        </p:txBody>
-      </p:sp>
-      <p:sp>
-        <p:nvSpPr>
-          <p:cNvPr id="14" name="Text 12"/>
-          <p:cNvSpPr/>
-          <p:nvPr/>
-        </p:nvSpPr>
-        <p:spPr>
-          <a:xfrm>
-            <a:off x="8074152" y="1920240"/>
-            <a:ext cx="2825496" cy="1188720"/>
-          </a:xfrm>
-          <a:prstGeom prst="rect">
-            <a:avLst/>
-          </a:prstGeom>
-          <a:noFill/>
-          <a:ln/>
-        </p:spPr>
-        <p:txBody>
-          <a:bodyPr wrap="square" lIns="0" tIns="0" rIns="0" bIns="0" rtlCol="0" anchor="t">
+          <p:cNvPr id="17" name="Text 15"/>
+          <p:cNvSpPr/>
+          <p:nvPr/>
+        </p:nvSpPr>
+        <p:spPr>
+          <a:xfrm>
+            <a:off x="9049512" y="3511296"/>
+            <a:ext cx="646176" cy="310896"/>
+          </a:xfrm>
+          <a:prstGeom prst="rect">
+            <a:avLst/>
+          </a:prstGeom>
+          <a:noFill/>
+          <a:ln/>
+        </p:spPr>
+        <p:txBody>
+          <a:bodyPr wrap="square" lIns="0" tIns="0" rIns="0" bIns="0" rtlCol="0" anchor="ctr">
             <a:normAutofit/>
           </a:bodyPr>
           <a:lstStyle/>
           <a:p>
-            <a:pPr indent="0" marL="0">
-              <a:buNone/>
-            </a:pPr>
-            <a:r>
-              <a:rPr lang="en-US" sz="1550" dirty="0">
-                <a:solidFill>
-                  <a:srgbClr val="17364A"/>
-                </a:solidFill>
-                <a:latin typeface="Aptos" pitchFamily="34" charset="0"/>
-                <a:ea typeface="Aptos" pitchFamily="34" charset="-122"/>
-                <a:cs typeface="Aptos" pitchFamily="34" charset="-120"/>
-              </a:rPr>
-              <a:t>Generative AI may summarize linked records, so source attribution and linkage confidence should be.</a:t>
-            </a:r>
-            <a:endParaRPr lang="en-US" sz="1550" dirty="0"/>
-          </a:p>
-        </p:txBody>
-      </p:sp>
-      <p:sp>
-        <p:nvSpPr>
-          <p:cNvPr id="15" name="Shape 13"/>
-          <p:cNvSpPr/>
-          <p:nvPr/>
-        </p:nvSpPr>
-        <p:spPr>
-          <a:xfrm>
-            <a:off x="7909560" y="3520440"/>
-            <a:ext cx="3154680" cy="1737360"/>
+            <a:pPr algn="ctr" indent="0" marL="0">
+              <a:buNone/>
+            </a:pPr>
+            <a:r>
+              <a:rPr lang="en-US" sz="1500" b="1" dirty="0">
+                <a:solidFill>
+                  <a:srgbClr val="FFFFFF"/>
+                </a:solidFill>
+                <a:latin typeface="Aptos" pitchFamily="34" charset="0"/>
+                <a:ea typeface="Aptos" pitchFamily="34" charset="-122"/>
+                <a:cs typeface="Aptos" pitchFamily="34" charset="-120"/>
+              </a:rPr>
+              <a:t>Do</a:t>
+            </a:r>
+            <a:endParaRPr lang="en-US" sz="1500" dirty="0"/>
+          </a:p>
+        </p:txBody>
+      </p:sp>
+      <p:sp>
+        <p:nvSpPr>
+          <p:cNvPr id="18" name="Shape 16"/>
+          <p:cNvSpPr/>
+          <p:nvPr/>
+        </p:nvSpPr>
+        <p:spPr>
+          <a:xfrm>
+            <a:off x="10024872" y="3319272"/>
+            <a:ext cx="792480" cy="749808"/>
           </a:xfrm>
           <a:prstGeom prst="roundRect">
             <a:avLst>
-              <a:gd name="adj" fmla="val 6316"/>
+              <a:gd name="adj" fmla="val 14634"/>
+            </a:avLst>
+          </a:prstGeom>
+          <a:solidFill>
+            <a:srgbClr val="D69A2D"/>
+          </a:solidFill>
+          <a:ln w="12700">
+            <a:solidFill>
+              <a:srgbClr val="D69A2D"/>
+            </a:solidFill>
+            <a:prstDash val="solid"/>
+          </a:ln>
+        </p:spPr>
+      </p:sp>
+      <p:sp>
+        <p:nvSpPr>
+          <p:cNvPr id="19" name="Text 17"/>
+          <p:cNvSpPr/>
+          <p:nvPr/>
+        </p:nvSpPr>
+        <p:spPr>
+          <a:xfrm>
+            <a:off x="10098024" y="3511296"/>
+            <a:ext cx="646176" cy="310896"/>
+          </a:xfrm>
+          <a:prstGeom prst="rect">
+            <a:avLst/>
+          </a:prstGeom>
+          <a:noFill/>
+          <a:ln/>
+        </p:spPr>
+        <p:txBody>
+          <a:bodyPr wrap="square" lIns="0" tIns="0" rIns="0" bIns="0" rtlCol="0" anchor="ctr">
+            <a:normAutofit/>
+          </a:bodyPr>
+          <a:lstStyle/>
+          <a:p>
+            <a:pPr algn="ctr" indent="0" marL="0">
+              <a:buNone/>
+            </a:pPr>
+            <a:r>
+              <a:rPr lang="en-US" sz="1500" b="1" dirty="0">
+                <a:solidFill>
+                  <a:srgbClr val="FFFFFF"/>
+                </a:solidFill>
+                <a:latin typeface="Aptos" pitchFamily="34" charset="0"/>
+                <a:ea typeface="Aptos" pitchFamily="34" charset="-122"/>
+                <a:cs typeface="Aptos" pitchFamily="34" charset="-120"/>
+              </a:rPr>
+              <a:t>Review</a:t>
+            </a:r>
+            <a:endParaRPr lang="en-US" sz="1500" dirty="0"/>
+          </a:p>
+        </p:txBody>
+      </p:sp>
+      <p:sp>
+        <p:nvSpPr>
+          <p:cNvPr id="20" name="Shape 18"/>
+          <p:cNvSpPr/>
+          <p:nvPr/>
+        </p:nvSpPr>
+        <p:spPr>
+          <a:xfrm>
+            <a:off x="8293608" y="4389120"/>
+            <a:ext cx="2157984" cy="0"/>
+          </a:xfrm>
+          <a:prstGeom prst="line">
+            <a:avLst/>
+          </a:prstGeom>
+          <a:noFill/>
+          <a:ln w="25400">
+            <a:solidFill>
+              <a:srgbClr val="8ABBD8"/>
+            </a:solidFill>
+            <a:prstDash val="solid"/>
+          </a:ln>
+        </p:spPr>
+      </p:sp>
+      <p:sp>
+        <p:nvSpPr>
+          <p:cNvPr id="21" name="Text 19"/>
+          <p:cNvSpPr/>
+          <p:nvPr/>
+        </p:nvSpPr>
+        <p:spPr>
+          <a:xfrm>
+            <a:off x="7909560" y="3977640"/>
+            <a:ext cx="2926080" cy="182880"/>
+          </a:xfrm>
+          <a:prstGeom prst="rect">
+            <a:avLst/>
+          </a:prstGeom>
+          <a:noFill/>
+          <a:ln/>
+        </p:spPr>
+        <p:txBody>
+          <a:bodyPr wrap="square" lIns="0" tIns="0" rIns="0" bIns="0" rtlCol="0" anchor="ctr"/>
+          <a:lstStyle/>
+          <a:p>
+            <a:pPr algn="ctr" indent="0" marL="0">
+              <a:buNone/>
+            </a:pPr>
+            <a:r>
+              <a:rPr lang="en-US" sz="1000" dirty="0">
+                <a:solidFill>
+                  <a:srgbClr val="003A63"/>
+                </a:solidFill>
+                <a:latin typeface="Aptos" pitchFamily="34" charset="0"/>
+                <a:ea typeface="Aptos" pitchFamily="34" charset="-122"/>
+                <a:cs typeface="Aptos" pitchFamily="34" charset="-120"/>
+              </a:rPr>
+              <a:t>Dependencies visible</a:t>
+            </a:r>
+            <a:endParaRPr lang="en-US" sz="1000" dirty="0"/>
+          </a:p>
+        </p:txBody>
+      </p:sp>
+      <p:sp>
+        <p:nvSpPr>
+          <p:cNvPr id="22" name="Shape 20"/>
+          <p:cNvSpPr/>
+          <p:nvPr/>
+        </p:nvSpPr>
+        <p:spPr>
+          <a:xfrm>
+            <a:off x="7635240" y="4498848"/>
+            <a:ext cx="3474720" cy="1143000"/>
+          </a:xfrm>
+          <a:prstGeom prst="roundRect">
+            <a:avLst>
+              <a:gd name="adj" fmla="val 9600"/>
             </a:avLst>
           </a:prstGeom>
           <a:solidFill>
@@ -6009,14 +6654,14 @@
       </p:sp>
       <p:sp>
         <p:nvSpPr>
-          <p:cNvPr id="16" name="Text 14"/>
-          <p:cNvSpPr/>
-          <p:nvPr/>
-        </p:nvSpPr>
-        <p:spPr>
-          <a:xfrm>
-            <a:off x="8074152" y="3666744"/>
-            <a:ext cx="2825496" cy="256032"/>
+          <p:cNvPr id="23" name="Text 21"/>
+          <p:cNvSpPr/>
+          <p:nvPr/>
+        </p:nvSpPr>
+        <p:spPr>
+          <a:xfrm>
+            <a:off x="7799832" y="4645152"/>
+            <a:ext cx="3145536" cy="256032"/>
           </a:xfrm>
           <a:prstGeom prst="rect">
             <a:avLst/>
@@ -6040,7 +6685,7 @@
                 <a:ea typeface="Aptos" pitchFamily="34" charset="-122"/>
                 <a:cs typeface="Aptos" pitchFamily="34" charset="-120"/>
               </a:rPr>
-              <a:t>Use this for</a:t>
+              <a:t>Next action</a:t>
             </a:r>
             <a:endParaRPr lang="en-US" sz="1300" dirty="0"/>
           </a:p>
@@ -6048,14 +6693,14 @@
       </p:sp>
       <p:sp>
         <p:nvSpPr>
-          <p:cNvPr id="17" name="Text 15"/>
-          <p:cNvSpPr/>
-          <p:nvPr/>
-        </p:nvSpPr>
-        <p:spPr>
-          <a:xfrm>
-            <a:off x="8074152" y="4023360"/>
-            <a:ext cx="2825496" cy="1097280"/>
+          <p:cNvPr id="24" name="Text 22"/>
+          <p:cNvSpPr/>
+          <p:nvPr/>
+        </p:nvSpPr>
+        <p:spPr>
+          <a:xfrm>
+            <a:off x="7799832" y="5001768"/>
+            <a:ext cx="3145536" cy="502920"/>
           </a:xfrm>
           <a:prstGeom prst="rect">
             <a:avLst/>
@@ -6081,7 +6726,7 @@
                 <a:ea typeface="Aptos" pitchFamily="34" charset="-122"/>
                 <a:cs typeface="Aptos" pitchFamily="34" charset="-120"/>
               </a:rPr>
-              <a:t>Connect the concept to public health decisions, safeguards, documentation, or implementation work.</a:t>
+              <a:t>Use the concept to clarify workflow changes, dependencies, staffing, procurement requirements, training needs, and implementation checkpoints.</a:t>
             </a:r>
             <a:endParaRPr lang="en-US" sz="1550" dirty="0"/>
           </a:p>
@@ -6255,8 +6900,8 @@
         </p:nvSpPr>
         <p:spPr>
           <a:xfrm>
-            <a:off x="9966960" y="6537960"/>
-            <a:ext cx="1645920" cy="201168"/>
+            <a:off x="9646920" y="6537960"/>
+            <a:ext cx="1965960" cy="201168"/>
           </a:xfrm>
           <a:prstGeom prst="rect">
             <a:avLst/>
@@ -6280,7 +6925,7 @@
                 <a:ea typeface="Aptos" pitchFamily="34" charset="-122"/>
                 <a:cs typeface="Aptos" pitchFamily="34" charset="-120"/>
               </a:rPr>
-              <a:t>Â© Paula Soper</a:t>
+              <a:t>Copyright Paula Soper</a:t>
             </a:r>
             <a:endParaRPr lang="en-US" sz="800" dirty="0"/>
           </a:p>
@@ -6327,77 +6972,13 @@
       </p:sp>
       <p:sp>
         <p:nvSpPr>
-          <p:cNvPr id="8" name="Shape 6"/>
+          <p:cNvPr id="8" name="Text 6"/>
           <p:cNvSpPr/>
           <p:nvPr/>
         </p:nvSpPr>
         <p:spPr>
           <a:xfrm>
             <a:off x="640080" y="658368"/>
-            <a:ext cx="420624" cy="420624"/>
-          </a:xfrm>
-          <a:prstGeom prst="ellipse">
-            <a:avLst/>
-          </a:prstGeom>
-          <a:solidFill>
-            <a:srgbClr val="0068B7"/>
-          </a:solidFill>
-          <a:ln w="12700">
-            <a:solidFill>
-              <a:srgbClr val="0068B7"/>
-            </a:solidFill>
-            <a:prstDash val="solid"/>
-          </a:ln>
-        </p:spPr>
-      </p:sp>
-      <p:sp>
-        <p:nvSpPr>
-          <p:cNvPr id="9" name="Text 7"/>
-          <p:cNvSpPr/>
-          <p:nvPr/>
-        </p:nvSpPr>
-        <p:spPr>
-          <a:xfrm>
-            <a:off x="640080" y="731520"/>
-            <a:ext cx="420624" cy="164592"/>
-          </a:xfrm>
-          <a:prstGeom prst="rect">
-            <a:avLst/>
-          </a:prstGeom>
-          <a:noFill/>
-          <a:ln/>
-        </p:spPr>
-        <p:txBody>
-          <a:bodyPr wrap="square" lIns="0" tIns="0" rIns="0" bIns="0" rtlCol="0" anchor="ctr"/>
-          <a:lstStyle/>
-          <a:p>
-            <a:pPr algn="ctr" indent="0" marL="0">
-              <a:buNone/>
-            </a:pPr>
-            <a:r>
-              <a:rPr lang="en-US" sz="1100" b="1" dirty="0">
-                <a:solidFill>
-                  <a:srgbClr val="FFFFFF"/>
-                </a:solidFill>
-                <a:latin typeface="Aptos" pitchFamily="34" charset="0"/>
-                <a:ea typeface="Aptos" pitchFamily="34" charset="-122"/>
-                <a:cs typeface="Aptos" pitchFamily="34" charset="-120"/>
-              </a:rPr>
-              <a:t>9</a:t>
-            </a:r>
-            <a:endParaRPr lang="en-US" sz="1100" dirty="0"/>
-          </a:p>
-        </p:txBody>
-      </p:sp>
-      <p:sp>
-        <p:nvSpPr>
-          <p:cNvPr id="10" name="Text 8"/>
-          <p:cNvSpPr/>
-          <p:nvPr/>
-        </p:nvSpPr>
-        <p:spPr>
-          <a:xfrm>
-            <a:off x="640080" y="621792"/>
             <a:ext cx="10881360" cy="713232"/>
           </a:xfrm>
           <a:prstGeom prst="rect">
@@ -6432,14 +7013,14 @@
       </p:sp>
       <p:sp>
         <p:nvSpPr>
-          <p:cNvPr id="11" name="Text 9"/>
+          <p:cNvPr id="9" name="Text 7"/>
           <p:cNvSpPr/>
           <p:nvPr/>
         </p:nvSpPr>
         <p:spPr>
           <a:xfrm>
             <a:off x="868680" y="1508760"/>
-            <a:ext cx="6537960" cy="4160520"/>
+            <a:ext cx="6309360" cy="4160520"/>
           </a:xfrm>
           <a:prstGeom prst="rect">
             <a:avLst/>
@@ -6498,18 +7079,18 @@
       </p:sp>
       <p:sp>
         <p:nvSpPr>
-          <p:cNvPr id="12" name="Shape 10"/>
-          <p:cNvSpPr/>
-          <p:nvPr/>
-        </p:nvSpPr>
-        <p:spPr>
-          <a:xfrm>
-            <a:off x="7909560" y="1417320"/>
-            <a:ext cx="3154680" cy="1828800"/>
+          <p:cNvPr id="10" name="Shape 8"/>
+          <p:cNvSpPr/>
+          <p:nvPr/>
+        </p:nvSpPr>
+        <p:spPr>
+          <a:xfrm>
+            <a:off x="7635240" y="1325880"/>
+            <a:ext cx="3474720" cy="1325880"/>
           </a:xfrm>
           <a:prstGeom prst="roundRect">
             <a:avLst>
-              <a:gd name="adj" fmla="val 6000"/>
+              <a:gd name="adj" fmla="val 8276"/>
             </a:avLst>
           </a:prstGeom>
           <a:solidFill>
@@ -6525,14 +7106,14 @@
       </p:sp>
       <p:sp>
         <p:nvSpPr>
-          <p:cNvPr id="13" name="Text 11"/>
-          <p:cNvSpPr/>
-          <p:nvPr/>
-        </p:nvSpPr>
-        <p:spPr>
-          <a:xfrm>
-            <a:off x="8074152" y="1563624"/>
-            <a:ext cx="2825496" cy="256032"/>
+          <p:cNvPr id="11" name="Text 9"/>
+          <p:cNvSpPr/>
+          <p:nvPr/>
+        </p:nvSpPr>
+        <p:spPr>
+          <a:xfrm>
+            <a:off x="7799832" y="1472184"/>
+            <a:ext cx="3145536" cy="256032"/>
           </a:xfrm>
           <a:prstGeom prst="rect">
             <a:avLst/>
@@ -6556,7 +7137,7 @@
                 <a:ea typeface="Aptos" pitchFamily="34" charset="-122"/>
                 <a:cs typeface="Aptos" pitchFamily="34" charset="-120"/>
               </a:rPr>
-              <a:t>Key idea</a:t>
+              <a:t>Core concept</a:t>
             </a:r>
             <a:endParaRPr lang="en-US" sz="1300" dirty="0"/>
           </a:p>
@@ -6564,14 +7145,14 @@
       </p:sp>
       <p:sp>
         <p:nvSpPr>
-          <p:cNvPr id="14" name="Text 12"/>
-          <p:cNvSpPr/>
-          <p:nvPr/>
-        </p:nvSpPr>
-        <p:spPr>
-          <a:xfrm>
-            <a:off x="8074152" y="1920240"/>
-            <a:ext cx="2825496" cy="1188720"/>
+          <p:cNvPr id="12" name="Text 10"/>
+          <p:cNvSpPr/>
+          <p:nvPr/>
+        </p:nvSpPr>
+        <p:spPr>
+          <a:xfrm>
+            <a:off x="7799832" y="1828800"/>
+            <a:ext cx="3145536" cy="685800"/>
           </a:xfrm>
           <a:prstGeom prst="rect">
             <a:avLst/>
@@ -6605,18 +7186,159 @@
       </p:sp>
       <p:sp>
         <p:nvSpPr>
-          <p:cNvPr id="15" name="Shape 13"/>
-          <p:cNvSpPr/>
-          <p:nvPr/>
-        </p:nvSpPr>
-        <p:spPr>
-          <a:xfrm>
-            <a:off x="7909560" y="3520440"/>
-            <a:ext cx="3154680" cy="1737360"/>
+          <p:cNvPr id="13" name="Shape 11"/>
+          <p:cNvSpPr/>
+          <p:nvPr/>
+        </p:nvSpPr>
+        <p:spPr>
+          <a:xfrm>
+            <a:off x="7635240" y="2788920"/>
+            <a:ext cx="3474720" cy="1536192"/>
           </a:xfrm>
           <a:prstGeom prst="roundRect">
             <a:avLst>
-              <a:gd name="adj" fmla="val 6316"/>
+              <a:gd name="adj" fmla="val 7143"/>
+            </a:avLst>
+          </a:prstGeom>
+          <a:solidFill>
+            <a:srgbClr val="FFFFFF">
+              <a:alpha val="88000"/>
+            </a:srgbClr>
+          </a:solidFill>
+          <a:ln w="12700">
+            <a:solidFill>
+              <a:srgbClr val="D6E8F2"/>
+            </a:solidFill>
+            <a:prstDash val="solid"/>
+          </a:ln>
+        </p:spPr>
+      </p:sp>
+      <p:sp>
+        <p:nvSpPr>
+          <p:cNvPr id="14" name="Shape 12"/>
+          <p:cNvSpPr/>
+          <p:nvPr/>
+        </p:nvSpPr>
+        <p:spPr>
+          <a:xfrm>
+            <a:off x="8074152" y="3291840"/>
+            <a:ext cx="2596896" cy="749808"/>
+          </a:xfrm>
+          <a:prstGeom prst="rect">
+            <a:avLst/>
+          </a:prstGeom>
+          <a:solidFill>
+            <a:srgbClr val="EAF6F8"/>
+          </a:solidFill>
+          <a:ln w="12700">
+            <a:solidFill>
+              <a:srgbClr val="8ABBD8"/>
+            </a:solidFill>
+            <a:prstDash val="solid"/>
+          </a:ln>
+        </p:spPr>
+      </p:sp>
+      <p:sp>
+        <p:nvSpPr>
+          <p:cNvPr id="15" name="Shape 13"/>
+          <p:cNvSpPr/>
+          <p:nvPr/>
+        </p:nvSpPr>
+        <p:spPr>
+          <a:xfrm>
+            <a:off x="8202168" y="3721608"/>
+            <a:ext cx="2340864" cy="0"/>
+          </a:xfrm>
+          <a:prstGeom prst="line">
+            <a:avLst/>
+          </a:prstGeom>
+          <a:noFill/>
+          <a:ln w="19050">
+            <a:solidFill>
+              <a:srgbClr val="0068B7"/>
+            </a:solidFill>
+            <a:prstDash val="solid"/>
+          </a:ln>
+        </p:spPr>
+      </p:sp>
+      <p:sp>
+        <p:nvSpPr>
+          <p:cNvPr id="16" name="Shape 14"/>
+          <p:cNvSpPr/>
+          <p:nvPr/>
+        </p:nvSpPr>
+        <p:spPr>
+          <a:xfrm>
+            <a:off x="9198864" y="4206240"/>
+            <a:ext cx="347472" cy="347472"/>
+          </a:xfrm>
+          <a:prstGeom prst="ellipse">
+            <a:avLst/>
+          </a:prstGeom>
+          <a:solidFill>
+            <a:srgbClr val="2F8A28"/>
+          </a:solidFill>
+          <a:ln w="12700">
+            <a:solidFill>
+              <a:srgbClr val="2F8A28"/>
+            </a:solidFill>
+            <a:prstDash val="solid"/>
+          </a:ln>
+        </p:spPr>
+      </p:sp>
+      <p:sp>
+        <p:nvSpPr>
+          <p:cNvPr id="17" name="Text 15"/>
+          <p:cNvSpPr/>
+          <p:nvPr/>
+        </p:nvSpPr>
+        <p:spPr>
+          <a:xfrm>
+            <a:off x="7909560" y="3977640"/>
+            <a:ext cx="2926080" cy="182880"/>
+          </a:xfrm>
+          <a:prstGeom prst="rect">
+            <a:avLst/>
+          </a:prstGeom>
+          <a:noFill/>
+          <a:ln/>
+        </p:spPr>
+        <p:txBody>
+          <a:bodyPr wrap="square" lIns="0" tIns="0" rIns="0" bIns="0" rtlCol="0" anchor="ctr"/>
+          <a:lstStyle/>
+          <a:p>
+            <a:pPr algn="ctr" indent="0" marL="0">
+              <a:buNone/>
+            </a:pPr>
+            <a:r>
+              <a:rPr lang="en-US" sz="1000" dirty="0">
+                <a:solidFill>
+                  <a:srgbClr val="003A63"/>
+                </a:solidFill>
+                <a:latin typeface="Aptos" pitchFamily="34" charset="0"/>
+                <a:ea typeface="Aptos" pitchFamily="34" charset="-122"/>
+                <a:cs typeface="Aptos" pitchFamily="34" charset="-120"/>
+              </a:rPr>
+              <a:t>Concept to action</a:t>
+            </a:r>
+            <a:endParaRPr lang="en-US" sz="1000" dirty="0"/>
+          </a:p>
+        </p:txBody>
+      </p:sp>
+      <p:sp>
+        <p:nvSpPr>
+          <p:cNvPr id="18" name="Shape 16"/>
+          <p:cNvSpPr/>
+          <p:nvPr/>
+        </p:nvSpPr>
+        <p:spPr>
+          <a:xfrm>
+            <a:off x="7635240" y="4498848"/>
+            <a:ext cx="3474720" cy="1143000"/>
+          </a:xfrm>
+          <a:prstGeom prst="roundRect">
+            <a:avLst>
+              <a:gd name="adj" fmla="val 9600"/>
             </a:avLst>
           </a:prstGeom>
           <a:solidFill>
@@ -6632,14 +7354,14 @@
       </p:sp>
       <p:sp>
         <p:nvSpPr>
-          <p:cNvPr id="16" name="Text 14"/>
-          <p:cNvSpPr/>
-          <p:nvPr/>
-        </p:nvSpPr>
-        <p:spPr>
-          <a:xfrm>
-            <a:off x="8074152" y="3666744"/>
-            <a:ext cx="2825496" cy="256032"/>
+          <p:cNvPr id="19" name="Text 17"/>
+          <p:cNvSpPr/>
+          <p:nvPr/>
+        </p:nvSpPr>
+        <p:spPr>
+          <a:xfrm>
+            <a:off x="7799832" y="4645152"/>
+            <a:ext cx="3145536" cy="256032"/>
           </a:xfrm>
           <a:prstGeom prst="rect">
             <a:avLst/>
@@ -6663,7 +7385,7 @@
                 <a:ea typeface="Aptos" pitchFamily="34" charset="-122"/>
                 <a:cs typeface="Aptos" pitchFamily="34" charset="-120"/>
               </a:rPr>
-              <a:t>Use this for</a:t>
+              <a:t>Apply it</a:t>
             </a:r>
             <a:endParaRPr lang="en-US" sz="1300" dirty="0"/>
           </a:p>
@@ -6671,14 +7393,14 @@
       </p:sp>
       <p:sp>
         <p:nvSpPr>
-          <p:cNvPr id="17" name="Text 15"/>
-          <p:cNvSpPr/>
-          <p:nvPr/>
-        </p:nvSpPr>
-        <p:spPr>
-          <a:xfrm>
-            <a:off x="8074152" y="4023360"/>
-            <a:ext cx="2825496" cy="1097280"/>
+          <p:cNvPr id="20" name="Text 18"/>
+          <p:cNvSpPr/>
+          <p:nvPr/>
+        </p:nvSpPr>
+        <p:spPr>
+          <a:xfrm>
+            <a:off x="7799832" y="5001768"/>
+            <a:ext cx="3145536" cy="502920"/>
           </a:xfrm>
           <a:prstGeom prst="rect">
             <a:avLst/>
@@ -6704,7 +7426,7 @@
                 <a:ea typeface="Aptos" pitchFamily="34" charset="-122"/>
                 <a:cs typeface="Aptos" pitchFamily="34" charset="-120"/>
               </a:rPr>
-              <a:t>Connect the concept to public health decisions, safeguards, documentation, or implementation work.</a:t>
+              <a:t>Connect the concept to public health purpose, responsible use, required safeguards, documentation, and the next action a department should take.</a:t>
             </a:r>
             <a:endParaRPr lang="en-US" sz="1550" dirty="0"/>
           </a:p>
@@ -6878,8 +7600,8 @@
         </p:nvSpPr>
         <p:spPr>
           <a:xfrm>
-            <a:off x="9966960" y="6537960"/>
-            <a:ext cx="1645920" cy="201168"/>
+            <a:off x="9646920" y="6537960"/>
+            <a:ext cx="1965960" cy="201168"/>
           </a:xfrm>
           <a:prstGeom prst="rect">
             <a:avLst/>
@@ -6903,7 +7625,7 @@
                 <a:ea typeface="Aptos" pitchFamily="34" charset="-122"/>
                 <a:cs typeface="Aptos" pitchFamily="34" charset="-120"/>
               </a:rPr>
-              <a:t>Â© Paula Soper</a:t>
+              <a:t>Copyright Paula Soper</a:t>
             </a:r>
             <a:endParaRPr lang="en-US" sz="800" dirty="0"/>
           </a:p>
@@ -6998,7 +7720,7 @@
         <p:spPr>
           <a:xfrm>
             <a:off x="868680" y="1508760"/>
-            <a:ext cx="6537960" cy="4160520"/>
+            <a:ext cx="6309360" cy="4160520"/>
           </a:xfrm>
           <a:prstGeom prst="rect">
             <a:avLst/>
@@ -7049,12 +7771,12 @@
         </p:nvSpPr>
         <p:spPr>
           <a:xfrm>
-            <a:off x="7909560" y="1417320"/>
-            <a:ext cx="3154680" cy="1828800"/>
+            <a:off x="7635240" y="1325880"/>
+            <a:ext cx="3474720" cy="1325880"/>
           </a:xfrm>
           <a:prstGeom prst="roundRect">
             <a:avLst>
-              <a:gd name="adj" fmla="val 6000"/>
+              <a:gd name="adj" fmla="val 8276"/>
             </a:avLst>
           </a:prstGeom>
           <a:solidFill>
@@ -7076,8 +7798,8 @@
         </p:nvSpPr>
         <p:spPr>
           <a:xfrm>
-            <a:off x="8074152" y="1563624"/>
-            <a:ext cx="2825496" cy="256032"/>
+            <a:off x="7799832" y="1472184"/>
+            <a:ext cx="3145536" cy="256032"/>
           </a:xfrm>
           <a:prstGeom prst="rect">
             <a:avLst/>
@@ -7101,7 +7823,7 @@
                 <a:ea typeface="Aptos" pitchFamily="34" charset="-122"/>
                 <a:cs typeface="Aptos" pitchFamily="34" charset="-120"/>
               </a:rPr>
-              <a:t>Key idea</a:t>
+              <a:t>Core concept</a:t>
             </a:r>
             <a:endParaRPr lang="en-US" sz="1300" dirty="0"/>
           </a:p>
@@ -7115,8 +7837,8 @@
         </p:nvSpPr>
         <p:spPr>
           <a:xfrm>
-            <a:off x="8074152" y="1920240"/>
-            <a:ext cx="2825496" cy="1188720"/>
+            <a:off x="7799832" y="1828800"/>
+            <a:ext cx="3145536" cy="685800"/>
           </a:xfrm>
           <a:prstGeom prst="rect">
             <a:avLst/>
@@ -7156,12 +7878,153 @@
         </p:nvSpPr>
         <p:spPr>
           <a:xfrm>
-            <a:off x="7909560" y="3520440"/>
-            <a:ext cx="3154680" cy="1737360"/>
+            <a:off x="7635240" y="2788920"/>
+            <a:ext cx="3474720" cy="1536192"/>
           </a:xfrm>
           <a:prstGeom prst="roundRect">
             <a:avLst>
-              <a:gd name="adj" fmla="val 6316"/>
+              <a:gd name="adj" fmla="val 7143"/>
+            </a:avLst>
+          </a:prstGeom>
+          <a:solidFill>
+            <a:srgbClr val="FFFFFF">
+              <a:alpha val="88000"/>
+            </a:srgbClr>
+          </a:solidFill>
+          <a:ln w="12700">
+            <a:solidFill>
+              <a:srgbClr val="D6E8F2"/>
+            </a:solidFill>
+            <a:prstDash val="solid"/>
+          </a:ln>
+        </p:spPr>
+      </p:sp>
+      <p:sp>
+        <p:nvSpPr>
+          <p:cNvPr id="14" name="Shape 12"/>
+          <p:cNvSpPr/>
+          <p:nvPr/>
+        </p:nvSpPr>
+        <p:spPr>
+          <a:xfrm>
+            <a:off x="8074152" y="3291840"/>
+            <a:ext cx="2596896" cy="749808"/>
+          </a:xfrm>
+          <a:prstGeom prst="rect">
+            <a:avLst/>
+          </a:prstGeom>
+          <a:solidFill>
+            <a:srgbClr val="EAF6F8"/>
+          </a:solidFill>
+          <a:ln w="12700">
+            <a:solidFill>
+              <a:srgbClr val="8ABBD8"/>
+            </a:solidFill>
+            <a:prstDash val="solid"/>
+          </a:ln>
+        </p:spPr>
+      </p:sp>
+      <p:sp>
+        <p:nvSpPr>
+          <p:cNvPr id="15" name="Shape 13"/>
+          <p:cNvSpPr/>
+          <p:nvPr/>
+        </p:nvSpPr>
+        <p:spPr>
+          <a:xfrm>
+            <a:off x="8202168" y="3721608"/>
+            <a:ext cx="2340864" cy="0"/>
+          </a:xfrm>
+          <a:prstGeom prst="line">
+            <a:avLst/>
+          </a:prstGeom>
+          <a:noFill/>
+          <a:ln w="19050">
+            <a:solidFill>
+              <a:srgbClr val="0068B7"/>
+            </a:solidFill>
+            <a:prstDash val="solid"/>
+          </a:ln>
+        </p:spPr>
+      </p:sp>
+      <p:sp>
+        <p:nvSpPr>
+          <p:cNvPr id="16" name="Shape 14"/>
+          <p:cNvSpPr/>
+          <p:nvPr/>
+        </p:nvSpPr>
+        <p:spPr>
+          <a:xfrm>
+            <a:off x="9198864" y="4206240"/>
+            <a:ext cx="347472" cy="347472"/>
+          </a:xfrm>
+          <a:prstGeom prst="ellipse">
+            <a:avLst/>
+          </a:prstGeom>
+          <a:solidFill>
+            <a:srgbClr val="2F8A28"/>
+          </a:solidFill>
+          <a:ln w="12700">
+            <a:solidFill>
+              <a:srgbClr val="2F8A28"/>
+            </a:solidFill>
+            <a:prstDash val="solid"/>
+          </a:ln>
+        </p:spPr>
+      </p:sp>
+      <p:sp>
+        <p:nvSpPr>
+          <p:cNvPr id="17" name="Text 15"/>
+          <p:cNvSpPr/>
+          <p:nvPr/>
+        </p:nvSpPr>
+        <p:spPr>
+          <a:xfrm>
+            <a:off x="7909560" y="3977640"/>
+            <a:ext cx="2926080" cy="182880"/>
+          </a:xfrm>
+          <a:prstGeom prst="rect">
+            <a:avLst/>
+          </a:prstGeom>
+          <a:noFill/>
+          <a:ln/>
+        </p:spPr>
+        <p:txBody>
+          <a:bodyPr wrap="square" lIns="0" tIns="0" rIns="0" bIns="0" rtlCol="0" anchor="ctr"/>
+          <a:lstStyle/>
+          <a:p>
+            <a:pPr algn="ctr" indent="0" marL="0">
+              <a:buNone/>
+            </a:pPr>
+            <a:r>
+              <a:rPr lang="en-US" sz="1000" dirty="0">
+                <a:solidFill>
+                  <a:srgbClr val="003A63"/>
+                </a:solidFill>
+                <a:latin typeface="Aptos" pitchFamily="34" charset="0"/>
+                <a:ea typeface="Aptos" pitchFamily="34" charset="-122"/>
+                <a:cs typeface="Aptos" pitchFamily="34" charset="-120"/>
+              </a:rPr>
+              <a:t>Concept to action</a:t>
+            </a:r>
+            <a:endParaRPr lang="en-US" sz="1000" dirty="0"/>
+          </a:p>
+        </p:txBody>
+      </p:sp>
+      <p:sp>
+        <p:nvSpPr>
+          <p:cNvPr id="18" name="Shape 16"/>
+          <p:cNvSpPr/>
+          <p:nvPr/>
+        </p:nvSpPr>
+        <p:spPr>
+          <a:xfrm>
+            <a:off x="7635240" y="4498848"/>
+            <a:ext cx="3474720" cy="1143000"/>
+          </a:xfrm>
+          <a:prstGeom prst="roundRect">
+            <a:avLst>
+              <a:gd name="adj" fmla="val 9600"/>
             </a:avLst>
           </a:prstGeom>
           <a:solidFill>
@@ -7177,14 +8040,14 @@
       </p:sp>
       <p:sp>
         <p:nvSpPr>
-          <p:cNvPr id="14" name="Text 12"/>
-          <p:cNvSpPr/>
-          <p:nvPr/>
-        </p:nvSpPr>
-        <p:spPr>
-          <a:xfrm>
-            <a:off x="8074152" y="3666744"/>
-            <a:ext cx="2825496" cy="256032"/>
+          <p:cNvPr id="19" name="Text 17"/>
+          <p:cNvSpPr/>
+          <p:nvPr/>
+        </p:nvSpPr>
+        <p:spPr>
+          <a:xfrm>
+            <a:off x="7799832" y="4645152"/>
+            <a:ext cx="3145536" cy="256032"/>
           </a:xfrm>
           <a:prstGeom prst="rect">
             <a:avLst/>
@@ -7208,7 +8071,7 @@
                 <a:ea typeface="Aptos" pitchFamily="34" charset="-122"/>
                 <a:cs typeface="Aptos" pitchFamily="34" charset="-120"/>
               </a:rPr>
-              <a:t>Use this for</a:t>
+              <a:t>Apply it</a:t>
             </a:r>
             <a:endParaRPr lang="en-US" sz="1300" dirty="0"/>
           </a:p>
@@ -7216,14 +8079,14 @@
       </p:sp>
       <p:sp>
         <p:nvSpPr>
-          <p:cNvPr id="15" name="Text 13"/>
-          <p:cNvSpPr/>
-          <p:nvPr/>
-        </p:nvSpPr>
-        <p:spPr>
-          <a:xfrm>
-            <a:off x="8074152" y="4023360"/>
-            <a:ext cx="2825496" cy="1097280"/>
+          <p:cNvPr id="20" name="Text 18"/>
+          <p:cNvSpPr/>
+          <p:nvPr/>
+        </p:nvSpPr>
+        <p:spPr>
+          <a:xfrm>
+            <a:off x="7799832" y="5001768"/>
+            <a:ext cx="3145536" cy="502920"/>
           </a:xfrm>
           <a:prstGeom prst="rect">
             <a:avLst/>
@@ -7249,7 +8112,7 @@
                 <a:ea typeface="Aptos" pitchFamily="34" charset="-122"/>
                 <a:cs typeface="Aptos" pitchFamily="34" charset="-120"/>
               </a:rPr>
-              <a:t>Connect the concept to public health decisions, safeguards, documentation, or implementation work.</a:t>
+              <a:t>Connect the concept to public health purpose, responsible use, required safeguards, documentation, and the next action a department should take.</a:t>
             </a:r>
             <a:endParaRPr lang="en-US" sz="1550" dirty="0"/>
           </a:p>
@@ -7423,8 +8286,8 @@
         </p:nvSpPr>
         <p:spPr>
           <a:xfrm>
-            <a:off x="9966960" y="6537960"/>
-            <a:ext cx="1645920" cy="201168"/>
+            <a:off x="9646920" y="6537960"/>
+            <a:ext cx="1965960" cy="201168"/>
           </a:xfrm>
           <a:prstGeom prst="rect">
             <a:avLst/>
@@ -7448,7 +8311,7 @@
                 <a:ea typeface="Aptos" pitchFamily="34" charset="-122"/>
                 <a:cs typeface="Aptos" pitchFamily="34" charset="-120"/>
               </a:rPr>
-              <a:t>Â© Paula Soper</a:t>
+              <a:t>Copyright Paula Soper</a:t>
             </a:r>
             <a:endParaRPr lang="en-US" sz="800" dirty="0"/>
           </a:p>
@@ -7495,77 +8358,13 @@
       </p:sp>
       <p:sp>
         <p:nvSpPr>
-          <p:cNvPr id="8" name="Shape 6"/>
+          <p:cNvPr id="8" name="Text 6"/>
           <p:cNvSpPr/>
           <p:nvPr/>
         </p:nvSpPr>
         <p:spPr>
           <a:xfrm>
             <a:off x="640080" y="658368"/>
-            <a:ext cx="420624" cy="420624"/>
-          </a:xfrm>
-          <a:prstGeom prst="ellipse">
-            <a:avLst/>
-          </a:prstGeom>
-          <a:solidFill>
-            <a:srgbClr val="0068B7"/>
-          </a:solidFill>
-          <a:ln w="12700">
-            <a:solidFill>
-              <a:srgbClr val="0068B7"/>
-            </a:solidFill>
-            <a:prstDash val="solid"/>
-          </a:ln>
-        </p:spPr>
-      </p:sp>
-      <p:sp>
-        <p:nvSpPr>
-          <p:cNvPr id="9" name="Text 7"/>
-          <p:cNvSpPr/>
-          <p:nvPr/>
-        </p:nvSpPr>
-        <p:spPr>
-          <a:xfrm>
-            <a:off x="640080" y="731520"/>
-            <a:ext cx="420624" cy="164592"/>
-          </a:xfrm>
-          <a:prstGeom prst="rect">
-            <a:avLst/>
-          </a:prstGeom>
-          <a:noFill/>
-          <a:ln/>
-        </p:spPr>
-        <p:txBody>
-          <a:bodyPr wrap="square" lIns="0" tIns="0" rIns="0" bIns="0" rtlCol="0" anchor="ctr"/>
-          <a:lstStyle/>
-          <a:p>
-            <a:pPr algn="ctr" indent="0" marL="0">
-              <a:buNone/>
-            </a:pPr>
-            <a:r>
-              <a:rPr lang="en-US" sz="1100" b="1" dirty="0">
-                <a:solidFill>
-                  <a:srgbClr val="FFFFFF"/>
-                </a:solidFill>
-                <a:latin typeface="Aptos" pitchFamily="34" charset="0"/>
-                <a:ea typeface="Aptos" pitchFamily="34" charset="-122"/>
-                <a:cs typeface="Aptos" pitchFamily="34" charset="-120"/>
-              </a:rPr>
-              <a:t>10</a:t>
-            </a:r>
-            <a:endParaRPr lang="en-US" sz="1100" dirty="0"/>
-          </a:p>
-        </p:txBody>
-      </p:sp>
-      <p:sp>
-        <p:nvSpPr>
-          <p:cNvPr id="10" name="Text 8"/>
-          <p:cNvSpPr/>
-          <p:nvPr/>
-        </p:nvSpPr>
-        <p:spPr>
-          <a:xfrm>
-            <a:off x="640080" y="621792"/>
             <a:ext cx="10881360" cy="713232"/>
           </a:xfrm>
           <a:prstGeom prst="rect">
@@ -7600,14 +8399,14 @@
       </p:sp>
       <p:sp>
         <p:nvSpPr>
-          <p:cNvPr id="11" name="Text 9"/>
+          <p:cNvPr id="9" name="Text 7"/>
           <p:cNvSpPr/>
           <p:nvPr/>
         </p:nvSpPr>
         <p:spPr>
           <a:xfrm>
             <a:off x="868680" y="1508760"/>
-            <a:ext cx="6537960" cy="4160520"/>
+            <a:ext cx="6309360" cy="4160520"/>
           </a:xfrm>
           <a:prstGeom prst="rect">
             <a:avLst/>
@@ -7652,18 +8451,18 @@
       </p:sp>
       <p:sp>
         <p:nvSpPr>
-          <p:cNvPr id="12" name="Shape 10"/>
-          <p:cNvSpPr/>
-          <p:nvPr/>
-        </p:nvSpPr>
-        <p:spPr>
-          <a:xfrm>
-            <a:off x="7909560" y="1417320"/>
-            <a:ext cx="3154680" cy="1828800"/>
+          <p:cNvPr id="10" name="Shape 8"/>
+          <p:cNvSpPr/>
+          <p:nvPr/>
+        </p:nvSpPr>
+        <p:spPr>
+          <a:xfrm>
+            <a:off x="7635240" y="1325880"/>
+            <a:ext cx="3474720" cy="1325880"/>
           </a:xfrm>
           <a:prstGeom prst="roundRect">
             <a:avLst>
-              <a:gd name="adj" fmla="val 6000"/>
+              <a:gd name="adj" fmla="val 8276"/>
             </a:avLst>
           </a:prstGeom>
           <a:solidFill>
@@ -7679,14 +8478,14 @@
       </p:sp>
       <p:sp>
         <p:nvSpPr>
-          <p:cNvPr id="13" name="Text 11"/>
-          <p:cNvSpPr/>
-          <p:nvPr/>
-        </p:nvSpPr>
-        <p:spPr>
-          <a:xfrm>
-            <a:off x="8074152" y="1563624"/>
-            <a:ext cx="2825496" cy="256032"/>
+          <p:cNvPr id="11" name="Text 9"/>
+          <p:cNvSpPr/>
+          <p:nvPr/>
+        </p:nvSpPr>
+        <p:spPr>
+          <a:xfrm>
+            <a:off x="7799832" y="1472184"/>
+            <a:ext cx="3145536" cy="256032"/>
           </a:xfrm>
           <a:prstGeom prst="rect">
             <a:avLst/>
@@ -7710,7 +8509,7 @@
                 <a:ea typeface="Aptos" pitchFamily="34" charset="-122"/>
                 <a:cs typeface="Aptos" pitchFamily="34" charset="-120"/>
               </a:rPr>
-              <a:t>Key idea</a:t>
+              <a:t>Practice focus</a:t>
             </a:r>
             <a:endParaRPr lang="en-US" sz="1300" dirty="0"/>
           </a:p>
@@ -7718,14 +8517,14 @@
       </p:sp>
       <p:sp>
         <p:nvSpPr>
-          <p:cNvPr id="14" name="Text 12"/>
-          <p:cNvSpPr/>
-          <p:nvPr/>
-        </p:nvSpPr>
-        <p:spPr>
-          <a:xfrm>
-            <a:off x="8074152" y="1920240"/>
-            <a:ext cx="2825496" cy="1188720"/>
+          <p:cNvPr id="12" name="Text 10"/>
+          <p:cNvSpPr/>
+          <p:nvPr/>
+        </p:nvSpPr>
+        <p:spPr>
+          <a:xfrm>
+            <a:off x="7799832" y="1828800"/>
+            <a:ext cx="3145536" cy="685800"/>
           </a:xfrm>
           <a:prstGeom prst="rect">
             <a:avLst/>
@@ -7759,18 +8558,159 @@
       </p:sp>
       <p:sp>
         <p:nvSpPr>
-          <p:cNvPr id="15" name="Shape 13"/>
-          <p:cNvSpPr/>
-          <p:nvPr/>
-        </p:nvSpPr>
-        <p:spPr>
-          <a:xfrm>
-            <a:off x="7909560" y="3520440"/>
-            <a:ext cx="3154680" cy="1737360"/>
+          <p:cNvPr id="13" name="Shape 11"/>
+          <p:cNvSpPr/>
+          <p:nvPr/>
+        </p:nvSpPr>
+        <p:spPr>
+          <a:xfrm>
+            <a:off x="7635240" y="2788920"/>
+            <a:ext cx="3474720" cy="1536192"/>
           </a:xfrm>
           <a:prstGeom prst="roundRect">
             <a:avLst>
-              <a:gd name="adj" fmla="val 6316"/>
+              <a:gd name="adj" fmla="val 7143"/>
+            </a:avLst>
+          </a:prstGeom>
+          <a:solidFill>
+            <a:srgbClr val="FFFFFF">
+              <a:alpha val="88000"/>
+            </a:srgbClr>
+          </a:solidFill>
+          <a:ln w="12700">
+            <a:solidFill>
+              <a:srgbClr val="D6E8F2"/>
+            </a:solidFill>
+            <a:prstDash val="solid"/>
+          </a:ln>
+        </p:spPr>
+      </p:sp>
+      <p:sp>
+        <p:nvSpPr>
+          <p:cNvPr id="14" name="Shape 12"/>
+          <p:cNvSpPr/>
+          <p:nvPr/>
+        </p:nvSpPr>
+        <p:spPr>
+          <a:xfrm>
+            <a:off x="8074152" y="3291840"/>
+            <a:ext cx="2596896" cy="749808"/>
+          </a:xfrm>
+          <a:prstGeom prst="rect">
+            <a:avLst/>
+          </a:prstGeom>
+          <a:solidFill>
+            <a:srgbClr val="EAF6F8"/>
+          </a:solidFill>
+          <a:ln w="12700">
+            <a:solidFill>
+              <a:srgbClr val="8ABBD8"/>
+            </a:solidFill>
+            <a:prstDash val="solid"/>
+          </a:ln>
+        </p:spPr>
+      </p:sp>
+      <p:sp>
+        <p:nvSpPr>
+          <p:cNvPr id="15" name="Shape 13"/>
+          <p:cNvSpPr/>
+          <p:nvPr/>
+        </p:nvSpPr>
+        <p:spPr>
+          <a:xfrm>
+            <a:off x="8202168" y="3721608"/>
+            <a:ext cx="2340864" cy="0"/>
+          </a:xfrm>
+          <a:prstGeom prst="line">
+            <a:avLst/>
+          </a:prstGeom>
+          <a:noFill/>
+          <a:ln w="19050">
+            <a:solidFill>
+              <a:srgbClr val="0068B7"/>
+            </a:solidFill>
+            <a:prstDash val="solid"/>
+          </a:ln>
+        </p:spPr>
+      </p:sp>
+      <p:sp>
+        <p:nvSpPr>
+          <p:cNvPr id="16" name="Shape 14"/>
+          <p:cNvSpPr/>
+          <p:nvPr/>
+        </p:nvSpPr>
+        <p:spPr>
+          <a:xfrm>
+            <a:off x="9198864" y="4206240"/>
+            <a:ext cx="347472" cy="347472"/>
+          </a:xfrm>
+          <a:prstGeom prst="ellipse">
+            <a:avLst/>
+          </a:prstGeom>
+          <a:solidFill>
+            <a:srgbClr val="2F8A28"/>
+          </a:solidFill>
+          <a:ln w="12700">
+            <a:solidFill>
+              <a:srgbClr val="2F8A28"/>
+            </a:solidFill>
+            <a:prstDash val="solid"/>
+          </a:ln>
+        </p:spPr>
+      </p:sp>
+      <p:sp>
+        <p:nvSpPr>
+          <p:cNvPr id="17" name="Text 15"/>
+          <p:cNvSpPr/>
+          <p:nvPr/>
+        </p:nvSpPr>
+        <p:spPr>
+          <a:xfrm>
+            <a:off x="7909560" y="3977640"/>
+            <a:ext cx="2926080" cy="182880"/>
+          </a:xfrm>
+          <a:prstGeom prst="rect">
+            <a:avLst/>
+          </a:prstGeom>
+          <a:noFill/>
+          <a:ln/>
+        </p:spPr>
+        <p:txBody>
+          <a:bodyPr wrap="square" lIns="0" tIns="0" rIns="0" bIns="0" rtlCol="0" anchor="ctr"/>
+          <a:lstStyle/>
+          <a:p>
+            <a:pPr algn="ctr" indent="0" marL="0">
+              <a:buNone/>
+            </a:pPr>
+            <a:r>
+              <a:rPr lang="en-US" sz="1000" dirty="0">
+                <a:solidFill>
+                  <a:srgbClr val="003A63"/>
+                </a:solidFill>
+                <a:latin typeface="Aptos" pitchFamily="34" charset="0"/>
+                <a:ea typeface="Aptos" pitchFamily="34" charset="-122"/>
+                <a:cs typeface="Aptos" pitchFamily="34" charset="-120"/>
+              </a:rPr>
+              <a:t>Concept to action</a:t>
+            </a:r>
+            <a:endParaRPr lang="en-US" sz="1000" dirty="0"/>
+          </a:p>
+        </p:txBody>
+      </p:sp>
+      <p:sp>
+        <p:nvSpPr>
+          <p:cNvPr id="18" name="Shape 16"/>
+          <p:cNvSpPr/>
+          <p:nvPr/>
+        </p:nvSpPr>
+        <p:spPr>
+          <a:xfrm>
+            <a:off x="7635240" y="4498848"/>
+            <a:ext cx="3474720" cy="1143000"/>
+          </a:xfrm>
+          <a:prstGeom prst="roundRect">
+            <a:avLst>
+              <a:gd name="adj" fmla="val 9600"/>
             </a:avLst>
           </a:prstGeom>
           <a:solidFill>
@@ -7786,14 +8726,14 @@
       </p:sp>
       <p:sp>
         <p:nvSpPr>
-          <p:cNvPr id="16" name="Text 14"/>
-          <p:cNvSpPr/>
-          <p:nvPr/>
-        </p:nvSpPr>
-        <p:spPr>
-          <a:xfrm>
-            <a:off x="8074152" y="3666744"/>
-            <a:ext cx="2825496" cy="256032"/>
+          <p:cNvPr id="19" name="Text 17"/>
+          <p:cNvSpPr/>
+          <p:nvPr/>
+        </p:nvSpPr>
+        <p:spPr>
+          <a:xfrm>
+            <a:off x="7799832" y="4645152"/>
+            <a:ext cx="3145536" cy="256032"/>
           </a:xfrm>
           <a:prstGeom prst="rect">
             <a:avLst/>
@@ -7817,7 +8757,7 @@
                 <a:ea typeface="Aptos" pitchFamily="34" charset="-122"/>
                 <a:cs typeface="Aptos" pitchFamily="34" charset="-120"/>
               </a:rPr>
-              <a:t>Use this for</a:t>
+              <a:t>What to produce</a:t>
             </a:r>
             <a:endParaRPr lang="en-US" sz="1300" dirty="0"/>
           </a:p>
@@ -7825,14 +8765,14 @@
       </p:sp>
       <p:sp>
         <p:nvSpPr>
-          <p:cNvPr id="17" name="Text 15"/>
-          <p:cNvSpPr/>
-          <p:nvPr/>
-        </p:nvSpPr>
-        <p:spPr>
-          <a:xfrm>
-            <a:off x="8074152" y="4023360"/>
-            <a:ext cx="2825496" cy="1097280"/>
+          <p:cNvPr id="20" name="Text 18"/>
+          <p:cNvSpPr/>
+          <p:nvPr/>
+        </p:nvSpPr>
+        <p:spPr>
+          <a:xfrm>
+            <a:off x="7799832" y="5001768"/>
+            <a:ext cx="3145536" cy="502920"/>
           </a:xfrm>
           <a:prstGeom prst="rect">
             <a:avLst/>
@@ -7858,7 +8798,7 @@
                 <a:ea typeface="Aptos" pitchFamily="34" charset="-122"/>
                 <a:cs typeface="Aptos" pitchFamily="34" charset="-120"/>
               </a:rPr>
-              <a:t>Connect the concept to public health decisions, safeguards, documentation, or implementation work.</a:t>
+              <a:t>Use the assignment to test whether you can explain the concept, apply it to a realistic public health situation, and identify what would need review before the work moves forward.</a:t>
             </a:r>
             <a:endParaRPr lang="en-US" sz="1550" dirty="0"/>
           </a:p>
@@ -8032,8 +8972,8 @@
         </p:nvSpPr>
         <p:spPr>
           <a:xfrm>
-            <a:off x="9966960" y="6537960"/>
-            <a:ext cx="1645920" cy="201168"/>
+            <a:off x="9646920" y="6537960"/>
+            <a:ext cx="1965960" cy="201168"/>
           </a:xfrm>
           <a:prstGeom prst="rect">
             <a:avLst/>
@@ -8057,7 +8997,7 @@
                 <a:ea typeface="Aptos" pitchFamily="34" charset="-122"/>
                 <a:cs typeface="Aptos" pitchFamily="34" charset="-120"/>
               </a:rPr>
-              <a:t>Â© Paula Soper</a:t>
+              <a:t>Copyright Paula Soper</a:t>
             </a:r>
             <a:endParaRPr lang="en-US" sz="800" dirty="0"/>
           </a:p>
@@ -8104,77 +9044,13 @@
       </p:sp>
       <p:sp>
         <p:nvSpPr>
-          <p:cNvPr id="8" name="Shape 6"/>
+          <p:cNvPr id="8" name="Text 6"/>
           <p:cNvSpPr/>
           <p:nvPr/>
         </p:nvSpPr>
         <p:spPr>
           <a:xfrm>
             <a:off x="640080" y="658368"/>
-            <a:ext cx="420624" cy="420624"/>
-          </a:xfrm>
-          <a:prstGeom prst="ellipse">
-            <a:avLst/>
-          </a:prstGeom>
-          <a:solidFill>
-            <a:srgbClr val="0068B7"/>
-          </a:solidFill>
-          <a:ln w="12700">
-            <a:solidFill>
-              <a:srgbClr val="0068B7"/>
-            </a:solidFill>
-            <a:prstDash val="solid"/>
-          </a:ln>
-        </p:spPr>
-      </p:sp>
-      <p:sp>
-        <p:nvSpPr>
-          <p:cNvPr id="9" name="Text 7"/>
-          <p:cNvSpPr/>
-          <p:nvPr/>
-        </p:nvSpPr>
-        <p:spPr>
-          <a:xfrm>
-            <a:off x="640080" y="731520"/>
-            <a:ext cx="420624" cy="164592"/>
-          </a:xfrm>
-          <a:prstGeom prst="rect">
-            <a:avLst/>
-          </a:prstGeom>
-          <a:noFill/>
-          <a:ln/>
-        </p:spPr>
-        <p:txBody>
-          <a:bodyPr wrap="square" lIns="0" tIns="0" rIns="0" bIns="0" rtlCol="0" anchor="ctr"/>
-          <a:lstStyle/>
-          <a:p>
-            <a:pPr algn="ctr" indent="0" marL="0">
-              <a:buNone/>
-            </a:pPr>
-            <a:r>
-              <a:rPr lang="en-US" sz="1100" b="1" dirty="0">
-                <a:solidFill>
-                  <a:srgbClr val="FFFFFF"/>
-                </a:solidFill>
-                <a:latin typeface="Aptos" pitchFamily="34" charset="0"/>
-                <a:ea typeface="Aptos" pitchFamily="34" charset="-122"/>
-                <a:cs typeface="Aptos" pitchFamily="34" charset="-120"/>
-              </a:rPr>
-              <a:t>11</a:t>
-            </a:r>
-            <a:endParaRPr lang="en-US" sz="1100" dirty="0"/>
-          </a:p>
-        </p:txBody>
-      </p:sp>
-      <p:sp>
-        <p:nvSpPr>
-          <p:cNvPr id="10" name="Text 8"/>
-          <p:cNvSpPr/>
-          <p:nvPr/>
-        </p:nvSpPr>
-        <p:spPr>
-          <a:xfrm>
-            <a:off x="640080" y="621792"/>
             <a:ext cx="10881360" cy="713232"/>
           </a:xfrm>
           <a:prstGeom prst="rect">
@@ -8209,14 +9085,14 @@
       </p:sp>
       <p:sp>
         <p:nvSpPr>
-          <p:cNvPr id="11" name="Text 9"/>
+          <p:cNvPr id="9" name="Text 7"/>
           <p:cNvSpPr/>
           <p:nvPr/>
         </p:nvSpPr>
         <p:spPr>
           <a:xfrm>
             <a:off x="868680" y="1508760"/>
-            <a:ext cx="6537960" cy="4160520"/>
+            <a:ext cx="6309360" cy="4160520"/>
           </a:xfrm>
           <a:prstGeom prst="rect">
             <a:avLst/>
@@ -8275,18 +9151,18 @@
       </p:sp>
       <p:sp>
         <p:nvSpPr>
-          <p:cNvPr id="12" name="Shape 10"/>
-          <p:cNvSpPr/>
-          <p:nvPr/>
-        </p:nvSpPr>
-        <p:spPr>
-          <a:xfrm>
-            <a:off x="7909560" y="1417320"/>
-            <a:ext cx="3154680" cy="1828800"/>
+          <p:cNvPr id="10" name="Shape 8"/>
+          <p:cNvSpPr/>
+          <p:nvPr/>
+        </p:nvSpPr>
+        <p:spPr>
+          <a:xfrm>
+            <a:off x="7635240" y="1325880"/>
+            <a:ext cx="3474720" cy="1325880"/>
           </a:xfrm>
           <a:prstGeom prst="roundRect">
             <a:avLst>
-              <a:gd name="adj" fmla="val 6000"/>
+              <a:gd name="adj" fmla="val 8276"/>
             </a:avLst>
           </a:prstGeom>
           <a:solidFill>
@@ -8302,14 +9178,14 @@
       </p:sp>
       <p:sp>
         <p:nvSpPr>
-          <p:cNvPr id="13" name="Text 11"/>
-          <p:cNvSpPr/>
-          <p:nvPr/>
-        </p:nvSpPr>
-        <p:spPr>
-          <a:xfrm>
-            <a:off x="8074152" y="1563624"/>
-            <a:ext cx="2825496" cy="256032"/>
+          <p:cNvPr id="11" name="Text 9"/>
+          <p:cNvSpPr/>
+          <p:nvPr/>
+        </p:nvSpPr>
+        <p:spPr>
+          <a:xfrm>
+            <a:off x="7799832" y="1472184"/>
+            <a:ext cx="3145536" cy="256032"/>
           </a:xfrm>
           <a:prstGeom prst="rect">
             <a:avLst/>
@@ -8333,7 +9209,7 @@
                 <a:ea typeface="Aptos" pitchFamily="34" charset="-122"/>
                 <a:cs typeface="Aptos" pitchFamily="34" charset="-120"/>
               </a:rPr>
-              <a:t>Key idea</a:t>
+              <a:t>Core concept</a:t>
             </a:r>
             <a:endParaRPr lang="en-US" sz="1300" dirty="0"/>
           </a:p>
@@ -8341,14 +9217,14 @@
       </p:sp>
       <p:sp>
         <p:nvSpPr>
-          <p:cNvPr id="14" name="Text 12"/>
-          <p:cNvSpPr/>
-          <p:nvPr/>
-        </p:nvSpPr>
-        <p:spPr>
-          <a:xfrm>
-            <a:off x="8074152" y="1920240"/>
-            <a:ext cx="2825496" cy="1188720"/>
+          <p:cNvPr id="12" name="Text 10"/>
+          <p:cNvSpPr/>
+          <p:nvPr/>
+        </p:nvSpPr>
+        <p:spPr>
+          <a:xfrm>
+            <a:off x="7799832" y="1828800"/>
+            <a:ext cx="3145536" cy="685800"/>
           </a:xfrm>
           <a:prstGeom prst="rect">
             <a:avLst/>
@@ -8382,18 +9258,159 @@
       </p:sp>
       <p:sp>
         <p:nvSpPr>
-          <p:cNvPr id="15" name="Shape 13"/>
-          <p:cNvSpPr/>
-          <p:nvPr/>
-        </p:nvSpPr>
-        <p:spPr>
-          <a:xfrm>
-            <a:off x="7909560" y="3520440"/>
-            <a:ext cx="3154680" cy="1737360"/>
+          <p:cNvPr id="13" name="Shape 11"/>
+          <p:cNvSpPr/>
+          <p:nvPr/>
+        </p:nvSpPr>
+        <p:spPr>
+          <a:xfrm>
+            <a:off x="7635240" y="2788920"/>
+            <a:ext cx="3474720" cy="1536192"/>
           </a:xfrm>
           <a:prstGeom prst="roundRect">
             <a:avLst>
-              <a:gd name="adj" fmla="val 6316"/>
+              <a:gd name="adj" fmla="val 7143"/>
+            </a:avLst>
+          </a:prstGeom>
+          <a:solidFill>
+            <a:srgbClr val="FFFFFF">
+              <a:alpha val="88000"/>
+            </a:srgbClr>
+          </a:solidFill>
+          <a:ln w="12700">
+            <a:solidFill>
+              <a:srgbClr val="D6E8F2"/>
+            </a:solidFill>
+            <a:prstDash val="solid"/>
+          </a:ln>
+        </p:spPr>
+      </p:sp>
+      <p:sp>
+        <p:nvSpPr>
+          <p:cNvPr id="14" name="Shape 12"/>
+          <p:cNvSpPr/>
+          <p:nvPr/>
+        </p:nvSpPr>
+        <p:spPr>
+          <a:xfrm>
+            <a:off x="8074152" y="3291840"/>
+            <a:ext cx="2596896" cy="749808"/>
+          </a:xfrm>
+          <a:prstGeom prst="rect">
+            <a:avLst/>
+          </a:prstGeom>
+          <a:solidFill>
+            <a:srgbClr val="EAF6F8"/>
+          </a:solidFill>
+          <a:ln w="12700">
+            <a:solidFill>
+              <a:srgbClr val="8ABBD8"/>
+            </a:solidFill>
+            <a:prstDash val="solid"/>
+          </a:ln>
+        </p:spPr>
+      </p:sp>
+      <p:sp>
+        <p:nvSpPr>
+          <p:cNvPr id="15" name="Shape 13"/>
+          <p:cNvSpPr/>
+          <p:nvPr/>
+        </p:nvSpPr>
+        <p:spPr>
+          <a:xfrm>
+            <a:off x="8202168" y="3721608"/>
+            <a:ext cx="2340864" cy="0"/>
+          </a:xfrm>
+          <a:prstGeom prst="line">
+            <a:avLst/>
+          </a:prstGeom>
+          <a:noFill/>
+          <a:ln w="19050">
+            <a:solidFill>
+              <a:srgbClr val="0068B7"/>
+            </a:solidFill>
+            <a:prstDash val="solid"/>
+          </a:ln>
+        </p:spPr>
+      </p:sp>
+      <p:sp>
+        <p:nvSpPr>
+          <p:cNvPr id="16" name="Shape 14"/>
+          <p:cNvSpPr/>
+          <p:nvPr/>
+        </p:nvSpPr>
+        <p:spPr>
+          <a:xfrm>
+            <a:off x="9198864" y="4206240"/>
+            <a:ext cx="347472" cy="347472"/>
+          </a:xfrm>
+          <a:prstGeom prst="ellipse">
+            <a:avLst/>
+          </a:prstGeom>
+          <a:solidFill>
+            <a:srgbClr val="2F8A28"/>
+          </a:solidFill>
+          <a:ln w="12700">
+            <a:solidFill>
+              <a:srgbClr val="2F8A28"/>
+            </a:solidFill>
+            <a:prstDash val="solid"/>
+          </a:ln>
+        </p:spPr>
+      </p:sp>
+      <p:sp>
+        <p:nvSpPr>
+          <p:cNvPr id="17" name="Text 15"/>
+          <p:cNvSpPr/>
+          <p:nvPr/>
+        </p:nvSpPr>
+        <p:spPr>
+          <a:xfrm>
+            <a:off x="7909560" y="3977640"/>
+            <a:ext cx="2926080" cy="182880"/>
+          </a:xfrm>
+          <a:prstGeom prst="rect">
+            <a:avLst/>
+          </a:prstGeom>
+          <a:noFill/>
+          <a:ln/>
+        </p:spPr>
+        <p:txBody>
+          <a:bodyPr wrap="square" lIns="0" tIns="0" rIns="0" bIns="0" rtlCol="0" anchor="ctr"/>
+          <a:lstStyle/>
+          <a:p>
+            <a:pPr algn="ctr" indent="0" marL="0">
+              <a:buNone/>
+            </a:pPr>
+            <a:r>
+              <a:rPr lang="en-US" sz="1000" dirty="0">
+                <a:solidFill>
+                  <a:srgbClr val="003A63"/>
+                </a:solidFill>
+                <a:latin typeface="Aptos" pitchFamily="34" charset="0"/>
+                <a:ea typeface="Aptos" pitchFamily="34" charset="-122"/>
+                <a:cs typeface="Aptos" pitchFamily="34" charset="-120"/>
+              </a:rPr>
+              <a:t>Concept to action</a:t>
+            </a:r>
+            <a:endParaRPr lang="en-US" sz="1000" dirty="0"/>
+          </a:p>
+        </p:txBody>
+      </p:sp>
+      <p:sp>
+        <p:nvSpPr>
+          <p:cNvPr id="18" name="Shape 16"/>
+          <p:cNvSpPr/>
+          <p:nvPr/>
+        </p:nvSpPr>
+        <p:spPr>
+          <a:xfrm>
+            <a:off x="7635240" y="4498848"/>
+            <a:ext cx="3474720" cy="1143000"/>
+          </a:xfrm>
+          <a:prstGeom prst="roundRect">
+            <a:avLst>
+              <a:gd name="adj" fmla="val 9600"/>
             </a:avLst>
           </a:prstGeom>
           <a:solidFill>
@@ -8409,14 +9426,14 @@
       </p:sp>
       <p:sp>
         <p:nvSpPr>
-          <p:cNvPr id="16" name="Text 14"/>
-          <p:cNvSpPr/>
-          <p:nvPr/>
-        </p:nvSpPr>
-        <p:spPr>
-          <a:xfrm>
-            <a:off x="8074152" y="3666744"/>
-            <a:ext cx="2825496" cy="256032"/>
+          <p:cNvPr id="19" name="Text 17"/>
+          <p:cNvSpPr/>
+          <p:nvPr/>
+        </p:nvSpPr>
+        <p:spPr>
+          <a:xfrm>
+            <a:off x="7799832" y="4645152"/>
+            <a:ext cx="3145536" cy="256032"/>
           </a:xfrm>
           <a:prstGeom prst="rect">
             <a:avLst/>
@@ -8440,7 +9457,7 @@
                 <a:ea typeface="Aptos" pitchFamily="34" charset="-122"/>
                 <a:cs typeface="Aptos" pitchFamily="34" charset="-120"/>
               </a:rPr>
-              <a:t>Use this for</a:t>
+              <a:t>Apply it</a:t>
             </a:r>
             <a:endParaRPr lang="en-US" sz="1300" dirty="0"/>
           </a:p>
@@ -8448,14 +9465,14 @@
       </p:sp>
       <p:sp>
         <p:nvSpPr>
-          <p:cNvPr id="17" name="Text 15"/>
-          <p:cNvSpPr/>
-          <p:nvPr/>
-        </p:nvSpPr>
-        <p:spPr>
-          <a:xfrm>
-            <a:off x="8074152" y="4023360"/>
-            <a:ext cx="2825496" cy="1097280"/>
+          <p:cNvPr id="20" name="Text 18"/>
+          <p:cNvSpPr/>
+          <p:nvPr/>
+        </p:nvSpPr>
+        <p:spPr>
+          <a:xfrm>
+            <a:off x="7799832" y="5001768"/>
+            <a:ext cx="3145536" cy="502920"/>
           </a:xfrm>
           <a:prstGeom prst="rect">
             <a:avLst/>
@@ -8481,7 +9498,7 @@
                 <a:ea typeface="Aptos" pitchFamily="34" charset="-122"/>
                 <a:cs typeface="Aptos" pitchFamily="34" charset="-120"/>
               </a:rPr>
-              <a:t>Connect the concept to public health decisions, safeguards, documentation, or implementation work.</a:t>
+              <a:t>Connect the concept to public health purpose, responsible use, required safeguards, documentation, and the next action a department should take.</a:t>
             </a:r>
             <a:endParaRPr lang="en-US" sz="1550" dirty="0"/>
           </a:p>
@@ -8655,8 +9672,8 @@
         </p:nvSpPr>
         <p:spPr>
           <a:xfrm>
-            <a:off x="9966960" y="6537960"/>
-            <a:ext cx="1645920" cy="201168"/>
+            <a:off x="9646920" y="6537960"/>
+            <a:ext cx="1965960" cy="201168"/>
           </a:xfrm>
           <a:prstGeom prst="rect">
             <a:avLst/>
@@ -8680,7 +9697,7 @@
                 <a:ea typeface="Aptos" pitchFamily="34" charset="-122"/>
                 <a:cs typeface="Aptos" pitchFamily="34" charset="-120"/>
               </a:rPr>
-              <a:t>Â© Paula Soper</a:t>
+              <a:t>Copyright Paula Soper</a:t>
             </a:r>
             <a:endParaRPr lang="en-US" sz="800" dirty="0"/>
           </a:p>
@@ -8775,7 +9792,7 @@
         <p:spPr>
           <a:xfrm>
             <a:off x="868680" y="1508760"/>
-            <a:ext cx="6537960" cy="4160520"/>
+            <a:ext cx="6309360" cy="4160520"/>
           </a:xfrm>
           <a:prstGeom prst="rect">
             <a:avLst/>
@@ -8812,12 +9829,12 @@
         </p:nvSpPr>
         <p:spPr>
           <a:xfrm>
-            <a:off x="7909560" y="1417320"/>
-            <a:ext cx="3154680" cy="1828800"/>
+            <a:off x="7635240" y="1325880"/>
+            <a:ext cx="3474720" cy="1325880"/>
           </a:xfrm>
           <a:prstGeom prst="roundRect">
             <a:avLst>
-              <a:gd name="adj" fmla="val 6000"/>
+              <a:gd name="adj" fmla="val 8276"/>
             </a:avLst>
           </a:prstGeom>
           <a:solidFill>
@@ -8839,8 +9856,8 @@
         </p:nvSpPr>
         <p:spPr>
           <a:xfrm>
-            <a:off x="8074152" y="1563624"/>
-            <a:ext cx="2825496" cy="256032"/>
+            <a:off x="7799832" y="1472184"/>
+            <a:ext cx="3145536" cy="256032"/>
           </a:xfrm>
           <a:prstGeom prst="rect">
             <a:avLst/>
@@ -8864,7 +9881,7 @@
                 <a:ea typeface="Aptos" pitchFamily="34" charset="-122"/>
                 <a:cs typeface="Aptos" pitchFamily="34" charset="-120"/>
               </a:rPr>
-              <a:t>Key idea</a:t>
+              <a:t>Core concept</a:t>
             </a:r>
             <a:endParaRPr lang="en-US" sz="1300" dirty="0"/>
           </a:p>
@@ -8878,8 +9895,8 @@
         </p:nvSpPr>
         <p:spPr>
           <a:xfrm>
-            <a:off x="8074152" y="1920240"/>
-            <a:ext cx="2825496" cy="1188720"/>
+            <a:off x="7799832" y="1828800"/>
+            <a:ext cx="3145536" cy="685800"/>
           </a:xfrm>
           <a:prstGeom prst="rect">
             <a:avLst/>
@@ -8919,12 +9936,153 @@
         </p:nvSpPr>
         <p:spPr>
           <a:xfrm>
-            <a:off x="7909560" y="3520440"/>
-            <a:ext cx="3154680" cy="1737360"/>
+            <a:off x="7635240" y="2788920"/>
+            <a:ext cx="3474720" cy="1536192"/>
           </a:xfrm>
           <a:prstGeom prst="roundRect">
             <a:avLst>
-              <a:gd name="adj" fmla="val 6316"/>
+              <a:gd name="adj" fmla="val 7143"/>
+            </a:avLst>
+          </a:prstGeom>
+          <a:solidFill>
+            <a:srgbClr val="FFFFFF">
+              <a:alpha val="88000"/>
+            </a:srgbClr>
+          </a:solidFill>
+          <a:ln w="12700">
+            <a:solidFill>
+              <a:srgbClr val="D6E8F2"/>
+            </a:solidFill>
+            <a:prstDash val="solid"/>
+          </a:ln>
+        </p:spPr>
+      </p:sp>
+      <p:sp>
+        <p:nvSpPr>
+          <p:cNvPr id="14" name="Shape 12"/>
+          <p:cNvSpPr/>
+          <p:nvPr/>
+        </p:nvSpPr>
+        <p:spPr>
+          <a:xfrm>
+            <a:off x="8074152" y="3291840"/>
+            <a:ext cx="2596896" cy="749808"/>
+          </a:xfrm>
+          <a:prstGeom prst="rect">
+            <a:avLst/>
+          </a:prstGeom>
+          <a:solidFill>
+            <a:srgbClr val="EAF6F8"/>
+          </a:solidFill>
+          <a:ln w="12700">
+            <a:solidFill>
+              <a:srgbClr val="8ABBD8"/>
+            </a:solidFill>
+            <a:prstDash val="solid"/>
+          </a:ln>
+        </p:spPr>
+      </p:sp>
+      <p:sp>
+        <p:nvSpPr>
+          <p:cNvPr id="15" name="Shape 13"/>
+          <p:cNvSpPr/>
+          <p:nvPr/>
+        </p:nvSpPr>
+        <p:spPr>
+          <a:xfrm>
+            <a:off x="8202168" y="3721608"/>
+            <a:ext cx="2340864" cy="0"/>
+          </a:xfrm>
+          <a:prstGeom prst="line">
+            <a:avLst/>
+          </a:prstGeom>
+          <a:noFill/>
+          <a:ln w="19050">
+            <a:solidFill>
+              <a:srgbClr val="0068B7"/>
+            </a:solidFill>
+            <a:prstDash val="solid"/>
+          </a:ln>
+        </p:spPr>
+      </p:sp>
+      <p:sp>
+        <p:nvSpPr>
+          <p:cNvPr id="16" name="Shape 14"/>
+          <p:cNvSpPr/>
+          <p:nvPr/>
+        </p:nvSpPr>
+        <p:spPr>
+          <a:xfrm>
+            <a:off x="9198864" y="4206240"/>
+            <a:ext cx="347472" cy="347472"/>
+          </a:xfrm>
+          <a:prstGeom prst="ellipse">
+            <a:avLst/>
+          </a:prstGeom>
+          <a:solidFill>
+            <a:srgbClr val="2F8A28"/>
+          </a:solidFill>
+          <a:ln w="12700">
+            <a:solidFill>
+              <a:srgbClr val="2F8A28"/>
+            </a:solidFill>
+            <a:prstDash val="solid"/>
+          </a:ln>
+        </p:spPr>
+      </p:sp>
+      <p:sp>
+        <p:nvSpPr>
+          <p:cNvPr id="17" name="Text 15"/>
+          <p:cNvSpPr/>
+          <p:nvPr/>
+        </p:nvSpPr>
+        <p:spPr>
+          <a:xfrm>
+            <a:off x="7909560" y="3977640"/>
+            <a:ext cx="2926080" cy="182880"/>
+          </a:xfrm>
+          <a:prstGeom prst="rect">
+            <a:avLst/>
+          </a:prstGeom>
+          <a:noFill/>
+          <a:ln/>
+        </p:spPr>
+        <p:txBody>
+          <a:bodyPr wrap="square" lIns="0" tIns="0" rIns="0" bIns="0" rtlCol="0" anchor="ctr"/>
+          <a:lstStyle/>
+          <a:p>
+            <a:pPr algn="ctr" indent="0" marL="0">
+              <a:buNone/>
+            </a:pPr>
+            <a:r>
+              <a:rPr lang="en-US" sz="1000" dirty="0">
+                <a:solidFill>
+                  <a:srgbClr val="003A63"/>
+                </a:solidFill>
+                <a:latin typeface="Aptos" pitchFamily="34" charset="0"/>
+                <a:ea typeface="Aptos" pitchFamily="34" charset="-122"/>
+                <a:cs typeface="Aptos" pitchFamily="34" charset="-120"/>
+              </a:rPr>
+              <a:t>Concept to action</a:t>
+            </a:r>
+            <a:endParaRPr lang="en-US" sz="1000" dirty="0"/>
+          </a:p>
+        </p:txBody>
+      </p:sp>
+      <p:sp>
+        <p:nvSpPr>
+          <p:cNvPr id="18" name="Shape 16"/>
+          <p:cNvSpPr/>
+          <p:nvPr/>
+        </p:nvSpPr>
+        <p:spPr>
+          <a:xfrm>
+            <a:off x="7635240" y="4498848"/>
+            <a:ext cx="3474720" cy="1143000"/>
+          </a:xfrm>
+          <a:prstGeom prst="roundRect">
+            <a:avLst>
+              <a:gd name="adj" fmla="val 9600"/>
             </a:avLst>
           </a:prstGeom>
           <a:solidFill>
@@ -8940,14 +10098,14 @@
       </p:sp>
       <p:sp>
         <p:nvSpPr>
-          <p:cNvPr id="14" name="Text 12"/>
-          <p:cNvSpPr/>
-          <p:nvPr/>
-        </p:nvSpPr>
-        <p:spPr>
-          <a:xfrm>
-            <a:off x="8074152" y="3666744"/>
-            <a:ext cx="2825496" cy="256032"/>
+          <p:cNvPr id="19" name="Text 17"/>
+          <p:cNvSpPr/>
+          <p:nvPr/>
+        </p:nvSpPr>
+        <p:spPr>
+          <a:xfrm>
+            <a:off x="7799832" y="4645152"/>
+            <a:ext cx="3145536" cy="256032"/>
           </a:xfrm>
           <a:prstGeom prst="rect">
             <a:avLst/>
@@ -8971,7 +10129,7 @@
                 <a:ea typeface="Aptos" pitchFamily="34" charset="-122"/>
                 <a:cs typeface="Aptos" pitchFamily="34" charset="-120"/>
               </a:rPr>
-              <a:t>Use this for</a:t>
+              <a:t>Apply it</a:t>
             </a:r>
             <a:endParaRPr lang="en-US" sz="1300" dirty="0"/>
           </a:p>
@@ -8979,14 +10137,14 @@
       </p:sp>
       <p:sp>
         <p:nvSpPr>
-          <p:cNvPr id="15" name="Text 13"/>
-          <p:cNvSpPr/>
-          <p:nvPr/>
-        </p:nvSpPr>
-        <p:spPr>
-          <a:xfrm>
-            <a:off x="8074152" y="4023360"/>
-            <a:ext cx="2825496" cy="1097280"/>
+          <p:cNvPr id="20" name="Text 18"/>
+          <p:cNvSpPr/>
+          <p:nvPr/>
+        </p:nvSpPr>
+        <p:spPr>
+          <a:xfrm>
+            <a:off x="7799832" y="5001768"/>
+            <a:ext cx="3145536" cy="502920"/>
           </a:xfrm>
           <a:prstGeom prst="rect">
             <a:avLst/>
@@ -9012,7 +10170,7 @@
                 <a:ea typeface="Aptos" pitchFamily="34" charset="-122"/>
                 <a:cs typeface="Aptos" pitchFamily="34" charset="-120"/>
               </a:rPr>
-              <a:t>Connect the concept to public health decisions, safeguards, documentation, or implementation work.</a:t>
+              <a:t>Connect the concept to public health purpose, responsible use, required safeguards, documentation, and the next action a department should take.</a:t>
             </a:r>
             <a:endParaRPr lang="en-US" sz="1550" dirty="0"/>
           </a:p>
@@ -9186,8 +10344,8 @@
         </p:nvSpPr>
         <p:spPr>
           <a:xfrm>
-            <a:off x="9966960" y="6537960"/>
-            <a:ext cx="1645920" cy="201168"/>
+            <a:off x="9646920" y="6537960"/>
+            <a:ext cx="1965960" cy="201168"/>
           </a:xfrm>
           <a:prstGeom prst="rect">
             <a:avLst/>
@@ -9211,7 +10369,7 @@
                 <a:ea typeface="Aptos" pitchFamily="34" charset="-122"/>
                 <a:cs typeface="Aptos" pitchFamily="34" charset="-120"/>
               </a:rPr>
-              <a:t>Â© Paula Soper</a:t>
+              <a:t>Copyright Paula Soper</a:t>
             </a:r>
             <a:endParaRPr lang="en-US" sz="800" dirty="0"/>
           </a:p>
@@ -9574,46 +10732,7 @@
       </p:sp>
       <p:sp>
         <p:nvSpPr>
-          <p:cNvPr id="15" name="Text 13"/>
-          <p:cNvSpPr/>
-          <p:nvPr/>
-        </p:nvSpPr>
-        <p:spPr>
-          <a:xfrm>
-            <a:off x="8695944" y="3941064"/>
-            <a:ext cx="201168" cy="256032"/>
-          </a:xfrm>
-          <a:prstGeom prst="rect">
-            <a:avLst/>
-          </a:prstGeom>
-          <a:noFill/>
-          <a:ln/>
-        </p:spPr>
-        <p:txBody>
-          <a:bodyPr wrap="square" lIns="0" tIns="0" rIns="0" bIns="0" rtlCol="0" anchor="ctr"/>
-          <a:lstStyle/>
-          <a:p>
-            <a:pPr algn="ctr" indent="0" marL="0">
-              <a:buNone/>
-            </a:pPr>
-            <a:r>
-              <a:rPr lang="en-US" sz="1800" b="1" dirty="0">
-                <a:solidFill>
-                  <a:srgbClr val="0068B7"/>
-                </a:solidFill>
-                <a:latin typeface="Aptos" pitchFamily="34" charset="0"/>
-                <a:ea typeface="Aptos" pitchFamily="34" charset="-122"/>
-                <a:cs typeface="Aptos" pitchFamily="34" charset="-120"/>
-              </a:rPr>
-              <a:t>â†’</a:t>
-            </a:r>
-            <a:endParaRPr lang="en-US" sz="1800" dirty="0"/>
-          </a:p>
-        </p:txBody>
-      </p:sp>
-      <p:sp>
-        <p:nvSpPr>
-          <p:cNvPr id="16" name="Shape 14"/>
+          <p:cNvPr id="15" name="Shape 13"/>
           <p:cNvSpPr/>
           <p:nvPr/>
         </p:nvSpPr>
@@ -9640,7 +10759,7 @@
       </p:sp>
       <p:sp>
         <p:nvSpPr>
-          <p:cNvPr id="17" name="Text 15"/>
+          <p:cNvPr id="16" name="Text 14"/>
           <p:cNvSpPr/>
           <p:nvPr/>
         </p:nvSpPr>
@@ -9681,46 +10800,7 @@
       </p:sp>
       <p:sp>
         <p:nvSpPr>
-          <p:cNvPr id="18" name="Text 16"/>
-          <p:cNvSpPr/>
-          <p:nvPr/>
-        </p:nvSpPr>
-        <p:spPr>
-          <a:xfrm>
-            <a:off x="9985248" y="3941064"/>
-            <a:ext cx="201168" cy="256032"/>
-          </a:xfrm>
-          <a:prstGeom prst="rect">
-            <a:avLst/>
-          </a:prstGeom>
-          <a:noFill/>
-          <a:ln/>
-        </p:spPr>
-        <p:txBody>
-          <a:bodyPr wrap="square" lIns="0" tIns="0" rIns="0" bIns="0" rtlCol="0" anchor="ctr"/>
-          <a:lstStyle/>
-          <a:p>
-            <a:pPr algn="ctr" indent="0" marL="0">
-              <a:buNone/>
-            </a:pPr>
-            <a:r>
-              <a:rPr lang="en-US" sz="1800" b="1" dirty="0">
-                <a:solidFill>
-                  <a:srgbClr val="0068B7"/>
-                </a:solidFill>
-                <a:latin typeface="Aptos" pitchFamily="34" charset="0"/>
-                <a:ea typeface="Aptos" pitchFamily="34" charset="-122"/>
-                <a:cs typeface="Aptos" pitchFamily="34" charset="-120"/>
-              </a:rPr>
-              <a:t>â†’</a:t>
-            </a:r>
-            <a:endParaRPr lang="en-US" sz="1800" dirty="0"/>
-          </a:p>
-        </p:txBody>
-      </p:sp>
-      <p:sp>
-        <p:nvSpPr>
-          <p:cNvPr id="19" name="Shape 17"/>
+          <p:cNvPr id="17" name="Shape 15"/>
           <p:cNvSpPr/>
           <p:nvPr/>
         </p:nvSpPr>
@@ -9747,7 +10827,7 @@
       </p:sp>
       <p:sp>
         <p:nvSpPr>
-          <p:cNvPr id="20" name="Text 18"/>
+          <p:cNvPr id="18" name="Text 16"/>
           <p:cNvSpPr/>
           <p:nvPr/>
         </p:nvSpPr>
@@ -9954,8 +11034,8 @@
         </p:nvSpPr>
         <p:spPr>
           <a:xfrm>
-            <a:off x="9966960" y="6537960"/>
-            <a:ext cx="1645920" cy="201168"/>
+            <a:off x="9646920" y="6537960"/>
+            <a:ext cx="1965960" cy="201168"/>
           </a:xfrm>
           <a:prstGeom prst="rect">
             <a:avLst/>
@@ -9979,7 +11059,7 @@
                 <a:ea typeface="Aptos" pitchFamily="34" charset="-122"/>
                 <a:cs typeface="Aptos" pitchFamily="34" charset="-120"/>
               </a:rPr>
-              <a:t>Â© Paula Soper</a:t>
+              <a:t>Copyright Paula Soper</a:t>
             </a:r>
             <a:endParaRPr lang="en-US" sz="800" dirty="0"/>
           </a:p>
@@ -10026,77 +11106,13 @@
       </p:sp>
       <p:sp>
         <p:nvSpPr>
-          <p:cNvPr id="8" name="Shape 6"/>
+          <p:cNvPr id="8" name="Text 6"/>
           <p:cNvSpPr/>
           <p:nvPr/>
         </p:nvSpPr>
         <p:spPr>
           <a:xfrm>
             <a:off x="640080" y="658368"/>
-            <a:ext cx="420624" cy="420624"/>
-          </a:xfrm>
-          <a:prstGeom prst="ellipse">
-            <a:avLst/>
-          </a:prstGeom>
-          <a:solidFill>
-            <a:srgbClr val="0068B7"/>
-          </a:solidFill>
-          <a:ln w="12700">
-            <a:solidFill>
-              <a:srgbClr val="0068B7"/>
-            </a:solidFill>
-            <a:prstDash val="solid"/>
-          </a:ln>
-        </p:spPr>
-      </p:sp>
-      <p:sp>
-        <p:nvSpPr>
-          <p:cNvPr id="9" name="Text 7"/>
-          <p:cNvSpPr/>
-          <p:nvPr/>
-        </p:nvSpPr>
-        <p:spPr>
-          <a:xfrm>
-            <a:off x="640080" y="731520"/>
-            <a:ext cx="420624" cy="164592"/>
-          </a:xfrm>
-          <a:prstGeom prst="rect">
-            <a:avLst/>
-          </a:prstGeom>
-          <a:noFill/>
-          <a:ln/>
-        </p:spPr>
-        <p:txBody>
-          <a:bodyPr wrap="square" lIns="0" tIns="0" rIns="0" bIns="0" rtlCol="0" anchor="ctr"/>
-          <a:lstStyle/>
-          <a:p>
-            <a:pPr algn="ctr" indent="0" marL="0">
-              <a:buNone/>
-            </a:pPr>
-            <a:r>
-              <a:rPr lang="en-US" sz="1100" b="1" dirty="0">
-                <a:solidFill>
-                  <a:srgbClr val="FFFFFF"/>
-                </a:solidFill>
-                <a:latin typeface="Aptos" pitchFamily="34" charset="0"/>
-                <a:ea typeface="Aptos" pitchFamily="34" charset="-122"/>
-                <a:cs typeface="Aptos" pitchFamily="34" charset="-120"/>
-              </a:rPr>
-              <a:t>12</a:t>
-            </a:r>
-            <a:endParaRPr lang="en-US" sz="1100" dirty="0"/>
-          </a:p>
-        </p:txBody>
-      </p:sp>
-      <p:sp>
-        <p:nvSpPr>
-          <p:cNvPr id="10" name="Text 8"/>
-          <p:cNvSpPr/>
-          <p:nvPr/>
-        </p:nvSpPr>
-        <p:spPr>
-          <a:xfrm>
-            <a:off x="640080" y="621792"/>
             <a:ext cx="10881360" cy="713232"/>
           </a:xfrm>
           <a:prstGeom prst="rect">
@@ -10131,14 +11147,14 @@
       </p:sp>
       <p:sp>
         <p:nvSpPr>
-          <p:cNvPr id="11" name="Text 9"/>
+          <p:cNvPr id="9" name="Text 7"/>
           <p:cNvSpPr/>
           <p:nvPr/>
         </p:nvSpPr>
         <p:spPr>
           <a:xfrm>
             <a:off x="868680" y="1508760"/>
-            <a:ext cx="6537960" cy="4160520"/>
+            <a:ext cx="6309360" cy="4160520"/>
           </a:xfrm>
           <a:prstGeom prst="rect">
             <a:avLst/>
@@ -10197,18 +11213,18 @@
       </p:sp>
       <p:sp>
         <p:nvSpPr>
-          <p:cNvPr id="12" name="Shape 10"/>
-          <p:cNvSpPr/>
-          <p:nvPr/>
-        </p:nvSpPr>
-        <p:spPr>
-          <a:xfrm>
-            <a:off x="7909560" y="1417320"/>
-            <a:ext cx="3154680" cy="1828800"/>
+          <p:cNvPr id="10" name="Shape 8"/>
+          <p:cNvSpPr/>
+          <p:nvPr/>
+        </p:nvSpPr>
+        <p:spPr>
+          <a:xfrm>
+            <a:off x="7635240" y="1325880"/>
+            <a:ext cx="3474720" cy="1325880"/>
           </a:xfrm>
           <a:prstGeom prst="roundRect">
             <a:avLst>
-              <a:gd name="adj" fmla="val 6000"/>
+              <a:gd name="adj" fmla="val 8276"/>
             </a:avLst>
           </a:prstGeom>
           <a:solidFill>
@@ -10224,14 +11240,14 @@
       </p:sp>
       <p:sp>
         <p:nvSpPr>
-          <p:cNvPr id="13" name="Text 11"/>
-          <p:cNvSpPr/>
-          <p:nvPr/>
-        </p:nvSpPr>
-        <p:spPr>
-          <a:xfrm>
-            <a:off x="8074152" y="1563624"/>
-            <a:ext cx="2825496" cy="256032"/>
+          <p:cNvPr id="11" name="Text 9"/>
+          <p:cNvSpPr/>
+          <p:nvPr/>
+        </p:nvSpPr>
+        <p:spPr>
+          <a:xfrm>
+            <a:off x="7799832" y="1472184"/>
+            <a:ext cx="3145536" cy="256032"/>
           </a:xfrm>
           <a:prstGeom prst="rect">
             <a:avLst/>
@@ -10255,7 +11271,7 @@
                 <a:ea typeface="Aptos" pitchFamily="34" charset="-122"/>
                 <a:cs typeface="Aptos" pitchFamily="34" charset="-120"/>
               </a:rPr>
-              <a:t>Key idea</a:t>
+              <a:t>Practice focus</a:t>
             </a:r>
             <a:endParaRPr lang="en-US" sz="1300" dirty="0"/>
           </a:p>
@@ -10263,14 +11279,14 @@
       </p:sp>
       <p:sp>
         <p:nvSpPr>
-          <p:cNvPr id="14" name="Text 12"/>
-          <p:cNvSpPr/>
-          <p:nvPr/>
-        </p:nvSpPr>
-        <p:spPr>
-          <a:xfrm>
-            <a:off x="8074152" y="1920240"/>
-            <a:ext cx="2825496" cy="1188720"/>
+          <p:cNvPr id="12" name="Text 10"/>
+          <p:cNvSpPr/>
+          <p:nvPr/>
+        </p:nvSpPr>
+        <p:spPr>
+          <a:xfrm>
+            <a:off x="7799832" y="1828800"/>
+            <a:ext cx="3145536" cy="685800"/>
           </a:xfrm>
           <a:prstGeom prst="rect">
             <a:avLst/>
@@ -10304,18 +11320,159 @@
       </p:sp>
       <p:sp>
         <p:nvSpPr>
-          <p:cNvPr id="15" name="Shape 13"/>
-          <p:cNvSpPr/>
-          <p:nvPr/>
-        </p:nvSpPr>
-        <p:spPr>
-          <a:xfrm>
-            <a:off x="7909560" y="3520440"/>
-            <a:ext cx="3154680" cy="1737360"/>
+          <p:cNvPr id="13" name="Shape 11"/>
+          <p:cNvSpPr/>
+          <p:nvPr/>
+        </p:nvSpPr>
+        <p:spPr>
+          <a:xfrm>
+            <a:off x="7635240" y="2788920"/>
+            <a:ext cx="3474720" cy="1536192"/>
           </a:xfrm>
           <a:prstGeom prst="roundRect">
             <a:avLst>
-              <a:gd name="adj" fmla="val 6316"/>
+              <a:gd name="adj" fmla="val 7143"/>
+            </a:avLst>
+          </a:prstGeom>
+          <a:solidFill>
+            <a:srgbClr val="FFFFFF">
+              <a:alpha val="88000"/>
+            </a:srgbClr>
+          </a:solidFill>
+          <a:ln w="12700">
+            <a:solidFill>
+              <a:srgbClr val="D6E8F2"/>
+            </a:solidFill>
+            <a:prstDash val="solid"/>
+          </a:ln>
+        </p:spPr>
+      </p:sp>
+      <p:sp>
+        <p:nvSpPr>
+          <p:cNvPr id="14" name="Shape 12"/>
+          <p:cNvSpPr/>
+          <p:nvPr/>
+        </p:nvSpPr>
+        <p:spPr>
+          <a:xfrm>
+            <a:off x="8074152" y="3291840"/>
+            <a:ext cx="2596896" cy="749808"/>
+          </a:xfrm>
+          <a:prstGeom prst="rect">
+            <a:avLst/>
+          </a:prstGeom>
+          <a:solidFill>
+            <a:srgbClr val="EAF6F8"/>
+          </a:solidFill>
+          <a:ln w="12700">
+            <a:solidFill>
+              <a:srgbClr val="8ABBD8"/>
+            </a:solidFill>
+            <a:prstDash val="solid"/>
+          </a:ln>
+        </p:spPr>
+      </p:sp>
+      <p:sp>
+        <p:nvSpPr>
+          <p:cNvPr id="15" name="Shape 13"/>
+          <p:cNvSpPr/>
+          <p:nvPr/>
+        </p:nvSpPr>
+        <p:spPr>
+          <a:xfrm>
+            <a:off x="8202168" y="3721608"/>
+            <a:ext cx="2340864" cy="0"/>
+          </a:xfrm>
+          <a:prstGeom prst="line">
+            <a:avLst/>
+          </a:prstGeom>
+          <a:noFill/>
+          <a:ln w="19050">
+            <a:solidFill>
+              <a:srgbClr val="0068B7"/>
+            </a:solidFill>
+            <a:prstDash val="solid"/>
+          </a:ln>
+        </p:spPr>
+      </p:sp>
+      <p:sp>
+        <p:nvSpPr>
+          <p:cNvPr id="16" name="Shape 14"/>
+          <p:cNvSpPr/>
+          <p:nvPr/>
+        </p:nvSpPr>
+        <p:spPr>
+          <a:xfrm>
+            <a:off x="9198864" y="4206240"/>
+            <a:ext cx="347472" cy="347472"/>
+          </a:xfrm>
+          <a:prstGeom prst="ellipse">
+            <a:avLst/>
+          </a:prstGeom>
+          <a:solidFill>
+            <a:srgbClr val="2F8A28"/>
+          </a:solidFill>
+          <a:ln w="12700">
+            <a:solidFill>
+              <a:srgbClr val="2F8A28"/>
+            </a:solidFill>
+            <a:prstDash val="solid"/>
+          </a:ln>
+        </p:spPr>
+      </p:sp>
+      <p:sp>
+        <p:nvSpPr>
+          <p:cNvPr id="17" name="Text 15"/>
+          <p:cNvSpPr/>
+          <p:nvPr/>
+        </p:nvSpPr>
+        <p:spPr>
+          <a:xfrm>
+            <a:off x="7909560" y="3977640"/>
+            <a:ext cx="2926080" cy="182880"/>
+          </a:xfrm>
+          <a:prstGeom prst="rect">
+            <a:avLst/>
+          </a:prstGeom>
+          <a:noFill/>
+          <a:ln/>
+        </p:spPr>
+        <p:txBody>
+          <a:bodyPr wrap="square" lIns="0" tIns="0" rIns="0" bIns="0" rtlCol="0" anchor="ctr"/>
+          <a:lstStyle/>
+          <a:p>
+            <a:pPr algn="ctr" indent="0" marL="0">
+              <a:buNone/>
+            </a:pPr>
+            <a:r>
+              <a:rPr lang="en-US" sz="1000" dirty="0">
+                <a:solidFill>
+                  <a:srgbClr val="003A63"/>
+                </a:solidFill>
+                <a:latin typeface="Aptos" pitchFamily="34" charset="0"/>
+                <a:ea typeface="Aptos" pitchFamily="34" charset="-122"/>
+                <a:cs typeface="Aptos" pitchFamily="34" charset="-120"/>
+              </a:rPr>
+              <a:t>Concept to action</a:t>
+            </a:r>
+            <a:endParaRPr lang="en-US" sz="1000" dirty="0"/>
+          </a:p>
+        </p:txBody>
+      </p:sp>
+      <p:sp>
+        <p:nvSpPr>
+          <p:cNvPr id="18" name="Shape 16"/>
+          <p:cNvSpPr/>
+          <p:nvPr/>
+        </p:nvSpPr>
+        <p:spPr>
+          <a:xfrm>
+            <a:off x="7635240" y="4498848"/>
+            <a:ext cx="3474720" cy="1143000"/>
+          </a:xfrm>
+          <a:prstGeom prst="roundRect">
+            <a:avLst>
+              <a:gd name="adj" fmla="val 9600"/>
             </a:avLst>
           </a:prstGeom>
           <a:solidFill>
@@ -10331,14 +11488,14 @@
       </p:sp>
       <p:sp>
         <p:nvSpPr>
-          <p:cNvPr id="16" name="Text 14"/>
-          <p:cNvSpPr/>
-          <p:nvPr/>
-        </p:nvSpPr>
-        <p:spPr>
-          <a:xfrm>
-            <a:off x="8074152" y="3666744"/>
-            <a:ext cx="2825496" cy="256032"/>
+          <p:cNvPr id="19" name="Text 17"/>
+          <p:cNvSpPr/>
+          <p:nvPr/>
+        </p:nvSpPr>
+        <p:spPr>
+          <a:xfrm>
+            <a:off x="7799832" y="4645152"/>
+            <a:ext cx="3145536" cy="256032"/>
           </a:xfrm>
           <a:prstGeom prst="rect">
             <a:avLst/>
@@ -10362,7 +11519,7 @@
                 <a:ea typeface="Aptos" pitchFamily="34" charset="-122"/>
                 <a:cs typeface="Aptos" pitchFamily="34" charset="-120"/>
               </a:rPr>
-              <a:t>Use this for</a:t>
+              <a:t>What to produce</a:t>
             </a:r>
             <a:endParaRPr lang="en-US" sz="1300" dirty="0"/>
           </a:p>
@@ -10370,14 +11527,14 @@
       </p:sp>
       <p:sp>
         <p:nvSpPr>
-          <p:cNvPr id="17" name="Text 15"/>
-          <p:cNvSpPr/>
-          <p:nvPr/>
-        </p:nvSpPr>
-        <p:spPr>
-          <a:xfrm>
-            <a:off x="8074152" y="4023360"/>
-            <a:ext cx="2825496" cy="1097280"/>
+          <p:cNvPr id="20" name="Text 18"/>
+          <p:cNvSpPr/>
+          <p:nvPr/>
+        </p:nvSpPr>
+        <p:spPr>
+          <a:xfrm>
+            <a:off x="7799832" y="5001768"/>
+            <a:ext cx="3145536" cy="502920"/>
           </a:xfrm>
           <a:prstGeom prst="rect">
             <a:avLst/>
@@ -10403,7 +11560,7 @@
                 <a:ea typeface="Aptos" pitchFamily="34" charset="-122"/>
                 <a:cs typeface="Aptos" pitchFamily="34" charset="-120"/>
               </a:rPr>
-              <a:t>Connect the concept to public health decisions, safeguards, documentation, or implementation work.</a:t>
+              <a:t>Use the assignment to test whether you can explain the concept, apply it to a realistic public health situation, and identify what would need review before the work moves forward.</a:t>
             </a:r>
             <a:endParaRPr lang="en-US" sz="1550" dirty="0"/>
           </a:p>
@@ -10577,8 +11734,8 @@
         </p:nvSpPr>
         <p:spPr>
           <a:xfrm>
-            <a:off x="9966960" y="6537960"/>
-            <a:ext cx="1645920" cy="201168"/>
+            <a:off x="9646920" y="6537960"/>
+            <a:ext cx="1965960" cy="201168"/>
           </a:xfrm>
           <a:prstGeom prst="rect">
             <a:avLst/>
@@ -10602,7 +11759,7 @@
                 <a:ea typeface="Aptos" pitchFamily="34" charset="-122"/>
                 <a:cs typeface="Aptos" pitchFamily="34" charset="-120"/>
               </a:rPr>
-              <a:t>Â© Paula Soper</a:t>
+              <a:t>Copyright Paula Soper</a:t>
             </a:r>
             <a:endParaRPr lang="en-US" sz="800" dirty="0"/>
           </a:p>
@@ -10649,77 +11806,13 @@
       </p:sp>
       <p:sp>
         <p:nvSpPr>
-          <p:cNvPr id="8" name="Shape 6"/>
+          <p:cNvPr id="8" name="Text 6"/>
           <p:cNvSpPr/>
           <p:nvPr/>
         </p:nvSpPr>
         <p:spPr>
           <a:xfrm>
             <a:off x="640080" y="658368"/>
-            <a:ext cx="420624" cy="420624"/>
-          </a:xfrm>
-          <a:prstGeom prst="ellipse">
-            <a:avLst/>
-          </a:prstGeom>
-          <a:solidFill>
-            <a:srgbClr val="0068B7"/>
-          </a:solidFill>
-          <a:ln w="12700">
-            <a:solidFill>
-              <a:srgbClr val="0068B7"/>
-            </a:solidFill>
-            <a:prstDash val="solid"/>
-          </a:ln>
-        </p:spPr>
-      </p:sp>
-      <p:sp>
-        <p:nvSpPr>
-          <p:cNvPr id="9" name="Text 7"/>
-          <p:cNvSpPr/>
-          <p:nvPr/>
-        </p:nvSpPr>
-        <p:spPr>
-          <a:xfrm>
-            <a:off x="640080" y="731520"/>
-            <a:ext cx="420624" cy="164592"/>
-          </a:xfrm>
-          <a:prstGeom prst="rect">
-            <a:avLst/>
-          </a:prstGeom>
-          <a:noFill/>
-          <a:ln/>
-        </p:spPr>
-        <p:txBody>
-          <a:bodyPr wrap="square" lIns="0" tIns="0" rIns="0" bIns="0" rtlCol="0" anchor="ctr"/>
-          <a:lstStyle/>
-          <a:p>
-            <a:pPr algn="ctr" indent="0" marL="0">
-              <a:buNone/>
-            </a:pPr>
-            <a:r>
-              <a:rPr lang="en-US" sz="1100" b="1" dirty="0">
-                <a:solidFill>
-                  <a:srgbClr val="FFFFFF"/>
-                </a:solidFill>
-                <a:latin typeface="Aptos" pitchFamily="34" charset="0"/>
-                <a:ea typeface="Aptos" pitchFamily="34" charset="-122"/>
-                <a:cs typeface="Aptos" pitchFamily="34" charset="-120"/>
-              </a:rPr>
-              <a:t>13</a:t>
-            </a:r>
-            <a:endParaRPr lang="en-US" sz="1100" dirty="0"/>
-          </a:p>
-        </p:txBody>
-      </p:sp>
-      <p:sp>
-        <p:nvSpPr>
-          <p:cNvPr id="10" name="Text 8"/>
-          <p:cNvSpPr/>
-          <p:nvPr/>
-        </p:nvSpPr>
-        <p:spPr>
-          <a:xfrm>
-            <a:off x="640080" y="621792"/>
             <a:ext cx="10881360" cy="713232"/>
           </a:xfrm>
           <a:prstGeom prst="rect">
@@ -10754,14 +11847,14 @@
       </p:sp>
       <p:sp>
         <p:nvSpPr>
-          <p:cNvPr id="11" name="Text 9"/>
+          <p:cNvPr id="9" name="Text 7"/>
           <p:cNvSpPr/>
           <p:nvPr/>
         </p:nvSpPr>
         <p:spPr>
           <a:xfrm>
             <a:off x="868680" y="1508760"/>
-            <a:ext cx="6537960" cy="4160520"/>
+            <a:ext cx="6309360" cy="4160520"/>
           </a:xfrm>
           <a:prstGeom prst="rect">
             <a:avLst/>
@@ -10820,18 +11913,18 @@
       </p:sp>
       <p:sp>
         <p:nvSpPr>
-          <p:cNvPr id="12" name="Shape 10"/>
-          <p:cNvSpPr/>
-          <p:nvPr/>
-        </p:nvSpPr>
-        <p:spPr>
-          <a:xfrm>
-            <a:off x="7909560" y="1417320"/>
-            <a:ext cx="3154680" cy="1828800"/>
+          <p:cNvPr id="10" name="Shape 8"/>
+          <p:cNvSpPr/>
+          <p:nvPr/>
+        </p:nvSpPr>
+        <p:spPr>
+          <a:xfrm>
+            <a:off x="7635240" y="1325880"/>
+            <a:ext cx="3474720" cy="1325880"/>
           </a:xfrm>
           <a:prstGeom prst="roundRect">
             <a:avLst>
-              <a:gd name="adj" fmla="val 6000"/>
+              <a:gd name="adj" fmla="val 8276"/>
             </a:avLst>
           </a:prstGeom>
           <a:solidFill>
@@ -10847,14 +11940,14 @@
       </p:sp>
       <p:sp>
         <p:nvSpPr>
-          <p:cNvPr id="13" name="Text 11"/>
-          <p:cNvSpPr/>
-          <p:nvPr/>
-        </p:nvSpPr>
-        <p:spPr>
-          <a:xfrm>
-            <a:off x="8074152" y="1563624"/>
-            <a:ext cx="2825496" cy="256032"/>
+          <p:cNvPr id="11" name="Text 9"/>
+          <p:cNvSpPr/>
+          <p:nvPr/>
+        </p:nvSpPr>
+        <p:spPr>
+          <a:xfrm>
+            <a:off x="7799832" y="1472184"/>
+            <a:ext cx="3145536" cy="256032"/>
           </a:xfrm>
           <a:prstGeom prst="rect">
             <a:avLst/>
@@ -10878,7 +11971,7 @@
                 <a:ea typeface="Aptos" pitchFamily="34" charset="-122"/>
                 <a:cs typeface="Aptos" pitchFamily="34" charset="-120"/>
               </a:rPr>
-              <a:t>Key idea</a:t>
+              <a:t>Practice focus</a:t>
             </a:r>
             <a:endParaRPr lang="en-US" sz="1300" dirty="0"/>
           </a:p>
@@ -10886,14 +11979,14 @@
       </p:sp>
       <p:sp>
         <p:nvSpPr>
-          <p:cNvPr id="14" name="Text 12"/>
-          <p:cNvSpPr/>
-          <p:nvPr/>
-        </p:nvSpPr>
-        <p:spPr>
-          <a:xfrm>
-            <a:off x="8074152" y="1920240"/>
-            <a:ext cx="2825496" cy="1188720"/>
+          <p:cNvPr id="12" name="Text 10"/>
+          <p:cNvSpPr/>
+          <p:nvPr/>
+        </p:nvSpPr>
+        <p:spPr>
+          <a:xfrm>
+            <a:off x="7799832" y="1828800"/>
+            <a:ext cx="3145536" cy="685800"/>
           </a:xfrm>
           <a:prstGeom prst="rect">
             <a:avLst/>
@@ -10927,18 +12020,159 @@
       </p:sp>
       <p:sp>
         <p:nvSpPr>
-          <p:cNvPr id="15" name="Shape 13"/>
-          <p:cNvSpPr/>
-          <p:nvPr/>
-        </p:nvSpPr>
-        <p:spPr>
-          <a:xfrm>
-            <a:off x="7909560" y="3520440"/>
-            <a:ext cx="3154680" cy="1737360"/>
+          <p:cNvPr id="13" name="Shape 11"/>
+          <p:cNvSpPr/>
+          <p:nvPr/>
+        </p:nvSpPr>
+        <p:spPr>
+          <a:xfrm>
+            <a:off x="7635240" y="2788920"/>
+            <a:ext cx="3474720" cy="1536192"/>
           </a:xfrm>
           <a:prstGeom prst="roundRect">
             <a:avLst>
-              <a:gd name="adj" fmla="val 6316"/>
+              <a:gd name="adj" fmla="val 7143"/>
+            </a:avLst>
+          </a:prstGeom>
+          <a:solidFill>
+            <a:srgbClr val="FFFFFF">
+              <a:alpha val="88000"/>
+            </a:srgbClr>
+          </a:solidFill>
+          <a:ln w="12700">
+            <a:solidFill>
+              <a:srgbClr val="D6E8F2"/>
+            </a:solidFill>
+            <a:prstDash val="solid"/>
+          </a:ln>
+        </p:spPr>
+      </p:sp>
+      <p:sp>
+        <p:nvSpPr>
+          <p:cNvPr id="14" name="Shape 12"/>
+          <p:cNvSpPr/>
+          <p:nvPr/>
+        </p:nvSpPr>
+        <p:spPr>
+          <a:xfrm>
+            <a:off x="8074152" y="3291840"/>
+            <a:ext cx="2596896" cy="749808"/>
+          </a:xfrm>
+          <a:prstGeom prst="rect">
+            <a:avLst/>
+          </a:prstGeom>
+          <a:solidFill>
+            <a:srgbClr val="EAF6F8"/>
+          </a:solidFill>
+          <a:ln w="12700">
+            <a:solidFill>
+              <a:srgbClr val="8ABBD8"/>
+            </a:solidFill>
+            <a:prstDash val="solid"/>
+          </a:ln>
+        </p:spPr>
+      </p:sp>
+      <p:sp>
+        <p:nvSpPr>
+          <p:cNvPr id="15" name="Shape 13"/>
+          <p:cNvSpPr/>
+          <p:nvPr/>
+        </p:nvSpPr>
+        <p:spPr>
+          <a:xfrm>
+            <a:off x="8202168" y="3721608"/>
+            <a:ext cx="2340864" cy="0"/>
+          </a:xfrm>
+          <a:prstGeom prst="line">
+            <a:avLst/>
+          </a:prstGeom>
+          <a:noFill/>
+          <a:ln w="19050">
+            <a:solidFill>
+              <a:srgbClr val="0068B7"/>
+            </a:solidFill>
+            <a:prstDash val="solid"/>
+          </a:ln>
+        </p:spPr>
+      </p:sp>
+      <p:sp>
+        <p:nvSpPr>
+          <p:cNvPr id="16" name="Shape 14"/>
+          <p:cNvSpPr/>
+          <p:nvPr/>
+        </p:nvSpPr>
+        <p:spPr>
+          <a:xfrm>
+            <a:off x="9198864" y="4206240"/>
+            <a:ext cx="347472" cy="347472"/>
+          </a:xfrm>
+          <a:prstGeom prst="ellipse">
+            <a:avLst/>
+          </a:prstGeom>
+          <a:solidFill>
+            <a:srgbClr val="2F8A28"/>
+          </a:solidFill>
+          <a:ln w="12700">
+            <a:solidFill>
+              <a:srgbClr val="2F8A28"/>
+            </a:solidFill>
+            <a:prstDash val="solid"/>
+          </a:ln>
+        </p:spPr>
+      </p:sp>
+      <p:sp>
+        <p:nvSpPr>
+          <p:cNvPr id="17" name="Text 15"/>
+          <p:cNvSpPr/>
+          <p:nvPr/>
+        </p:nvSpPr>
+        <p:spPr>
+          <a:xfrm>
+            <a:off x="7909560" y="3977640"/>
+            <a:ext cx="2926080" cy="182880"/>
+          </a:xfrm>
+          <a:prstGeom prst="rect">
+            <a:avLst/>
+          </a:prstGeom>
+          <a:noFill/>
+          <a:ln/>
+        </p:spPr>
+        <p:txBody>
+          <a:bodyPr wrap="square" lIns="0" tIns="0" rIns="0" bIns="0" rtlCol="0" anchor="ctr"/>
+          <a:lstStyle/>
+          <a:p>
+            <a:pPr algn="ctr" indent="0" marL="0">
+              <a:buNone/>
+            </a:pPr>
+            <a:r>
+              <a:rPr lang="en-US" sz="1000" dirty="0">
+                <a:solidFill>
+                  <a:srgbClr val="003A63"/>
+                </a:solidFill>
+                <a:latin typeface="Aptos" pitchFamily="34" charset="0"/>
+                <a:ea typeface="Aptos" pitchFamily="34" charset="-122"/>
+                <a:cs typeface="Aptos" pitchFamily="34" charset="-120"/>
+              </a:rPr>
+              <a:t>Concept to action</a:t>
+            </a:r>
+            <a:endParaRPr lang="en-US" sz="1000" dirty="0"/>
+          </a:p>
+        </p:txBody>
+      </p:sp>
+      <p:sp>
+        <p:nvSpPr>
+          <p:cNvPr id="18" name="Shape 16"/>
+          <p:cNvSpPr/>
+          <p:nvPr/>
+        </p:nvSpPr>
+        <p:spPr>
+          <a:xfrm>
+            <a:off x="7635240" y="4498848"/>
+            <a:ext cx="3474720" cy="1143000"/>
+          </a:xfrm>
+          <a:prstGeom prst="roundRect">
+            <a:avLst>
+              <a:gd name="adj" fmla="val 9600"/>
             </a:avLst>
           </a:prstGeom>
           <a:solidFill>
@@ -10954,14 +12188,14 @@
       </p:sp>
       <p:sp>
         <p:nvSpPr>
-          <p:cNvPr id="16" name="Text 14"/>
-          <p:cNvSpPr/>
-          <p:nvPr/>
-        </p:nvSpPr>
-        <p:spPr>
-          <a:xfrm>
-            <a:off x="8074152" y="3666744"/>
-            <a:ext cx="2825496" cy="256032"/>
+          <p:cNvPr id="19" name="Text 17"/>
+          <p:cNvSpPr/>
+          <p:nvPr/>
+        </p:nvSpPr>
+        <p:spPr>
+          <a:xfrm>
+            <a:off x="7799832" y="4645152"/>
+            <a:ext cx="3145536" cy="256032"/>
           </a:xfrm>
           <a:prstGeom prst="rect">
             <a:avLst/>
@@ -10985,7 +12219,7 @@
                 <a:ea typeface="Aptos" pitchFamily="34" charset="-122"/>
                 <a:cs typeface="Aptos" pitchFamily="34" charset="-120"/>
               </a:rPr>
-              <a:t>Use this for</a:t>
+              <a:t>What to produce</a:t>
             </a:r>
             <a:endParaRPr lang="en-US" sz="1300" dirty="0"/>
           </a:p>
@@ -10993,14 +12227,14 @@
       </p:sp>
       <p:sp>
         <p:nvSpPr>
-          <p:cNvPr id="17" name="Text 15"/>
-          <p:cNvSpPr/>
-          <p:nvPr/>
-        </p:nvSpPr>
-        <p:spPr>
-          <a:xfrm>
-            <a:off x="8074152" y="4023360"/>
-            <a:ext cx="2825496" cy="1097280"/>
+          <p:cNvPr id="20" name="Text 18"/>
+          <p:cNvSpPr/>
+          <p:nvPr/>
+        </p:nvSpPr>
+        <p:spPr>
+          <a:xfrm>
+            <a:off x="7799832" y="5001768"/>
+            <a:ext cx="3145536" cy="502920"/>
           </a:xfrm>
           <a:prstGeom prst="rect">
             <a:avLst/>
@@ -11026,7 +12260,7 @@
                 <a:ea typeface="Aptos" pitchFamily="34" charset="-122"/>
                 <a:cs typeface="Aptos" pitchFamily="34" charset="-120"/>
               </a:rPr>
-              <a:t>Connect the concept to public health decisions, safeguards, documentation, or implementation work.</a:t>
+              <a:t>Use the assignment to test whether you can explain the concept, apply it to a realistic public health situation, and identify what would need review before the work moves forward.</a:t>
             </a:r>
             <a:endParaRPr lang="en-US" sz="1550" dirty="0"/>
           </a:p>
@@ -11200,8 +12434,8 @@
         </p:nvSpPr>
         <p:spPr>
           <a:xfrm>
-            <a:off x="9966960" y="6537960"/>
-            <a:ext cx="1645920" cy="201168"/>
+            <a:off x="9646920" y="6537960"/>
+            <a:ext cx="1965960" cy="201168"/>
           </a:xfrm>
           <a:prstGeom prst="rect">
             <a:avLst/>
@@ -11225,7 +12459,7 @@
                 <a:ea typeface="Aptos" pitchFamily="34" charset="-122"/>
                 <a:cs typeface="Aptos" pitchFamily="34" charset="-120"/>
               </a:rPr>
-              <a:t>Â© Paula Soper</a:t>
+              <a:t>Copyright Paula Soper</a:t>
             </a:r>
             <a:endParaRPr lang="en-US" sz="800" dirty="0"/>
           </a:p>
@@ -11272,77 +12506,13 @@
       </p:sp>
       <p:sp>
         <p:nvSpPr>
-          <p:cNvPr id="8" name="Shape 6"/>
+          <p:cNvPr id="8" name="Text 6"/>
           <p:cNvSpPr/>
           <p:nvPr/>
         </p:nvSpPr>
         <p:spPr>
           <a:xfrm>
             <a:off x="640080" y="658368"/>
-            <a:ext cx="420624" cy="420624"/>
-          </a:xfrm>
-          <a:prstGeom prst="ellipse">
-            <a:avLst/>
-          </a:prstGeom>
-          <a:solidFill>
-            <a:srgbClr val="0068B7"/>
-          </a:solidFill>
-          <a:ln w="12700">
-            <a:solidFill>
-              <a:srgbClr val="0068B7"/>
-            </a:solidFill>
-            <a:prstDash val="solid"/>
-          </a:ln>
-        </p:spPr>
-      </p:sp>
-      <p:sp>
-        <p:nvSpPr>
-          <p:cNvPr id="9" name="Text 7"/>
-          <p:cNvSpPr/>
-          <p:nvPr/>
-        </p:nvSpPr>
-        <p:spPr>
-          <a:xfrm>
-            <a:off x="640080" y="731520"/>
-            <a:ext cx="420624" cy="164592"/>
-          </a:xfrm>
-          <a:prstGeom prst="rect">
-            <a:avLst/>
-          </a:prstGeom>
-          <a:noFill/>
-          <a:ln/>
-        </p:spPr>
-        <p:txBody>
-          <a:bodyPr wrap="square" lIns="0" tIns="0" rIns="0" bIns="0" rtlCol="0" anchor="ctr"/>
-          <a:lstStyle/>
-          <a:p>
-            <a:pPr algn="ctr" indent="0" marL="0">
-              <a:buNone/>
-            </a:pPr>
-            <a:r>
-              <a:rPr lang="en-US" sz="1100" b="1" dirty="0">
-                <a:solidFill>
-                  <a:srgbClr val="FFFFFF"/>
-                </a:solidFill>
-                <a:latin typeface="Aptos" pitchFamily="34" charset="0"/>
-                <a:ea typeface="Aptos" pitchFamily="34" charset="-122"/>
-                <a:cs typeface="Aptos" pitchFamily="34" charset="-120"/>
-              </a:rPr>
-              <a:t>14</a:t>
-            </a:r>
-            <a:endParaRPr lang="en-US" sz="1100" dirty="0"/>
-          </a:p>
-        </p:txBody>
-      </p:sp>
-      <p:sp>
-        <p:nvSpPr>
-          <p:cNvPr id="10" name="Text 8"/>
-          <p:cNvSpPr/>
-          <p:nvPr/>
-        </p:nvSpPr>
-        <p:spPr>
-          <a:xfrm>
-            <a:off x="640080" y="621792"/>
             <a:ext cx="10881360" cy="713232"/>
           </a:xfrm>
           <a:prstGeom prst="rect">
@@ -11377,14 +12547,14 @@
       </p:sp>
       <p:sp>
         <p:nvSpPr>
-          <p:cNvPr id="11" name="Text 9"/>
+          <p:cNvPr id="9" name="Text 7"/>
           <p:cNvSpPr/>
           <p:nvPr/>
         </p:nvSpPr>
         <p:spPr>
           <a:xfrm>
             <a:off x="868680" y="1508760"/>
-            <a:ext cx="6537960" cy="4160520"/>
+            <a:ext cx="6309360" cy="4160520"/>
           </a:xfrm>
           <a:prstGeom prst="rect">
             <a:avLst/>
@@ -11443,18 +12613,18 @@
       </p:sp>
       <p:sp>
         <p:nvSpPr>
-          <p:cNvPr id="12" name="Shape 10"/>
-          <p:cNvSpPr/>
-          <p:nvPr/>
-        </p:nvSpPr>
-        <p:spPr>
-          <a:xfrm>
-            <a:off x="7909560" y="1417320"/>
-            <a:ext cx="3154680" cy="1828800"/>
+          <p:cNvPr id="10" name="Shape 8"/>
+          <p:cNvSpPr/>
+          <p:nvPr/>
+        </p:nvSpPr>
+        <p:spPr>
+          <a:xfrm>
+            <a:off x="7635240" y="1325880"/>
+            <a:ext cx="3474720" cy="1325880"/>
           </a:xfrm>
           <a:prstGeom prst="roundRect">
             <a:avLst>
-              <a:gd name="adj" fmla="val 6000"/>
+              <a:gd name="adj" fmla="val 8276"/>
             </a:avLst>
           </a:prstGeom>
           <a:solidFill>
@@ -11470,14 +12640,14 @@
       </p:sp>
       <p:sp>
         <p:nvSpPr>
-          <p:cNvPr id="13" name="Text 11"/>
-          <p:cNvSpPr/>
-          <p:nvPr/>
-        </p:nvSpPr>
-        <p:spPr>
-          <a:xfrm>
-            <a:off x="8074152" y="1563624"/>
-            <a:ext cx="2825496" cy="256032"/>
+          <p:cNvPr id="11" name="Text 9"/>
+          <p:cNvSpPr/>
+          <p:nvPr/>
+        </p:nvSpPr>
+        <p:spPr>
+          <a:xfrm>
+            <a:off x="7799832" y="1472184"/>
+            <a:ext cx="3145536" cy="256032"/>
           </a:xfrm>
           <a:prstGeom prst="rect">
             <a:avLst/>
@@ -11501,7 +12671,7 @@
                 <a:ea typeface="Aptos" pitchFamily="34" charset="-122"/>
                 <a:cs typeface="Aptos" pitchFamily="34" charset="-120"/>
               </a:rPr>
-              <a:t>Key idea</a:t>
+              <a:t>Core concept</a:t>
             </a:r>
             <a:endParaRPr lang="en-US" sz="1300" dirty="0"/>
           </a:p>
@@ -11509,14 +12679,14 @@
       </p:sp>
       <p:sp>
         <p:nvSpPr>
-          <p:cNvPr id="14" name="Text 12"/>
-          <p:cNvSpPr/>
-          <p:nvPr/>
-        </p:nvSpPr>
-        <p:spPr>
-          <a:xfrm>
-            <a:off x="8074152" y="1920240"/>
-            <a:ext cx="2825496" cy="1188720"/>
+          <p:cNvPr id="12" name="Text 10"/>
+          <p:cNvSpPr/>
+          <p:nvPr/>
+        </p:nvSpPr>
+        <p:spPr>
+          <a:xfrm>
+            <a:off x="7799832" y="1828800"/>
+            <a:ext cx="3145536" cy="685800"/>
           </a:xfrm>
           <a:prstGeom prst="rect">
             <a:avLst/>
@@ -11550,18 +12720,159 @@
       </p:sp>
       <p:sp>
         <p:nvSpPr>
-          <p:cNvPr id="15" name="Shape 13"/>
-          <p:cNvSpPr/>
-          <p:nvPr/>
-        </p:nvSpPr>
-        <p:spPr>
-          <a:xfrm>
-            <a:off x="7909560" y="3520440"/>
-            <a:ext cx="3154680" cy="1737360"/>
+          <p:cNvPr id="13" name="Shape 11"/>
+          <p:cNvSpPr/>
+          <p:nvPr/>
+        </p:nvSpPr>
+        <p:spPr>
+          <a:xfrm>
+            <a:off x="7635240" y="2788920"/>
+            <a:ext cx="3474720" cy="1536192"/>
           </a:xfrm>
           <a:prstGeom prst="roundRect">
             <a:avLst>
-              <a:gd name="adj" fmla="val 6316"/>
+              <a:gd name="adj" fmla="val 7143"/>
+            </a:avLst>
+          </a:prstGeom>
+          <a:solidFill>
+            <a:srgbClr val="FFFFFF">
+              <a:alpha val="88000"/>
+            </a:srgbClr>
+          </a:solidFill>
+          <a:ln w="12700">
+            <a:solidFill>
+              <a:srgbClr val="D6E8F2"/>
+            </a:solidFill>
+            <a:prstDash val="solid"/>
+          </a:ln>
+        </p:spPr>
+      </p:sp>
+      <p:sp>
+        <p:nvSpPr>
+          <p:cNvPr id="14" name="Shape 12"/>
+          <p:cNvSpPr/>
+          <p:nvPr/>
+        </p:nvSpPr>
+        <p:spPr>
+          <a:xfrm>
+            <a:off x="8074152" y="3291840"/>
+            <a:ext cx="2596896" cy="749808"/>
+          </a:xfrm>
+          <a:prstGeom prst="rect">
+            <a:avLst/>
+          </a:prstGeom>
+          <a:solidFill>
+            <a:srgbClr val="EAF6F8"/>
+          </a:solidFill>
+          <a:ln w="12700">
+            <a:solidFill>
+              <a:srgbClr val="8ABBD8"/>
+            </a:solidFill>
+            <a:prstDash val="solid"/>
+          </a:ln>
+        </p:spPr>
+      </p:sp>
+      <p:sp>
+        <p:nvSpPr>
+          <p:cNvPr id="15" name="Shape 13"/>
+          <p:cNvSpPr/>
+          <p:nvPr/>
+        </p:nvSpPr>
+        <p:spPr>
+          <a:xfrm>
+            <a:off x="8202168" y="3721608"/>
+            <a:ext cx="2340864" cy="0"/>
+          </a:xfrm>
+          <a:prstGeom prst="line">
+            <a:avLst/>
+          </a:prstGeom>
+          <a:noFill/>
+          <a:ln w="19050">
+            <a:solidFill>
+              <a:srgbClr val="0068B7"/>
+            </a:solidFill>
+            <a:prstDash val="solid"/>
+          </a:ln>
+        </p:spPr>
+      </p:sp>
+      <p:sp>
+        <p:nvSpPr>
+          <p:cNvPr id="16" name="Shape 14"/>
+          <p:cNvSpPr/>
+          <p:nvPr/>
+        </p:nvSpPr>
+        <p:spPr>
+          <a:xfrm>
+            <a:off x="9198864" y="4206240"/>
+            <a:ext cx="347472" cy="347472"/>
+          </a:xfrm>
+          <a:prstGeom prst="ellipse">
+            <a:avLst/>
+          </a:prstGeom>
+          <a:solidFill>
+            <a:srgbClr val="2F8A28"/>
+          </a:solidFill>
+          <a:ln w="12700">
+            <a:solidFill>
+              <a:srgbClr val="2F8A28"/>
+            </a:solidFill>
+            <a:prstDash val="solid"/>
+          </a:ln>
+        </p:spPr>
+      </p:sp>
+      <p:sp>
+        <p:nvSpPr>
+          <p:cNvPr id="17" name="Text 15"/>
+          <p:cNvSpPr/>
+          <p:nvPr/>
+        </p:nvSpPr>
+        <p:spPr>
+          <a:xfrm>
+            <a:off x="7909560" y="3977640"/>
+            <a:ext cx="2926080" cy="182880"/>
+          </a:xfrm>
+          <a:prstGeom prst="rect">
+            <a:avLst/>
+          </a:prstGeom>
+          <a:noFill/>
+          <a:ln/>
+        </p:spPr>
+        <p:txBody>
+          <a:bodyPr wrap="square" lIns="0" tIns="0" rIns="0" bIns="0" rtlCol="0" anchor="ctr"/>
+          <a:lstStyle/>
+          <a:p>
+            <a:pPr algn="ctr" indent="0" marL="0">
+              <a:buNone/>
+            </a:pPr>
+            <a:r>
+              <a:rPr lang="en-US" sz="1000" dirty="0">
+                <a:solidFill>
+                  <a:srgbClr val="003A63"/>
+                </a:solidFill>
+                <a:latin typeface="Aptos" pitchFamily="34" charset="0"/>
+                <a:ea typeface="Aptos" pitchFamily="34" charset="-122"/>
+                <a:cs typeface="Aptos" pitchFamily="34" charset="-120"/>
+              </a:rPr>
+              <a:t>Concept to action</a:t>
+            </a:r>
+            <a:endParaRPr lang="en-US" sz="1000" dirty="0"/>
+          </a:p>
+        </p:txBody>
+      </p:sp>
+      <p:sp>
+        <p:nvSpPr>
+          <p:cNvPr id="18" name="Shape 16"/>
+          <p:cNvSpPr/>
+          <p:nvPr/>
+        </p:nvSpPr>
+        <p:spPr>
+          <a:xfrm>
+            <a:off x="7635240" y="4498848"/>
+            <a:ext cx="3474720" cy="1143000"/>
+          </a:xfrm>
+          <a:prstGeom prst="roundRect">
+            <a:avLst>
+              <a:gd name="adj" fmla="val 9600"/>
             </a:avLst>
           </a:prstGeom>
           <a:solidFill>
@@ -11577,14 +12888,14 @@
       </p:sp>
       <p:sp>
         <p:nvSpPr>
-          <p:cNvPr id="16" name="Text 14"/>
-          <p:cNvSpPr/>
-          <p:nvPr/>
-        </p:nvSpPr>
-        <p:spPr>
-          <a:xfrm>
-            <a:off x="8074152" y="3666744"/>
-            <a:ext cx="2825496" cy="256032"/>
+          <p:cNvPr id="19" name="Text 17"/>
+          <p:cNvSpPr/>
+          <p:nvPr/>
+        </p:nvSpPr>
+        <p:spPr>
+          <a:xfrm>
+            <a:off x="7799832" y="4645152"/>
+            <a:ext cx="3145536" cy="256032"/>
           </a:xfrm>
           <a:prstGeom prst="rect">
             <a:avLst/>
@@ -11608,7 +12919,7 @@
                 <a:ea typeface="Aptos" pitchFamily="34" charset="-122"/>
                 <a:cs typeface="Aptos" pitchFamily="34" charset="-120"/>
               </a:rPr>
-              <a:t>Use this for</a:t>
+              <a:t>Apply it</a:t>
             </a:r>
             <a:endParaRPr lang="en-US" sz="1300" dirty="0"/>
           </a:p>
@@ -11616,14 +12927,14 @@
       </p:sp>
       <p:sp>
         <p:nvSpPr>
-          <p:cNvPr id="17" name="Text 15"/>
-          <p:cNvSpPr/>
-          <p:nvPr/>
-        </p:nvSpPr>
-        <p:spPr>
-          <a:xfrm>
-            <a:off x="8074152" y="4023360"/>
-            <a:ext cx="2825496" cy="1097280"/>
+          <p:cNvPr id="20" name="Text 18"/>
+          <p:cNvSpPr/>
+          <p:nvPr/>
+        </p:nvSpPr>
+        <p:spPr>
+          <a:xfrm>
+            <a:off x="7799832" y="5001768"/>
+            <a:ext cx="3145536" cy="502920"/>
           </a:xfrm>
           <a:prstGeom prst="rect">
             <a:avLst/>
@@ -11649,7 +12960,7 @@
                 <a:ea typeface="Aptos" pitchFamily="34" charset="-122"/>
                 <a:cs typeface="Aptos" pitchFamily="34" charset="-120"/>
               </a:rPr>
-              <a:t>Connect the concept to public health decisions, safeguards, documentation, or implementation work.</a:t>
+              <a:t>Connect the concept to public health purpose, responsible use, required safeguards, documentation, and the next action a department should take.</a:t>
             </a:r>
             <a:endParaRPr lang="en-US" sz="1550" dirty="0"/>
           </a:p>
@@ -11823,8 +13134,8 @@
         </p:nvSpPr>
         <p:spPr>
           <a:xfrm>
-            <a:off x="9966960" y="6537960"/>
-            <a:ext cx="1645920" cy="201168"/>
+            <a:off x="9646920" y="6537960"/>
+            <a:ext cx="1965960" cy="201168"/>
           </a:xfrm>
           <a:prstGeom prst="rect">
             <a:avLst/>
@@ -11848,7 +13159,7 @@
                 <a:ea typeface="Aptos" pitchFamily="34" charset="-122"/>
                 <a:cs typeface="Aptos" pitchFamily="34" charset="-120"/>
               </a:rPr>
-              <a:t>Â© Paula Soper</a:t>
+              <a:t>Copyright Paula Soper</a:t>
             </a:r>
             <a:endParaRPr lang="en-US" sz="800" dirty="0"/>
           </a:p>
@@ -12191,46 +13502,7 @@
       </p:sp>
       <p:sp>
         <p:nvSpPr>
-          <p:cNvPr id="15" name="Text 13"/>
-          <p:cNvSpPr/>
-          <p:nvPr/>
-        </p:nvSpPr>
-        <p:spPr>
-          <a:xfrm>
-            <a:off x="8817864" y="4187952"/>
-            <a:ext cx="201168" cy="256032"/>
-          </a:xfrm>
-          <a:prstGeom prst="rect">
-            <a:avLst/>
-          </a:prstGeom>
-          <a:noFill/>
-          <a:ln/>
-        </p:spPr>
-        <p:txBody>
-          <a:bodyPr wrap="square" lIns="0" tIns="0" rIns="0" bIns="0" rtlCol="0" anchor="ctr"/>
-          <a:lstStyle/>
-          <a:p>
-            <a:pPr algn="ctr" indent="0" marL="0">
-              <a:buNone/>
-            </a:pPr>
-            <a:r>
-              <a:rPr lang="en-US" sz="1800" b="1" dirty="0">
-                <a:solidFill>
-                  <a:srgbClr val="0068B7"/>
-                </a:solidFill>
-                <a:latin typeface="Aptos" pitchFamily="34" charset="0"/>
-                <a:ea typeface="Aptos" pitchFamily="34" charset="-122"/>
-                <a:cs typeface="Aptos" pitchFamily="34" charset="-120"/>
-              </a:rPr>
-              <a:t>â†’</a:t>
-            </a:r>
-            <a:endParaRPr lang="en-US" sz="1800" dirty="0"/>
-          </a:p>
-        </p:txBody>
-      </p:sp>
-      <p:sp>
-        <p:nvSpPr>
-          <p:cNvPr id="16" name="Shape 14"/>
+          <p:cNvPr id="15" name="Shape 13"/>
           <p:cNvSpPr/>
           <p:nvPr/>
         </p:nvSpPr>
@@ -12257,7 +13529,7 @@
       </p:sp>
       <p:sp>
         <p:nvSpPr>
-          <p:cNvPr id="17" name="Text 15"/>
+          <p:cNvPr id="16" name="Text 14"/>
           <p:cNvSpPr/>
           <p:nvPr/>
         </p:nvSpPr>
@@ -12298,46 +13570,7 @@
       </p:sp>
       <p:sp>
         <p:nvSpPr>
-          <p:cNvPr id="18" name="Text 16"/>
-          <p:cNvSpPr/>
-          <p:nvPr/>
-        </p:nvSpPr>
-        <p:spPr>
-          <a:xfrm>
-            <a:off x="10046208" y="4187952"/>
-            <a:ext cx="201168" cy="256032"/>
-          </a:xfrm>
-          <a:prstGeom prst="rect">
-            <a:avLst/>
-          </a:prstGeom>
-          <a:noFill/>
-          <a:ln/>
-        </p:spPr>
-        <p:txBody>
-          <a:bodyPr wrap="square" lIns="0" tIns="0" rIns="0" bIns="0" rtlCol="0" anchor="ctr"/>
-          <a:lstStyle/>
-          <a:p>
-            <a:pPr algn="ctr" indent="0" marL="0">
-              <a:buNone/>
-            </a:pPr>
-            <a:r>
-              <a:rPr lang="en-US" sz="1800" b="1" dirty="0">
-                <a:solidFill>
-                  <a:srgbClr val="0068B7"/>
-                </a:solidFill>
-                <a:latin typeface="Aptos" pitchFamily="34" charset="0"/>
-                <a:ea typeface="Aptos" pitchFamily="34" charset="-122"/>
-                <a:cs typeface="Aptos" pitchFamily="34" charset="-120"/>
-              </a:rPr>
-              <a:t>â†’</a:t>
-            </a:r>
-            <a:endParaRPr lang="en-US" sz="1800" dirty="0"/>
-          </a:p>
-        </p:txBody>
-      </p:sp>
-      <p:sp>
-        <p:nvSpPr>
-          <p:cNvPr id="19" name="Shape 17"/>
+          <p:cNvPr id="17" name="Shape 15"/>
           <p:cNvSpPr/>
           <p:nvPr/>
         </p:nvSpPr>
@@ -12364,7 +13597,7 @@
       </p:sp>
       <p:sp>
         <p:nvSpPr>
-          <p:cNvPr id="20" name="Text 18"/>
+          <p:cNvPr id="18" name="Text 16"/>
           <p:cNvSpPr/>
           <p:nvPr/>
         </p:nvSpPr>
@@ -12571,8 +13804,8 @@
         </p:nvSpPr>
         <p:spPr>
           <a:xfrm>
-            <a:off x="9966960" y="6537960"/>
-            <a:ext cx="1645920" cy="201168"/>
+            <a:off x="9646920" y="6537960"/>
+            <a:ext cx="1965960" cy="201168"/>
           </a:xfrm>
           <a:prstGeom prst="rect">
             <a:avLst/>
@@ -12596,7 +13829,7 @@
                 <a:ea typeface="Aptos" pitchFamily="34" charset="-122"/>
                 <a:cs typeface="Aptos" pitchFamily="34" charset="-120"/>
               </a:rPr>
-              <a:t>Â© Paula Soper</a:t>
+              <a:t>Copyright Paula Soper</a:t>
             </a:r>
             <a:endParaRPr lang="en-US" sz="800" dirty="0"/>
           </a:p>
@@ -12939,46 +14172,7 @@
       </p:sp>
       <p:sp>
         <p:nvSpPr>
-          <p:cNvPr id="15" name="Text 13"/>
-          <p:cNvSpPr/>
-          <p:nvPr/>
-        </p:nvSpPr>
-        <p:spPr>
-          <a:xfrm>
-            <a:off x="8817864" y="4187952"/>
-            <a:ext cx="201168" cy="256032"/>
-          </a:xfrm>
-          <a:prstGeom prst="rect">
-            <a:avLst/>
-          </a:prstGeom>
-          <a:noFill/>
-          <a:ln/>
-        </p:spPr>
-        <p:txBody>
-          <a:bodyPr wrap="square" lIns="0" tIns="0" rIns="0" bIns="0" rtlCol="0" anchor="ctr"/>
-          <a:lstStyle/>
-          <a:p>
-            <a:pPr algn="ctr" indent="0" marL="0">
-              <a:buNone/>
-            </a:pPr>
-            <a:r>
-              <a:rPr lang="en-US" sz="1800" b="1" dirty="0">
-                <a:solidFill>
-                  <a:srgbClr val="0068B7"/>
-                </a:solidFill>
-                <a:latin typeface="Aptos" pitchFamily="34" charset="0"/>
-                <a:ea typeface="Aptos" pitchFamily="34" charset="-122"/>
-                <a:cs typeface="Aptos" pitchFamily="34" charset="-120"/>
-              </a:rPr>
-              <a:t>â†’</a:t>
-            </a:r>
-            <a:endParaRPr lang="en-US" sz="1800" dirty="0"/>
-          </a:p>
-        </p:txBody>
-      </p:sp>
-      <p:sp>
-        <p:nvSpPr>
-          <p:cNvPr id="16" name="Shape 14"/>
+          <p:cNvPr id="15" name="Shape 13"/>
           <p:cNvSpPr/>
           <p:nvPr/>
         </p:nvSpPr>
@@ -13005,7 +14199,7 @@
       </p:sp>
       <p:sp>
         <p:nvSpPr>
-          <p:cNvPr id="17" name="Text 15"/>
+          <p:cNvPr id="16" name="Text 14"/>
           <p:cNvSpPr/>
           <p:nvPr/>
         </p:nvSpPr>
@@ -13046,46 +14240,7 @@
       </p:sp>
       <p:sp>
         <p:nvSpPr>
-          <p:cNvPr id="18" name="Text 16"/>
-          <p:cNvSpPr/>
-          <p:nvPr/>
-        </p:nvSpPr>
-        <p:spPr>
-          <a:xfrm>
-            <a:off x="10046208" y="4187952"/>
-            <a:ext cx="201168" cy="256032"/>
-          </a:xfrm>
-          <a:prstGeom prst="rect">
-            <a:avLst/>
-          </a:prstGeom>
-          <a:noFill/>
-          <a:ln/>
-        </p:spPr>
-        <p:txBody>
-          <a:bodyPr wrap="square" lIns="0" tIns="0" rIns="0" bIns="0" rtlCol="0" anchor="ctr"/>
-          <a:lstStyle/>
-          <a:p>
-            <a:pPr algn="ctr" indent="0" marL="0">
-              <a:buNone/>
-            </a:pPr>
-            <a:r>
-              <a:rPr lang="en-US" sz="1800" b="1" dirty="0">
-                <a:solidFill>
-                  <a:srgbClr val="0068B7"/>
-                </a:solidFill>
-                <a:latin typeface="Aptos" pitchFamily="34" charset="0"/>
-                <a:ea typeface="Aptos" pitchFamily="34" charset="-122"/>
-                <a:cs typeface="Aptos" pitchFamily="34" charset="-120"/>
-              </a:rPr>
-              <a:t>â†’</a:t>
-            </a:r>
-            <a:endParaRPr lang="en-US" sz="1800" dirty="0"/>
-          </a:p>
-        </p:txBody>
-      </p:sp>
-      <p:sp>
-        <p:nvSpPr>
-          <p:cNvPr id="19" name="Shape 17"/>
+          <p:cNvPr id="17" name="Shape 15"/>
           <p:cNvSpPr/>
           <p:nvPr/>
         </p:nvSpPr>
@@ -13112,7 +14267,7 @@
       </p:sp>
       <p:sp>
         <p:nvSpPr>
-          <p:cNvPr id="20" name="Text 18"/>
+          <p:cNvPr id="18" name="Text 16"/>
           <p:cNvSpPr/>
           <p:nvPr/>
         </p:nvSpPr>
@@ -13319,8 +14474,8 @@
         </p:nvSpPr>
         <p:spPr>
           <a:xfrm>
-            <a:off x="9966960" y="6537960"/>
-            <a:ext cx="1645920" cy="201168"/>
+            <a:off x="9646920" y="6537960"/>
+            <a:ext cx="1965960" cy="201168"/>
           </a:xfrm>
           <a:prstGeom prst="rect">
             <a:avLst/>
@@ -13344,7 +14499,7 @@
                 <a:ea typeface="Aptos" pitchFamily="34" charset="-122"/>
                 <a:cs typeface="Aptos" pitchFamily="34" charset="-120"/>
               </a:rPr>
-              <a:t>Â© Paula Soper</a:t>
+              <a:t>Copyright Paula Soper</a:t>
             </a:r>
             <a:endParaRPr lang="en-US" sz="800" dirty="0"/>
           </a:p>
@@ -13391,77 +14546,13 @@
       </p:sp>
       <p:sp>
         <p:nvSpPr>
-          <p:cNvPr id="8" name="Shape 6"/>
+          <p:cNvPr id="8" name="Text 6"/>
           <p:cNvSpPr/>
           <p:nvPr/>
         </p:nvSpPr>
         <p:spPr>
           <a:xfrm>
             <a:off x="640080" y="658368"/>
-            <a:ext cx="420624" cy="420624"/>
-          </a:xfrm>
-          <a:prstGeom prst="ellipse">
-            <a:avLst/>
-          </a:prstGeom>
-          <a:solidFill>
-            <a:srgbClr val="0068B7"/>
-          </a:solidFill>
-          <a:ln w="12700">
-            <a:solidFill>
-              <a:srgbClr val="0068B7"/>
-            </a:solidFill>
-            <a:prstDash val="solid"/>
-          </a:ln>
-        </p:spPr>
-      </p:sp>
-      <p:sp>
-        <p:nvSpPr>
-          <p:cNvPr id="9" name="Text 7"/>
-          <p:cNvSpPr/>
-          <p:nvPr/>
-        </p:nvSpPr>
-        <p:spPr>
-          <a:xfrm>
-            <a:off x="640080" y="731520"/>
-            <a:ext cx="420624" cy="164592"/>
-          </a:xfrm>
-          <a:prstGeom prst="rect">
-            <a:avLst/>
-          </a:prstGeom>
-          <a:noFill/>
-          <a:ln/>
-        </p:spPr>
-        <p:txBody>
-          <a:bodyPr wrap="square" lIns="0" tIns="0" rIns="0" bIns="0" rtlCol="0" anchor="ctr"/>
-          <a:lstStyle/>
-          <a:p>
-            <a:pPr algn="ctr" indent="0" marL="0">
-              <a:buNone/>
-            </a:pPr>
-            <a:r>
-              <a:rPr lang="en-US" sz="1100" b="1" dirty="0">
-                <a:solidFill>
-                  <a:srgbClr val="FFFFFF"/>
-                </a:solidFill>
-                <a:latin typeface="Aptos" pitchFamily="34" charset="0"/>
-                <a:ea typeface="Aptos" pitchFamily="34" charset="-122"/>
-                <a:cs typeface="Aptos" pitchFamily="34" charset="-120"/>
-              </a:rPr>
-              <a:t>1</a:t>
-            </a:r>
-            <a:endParaRPr lang="en-US" sz="1100" dirty="0"/>
-          </a:p>
-        </p:txBody>
-      </p:sp>
-      <p:sp>
-        <p:nvSpPr>
-          <p:cNvPr id="10" name="Text 8"/>
-          <p:cNvSpPr/>
-          <p:nvPr/>
-        </p:nvSpPr>
-        <p:spPr>
-          <a:xfrm>
-            <a:off x="640080" y="621792"/>
             <a:ext cx="10881360" cy="713232"/>
           </a:xfrm>
           <a:prstGeom prst="rect">
@@ -13496,14 +14587,14 @@
       </p:sp>
       <p:sp>
         <p:nvSpPr>
-          <p:cNvPr id="11" name="Text 9"/>
+          <p:cNvPr id="9" name="Text 7"/>
           <p:cNvSpPr/>
           <p:nvPr/>
         </p:nvSpPr>
         <p:spPr>
           <a:xfrm>
             <a:off x="868680" y="1508760"/>
-            <a:ext cx="6537960" cy="4160520"/>
+            <a:ext cx="6309360" cy="4160520"/>
           </a:xfrm>
           <a:prstGeom prst="rect">
             <a:avLst/>
@@ -13562,18 +14653,18 @@
       </p:sp>
       <p:sp>
         <p:nvSpPr>
-          <p:cNvPr id="12" name="Shape 10"/>
-          <p:cNvSpPr/>
-          <p:nvPr/>
-        </p:nvSpPr>
-        <p:spPr>
-          <a:xfrm>
-            <a:off x="7909560" y="1417320"/>
-            <a:ext cx="3154680" cy="1828800"/>
+          <p:cNvPr id="10" name="Shape 8"/>
+          <p:cNvSpPr/>
+          <p:nvPr/>
+        </p:nvSpPr>
+        <p:spPr>
+          <a:xfrm>
+            <a:off x="7635240" y="1325880"/>
+            <a:ext cx="3474720" cy="1325880"/>
           </a:xfrm>
           <a:prstGeom prst="roundRect">
             <a:avLst>
-              <a:gd name="adj" fmla="val 6000"/>
+              <a:gd name="adj" fmla="val 8276"/>
             </a:avLst>
           </a:prstGeom>
           <a:solidFill>
@@ -13589,14 +14680,14 @@
       </p:sp>
       <p:sp>
         <p:nvSpPr>
-          <p:cNvPr id="13" name="Text 11"/>
-          <p:cNvSpPr/>
-          <p:nvPr/>
-        </p:nvSpPr>
-        <p:spPr>
-          <a:xfrm>
-            <a:off x="8074152" y="1563624"/>
-            <a:ext cx="2825496" cy="256032"/>
+          <p:cNvPr id="11" name="Text 9"/>
+          <p:cNvSpPr/>
+          <p:nvPr/>
+        </p:nvSpPr>
+        <p:spPr>
+          <a:xfrm>
+            <a:off x="7799832" y="1472184"/>
+            <a:ext cx="3145536" cy="256032"/>
           </a:xfrm>
           <a:prstGeom prst="rect">
             <a:avLst/>
@@ -13620,7 +14711,7 @@
                 <a:ea typeface="Aptos" pitchFamily="34" charset="-122"/>
                 <a:cs typeface="Aptos" pitchFamily="34" charset="-120"/>
               </a:rPr>
-              <a:t>Key idea</a:t>
+              <a:t>Practice focus</a:t>
             </a:r>
             <a:endParaRPr lang="en-US" sz="1300" dirty="0"/>
           </a:p>
@@ -13628,14 +14719,14 @@
       </p:sp>
       <p:sp>
         <p:nvSpPr>
-          <p:cNvPr id="14" name="Text 12"/>
-          <p:cNvSpPr/>
-          <p:nvPr/>
-        </p:nvSpPr>
-        <p:spPr>
-          <a:xfrm>
-            <a:off x="8074152" y="1920240"/>
-            <a:ext cx="2825496" cy="1188720"/>
+          <p:cNvPr id="12" name="Text 10"/>
+          <p:cNvSpPr/>
+          <p:nvPr/>
+        </p:nvSpPr>
+        <p:spPr>
+          <a:xfrm>
+            <a:off x="7799832" y="1828800"/>
+            <a:ext cx="3145536" cy="685800"/>
           </a:xfrm>
           <a:prstGeom prst="rect">
             <a:avLst/>
@@ -13669,18 +14760,159 @@
       </p:sp>
       <p:sp>
         <p:nvSpPr>
-          <p:cNvPr id="15" name="Shape 13"/>
-          <p:cNvSpPr/>
-          <p:nvPr/>
-        </p:nvSpPr>
-        <p:spPr>
-          <a:xfrm>
-            <a:off x="7909560" y="3520440"/>
-            <a:ext cx="3154680" cy="1737360"/>
+          <p:cNvPr id="13" name="Shape 11"/>
+          <p:cNvSpPr/>
+          <p:nvPr/>
+        </p:nvSpPr>
+        <p:spPr>
+          <a:xfrm>
+            <a:off x="7635240" y="2788920"/>
+            <a:ext cx="3474720" cy="1536192"/>
           </a:xfrm>
           <a:prstGeom prst="roundRect">
             <a:avLst>
-              <a:gd name="adj" fmla="val 6316"/>
+              <a:gd name="adj" fmla="val 7143"/>
+            </a:avLst>
+          </a:prstGeom>
+          <a:solidFill>
+            <a:srgbClr val="FFFFFF">
+              <a:alpha val="88000"/>
+            </a:srgbClr>
+          </a:solidFill>
+          <a:ln w="12700">
+            <a:solidFill>
+              <a:srgbClr val="D6E8F2"/>
+            </a:solidFill>
+            <a:prstDash val="solid"/>
+          </a:ln>
+        </p:spPr>
+      </p:sp>
+      <p:sp>
+        <p:nvSpPr>
+          <p:cNvPr id="14" name="Shape 12"/>
+          <p:cNvSpPr/>
+          <p:nvPr/>
+        </p:nvSpPr>
+        <p:spPr>
+          <a:xfrm>
+            <a:off x="8074152" y="3291840"/>
+            <a:ext cx="2596896" cy="749808"/>
+          </a:xfrm>
+          <a:prstGeom prst="rect">
+            <a:avLst/>
+          </a:prstGeom>
+          <a:solidFill>
+            <a:srgbClr val="EAF6F8"/>
+          </a:solidFill>
+          <a:ln w="12700">
+            <a:solidFill>
+              <a:srgbClr val="8ABBD8"/>
+            </a:solidFill>
+            <a:prstDash val="solid"/>
+          </a:ln>
+        </p:spPr>
+      </p:sp>
+      <p:sp>
+        <p:nvSpPr>
+          <p:cNvPr id="15" name="Shape 13"/>
+          <p:cNvSpPr/>
+          <p:nvPr/>
+        </p:nvSpPr>
+        <p:spPr>
+          <a:xfrm>
+            <a:off x="8202168" y="3721608"/>
+            <a:ext cx="2340864" cy="0"/>
+          </a:xfrm>
+          <a:prstGeom prst="line">
+            <a:avLst/>
+          </a:prstGeom>
+          <a:noFill/>
+          <a:ln w="19050">
+            <a:solidFill>
+              <a:srgbClr val="0068B7"/>
+            </a:solidFill>
+            <a:prstDash val="solid"/>
+          </a:ln>
+        </p:spPr>
+      </p:sp>
+      <p:sp>
+        <p:nvSpPr>
+          <p:cNvPr id="16" name="Shape 14"/>
+          <p:cNvSpPr/>
+          <p:nvPr/>
+        </p:nvSpPr>
+        <p:spPr>
+          <a:xfrm>
+            <a:off x="9198864" y="4206240"/>
+            <a:ext cx="347472" cy="347472"/>
+          </a:xfrm>
+          <a:prstGeom prst="ellipse">
+            <a:avLst/>
+          </a:prstGeom>
+          <a:solidFill>
+            <a:srgbClr val="2F8A28"/>
+          </a:solidFill>
+          <a:ln w="12700">
+            <a:solidFill>
+              <a:srgbClr val="2F8A28"/>
+            </a:solidFill>
+            <a:prstDash val="solid"/>
+          </a:ln>
+        </p:spPr>
+      </p:sp>
+      <p:sp>
+        <p:nvSpPr>
+          <p:cNvPr id="17" name="Text 15"/>
+          <p:cNvSpPr/>
+          <p:nvPr/>
+        </p:nvSpPr>
+        <p:spPr>
+          <a:xfrm>
+            <a:off x="7909560" y="3977640"/>
+            <a:ext cx="2926080" cy="182880"/>
+          </a:xfrm>
+          <a:prstGeom prst="rect">
+            <a:avLst/>
+          </a:prstGeom>
+          <a:noFill/>
+          <a:ln/>
+        </p:spPr>
+        <p:txBody>
+          <a:bodyPr wrap="square" lIns="0" tIns="0" rIns="0" bIns="0" rtlCol="0" anchor="ctr"/>
+          <a:lstStyle/>
+          <a:p>
+            <a:pPr algn="ctr" indent="0" marL="0">
+              <a:buNone/>
+            </a:pPr>
+            <a:r>
+              <a:rPr lang="en-US" sz="1000" dirty="0">
+                <a:solidFill>
+                  <a:srgbClr val="003A63"/>
+                </a:solidFill>
+                <a:latin typeface="Aptos" pitchFamily="34" charset="0"/>
+                <a:ea typeface="Aptos" pitchFamily="34" charset="-122"/>
+                <a:cs typeface="Aptos" pitchFamily="34" charset="-120"/>
+              </a:rPr>
+              <a:t>Concept to action</a:t>
+            </a:r>
+            <a:endParaRPr lang="en-US" sz="1000" dirty="0"/>
+          </a:p>
+        </p:txBody>
+      </p:sp>
+      <p:sp>
+        <p:nvSpPr>
+          <p:cNvPr id="18" name="Shape 16"/>
+          <p:cNvSpPr/>
+          <p:nvPr/>
+        </p:nvSpPr>
+        <p:spPr>
+          <a:xfrm>
+            <a:off x="7635240" y="4498848"/>
+            <a:ext cx="3474720" cy="1143000"/>
+          </a:xfrm>
+          <a:prstGeom prst="roundRect">
+            <a:avLst>
+              <a:gd name="adj" fmla="val 9600"/>
             </a:avLst>
           </a:prstGeom>
           <a:solidFill>
@@ -13696,14 +14928,14 @@
       </p:sp>
       <p:sp>
         <p:nvSpPr>
-          <p:cNvPr id="16" name="Text 14"/>
-          <p:cNvSpPr/>
-          <p:nvPr/>
-        </p:nvSpPr>
-        <p:spPr>
-          <a:xfrm>
-            <a:off x="8074152" y="3666744"/>
-            <a:ext cx="2825496" cy="256032"/>
+          <p:cNvPr id="19" name="Text 17"/>
+          <p:cNvSpPr/>
+          <p:nvPr/>
+        </p:nvSpPr>
+        <p:spPr>
+          <a:xfrm>
+            <a:off x="7799832" y="4645152"/>
+            <a:ext cx="3145536" cy="256032"/>
           </a:xfrm>
           <a:prstGeom prst="rect">
             <a:avLst/>
@@ -13727,7 +14959,7 @@
                 <a:ea typeface="Aptos" pitchFamily="34" charset="-122"/>
                 <a:cs typeface="Aptos" pitchFamily="34" charset="-120"/>
               </a:rPr>
-              <a:t>Use this for</a:t>
+              <a:t>What to produce</a:t>
             </a:r>
             <a:endParaRPr lang="en-US" sz="1300" dirty="0"/>
           </a:p>
@@ -13735,14 +14967,14 @@
       </p:sp>
       <p:sp>
         <p:nvSpPr>
-          <p:cNvPr id="17" name="Text 15"/>
-          <p:cNvSpPr/>
-          <p:nvPr/>
-        </p:nvSpPr>
-        <p:spPr>
-          <a:xfrm>
-            <a:off x="8074152" y="4023360"/>
-            <a:ext cx="2825496" cy="1097280"/>
+          <p:cNvPr id="20" name="Text 18"/>
+          <p:cNvSpPr/>
+          <p:nvPr/>
+        </p:nvSpPr>
+        <p:spPr>
+          <a:xfrm>
+            <a:off x="7799832" y="5001768"/>
+            <a:ext cx="3145536" cy="502920"/>
           </a:xfrm>
           <a:prstGeom prst="rect">
             <a:avLst/>
@@ -13768,7 +15000,7 @@
                 <a:ea typeface="Aptos" pitchFamily="34" charset="-122"/>
                 <a:cs typeface="Aptos" pitchFamily="34" charset="-120"/>
               </a:rPr>
-              <a:t>Connect the concept to public health decisions, safeguards, documentation, or implementation work.</a:t>
+              <a:t>Use the assignment to test whether you can explain the concept, apply it to a realistic public health situation, and identify what would need review before the work moves forward.</a:t>
             </a:r>
             <a:endParaRPr lang="en-US" sz="1550" dirty="0"/>
           </a:p>
@@ -13942,8 +15174,8 @@
         </p:nvSpPr>
         <p:spPr>
           <a:xfrm>
-            <a:off x="9966960" y="6537960"/>
-            <a:ext cx="1645920" cy="201168"/>
+            <a:off x="9646920" y="6537960"/>
+            <a:ext cx="1965960" cy="201168"/>
           </a:xfrm>
           <a:prstGeom prst="rect">
             <a:avLst/>
@@ -13967,7 +15199,7 @@
                 <a:ea typeface="Aptos" pitchFamily="34" charset="-122"/>
                 <a:cs typeface="Aptos" pitchFamily="34" charset="-120"/>
               </a:rPr>
-              <a:t>Â© Paula Soper</a:t>
+              <a:t>Copyright Paula Soper</a:t>
             </a:r>
             <a:endParaRPr lang="en-US" sz="800" dirty="0"/>
           </a:p>
@@ -14014,77 +15246,13 @@
       </p:sp>
       <p:sp>
         <p:nvSpPr>
-          <p:cNvPr id="8" name="Shape 6"/>
+          <p:cNvPr id="8" name="Text 6"/>
           <p:cNvSpPr/>
           <p:nvPr/>
         </p:nvSpPr>
         <p:spPr>
           <a:xfrm>
             <a:off x="640080" y="658368"/>
-            <a:ext cx="420624" cy="420624"/>
-          </a:xfrm>
-          <a:prstGeom prst="ellipse">
-            <a:avLst/>
-          </a:prstGeom>
-          <a:solidFill>
-            <a:srgbClr val="0068B7"/>
-          </a:solidFill>
-          <a:ln w="12700">
-            <a:solidFill>
-              <a:srgbClr val="0068B7"/>
-            </a:solidFill>
-            <a:prstDash val="solid"/>
-          </a:ln>
-        </p:spPr>
-      </p:sp>
-      <p:sp>
-        <p:nvSpPr>
-          <p:cNvPr id="9" name="Text 7"/>
-          <p:cNvSpPr/>
-          <p:nvPr/>
-        </p:nvSpPr>
-        <p:spPr>
-          <a:xfrm>
-            <a:off x="640080" y="731520"/>
-            <a:ext cx="420624" cy="164592"/>
-          </a:xfrm>
-          <a:prstGeom prst="rect">
-            <a:avLst/>
-          </a:prstGeom>
-          <a:noFill/>
-          <a:ln/>
-        </p:spPr>
-        <p:txBody>
-          <a:bodyPr wrap="square" lIns="0" tIns="0" rIns="0" bIns="0" rtlCol="0" anchor="ctr"/>
-          <a:lstStyle/>
-          <a:p>
-            <a:pPr algn="ctr" indent="0" marL="0">
-              <a:buNone/>
-            </a:pPr>
-            <a:r>
-              <a:rPr lang="en-US" sz="1100" b="1" dirty="0">
-                <a:solidFill>
-                  <a:srgbClr val="FFFFFF"/>
-                </a:solidFill>
-                <a:latin typeface="Aptos" pitchFamily="34" charset="0"/>
-                <a:ea typeface="Aptos" pitchFamily="34" charset="-122"/>
-                <a:cs typeface="Aptos" pitchFamily="34" charset="-120"/>
-              </a:rPr>
-              <a:t>2</a:t>
-            </a:r>
-            <a:endParaRPr lang="en-US" sz="1100" dirty="0"/>
-          </a:p>
-        </p:txBody>
-      </p:sp>
-      <p:sp>
-        <p:nvSpPr>
-          <p:cNvPr id="10" name="Text 8"/>
-          <p:cNvSpPr/>
-          <p:nvPr/>
-        </p:nvSpPr>
-        <p:spPr>
-          <a:xfrm>
-            <a:off x="640080" y="621792"/>
             <a:ext cx="10881360" cy="713232"/>
           </a:xfrm>
           <a:prstGeom prst="rect">
@@ -14119,14 +15287,14 @@
       </p:sp>
       <p:sp>
         <p:nvSpPr>
-          <p:cNvPr id="11" name="Text 9"/>
+          <p:cNvPr id="9" name="Text 7"/>
           <p:cNvSpPr/>
           <p:nvPr/>
         </p:nvSpPr>
         <p:spPr>
           <a:xfrm>
             <a:off x="868680" y="1508760"/>
-            <a:ext cx="6537960" cy="4160520"/>
+            <a:ext cx="6309360" cy="4160520"/>
           </a:xfrm>
           <a:prstGeom prst="rect">
             <a:avLst/>
@@ -14185,18 +15353,18 @@
       </p:sp>
       <p:sp>
         <p:nvSpPr>
-          <p:cNvPr id="12" name="Shape 10"/>
-          <p:cNvSpPr/>
-          <p:nvPr/>
-        </p:nvSpPr>
-        <p:spPr>
-          <a:xfrm>
-            <a:off x="7909560" y="1417320"/>
-            <a:ext cx="3154680" cy="1828800"/>
+          <p:cNvPr id="10" name="Shape 8"/>
+          <p:cNvSpPr/>
+          <p:nvPr/>
+        </p:nvSpPr>
+        <p:spPr>
+          <a:xfrm>
+            <a:off x="7635240" y="1325880"/>
+            <a:ext cx="3474720" cy="1325880"/>
           </a:xfrm>
           <a:prstGeom prst="roundRect">
             <a:avLst>
-              <a:gd name="adj" fmla="val 6000"/>
+              <a:gd name="adj" fmla="val 8276"/>
             </a:avLst>
           </a:prstGeom>
           <a:solidFill>
@@ -14212,14 +15380,14 @@
       </p:sp>
       <p:sp>
         <p:nvSpPr>
-          <p:cNvPr id="13" name="Text 11"/>
-          <p:cNvSpPr/>
-          <p:nvPr/>
-        </p:nvSpPr>
-        <p:spPr>
-          <a:xfrm>
-            <a:off x="8074152" y="1563624"/>
-            <a:ext cx="2825496" cy="256032"/>
+          <p:cNvPr id="11" name="Text 9"/>
+          <p:cNvSpPr/>
+          <p:nvPr/>
+        </p:nvSpPr>
+        <p:spPr>
+          <a:xfrm>
+            <a:off x="7799832" y="1472184"/>
+            <a:ext cx="3145536" cy="256032"/>
           </a:xfrm>
           <a:prstGeom prst="rect">
             <a:avLst/>
@@ -14243,7 +15411,7 @@
                 <a:ea typeface="Aptos" pitchFamily="34" charset="-122"/>
                 <a:cs typeface="Aptos" pitchFamily="34" charset="-120"/>
               </a:rPr>
-              <a:t>Key idea</a:t>
+              <a:t>Core concept</a:t>
             </a:r>
             <a:endParaRPr lang="en-US" sz="1300" dirty="0"/>
           </a:p>
@@ -14251,14 +15419,14 @@
       </p:sp>
       <p:sp>
         <p:nvSpPr>
-          <p:cNvPr id="14" name="Text 12"/>
-          <p:cNvSpPr/>
-          <p:nvPr/>
-        </p:nvSpPr>
-        <p:spPr>
-          <a:xfrm>
-            <a:off x="8074152" y="1920240"/>
-            <a:ext cx="2825496" cy="1188720"/>
+          <p:cNvPr id="12" name="Text 10"/>
+          <p:cNvSpPr/>
+          <p:nvPr/>
+        </p:nvSpPr>
+        <p:spPr>
+          <a:xfrm>
+            <a:off x="7799832" y="1828800"/>
+            <a:ext cx="3145536" cy="685800"/>
           </a:xfrm>
           <a:prstGeom prst="rect">
             <a:avLst/>
@@ -14292,18 +15460,159 @@
       </p:sp>
       <p:sp>
         <p:nvSpPr>
-          <p:cNvPr id="15" name="Shape 13"/>
-          <p:cNvSpPr/>
-          <p:nvPr/>
-        </p:nvSpPr>
-        <p:spPr>
-          <a:xfrm>
-            <a:off x="7909560" y="3520440"/>
-            <a:ext cx="3154680" cy="1737360"/>
+          <p:cNvPr id="13" name="Shape 11"/>
+          <p:cNvSpPr/>
+          <p:nvPr/>
+        </p:nvSpPr>
+        <p:spPr>
+          <a:xfrm>
+            <a:off x="7635240" y="2788920"/>
+            <a:ext cx="3474720" cy="1536192"/>
           </a:xfrm>
           <a:prstGeom prst="roundRect">
             <a:avLst>
-              <a:gd name="adj" fmla="val 6316"/>
+              <a:gd name="adj" fmla="val 7143"/>
+            </a:avLst>
+          </a:prstGeom>
+          <a:solidFill>
+            <a:srgbClr val="FFFFFF">
+              <a:alpha val="88000"/>
+            </a:srgbClr>
+          </a:solidFill>
+          <a:ln w="12700">
+            <a:solidFill>
+              <a:srgbClr val="D6E8F2"/>
+            </a:solidFill>
+            <a:prstDash val="solid"/>
+          </a:ln>
+        </p:spPr>
+      </p:sp>
+      <p:sp>
+        <p:nvSpPr>
+          <p:cNvPr id="14" name="Shape 12"/>
+          <p:cNvSpPr/>
+          <p:nvPr/>
+        </p:nvSpPr>
+        <p:spPr>
+          <a:xfrm>
+            <a:off x="8074152" y="3291840"/>
+            <a:ext cx="2596896" cy="749808"/>
+          </a:xfrm>
+          <a:prstGeom prst="rect">
+            <a:avLst/>
+          </a:prstGeom>
+          <a:solidFill>
+            <a:srgbClr val="EAF6F8"/>
+          </a:solidFill>
+          <a:ln w="12700">
+            <a:solidFill>
+              <a:srgbClr val="8ABBD8"/>
+            </a:solidFill>
+            <a:prstDash val="solid"/>
+          </a:ln>
+        </p:spPr>
+      </p:sp>
+      <p:sp>
+        <p:nvSpPr>
+          <p:cNvPr id="15" name="Shape 13"/>
+          <p:cNvSpPr/>
+          <p:nvPr/>
+        </p:nvSpPr>
+        <p:spPr>
+          <a:xfrm>
+            <a:off x="8202168" y="3721608"/>
+            <a:ext cx="2340864" cy="0"/>
+          </a:xfrm>
+          <a:prstGeom prst="line">
+            <a:avLst/>
+          </a:prstGeom>
+          <a:noFill/>
+          <a:ln w="19050">
+            <a:solidFill>
+              <a:srgbClr val="0068B7"/>
+            </a:solidFill>
+            <a:prstDash val="solid"/>
+          </a:ln>
+        </p:spPr>
+      </p:sp>
+      <p:sp>
+        <p:nvSpPr>
+          <p:cNvPr id="16" name="Shape 14"/>
+          <p:cNvSpPr/>
+          <p:nvPr/>
+        </p:nvSpPr>
+        <p:spPr>
+          <a:xfrm>
+            <a:off x="9198864" y="4206240"/>
+            <a:ext cx="347472" cy="347472"/>
+          </a:xfrm>
+          <a:prstGeom prst="ellipse">
+            <a:avLst/>
+          </a:prstGeom>
+          <a:solidFill>
+            <a:srgbClr val="2F8A28"/>
+          </a:solidFill>
+          <a:ln w="12700">
+            <a:solidFill>
+              <a:srgbClr val="2F8A28"/>
+            </a:solidFill>
+            <a:prstDash val="solid"/>
+          </a:ln>
+        </p:spPr>
+      </p:sp>
+      <p:sp>
+        <p:nvSpPr>
+          <p:cNvPr id="17" name="Text 15"/>
+          <p:cNvSpPr/>
+          <p:nvPr/>
+        </p:nvSpPr>
+        <p:spPr>
+          <a:xfrm>
+            <a:off x="7909560" y="3977640"/>
+            <a:ext cx="2926080" cy="182880"/>
+          </a:xfrm>
+          <a:prstGeom prst="rect">
+            <a:avLst/>
+          </a:prstGeom>
+          <a:noFill/>
+          <a:ln/>
+        </p:spPr>
+        <p:txBody>
+          <a:bodyPr wrap="square" lIns="0" tIns="0" rIns="0" bIns="0" rtlCol="0" anchor="ctr"/>
+          <a:lstStyle/>
+          <a:p>
+            <a:pPr algn="ctr" indent="0" marL="0">
+              <a:buNone/>
+            </a:pPr>
+            <a:r>
+              <a:rPr lang="en-US" sz="1000" dirty="0">
+                <a:solidFill>
+                  <a:srgbClr val="003A63"/>
+                </a:solidFill>
+                <a:latin typeface="Aptos" pitchFamily="34" charset="0"/>
+                <a:ea typeface="Aptos" pitchFamily="34" charset="-122"/>
+                <a:cs typeface="Aptos" pitchFamily="34" charset="-120"/>
+              </a:rPr>
+              <a:t>Concept to action</a:t>
+            </a:r>
+            <a:endParaRPr lang="en-US" sz="1000" dirty="0"/>
+          </a:p>
+        </p:txBody>
+      </p:sp>
+      <p:sp>
+        <p:nvSpPr>
+          <p:cNvPr id="18" name="Shape 16"/>
+          <p:cNvSpPr/>
+          <p:nvPr/>
+        </p:nvSpPr>
+        <p:spPr>
+          <a:xfrm>
+            <a:off x="7635240" y="4498848"/>
+            <a:ext cx="3474720" cy="1143000"/>
+          </a:xfrm>
+          <a:prstGeom prst="roundRect">
+            <a:avLst>
+              <a:gd name="adj" fmla="val 9600"/>
             </a:avLst>
           </a:prstGeom>
           <a:solidFill>
@@ -14319,14 +15628,14 @@
       </p:sp>
       <p:sp>
         <p:nvSpPr>
-          <p:cNvPr id="16" name="Text 14"/>
-          <p:cNvSpPr/>
-          <p:nvPr/>
-        </p:nvSpPr>
-        <p:spPr>
-          <a:xfrm>
-            <a:off x="8074152" y="3666744"/>
-            <a:ext cx="2825496" cy="256032"/>
+          <p:cNvPr id="19" name="Text 17"/>
+          <p:cNvSpPr/>
+          <p:nvPr/>
+        </p:nvSpPr>
+        <p:spPr>
+          <a:xfrm>
+            <a:off x="7799832" y="4645152"/>
+            <a:ext cx="3145536" cy="256032"/>
           </a:xfrm>
           <a:prstGeom prst="rect">
             <a:avLst/>
@@ -14350,7 +15659,7 @@
                 <a:ea typeface="Aptos" pitchFamily="34" charset="-122"/>
                 <a:cs typeface="Aptos" pitchFamily="34" charset="-120"/>
               </a:rPr>
-              <a:t>Use this for</a:t>
+              <a:t>Apply it</a:t>
             </a:r>
             <a:endParaRPr lang="en-US" sz="1300" dirty="0"/>
           </a:p>
@@ -14358,14 +15667,14 @@
       </p:sp>
       <p:sp>
         <p:nvSpPr>
-          <p:cNvPr id="17" name="Text 15"/>
-          <p:cNvSpPr/>
-          <p:nvPr/>
-        </p:nvSpPr>
-        <p:spPr>
-          <a:xfrm>
-            <a:off x="8074152" y="4023360"/>
-            <a:ext cx="2825496" cy="1097280"/>
+          <p:cNvPr id="20" name="Text 18"/>
+          <p:cNvSpPr/>
+          <p:nvPr/>
+        </p:nvSpPr>
+        <p:spPr>
+          <a:xfrm>
+            <a:off x="7799832" y="5001768"/>
+            <a:ext cx="3145536" cy="502920"/>
           </a:xfrm>
           <a:prstGeom prst="rect">
             <a:avLst/>
@@ -14391,7 +15700,7 @@
                 <a:ea typeface="Aptos" pitchFamily="34" charset="-122"/>
                 <a:cs typeface="Aptos" pitchFamily="34" charset="-120"/>
               </a:rPr>
-              <a:t>Connect the concept to public health decisions, safeguards, documentation, or implementation work.</a:t>
+              <a:t>Connect the concept to public health purpose, responsible use, required safeguards, documentation, and the next action a department should take.</a:t>
             </a:r>
             <a:endParaRPr lang="en-US" sz="1550" dirty="0"/>
           </a:p>
@@ -14565,8 +15874,8 @@
         </p:nvSpPr>
         <p:spPr>
           <a:xfrm>
-            <a:off x="9966960" y="6537960"/>
-            <a:ext cx="1645920" cy="201168"/>
+            <a:off x="9646920" y="6537960"/>
+            <a:ext cx="1965960" cy="201168"/>
           </a:xfrm>
           <a:prstGeom prst="rect">
             <a:avLst/>
@@ -14590,7 +15899,7 @@
                 <a:ea typeface="Aptos" pitchFamily="34" charset="-122"/>
                 <a:cs typeface="Aptos" pitchFamily="34" charset="-120"/>
               </a:rPr>
-              <a:t>Â© Paula Soper</a:t>
+              <a:t>Copyright Paula Soper</a:t>
             </a:r>
             <a:endParaRPr lang="en-US" sz="800" dirty="0"/>
           </a:p>
@@ -14637,77 +15946,13 @@
       </p:sp>
       <p:sp>
         <p:nvSpPr>
-          <p:cNvPr id="8" name="Shape 6"/>
+          <p:cNvPr id="8" name="Text 6"/>
           <p:cNvSpPr/>
           <p:nvPr/>
         </p:nvSpPr>
         <p:spPr>
           <a:xfrm>
             <a:off x="640080" y="658368"/>
-            <a:ext cx="420624" cy="420624"/>
-          </a:xfrm>
-          <a:prstGeom prst="ellipse">
-            <a:avLst/>
-          </a:prstGeom>
-          <a:solidFill>
-            <a:srgbClr val="0068B7"/>
-          </a:solidFill>
-          <a:ln w="12700">
-            <a:solidFill>
-              <a:srgbClr val="0068B7"/>
-            </a:solidFill>
-            <a:prstDash val="solid"/>
-          </a:ln>
-        </p:spPr>
-      </p:sp>
-      <p:sp>
-        <p:nvSpPr>
-          <p:cNvPr id="9" name="Text 7"/>
-          <p:cNvSpPr/>
-          <p:nvPr/>
-        </p:nvSpPr>
-        <p:spPr>
-          <a:xfrm>
-            <a:off x="640080" y="731520"/>
-            <a:ext cx="420624" cy="164592"/>
-          </a:xfrm>
-          <a:prstGeom prst="rect">
-            <a:avLst/>
-          </a:prstGeom>
-          <a:noFill/>
-          <a:ln/>
-        </p:spPr>
-        <p:txBody>
-          <a:bodyPr wrap="square" lIns="0" tIns="0" rIns="0" bIns="0" rtlCol="0" anchor="ctr"/>
-          <a:lstStyle/>
-          <a:p>
-            <a:pPr algn="ctr" indent="0" marL="0">
-              <a:buNone/>
-            </a:pPr>
-            <a:r>
-              <a:rPr lang="en-US" sz="1100" b="1" dirty="0">
-                <a:solidFill>
-                  <a:srgbClr val="FFFFFF"/>
-                </a:solidFill>
-                <a:latin typeface="Aptos" pitchFamily="34" charset="0"/>
-                <a:ea typeface="Aptos" pitchFamily="34" charset="-122"/>
-                <a:cs typeface="Aptos" pitchFamily="34" charset="-120"/>
-              </a:rPr>
-              <a:t>3</a:t>
-            </a:r>
-            <a:endParaRPr lang="en-US" sz="1100" dirty="0"/>
-          </a:p>
-        </p:txBody>
-      </p:sp>
-      <p:sp>
-        <p:nvSpPr>
-          <p:cNvPr id="10" name="Text 8"/>
-          <p:cNvSpPr/>
-          <p:nvPr/>
-        </p:nvSpPr>
-        <p:spPr>
-          <a:xfrm>
-            <a:off x="640080" y="621792"/>
             <a:ext cx="10881360" cy="713232"/>
           </a:xfrm>
           <a:prstGeom prst="rect">
@@ -14742,14 +15987,14 @@
       </p:sp>
       <p:sp>
         <p:nvSpPr>
-          <p:cNvPr id="11" name="Text 9"/>
+          <p:cNvPr id="9" name="Text 7"/>
           <p:cNvSpPr/>
           <p:nvPr/>
         </p:nvSpPr>
         <p:spPr>
           <a:xfrm>
             <a:off x="868680" y="1508760"/>
-            <a:ext cx="6537960" cy="4160520"/>
+            <a:ext cx="6309360" cy="4160520"/>
           </a:xfrm>
           <a:prstGeom prst="rect">
             <a:avLst/>
@@ -14808,18 +16053,18 @@
       </p:sp>
       <p:sp>
         <p:nvSpPr>
-          <p:cNvPr id="12" name="Shape 10"/>
-          <p:cNvSpPr/>
-          <p:nvPr/>
-        </p:nvSpPr>
-        <p:spPr>
-          <a:xfrm>
-            <a:off x="7909560" y="1417320"/>
-            <a:ext cx="3154680" cy="1828800"/>
+          <p:cNvPr id="10" name="Shape 8"/>
+          <p:cNvSpPr/>
+          <p:nvPr/>
+        </p:nvSpPr>
+        <p:spPr>
+          <a:xfrm>
+            <a:off x="7635240" y="1325880"/>
+            <a:ext cx="3474720" cy="1325880"/>
           </a:xfrm>
           <a:prstGeom prst="roundRect">
             <a:avLst>
-              <a:gd name="adj" fmla="val 6000"/>
+              <a:gd name="adj" fmla="val 8276"/>
             </a:avLst>
           </a:prstGeom>
           <a:solidFill>
@@ -14835,14 +16080,14 @@
       </p:sp>
       <p:sp>
         <p:nvSpPr>
-          <p:cNvPr id="13" name="Text 11"/>
-          <p:cNvSpPr/>
-          <p:nvPr/>
-        </p:nvSpPr>
-        <p:spPr>
-          <a:xfrm>
-            <a:off x="8074152" y="1563624"/>
-            <a:ext cx="2825496" cy="256032"/>
+          <p:cNvPr id="11" name="Text 9"/>
+          <p:cNvSpPr/>
+          <p:nvPr/>
+        </p:nvSpPr>
+        <p:spPr>
+          <a:xfrm>
+            <a:off x="7799832" y="1472184"/>
+            <a:ext cx="3145536" cy="256032"/>
           </a:xfrm>
           <a:prstGeom prst="rect">
             <a:avLst/>
@@ -14866,7 +16111,7 @@
                 <a:ea typeface="Aptos" pitchFamily="34" charset="-122"/>
                 <a:cs typeface="Aptos" pitchFamily="34" charset="-120"/>
               </a:rPr>
-              <a:t>Key idea</a:t>
+              <a:t>Core concept</a:t>
             </a:r>
             <a:endParaRPr lang="en-US" sz="1300" dirty="0"/>
           </a:p>
@@ -14874,14 +16119,14 @@
       </p:sp>
       <p:sp>
         <p:nvSpPr>
-          <p:cNvPr id="14" name="Text 12"/>
-          <p:cNvSpPr/>
-          <p:nvPr/>
-        </p:nvSpPr>
-        <p:spPr>
-          <a:xfrm>
-            <a:off x="8074152" y="1920240"/>
-            <a:ext cx="2825496" cy="1188720"/>
+          <p:cNvPr id="12" name="Text 10"/>
+          <p:cNvSpPr/>
+          <p:nvPr/>
+        </p:nvSpPr>
+        <p:spPr>
+          <a:xfrm>
+            <a:off x="7799832" y="1828800"/>
+            <a:ext cx="3145536" cy="685800"/>
           </a:xfrm>
           <a:prstGeom prst="rect">
             <a:avLst/>
@@ -14915,18 +16160,159 @@
       </p:sp>
       <p:sp>
         <p:nvSpPr>
-          <p:cNvPr id="15" name="Shape 13"/>
-          <p:cNvSpPr/>
-          <p:nvPr/>
-        </p:nvSpPr>
-        <p:spPr>
-          <a:xfrm>
-            <a:off x="7909560" y="3520440"/>
-            <a:ext cx="3154680" cy="1737360"/>
+          <p:cNvPr id="13" name="Shape 11"/>
+          <p:cNvSpPr/>
+          <p:nvPr/>
+        </p:nvSpPr>
+        <p:spPr>
+          <a:xfrm>
+            <a:off x="7635240" y="2788920"/>
+            <a:ext cx="3474720" cy="1536192"/>
           </a:xfrm>
           <a:prstGeom prst="roundRect">
             <a:avLst>
-              <a:gd name="adj" fmla="val 6316"/>
+              <a:gd name="adj" fmla="val 7143"/>
+            </a:avLst>
+          </a:prstGeom>
+          <a:solidFill>
+            <a:srgbClr val="FFFFFF">
+              <a:alpha val="88000"/>
+            </a:srgbClr>
+          </a:solidFill>
+          <a:ln w="12700">
+            <a:solidFill>
+              <a:srgbClr val="D6E8F2"/>
+            </a:solidFill>
+            <a:prstDash val="solid"/>
+          </a:ln>
+        </p:spPr>
+      </p:sp>
+      <p:sp>
+        <p:nvSpPr>
+          <p:cNvPr id="14" name="Shape 12"/>
+          <p:cNvSpPr/>
+          <p:nvPr/>
+        </p:nvSpPr>
+        <p:spPr>
+          <a:xfrm>
+            <a:off x="8074152" y="3291840"/>
+            <a:ext cx="2596896" cy="749808"/>
+          </a:xfrm>
+          <a:prstGeom prst="rect">
+            <a:avLst/>
+          </a:prstGeom>
+          <a:solidFill>
+            <a:srgbClr val="EAF6F8"/>
+          </a:solidFill>
+          <a:ln w="12700">
+            <a:solidFill>
+              <a:srgbClr val="8ABBD8"/>
+            </a:solidFill>
+            <a:prstDash val="solid"/>
+          </a:ln>
+        </p:spPr>
+      </p:sp>
+      <p:sp>
+        <p:nvSpPr>
+          <p:cNvPr id="15" name="Shape 13"/>
+          <p:cNvSpPr/>
+          <p:nvPr/>
+        </p:nvSpPr>
+        <p:spPr>
+          <a:xfrm>
+            <a:off x="8202168" y="3721608"/>
+            <a:ext cx="2340864" cy="0"/>
+          </a:xfrm>
+          <a:prstGeom prst="line">
+            <a:avLst/>
+          </a:prstGeom>
+          <a:noFill/>
+          <a:ln w="19050">
+            <a:solidFill>
+              <a:srgbClr val="0068B7"/>
+            </a:solidFill>
+            <a:prstDash val="solid"/>
+          </a:ln>
+        </p:spPr>
+      </p:sp>
+      <p:sp>
+        <p:nvSpPr>
+          <p:cNvPr id="16" name="Shape 14"/>
+          <p:cNvSpPr/>
+          <p:nvPr/>
+        </p:nvSpPr>
+        <p:spPr>
+          <a:xfrm>
+            <a:off x="9198864" y="4206240"/>
+            <a:ext cx="347472" cy="347472"/>
+          </a:xfrm>
+          <a:prstGeom prst="ellipse">
+            <a:avLst/>
+          </a:prstGeom>
+          <a:solidFill>
+            <a:srgbClr val="2F8A28"/>
+          </a:solidFill>
+          <a:ln w="12700">
+            <a:solidFill>
+              <a:srgbClr val="2F8A28"/>
+            </a:solidFill>
+            <a:prstDash val="solid"/>
+          </a:ln>
+        </p:spPr>
+      </p:sp>
+      <p:sp>
+        <p:nvSpPr>
+          <p:cNvPr id="17" name="Text 15"/>
+          <p:cNvSpPr/>
+          <p:nvPr/>
+        </p:nvSpPr>
+        <p:spPr>
+          <a:xfrm>
+            <a:off x="7909560" y="3977640"/>
+            <a:ext cx="2926080" cy="182880"/>
+          </a:xfrm>
+          <a:prstGeom prst="rect">
+            <a:avLst/>
+          </a:prstGeom>
+          <a:noFill/>
+          <a:ln/>
+        </p:spPr>
+        <p:txBody>
+          <a:bodyPr wrap="square" lIns="0" tIns="0" rIns="0" bIns="0" rtlCol="0" anchor="ctr"/>
+          <a:lstStyle/>
+          <a:p>
+            <a:pPr algn="ctr" indent="0" marL="0">
+              <a:buNone/>
+            </a:pPr>
+            <a:r>
+              <a:rPr lang="en-US" sz="1000" dirty="0">
+                <a:solidFill>
+                  <a:srgbClr val="003A63"/>
+                </a:solidFill>
+                <a:latin typeface="Aptos" pitchFamily="34" charset="0"/>
+                <a:ea typeface="Aptos" pitchFamily="34" charset="-122"/>
+                <a:cs typeface="Aptos" pitchFamily="34" charset="-120"/>
+              </a:rPr>
+              <a:t>Concept to action</a:t>
+            </a:r>
+            <a:endParaRPr lang="en-US" sz="1000" dirty="0"/>
+          </a:p>
+        </p:txBody>
+      </p:sp>
+      <p:sp>
+        <p:nvSpPr>
+          <p:cNvPr id="18" name="Shape 16"/>
+          <p:cNvSpPr/>
+          <p:nvPr/>
+        </p:nvSpPr>
+        <p:spPr>
+          <a:xfrm>
+            <a:off x="7635240" y="4498848"/>
+            <a:ext cx="3474720" cy="1143000"/>
+          </a:xfrm>
+          <a:prstGeom prst="roundRect">
+            <a:avLst>
+              <a:gd name="adj" fmla="val 9600"/>
             </a:avLst>
           </a:prstGeom>
           <a:solidFill>
@@ -14942,14 +16328,14 @@
       </p:sp>
       <p:sp>
         <p:nvSpPr>
-          <p:cNvPr id="16" name="Text 14"/>
-          <p:cNvSpPr/>
-          <p:nvPr/>
-        </p:nvSpPr>
-        <p:spPr>
-          <a:xfrm>
-            <a:off x="8074152" y="3666744"/>
-            <a:ext cx="2825496" cy="256032"/>
+          <p:cNvPr id="19" name="Text 17"/>
+          <p:cNvSpPr/>
+          <p:nvPr/>
+        </p:nvSpPr>
+        <p:spPr>
+          <a:xfrm>
+            <a:off x="7799832" y="4645152"/>
+            <a:ext cx="3145536" cy="256032"/>
           </a:xfrm>
           <a:prstGeom prst="rect">
             <a:avLst/>
@@ -14973,7 +16359,7 @@
                 <a:ea typeface="Aptos" pitchFamily="34" charset="-122"/>
                 <a:cs typeface="Aptos" pitchFamily="34" charset="-120"/>
               </a:rPr>
-              <a:t>Use this for</a:t>
+              <a:t>Apply it</a:t>
             </a:r>
             <a:endParaRPr lang="en-US" sz="1300" dirty="0"/>
           </a:p>
@@ -14981,14 +16367,14 @@
       </p:sp>
       <p:sp>
         <p:nvSpPr>
-          <p:cNvPr id="17" name="Text 15"/>
-          <p:cNvSpPr/>
-          <p:nvPr/>
-        </p:nvSpPr>
-        <p:spPr>
-          <a:xfrm>
-            <a:off x="8074152" y="4023360"/>
-            <a:ext cx="2825496" cy="1097280"/>
+          <p:cNvPr id="20" name="Text 18"/>
+          <p:cNvSpPr/>
+          <p:nvPr/>
+        </p:nvSpPr>
+        <p:spPr>
+          <a:xfrm>
+            <a:off x="7799832" y="5001768"/>
+            <a:ext cx="3145536" cy="502920"/>
           </a:xfrm>
           <a:prstGeom prst="rect">
             <a:avLst/>
@@ -15014,7 +16400,7 @@
                 <a:ea typeface="Aptos" pitchFamily="34" charset="-122"/>
                 <a:cs typeface="Aptos" pitchFamily="34" charset="-120"/>
               </a:rPr>
-              <a:t>Connect the concept to public health decisions, safeguards, documentation, or implementation work.</a:t>
+              <a:t>Connect the concept to public health purpose, responsible use, required safeguards, documentation, and the next action a department should take.</a:t>
             </a:r>
             <a:endParaRPr lang="en-US" sz="1550" dirty="0"/>
           </a:p>
@@ -15188,8 +16574,8 @@
         </p:nvSpPr>
         <p:spPr>
           <a:xfrm>
-            <a:off x="9966960" y="6537960"/>
-            <a:ext cx="1645920" cy="201168"/>
+            <a:off x="9646920" y="6537960"/>
+            <a:ext cx="1965960" cy="201168"/>
           </a:xfrm>
           <a:prstGeom prst="rect">
             <a:avLst/>
@@ -15213,7 +16599,7 @@
                 <a:ea typeface="Aptos" pitchFamily="34" charset="-122"/>
                 <a:cs typeface="Aptos" pitchFamily="34" charset="-120"/>
               </a:rPr>
-              <a:t>Â© Paula Soper</a:t>
+              <a:t>Copyright Paula Soper</a:t>
             </a:r>
             <a:endParaRPr lang="en-US" sz="800" dirty="0"/>
           </a:p>
@@ -15260,77 +16646,13 @@
       </p:sp>
       <p:sp>
         <p:nvSpPr>
-          <p:cNvPr id="8" name="Shape 6"/>
+          <p:cNvPr id="8" name="Text 6"/>
           <p:cNvSpPr/>
           <p:nvPr/>
         </p:nvSpPr>
         <p:spPr>
           <a:xfrm>
             <a:off x="640080" y="658368"/>
-            <a:ext cx="420624" cy="420624"/>
-          </a:xfrm>
-          <a:prstGeom prst="ellipse">
-            <a:avLst/>
-          </a:prstGeom>
-          <a:solidFill>
-            <a:srgbClr val="0068B7"/>
-          </a:solidFill>
-          <a:ln w="12700">
-            <a:solidFill>
-              <a:srgbClr val="0068B7"/>
-            </a:solidFill>
-            <a:prstDash val="solid"/>
-          </a:ln>
-        </p:spPr>
-      </p:sp>
-      <p:sp>
-        <p:nvSpPr>
-          <p:cNvPr id="9" name="Text 7"/>
-          <p:cNvSpPr/>
-          <p:nvPr/>
-        </p:nvSpPr>
-        <p:spPr>
-          <a:xfrm>
-            <a:off x="640080" y="731520"/>
-            <a:ext cx="420624" cy="164592"/>
-          </a:xfrm>
-          <a:prstGeom prst="rect">
-            <a:avLst/>
-          </a:prstGeom>
-          <a:noFill/>
-          <a:ln/>
-        </p:spPr>
-        <p:txBody>
-          <a:bodyPr wrap="square" lIns="0" tIns="0" rIns="0" bIns="0" rtlCol="0" anchor="ctr"/>
-          <a:lstStyle/>
-          <a:p>
-            <a:pPr algn="ctr" indent="0" marL="0">
-              <a:buNone/>
-            </a:pPr>
-            <a:r>
-              <a:rPr lang="en-US" sz="1100" b="1" dirty="0">
-                <a:solidFill>
-                  <a:srgbClr val="FFFFFF"/>
-                </a:solidFill>
-                <a:latin typeface="Aptos" pitchFamily="34" charset="0"/>
-                <a:ea typeface="Aptos" pitchFamily="34" charset="-122"/>
-                <a:cs typeface="Aptos" pitchFamily="34" charset="-120"/>
-              </a:rPr>
-              <a:t>4</a:t>
-            </a:r>
-            <a:endParaRPr lang="en-US" sz="1100" dirty="0"/>
-          </a:p>
-        </p:txBody>
-      </p:sp>
-      <p:sp>
-        <p:nvSpPr>
-          <p:cNvPr id="10" name="Text 8"/>
-          <p:cNvSpPr/>
-          <p:nvPr/>
-        </p:nvSpPr>
-        <p:spPr>
-          <a:xfrm>
-            <a:off x="640080" y="621792"/>
             <a:ext cx="10881360" cy="713232"/>
           </a:xfrm>
           <a:prstGeom prst="rect">
@@ -15365,14 +16687,14 @@
       </p:sp>
       <p:sp>
         <p:nvSpPr>
-          <p:cNvPr id="11" name="Text 9"/>
+          <p:cNvPr id="9" name="Text 7"/>
           <p:cNvSpPr/>
           <p:nvPr/>
         </p:nvSpPr>
         <p:spPr>
           <a:xfrm>
             <a:off x="868680" y="1508760"/>
-            <a:ext cx="6537960" cy="4160520"/>
+            <a:ext cx="6309360" cy="4160520"/>
           </a:xfrm>
           <a:prstGeom prst="rect">
             <a:avLst/>
@@ -15431,18 +16753,18 @@
       </p:sp>
       <p:sp>
         <p:nvSpPr>
-          <p:cNvPr id="12" name="Shape 10"/>
-          <p:cNvSpPr/>
-          <p:nvPr/>
-        </p:nvSpPr>
-        <p:spPr>
-          <a:xfrm>
-            <a:off x="7909560" y="1417320"/>
-            <a:ext cx="3154680" cy="1828800"/>
+          <p:cNvPr id="10" name="Shape 8"/>
+          <p:cNvSpPr/>
+          <p:nvPr/>
+        </p:nvSpPr>
+        <p:spPr>
+          <a:xfrm>
+            <a:off x="7635240" y="1325880"/>
+            <a:ext cx="3474720" cy="1325880"/>
           </a:xfrm>
           <a:prstGeom prst="roundRect">
             <a:avLst>
-              <a:gd name="adj" fmla="val 6000"/>
+              <a:gd name="adj" fmla="val 8276"/>
             </a:avLst>
           </a:prstGeom>
           <a:solidFill>
@@ -15458,14 +16780,14 @@
       </p:sp>
       <p:sp>
         <p:nvSpPr>
-          <p:cNvPr id="13" name="Text 11"/>
-          <p:cNvSpPr/>
-          <p:nvPr/>
-        </p:nvSpPr>
-        <p:spPr>
-          <a:xfrm>
-            <a:off x="8074152" y="1563624"/>
-            <a:ext cx="2825496" cy="256032"/>
+          <p:cNvPr id="11" name="Text 9"/>
+          <p:cNvSpPr/>
+          <p:nvPr/>
+        </p:nvSpPr>
+        <p:spPr>
+          <a:xfrm>
+            <a:off x="7799832" y="1472184"/>
+            <a:ext cx="3145536" cy="256032"/>
           </a:xfrm>
           <a:prstGeom prst="rect">
             <a:avLst/>
@@ -15489,7 +16811,7 @@
                 <a:ea typeface="Aptos" pitchFamily="34" charset="-122"/>
                 <a:cs typeface="Aptos" pitchFamily="34" charset="-120"/>
               </a:rPr>
-              <a:t>Key idea</a:t>
+              <a:t>Core concept</a:t>
             </a:r>
             <a:endParaRPr lang="en-US" sz="1300" dirty="0"/>
           </a:p>
@@ -15497,14 +16819,14 @@
       </p:sp>
       <p:sp>
         <p:nvSpPr>
-          <p:cNvPr id="14" name="Text 12"/>
-          <p:cNvSpPr/>
-          <p:nvPr/>
-        </p:nvSpPr>
-        <p:spPr>
-          <a:xfrm>
-            <a:off x="8074152" y="1920240"/>
-            <a:ext cx="2825496" cy="1188720"/>
+          <p:cNvPr id="12" name="Text 10"/>
+          <p:cNvSpPr/>
+          <p:nvPr/>
+        </p:nvSpPr>
+        <p:spPr>
+          <a:xfrm>
+            <a:off x="7799832" y="1828800"/>
+            <a:ext cx="3145536" cy="685800"/>
           </a:xfrm>
           <a:prstGeom prst="rect">
             <a:avLst/>
@@ -15538,18 +16860,159 @@
       </p:sp>
       <p:sp>
         <p:nvSpPr>
-          <p:cNvPr id="15" name="Shape 13"/>
-          <p:cNvSpPr/>
-          <p:nvPr/>
-        </p:nvSpPr>
-        <p:spPr>
-          <a:xfrm>
-            <a:off x="7909560" y="3520440"/>
-            <a:ext cx="3154680" cy="1737360"/>
+          <p:cNvPr id="13" name="Shape 11"/>
+          <p:cNvSpPr/>
+          <p:nvPr/>
+        </p:nvSpPr>
+        <p:spPr>
+          <a:xfrm>
+            <a:off x="7635240" y="2788920"/>
+            <a:ext cx="3474720" cy="1536192"/>
           </a:xfrm>
           <a:prstGeom prst="roundRect">
             <a:avLst>
-              <a:gd name="adj" fmla="val 6316"/>
+              <a:gd name="adj" fmla="val 7143"/>
+            </a:avLst>
+          </a:prstGeom>
+          <a:solidFill>
+            <a:srgbClr val="FFFFFF">
+              <a:alpha val="88000"/>
+            </a:srgbClr>
+          </a:solidFill>
+          <a:ln w="12700">
+            <a:solidFill>
+              <a:srgbClr val="D6E8F2"/>
+            </a:solidFill>
+            <a:prstDash val="solid"/>
+          </a:ln>
+        </p:spPr>
+      </p:sp>
+      <p:sp>
+        <p:nvSpPr>
+          <p:cNvPr id="14" name="Shape 12"/>
+          <p:cNvSpPr/>
+          <p:nvPr/>
+        </p:nvSpPr>
+        <p:spPr>
+          <a:xfrm>
+            <a:off x="8074152" y="3291840"/>
+            <a:ext cx="2596896" cy="749808"/>
+          </a:xfrm>
+          <a:prstGeom prst="rect">
+            <a:avLst/>
+          </a:prstGeom>
+          <a:solidFill>
+            <a:srgbClr val="EAF6F8"/>
+          </a:solidFill>
+          <a:ln w="12700">
+            <a:solidFill>
+              <a:srgbClr val="8ABBD8"/>
+            </a:solidFill>
+            <a:prstDash val="solid"/>
+          </a:ln>
+        </p:spPr>
+      </p:sp>
+      <p:sp>
+        <p:nvSpPr>
+          <p:cNvPr id="15" name="Shape 13"/>
+          <p:cNvSpPr/>
+          <p:nvPr/>
+        </p:nvSpPr>
+        <p:spPr>
+          <a:xfrm>
+            <a:off x="8202168" y="3721608"/>
+            <a:ext cx="2340864" cy="0"/>
+          </a:xfrm>
+          <a:prstGeom prst="line">
+            <a:avLst/>
+          </a:prstGeom>
+          <a:noFill/>
+          <a:ln w="19050">
+            <a:solidFill>
+              <a:srgbClr val="0068B7"/>
+            </a:solidFill>
+            <a:prstDash val="solid"/>
+          </a:ln>
+        </p:spPr>
+      </p:sp>
+      <p:sp>
+        <p:nvSpPr>
+          <p:cNvPr id="16" name="Shape 14"/>
+          <p:cNvSpPr/>
+          <p:nvPr/>
+        </p:nvSpPr>
+        <p:spPr>
+          <a:xfrm>
+            <a:off x="9198864" y="4206240"/>
+            <a:ext cx="347472" cy="347472"/>
+          </a:xfrm>
+          <a:prstGeom prst="ellipse">
+            <a:avLst/>
+          </a:prstGeom>
+          <a:solidFill>
+            <a:srgbClr val="2F8A28"/>
+          </a:solidFill>
+          <a:ln w="12700">
+            <a:solidFill>
+              <a:srgbClr val="2F8A28"/>
+            </a:solidFill>
+            <a:prstDash val="solid"/>
+          </a:ln>
+        </p:spPr>
+      </p:sp>
+      <p:sp>
+        <p:nvSpPr>
+          <p:cNvPr id="17" name="Text 15"/>
+          <p:cNvSpPr/>
+          <p:nvPr/>
+        </p:nvSpPr>
+        <p:spPr>
+          <a:xfrm>
+            <a:off x="7909560" y="3977640"/>
+            <a:ext cx="2926080" cy="182880"/>
+          </a:xfrm>
+          <a:prstGeom prst="rect">
+            <a:avLst/>
+          </a:prstGeom>
+          <a:noFill/>
+          <a:ln/>
+        </p:spPr>
+        <p:txBody>
+          <a:bodyPr wrap="square" lIns="0" tIns="0" rIns="0" bIns="0" rtlCol="0" anchor="ctr"/>
+          <a:lstStyle/>
+          <a:p>
+            <a:pPr algn="ctr" indent="0" marL="0">
+              <a:buNone/>
+            </a:pPr>
+            <a:r>
+              <a:rPr lang="en-US" sz="1000" dirty="0">
+                <a:solidFill>
+                  <a:srgbClr val="003A63"/>
+                </a:solidFill>
+                <a:latin typeface="Aptos" pitchFamily="34" charset="0"/>
+                <a:ea typeface="Aptos" pitchFamily="34" charset="-122"/>
+                <a:cs typeface="Aptos" pitchFamily="34" charset="-120"/>
+              </a:rPr>
+              <a:t>Concept to action</a:t>
+            </a:r>
+            <a:endParaRPr lang="en-US" sz="1000" dirty="0"/>
+          </a:p>
+        </p:txBody>
+      </p:sp>
+      <p:sp>
+        <p:nvSpPr>
+          <p:cNvPr id="18" name="Shape 16"/>
+          <p:cNvSpPr/>
+          <p:nvPr/>
+        </p:nvSpPr>
+        <p:spPr>
+          <a:xfrm>
+            <a:off x="7635240" y="4498848"/>
+            <a:ext cx="3474720" cy="1143000"/>
+          </a:xfrm>
+          <a:prstGeom prst="roundRect">
+            <a:avLst>
+              <a:gd name="adj" fmla="val 9600"/>
             </a:avLst>
           </a:prstGeom>
           <a:solidFill>
@@ -15565,14 +17028,14 @@
       </p:sp>
       <p:sp>
         <p:nvSpPr>
-          <p:cNvPr id="16" name="Text 14"/>
-          <p:cNvSpPr/>
-          <p:nvPr/>
-        </p:nvSpPr>
-        <p:spPr>
-          <a:xfrm>
-            <a:off x="8074152" y="3666744"/>
-            <a:ext cx="2825496" cy="256032"/>
+          <p:cNvPr id="19" name="Text 17"/>
+          <p:cNvSpPr/>
+          <p:nvPr/>
+        </p:nvSpPr>
+        <p:spPr>
+          <a:xfrm>
+            <a:off x="7799832" y="4645152"/>
+            <a:ext cx="3145536" cy="256032"/>
           </a:xfrm>
           <a:prstGeom prst="rect">
             <a:avLst/>
@@ -15596,7 +17059,7 @@
                 <a:ea typeface="Aptos" pitchFamily="34" charset="-122"/>
                 <a:cs typeface="Aptos" pitchFamily="34" charset="-120"/>
               </a:rPr>
-              <a:t>Use this for</a:t>
+              <a:t>Apply it</a:t>
             </a:r>
             <a:endParaRPr lang="en-US" sz="1300" dirty="0"/>
           </a:p>
@@ -15604,14 +17067,14 @@
       </p:sp>
       <p:sp>
         <p:nvSpPr>
-          <p:cNvPr id="17" name="Text 15"/>
-          <p:cNvSpPr/>
-          <p:nvPr/>
-        </p:nvSpPr>
-        <p:spPr>
-          <a:xfrm>
-            <a:off x="8074152" y="4023360"/>
-            <a:ext cx="2825496" cy="1097280"/>
+          <p:cNvPr id="20" name="Text 18"/>
+          <p:cNvSpPr/>
+          <p:nvPr/>
+        </p:nvSpPr>
+        <p:spPr>
+          <a:xfrm>
+            <a:off x="7799832" y="5001768"/>
+            <a:ext cx="3145536" cy="502920"/>
           </a:xfrm>
           <a:prstGeom prst="rect">
             <a:avLst/>
@@ -15637,7 +17100,7 @@
                 <a:ea typeface="Aptos" pitchFamily="34" charset="-122"/>
                 <a:cs typeface="Aptos" pitchFamily="34" charset="-120"/>
               </a:rPr>
-              <a:t>Connect the concept to public health decisions, safeguards, documentation, or implementation work.</a:t>
+              <a:t>Connect the concept to public health purpose, responsible use, required safeguards, documentation, and the next action a department should take.</a:t>
             </a:r>
             <a:endParaRPr lang="en-US" sz="1550" dirty="0"/>
           </a:p>
@@ -15811,8 +17274,8 @@
         </p:nvSpPr>
         <p:spPr>
           <a:xfrm>
-            <a:off x="9966960" y="6537960"/>
-            <a:ext cx="1645920" cy="201168"/>
+            <a:off x="9646920" y="6537960"/>
+            <a:ext cx="1965960" cy="201168"/>
           </a:xfrm>
           <a:prstGeom prst="rect">
             <a:avLst/>
@@ -15836,7 +17299,7 @@
                 <a:ea typeface="Aptos" pitchFamily="34" charset="-122"/>
                 <a:cs typeface="Aptos" pitchFamily="34" charset="-120"/>
               </a:rPr>
-              <a:t>Â© Paula Soper</a:t>
+              <a:t>Copyright Paula Soper</a:t>
             </a:r>
             <a:endParaRPr lang="en-US" sz="800" dirty="0"/>
           </a:p>
@@ -15931,7 +17394,7 @@
         <p:spPr>
           <a:xfrm>
             <a:off x="868680" y="1508760"/>
-            <a:ext cx="6537960" cy="4160520"/>
+            <a:ext cx="6309360" cy="4160520"/>
           </a:xfrm>
           <a:prstGeom prst="rect">
             <a:avLst/>
@@ -15996,12 +17459,12 @@
         </p:nvSpPr>
         <p:spPr>
           <a:xfrm>
-            <a:off x="7909560" y="1417320"/>
-            <a:ext cx="3154680" cy="1828800"/>
+            <a:off x="7635240" y="1325880"/>
+            <a:ext cx="3474720" cy="1325880"/>
           </a:xfrm>
           <a:prstGeom prst="roundRect">
             <a:avLst>
-              <a:gd name="adj" fmla="val 6000"/>
+              <a:gd name="adj" fmla="val 8276"/>
             </a:avLst>
           </a:prstGeom>
           <a:solidFill>
@@ -16023,8 +17486,8 @@
         </p:nvSpPr>
         <p:spPr>
           <a:xfrm>
-            <a:off x="8074152" y="1563624"/>
-            <a:ext cx="2825496" cy="256032"/>
+            <a:off x="7799832" y="1472184"/>
+            <a:ext cx="3145536" cy="256032"/>
           </a:xfrm>
           <a:prstGeom prst="rect">
             <a:avLst/>
@@ -16048,7 +17511,7 @@
                 <a:ea typeface="Aptos" pitchFamily="34" charset="-122"/>
                 <a:cs typeface="Aptos" pitchFamily="34" charset="-120"/>
               </a:rPr>
-              <a:t>Key idea</a:t>
+              <a:t>Core concept</a:t>
             </a:r>
             <a:endParaRPr lang="en-US" sz="1300" dirty="0"/>
           </a:p>
@@ -16062,8 +17525,8 @@
         </p:nvSpPr>
         <p:spPr>
           <a:xfrm>
-            <a:off x="8074152" y="1920240"/>
-            <a:ext cx="2825496" cy="1188720"/>
+            <a:off x="7799832" y="1828800"/>
+            <a:ext cx="3145536" cy="685800"/>
           </a:xfrm>
           <a:prstGeom prst="rect">
             <a:avLst/>
@@ -16103,12 +17566,153 @@
         </p:nvSpPr>
         <p:spPr>
           <a:xfrm>
-            <a:off x="7909560" y="3520440"/>
-            <a:ext cx="3154680" cy="1737360"/>
+            <a:off x="7635240" y="2788920"/>
+            <a:ext cx="3474720" cy="1536192"/>
           </a:xfrm>
           <a:prstGeom prst="roundRect">
             <a:avLst>
-              <a:gd name="adj" fmla="val 6316"/>
+              <a:gd name="adj" fmla="val 7143"/>
+            </a:avLst>
+          </a:prstGeom>
+          <a:solidFill>
+            <a:srgbClr val="FFFFFF">
+              <a:alpha val="88000"/>
+            </a:srgbClr>
+          </a:solidFill>
+          <a:ln w="12700">
+            <a:solidFill>
+              <a:srgbClr val="D6E8F2"/>
+            </a:solidFill>
+            <a:prstDash val="solid"/>
+          </a:ln>
+        </p:spPr>
+      </p:sp>
+      <p:sp>
+        <p:nvSpPr>
+          <p:cNvPr id="14" name="Shape 12"/>
+          <p:cNvSpPr/>
+          <p:nvPr/>
+        </p:nvSpPr>
+        <p:spPr>
+          <a:xfrm>
+            <a:off x="8074152" y="3291840"/>
+            <a:ext cx="2596896" cy="749808"/>
+          </a:xfrm>
+          <a:prstGeom prst="rect">
+            <a:avLst/>
+          </a:prstGeom>
+          <a:solidFill>
+            <a:srgbClr val="EAF6F8"/>
+          </a:solidFill>
+          <a:ln w="12700">
+            <a:solidFill>
+              <a:srgbClr val="8ABBD8"/>
+            </a:solidFill>
+            <a:prstDash val="solid"/>
+          </a:ln>
+        </p:spPr>
+      </p:sp>
+      <p:sp>
+        <p:nvSpPr>
+          <p:cNvPr id="15" name="Shape 13"/>
+          <p:cNvSpPr/>
+          <p:nvPr/>
+        </p:nvSpPr>
+        <p:spPr>
+          <a:xfrm>
+            <a:off x="8202168" y="3721608"/>
+            <a:ext cx="2340864" cy="0"/>
+          </a:xfrm>
+          <a:prstGeom prst="line">
+            <a:avLst/>
+          </a:prstGeom>
+          <a:noFill/>
+          <a:ln w="19050">
+            <a:solidFill>
+              <a:srgbClr val="0068B7"/>
+            </a:solidFill>
+            <a:prstDash val="solid"/>
+          </a:ln>
+        </p:spPr>
+      </p:sp>
+      <p:sp>
+        <p:nvSpPr>
+          <p:cNvPr id="16" name="Shape 14"/>
+          <p:cNvSpPr/>
+          <p:nvPr/>
+        </p:nvSpPr>
+        <p:spPr>
+          <a:xfrm>
+            <a:off x="9198864" y="4206240"/>
+            <a:ext cx="347472" cy="347472"/>
+          </a:xfrm>
+          <a:prstGeom prst="ellipse">
+            <a:avLst/>
+          </a:prstGeom>
+          <a:solidFill>
+            <a:srgbClr val="2F8A28"/>
+          </a:solidFill>
+          <a:ln w="12700">
+            <a:solidFill>
+              <a:srgbClr val="2F8A28"/>
+            </a:solidFill>
+            <a:prstDash val="solid"/>
+          </a:ln>
+        </p:spPr>
+      </p:sp>
+      <p:sp>
+        <p:nvSpPr>
+          <p:cNvPr id="17" name="Text 15"/>
+          <p:cNvSpPr/>
+          <p:nvPr/>
+        </p:nvSpPr>
+        <p:spPr>
+          <a:xfrm>
+            <a:off x="7909560" y="3977640"/>
+            <a:ext cx="2926080" cy="182880"/>
+          </a:xfrm>
+          <a:prstGeom prst="rect">
+            <a:avLst/>
+          </a:prstGeom>
+          <a:noFill/>
+          <a:ln/>
+        </p:spPr>
+        <p:txBody>
+          <a:bodyPr wrap="square" lIns="0" tIns="0" rIns="0" bIns="0" rtlCol="0" anchor="ctr"/>
+          <a:lstStyle/>
+          <a:p>
+            <a:pPr algn="ctr" indent="0" marL="0">
+              <a:buNone/>
+            </a:pPr>
+            <a:r>
+              <a:rPr lang="en-US" sz="1000" dirty="0">
+                <a:solidFill>
+                  <a:srgbClr val="003A63"/>
+                </a:solidFill>
+                <a:latin typeface="Aptos" pitchFamily="34" charset="0"/>
+                <a:ea typeface="Aptos" pitchFamily="34" charset="-122"/>
+                <a:cs typeface="Aptos" pitchFamily="34" charset="-120"/>
+              </a:rPr>
+              <a:t>Concept to action</a:t>
+            </a:r>
+            <a:endParaRPr lang="en-US" sz="1000" dirty="0"/>
+          </a:p>
+        </p:txBody>
+      </p:sp>
+      <p:sp>
+        <p:nvSpPr>
+          <p:cNvPr id="18" name="Shape 16"/>
+          <p:cNvSpPr/>
+          <p:nvPr/>
+        </p:nvSpPr>
+        <p:spPr>
+          <a:xfrm>
+            <a:off x="7635240" y="4498848"/>
+            <a:ext cx="3474720" cy="1143000"/>
+          </a:xfrm>
+          <a:prstGeom prst="roundRect">
+            <a:avLst>
+              <a:gd name="adj" fmla="val 9600"/>
             </a:avLst>
           </a:prstGeom>
           <a:solidFill>
@@ -16124,14 +17728,14 @@
       </p:sp>
       <p:sp>
         <p:nvSpPr>
-          <p:cNvPr id="14" name="Text 12"/>
-          <p:cNvSpPr/>
-          <p:nvPr/>
-        </p:nvSpPr>
-        <p:spPr>
-          <a:xfrm>
-            <a:off x="8074152" y="3666744"/>
-            <a:ext cx="2825496" cy="256032"/>
+          <p:cNvPr id="19" name="Text 17"/>
+          <p:cNvSpPr/>
+          <p:nvPr/>
+        </p:nvSpPr>
+        <p:spPr>
+          <a:xfrm>
+            <a:off x="7799832" y="4645152"/>
+            <a:ext cx="3145536" cy="256032"/>
           </a:xfrm>
           <a:prstGeom prst="rect">
             <a:avLst/>
@@ -16155,7 +17759,7 @@
                 <a:ea typeface="Aptos" pitchFamily="34" charset="-122"/>
                 <a:cs typeface="Aptos" pitchFamily="34" charset="-120"/>
               </a:rPr>
-              <a:t>Use this for</a:t>
+              <a:t>Apply it</a:t>
             </a:r>
             <a:endParaRPr lang="en-US" sz="1300" dirty="0"/>
           </a:p>
@@ -16163,14 +17767,14 @@
       </p:sp>
       <p:sp>
         <p:nvSpPr>
-          <p:cNvPr id="15" name="Text 13"/>
-          <p:cNvSpPr/>
-          <p:nvPr/>
-        </p:nvSpPr>
-        <p:spPr>
-          <a:xfrm>
-            <a:off x="8074152" y="4023360"/>
-            <a:ext cx="2825496" cy="1097280"/>
+          <p:cNvPr id="20" name="Text 18"/>
+          <p:cNvSpPr/>
+          <p:nvPr/>
+        </p:nvSpPr>
+        <p:spPr>
+          <a:xfrm>
+            <a:off x="7799832" y="5001768"/>
+            <a:ext cx="3145536" cy="502920"/>
           </a:xfrm>
           <a:prstGeom prst="rect">
             <a:avLst/>
@@ -16196,7 +17800,7 @@
                 <a:ea typeface="Aptos" pitchFamily="34" charset="-122"/>
                 <a:cs typeface="Aptos" pitchFamily="34" charset="-120"/>
               </a:rPr>
-              <a:t>Connect the concept to public health decisions, safeguards, documentation, or implementation work.</a:t>
+              <a:t>Connect the concept to public health purpose, responsible use, required safeguards, documentation, and the next action a department should take.</a:t>
             </a:r>
             <a:endParaRPr lang="en-US" sz="1550" dirty="0"/>
           </a:p>

--- a/downloads/presentations/modules/ops-210.pptx
+++ b/downloads/presentations/modules/ops-210.pptx
@@ -3523,13 +3523,11 @@
             </a:avLst>
           </a:prstGeom>
           <a:solidFill>
-            <a:srgbClr val="FFFFFF">
-              <a:alpha val="88000"/>
-            </a:srgbClr>
+            <a:srgbClr val="FFFFFF"/>
           </a:solidFill>
           <a:ln w="12700">
             <a:solidFill>
-              <a:srgbClr val="D6E8F2"/>
+              <a:srgbClr val="B9D7E6"/>
             </a:solidFill>
             <a:prstDash val="solid"/>
           </a:ln>
@@ -3537,119 +3535,112 @@
       </p:sp>
       <p:sp>
         <p:nvSpPr>
-          <p:cNvPr id="14" name="Shape 12"/>
-          <p:cNvSpPr/>
-          <p:nvPr/>
-        </p:nvSpPr>
-        <p:spPr>
-          <a:xfrm>
-            <a:off x="8074152" y="3291840"/>
-            <a:ext cx="2596896" cy="749808"/>
-          </a:xfrm>
-          <a:prstGeom prst="rect">
-            <a:avLst/>
-          </a:prstGeom>
-          <a:solidFill>
-            <a:srgbClr val="EAF6F8"/>
-          </a:solidFill>
-          <a:ln w="12700">
-            <a:solidFill>
-              <a:srgbClr val="8ABBD8"/>
-            </a:solidFill>
-            <a:prstDash val="solid"/>
-          </a:ln>
-        </p:spPr>
-      </p:sp>
-      <p:sp>
-        <p:nvSpPr>
-          <p:cNvPr id="15" name="Shape 13"/>
-          <p:cNvSpPr/>
-          <p:nvPr/>
-        </p:nvSpPr>
-        <p:spPr>
-          <a:xfrm>
-            <a:off x="8202168" y="3721608"/>
-            <a:ext cx="2340864" cy="0"/>
-          </a:xfrm>
-          <a:prstGeom prst="line">
-            <a:avLst/>
-          </a:prstGeom>
-          <a:noFill/>
-          <a:ln w="19050">
-            <a:solidFill>
-              <a:srgbClr val="0068B7"/>
-            </a:solidFill>
-            <a:prstDash val="solid"/>
-          </a:ln>
-        </p:spPr>
+          <p:cNvPr id="14" name="Text 12"/>
+          <p:cNvSpPr/>
+          <p:nvPr/>
+        </p:nvSpPr>
+        <p:spPr>
+          <a:xfrm>
+            <a:off x="7799832" y="2935224"/>
+            <a:ext cx="3145536" cy="256032"/>
+          </a:xfrm>
+          <a:prstGeom prst="rect">
+            <a:avLst/>
+          </a:prstGeom>
+          <a:noFill/>
+          <a:ln/>
+        </p:spPr>
+        <p:txBody>
+          <a:bodyPr wrap="square" lIns="0" tIns="0" rIns="0" bIns="0" rtlCol="0" anchor="ctr"/>
+          <a:lstStyle/>
+          <a:p>
+            <a:pPr indent="0" marL="0">
+              <a:buNone/>
+            </a:pPr>
+            <a:r>
+              <a:rPr lang="en-US" sz="1300" b="1" dirty="0">
+                <a:solidFill>
+                  <a:srgbClr val="0068B7"/>
+                </a:solidFill>
+                <a:latin typeface="Aptos" pitchFamily="34" charset="0"/>
+                <a:ea typeface="Aptos" pitchFamily="34" charset="-122"/>
+                <a:cs typeface="Aptos" pitchFamily="34" charset="-120"/>
+              </a:rPr>
+              <a:t>Concept checkpoints</a:t>
+            </a:r>
+            <a:endParaRPr lang="en-US" sz="1300" dirty="0"/>
+          </a:p>
+        </p:txBody>
+      </p:sp>
+      <p:sp>
+        <p:nvSpPr>
+          <p:cNvPr id="15" name="Text 13"/>
+          <p:cNvSpPr/>
+          <p:nvPr/>
+        </p:nvSpPr>
+        <p:spPr>
+          <a:xfrm>
+            <a:off x="7818120" y="3300984"/>
+            <a:ext cx="3090672" cy="877824"/>
+          </a:xfrm>
+          <a:prstGeom prst="rect">
+            <a:avLst/>
+          </a:prstGeom>
+          <a:noFill/>
+          <a:ln/>
+        </p:spPr>
+        <p:txBody>
+          <a:bodyPr wrap="square" lIns="254" tIns="254" rIns="254" bIns="254" rtlCol="0" anchor="t">
+            <a:normAutofit/>
+          </a:bodyPr>
+          <a:lstStyle/>
+          <a:p>
+            <a:r>
+              <a:rPr lang="en-US" sz="1380" dirty="0">
+                <a:solidFill>
+                  <a:srgbClr val="17364A"/>
+                </a:solidFill>
+                <a:latin typeface="Aptos" pitchFamily="34" charset="0"/>
+                <a:ea typeface="Aptos" pitchFamily="34" charset="-122"/>
+                <a:cs typeface="Aptos" pitchFamily="34" charset="-120"/>
+              </a:rPr>
+              <a:t>An AI-supported case summary may pull together lab reports, case notes, hospitalization.</a:t>
+            </a:r>
+            <a:endParaRPr lang="en-US" sz="1380" dirty="0"/>
+          </a:p>
+          <a:p>
+            <a:r>
+              <a:rPr lang="en-US" sz="1380" dirty="0">
+                <a:solidFill>
+                  <a:srgbClr val="17364A"/>
+                </a:solidFill>
+                <a:latin typeface="Aptos" pitchFamily="34" charset="0"/>
+                <a:ea typeface="Aptos" pitchFamily="34" charset="-122"/>
+                <a:cs typeface="Aptos" pitchFamily="34" charset="-120"/>
+              </a:rPr>
+              <a:t>If the person matching process incorrectly combines two people, the summary may include.</a:t>
+            </a:r>
+            <a:endParaRPr lang="en-US" sz="1380" dirty="0"/>
+          </a:p>
+          <a:p>
+            <a:r>
+              <a:rPr lang="en-US" sz="1380" dirty="0">
+                <a:solidFill>
+                  <a:srgbClr val="17364A"/>
+                </a:solidFill>
+                <a:latin typeface="Aptos" pitchFamily="34" charset="0"/>
+                <a:ea typeface="Aptos" pitchFamily="34" charset="-122"/>
+                <a:cs typeface="Aptos" pitchFamily="34" charset="-120"/>
+              </a:rPr>
+              <a:t>The investigator needs visibility into linkage confidence and source records.</a:t>
+            </a:r>
+            <a:endParaRPr lang="en-US" sz="1380" dirty="0"/>
+          </a:p>
+        </p:txBody>
       </p:sp>
       <p:sp>
         <p:nvSpPr>
           <p:cNvPr id="16" name="Shape 14"/>
-          <p:cNvSpPr/>
-          <p:nvPr/>
-        </p:nvSpPr>
-        <p:spPr>
-          <a:xfrm>
-            <a:off x="9198864" y="4206240"/>
-            <a:ext cx="347472" cy="347472"/>
-          </a:xfrm>
-          <a:prstGeom prst="ellipse">
-            <a:avLst/>
-          </a:prstGeom>
-          <a:solidFill>
-            <a:srgbClr val="2F8A28"/>
-          </a:solidFill>
-          <a:ln w="12700">
-            <a:solidFill>
-              <a:srgbClr val="2F8A28"/>
-            </a:solidFill>
-            <a:prstDash val="solid"/>
-          </a:ln>
-        </p:spPr>
-      </p:sp>
-      <p:sp>
-        <p:nvSpPr>
-          <p:cNvPr id="17" name="Text 15"/>
-          <p:cNvSpPr/>
-          <p:nvPr/>
-        </p:nvSpPr>
-        <p:spPr>
-          <a:xfrm>
-            <a:off x="7909560" y="3977640"/>
-            <a:ext cx="2926080" cy="182880"/>
-          </a:xfrm>
-          <a:prstGeom prst="rect">
-            <a:avLst/>
-          </a:prstGeom>
-          <a:noFill/>
-          <a:ln/>
-        </p:spPr>
-        <p:txBody>
-          <a:bodyPr wrap="square" lIns="0" tIns="0" rIns="0" bIns="0" rtlCol="0" anchor="ctr"/>
-          <a:lstStyle/>
-          <a:p>
-            <a:pPr algn="ctr" indent="0" marL="0">
-              <a:buNone/>
-            </a:pPr>
-            <a:r>
-              <a:rPr lang="en-US" sz="1000" dirty="0">
-                <a:solidFill>
-                  <a:srgbClr val="003A63"/>
-                </a:solidFill>
-                <a:latin typeface="Aptos" pitchFamily="34" charset="0"/>
-                <a:ea typeface="Aptos" pitchFamily="34" charset="-122"/>
-                <a:cs typeface="Aptos" pitchFamily="34" charset="-120"/>
-              </a:rPr>
-              <a:t>Concept to action</a:t>
-            </a:r>
-            <a:endParaRPr lang="en-US" sz="1000" dirty="0"/>
-          </a:p>
-        </p:txBody>
-      </p:sp>
-      <p:sp>
-        <p:nvSpPr>
-          <p:cNvPr id="18" name="Shape 16"/>
           <p:cNvSpPr/>
           <p:nvPr/>
         </p:nvSpPr>
@@ -3676,7 +3667,7 @@
       </p:sp>
       <p:sp>
         <p:nvSpPr>
-          <p:cNvPr id="19" name="Text 17"/>
+          <p:cNvPr id="17" name="Text 15"/>
           <p:cNvSpPr/>
           <p:nvPr/>
         </p:nvSpPr>
@@ -3715,7 +3706,7 @@
       </p:sp>
       <p:sp>
         <p:nvSpPr>
-          <p:cNvPr id="20" name="Text 18"/>
+          <p:cNvPr id="18" name="Text 16"/>
           <p:cNvSpPr/>
           <p:nvPr/>
         </p:nvSpPr>
@@ -4223,13 +4214,11 @@
             </a:avLst>
           </a:prstGeom>
           <a:solidFill>
-            <a:srgbClr val="FFFFFF">
-              <a:alpha val="88000"/>
-            </a:srgbClr>
+            <a:srgbClr val="FFFFFF"/>
           </a:solidFill>
           <a:ln w="12700">
             <a:solidFill>
-              <a:srgbClr val="D6E8F2"/>
+              <a:srgbClr val="B9D7E6"/>
             </a:solidFill>
             <a:prstDash val="solid"/>
           </a:ln>
@@ -4237,119 +4226,112 @@
       </p:sp>
       <p:sp>
         <p:nvSpPr>
-          <p:cNvPr id="14" name="Shape 12"/>
-          <p:cNvSpPr/>
-          <p:nvPr/>
-        </p:nvSpPr>
-        <p:spPr>
-          <a:xfrm>
-            <a:off x="8074152" y="3291840"/>
-            <a:ext cx="2596896" cy="749808"/>
-          </a:xfrm>
-          <a:prstGeom prst="rect">
-            <a:avLst/>
-          </a:prstGeom>
-          <a:solidFill>
-            <a:srgbClr val="EAF6F8"/>
-          </a:solidFill>
-          <a:ln w="12700">
-            <a:solidFill>
-              <a:srgbClr val="8ABBD8"/>
-            </a:solidFill>
-            <a:prstDash val="solid"/>
-          </a:ln>
-        </p:spPr>
-      </p:sp>
-      <p:sp>
-        <p:nvSpPr>
-          <p:cNvPr id="15" name="Shape 13"/>
-          <p:cNvSpPr/>
-          <p:nvPr/>
-        </p:nvSpPr>
-        <p:spPr>
-          <a:xfrm>
-            <a:off x="8202168" y="3721608"/>
-            <a:ext cx="2340864" cy="0"/>
-          </a:xfrm>
-          <a:prstGeom prst="line">
-            <a:avLst/>
-          </a:prstGeom>
-          <a:noFill/>
-          <a:ln w="19050">
-            <a:solidFill>
-              <a:srgbClr val="0068B7"/>
-            </a:solidFill>
-            <a:prstDash val="solid"/>
-          </a:ln>
-        </p:spPr>
+          <p:cNvPr id="14" name="Text 12"/>
+          <p:cNvSpPr/>
+          <p:nvPr/>
+        </p:nvSpPr>
+        <p:spPr>
+          <a:xfrm>
+            <a:off x="7799832" y="2935224"/>
+            <a:ext cx="3145536" cy="256032"/>
+          </a:xfrm>
+          <a:prstGeom prst="rect">
+            <a:avLst/>
+          </a:prstGeom>
+          <a:noFill/>
+          <a:ln/>
+        </p:spPr>
+        <p:txBody>
+          <a:bodyPr wrap="square" lIns="0" tIns="0" rIns="0" bIns="0" rtlCol="0" anchor="ctr"/>
+          <a:lstStyle/>
+          <a:p>
+            <a:pPr indent="0" marL="0">
+              <a:buNone/>
+            </a:pPr>
+            <a:r>
+              <a:rPr lang="en-US" sz="1300" b="1" dirty="0">
+                <a:solidFill>
+                  <a:srgbClr val="0068B7"/>
+                </a:solidFill>
+                <a:latin typeface="Aptos" pitchFamily="34" charset="0"/>
+                <a:ea typeface="Aptos" pitchFamily="34" charset="-122"/>
+                <a:cs typeface="Aptos" pitchFamily="34" charset="-120"/>
+              </a:rPr>
+              <a:t>Concept checkpoints</a:t>
+            </a:r>
+            <a:endParaRPr lang="en-US" sz="1300" dirty="0"/>
+          </a:p>
+        </p:txBody>
+      </p:sp>
+      <p:sp>
+        <p:nvSpPr>
+          <p:cNvPr id="15" name="Text 13"/>
+          <p:cNvSpPr/>
+          <p:nvPr/>
+        </p:nvSpPr>
+        <p:spPr>
+          <a:xfrm>
+            <a:off x="7818120" y="3300984"/>
+            <a:ext cx="3090672" cy="877824"/>
+          </a:xfrm>
+          <a:prstGeom prst="rect">
+            <a:avLst/>
+          </a:prstGeom>
+          <a:noFill/>
+          <a:ln/>
+        </p:spPr>
+        <p:txBody>
+          <a:bodyPr wrap="square" lIns="254" tIns="254" rIns="254" bIns="254" rtlCol="0" anchor="t">
+            <a:normAutofit/>
+          </a:bodyPr>
+          <a:lstStyle/>
+          <a:p>
+            <a:r>
+              <a:rPr lang="en-US" sz="1380" dirty="0">
+                <a:solidFill>
+                  <a:srgbClr val="17364A"/>
+                </a:solidFill>
+                <a:latin typeface="Aptos" pitchFamily="34" charset="0"/>
+                <a:ea typeface="Aptos" pitchFamily="34" charset="-122"/>
+                <a:cs typeface="Aptos" pitchFamily="34" charset="-120"/>
+              </a:rPr>
+              <a:t>Person matching may use name, date of birth, address, phone, medical record number, email,.</a:t>
+            </a:r>
+            <a:endParaRPr lang="en-US" sz="1380" dirty="0"/>
+          </a:p>
+          <a:p>
+            <a:r>
+              <a:rPr lang="en-US" sz="1380" dirty="0">
+                <a:solidFill>
+                  <a:srgbClr val="17364A"/>
+                </a:solidFill>
+                <a:latin typeface="Aptos" pitchFamily="34" charset="0"/>
+                <a:ea typeface="Aptos" pitchFamily="34" charset="-122"/>
+                <a:cs typeface="Aptos" pitchFamily="34" charset="-120"/>
+              </a:rPr>
+              <a:t>Event matching may use dates, locations, condition, exposure, and related records.</a:t>
+            </a:r>
+            <a:endParaRPr lang="en-US" sz="1380" dirty="0"/>
+          </a:p>
+          <a:p>
+            <a:r>
+              <a:rPr lang="en-US" sz="1380" dirty="0">
+                <a:solidFill>
+                  <a:srgbClr val="17364A"/>
+                </a:solidFill>
+                <a:latin typeface="Aptos" pitchFamily="34" charset="0"/>
+                <a:ea typeface="Aptos" pitchFamily="34" charset="-122"/>
+                <a:cs typeface="Aptos" pitchFamily="34" charset="-120"/>
+              </a:rPr>
+              <a:t>Thresholds determine when records are automatically linked, automatically separated, or.</a:t>
+            </a:r>
+            <a:endParaRPr lang="en-US" sz="1380" dirty="0"/>
+          </a:p>
+        </p:txBody>
       </p:sp>
       <p:sp>
         <p:nvSpPr>
           <p:cNvPr id="16" name="Shape 14"/>
-          <p:cNvSpPr/>
-          <p:nvPr/>
-        </p:nvSpPr>
-        <p:spPr>
-          <a:xfrm>
-            <a:off x="9198864" y="4206240"/>
-            <a:ext cx="347472" cy="347472"/>
-          </a:xfrm>
-          <a:prstGeom prst="ellipse">
-            <a:avLst/>
-          </a:prstGeom>
-          <a:solidFill>
-            <a:srgbClr val="2F8A28"/>
-          </a:solidFill>
-          <a:ln w="12700">
-            <a:solidFill>
-              <a:srgbClr val="2F8A28"/>
-            </a:solidFill>
-            <a:prstDash val="solid"/>
-          </a:ln>
-        </p:spPr>
-      </p:sp>
-      <p:sp>
-        <p:nvSpPr>
-          <p:cNvPr id="17" name="Text 15"/>
-          <p:cNvSpPr/>
-          <p:nvPr/>
-        </p:nvSpPr>
-        <p:spPr>
-          <a:xfrm>
-            <a:off x="7909560" y="3977640"/>
-            <a:ext cx="2926080" cy="182880"/>
-          </a:xfrm>
-          <a:prstGeom prst="rect">
-            <a:avLst/>
-          </a:prstGeom>
-          <a:noFill/>
-          <a:ln/>
-        </p:spPr>
-        <p:txBody>
-          <a:bodyPr wrap="square" lIns="0" tIns="0" rIns="0" bIns="0" rtlCol="0" anchor="ctr"/>
-          <a:lstStyle/>
-          <a:p>
-            <a:pPr algn="ctr" indent="0" marL="0">
-              <a:buNone/>
-            </a:pPr>
-            <a:r>
-              <a:rPr lang="en-US" sz="1000" dirty="0">
-                <a:solidFill>
-                  <a:srgbClr val="003A63"/>
-                </a:solidFill>
-                <a:latin typeface="Aptos" pitchFamily="34" charset="0"/>
-                <a:ea typeface="Aptos" pitchFamily="34" charset="-122"/>
-                <a:cs typeface="Aptos" pitchFamily="34" charset="-120"/>
-              </a:rPr>
-              <a:t>Concept to action</a:t>
-            </a:r>
-            <a:endParaRPr lang="en-US" sz="1000" dirty="0"/>
-          </a:p>
-        </p:txBody>
-      </p:sp>
-      <p:sp>
-        <p:nvSpPr>
-          <p:cNvPr id="18" name="Shape 16"/>
           <p:cNvSpPr/>
           <p:nvPr/>
         </p:nvSpPr>
@@ -4376,7 +4358,7 @@
       </p:sp>
       <p:sp>
         <p:nvSpPr>
-          <p:cNvPr id="19" name="Text 17"/>
+          <p:cNvPr id="17" name="Text 15"/>
           <p:cNvSpPr/>
           <p:nvPr/>
         </p:nvSpPr>
@@ -4415,7 +4397,7 @@
       </p:sp>
       <p:sp>
         <p:nvSpPr>
-          <p:cNvPr id="20" name="Text 18"/>
+          <p:cNvPr id="18" name="Text 16"/>
           <p:cNvSpPr/>
           <p:nvPr/>
         </p:nvSpPr>
@@ -4923,13 +4905,11 @@
             </a:avLst>
           </a:prstGeom>
           <a:solidFill>
-            <a:srgbClr val="FFFFFF">
-              <a:alpha val="88000"/>
-            </a:srgbClr>
+            <a:srgbClr val="FFFFFF"/>
           </a:solidFill>
           <a:ln w="12700">
             <a:solidFill>
-              <a:srgbClr val="D6E8F2"/>
+              <a:srgbClr val="B9D7E6"/>
             </a:solidFill>
             <a:prstDash val="solid"/>
           </a:ln>
@@ -4937,26 +4917,42 @@
       </p:sp>
       <p:sp>
         <p:nvSpPr>
-          <p:cNvPr id="14" name="Shape 12"/>
-          <p:cNvSpPr/>
-          <p:nvPr/>
-        </p:nvSpPr>
-        <p:spPr>
-          <a:xfrm>
-            <a:off x="8046720" y="3108960"/>
-            <a:ext cx="2651760" cy="896112"/>
-          </a:xfrm>
-          <a:prstGeom prst="arc">
-            <a:avLst/>
-          </a:prstGeom>
-          <a:noFill/>
-          <a:ln w="25400">
-            <a:solidFill>
-              <a:srgbClr val="0068B7"/>
-            </a:solidFill>
-            <a:prstDash val="solid"/>
-          </a:ln>
-        </p:spPr>
+          <p:cNvPr id="14" name="Text 12"/>
+          <p:cNvSpPr/>
+          <p:nvPr/>
+        </p:nvSpPr>
+        <p:spPr>
+          <a:xfrm>
+            <a:off x="7799832" y="2935224"/>
+            <a:ext cx="3145536" cy="256032"/>
+          </a:xfrm>
+          <a:prstGeom prst="rect">
+            <a:avLst/>
+          </a:prstGeom>
+          <a:noFill/>
+          <a:ln/>
+        </p:spPr>
+        <p:txBody>
+          <a:bodyPr wrap="square" lIns="0" tIns="0" rIns="0" bIns="0" rtlCol="0" anchor="ctr"/>
+          <a:lstStyle/>
+          <a:p>
+            <a:pPr indent="0" marL="0">
+              <a:buNone/>
+            </a:pPr>
+            <a:r>
+              <a:rPr lang="en-US" sz="1300" b="1" dirty="0">
+                <a:solidFill>
+                  <a:srgbClr val="0068B7"/>
+                </a:solidFill>
+                <a:latin typeface="Aptos" pitchFamily="34" charset="0"/>
+                <a:ea typeface="Aptos" pitchFamily="34" charset="-122"/>
+                <a:cs typeface="Aptos" pitchFamily="34" charset="-120"/>
+              </a:rPr>
+              <a:t>Concept checkpoints</a:t>
+            </a:r>
+            <a:endParaRPr lang="en-US" sz="1300" dirty="0"/>
+          </a:p>
+        </p:txBody>
       </p:sp>
       <p:sp>
         <p:nvSpPr>
@@ -4966,102 +4962,67 @@
         </p:nvSpPr>
         <p:spPr>
           <a:xfrm>
-            <a:off x="7909560" y="3099816"/>
-            <a:ext cx="2926080" cy="256032"/>
-          </a:xfrm>
-          <a:prstGeom prst="rect">
-            <a:avLst/>
-          </a:prstGeom>
-          <a:noFill/>
-          <a:ln/>
-        </p:spPr>
-        <p:txBody>
-          <a:bodyPr wrap="square" lIns="0" tIns="0" rIns="0" bIns="0" rtlCol="0" anchor="ctr"/>
-          <a:lstStyle/>
-          <a:p>
-            <a:pPr algn="ctr" indent="0" marL="0">
-              <a:buNone/>
-            </a:pPr>
-            <a:r>
-              <a:rPr lang="en-US" sz="1500" b="1" dirty="0">
-                <a:solidFill>
-                  <a:srgbClr val="003A63"/>
-                </a:solidFill>
-                <a:latin typeface="Aptos" pitchFamily="34" charset="0"/>
-                <a:ea typeface="Aptos" pitchFamily="34" charset="-122"/>
-                <a:cs typeface="Aptos" pitchFamily="34" charset="-120"/>
-              </a:rPr>
-              <a:t>Risk</a:t>
-            </a:r>
-            <a:endParaRPr lang="en-US" sz="1500" dirty="0"/>
+            <a:off x="7818120" y="3300984"/>
+            <a:ext cx="3090672" cy="877824"/>
+          </a:xfrm>
+          <a:prstGeom prst="rect">
+            <a:avLst/>
+          </a:prstGeom>
+          <a:noFill/>
+          <a:ln/>
+        </p:spPr>
+        <p:txBody>
+          <a:bodyPr wrap="square" lIns="254" tIns="254" rIns="254" bIns="254" rtlCol="0" anchor="t">
+            <a:normAutofit/>
+          </a:bodyPr>
+          <a:lstStyle/>
+          <a:p>
+            <a:r>
+              <a:rPr lang="en-US" sz="1380" dirty="0">
+                <a:solidFill>
+                  <a:srgbClr val="17364A"/>
+                </a:solidFill>
+                <a:latin typeface="Aptos" pitchFamily="34" charset="0"/>
+                <a:ea typeface="Aptos" pitchFamily="34" charset="-122"/>
+                <a:cs typeface="Aptos" pitchFamily="34" charset="-120"/>
+              </a:rPr>
+              <a:t>Missed matches.</a:t>
+            </a:r>
+            <a:endParaRPr lang="en-US" sz="1380" dirty="0"/>
+          </a:p>
+          <a:p>
+            <a:r>
+              <a:rPr lang="en-US" sz="1380" dirty="0">
+                <a:solidFill>
+                  <a:srgbClr val="17364A"/>
+                </a:solidFill>
+                <a:latin typeface="Aptos" pitchFamily="34" charset="0"/>
+                <a:ea typeface="Aptos" pitchFamily="34" charset="-122"/>
+                <a:cs typeface="Aptos" pitchFamily="34" charset="-120"/>
+              </a:rPr>
+              <a:t>Missed matches can fragment histories and create duplicate work.</a:t>
+            </a:r>
+            <a:endParaRPr lang="en-US" sz="1380" dirty="0"/>
+          </a:p>
+          <a:p>
+            <a:r>
+              <a:rPr lang="en-US" sz="1380" dirty="0">
+                <a:solidFill>
+                  <a:srgbClr val="17364A"/>
+                </a:solidFill>
+                <a:latin typeface="Aptos" pitchFamily="34" charset="0"/>
+                <a:ea typeface="Aptos" pitchFamily="34" charset="-122"/>
+                <a:cs typeface="Aptos" pitchFamily="34" charset="-120"/>
+              </a:rPr>
+              <a:t>Guardrails include matching quality monitoring, feedback loops, and review queues.</a:t>
+            </a:r>
+            <a:endParaRPr lang="en-US" sz="1380" dirty="0"/>
           </a:p>
         </p:txBody>
       </p:sp>
       <p:sp>
         <p:nvSpPr>
           <p:cNvPr id="16" name="Shape 14"/>
-          <p:cNvSpPr/>
-          <p:nvPr/>
-        </p:nvSpPr>
-        <p:spPr>
-          <a:xfrm>
-            <a:off x="8366760" y="3639312"/>
-            <a:ext cx="2011680" cy="0"/>
-          </a:xfrm>
-          <a:prstGeom prst="line">
-            <a:avLst/>
-          </a:prstGeom>
-          <a:noFill/>
-          <a:ln w="63500">
-            <a:solidFill>
-              <a:srgbClr val="2F8A28"/>
-            </a:solidFill>
-            <a:prstDash val="solid"/>
-          </a:ln>
-        </p:spPr>
-      </p:sp>
-      <p:sp>
-        <p:nvSpPr>
-          <p:cNvPr id="17" name="Text 15"/>
-          <p:cNvSpPr/>
-          <p:nvPr/>
-        </p:nvSpPr>
-        <p:spPr>
-          <a:xfrm>
-            <a:off x="7909560" y="3849624"/>
-            <a:ext cx="2926080" cy="164592"/>
-          </a:xfrm>
-          <a:prstGeom prst="rect">
-            <a:avLst/>
-          </a:prstGeom>
-          <a:noFill/>
-          <a:ln/>
-        </p:spPr>
-        <p:txBody>
-          <a:bodyPr wrap="square" lIns="0" tIns="0" rIns="0" bIns="0" rtlCol="0" anchor="ctr"/>
-          <a:lstStyle/>
-          <a:p>
-            <a:pPr algn="ctr" indent="0" marL="0">
-              <a:buNone/>
-            </a:pPr>
-            <a:r>
-              <a:rPr lang="en-US" sz="900" dirty="0">
-                <a:solidFill>
-                  <a:srgbClr val="003A63"/>
-                </a:solidFill>
-                <a:latin typeface="Aptos" pitchFamily="34" charset="0"/>
-                <a:ea typeface="Aptos" pitchFamily="34" charset="-122"/>
-                <a:cs typeface="Aptos" pitchFamily="34" charset="-120"/>
-              </a:rPr>
-              <a:t>Human review</a:t>
-            </a:r>
-            <a:endParaRPr lang="en-US" sz="900" dirty="0"/>
-          </a:p>
-        </p:txBody>
-      </p:sp>
-      <p:sp>
-        <p:nvSpPr>
-          <p:cNvPr id="18" name="Shape 16"/>
           <p:cNvSpPr/>
           <p:nvPr/>
         </p:nvSpPr>
@@ -5088,7 +5049,7 @@
       </p:sp>
       <p:sp>
         <p:nvSpPr>
-          <p:cNvPr id="19" name="Text 17"/>
+          <p:cNvPr id="17" name="Text 15"/>
           <p:cNvSpPr/>
           <p:nvPr/>
         </p:nvSpPr>
@@ -5127,7 +5088,7 @@
       </p:sp>
       <p:sp>
         <p:nvSpPr>
-          <p:cNvPr id="20" name="Text 18"/>
+          <p:cNvPr id="18" name="Text 16"/>
           <p:cNvSpPr/>
           <p:nvPr/>
         </p:nvSpPr>
@@ -5635,13 +5596,11 @@
             </a:avLst>
           </a:prstGeom>
           <a:solidFill>
-            <a:srgbClr val="FFFFFF">
-              <a:alpha val="88000"/>
-            </a:srgbClr>
+            <a:srgbClr val="FFFFFF"/>
           </a:solidFill>
           <a:ln w="12700">
             <a:solidFill>
-              <a:srgbClr val="D6E8F2"/>
+              <a:srgbClr val="B9D7E6"/>
             </a:solidFill>
             <a:prstDash val="solid"/>
           </a:ln>
@@ -5649,26 +5608,42 @@
       </p:sp>
       <p:sp>
         <p:nvSpPr>
-          <p:cNvPr id="14" name="Shape 12"/>
-          <p:cNvSpPr/>
-          <p:nvPr/>
-        </p:nvSpPr>
-        <p:spPr>
-          <a:xfrm>
-            <a:off x="8046720" y="3108960"/>
-            <a:ext cx="2651760" cy="896112"/>
-          </a:xfrm>
-          <a:prstGeom prst="arc">
-            <a:avLst/>
-          </a:prstGeom>
-          <a:noFill/>
-          <a:ln w="25400">
-            <a:solidFill>
-              <a:srgbClr val="0068B7"/>
-            </a:solidFill>
-            <a:prstDash val="solid"/>
-          </a:ln>
-        </p:spPr>
+          <p:cNvPr id="14" name="Text 12"/>
+          <p:cNvSpPr/>
+          <p:nvPr/>
+        </p:nvSpPr>
+        <p:spPr>
+          <a:xfrm>
+            <a:off x="7799832" y="2935224"/>
+            <a:ext cx="3145536" cy="256032"/>
+          </a:xfrm>
+          <a:prstGeom prst="rect">
+            <a:avLst/>
+          </a:prstGeom>
+          <a:noFill/>
+          <a:ln/>
+        </p:spPr>
+        <p:txBody>
+          <a:bodyPr wrap="square" lIns="0" tIns="0" rIns="0" bIns="0" rtlCol="0" anchor="ctr"/>
+          <a:lstStyle/>
+          <a:p>
+            <a:pPr indent="0" marL="0">
+              <a:buNone/>
+            </a:pPr>
+            <a:r>
+              <a:rPr lang="en-US" sz="1300" b="1" dirty="0">
+                <a:solidFill>
+                  <a:srgbClr val="0068B7"/>
+                </a:solidFill>
+                <a:latin typeface="Aptos" pitchFamily="34" charset="0"/>
+                <a:ea typeface="Aptos" pitchFamily="34" charset="-122"/>
+                <a:cs typeface="Aptos" pitchFamily="34" charset="-120"/>
+              </a:rPr>
+              <a:t>Concept checkpoints</a:t>
+            </a:r>
+            <a:endParaRPr lang="en-US" sz="1300" dirty="0"/>
+          </a:p>
+        </p:txBody>
       </p:sp>
       <p:sp>
         <p:nvSpPr>
@@ -5678,102 +5653,67 @@
         </p:nvSpPr>
         <p:spPr>
           <a:xfrm>
-            <a:off x="7909560" y="3099816"/>
-            <a:ext cx="2926080" cy="256032"/>
-          </a:xfrm>
-          <a:prstGeom prst="rect">
-            <a:avLst/>
-          </a:prstGeom>
-          <a:noFill/>
-          <a:ln/>
-        </p:spPr>
-        <p:txBody>
-          <a:bodyPr wrap="square" lIns="0" tIns="0" rIns="0" bIns="0" rtlCol="0" anchor="ctr"/>
-          <a:lstStyle/>
-          <a:p>
-            <a:pPr algn="ctr" indent="0" marL="0">
-              <a:buNone/>
-            </a:pPr>
-            <a:r>
-              <a:rPr lang="en-US" sz="1500" b="1" dirty="0">
-                <a:solidFill>
-                  <a:srgbClr val="003A63"/>
-                </a:solidFill>
-                <a:latin typeface="Aptos" pitchFamily="34" charset="0"/>
-                <a:ea typeface="Aptos" pitchFamily="34" charset="-122"/>
-                <a:cs typeface="Aptos" pitchFamily="34" charset="-120"/>
-              </a:rPr>
-              <a:t>Risk</a:t>
-            </a:r>
-            <a:endParaRPr lang="en-US" sz="1500" dirty="0"/>
+            <a:off x="7818120" y="3300984"/>
+            <a:ext cx="3090672" cy="877824"/>
+          </a:xfrm>
+          <a:prstGeom prst="rect">
+            <a:avLst/>
+          </a:prstGeom>
+          <a:noFill/>
+          <a:ln/>
+        </p:spPr>
+        <p:txBody>
+          <a:bodyPr wrap="square" lIns="254" tIns="254" rIns="254" bIns="254" rtlCol="0" anchor="t">
+            <a:normAutofit/>
+          </a:bodyPr>
+          <a:lstStyle/>
+          <a:p>
+            <a:r>
+              <a:rPr lang="en-US" sz="1380" dirty="0">
+                <a:solidFill>
+                  <a:srgbClr val="17364A"/>
+                </a:solidFill>
+                <a:latin typeface="Aptos" pitchFamily="34" charset="0"/>
+                <a:ea typeface="Aptos" pitchFamily="34" charset="-122"/>
+                <a:cs typeface="Aptos" pitchFamily="34" charset="-120"/>
+              </a:rPr>
+              <a:t>Hidden linkage uncertainty.</a:t>
+            </a:r>
+            <a:endParaRPr lang="en-US" sz="1380" dirty="0"/>
+          </a:p>
+          <a:p>
+            <a:r>
+              <a:rPr lang="en-US" sz="1380" dirty="0">
+                <a:solidFill>
+                  <a:srgbClr val="17364A"/>
+                </a:solidFill>
+                <a:latin typeface="Aptos" pitchFamily="34" charset="0"/>
+                <a:ea typeface="Aptos" pitchFamily="34" charset="-122"/>
+                <a:cs typeface="Aptos" pitchFamily="34" charset="-120"/>
+              </a:rPr>
+              <a:t>AI outputs may present linked data as certain.</a:t>
+            </a:r>
+            <a:endParaRPr lang="en-US" sz="1380" dirty="0"/>
+          </a:p>
+          <a:p>
+            <a:r>
+              <a:rPr lang="en-US" sz="1380" dirty="0">
+                <a:solidFill>
+                  <a:srgbClr val="17364A"/>
+                </a:solidFill>
+                <a:latin typeface="Aptos" pitchFamily="34" charset="0"/>
+                <a:ea typeface="Aptos" pitchFamily="34" charset="-122"/>
+                <a:cs typeface="Aptos" pitchFamily="34" charset="-120"/>
+              </a:rPr>
+              <a:t>Guardrails include confidence indicators, source records, and user review of uncertain.</a:t>
+            </a:r>
+            <a:endParaRPr lang="en-US" sz="1380" dirty="0"/>
           </a:p>
         </p:txBody>
       </p:sp>
       <p:sp>
         <p:nvSpPr>
           <p:cNvPr id="16" name="Shape 14"/>
-          <p:cNvSpPr/>
-          <p:nvPr/>
-        </p:nvSpPr>
-        <p:spPr>
-          <a:xfrm>
-            <a:off x="8366760" y="3639312"/>
-            <a:ext cx="2011680" cy="0"/>
-          </a:xfrm>
-          <a:prstGeom prst="line">
-            <a:avLst/>
-          </a:prstGeom>
-          <a:noFill/>
-          <a:ln w="63500">
-            <a:solidFill>
-              <a:srgbClr val="2F8A28"/>
-            </a:solidFill>
-            <a:prstDash val="solid"/>
-          </a:ln>
-        </p:spPr>
-      </p:sp>
-      <p:sp>
-        <p:nvSpPr>
-          <p:cNvPr id="17" name="Text 15"/>
-          <p:cNvSpPr/>
-          <p:nvPr/>
-        </p:nvSpPr>
-        <p:spPr>
-          <a:xfrm>
-            <a:off x="7909560" y="3849624"/>
-            <a:ext cx="2926080" cy="164592"/>
-          </a:xfrm>
-          <a:prstGeom prst="rect">
-            <a:avLst/>
-          </a:prstGeom>
-          <a:noFill/>
-          <a:ln/>
-        </p:spPr>
-        <p:txBody>
-          <a:bodyPr wrap="square" lIns="0" tIns="0" rIns="0" bIns="0" rtlCol="0" anchor="ctr"/>
-          <a:lstStyle/>
-          <a:p>
-            <a:pPr algn="ctr" indent="0" marL="0">
-              <a:buNone/>
-            </a:pPr>
-            <a:r>
-              <a:rPr lang="en-US" sz="900" dirty="0">
-                <a:solidFill>
-                  <a:srgbClr val="003A63"/>
-                </a:solidFill>
-                <a:latin typeface="Aptos" pitchFamily="34" charset="0"/>
-                <a:ea typeface="Aptos" pitchFamily="34" charset="-122"/>
-                <a:cs typeface="Aptos" pitchFamily="34" charset="-120"/>
-              </a:rPr>
-              <a:t>Human review</a:t>
-            </a:r>
-            <a:endParaRPr lang="en-US" sz="900" dirty="0"/>
-          </a:p>
-        </p:txBody>
-      </p:sp>
-      <p:sp>
-        <p:nvSpPr>
-          <p:cNvPr id="18" name="Shape 16"/>
           <p:cNvSpPr/>
           <p:nvPr/>
         </p:nvSpPr>
@@ -5800,7 +5740,7 @@
       </p:sp>
       <p:sp>
         <p:nvSpPr>
-          <p:cNvPr id="19" name="Text 17"/>
+          <p:cNvPr id="17" name="Text 15"/>
           <p:cNvSpPr/>
           <p:nvPr/>
         </p:nvSpPr>
@@ -5839,7 +5779,7 @@
       </p:sp>
       <p:sp>
         <p:nvSpPr>
-          <p:cNvPr id="20" name="Text 18"/>
+          <p:cNvPr id="18" name="Text 16"/>
           <p:cNvSpPr/>
           <p:nvPr/>
         </p:nvSpPr>
@@ -6347,13 +6287,11 @@
             </a:avLst>
           </a:prstGeom>
           <a:solidFill>
-            <a:srgbClr val="FFFFFF">
-              <a:alpha val="88000"/>
-            </a:srgbClr>
+            <a:srgbClr val="FFFFFF"/>
           </a:solidFill>
           <a:ln w="12700">
             <a:solidFill>
-              <a:srgbClr val="D6E8F2"/>
+              <a:srgbClr val="B9D7E6"/>
             </a:solidFill>
             <a:prstDash val="solid"/>
           </a:ln>
@@ -6361,30 +6299,42 @@
       </p:sp>
       <p:sp>
         <p:nvSpPr>
-          <p:cNvPr id="14" name="Shape 12"/>
-          <p:cNvSpPr/>
-          <p:nvPr/>
-        </p:nvSpPr>
-        <p:spPr>
-          <a:xfrm>
-            <a:off x="7927848" y="3319272"/>
-            <a:ext cx="792480" cy="749808"/>
-          </a:xfrm>
-          <a:prstGeom prst="roundRect">
-            <a:avLst>
-              <a:gd name="adj" fmla="val 14634"/>
-            </a:avLst>
-          </a:prstGeom>
-          <a:solidFill>
-            <a:srgbClr val="0068B7"/>
-          </a:solidFill>
-          <a:ln w="12700">
-            <a:solidFill>
-              <a:srgbClr val="0068B7"/>
-            </a:solidFill>
-            <a:prstDash val="solid"/>
-          </a:ln>
-        </p:spPr>
+          <p:cNvPr id="14" name="Text 12"/>
+          <p:cNvSpPr/>
+          <p:nvPr/>
+        </p:nvSpPr>
+        <p:spPr>
+          <a:xfrm>
+            <a:off x="7799832" y="2935224"/>
+            <a:ext cx="3145536" cy="256032"/>
+          </a:xfrm>
+          <a:prstGeom prst="rect">
+            <a:avLst/>
+          </a:prstGeom>
+          <a:noFill/>
+          <a:ln/>
+        </p:spPr>
+        <p:txBody>
+          <a:bodyPr wrap="square" lIns="0" tIns="0" rIns="0" bIns="0" rtlCol="0" anchor="ctr"/>
+          <a:lstStyle/>
+          <a:p>
+            <a:pPr indent="0" marL="0">
+              <a:buNone/>
+            </a:pPr>
+            <a:r>
+              <a:rPr lang="en-US" sz="1300" b="1" dirty="0">
+                <a:solidFill>
+                  <a:srgbClr val="0068B7"/>
+                </a:solidFill>
+                <a:latin typeface="Aptos" pitchFamily="34" charset="0"/>
+                <a:ea typeface="Aptos" pitchFamily="34" charset="-122"/>
+                <a:cs typeface="Aptos" pitchFamily="34" charset="-120"/>
+              </a:rPr>
+              <a:t>Concept checkpoints</a:t>
+            </a:r>
+            <a:endParaRPr lang="en-US" sz="1300" dirty="0"/>
+          </a:p>
+        </p:txBody>
       </p:sp>
       <p:sp>
         <p:nvSpPr>
@@ -6394,240 +6344,67 @@
         </p:nvSpPr>
         <p:spPr>
           <a:xfrm>
-            <a:off x="8001000" y="3511296"/>
-            <a:ext cx="646176" cy="310896"/>
-          </a:xfrm>
-          <a:prstGeom prst="rect">
-            <a:avLst/>
-          </a:prstGeom>
-          <a:noFill/>
-          <a:ln/>
-        </p:spPr>
-        <p:txBody>
-          <a:bodyPr wrap="square" lIns="0" tIns="0" rIns="0" bIns="0" rtlCol="0" anchor="ctr">
+            <a:off x="7818120" y="3300984"/>
+            <a:ext cx="3090672" cy="877824"/>
+          </a:xfrm>
+          <a:prstGeom prst="rect">
+            <a:avLst/>
+          </a:prstGeom>
+          <a:noFill/>
+          <a:ln/>
+        </p:spPr>
+        <p:txBody>
+          <a:bodyPr wrap="square" lIns="254" tIns="254" rIns="254" bIns="254" rtlCol="0" anchor="t">
             <a:normAutofit/>
           </a:bodyPr>
           <a:lstStyle/>
           <a:p>
-            <a:pPr algn="ctr" indent="0" marL="0">
-              <a:buNone/>
-            </a:pPr>
-            <a:r>
-              <a:rPr lang="en-US" sz="1500" b="1" dirty="0">
-                <a:solidFill>
-                  <a:srgbClr val="FFFFFF"/>
-                </a:solidFill>
-                <a:latin typeface="Aptos" pitchFamily="34" charset="0"/>
-                <a:ea typeface="Aptos" pitchFamily="34" charset="-122"/>
-                <a:cs typeface="Aptos" pitchFamily="34" charset="-120"/>
-              </a:rPr>
-              <a:t>Plan</a:t>
-            </a:r>
-            <a:endParaRPr lang="en-US" sz="1500" dirty="0"/>
+            <a:r>
+              <a:rPr lang="en-US" sz="1380" dirty="0">
+                <a:solidFill>
+                  <a:srgbClr val="17364A"/>
+                </a:solidFill>
+                <a:latin typeface="Aptos" pitchFamily="34" charset="0"/>
+                <a:ea typeface="Aptos" pitchFamily="34" charset="-122"/>
+                <a:cs typeface="Aptos" pitchFamily="34" charset="-120"/>
+              </a:rPr>
+              <a:t>Generative AI may summarize linked records, so source attribution and linkage confidence.</a:t>
+            </a:r>
+            <a:endParaRPr lang="en-US" sz="1380" dirty="0"/>
+          </a:p>
+          <a:p>
+            <a:r>
+              <a:rPr lang="en-US" sz="1380" dirty="0">
+                <a:solidFill>
+                  <a:srgbClr val="17364A"/>
+                </a:solidFill>
+                <a:latin typeface="Aptos" pitchFamily="34" charset="0"/>
+                <a:ea typeface="Aptos" pitchFamily="34" charset="-122"/>
+                <a:cs typeface="Aptos" pitchFamily="34" charset="-120"/>
+              </a:rPr>
+              <a:t>Predictive analytics may use features created from linked records, making match quality.</a:t>
+            </a:r>
+            <a:endParaRPr lang="en-US" sz="1380" dirty="0"/>
+          </a:p>
+          <a:p>
+            <a:r>
+              <a:rPr lang="en-US" sz="1380" dirty="0">
+                <a:solidFill>
+                  <a:srgbClr val="17364A"/>
+                </a:solidFill>
+                <a:latin typeface="Aptos" pitchFamily="34" charset="0"/>
+                <a:ea typeface="Aptos" pitchFamily="34" charset="-122"/>
+                <a:cs typeface="Aptos" pitchFamily="34" charset="-120"/>
+              </a:rPr>
+              <a:t>Agentic AI should not automatically merge or update records without strong approval and.</a:t>
+            </a:r>
+            <a:endParaRPr lang="en-US" sz="1380" dirty="0"/>
           </a:p>
         </p:txBody>
       </p:sp>
       <p:sp>
         <p:nvSpPr>
           <p:cNvPr id="16" name="Shape 14"/>
-          <p:cNvSpPr/>
-          <p:nvPr/>
-        </p:nvSpPr>
-        <p:spPr>
-          <a:xfrm>
-            <a:off x="8976360" y="3319272"/>
-            <a:ext cx="792480" cy="749808"/>
-          </a:xfrm>
-          <a:prstGeom prst="roundRect">
-            <a:avLst>
-              <a:gd name="adj" fmla="val 14634"/>
-            </a:avLst>
-          </a:prstGeom>
-          <a:solidFill>
-            <a:srgbClr val="2F8A28"/>
-          </a:solidFill>
-          <a:ln w="12700">
-            <a:solidFill>
-              <a:srgbClr val="2F8A28"/>
-            </a:solidFill>
-            <a:prstDash val="solid"/>
-          </a:ln>
-        </p:spPr>
-      </p:sp>
-      <p:sp>
-        <p:nvSpPr>
-          <p:cNvPr id="17" name="Text 15"/>
-          <p:cNvSpPr/>
-          <p:nvPr/>
-        </p:nvSpPr>
-        <p:spPr>
-          <a:xfrm>
-            <a:off x="9049512" y="3511296"/>
-            <a:ext cx="646176" cy="310896"/>
-          </a:xfrm>
-          <a:prstGeom prst="rect">
-            <a:avLst/>
-          </a:prstGeom>
-          <a:noFill/>
-          <a:ln/>
-        </p:spPr>
-        <p:txBody>
-          <a:bodyPr wrap="square" lIns="0" tIns="0" rIns="0" bIns="0" rtlCol="0" anchor="ctr">
-            <a:normAutofit/>
-          </a:bodyPr>
-          <a:lstStyle/>
-          <a:p>
-            <a:pPr algn="ctr" indent="0" marL="0">
-              <a:buNone/>
-            </a:pPr>
-            <a:r>
-              <a:rPr lang="en-US" sz="1500" b="1" dirty="0">
-                <a:solidFill>
-                  <a:srgbClr val="FFFFFF"/>
-                </a:solidFill>
-                <a:latin typeface="Aptos" pitchFamily="34" charset="0"/>
-                <a:ea typeface="Aptos" pitchFamily="34" charset="-122"/>
-                <a:cs typeface="Aptos" pitchFamily="34" charset="-120"/>
-              </a:rPr>
-              <a:t>Do</a:t>
-            </a:r>
-            <a:endParaRPr lang="en-US" sz="1500" dirty="0"/>
-          </a:p>
-        </p:txBody>
-      </p:sp>
-      <p:sp>
-        <p:nvSpPr>
-          <p:cNvPr id="18" name="Shape 16"/>
-          <p:cNvSpPr/>
-          <p:nvPr/>
-        </p:nvSpPr>
-        <p:spPr>
-          <a:xfrm>
-            <a:off x="10024872" y="3319272"/>
-            <a:ext cx="792480" cy="749808"/>
-          </a:xfrm>
-          <a:prstGeom prst="roundRect">
-            <a:avLst>
-              <a:gd name="adj" fmla="val 14634"/>
-            </a:avLst>
-          </a:prstGeom>
-          <a:solidFill>
-            <a:srgbClr val="D69A2D"/>
-          </a:solidFill>
-          <a:ln w="12700">
-            <a:solidFill>
-              <a:srgbClr val="D69A2D"/>
-            </a:solidFill>
-            <a:prstDash val="solid"/>
-          </a:ln>
-        </p:spPr>
-      </p:sp>
-      <p:sp>
-        <p:nvSpPr>
-          <p:cNvPr id="19" name="Text 17"/>
-          <p:cNvSpPr/>
-          <p:nvPr/>
-        </p:nvSpPr>
-        <p:spPr>
-          <a:xfrm>
-            <a:off x="10098024" y="3511296"/>
-            <a:ext cx="646176" cy="310896"/>
-          </a:xfrm>
-          <a:prstGeom prst="rect">
-            <a:avLst/>
-          </a:prstGeom>
-          <a:noFill/>
-          <a:ln/>
-        </p:spPr>
-        <p:txBody>
-          <a:bodyPr wrap="square" lIns="0" tIns="0" rIns="0" bIns="0" rtlCol="0" anchor="ctr">
-            <a:normAutofit/>
-          </a:bodyPr>
-          <a:lstStyle/>
-          <a:p>
-            <a:pPr algn="ctr" indent="0" marL="0">
-              <a:buNone/>
-            </a:pPr>
-            <a:r>
-              <a:rPr lang="en-US" sz="1500" b="1" dirty="0">
-                <a:solidFill>
-                  <a:srgbClr val="FFFFFF"/>
-                </a:solidFill>
-                <a:latin typeface="Aptos" pitchFamily="34" charset="0"/>
-                <a:ea typeface="Aptos" pitchFamily="34" charset="-122"/>
-                <a:cs typeface="Aptos" pitchFamily="34" charset="-120"/>
-              </a:rPr>
-              <a:t>Review</a:t>
-            </a:r>
-            <a:endParaRPr lang="en-US" sz="1500" dirty="0"/>
-          </a:p>
-        </p:txBody>
-      </p:sp>
-      <p:sp>
-        <p:nvSpPr>
-          <p:cNvPr id="20" name="Shape 18"/>
-          <p:cNvSpPr/>
-          <p:nvPr/>
-        </p:nvSpPr>
-        <p:spPr>
-          <a:xfrm>
-            <a:off x="8293608" y="4389120"/>
-            <a:ext cx="2157984" cy="0"/>
-          </a:xfrm>
-          <a:prstGeom prst="line">
-            <a:avLst/>
-          </a:prstGeom>
-          <a:noFill/>
-          <a:ln w="25400">
-            <a:solidFill>
-              <a:srgbClr val="8ABBD8"/>
-            </a:solidFill>
-            <a:prstDash val="solid"/>
-          </a:ln>
-        </p:spPr>
-      </p:sp>
-      <p:sp>
-        <p:nvSpPr>
-          <p:cNvPr id="21" name="Text 19"/>
-          <p:cNvSpPr/>
-          <p:nvPr/>
-        </p:nvSpPr>
-        <p:spPr>
-          <a:xfrm>
-            <a:off x="7909560" y="3977640"/>
-            <a:ext cx="2926080" cy="182880"/>
-          </a:xfrm>
-          <a:prstGeom prst="rect">
-            <a:avLst/>
-          </a:prstGeom>
-          <a:noFill/>
-          <a:ln/>
-        </p:spPr>
-        <p:txBody>
-          <a:bodyPr wrap="square" lIns="0" tIns="0" rIns="0" bIns="0" rtlCol="0" anchor="ctr"/>
-          <a:lstStyle/>
-          <a:p>
-            <a:pPr algn="ctr" indent="0" marL="0">
-              <a:buNone/>
-            </a:pPr>
-            <a:r>
-              <a:rPr lang="en-US" sz="1000" dirty="0">
-                <a:solidFill>
-                  <a:srgbClr val="003A63"/>
-                </a:solidFill>
-                <a:latin typeface="Aptos" pitchFamily="34" charset="0"/>
-                <a:ea typeface="Aptos" pitchFamily="34" charset="-122"/>
-                <a:cs typeface="Aptos" pitchFamily="34" charset="-120"/>
-              </a:rPr>
-              <a:t>Dependencies visible</a:t>
-            </a:r>
-            <a:endParaRPr lang="en-US" sz="1000" dirty="0"/>
-          </a:p>
-        </p:txBody>
-      </p:sp>
-      <p:sp>
-        <p:nvSpPr>
-          <p:cNvPr id="22" name="Shape 20"/>
           <p:cNvSpPr/>
           <p:nvPr/>
         </p:nvSpPr>
@@ -6654,7 +6431,7 @@
       </p:sp>
       <p:sp>
         <p:nvSpPr>
-          <p:cNvPr id="23" name="Text 21"/>
+          <p:cNvPr id="17" name="Text 15"/>
           <p:cNvSpPr/>
           <p:nvPr/>
         </p:nvSpPr>
@@ -6693,7 +6470,7 @@
       </p:sp>
       <p:sp>
         <p:nvSpPr>
-          <p:cNvPr id="24" name="Text 22"/>
+          <p:cNvPr id="18" name="Text 16"/>
           <p:cNvSpPr/>
           <p:nvPr/>
         </p:nvSpPr>
@@ -7201,13 +6978,11 @@
             </a:avLst>
           </a:prstGeom>
           <a:solidFill>
-            <a:srgbClr val="FFFFFF">
-              <a:alpha val="88000"/>
-            </a:srgbClr>
+            <a:srgbClr val="FFFFFF"/>
           </a:solidFill>
           <a:ln w="12700">
             <a:solidFill>
-              <a:srgbClr val="D6E8F2"/>
+              <a:srgbClr val="B9D7E6"/>
             </a:solidFill>
             <a:prstDash val="solid"/>
           </a:ln>
@@ -7215,119 +6990,112 @@
       </p:sp>
       <p:sp>
         <p:nvSpPr>
-          <p:cNvPr id="14" name="Shape 12"/>
-          <p:cNvSpPr/>
-          <p:nvPr/>
-        </p:nvSpPr>
-        <p:spPr>
-          <a:xfrm>
-            <a:off x="8074152" y="3291840"/>
-            <a:ext cx="2596896" cy="749808"/>
-          </a:xfrm>
-          <a:prstGeom prst="rect">
-            <a:avLst/>
-          </a:prstGeom>
-          <a:solidFill>
-            <a:srgbClr val="EAF6F8"/>
-          </a:solidFill>
-          <a:ln w="12700">
-            <a:solidFill>
-              <a:srgbClr val="8ABBD8"/>
-            </a:solidFill>
-            <a:prstDash val="solid"/>
-          </a:ln>
-        </p:spPr>
-      </p:sp>
-      <p:sp>
-        <p:nvSpPr>
-          <p:cNvPr id="15" name="Shape 13"/>
-          <p:cNvSpPr/>
-          <p:nvPr/>
-        </p:nvSpPr>
-        <p:spPr>
-          <a:xfrm>
-            <a:off x="8202168" y="3721608"/>
-            <a:ext cx="2340864" cy="0"/>
-          </a:xfrm>
-          <a:prstGeom prst="line">
-            <a:avLst/>
-          </a:prstGeom>
-          <a:noFill/>
-          <a:ln w="19050">
-            <a:solidFill>
-              <a:srgbClr val="0068B7"/>
-            </a:solidFill>
-            <a:prstDash val="solid"/>
-          </a:ln>
-        </p:spPr>
+          <p:cNvPr id="14" name="Text 12"/>
+          <p:cNvSpPr/>
+          <p:nvPr/>
+        </p:nvSpPr>
+        <p:spPr>
+          <a:xfrm>
+            <a:off x="7799832" y="2935224"/>
+            <a:ext cx="3145536" cy="256032"/>
+          </a:xfrm>
+          <a:prstGeom prst="rect">
+            <a:avLst/>
+          </a:prstGeom>
+          <a:noFill/>
+          <a:ln/>
+        </p:spPr>
+        <p:txBody>
+          <a:bodyPr wrap="square" lIns="0" tIns="0" rIns="0" bIns="0" rtlCol="0" anchor="ctr"/>
+          <a:lstStyle/>
+          <a:p>
+            <a:pPr indent="0" marL="0">
+              <a:buNone/>
+            </a:pPr>
+            <a:r>
+              <a:rPr lang="en-US" sz="1300" b="1" dirty="0">
+                <a:solidFill>
+                  <a:srgbClr val="0068B7"/>
+                </a:solidFill>
+                <a:latin typeface="Aptos" pitchFamily="34" charset="0"/>
+                <a:ea typeface="Aptos" pitchFamily="34" charset="-122"/>
+                <a:cs typeface="Aptos" pitchFamily="34" charset="-120"/>
+              </a:rPr>
+              <a:t>Concept checkpoints</a:t>
+            </a:r>
+            <a:endParaRPr lang="en-US" sz="1300" dirty="0"/>
+          </a:p>
+        </p:txBody>
+      </p:sp>
+      <p:sp>
+        <p:nvSpPr>
+          <p:cNvPr id="15" name="Text 13"/>
+          <p:cNvSpPr/>
+          <p:nvPr/>
+        </p:nvSpPr>
+        <p:spPr>
+          <a:xfrm>
+            <a:off x="7818120" y="3300984"/>
+            <a:ext cx="3090672" cy="877824"/>
+          </a:xfrm>
+          <a:prstGeom prst="rect">
+            <a:avLst/>
+          </a:prstGeom>
+          <a:noFill/>
+          <a:ln/>
+        </p:spPr>
+        <p:txBody>
+          <a:bodyPr wrap="square" lIns="254" tIns="254" rIns="254" bIns="254" rtlCol="0" anchor="t">
+            <a:normAutofit/>
+          </a:bodyPr>
+          <a:lstStyle/>
+          <a:p>
+            <a:r>
+              <a:rPr lang="en-US" sz="1380" dirty="0">
+                <a:solidFill>
+                  <a:srgbClr val="17364A"/>
+                </a:solidFill>
+                <a:latin typeface="Aptos" pitchFamily="34" charset="0"/>
+                <a:ea typeface="Aptos" pitchFamily="34" charset="-122"/>
+                <a:cs typeface="Aptos" pitchFamily="34" charset="-120"/>
+              </a:rPr>
+              <a:t>Which workflows in your agency depend on matching records across systems?</a:t>
+            </a:r>
+            <a:endParaRPr lang="en-US" sz="1380" dirty="0"/>
+          </a:p>
+          <a:p>
+            <a:r>
+              <a:rPr lang="en-US" sz="1380" dirty="0">
+                <a:solidFill>
+                  <a:srgbClr val="17364A"/>
+                </a:solidFill>
+                <a:latin typeface="Aptos" pitchFamily="34" charset="0"/>
+                <a:ea typeface="Aptos" pitchFamily="34" charset="-122"/>
+                <a:cs typeface="Aptos" pitchFamily="34" charset="-120"/>
+              </a:rPr>
+              <a:t>What fields are used for matching, and how complete are they?</a:t>
+            </a:r>
+            <a:endParaRPr lang="en-US" sz="1380" dirty="0"/>
+          </a:p>
+          <a:p>
+            <a:r>
+              <a:rPr lang="en-US" sz="1380" dirty="0">
+                <a:solidFill>
+                  <a:srgbClr val="17364A"/>
+                </a:solidFill>
+                <a:latin typeface="Aptos" pitchFamily="34" charset="0"/>
+                <a:ea typeface="Aptos" pitchFamily="34" charset="-122"/>
+                <a:cs typeface="Aptos" pitchFamily="34" charset="-120"/>
+              </a:rPr>
+              <a:t>Which populations may be more likely to experience missed or incorrect matches?</a:t>
+            </a:r>
+            <a:endParaRPr lang="en-US" sz="1380" dirty="0"/>
+          </a:p>
+        </p:txBody>
       </p:sp>
       <p:sp>
         <p:nvSpPr>
           <p:cNvPr id="16" name="Shape 14"/>
-          <p:cNvSpPr/>
-          <p:nvPr/>
-        </p:nvSpPr>
-        <p:spPr>
-          <a:xfrm>
-            <a:off x="9198864" y="4206240"/>
-            <a:ext cx="347472" cy="347472"/>
-          </a:xfrm>
-          <a:prstGeom prst="ellipse">
-            <a:avLst/>
-          </a:prstGeom>
-          <a:solidFill>
-            <a:srgbClr val="2F8A28"/>
-          </a:solidFill>
-          <a:ln w="12700">
-            <a:solidFill>
-              <a:srgbClr val="2F8A28"/>
-            </a:solidFill>
-            <a:prstDash val="solid"/>
-          </a:ln>
-        </p:spPr>
-      </p:sp>
-      <p:sp>
-        <p:nvSpPr>
-          <p:cNvPr id="17" name="Text 15"/>
-          <p:cNvSpPr/>
-          <p:nvPr/>
-        </p:nvSpPr>
-        <p:spPr>
-          <a:xfrm>
-            <a:off x="7909560" y="3977640"/>
-            <a:ext cx="2926080" cy="182880"/>
-          </a:xfrm>
-          <a:prstGeom prst="rect">
-            <a:avLst/>
-          </a:prstGeom>
-          <a:noFill/>
-          <a:ln/>
-        </p:spPr>
-        <p:txBody>
-          <a:bodyPr wrap="square" lIns="0" tIns="0" rIns="0" bIns="0" rtlCol="0" anchor="ctr"/>
-          <a:lstStyle/>
-          <a:p>
-            <a:pPr algn="ctr" indent="0" marL="0">
-              <a:buNone/>
-            </a:pPr>
-            <a:r>
-              <a:rPr lang="en-US" sz="1000" dirty="0">
-                <a:solidFill>
-                  <a:srgbClr val="003A63"/>
-                </a:solidFill>
-                <a:latin typeface="Aptos" pitchFamily="34" charset="0"/>
-                <a:ea typeface="Aptos" pitchFamily="34" charset="-122"/>
-                <a:cs typeface="Aptos" pitchFamily="34" charset="-120"/>
-              </a:rPr>
-              <a:t>Concept to action</a:t>
-            </a:r>
-            <a:endParaRPr lang="en-US" sz="1000" dirty="0"/>
-          </a:p>
-        </p:txBody>
-      </p:sp>
-      <p:sp>
-        <p:nvSpPr>
-          <p:cNvPr id="18" name="Shape 16"/>
           <p:cNvSpPr/>
           <p:nvPr/>
         </p:nvSpPr>
@@ -7354,7 +7122,7 @@
       </p:sp>
       <p:sp>
         <p:nvSpPr>
-          <p:cNvPr id="19" name="Text 17"/>
+          <p:cNvPr id="17" name="Text 15"/>
           <p:cNvSpPr/>
           <p:nvPr/>
         </p:nvSpPr>
@@ -7393,7 +7161,7 @@
       </p:sp>
       <p:sp>
         <p:nvSpPr>
-          <p:cNvPr id="20" name="Text 18"/>
+          <p:cNvPr id="18" name="Text 16"/>
           <p:cNvSpPr/>
           <p:nvPr/>
         </p:nvSpPr>
@@ -7887,13 +7655,11 @@
             </a:avLst>
           </a:prstGeom>
           <a:solidFill>
-            <a:srgbClr val="FFFFFF">
-              <a:alpha val="88000"/>
-            </a:srgbClr>
+            <a:srgbClr val="FFFFFF"/>
           </a:solidFill>
           <a:ln w="12700">
             <a:solidFill>
-              <a:srgbClr val="D6E8F2"/>
+              <a:srgbClr val="B9D7E6"/>
             </a:solidFill>
             <a:prstDash val="solid"/>
           </a:ln>
@@ -7901,119 +7667,98 @@
       </p:sp>
       <p:sp>
         <p:nvSpPr>
-          <p:cNvPr id="14" name="Shape 12"/>
-          <p:cNvSpPr/>
-          <p:nvPr/>
-        </p:nvSpPr>
-        <p:spPr>
-          <a:xfrm>
-            <a:off x="8074152" y="3291840"/>
-            <a:ext cx="2596896" cy="749808"/>
-          </a:xfrm>
-          <a:prstGeom prst="rect">
-            <a:avLst/>
-          </a:prstGeom>
-          <a:solidFill>
-            <a:srgbClr val="EAF6F8"/>
-          </a:solidFill>
-          <a:ln w="12700">
-            <a:solidFill>
-              <a:srgbClr val="8ABBD8"/>
-            </a:solidFill>
-            <a:prstDash val="solid"/>
-          </a:ln>
-        </p:spPr>
-      </p:sp>
-      <p:sp>
-        <p:nvSpPr>
-          <p:cNvPr id="15" name="Shape 13"/>
-          <p:cNvSpPr/>
-          <p:nvPr/>
-        </p:nvSpPr>
-        <p:spPr>
-          <a:xfrm>
-            <a:off x="8202168" y="3721608"/>
-            <a:ext cx="2340864" cy="0"/>
-          </a:xfrm>
-          <a:prstGeom prst="line">
-            <a:avLst/>
-          </a:prstGeom>
-          <a:noFill/>
-          <a:ln w="19050">
-            <a:solidFill>
-              <a:srgbClr val="0068B7"/>
-            </a:solidFill>
-            <a:prstDash val="solid"/>
-          </a:ln>
-        </p:spPr>
+          <p:cNvPr id="14" name="Text 12"/>
+          <p:cNvSpPr/>
+          <p:nvPr/>
+        </p:nvSpPr>
+        <p:spPr>
+          <a:xfrm>
+            <a:off x="7799832" y="2935224"/>
+            <a:ext cx="3145536" cy="256032"/>
+          </a:xfrm>
+          <a:prstGeom prst="rect">
+            <a:avLst/>
+          </a:prstGeom>
+          <a:noFill/>
+          <a:ln/>
+        </p:spPr>
+        <p:txBody>
+          <a:bodyPr wrap="square" lIns="0" tIns="0" rIns="0" bIns="0" rtlCol="0" anchor="ctr"/>
+          <a:lstStyle/>
+          <a:p>
+            <a:pPr indent="0" marL="0">
+              <a:buNone/>
+            </a:pPr>
+            <a:r>
+              <a:rPr lang="en-US" sz="1300" b="1" dirty="0">
+                <a:solidFill>
+                  <a:srgbClr val="0068B7"/>
+                </a:solidFill>
+                <a:latin typeface="Aptos" pitchFamily="34" charset="0"/>
+                <a:ea typeface="Aptos" pitchFamily="34" charset="-122"/>
+                <a:cs typeface="Aptos" pitchFamily="34" charset="-120"/>
+              </a:rPr>
+              <a:t>Concept checkpoints</a:t>
+            </a:r>
+            <a:endParaRPr lang="en-US" sz="1300" dirty="0"/>
+          </a:p>
+        </p:txBody>
+      </p:sp>
+      <p:sp>
+        <p:nvSpPr>
+          <p:cNvPr id="15" name="Text 13"/>
+          <p:cNvSpPr/>
+          <p:nvPr/>
+        </p:nvSpPr>
+        <p:spPr>
+          <a:xfrm>
+            <a:off x="7818120" y="3300984"/>
+            <a:ext cx="3090672" cy="877824"/>
+          </a:xfrm>
+          <a:prstGeom prst="rect">
+            <a:avLst/>
+          </a:prstGeom>
+          <a:noFill/>
+          <a:ln/>
+        </p:spPr>
+        <p:txBody>
+          <a:bodyPr wrap="square" lIns="254" tIns="254" rIns="254" bIns="254" rtlCol="0" anchor="t">
+            <a:normAutofit/>
+          </a:bodyPr>
+          <a:lstStyle/>
+          <a:p>
+            <a:r>
+              <a:rPr lang="en-US" sz="1380" dirty="0">
+                <a:solidFill>
+                  <a:srgbClr val="17364A"/>
+                </a:solidFill>
+                <a:latin typeface="Aptos" pitchFamily="34" charset="0"/>
+                <a:ea typeface="Aptos" pitchFamily="34" charset="-122"/>
+                <a:cs typeface="Aptos" pitchFamily="34" charset="-120"/>
+              </a:rPr>
+              <a:t>What happens when records are incorrectly merged or not merged?</a:t>
+            </a:r>
+            <a:endParaRPr lang="en-US" sz="1380" dirty="0"/>
+          </a:p>
+          <a:p>
+            <a:r>
+              <a:rPr lang="en-US" sz="1380" dirty="0">
+                <a:solidFill>
+                  <a:srgbClr val="17364A"/>
+                </a:solidFill>
+                <a:latin typeface="Aptos" pitchFamily="34" charset="0"/>
+                <a:ea typeface="Aptos" pitchFamily="34" charset="-122"/>
+                <a:cs typeface="Aptos" pitchFamily="34" charset="-120"/>
+              </a:rPr>
+              <a:t>Where should human review be required?</a:t>
+            </a:r>
+            <a:endParaRPr lang="en-US" sz="1380" dirty="0"/>
+          </a:p>
+        </p:txBody>
       </p:sp>
       <p:sp>
         <p:nvSpPr>
           <p:cNvPr id="16" name="Shape 14"/>
-          <p:cNvSpPr/>
-          <p:nvPr/>
-        </p:nvSpPr>
-        <p:spPr>
-          <a:xfrm>
-            <a:off x="9198864" y="4206240"/>
-            <a:ext cx="347472" cy="347472"/>
-          </a:xfrm>
-          <a:prstGeom prst="ellipse">
-            <a:avLst/>
-          </a:prstGeom>
-          <a:solidFill>
-            <a:srgbClr val="2F8A28"/>
-          </a:solidFill>
-          <a:ln w="12700">
-            <a:solidFill>
-              <a:srgbClr val="2F8A28"/>
-            </a:solidFill>
-            <a:prstDash val="solid"/>
-          </a:ln>
-        </p:spPr>
-      </p:sp>
-      <p:sp>
-        <p:nvSpPr>
-          <p:cNvPr id="17" name="Text 15"/>
-          <p:cNvSpPr/>
-          <p:nvPr/>
-        </p:nvSpPr>
-        <p:spPr>
-          <a:xfrm>
-            <a:off x="7909560" y="3977640"/>
-            <a:ext cx="2926080" cy="182880"/>
-          </a:xfrm>
-          <a:prstGeom prst="rect">
-            <a:avLst/>
-          </a:prstGeom>
-          <a:noFill/>
-          <a:ln/>
-        </p:spPr>
-        <p:txBody>
-          <a:bodyPr wrap="square" lIns="0" tIns="0" rIns="0" bIns="0" rtlCol="0" anchor="ctr"/>
-          <a:lstStyle/>
-          <a:p>
-            <a:pPr algn="ctr" indent="0" marL="0">
-              <a:buNone/>
-            </a:pPr>
-            <a:r>
-              <a:rPr lang="en-US" sz="1000" dirty="0">
-                <a:solidFill>
-                  <a:srgbClr val="003A63"/>
-                </a:solidFill>
-                <a:latin typeface="Aptos" pitchFamily="34" charset="0"/>
-                <a:ea typeface="Aptos" pitchFamily="34" charset="-122"/>
-                <a:cs typeface="Aptos" pitchFamily="34" charset="-120"/>
-              </a:rPr>
-              <a:t>Concept to action</a:t>
-            </a:r>
-            <a:endParaRPr lang="en-US" sz="1000" dirty="0"/>
-          </a:p>
-        </p:txBody>
-      </p:sp>
-      <p:sp>
-        <p:nvSpPr>
-          <p:cNvPr id="18" name="Shape 16"/>
           <p:cNvSpPr/>
           <p:nvPr/>
         </p:nvSpPr>
@@ -8040,7 +7785,7 @@
       </p:sp>
       <p:sp>
         <p:nvSpPr>
-          <p:cNvPr id="19" name="Text 17"/>
+          <p:cNvPr id="17" name="Text 15"/>
           <p:cNvSpPr/>
           <p:nvPr/>
         </p:nvSpPr>
@@ -8079,7 +7824,7 @@
       </p:sp>
       <p:sp>
         <p:nvSpPr>
-          <p:cNvPr id="20" name="Text 18"/>
+          <p:cNvPr id="18" name="Text 16"/>
           <p:cNvSpPr/>
           <p:nvPr/>
         </p:nvSpPr>
@@ -8573,13 +8318,11 @@
             </a:avLst>
           </a:prstGeom>
           <a:solidFill>
-            <a:srgbClr val="FFFFFF">
-              <a:alpha val="88000"/>
-            </a:srgbClr>
+            <a:srgbClr val="FFFFFF"/>
           </a:solidFill>
           <a:ln w="12700">
             <a:solidFill>
-              <a:srgbClr val="D6E8F2"/>
+              <a:srgbClr val="B9D7E6"/>
             </a:solidFill>
             <a:prstDash val="solid"/>
           </a:ln>
@@ -8587,119 +8330,98 @@
       </p:sp>
       <p:sp>
         <p:nvSpPr>
-          <p:cNvPr id="14" name="Shape 12"/>
-          <p:cNvSpPr/>
-          <p:nvPr/>
-        </p:nvSpPr>
-        <p:spPr>
-          <a:xfrm>
-            <a:off x="8074152" y="3291840"/>
-            <a:ext cx="2596896" cy="749808"/>
-          </a:xfrm>
-          <a:prstGeom prst="rect">
-            <a:avLst/>
-          </a:prstGeom>
-          <a:solidFill>
-            <a:srgbClr val="EAF6F8"/>
-          </a:solidFill>
-          <a:ln w="12700">
-            <a:solidFill>
-              <a:srgbClr val="8ABBD8"/>
-            </a:solidFill>
-            <a:prstDash val="solid"/>
-          </a:ln>
-        </p:spPr>
-      </p:sp>
-      <p:sp>
-        <p:nvSpPr>
-          <p:cNvPr id="15" name="Shape 13"/>
-          <p:cNvSpPr/>
-          <p:nvPr/>
-        </p:nvSpPr>
-        <p:spPr>
-          <a:xfrm>
-            <a:off x="8202168" y="3721608"/>
-            <a:ext cx="2340864" cy="0"/>
-          </a:xfrm>
-          <a:prstGeom prst="line">
-            <a:avLst/>
-          </a:prstGeom>
-          <a:noFill/>
-          <a:ln w="19050">
-            <a:solidFill>
-              <a:srgbClr val="0068B7"/>
-            </a:solidFill>
-            <a:prstDash val="solid"/>
-          </a:ln>
-        </p:spPr>
+          <p:cNvPr id="14" name="Text 12"/>
+          <p:cNvSpPr/>
+          <p:nvPr/>
+        </p:nvSpPr>
+        <p:spPr>
+          <a:xfrm>
+            <a:off x="7799832" y="2935224"/>
+            <a:ext cx="3145536" cy="256032"/>
+          </a:xfrm>
+          <a:prstGeom prst="rect">
+            <a:avLst/>
+          </a:prstGeom>
+          <a:noFill/>
+          <a:ln/>
+        </p:spPr>
+        <p:txBody>
+          <a:bodyPr wrap="square" lIns="0" tIns="0" rIns="0" bIns="0" rtlCol="0" anchor="ctr"/>
+          <a:lstStyle/>
+          <a:p>
+            <a:pPr indent="0" marL="0">
+              <a:buNone/>
+            </a:pPr>
+            <a:r>
+              <a:rPr lang="en-US" sz="1300" b="1" dirty="0">
+                <a:solidFill>
+                  <a:srgbClr val="0068B7"/>
+                </a:solidFill>
+                <a:latin typeface="Aptos" pitchFamily="34" charset="0"/>
+                <a:ea typeface="Aptos" pitchFamily="34" charset="-122"/>
+                <a:cs typeface="Aptos" pitchFamily="34" charset="-120"/>
+              </a:rPr>
+              <a:t>Concept checkpoints</a:t>
+            </a:r>
+            <a:endParaRPr lang="en-US" sz="1300" dirty="0"/>
+          </a:p>
+        </p:txBody>
+      </p:sp>
+      <p:sp>
+        <p:nvSpPr>
+          <p:cNvPr id="15" name="Text 13"/>
+          <p:cNvSpPr/>
+          <p:nvPr/>
+        </p:nvSpPr>
+        <p:spPr>
+          <a:xfrm>
+            <a:off x="7818120" y="3300984"/>
+            <a:ext cx="3090672" cy="877824"/>
+          </a:xfrm>
+          <a:prstGeom prst="rect">
+            <a:avLst/>
+          </a:prstGeom>
+          <a:noFill/>
+          <a:ln/>
+        </p:spPr>
+        <p:txBody>
+          <a:bodyPr wrap="square" lIns="254" tIns="254" rIns="254" bIns="254" rtlCol="0" anchor="t">
+            <a:normAutofit/>
+          </a:bodyPr>
+          <a:lstStyle/>
+          <a:p>
+            <a:r>
+              <a:rPr lang="en-US" sz="1380" dirty="0">
+                <a:solidFill>
+                  <a:srgbClr val="17364A"/>
+                </a:solidFill>
+                <a:latin typeface="Aptos" pitchFamily="34" charset="0"/>
+                <a:ea typeface="Aptos" pitchFamily="34" charset="-122"/>
+                <a:cs typeface="Aptos" pitchFamily="34" charset="-120"/>
+              </a:rPr>
+              <a:t>Create a linkage risk review for one AI-supported public health workflow.</a:t>
+            </a:r>
+            <a:endParaRPr lang="en-US" sz="1380" dirty="0"/>
+          </a:p>
+          <a:p>
+            <a:r>
+              <a:rPr lang="en-US" sz="1380" dirty="0">
+                <a:solidFill>
+                  <a:srgbClr val="17364A"/>
+                </a:solidFill>
+                <a:latin typeface="Aptos" pitchFamily="34" charset="0"/>
+                <a:ea typeface="Aptos" pitchFamily="34" charset="-122"/>
+                <a:cs typeface="Aptos" pitchFamily="34" charset="-120"/>
+              </a:rPr>
+              <a:t>Include the matching purpose, data sources, matching fields, known field quality issues,.</a:t>
+            </a:r>
+            <a:endParaRPr lang="en-US" sz="1380" dirty="0"/>
+          </a:p>
+        </p:txBody>
       </p:sp>
       <p:sp>
         <p:nvSpPr>
           <p:cNvPr id="16" name="Shape 14"/>
-          <p:cNvSpPr/>
-          <p:nvPr/>
-        </p:nvSpPr>
-        <p:spPr>
-          <a:xfrm>
-            <a:off x="9198864" y="4206240"/>
-            <a:ext cx="347472" cy="347472"/>
-          </a:xfrm>
-          <a:prstGeom prst="ellipse">
-            <a:avLst/>
-          </a:prstGeom>
-          <a:solidFill>
-            <a:srgbClr val="2F8A28"/>
-          </a:solidFill>
-          <a:ln w="12700">
-            <a:solidFill>
-              <a:srgbClr val="2F8A28"/>
-            </a:solidFill>
-            <a:prstDash val="solid"/>
-          </a:ln>
-        </p:spPr>
-      </p:sp>
-      <p:sp>
-        <p:nvSpPr>
-          <p:cNvPr id="17" name="Text 15"/>
-          <p:cNvSpPr/>
-          <p:nvPr/>
-        </p:nvSpPr>
-        <p:spPr>
-          <a:xfrm>
-            <a:off x="7909560" y="3977640"/>
-            <a:ext cx="2926080" cy="182880"/>
-          </a:xfrm>
-          <a:prstGeom prst="rect">
-            <a:avLst/>
-          </a:prstGeom>
-          <a:noFill/>
-          <a:ln/>
-        </p:spPr>
-        <p:txBody>
-          <a:bodyPr wrap="square" lIns="0" tIns="0" rIns="0" bIns="0" rtlCol="0" anchor="ctr"/>
-          <a:lstStyle/>
-          <a:p>
-            <a:pPr algn="ctr" indent="0" marL="0">
-              <a:buNone/>
-            </a:pPr>
-            <a:r>
-              <a:rPr lang="en-US" sz="1000" dirty="0">
-                <a:solidFill>
-                  <a:srgbClr val="003A63"/>
-                </a:solidFill>
-                <a:latin typeface="Aptos" pitchFamily="34" charset="0"/>
-                <a:ea typeface="Aptos" pitchFamily="34" charset="-122"/>
-                <a:cs typeface="Aptos" pitchFamily="34" charset="-120"/>
-              </a:rPr>
-              <a:t>Concept to action</a:t>
-            </a:r>
-            <a:endParaRPr lang="en-US" sz="1000" dirty="0"/>
-          </a:p>
-        </p:txBody>
-      </p:sp>
-      <p:sp>
-        <p:nvSpPr>
-          <p:cNvPr id="18" name="Shape 16"/>
           <p:cNvSpPr/>
           <p:nvPr/>
         </p:nvSpPr>
@@ -8726,7 +8448,7 @@
       </p:sp>
       <p:sp>
         <p:nvSpPr>
-          <p:cNvPr id="19" name="Text 17"/>
+          <p:cNvPr id="17" name="Text 15"/>
           <p:cNvSpPr/>
           <p:nvPr/>
         </p:nvSpPr>
@@ -8765,7 +8487,7 @@
       </p:sp>
       <p:sp>
         <p:nvSpPr>
-          <p:cNvPr id="20" name="Text 18"/>
+          <p:cNvPr id="18" name="Text 16"/>
           <p:cNvSpPr/>
           <p:nvPr/>
         </p:nvSpPr>
@@ -9273,13 +8995,11 @@
             </a:avLst>
           </a:prstGeom>
           <a:solidFill>
-            <a:srgbClr val="FFFFFF">
-              <a:alpha val="88000"/>
-            </a:srgbClr>
+            <a:srgbClr val="FFFFFF"/>
           </a:solidFill>
           <a:ln w="12700">
             <a:solidFill>
-              <a:srgbClr val="D6E8F2"/>
+              <a:srgbClr val="B9D7E6"/>
             </a:solidFill>
             <a:prstDash val="solid"/>
           </a:ln>
@@ -9287,119 +9007,112 @@
       </p:sp>
       <p:sp>
         <p:nvSpPr>
-          <p:cNvPr id="14" name="Shape 12"/>
-          <p:cNvSpPr/>
-          <p:nvPr/>
-        </p:nvSpPr>
-        <p:spPr>
-          <a:xfrm>
-            <a:off x="8074152" y="3291840"/>
-            <a:ext cx="2596896" cy="749808"/>
-          </a:xfrm>
-          <a:prstGeom prst="rect">
-            <a:avLst/>
-          </a:prstGeom>
-          <a:solidFill>
-            <a:srgbClr val="EAF6F8"/>
-          </a:solidFill>
-          <a:ln w="12700">
-            <a:solidFill>
-              <a:srgbClr val="8ABBD8"/>
-            </a:solidFill>
-            <a:prstDash val="solid"/>
-          </a:ln>
-        </p:spPr>
-      </p:sp>
-      <p:sp>
-        <p:nvSpPr>
-          <p:cNvPr id="15" name="Shape 13"/>
-          <p:cNvSpPr/>
-          <p:nvPr/>
-        </p:nvSpPr>
-        <p:spPr>
-          <a:xfrm>
-            <a:off x="8202168" y="3721608"/>
-            <a:ext cx="2340864" cy="0"/>
-          </a:xfrm>
-          <a:prstGeom prst="line">
-            <a:avLst/>
-          </a:prstGeom>
-          <a:noFill/>
-          <a:ln w="19050">
-            <a:solidFill>
-              <a:srgbClr val="0068B7"/>
-            </a:solidFill>
-            <a:prstDash val="solid"/>
-          </a:ln>
-        </p:spPr>
+          <p:cNvPr id="14" name="Text 12"/>
+          <p:cNvSpPr/>
+          <p:nvPr/>
+        </p:nvSpPr>
+        <p:spPr>
+          <a:xfrm>
+            <a:off x="7799832" y="2935224"/>
+            <a:ext cx="3145536" cy="256032"/>
+          </a:xfrm>
+          <a:prstGeom prst="rect">
+            <a:avLst/>
+          </a:prstGeom>
+          <a:noFill/>
+          <a:ln/>
+        </p:spPr>
+        <p:txBody>
+          <a:bodyPr wrap="square" lIns="0" tIns="0" rIns="0" bIns="0" rtlCol="0" anchor="ctr"/>
+          <a:lstStyle/>
+          <a:p>
+            <a:pPr indent="0" marL="0">
+              <a:buNone/>
+            </a:pPr>
+            <a:r>
+              <a:rPr lang="en-US" sz="1300" b="1" dirty="0">
+                <a:solidFill>
+                  <a:srgbClr val="0068B7"/>
+                </a:solidFill>
+                <a:latin typeface="Aptos" pitchFamily="34" charset="0"/>
+                <a:ea typeface="Aptos" pitchFamily="34" charset="-122"/>
+                <a:cs typeface="Aptos" pitchFamily="34" charset="-120"/>
+              </a:rPr>
+              <a:t>Concept checkpoints</a:t>
+            </a:r>
+            <a:endParaRPr lang="en-US" sz="1300" dirty="0"/>
+          </a:p>
+        </p:txBody>
+      </p:sp>
+      <p:sp>
+        <p:nvSpPr>
+          <p:cNvPr id="15" name="Text 13"/>
+          <p:cNvSpPr/>
+          <p:nvPr/>
+        </p:nvSpPr>
+        <p:spPr>
+          <a:xfrm>
+            <a:off x="7818120" y="3300984"/>
+            <a:ext cx="3090672" cy="877824"/>
+          </a:xfrm>
+          <a:prstGeom prst="rect">
+            <a:avLst/>
+          </a:prstGeom>
+          <a:noFill/>
+          <a:ln/>
+        </p:spPr>
+        <p:txBody>
+          <a:bodyPr wrap="square" lIns="254" tIns="254" rIns="254" bIns="254" rtlCol="0" anchor="t">
+            <a:normAutofit/>
+          </a:bodyPr>
+          <a:lstStyle/>
+          <a:p>
+            <a:r>
+              <a:rPr lang="en-US" sz="1380" dirty="0">
+                <a:solidFill>
+                  <a:srgbClr val="17364A"/>
+                </a:solidFill>
+                <a:latin typeface="Aptos" pitchFamily="34" charset="0"/>
+                <a:ea typeface="Aptos" pitchFamily="34" charset="-122"/>
+                <a:cs typeface="Aptos" pitchFamily="34" charset="-120"/>
+              </a:rPr>
+              <a:t>Linkage risk review</a:t>
+            </a:r>
+            <a:endParaRPr lang="en-US" sz="1380" dirty="0"/>
+          </a:p>
+          <a:p>
+            <a:r>
+              <a:rPr lang="en-US" sz="1380" dirty="0">
+                <a:solidFill>
+                  <a:srgbClr val="17364A"/>
+                </a:solidFill>
+                <a:latin typeface="Aptos" pitchFamily="34" charset="0"/>
+                <a:ea typeface="Aptos" pitchFamily="34" charset="-122"/>
+                <a:cs typeface="Aptos" pitchFamily="34" charset="-120"/>
+              </a:rPr>
+              <a:t>Deduplication workflow map</a:t>
+            </a:r>
+            <a:endParaRPr lang="en-US" sz="1380" dirty="0"/>
+          </a:p>
+          <a:p>
+            <a:r>
+              <a:rPr lang="en-US" sz="1380" dirty="0">
+                <a:solidFill>
+                  <a:srgbClr val="17364A"/>
+                </a:solidFill>
+                <a:latin typeface="Aptos" pitchFamily="34" charset="0"/>
+                <a:ea typeface="Aptos" pitchFamily="34" charset="-122"/>
+                <a:cs typeface="Aptos" pitchFamily="34" charset="-120"/>
+              </a:rPr>
+              <a:t>Match review questions</a:t>
+            </a:r>
+            <a:endParaRPr lang="en-US" sz="1380" dirty="0"/>
+          </a:p>
+        </p:txBody>
       </p:sp>
       <p:sp>
         <p:nvSpPr>
           <p:cNvPr id="16" name="Shape 14"/>
-          <p:cNvSpPr/>
-          <p:nvPr/>
-        </p:nvSpPr>
-        <p:spPr>
-          <a:xfrm>
-            <a:off x="9198864" y="4206240"/>
-            <a:ext cx="347472" cy="347472"/>
-          </a:xfrm>
-          <a:prstGeom prst="ellipse">
-            <a:avLst/>
-          </a:prstGeom>
-          <a:solidFill>
-            <a:srgbClr val="2F8A28"/>
-          </a:solidFill>
-          <a:ln w="12700">
-            <a:solidFill>
-              <a:srgbClr val="2F8A28"/>
-            </a:solidFill>
-            <a:prstDash val="solid"/>
-          </a:ln>
-        </p:spPr>
-      </p:sp>
-      <p:sp>
-        <p:nvSpPr>
-          <p:cNvPr id="17" name="Text 15"/>
-          <p:cNvSpPr/>
-          <p:nvPr/>
-        </p:nvSpPr>
-        <p:spPr>
-          <a:xfrm>
-            <a:off x="7909560" y="3977640"/>
-            <a:ext cx="2926080" cy="182880"/>
-          </a:xfrm>
-          <a:prstGeom prst="rect">
-            <a:avLst/>
-          </a:prstGeom>
-          <a:noFill/>
-          <a:ln/>
-        </p:spPr>
-        <p:txBody>
-          <a:bodyPr wrap="square" lIns="0" tIns="0" rIns="0" bIns="0" rtlCol="0" anchor="ctr"/>
-          <a:lstStyle/>
-          <a:p>
-            <a:pPr algn="ctr" indent="0" marL="0">
-              <a:buNone/>
-            </a:pPr>
-            <a:r>
-              <a:rPr lang="en-US" sz="1000" dirty="0">
-                <a:solidFill>
-                  <a:srgbClr val="003A63"/>
-                </a:solidFill>
-                <a:latin typeface="Aptos" pitchFamily="34" charset="0"/>
-                <a:ea typeface="Aptos" pitchFamily="34" charset="-122"/>
-                <a:cs typeface="Aptos" pitchFamily="34" charset="-120"/>
-              </a:rPr>
-              <a:t>Concept to action</a:t>
-            </a:r>
-            <a:endParaRPr lang="en-US" sz="1000" dirty="0"/>
-          </a:p>
-        </p:txBody>
-      </p:sp>
-      <p:sp>
-        <p:nvSpPr>
-          <p:cNvPr id="18" name="Shape 16"/>
           <p:cNvSpPr/>
           <p:nvPr/>
         </p:nvSpPr>
@@ -9426,7 +9139,7 @@
       </p:sp>
       <p:sp>
         <p:nvSpPr>
-          <p:cNvPr id="19" name="Text 17"/>
+          <p:cNvPr id="17" name="Text 15"/>
           <p:cNvSpPr/>
           <p:nvPr/>
         </p:nvSpPr>
@@ -9465,7 +9178,7 @@
       </p:sp>
       <p:sp>
         <p:nvSpPr>
-          <p:cNvPr id="20" name="Text 18"/>
+          <p:cNvPr id="18" name="Text 16"/>
           <p:cNvSpPr/>
           <p:nvPr/>
         </p:nvSpPr>
@@ -9945,13 +9658,11 @@
             </a:avLst>
           </a:prstGeom>
           <a:solidFill>
-            <a:srgbClr val="FFFFFF">
-              <a:alpha val="88000"/>
-            </a:srgbClr>
+            <a:srgbClr val="FFFFFF"/>
           </a:solidFill>
           <a:ln w="12700">
             <a:solidFill>
-              <a:srgbClr val="D6E8F2"/>
+              <a:srgbClr val="B9D7E6"/>
             </a:solidFill>
             <a:prstDash val="solid"/>
           </a:ln>
@@ -9959,119 +9670,84 @@
       </p:sp>
       <p:sp>
         <p:nvSpPr>
-          <p:cNvPr id="14" name="Shape 12"/>
-          <p:cNvSpPr/>
-          <p:nvPr/>
-        </p:nvSpPr>
-        <p:spPr>
-          <a:xfrm>
-            <a:off x="8074152" y="3291840"/>
-            <a:ext cx="2596896" cy="749808"/>
-          </a:xfrm>
-          <a:prstGeom prst="rect">
-            <a:avLst/>
-          </a:prstGeom>
-          <a:solidFill>
-            <a:srgbClr val="EAF6F8"/>
-          </a:solidFill>
-          <a:ln w="12700">
-            <a:solidFill>
-              <a:srgbClr val="8ABBD8"/>
-            </a:solidFill>
-            <a:prstDash val="solid"/>
-          </a:ln>
-        </p:spPr>
-      </p:sp>
-      <p:sp>
-        <p:nvSpPr>
-          <p:cNvPr id="15" name="Shape 13"/>
-          <p:cNvSpPr/>
-          <p:nvPr/>
-        </p:nvSpPr>
-        <p:spPr>
-          <a:xfrm>
-            <a:off x="8202168" y="3721608"/>
-            <a:ext cx="2340864" cy="0"/>
-          </a:xfrm>
-          <a:prstGeom prst="line">
-            <a:avLst/>
-          </a:prstGeom>
-          <a:noFill/>
-          <a:ln w="19050">
-            <a:solidFill>
-              <a:srgbClr val="0068B7"/>
-            </a:solidFill>
-            <a:prstDash val="solid"/>
-          </a:ln>
-        </p:spPr>
+          <p:cNvPr id="14" name="Text 12"/>
+          <p:cNvSpPr/>
+          <p:nvPr/>
+        </p:nvSpPr>
+        <p:spPr>
+          <a:xfrm>
+            <a:off x="7799832" y="2935224"/>
+            <a:ext cx="3145536" cy="256032"/>
+          </a:xfrm>
+          <a:prstGeom prst="rect">
+            <a:avLst/>
+          </a:prstGeom>
+          <a:noFill/>
+          <a:ln/>
+        </p:spPr>
+        <p:txBody>
+          <a:bodyPr wrap="square" lIns="0" tIns="0" rIns="0" bIns="0" rtlCol="0" anchor="ctr"/>
+          <a:lstStyle/>
+          <a:p>
+            <a:pPr indent="0" marL="0">
+              <a:buNone/>
+            </a:pPr>
+            <a:r>
+              <a:rPr lang="en-US" sz="1300" b="1" dirty="0">
+                <a:solidFill>
+                  <a:srgbClr val="0068B7"/>
+                </a:solidFill>
+                <a:latin typeface="Aptos" pitchFamily="34" charset="0"/>
+                <a:ea typeface="Aptos" pitchFamily="34" charset="-122"/>
+                <a:cs typeface="Aptos" pitchFamily="34" charset="-120"/>
+              </a:rPr>
+              <a:t>Concept checkpoints</a:t>
+            </a:r>
+            <a:endParaRPr lang="en-US" sz="1300" dirty="0"/>
+          </a:p>
+        </p:txBody>
+      </p:sp>
+      <p:sp>
+        <p:nvSpPr>
+          <p:cNvPr id="15" name="Text 13"/>
+          <p:cNvSpPr/>
+          <p:nvPr/>
+        </p:nvSpPr>
+        <p:spPr>
+          <a:xfrm>
+            <a:off x="7818120" y="3300984"/>
+            <a:ext cx="3090672" cy="877824"/>
+          </a:xfrm>
+          <a:prstGeom prst="rect">
+            <a:avLst/>
+          </a:prstGeom>
+          <a:noFill/>
+          <a:ln/>
+        </p:spPr>
+        <p:txBody>
+          <a:bodyPr wrap="square" lIns="254" tIns="254" rIns="254" bIns="254" rtlCol="0" anchor="t">
+            <a:normAutofit/>
+          </a:bodyPr>
+          <a:lstStyle/>
+          <a:p>
+            <a:r>
+              <a:rPr lang="en-US" sz="1380" dirty="0">
+                <a:solidFill>
+                  <a:srgbClr val="17364A"/>
+                </a:solidFill>
+                <a:latin typeface="Aptos" pitchFamily="34" charset="0"/>
+                <a:ea typeface="Aptos" pitchFamily="34" charset="-122"/>
+                <a:cs typeface="Aptos" pitchFamily="34" charset="-120"/>
+              </a:rPr>
+              <a:t>Equity and escalation notes</a:t>
+            </a:r>
+            <a:endParaRPr lang="en-US" sz="1380" dirty="0"/>
+          </a:p>
+        </p:txBody>
       </p:sp>
       <p:sp>
         <p:nvSpPr>
           <p:cNvPr id="16" name="Shape 14"/>
-          <p:cNvSpPr/>
-          <p:nvPr/>
-        </p:nvSpPr>
-        <p:spPr>
-          <a:xfrm>
-            <a:off x="9198864" y="4206240"/>
-            <a:ext cx="347472" cy="347472"/>
-          </a:xfrm>
-          <a:prstGeom prst="ellipse">
-            <a:avLst/>
-          </a:prstGeom>
-          <a:solidFill>
-            <a:srgbClr val="2F8A28"/>
-          </a:solidFill>
-          <a:ln w="12700">
-            <a:solidFill>
-              <a:srgbClr val="2F8A28"/>
-            </a:solidFill>
-            <a:prstDash val="solid"/>
-          </a:ln>
-        </p:spPr>
-      </p:sp>
-      <p:sp>
-        <p:nvSpPr>
-          <p:cNvPr id="17" name="Text 15"/>
-          <p:cNvSpPr/>
-          <p:nvPr/>
-        </p:nvSpPr>
-        <p:spPr>
-          <a:xfrm>
-            <a:off x="7909560" y="3977640"/>
-            <a:ext cx="2926080" cy="182880"/>
-          </a:xfrm>
-          <a:prstGeom prst="rect">
-            <a:avLst/>
-          </a:prstGeom>
-          <a:noFill/>
-          <a:ln/>
-        </p:spPr>
-        <p:txBody>
-          <a:bodyPr wrap="square" lIns="0" tIns="0" rIns="0" bIns="0" rtlCol="0" anchor="ctr"/>
-          <a:lstStyle/>
-          <a:p>
-            <a:pPr algn="ctr" indent="0" marL="0">
-              <a:buNone/>
-            </a:pPr>
-            <a:r>
-              <a:rPr lang="en-US" sz="1000" dirty="0">
-                <a:solidFill>
-                  <a:srgbClr val="003A63"/>
-                </a:solidFill>
-                <a:latin typeface="Aptos" pitchFamily="34" charset="0"/>
-                <a:ea typeface="Aptos" pitchFamily="34" charset="-122"/>
-                <a:cs typeface="Aptos" pitchFamily="34" charset="-120"/>
-              </a:rPr>
-              <a:t>Concept to action</a:t>
-            </a:r>
-            <a:endParaRPr lang="en-US" sz="1000" dirty="0"/>
-          </a:p>
-        </p:txBody>
-      </p:sp>
-      <p:sp>
-        <p:nvSpPr>
-          <p:cNvPr id="18" name="Shape 16"/>
           <p:cNvSpPr/>
           <p:nvPr/>
         </p:nvSpPr>
@@ -10098,7 +9774,7 @@
       </p:sp>
       <p:sp>
         <p:nvSpPr>
-          <p:cNvPr id="19" name="Text 17"/>
+          <p:cNvPr id="17" name="Text 15"/>
           <p:cNvSpPr/>
           <p:nvPr/>
         </p:nvSpPr>
@@ -10137,7 +9813,7 @@
       </p:sp>
       <p:sp>
         <p:nvSpPr>
-          <p:cNvPr id="20" name="Text 18"/>
+          <p:cNvPr id="18" name="Text 16"/>
           <p:cNvSpPr/>
           <p:nvPr/>
         </p:nvSpPr>
@@ -10670,20 +10346,20 @@
         </p:nvSpPr>
         <p:spPr>
           <a:xfrm>
-            <a:off x="7635240" y="3730752"/>
-            <a:ext cx="1033272" cy="749808"/>
+            <a:off x="7909560" y="3675888"/>
+            <a:ext cx="3154680" cy="1691640"/>
           </a:xfrm>
           <a:prstGeom prst="roundRect">
             <a:avLst>
-              <a:gd name="adj" fmla="val 14634"/>
+              <a:gd name="adj" fmla="val 6486"/>
             </a:avLst>
           </a:prstGeom>
           <a:solidFill>
-            <a:srgbClr val="0068B7"/>
+            <a:srgbClr val="FFFFFF"/>
           </a:solidFill>
           <a:ln w="12700">
             <a:solidFill>
-              <a:srgbClr val="0068B7"/>
+              <a:srgbClr val="B9D7E6"/>
             </a:solidFill>
             <a:prstDash val="solid"/>
           </a:ln>
@@ -10697,172 +10373,100 @@
         </p:nvSpPr>
         <p:spPr>
           <a:xfrm>
-            <a:off x="7708392" y="3922776"/>
-            <a:ext cx="886968" cy="310896"/>
-          </a:xfrm>
-          <a:prstGeom prst="rect">
-            <a:avLst/>
-          </a:prstGeom>
-          <a:noFill/>
-          <a:ln/>
-        </p:spPr>
-        <p:txBody>
-          <a:bodyPr wrap="square" lIns="0" tIns="0" rIns="0" bIns="0" rtlCol="0" anchor="ctr">
+            <a:off x="8074152" y="3822192"/>
+            <a:ext cx="2825496" cy="256032"/>
+          </a:xfrm>
+          <a:prstGeom prst="rect">
+            <a:avLst/>
+          </a:prstGeom>
+          <a:noFill/>
+          <a:ln/>
+        </p:spPr>
+        <p:txBody>
+          <a:bodyPr wrap="square" lIns="0" tIns="0" rIns="0" bIns="0" rtlCol="0" anchor="ctr"/>
+          <a:lstStyle/>
+          <a:p>
+            <a:pPr indent="0" marL="0">
+              <a:buNone/>
+            </a:pPr>
+            <a:r>
+              <a:rPr lang="en-US" sz="1300" b="1" dirty="0">
+                <a:solidFill>
+                  <a:srgbClr val="0068B7"/>
+                </a:solidFill>
+                <a:latin typeface="Aptos" pitchFamily="34" charset="0"/>
+                <a:ea typeface="Aptos" pitchFamily="34" charset="-122"/>
+                <a:cs typeface="Aptos" pitchFamily="34" charset="-120"/>
+              </a:rPr>
+              <a:t>Learning sequence</a:t>
+            </a:r>
+            <a:endParaRPr lang="en-US" sz="1300" dirty="0"/>
+          </a:p>
+        </p:txBody>
+      </p:sp>
+      <p:sp>
+        <p:nvSpPr>
+          <p:cNvPr id="15" name="Text 13"/>
+          <p:cNvSpPr/>
+          <p:nvPr/>
+        </p:nvSpPr>
+        <p:spPr>
+          <a:xfrm>
+            <a:off x="8092440" y="4187952"/>
+            <a:ext cx="2770632" cy="1033272"/>
+          </a:xfrm>
+          <a:prstGeom prst="rect">
+            <a:avLst/>
+          </a:prstGeom>
+          <a:noFill/>
+          <a:ln/>
+        </p:spPr>
+        <p:txBody>
+          <a:bodyPr wrap="square" lIns="254" tIns="254" rIns="254" bIns="254" rtlCol="0" anchor="t">
             <a:normAutofit/>
           </a:bodyPr>
           <a:lstStyle/>
           <a:p>
-            <a:pPr algn="ctr" indent="0" marL="0">
-              <a:buNone/>
-            </a:pPr>
-            <a:r>
-              <a:rPr lang="en-US" sz="1500" b="1" dirty="0">
-                <a:solidFill>
-                  <a:srgbClr val="FFFFFF"/>
-                </a:solidFill>
-                <a:latin typeface="Aptos" pitchFamily="34" charset="0"/>
-                <a:ea typeface="Aptos" pitchFamily="34" charset="-122"/>
-                <a:cs typeface="Aptos" pitchFamily="34" charset="-120"/>
-              </a:rPr>
-              <a:t>Learn</a:t>
-            </a:r>
-            <a:endParaRPr lang="en-US" sz="1500" dirty="0"/>
-          </a:p>
-        </p:txBody>
-      </p:sp>
-      <p:sp>
-        <p:nvSpPr>
-          <p:cNvPr id="15" name="Shape 13"/>
-          <p:cNvSpPr/>
-          <p:nvPr/>
-        </p:nvSpPr>
-        <p:spPr>
-          <a:xfrm>
-            <a:off x="8924544" y="3730752"/>
-            <a:ext cx="1033272" cy="749808"/>
-          </a:xfrm>
-          <a:prstGeom prst="roundRect">
-            <a:avLst>
-              <a:gd name="adj" fmla="val 14634"/>
-            </a:avLst>
-          </a:prstGeom>
-          <a:solidFill>
-            <a:srgbClr val="2F8A28"/>
-          </a:solidFill>
-          <a:ln w="12700">
-            <a:solidFill>
-              <a:srgbClr val="2F8A28"/>
-            </a:solidFill>
-            <a:prstDash val="solid"/>
-          </a:ln>
-        </p:spPr>
-      </p:sp>
-      <p:sp>
-        <p:nvSpPr>
-          <p:cNvPr id="16" name="Text 14"/>
-          <p:cNvSpPr/>
-          <p:nvPr/>
-        </p:nvSpPr>
-        <p:spPr>
-          <a:xfrm>
-            <a:off x="8997696" y="3922776"/>
-            <a:ext cx="886968" cy="310896"/>
-          </a:xfrm>
-          <a:prstGeom prst="rect">
-            <a:avLst/>
-          </a:prstGeom>
-          <a:noFill/>
-          <a:ln/>
-        </p:spPr>
-        <p:txBody>
-          <a:bodyPr wrap="square" lIns="0" tIns="0" rIns="0" bIns="0" rtlCol="0" anchor="ctr">
-            <a:normAutofit/>
-          </a:bodyPr>
-          <a:lstStyle/>
-          <a:p>
-            <a:pPr algn="ctr" indent="0" marL="0">
-              <a:buNone/>
-            </a:pPr>
-            <a:r>
-              <a:rPr lang="en-US" sz="1500" b="1" dirty="0">
-                <a:solidFill>
-                  <a:srgbClr val="FFFFFF"/>
-                </a:solidFill>
-                <a:latin typeface="Aptos" pitchFamily="34" charset="0"/>
-                <a:ea typeface="Aptos" pitchFamily="34" charset="-122"/>
-                <a:cs typeface="Aptos" pitchFamily="34" charset="-120"/>
-              </a:rPr>
-              <a:t>Apply</a:t>
-            </a:r>
-            <a:endParaRPr lang="en-US" sz="1500" dirty="0"/>
-          </a:p>
-        </p:txBody>
-      </p:sp>
-      <p:sp>
-        <p:nvSpPr>
-          <p:cNvPr id="17" name="Shape 15"/>
-          <p:cNvSpPr/>
-          <p:nvPr/>
-        </p:nvSpPr>
-        <p:spPr>
-          <a:xfrm>
-            <a:off x="10213848" y="3730752"/>
-            <a:ext cx="1033272" cy="749808"/>
-          </a:xfrm>
-          <a:prstGeom prst="roundRect">
-            <a:avLst>
-              <a:gd name="adj" fmla="val 14634"/>
-            </a:avLst>
-          </a:prstGeom>
-          <a:solidFill>
-            <a:srgbClr val="6A4CA3"/>
-          </a:solidFill>
-          <a:ln w="12700">
-            <a:solidFill>
-              <a:srgbClr val="6A4CA3"/>
-            </a:solidFill>
-            <a:prstDash val="solid"/>
-          </a:ln>
-        </p:spPr>
-      </p:sp>
-      <p:sp>
-        <p:nvSpPr>
-          <p:cNvPr id="18" name="Text 16"/>
-          <p:cNvSpPr/>
-          <p:nvPr/>
-        </p:nvSpPr>
-        <p:spPr>
-          <a:xfrm>
-            <a:off x="10287000" y="3922776"/>
-            <a:ext cx="886968" cy="310896"/>
-          </a:xfrm>
-          <a:prstGeom prst="rect">
-            <a:avLst/>
-          </a:prstGeom>
-          <a:noFill/>
-          <a:ln/>
-        </p:spPr>
-        <p:txBody>
-          <a:bodyPr wrap="square" lIns="0" tIns="0" rIns="0" bIns="0" rtlCol="0" anchor="ctr">
-            <a:normAutofit/>
-          </a:bodyPr>
-          <a:lstStyle/>
-          <a:p>
-            <a:pPr algn="ctr" indent="0" marL="0">
-              <a:buNone/>
-            </a:pPr>
-            <a:r>
-              <a:rPr lang="en-US" sz="1500" b="1" dirty="0">
-                <a:solidFill>
-                  <a:srgbClr val="FFFFFF"/>
-                </a:solidFill>
-                <a:latin typeface="Aptos" pitchFamily="34" charset="0"/>
-                <a:ea typeface="Aptos" pitchFamily="34" charset="-122"/>
-                <a:cs typeface="Aptos" pitchFamily="34" charset="-120"/>
-              </a:rPr>
-              <a:t>Document</a:t>
-            </a:r>
-            <a:endParaRPr lang="en-US" sz="1500" dirty="0"/>
+            <a:r>
+              <a:rPr lang="en-US" sz="1380" dirty="0">
+                <a:solidFill>
+                  <a:srgbClr val="17364A"/>
+                </a:solidFill>
+                <a:latin typeface="Aptos" pitchFamily="34" charset="0"/>
+                <a:ea typeface="Aptos" pitchFamily="34" charset="-122"/>
+                <a:cs typeface="Aptos" pitchFamily="34" charset="-120"/>
+              </a:rPr>
+              <a:t>Read the module for shared vocabulary and context.</a:t>
+            </a:r>
+            <a:endParaRPr lang="en-US" sz="1380" dirty="0"/>
+          </a:p>
+          <a:p>
+            <a:r>
+              <a:rPr lang="en-US" sz="1380" dirty="0">
+                <a:solidFill>
+                  <a:srgbClr val="17364A"/>
+                </a:solidFill>
+                <a:latin typeface="Aptos" pitchFamily="34" charset="0"/>
+                <a:ea typeface="Aptos" pitchFamily="34" charset="-122"/>
+                <a:cs typeface="Aptos" pitchFamily="34" charset="-120"/>
+              </a:rPr>
+              <a:t>Complete the practical exercise to apply the concept.</a:t>
+            </a:r>
+            <a:endParaRPr lang="en-US" sz="1380" dirty="0"/>
+          </a:p>
+          <a:p>
+            <a:r>
+              <a:rPr lang="en-US" sz="1380" dirty="0">
+                <a:solidFill>
+                  <a:srgbClr val="17364A"/>
+                </a:solidFill>
+                <a:latin typeface="Aptos" pitchFamily="34" charset="0"/>
+                <a:ea typeface="Aptos" pitchFamily="34" charset="-122"/>
+                <a:cs typeface="Aptos" pitchFamily="34" charset="-120"/>
+              </a:rPr>
+              <a:t>Use the notes and references for deeper review.</a:t>
+            </a:r>
+            <a:endParaRPr lang="en-US" sz="1380" dirty="0"/>
           </a:p>
         </p:txBody>
       </p:sp>
@@ -11335,13 +10939,11 @@
             </a:avLst>
           </a:prstGeom>
           <a:solidFill>
-            <a:srgbClr val="FFFFFF">
-              <a:alpha val="88000"/>
-            </a:srgbClr>
+            <a:srgbClr val="FFFFFF"/>
           </a:solidFill>
           <a:ln w="12700">
             <a:solidFill>
-              <a:srgbClr val="D6E8F2"/>
+              <a:srgbClr val="B9D7E6"/>
             </a:solidFill>
             <a:prstDash val="solid"/>
           </a:ln>
@@ -11349,119 +10951,112 @@
       </p:sp>
       <p:sp>
         <p:nvSpPr>
-          <p:cNvPr id="14" name="Shape 12"/>
-          <p:cNvSpPr/>
-          <p:nvPr/>
-        </p:nvSpPr>
-        <p:spPr>
-          <a:xfrm>
-            <a:off x="8074152" y="3291840"/>
-            <a:ext cx="2596896" cy="749808"/>
-          </a:xfrm>
-          <a:prstGeom prst="rect">
-            <a:avLst/>
-          </a:prstGeom>
-          <a:solidFill>
-            <a:srgbClr val="EAF6F8"/>
-          </a:solidFill>
-          <a:ln w="12700">
-            <a:solidFill>
-              <a:srgbClr val="8ABBD8"/>
-            </a:solidFill>
-            <a:prstDash val="solid"/>
-          </a:ln>
-        </p:spPr>
-      </p:sp>
-      <p:sp>
-        <p:nvSpPr>
-          <p:cNvPr id="15" name="Shape 13"/>
-          <p:cNvSpPr/>
-          <p:nvPr/>
-        </p:nvSpPr>
-        <p:spPr>
-          <a:xfrm>
-            <a:off x="8202168" y="3721608"/>
-            <a:ext cx="2340864" cy="0"/>
-          </a:xfrm>
-          <a:prstGeom prst="line">
-            <a:avLst/>
-          </a:prstGeom>
-          <a:noFill/>
-          <a:ln w="19050">
-            <a:solidFill>
-              <a:srgbClr val="0068B7"/>
-            </a:solidFill>
-            <a:prstDash val="solid"/>
-          </a:ln>
-        </p:spPr>
+          <p:cNvPr id="14" name="Text 12"/>
+          <p:cNvSpPr/>
+          <p:nvPr/>
+        </p:nvSpPr>
+        <p:spPr>
+          <a:xfrm>
+            <a:off x="7799832" y="2935224"/>
+            <a:ext cx="3145536" cy="256032"/>
+          </a:xfrm>
+          <a:prstGeom prst="rect">
+            <a:avLst/>
+          </a:prstGeom>
+          <a:noFill/>
+          <a:ln/>
+        </p:spPr>
+        <p:txBody>
+          <a:bodyPr wrap="square" lIns="0" tIns="0" rIns="0" bIns="0" rtlCol="0" anchor="ctr"/>
+          <a:lstStyle/>
+          <a:p>
+            <a:pPr indent="0" marL="0">
+              <a:buNone/>
+            </a:pPr>
+            <a:r>
+              <a:rPr lang="en-US" sz="1300" b="1" dirty="0">
+                <a:solidFill>
+                  <a:srgbClr val="0068B7"/>
+                </a:solidFill>
+                <a:latin typeface="Aptos" pitchFamily="34" charset="0"/>
+                <a:ea typeface="Aptos" pitchFamily="34" charset="-122"/>
+                <a:cs typeface="Aptos" pitchFamily="34" charset="-120"/>
+              </a:rPr>
+              <a:t>Concept checkpoints</a:t>
+            </a:r>
+            <a:endParaRPr lang="en-US" sz="1300" dirty="0"/>
+          </a:p>
+        </p:txBody>
+      </p:sp>
+      <p:sp>
+        <p:nvSpPr>
+          <p:cNvPr id="15" name="Text 13"/>
+          <p:cNvSpPr/>
+          <p:nvPr/>
+        </p:nvSpPr>
+        <p:spPr>
+          <a:xfrm>
+            <a:off x="7818120" y="3300984"/>
+            <a:ext cx="3090672" cy="877824"/>
+          </a:xfrm>
+          <a:prstGeom prst="rect">
+            <a:avLst/>
+          </a:prstGeom>
+          <a:noFill/>
+          <a:ln/>
+        </p:spPr>
+        <p:txBody>
+          <a:bodyPr wrap="square" lIns="254" tIns="254" rIns="254" bIns="254" rtlCol="0" anchor="t">
+            <a:normAutofit/>
+          </a:bodyPr>
+          <a:lstStyle/>
+          <a:p>
+            <a:r>
+              <a:rPr lang="en-US" sz="1380" dirty="0">
+                <a:solidFill>
+                  <a:srgbClr val="17364A"/>
+                </a:solidFill>
+                <a:latin typeface="Aptos" pitchFamily="34" charset="0"/>
+                <a:ea typeface="Aptos" pitchFamily="34" charset="-122"/>
+                <a:cs typeface="Aptos" pitchFamily="34" charset="-120"/>
+              </a:rPr>
+              <a:t>Linkage risk review</a:t>
+            </a:r>
+            <a:endParaRPr lang="en-US" sz="1380" dirty="0"/>
+          </a:p>
+          <a:p>
+            <a:r>
+              <a:rPr lang="en-US" sz="1380" dirty="0">
+                <a:solidFill>
+                  <a:srgbClr val="17364A"/>
+                </a:solidFill>
+                <a:latin typeface="Aptos" pitchFamily="34" charset="0"/>
+                <a:ea typeface="Aptos" pitchFamily="34" charset="-122"/>
+                <a:cs typeface="Aptos" pitchFamily="34" charset="-120"/>
+              </a:rPr>
+              <a:t>Deduplication workflow map</a:t>
+            </a:r>
+            <a:endParaRPr lang="en-US" sz="1380" dirty="0"/>
+          </a:p>
+          <a:p>
+            <a:r>
+              <a:rPr lang="en-US" sz="1380" dirty="0">
+                <a:solidFill>
+                  <a:srgbClr val="17364A"/>
+                </a:solidFill>
+                <a:latin typeface="Aptos" pitchFamily="34" charset="0"/>
+                <a:ea typeface="Aptos" pitchFamily="34" charset="-122"/>
+                <a:cs typeface="Aptos" pitchFamily="34" charset="-120"/>
+              </a:rPr>
+              <a:t>Match review questions</a:t>
+            </a:r>
+            <a:endParaRPr lang="en-US" sz="1380" dirty="0"/>
+          </a:p>
+        </p:txBody>
       </p:sp>
       <p:sp>
         <p:nvSpPr>
           <p:cNvPr id="16" name="Shape 14"/>
-          <p:cNvSpPr/>
-          <p:nvPr/>
-        </p:nvSpPr>
-        <p:spPr>
-          <a:xfrm>
-            <a:off x="9198864" y="4206240"/>
-            <a:ext cx="347472" cy="347472"/>
-          </a:xfrm>
-          <a:prstGeom prst="ellipse">
-            <a:avLst/>
-          </a:prstGeom>
-          <a:solidFill>
-            <a:srgbClr val="2F8A28"/>
-          </a:solidFill>
-          <a:ln w="12700">
-            <a:solidFill>
-              <a:srgbClr val="2F8A28"/>
-            </a:solidFill>
-            <a:prstDash val="solid"/>
-          </a:ln>
-        </p:spPr>
-      </p:sp>
-      <p:sp>
-        <p:nvSpPr>
-          <p:cNvPr id="17" name="Text 15"/>
-          <p:cNvSpPr/>
-          <p:nvPr/>
-        </p:nvSpPr>
-        <p:spPr>
-          <a:xfrm>
-            <a:off x="7909560" y="3977640"/>
-            <a:ext cx="2926080" cy="182880"/>
-          </a:xfrm>
-          <a:prstGeom prst="rect">
-            <a:avLst/>
-          </a:prstGeom>
-          <a:noFill/>
-          <a:ln/>
-        </p:spPr>
-        <p:txBody>
-          <a:bodyPr wrap="square" lIns="0" tIns="0" rIns="0" bIns="0" rtlCol="0" anchor="ctr"/>
-          <a:lstStyle/>
-          <a:p>
-            <a:pPr algn="ctr" indent="0" marL="0">
-              <a:buNone/>
-            </a:pPr>
-            <a:r>
-              <a:rPr lang="en-US" sz="1000" dirty="0">
-                <a:solidFill>
-                  <a:srgbClr val="003A63"/>
-                </a:solidFill>
-                <a:latin typeface="Aptos" pitchFamily="34" charset="0"/>
-                <a:ea typeface="Aptos" pitchFamily="34" charset="-122"/>
-                <a:cs typeface="Aptos" pitchFamily="34" charset="-120"/>
-              </a:rPr>
-              <a:t>Concept to action</a:t>
-            </a:r>
-            <a:endParaRPr lang="en-US" sz="1000" dirty="0"/>
-          </a:p>
-        </p:txBody>
-      </p:sp>
-      <p:sp>
-        <p:nvSpPr>
-          <p:cNvPr id="18" name="Shape 16"/>
           <p:cNvSpPr/>
           <p:nvPr/>
         </p:nvSpPr>
@@ -11488,7 +11083,7 @@
       </p:sp>
       <p:sp>
         <p:nvSpPr>
-          <p:cNvPr id="19" name="Text 17"/>
+          <p:cNvPr id="17" name="Text 15"/>
           <p:cNvSpPr/>
           <p:nvPr/>
         </p:nvSpPr>
@@ -11527,7 +11122,7 @@
       </p:sp>
       <p:sp>
         <p:nvSpPr>
-          <p:cNvPr id="20" name="Text 18"/>
+          <p:cNvPr id="18" name="Text 16"/>
           <p:cNvSpPr/>
           <p:nvPr/>
         </p:nvSpPr>
@@ -12035,13 +11630,11 @@
             </a:avLst>
           </a:prstGeom>
           <a:solidFill>
-            <a:srgbClr val="FFFFFF">
-              <a:alpha val="88000"/>
-            </a:srgbClr>
+            <a:srgbClr val="FFFFFF"/>
           </a:solidFill>
           <a:ln w="12700">
             <a:solidFill>
-              <a:srgbClr val="D6E8F2"/>
+              <a:srgbClr val="B9D7E6"/>
             </a:solidFill>
             <a:prstDash val="solid"/>
           </a:ln>
@@ -12049,119 +11642,112 @@
       </p:sp>
       <p:sp>
         <p:nvSpPr>
-          <p:cNvPr id="14" name="Shape 12"/>
-          <p:cNvSpPr/>
-          <p:nvPr/>
-        </p:nvSpPr>
-        <p:spPr>
-          <a:xfrm>
-            <a:off x="8074152" y="3291840"/>
-            <a:ext cx="2596896" cy="749808"/>
-          </a:xfrm>
-          <a:prstGeom prst="rect">
-            <a:avLst/>
-          </a:prstGeom>
-          <a:solidFill>
-            <a:srgbClr val="EAF6F8"/>
-          </a:solidFill>
-          <a:ln w="12700">
-            <a:solidFill>
-              <a:srgbClr val="8ABBD8"/>
-            </a:solidFill>
-            <a:prstDash val="solid"/>
-          </a:ln>
-        </p:spPr>
-      </p:sp>
-      <p:sp>
-        <p:nvSpPr>
-          <p:cNvPr id="15" name="Shape 13"/>
-          <p:cNvSpPr/>
-          <p:nvPr/>
-        </p:nvSpPr>
-        <p:spPr>
-          <a:xfrm>
-            <a:off x="8202168" y="3721608"/>
-            <a:ext cx="2340864" cy="0"/>
-          </a:xfrm>
-          <a:prstGeom prst="line">
-            <a:avLst/>
-          </a:prstGeom>
-          <a:noFill/>
-          <a:ln w="19050">
-            <a:solidFill>
-              <a:srgbClr val="0068B7"/>
-            </a:solidFill>
-            <a:prstDash val="solid"/>
-          </a:ln>
-        </p:spPr>
+          <p:cNvPr id="14" name="Text 12"/>
+          <p:cNvSpPr/>
+          <p:nvPr/>
+        </p:nvSpPr>
+        <p:spPr>
+          <a:xfrm>
+            <a:off x="7799832" y="2935224"/>
+            <a:ext cx="3145536" cy="256032"/>
+          </a:xfrm>
+          <a:prstGeom prst="rect">
+            <a:avLst/>
+          </a:prstGeom>
+          <a:noFill/>
+          <a:ln/>
+        </p:spPr>
+        <p:txBody>
+          <a:bodyPr wrap="square" lIns="0" tIns="0" rIns="0" bIns="0" rtlCol="0" anchor="ctr"/>
+          <a:lstStyle/>
+          <a:p>
+            <a:pPr indent="0" marL="0">
+              <a:buNone/>
+            </a:pPr>
+            <a:r>
+              <a:rPr lang="en-US" sz="1300" b="1" dirty="0">
+                <a:solidFill>
+                  <a:srgbClr val="0068B7"/>
+                </a:solidFill>
+                <a:latin typeface="Aptos" pitchFamily="34" charset="0"/>
+                <a:ea typeface="Aptos" pitchFamily="34" charset="-122"/>
+                <a:cs typeface="Aptos" pitchFamily="34" charset="-120"/>
+              </a:rPr>
+              <a:t>Concept checkpoints</a:t>
+            </a:r>
+            <a:endParaRPr lang="en-US" sz="1300" dirty="0"/>
+          </a:p>
+        </p:txBody>
+      </p:sp>
+      <p:sp>
+        <p:nvSpPr>
+          <p:cNvPr id="15" name="Text 13"/>
+          <p:cNvSpPr/>
+          <p:nvPr/>
+        </p:nvSpPr>
+        <p:spPr>
+          <a:xfrm>
+            <a:off x="7818120" y="3300984"/>
+            <a:ext cx="3090672" cy="877824"/>
+          </a:xfrm>
+          <a:prstGeom prst="rect">
+            <a:avLst/>
+          </a:prstGeom>
+          <a:noFill/>
+          <a:ln/>
+        </p:spPr>
+        <p:txBody>
+          <a:bodyPr wrap="square" lIns="254" tIns="254" rIns="254" bIns="254" rtlCol="0" anchor="t">
+            <a:normAutofit/>
+          </a:bodyPr>
+          <a:lstStyle/>
+          <a:p>
+            <a:r>
+              <a:rPr lang="en-US" sz="1380" dirty="0">
+                <a:solidFill>
+                  <a:srgbClr val="17364A"/>
+                </a:solidFill>
+                <a:latin typeface="Aptos" pitchFamily="34" charset="0"/>
+                <a:ea typeface="Aptos" pitchFamily="34" charset="-122"/>
+                <a:cs typeface="Aptos" pitchFamily="34" charset="-120"/>
+              </a:rPr>
+              <a:t>1.</a:t>
+            </a:r>
+            <a:endParaRPr lang="en-US" sz="1380" dirty="0"/>
+          </a:p>
+          <a:p>
+            <a:r>
+              <a:rPr lang="en-US" sz="1380" dirty="0">
+                <a:solidFill>
+                  <a:srgbClr val="17364A"/>
+                </a:solidFill>
+                <a:latin typeface="Aptos" pitchFamily="34" charset="0"/>
+                <a:ea typeface="Aptos" pitchFamily="34" charset="-122"/>
+                <a:cs typeface="Aptos" pitchFamily="34" charset="-120"/>
+              </a:rPr>
+              <a:t>What is a false match?</a:t>
+            </a:r>
+            <a:endParaRPr lang="en-US" sz="1380" dirty="0"/>
+          </a:p>
+          <a:p>
+            <a:r>
+              <a:rPr lang="en-US" sz="1380" dirty="0">
+                <a:solidFill>
+                  <a:srgbClr val="17364A"/>
+                </a:solidFill>
+                <a:latin typeface="Aptos" pitchFamily="34" charset="0"/>
+                <a:ea typeface="Aptos" pitchFamily="34" charset="-122"/>
+                <a:cs typeface="Aptos" pitchFamily="34" charset="-120"/>
+              </a:rPr>
+              <a:t>2.</a:t>
+            </a:r>
+            <a:endParaRPr lang="en-US" sz="1380" dirty="0"/>
+          </a:p>
+        </p:txBody>
       </p:sp>
       <p:sp>
         <p:nvSpPr>
           <p:cNvPr id="16" name="Shape 14"/>
-          <p:cNvSpPr/>
-          <p:nvPr/>
-        </p:nvSpPr>
-        <p:spPr>
-          <a:xfrm>
-            <a:off x="9198864" y="4206240"/>
-            <a:ext cx="347472" cy="347472"/>
-          </a:xfrm>
-          <a:prstGeom prst="ellipse">
-            <a:avLst/>
-          </a:prstGeom>
-          <a:solidFill>
-            <a:srgbClr val="2F8A28"/>
-          </a:solidFill>
-          <a:ln w="12700">
-            <a:solidFill>
-              <a:srgbClr val="2F8A28"/>
-            </a:solidFill>
-            <a:prstDash val="solid"/>
-          </a:ln>
-        </p:spPr>
-      </p:sp>
-      <p:sp>
-        <p:nvSpPr>
-          <p:cNvPr id="17" name="Text 15"/>
-          <p:cNvSpPr/>
-          <p:nvPr/>
-        </p:nvSpPr>
-        <p:spPr>
-          <a:xfrm>
-            <a:off x="7909560" y="3977640"/>
-            <a:ext cx="2926080" cy="182880"/>
-          </a:xfrm>
-          <a:prstGeom prst="rect">
-            <a:avLst/>
-          </a:prstGeom>
-          <a:noFill/>
-          <a:ln/>
-        </p:spPr>
-        <p:txBody>
-          <a:bodyPr wrap="square" lIns="0" tIns="0" rIns="0" bIns="0" rtlCol="0" anchor="ctr"/>
-          <a:lstStyle/>
-          <a:p>
-            <a:pPr algn="ctr" indent="0" marL="0">
-              <a:buNone/>
-            </a:pPr>
-            <a:r>
-              <a:rPr lang="en-US" sz="1000" dirty="0">
-                <a:solidFill>
-                  <a:srgbClr val="003A63"/>
-                </a:solidFill>
-                <a:latin typeface="Aptos" pitchFamily="34" charset="0"/>
-                <a:ea typeface="Aptos" pitchFamily="34" charset="-122"/>
-                <a:cs typeface="Aptos" pitchFamily="34" charset="-120"/>
-              </a:rPr>
-              <a:t>Concept to action</a:t>
-            </a:r>
-            <a:endParaRPr lang="en-US" sz="1000" dirty="0"/>
-          </a:p>
-        </p:txBody>
-      </p:sp>
-      <p:sp>
-        <p:nvSpPr>
-          <p:cNvPr id="18" name="Shape 16"/>
           <p:cNvSpPr/>
           <p:nvPr/>
         </p:nvSpPr>
@@ -12188,7 +11774,7 @@
       </p:sp>
       <p:sp>
         <p:nvSpPr>
-          <p:cNvPr id="19" name="Text 17"/>
+          <p:cNvPr id="17" name="Text 15"/>
           <p:cNvSpPr/>
           <p:nvPr/>
         </p:nvSpPr>
@@ -12227,7 +11813,7 @@
       </p:sp>
       <p:sp>
         <p:nvSpPr>
-          <p:cNvPr id="20" name="Text 18"/>
+          <p:cNvPr id="18" name="Text 16"/>
           <p:cNvSpPr/>
           <p:nvPr/>
         </p:nvSpPr>
@@ -12735,13 +12321,11 @@
             </a:avLst>
           </a:prstGeom>
           <a:solidFill>
-            <a:srgbClr val="FFFFFF">
-              <a:alpha val="88000"/>
-            </a:srgbClr>
+            <a:srgbClr val="FFFFFF"/>
           </a:solidFill>
           <a:ln w="12700">
             <a:solidFill>
-              <a:srgbClr val="D6E8F2"/>
+              <a:srgbClr val="B9D7E6"/>
             </a:solidFill>
             <a:prstDash val="solid"/>
           </a:ln>
@@ -12749,119 +12333,112 @@
       </p:sp>
       <p:sp>
         <p:nvSpPr>
-          <p:cNvPr id="14" name="Shape 12"/>
-          <p:cNvSpPr/>
-          <p:nvPr/>
-        </p:nvSpPr>
-        <p:spPr>
-          <a:xfrm>
-            <a:off x="8074152" y="3291840"/>
-            <a:ext cx="2596896" cy="749808"/>
-          </a:xfrm>
-          <a:prstGeom prst="rect">
-            <a:avLst/>
-          </a:prstGeom>
-          <a:solidFill>
-            <a:srgbClr val="EAF6F8"/>
-          </a:solidFill>
-          <a:ln w="12700">
-            <a:solidFill>
-              <a:srgbClr val="8ABBD8"/>
-            </a:solidFill>
-            <a:prstDash val="solid"/>
-          </a:ln>
-        </p:spPr>
-      </p:sp>
-      <p:sp>
-        <p:nvSpPr>
-          <p:cNvPr id="15" name="Shape 13"/>
-          <p:cNvSpPr/>
-          <p:nvPr/>
-        </p:nvSpPr>
-        <p:spPr>
-          <a:xfrm>
-            <a:off x="8202168" y="3721608"/>
-            <a:ext cx="2340864" cy="0"/>
-          </a:xfrm>
-          <a:prstGeom prst="line">
-            <a:avLst/>
-          </a:prstGeom>
-          <a:noFill/>
-          <a:ln w="19050">
-            <a:solidFill>
-              <a:srgbClr val="0068B7"/>
-            </a:solidFill>
-            <a:prstDash val="solid"/>
-          </a:ln>
-        </p:spPr>
+          <p:cNvPr id="14" name="Text 12"/>
+          <p:cNvSpPr/>
+          <p:nvPr/>
+        </p:nvSpPr>
+        <p:spPr>
+          <a:xfrm>
+            <a:off x="7799832" y="2935224"/>
+            <a:ext cx="3145536" cy="256032"/>
+          </a:xfrm>
+          <a:prstGeom prst="rect">
+            <a:avLst/>
+          </a:prstGeom>
+          <a:noFill/>
+          <a:ln/>
+        </p:spPr>
+        <p:txBody>
+          <a:bodyPr wrap="square" lIns="0" tIns="0" rIns="0" bIns="0" rtlCol="0" anchor="ctr"/>
+          <a:lstStyle/>
+          <a:p>
+            <a:pPr indent="0" marL="0">
+              <a:buNone/>
+            </a:pPr>
+            <a:r>
+              <a:rPr lang="en-US" sz="1300" b="1" dirty="0">
+                <a:solidFill>
+                  <a:srgbClr val="0068B7"/>
+                </a:solidFill>
+                <a:latin typeface="Aptos" pitchFamily="34" charset="0"/>
+                <a:ea typeface="Aptos" pitchFamily="34" charset="-122"/>
+                <a:cs typeface="Aptos" pitchFamily="34" charset="-120"/>
+              </a:rPr>
+              <a:t>Concept checkpoints</a:t>
+            </a:r>
+            <a:endParaRPr lang="en-US" sz="1300" dirty="0"/>
+          </a:p>
+        </p:txBody>
+      </p:sp>
+      <p:sp>
+        <p:nvSpPr>
+          <p:cNvPr id="15" name="Text 13"/>
+          <p:cNvSpPr/>
+          <p:nvPr/>
+        </p:nvSpPr>
+        <p:spPr>
+          <a:xfrm>
+            <a:off x="7818120" y="3300984"/>
+            <a:ext cx="3090672" cy="877824"/>
+          </a:xfrm>
+          <a:prstGeom prst="rect">
+            <a:avLst/>
+          </a:prstGeom>
+          <a:noFill/>
+          <a:ln/>
+        </p:spPr>
+        <p:txBody>
+          <a:bodyPr wrap="square" lIns="254" tIns="254" rIns="254" bIns="254" rtlCol="0" anchor="t">
+            <a:normAutofit/>
+          </a:bodyPr>
+          <a:lstStyle/>
+          <a:p>
+            <a:r>
+              <a:rPr lang="en-US" sz="1380" dirty="0">
+                <a:solidFill>
+                  <a:srgbClr val="17364A"/>
+                </a:solidFill>
+                <a:latin typeface="Aptos" pitchFamily="34" charset="0"/>
+                <a:ea typeface="Aptos" pitchFamily="34" charset="-122"/>
+                <a:cs typeface="Aptos" pitchFamily="34" charset="-120"/>
+              </a:rPr>
+              <a:t>Public health IIS and surveillance data quality resources</a:t>
+            </a:r>
+            <a:endParaRPr lang="en-US" sz="1380" dirty="0"/>
+          </a:p>
+          <a:p>
+            <a:r>
+              <a:rPr lang="en-US" sz="1380" dirty="0">
+                <a:solidFill>
+                  <a:srgbClr val="17364A"/>
+                </a:solidFill>
+                <a:latin typeface="Aptos" pitchFamily="34" charset="0"/>
+                <a:ea typeface="Aptos" pitchFamily="34" charset="-122"/>
+                <a:cs typeface="Aptos" pitchFamily="34" charset="-120"/>
+              </a:rPr>
+              <a:t>CDC data modernization resources</a:t>
+            </a:r>
+            <a:endParaRPr lang="en-US" sz="1380" dirty="0"/>
+          </a:p>
+          <a:p>
+            <a:r>
+              <a:rPr lang="en-US" sz="1380" dirty="0">
+                <a:solidFill>
+                  <a:srgbClr val="17364A"/>
+                </a:solidFill>
+                <a:latin typeface="Aptos" pitchFamily="34" charset="0"/>
+                <a:ea typeface="Aptos" pitchFamily="34" charset="-122"/>
+                <a:cs typeface="Aptos" pitchFamily="34" charset="-120"/>
+              </a:rPr>
+              <a:t>Health information exchange data quality materials</a:t>
+            </a:r>
+            <a:endParaRPr lang="en-US" sz="1380" dirty="0"/>
+          </a:p>
+        </p:txBody>
       </p:sp>
       <p:sp>
         <p:nvSpPr>
           <p:cNvPr id="16" name="Shape 14"/>
-          <p:cNvSpPr/>
-          <p:nvPr/>
-        </p:nvSpPr>
-        <p:spPr>
-          <a:xfrm>
-            <a:off x="9198864" y="4206240"/>
-            <a:ext cx="347472" cy="347472"/>
-          </a:xfrm>
-          <a:prstGeom prst="ellipse">
-            <a:avLst/>
-          </a:prstGeom>
-          <a:solidFill>
-            <a:srgbClr val="2F8A28"/>
-          </a:solidFill>
-          <a:ln w="12700">
-            <a:solidFill>
-              <a:srgbClr val="2F8A28"/>
-            </a:solidFill>
-            <a:prstDash val="solid"/>
-          </a:ln>
-        </p:spPr>
-      </p:sp>
-      <p:sp>
-        <p:nvSpPr>
-          <p:cNvPr id="17" name="Text 15"/>
-          <p:cNvSpPr/>
-          <p:nvPr/>
-        </p:nvSpPr>
-        <p:spPr>
-          <a:xfrm>
-            <a:off x="7909560" y="3977640"/>
-            <a:ext cx="2926080" cy="182880"/>
-          </a:xfrm>
-          <a:prstGeom prst="rect">
-            <a:avLst/>
-          </a:prstGeom>
-          <a:noFill/>
-          <a:ln/>
-        </p:spPr>
-        <p:txBody>
-          <a:bodyPr wrap="square" lIns="0" tIns="0" rIns="0" bIns="0" rtlCol="0" anchor="ctr"/>
-          <a:lstStyle/>
-          <a:p>
-            <a:pPr algn="ctr" indent="0" marL="0">
-              <a:buNone/>
-            </a:pPr>
-            <a:r>
-              <a:rPr lang="en-US" sz="1000" dirty="0">
-                <a:solidFill>
-                  <a:srgbClr val="003A63"/>
-                </a:solidFill>
-                <a:latin typeface="Aptos" pitchFamily="34" charset="0"/>
-                <a:ea typeface="Aptos" pitchFamily="34" charset="-122"/>
-                <a:cs typeface="Aptos" pitchFamily="34" charset="-120"/>
-              </a:rPr>
-              <a:t>Concept to action</a:t>
-            </a:r>
-            <a:endParaRPr lang="en-US" sz="1000" dirty="0"/>
-          </a:p>
-        </p:txBody>
-      </p:sp>
-      <p:sp>
-        <p:nvSpPr>
-          <p:cNvPr id="18" name="Shape 16"/>
           <p:cNvSpPr/>
           <p:nvPr/>
         </p:nvSpPr>
@@ -12888,7 +12465,7 @@
       </p:sp>
       <p:sp>
         <p:nvSpPr>
-          <p:cNvPr id="19" name="Text 17"/>
+          <p:cNvPr id="17" name="Text 15"/>
           <p:cNvSpPr/>
           <p:nvPr/>
         </p:nvSpPr>
@@ -12927,7 +12504,7 @@
       </p:sp>
       <p:sp>
         <p:nvSpPr>
-          <p:cNvPr id="20" name="Text 18"/>
+          <p:cNvPr id="18" name="Text 16"/>
           <p:cNvSpPr/>
           <p:nvPr/>
         </p:nvSpPr>
@@ -13440,20 +13017,20 @@
         </p:nvSpPr>
         <p:spPr>
           <a:xfrm>
-            <a:off x="7818120" y="3977640"/>
-            <a:ext cx="972312" cy="749808"/>
+            <a:off x="8046720" y="3794760"/>
+            <a:ext cx="3063240" cy="1600200"/>
           </a:xfrm>
           <a:prstGeom prst="roundRect">
             <a:avLst>
-              <a:gd name="adj" fmla="val 14634"/>
+              <a:gd name="adj" fmla="val 6857"/>
             </a:avLst>
           </a:prstGeom>
           <a:solidFill>
-            <a:srgbClr val="0068B7"/>
+            <a:srgbClr val="FFFFFF"/>
           </a:solidFill>
           <a:ln w="12700">
             <a:solidFill>
-              <a:srgbClr val="0068B7"/>
+              <a:srgbClr val="B9D7E6"/>
             </a:solidFill>
             <a:prstDash val="solid"/>
           </a:ln>
@@ -13467,172 +13044,100 @@
         </p:nvSpPr>
         <p:spPr>
           <a:xfrm>
-            <a:off x="7891272" y="4169664"/>
-            <a:ext cx="826008" cy="310896"/>
-          </a:xfrm>
-          <a:prstGeom prst="rect">
-            <a:avLst/>
-          </a:prstGeom>
-          <a:noFill/>
-          <a:ln/>
-        </p:spPr>
-        <p:txBody>
-          <a:bodyPr wrap="square" lIns="0" tIns="0" rIns="0" bIns="0" rtlCol="0" anchor="ctr">
+            <a:off x="8211312" y="3941064"/>
+            <a:ext cx="2734056" cy="256032"/>
+          </a:xfrm>
+          <a:prstGeom prst="rect">
+            <a:avLst/>
+          </a:prstGeom>
+          <a:noFill/>
+          <a:ln/>
+        </p:spPr>
+        <p:txBody>
+          <a:bodyPr wrap="square" lIns="0" tIns="0" rIns="0" bIns="0" rtlCol="0" anchor="ctr"/>
+          <a:lstStyle/>
+          <a:p>
+            <a:pPr indent="0" marL="0">
+              <a:buNone/>
+            </a:pPr>
+            <a:r>
+              <a:rPr lang="en-US" sz="1300" b="1" dirty="0">
+                <a:solidFill>
+                  <a:srgbClr val="0068B7"/>
+                </a:solidFill>
+                <a:latin typeface="Aptos" pitchFamily="34" charset="0"/>
+                <a:ea typeface="Aptos" pitchFamily="34" charset="-122"/>
+                <a:cs typeface="Aptos" pitchFamily="34" charset="-120"/>
+              </a:rPr>
+              <a:t>Use the play links to</a:t>
+            </a:r>
+            <a:endParaRPr lang="en-US" sz="1300" dirty="0"/>
+          </a:p>
+        </p:txBody>
+      </p:sp>
+      <p:sp>
+        <p:nvSpPr>
+          <p:cNvPr id="15" name="Text 13"/>
+          <p:cNvSpPr/>
+          <p:nvPr/>
+        </p:nvSpPr>
+        <p:spPr>
+          <a:xfrm>
+            <a:off x="8229600" y="4306824"/>
+            <a:ext cx="2679192" cy="941832"/>
+          </a:xfrm>
+          <a:prstGeom prst="rect">
+            <a:avLst/>
+          </a:prstGeom>
+          <a:noFill/>
+          <a:ln/>
+        </p:spPr>
+        <p:txBody>
+          <a:bodyPr wrap="square" lIns="254" tIns="254" rIns="254" bIns="254" rtlCol="0" anchor="t">
             <a:normAutofit/>
           </a:bodyPr>
           <a:lstStyle/>
           <a:p>
-            <a:pPr algn="ctr" indent="0" marL="0">
-              <a:buNone/>
-            </a:pPr>
-            <a:r>
-              <a:rPr lang="en-US" sz="1500" b="1" dirty="0">
-                <a:solidFill>
-                  <a:srgbClr val="FFFFFF"/>
-                </a:solidFill>
-                <a:latin typeface="Aptos" pitchFamily="34" charset="0"/>
-                <a:ea typeface="Aptos" pitchFamily="34" charset="-122"/>
-                <a:cs typeface="Aptos" pitchFamily="34" charset="-120"/>
-              </a:rPr>
-              <a:t>Lesson</a:t>
-            </a:r>
-            <a:endParaRPr lang="en-US" sz="1500" dirty="0"/>
-          </a:p>
-        </p:txBody>
-      </p:sp>
-      <p:sp>
-        <p:nvSpPr>
-          <p:cNvPr id="15" name="Shape 13"/>
-          <p:cNvSpPr/>
-          <p:nvPr/>
-        </p:nvSpPr>
-        <p:spPr>
-          <a:xfrm>
-            <a:off x="9046464" y="3977640"/>
-            <a:ext cx="972312" cy="749808"/>
-          </a:xfrm>
-          <a:prstGeom prst="roundRect">
-            <a:avLst>
-              <a:gd name="adj" fmla="val 14634"/>
-            </a:avLst>
-          </a:prstGeom>
-          <a:solidFill>
-            <a:srgbClr val="2F8A28"/>
-          </a:solidFill>
-          <a:ln w="12700">
-            <a:solidFill>
-              <a:srgbClr val="2F8A28"/>
-            </a:solidFill>
-            <a:prstDash val="solid"/>
-          </a:ln>
-        </p:spPr>
-      </p:sp>
-      <p:sp>
-        <p:nvSpPr>
-          <p:cNvPr id="16" name="Text 14"/>
-          <p:cNvSpPr/>
-          <p:nvPr/>
-        </p:nvSpPr>
-        <p:spPr>
-          <a:xfrm>
-            <a:off x="9119616" y="4169664"/>
-            <a:ext cx="826008" cy="310896"/>
-          </a:xfrm>
-          <a:prstGeom prst="rect">
-            <a:avLst/>
-          </a:prstGeom>
-          <a:noFill/>
-          <a:ln/>
-        </p:spPr>
-        <p:txBody>
-          <a:bodyPr wrap="square" lIns="0" tIns="0" rIns="0" bIns="0" rtlCol="0" anchor="ctr">
-            <a:normAutofit/>
-          </a:bodyPr>
-          <a:lstStyle/>
-          <a:p>
-            <a:pPr algn="ctr" indent="0" marL="0">
-              <a:buNone/>
-            </a:pPr>
-            <a:r>
-              <a:rPr lang="en-US" sz="1500" b="1" dirty="0">
-                <a:solidFill>
-                  <a:srgbClr val="FFFFFF"/>
-                </a:solidFill>
-                <a:latin typeface="Aptos" pitchFamily="34" charset="0"/>
-                <a:ea typeface="Aptos" pitchFamily="34" charset="-122"/>
-                <a:cs typeface="Aptos" pitchFamily="34" charset="-120"/>
-              </a:rPr>
-              <a:t>Plays</a:t>
-            </a:r>
-            <a:endParaRPr lang="en-US" sz="1500" dirty="0"/>
-          </a:p>
-        </p:txBody>
-      </p:sp>
-      <p:sp>
-        <p:nvSpPr>
-          <p:cNvPr id="17" name="Shape 15"/>
-          <p:cNvSpPr/>
-          <p:nvPr/>
-        </p:nvSpPr>
-        <p:spPr>
-          <a:xfrm>
-            <a:off x="10274808" y="3977640"/>
-            <a:ext cx="972312" cy="749808"/>
-          </a:xfrm>
-          <a:prstGeom prst="roundRect">
-            <a:avLst>
-              <a:gd name="adj" fmla="val 14634"/>
-            </a:avLst>
-          </a:prstGeom>
-          <a:solidFill>
-            <a:srgbClr val="6A4CA3"/>
-          </a:solidFill>
-          <a:ln w="12700">
-            <a:solidFill>
-              <a:srgbClr val="6A4CA3"/>
-            </a:solidFill>
-            <a:prstDash val="solid"/>
-          </a:ln>
-        </p:spPr>
-      </p:sp>
-      <p:sp>
-        <p:nvSpPr>
-          <p:cNvPr id="18" name="Text 16"/>
-          <p:cNvSpPr/>
-          <p:nvPr/>
-        </p:nvSpPr>
-        <p:spPr>
-          <a:xfrm>
-            <a:off x="10347960" y="4169664"/>
-            <a:ext cx="826008" cy="310896"/>
-          </a:xfrm>
-          <a:prstGeom prst="rect">
-            <a:avLst/>
-          </a:prstGeom>
-          <a:noFill/>
-          <a:ln/>
-        </p:spPr>
-        <p:txBody>
-          <a:bodyPr wrap="square" lIns="0" tIns="0" rIns="0" bIns="0" rtlCol="0" anchor="ctr">
-            <a:normAutofit/>
-          </a:bodyPr>
-          <a:lstStyle/>
-          <a:p>
-            <a:pPr algn="ctr" indent="0" marL="0">
-              <a:buNone/>
-            </a:pPr>
-            <a:r>
-              <a:rPr lang="en-US" sz="1500" b="1" dirty="0">
-                <a:solidFill>
-                  <a:srgbClr val="FFFFFF"/>
-                </a:solidFill>
-                <a:latin typeface="Aptos" pitchFamily="34" charset="0"/>
-                <a:ea typeface="Aptos" pitchFamily="34" charset="-122"/>
-                <a:cs typeface="Aptos" pitchFamily="34" charset="-120"/>
-              </a:rPr>
-              <a:t>Action</a:t>
-            </a:r>
-            <a:endParaRPr lang="en-US" sz="1500" dirty="0"/>
+            <a:r>
+              <a:rPr lang="en-US" sz="1380" dirty="0">
+                <a:solidFill>
+                  <a:srgbClr val="17364A"/>
+                </a:solidFill>
+                <a:latin typeface="Aptos" pitchFamily="34" charset="0"/>
+                <a:ea typeface="Aptos" pitchFamily="34" charset="-122"/>
+                <a:cs typeface="Aptos" pitchFamily="34" charset="-120"/>
+              </a:rPr>
+              <a:t>Locate the decision point in the playbook sequence.</a:t>
+            </a:r>
+            <a:endParaRPr lang="en-US" sz="1380" dirty="0"/>
+          </a:p>
+          <a:p>
+            <a:r>
+              <a:rPr lang="en-US" sz="1380" dirty="0">
+                <a:solidFill>
+                  <a:srgbClr val="17364A"/>
+                </a:solidFill>
+                <a:latin typeface="Aptos" pitchFamily="34" charset="0"/>
+                <a:ea typeface="Aptos" pitchFamily="34" charset="-122"/>
+                <a:cs typeface="Aptos" pitchFamily="34" charset="-120"/>
+              </a:rPr>
+              <a:t>Identify who should participate in the work.</a:t>
+            </a:r>
+            <a:endParaRPr lang="en-US" sz="1380" dirty="0"/>
+          </a:p>
+          <a:p>
+            <a:r>
+              <a:rPr lang="en-US" sz="1380" dirty="0">
+                <a:solidFill>
+                  <a:srgbClr val="17364A"/>
+                </a:solidFill>
+                <a:latin typeface="Aptos" pitchFamily="34" charset="0"/>
+                <a:ea typeface="Aptos" pitchFamily="34" charset="-122"/>
+                <a:cs typeface="Aptos" pitchFamily="34" charset="-120"/>
+              </a:rPr>
+              <a:t>Document the review, approval, or implementation step.</a:t>
+            </a:r>
+            <a:endParaRPr lang="en-US" sz="1380" dirty="0"/>
           </a:p>
         </p:txBody>
       </p:sp>
@@ -14110,20 +13615,20 @@
         </p:nvSpPr>
         <p:spPr>
           <a:xfrm>
-            <a:off x="7818120" y="3977640"/>
-            <a:ext cx="972312" cy="749808"/>
+            <a:off x="8046720" y="3794760"/>
+            <a:ext cx="3063240" cy="1600200"/>
           </a:xfrm>
           <a:prstGeom prst="roundRect">
             <a:avLst>
-              <a:gd name="adj" fmla="val 14634"/>
+              <a:gd name="adj" fmla="val 6857"/>
             </a:avLst>
           </a:prstGeom>
           <a:solidFill>
-            <a:srgbClr val="0068B7"/>
+            <a:srgbClr val="FFFFFF"/>
           </a:solidFill>
           <a:ln w="12700">
             <a:solidFill>
-              <a:srgbClr val="0068B7"/>
+              <a:srgbClr val="B9D7E6"/>
             </a:solidFill>
             <a:prstDash val="solid"/>
           </a:ln>
@@ -14137,172 +13642,100 @@
         </p:nvSpPr>
         <p:spPr>
           <a:xfrm>
-            <a:off x="7891272" y="4169664"/>
-            <a:ext cx="826008" cy="310896"/>
-          </a:xfrm>
-          <a:prstGeom prst="rect">
-            <a:avLst/>
-          </a:prstGeom>
-          <a:noFill/>
-          <a:ln/>
-        </p:spPr>
-        <p:txBody>
-          <a:bodyPr wrap="square" lIns="0" tIns="0" rIns="0" bIns="0" rtlCol="0" anchor="ctr">
+            <a:off x="8211312" y="3941064"/>
+            <a:ext cx="2734056" cy="256032"/>
+          </a:xfrm>
+          <a:prstGeom prst="rect">
+            <a:avLst/>
+          </a:prstGeom>
+          <a:noFill/>
+          <a:ln/>
+        </p:spPr>
+        <p:txBody>
+          <a:bodyPr wrap="square" lIns="0" tIns="0" rIns="0" bIns="0" rtlCol="0" anchor="ctr"/>
+          <a:lstStyle/>
+          <a:p>
+            <a:pPr indent="0" marL="0">
+              <a:buNone/>
+            </a:pPr>
+            <a:r>
+              <a:rPr lang="en-US" sz="1300" b="1" dirty="0">
+                <a:solidFill>
+                  <a:srgbClr val="0068B7"/>
+                </a:solidFill>
+                <a:latin typeface="Aptos" pitchFamily="34" charset="0"/>
+                <a:ea typeface="Aptos" pitchFamily="34" charset="-122"/>
+                <a:cs typeface="Aptos" pitchFamily="34" charset="-120"/>
+              </a:rPr>
+              <a:t>Tool selection cues</a:t>
+            </a:r>
+            <a:endParaRPr lang="en-US" sz="1300" dirty="0"/>
+          </a:p>
+        </p:txBody>
+      </p:sp>
+      <p:sp>
+        <p:nvSpPr>
+          <p:cNvPr id="15" name="Text 13"/>
+          <p:cNvSpPr/>
+          <p:nvPr/>
+        </p:nvSpPr>
+        <p:spPr>
+          <a:xfrm>
+            <a:off x="8229600" y="4306824"/>
+            <a:ext cx="2679192" cy="941832"/>
+          </a:xfrm>
+          <a:prstGeom prst="rect">
+            <a:avLst/>
+          </a:prstGeom>
+          <a:noFill/>
+          <a:ln/>
+        </p:spPr>
+        <p:txBody>
+          <a:bodyPr wrap="square" lIns="254" tIns="254" rIns="254" bIns="254" rtlCol="0" anchor="t">
             <a:normAutofit/>
           </a:bodyPr>
           <a:lstStyle/>
           <a:p>
-            <a:pPr algn="ctr" indent="0" marL="0">
-              <a:buNone/>
-            </a:pPr>
-            <a:r>
-              <a:rPr lang="en-US" sz="1500" b="1" dirty="0">
-                <a:solidFill>
-                  <a:srgbClr val="FFFFFF"/>
-                </a:solidFill>
-                <a:latin typeface="Aptos" pitchFamily="34" charset="0"/>
-                <a:ea typeface="Aptos" pitchFamily="34" charset="-122"/>
-                <a:cs typeface="Aptos" pitchFamily="34" charset="-120"/>
-              </a:rPr>
-              <a:t>Concept</a:t>
-            </a:r>
-            <a:endParaRPr lang="en-US" sz="1500" dirty="0"/>
-          </a:p>
-        </p:txBody>
-      </p:sp>
-      <p:sp>
-        <p:nvSpPr>
-          <p:cNvPr id="15" name="Shape 13"/>
-          <p:cNvSpPr/>
-          <p:nvPr/>
-        </p:nvSpPr>
-        <p:spPr>
-          <a:xfrm>
-            <a:off x="9046464" y="3977640"/>
-            <a:ext cx="972312" cy="749808"/>
-          </a:xfrm>
-          <a:prstGeom prst="roundRect">
-            <a:avLst>
-              <a:gd name="adj" fmla="val 14634"/>
-            </a:avLst>
-          </a:prstGeom>
-          <a:solidFill>
-            <a:srgbClr val="2F8A28"/>
-          </a:solidFill>
-          <a:ln w="12700">
-            <a:solidFill>
-              <a:srgbClr val="2F8A28"/>
-            </a:solidFill>
-            <a:prstDash val="solid"/>
-          </a:ln>
-        </p:spPr>
-      </p:sp>
-      <p:sp>
-        <p:nvSpPr>
-          <p:cNvPr id="16" name="Text 14"/>
-          <p:cNvSpPr/>
-          <p:nvPr/>
-        </p:nvSpPr>
-        <p:spPr>
-          <a:xfrm>
-            <a:off x="9119616" y="4169664"/>
-            <a:ext cx="826008" cy="310896"/>
-          </a:xfrm>
-          <a:prstGeom prst="rect">
-            <a:avLst/>
-          </a:prstGeom>
-          <a:noFill/>
-          <a:ln/>
-        </p:spPr>
-        <p:txBody>
-          <a:bodyPr wrap="square" lIns="0" tIns="0" rIns="0" bIns="0" rtlCol="0" anchor="ctr">
-            <a:normAutofit/>
-          </a:bodyPr>
-          <a:lstStyle/>
-          <a:p>
-            <a:pPr algn="ctr" indent="0" marL="0">
-              <a:buNone/>
-            </a:pPr>
-            <a:r>
-              <a:rPr lang="en-US" sz="1500" b="1" dirty="0">
-                <a:solidFill>
-                  <a:srgbClr val="FFFFFF"/>
-                </a:solidFill>
-                <a:latin typeface="Aptos" pitchFamily="34" charset="0"/>
-                <a:ea typeface="Aptos" pitchFamily="34" charset="-122"/>
-                <a:cs typeface="Aptos" pitchFamily="34" charset="-120"/>
-              </a:rPr>
-              <a:t>Tool</a:t>
-            </a:r>
-            <a:endParaRPr lang="en-US" sz="1500" dirty="0"/>
-          </a:p>
-        </p:txBody>
-      </p:sp>
-      <p:sp>
-        <p:nvSpPr>
-          <p:cNvPr id="17" name="Shape 15"/>
-          <p:cNvSpPr/>
-          <p:nvPr/>
-        </p:nvSpPr>
-        <p:spPr>
-          <a:xfrm>
-            <a:off x="10274808" y="3977640"/>
-            <a:ext cx="972312" cy="749808"/>
-          </a:xfrm>
-          <a:prstGeom prst="roundRect">
-            <a:avLst>
-              <a:gd name="adj" fmla="val 14634"/>
-            </a:avLst>
-          </a:prstGeom>
-          <a:solidFill>
-            <a:srgbClr val="D69A2D"/>
-          </a:solidFill>
-          <a:ln w="12700">
-            <a:solidFill>
-              <a:srgbClr val="D69A2D"/>
-            </a:solidFill>
-            <a:prstDash val="solid"/>
-          </a:ln>
-        </p:spPr>
-      </p:sp>
-      <p:sp>
-        <p:nvSpPr>
-          <p:cNvPr id="18" name="Text 16"/>
-          <p:cNvSpPr/>
-          <p:nvPr/>
-        </p:nvSpPr>
-        <p:spPr>
-          <a:xfrm>
-            <a:off x="10347960" y="4169664"/>
-            <a:ext cx="826008" cy="310896"/>
-          </a:xfrm>
-          <a:prstGeom prst="rect">
-            <a:avLst/>
-          </a:prstGeom>
-          <a:noFill/>
-          <a:ln/>
-        </p:spPr>
-        <p:txBody>
-          <a:bodyPr wrap="square" lIns="0" tIns="0" rIns="0" bIns="0" rtlCol="0" anchor="ctr">
-            <a:normAutofit/>
-          </a:bodyPr>
-          <a:lstStyle/>
-          <a:p>
-            <a:pPr algn="ctr" indent="0" marL="0">
-              <a:buNone/>
-            </a:pPr>
-            <a:r>
-              <a:rPr lang="en-US" sz="1500" b="1" dirty="0">
-                <a:solidFill>
-                  <a:srgbClr val="FFFFFF"/>
-                </a:solidFill>
-                <a:latin typeface="Aptos" pitchFamily="34" charset="0"/>
-                <a:ea typeface="Aptos" pitchFamily="34" charset="-122"/>
-                <a:cs typeface="Aptos" pitchFamily="34" charset="-120"/>
-              </a:rPr>
-              <a:t>Artifact</a:t>
-            </a:r>
-            <a:endParaRPr lang="en-US" sz="1500" dirty="0"/>
+            <a:r>
+              <a:rPr lang="en-US" sz="1380" dirty="0">
+                <a:solidFill>
+                  <a:srgbClr val="17364A"/>
+                </a:solidFill>
+                <a:latin typeface="Aptos" pitchFamily="34" charset="0"/>
+                <a:ea typeface="Aptos" pitchFamily="34" charset="-122"/>
+                <a:cs typeface="Aptos" pitchFamily="34" charset="-120"/>
+              </a:rPr>
+              <a:t>Use a tool when no comparable local process exists.</a:t>
+            </a:r>
+            <a:endParaRPr lang="en-US" sz="1380" dirty="0"/>
+          </a:p>
+          <a:p>
+            <a:r>
+              <a:rPr lang="en-US" sz="1380" dirty="0">
+                <a:solidFill>
+                  <a:srgbClr val="17364A"/>
+                </a:solidFill>
+                <a:latin typeface="Aptos" pitchFamily="34" charset="0"/>
+                <a:ea typeface="Aptos" pitchFamily="34" charset="-122"/>
+                <a:cs typeface="Aptos" pitchFamily="34" charset="-120"/>
+              </a:rPr>
+              <a:t>Adapt existing department templates when they already fit the purpose.</a:t>
+            </a:r>
+            <a:endParaRPr lang="en-US" sz="1380" dirty="0"/>
+          </a:p>
+          <a:p>
+            <a:r>
+              <a:rPr lang="en-US" sz="1380" dirty="0">
+                <a:solidFill>
+                  <a:srgbClr val="17364A"/>
+                </a:solidFill>
+                <a:latin typeface="Aptos" pitchFamily="34" charset="0"/>
+                <a:ea typeface="Aptos" pitchFamily="34" charset="-122"/>
+                <a:cs typeface="Aptos" pitchFamily="34" charset="-120"/>
+              </a:rPr>
+              <a:t>Save the completed artifact as evidence of the decision.</a:t>
+            </a:r>
+            <a:endParaRPr lang="en-US" sz="1380" dirty="0"/>
           </a:p>
         </p:txBody>
       </p:sp>
@@ -14775,13 +14208,11 @@
             </a:avLst>
           </a:prstGeom>
           <a:solidFill>
-            <a:srgbClr val="FFFFFF">
-              <a:alpha val="88000"/>
-            </a:srgbClr>
+            <a:srgbClr val="FFFFFF"/>
           </a:solidFill>
           <a:ln w="12700">
             <a:solidFill>
-              <a:srgbClr val="D6E8F2"/>
+              <a:srgbClr val="B9D7E6"/>
             </a:solidFill>
             <a:prstDash val="solid"/>
           </a:ln>
@@ -14789,119 +14220,98 @@
       </p:sp>
       <p:sp>
         <p:nvSpPr>
-          <p:cNvPr id="14" name="Shape 12"/>
-          <p:cNvSpPr/>
-          <p:nvPr/>
-        </p:nvSpPr>
-        <p:spPr>
-          <a:xfrm>
-            <a:off x="8074152" y="3291840"/>
-            <a:ext cx="2596896" cy="749808"/>
-          </a:xfrm>
-          <a:prstGeom prst="rect">
-            <a:avLst/>
-          </a:prstGeom>
-          <a:solidFill>
-            <a:srgbClr val="EAF6F8"/>
-          </a:solidFill>
-          <a:ln w="12700">
-            <a:solidFill>
-              <a:srgbClr val="8ABBD8"/>
-            </a:solidFill>
-            <a:prstDash val="solid"/>
-          </a:ln>
-        </p:spPr>
-      </p:sp>
-      <p:sp>
-        <p:nvSpPr>
-          <p:cNvPr id="15" name="Shape 13"/>
-          <p:cNvSpPr/>
-          <p:nvPr/>
-        </p:nvSpPr>
-        <p:spPr>
-          <a:xfrm>
-            <a:off x="8202168" y="3721608"/>
-            <a:ext cx="2340864" cy="0"/>
-          </a:xfrm>
-          <a:prstGeom prst="line">
-            <a:avLst/>
-          </a:prstGeom>
-          <a:noFill/>
-          <a:ln w="19050">
-            <a:solidFill>
-              <a:srgbClr val="0068B7"/>
-            </a:solidFill>
-            <a:prstDash val="solid"/>
-          </a:ln>
-        </p:spPr>
+          <p:cNvPr id="14" name="Text 12"/>
+          <p:cNvSpPr/>
+          <p:nvPr/>
+        </p:nvSpPr>
+        <p:spPr>
+          <a:xfrm>
+            <a:off x="7799832" y="2935224"/>
+            <a:ext cx="3145536" cy="256032"/>
+          </a:xfrm>
+          <a:prstGeom prst="rect">
+            <a:avLst/>
+          </a:prstGeom>
+          <a:noFill/>
+          <a:ln/>
+        </p:spPr>
+        <p:txBody>
+          <a:bodyPr wrap="square" lIns="0" tIns="0" rIns="0" bIns="0" rtlCol="0" anchor="ctr"/>
+          <a:lstStyle/>
+          <a:p>
+            <a:pPr indent="0" marL="0">
+              <a:buNone/>
+            </a:pPr>
+            <a:r>
+              <a:rPr lang="en-US" sz="1300" b="1" dirty="0">
+                <a:solidFill>
+                  <a:srgbClr val="0068B7"/>
+                </a:solidFill>
+                <a:latin typeface="Aptos" pitchFamily="34" charset="0"/>
+                <a:ea typeface="Aptos" pitchFamily="34" charset="-122"/>
+                <a:cs typeface="Aptos" pitchFamily="34" charset="-120"/>
+              </a:rPr>
+              <a:t>Concept checkpoints</a:t>
+            </a:r>
+            <a:endParaRPr lang="en-US" sz="1300" dirty="0"/>
+          </a:p>
+        </p:txBody>
+      </p:sp>
+      <p:sp>
+        <p:nvSpPr>
+          <p:cNvPr id="15" name="Text 13"/>
+          <p:cNvSpPr/>
+          <p:nvPr/>
+        </p:nvSpPr>
+        <p:spPr>
+          <a:xfrm>
+            <a:off x="7818120" y="3300984"/>
+            <a:ext cx="3090672" cy="877824"/>
+          </a:xfrm>
+          <a:prstGeom prst="rect">
+            <a:avLst/>
+          </a:prstGeom>
+          <a:noFill/>
+          <a:ln/>
+        </p:spPr>
+        <p:txBody>
+          <a:bodyPr wrap="square" lIns="254" tIns="254" rIns="254" bIns="254" rtlCol="0" anchor="t">
+            <a:normAutofit/>
+          </a:bodyPr>
+          <a:lstStyle/>
+          <a:p>
+            <a:r>
+              <a:rPr lang="en-US" sz="1380" dirty="0">
+                <a:solidFill>
+                  <a:srgbClr val="17364A"/>
+                </a:solidFill>
+                <a:latin typeface="Aptos" pitchFamily="34" charset="0"/>
+                <a:ea typeface="Aptos" pitchFamily="34" charset="-122"/>
+                <a:cs typeface="Aptos" pitchFamily="34" charset="-120"/>
+              </a:rPr>
+              <a:t>Describe how thresholds, clerical review, and data quality affect matching.</a:t>
+            </a:r>
+            <a:endParaRPr lang="en-US" sz="1380" dirty="0"/>
+          </a:p>
+          <a:p>
+            <a:r>
+              <a:rPr lang="en-US" sz="1380" dirty="0">
+                <a:solidFill>
+                  <a:srgbClr val="17364A"/>
+                </a:solidFill>
+                <a:latin typeface="Aptos" pitchFamily="34" charset="0"/>
+                <a:ea typeface="Aptos" pitchFamily="34" charset="-122"/>
+                <a:cs typeface="Aptos" pitchFamily="34" charset="-120"/>
+              </a:rPr>
+              <a:t>Produce a linkage risk review for an AI-supported workflow.</a:t>
+            </a:r>
+            <a:endParaRPr lang="en-US" sz="1380" dirty="0"/>
+          </a:p>
+        </p:txBody>
       </p:sp>
       <p:sp>
         <p:nvSpPr>
           <p:cNvPr id="16" name="Shape 14"/>
-          <p:cNvSpPr/>
-          <p:nvPr/>
-        </p:nvSpPr>
-        <p:spPr>
-          <a:xfrm>
-            <a:off x="9198864" y="4206240"/>
-            <a:ext cx="347472" cy="347472"/>
-          </a:xfrm>
-          <a:prstGeom prst="ellipse">
-            <a:avLst/>
-          </a:prstGeom>
-          <a:solidFill>
-            <a:srgbClr val="2F8A28"/>
-          </a:solidFill>
-          <a:ln w="12700">
-            <a:solidFill>
-              <a:srgbClr val="2F8A28"/>
-            </a:solidFill>
-            <a:prstDash val="solid"/>
-          </a:ln>
-        </p:spPr>
-      </p:sp>
-      <p:sp>
-        <p:nvSpPr>
-          <p:cNvPr id="17" name="Text 15"/>
-          <p:cNvSpPr/>
-          <p:nvPr/>
-        </p:nvSpPr>
-        <p:spPr>
-          <a:xfrm>
-            <a:off x="7909560" y="3977640"/>
-            <a:ext cx="2926080" cy="182880"/>
-          </a:xfrm>
-          <a:prstGeom prst="rect">
-            <a:avLst/>
-          </a:prstGeom>
-          <a:noFill/>
-          <a:ln/>
-        </p:spPr>
-        <p:txBody>
-          <a:bodyPr wrap="square" lIns="0" tIns="0" rIns="0" bIns="0" rtlCol="0" anchor="ctr"/>
-          <a:lstStyle/>
-          <a:p>
-            <a:pPr algn="ctr" indent="0" marL="0">
-              <a:buNone/>
-            </a:pPr>
-            <a:r>
-              <a:rPr lang="en-US" sz="1000" dirty="0">
-                <a:solidFill>
-                  <a:srgbClr val="003A63"/>
-                </a:solidFill>
-                <a:latin typeface="Aptos" pitchFamily="34" charset="0"/>
-                <a:ea typeface="Aptos" pitchFamily="34" charset="-122"/>
-                <a:cs typeface="Aptos" pitchFamily="34" charset="-120"/>
-              </a:rPr>
-              <a:t>Concept to action</a:t>
-            </a:r>
-            <a:endParaRPr lang="en-US" sz="1000" dirty="0"/>
-          </a:p>
-        </p:txBody>
-      </p:sp>
-      <p:sp>
-        <p:nvSpPr>
-          <p:cNvPr id="18" name="Shape 16"/>
           <p:cNvSpPr/>
           <p:nvPr/>
         </p:nvSpPr>
@@ -14928,7 +14338,7 @@
       </p:sp>
       <p:sp>
         <p:nvSpPr>
-          <p:cNvPr id="19" name="Text 17"/>
+          <p:cNvPr id="17" name="Text 15"/>
           <p:cNvSpPr/>
           <p:nvPr/>
         </p:nvSpPr>
@@ -14967,7 +14377,7 @@
       </p:sp>
       <p:sp>
         <p:nvSpPr>
-          <p:cNvPr id="20" name="Text 18"/>
+          <p:cNvPr id="18" name="Text 16"/>
           <p:cNvSpPr/>
           <p:nvPr/>
         </p:nvSpPr>
@@ -15475,13 +14885,11 @@
             </a:avLst>
           </a:prstGeom>
           <a:solidFill>
-            <a:srgbClr val="FFFFFF">
-              <a:alpha val="88000"/>
-            </a:srgbClr>
+            <a:srgbClr val="FFFFFF"/>
           </a:solidFill>
           <a:ln w="12700">
             <a:solidFill>
-              <a:srgbClr val="D6E8F2"/>
+              <a:srgbClr val="B9D7E6"/>
             </a:solidFill>
             <a:prstDash val="solid"/>
           </a:ln>
@@ -15489,119 +14897,98 @@
       </p:sp>
       <p:sp>
         <p:nvSpPr>
-          <p:cNvPr id="14" name="Shape 12"/>
-          <p:cNvSpPr/>
-          <p:nvPr/>
-        </p:nvSpPr>
-        <p:spPr>
-          <a:xfrm>
-            <a:off x="8074152" y="3291840"/>
-            <a:ext cx="2596896" cy="749808"/>
-          </a:xfrm>
-          <a:prstGeom prst="rect">
-            <a:avLst/>
-          </a:prstGeom>
-          <a:solidFill>
-            <a:srgbClr val="EAF6F8"/>
-          </a:solidFill>
-          <a:ln w="12700">
-            <a:solidFill>
-              <a:srgbClr val="8ABBD8"/>
-            </a:solidFill>
-            <a:prstDash val="solid"/>
-          </a:ln>
-        </p:spPr>
-      </p:sp>
-      <p:sp>
-        <p:nvSpPr>
-          <p:cNvPr id="15" name="Shape 13"/>
-          <p:cNvSpPr/>
-          <p:nvPr/>
-        </p:nvSpPr>
-        <p:spPr>
-          <a:xfrm>
-            <a:off x="8202168" y="3721608"/>
-            <a:ext cx="2340864" cy="0"/>
-          </a:xfrm>
-          <a:prstGeom prst="line">
-            <a:avLst/>
-          </a:prstGeom>
-          <a:noFill/>
-          <a:ln w="19050">
-            <a:solidFill>
-              <a:srgbClr val="0068B7"/>
-            </a:solidFill>
-            <a:prstDash val="solid"/>
-          </a:ln>
-        </p:spPr>
+          <p:cNvPr id="14" name="Text 12"/>
+          <p:cNvSpPr/>
+          <p:nvPr/>
+        </p:nvSpPr>
+        <p:spPr>
+          <a:xfrm>
+            <a:off x="7799832" y="2935224"/>
+            <a:ext cx="3145536" cy="256032"/>
+          </a:xfrm>
+          <a:prstGeom prst="rect">
+            <a:avLst/>
+          </a:prstGeom>
+          <a:noFill/>
+          <a:ln/>
+        </p:spPr>
+        <p:txBody>
+          <a:bodyPr wrap="square" lIns="0" tIns="0" rIns="0" bIns="0" rtlCol="0" anchor="ctr"/>
+          <a:lstStyle/>
+          <a:p>
+            <a:pPr indent="0" marL="0">
+              <a:buNone/>
+            </a:pPr>
+            <a:r>
+              <a:rPr lang="en-US" sz="1300" b="1" dirty="0">
+                <a:solidFill>
+                  <a:srgbClr val="0068B7"/>
+                </a:solidFill>
+                <a:latin typeface="Aptos" pitchFamily="34" charset="0"/>
+                <a:ea typeface="Aptos" pitchFamily="34" charset="-122"/>
+                <a:cs typeface="Aptos" pitchFamily="34" charset="-120"/>
+              </a:rPr>
+              <a:t>Concept checkpoints</a:t>
+            </a:r>
+            <a:endParaRPr lang="en-US" sz="1300" dirty="0"/>
+          </a:p>
+        </p:txBody>
+      </p:sp>
+      <p:sp>
+        <p:nvSpPr>
+          <p:cNvPr id="15" name="Text 13"/>
+          <p:cNvSpPr/>
+          <p:nvPr/>
+        </p:nvSpPr>
+        <p:spPr>
+          <a:xfrm>
+            <a:off x="7818120" y="3300984"/>
+            <a:ext cx="3090672" cy="877824"/>
+          </a:xfrm>
+          <a:prstGeom prst="rect">
+            <a:avLst/>
+          </a:prstGeom>
+          <a:noFill/>
+          <a:ln/>
+        </p:spPr>
+        <p:txBody>
+          <a:bodyPr wrap="square" lIns="254" tIns="254" rIns="254" bIns="254" rtlCol="0" anchor="t">
+            <a:normAutofit/>
+          </a:bodyPr>
+          <a:lstStyle/>
+          <a:p>
+            <a:r>
+              <a:rPr lang="en-US" sz="1380" dirty="0">
+                <a:solidFill>
+                  <a:srgbClr val="17364A"/>
+                </a:solidFill>
+                <a:latin typeface="Aptos" pitchFamily="34" charset="0"/>
+                <a:ea typeface="Aptos" pitchFamily="34" charset="-122"/>
+                <a:cs typeface="Aptos" pitchFamily="34" charset="-120"/>
+              </a:rPr>
+              <a:t>Record linkage and entity resolution help public health systems determine whether records.</a:t>
+            </a:r>
+            <a:endParaRPr lang="en-US" sz="1380" dirty="0"/>
+          </a:p>
+          <a:p>
+            <a:r>
+              <a:rPr lang="en-US" sz="1380" dirty="0">
+                <a:solidFill>
+                  <a:srgbClr val="17364A"/>
+                </a:solidFill>
+                <a:latin typeface="Aptos" pitchFamily="34" charset="0"/>
+                <a:ea typeface="Aptos" pitchFamily="34" charset="-122"/>
+                <a:cs typeface="Aptos" pitchFamily="34" charset="-120"/>
+              </a:rPr>
+              <a:t>This module teaches learners how matching and deduplication affect AI outputs,.</a:t>
+            </a:r>
+            <a:endParaRPr lang="en-US" sz="1380" dirty="0"/>
+          </a:p>
+        </p:txBody>
       </p:sp>
       <p:sp>
         <p:nvSpPr>
           <p:cNvPr id="16" name="Shape 14"/>
-          <p:cNvSpPr/>
-          <p:nvPr/>
-        </p:nvSpPr>
-        <p:spPr>
-          <a:xfrm>
-            <a:off x="9198864" y="4206240"/>
-            <a:ext cx="347472" cy="347472"/>
-          </a:xfrm>
-          <a:prstGeom prst="ellipse">
-            <a:avLst/>
-          </a:prstGeom>
-          <a:solidFill>
-            <a:srgbClr val="2F8A28"/>
-          </a:solidFill>
-          <a:ln w="12700">
-            <a:solidFill>
-              <a:srgbClr val="2F8A28"/>
-            </a:solidFill>
-            <a:prstDash val="solid"/>
-          </a:ln>
-        </p:spPr>
-      </p:sp>
-      <p:sp>
-        <p:nvSpPr>
-          <p:cNvPr id="17" name="Text 15"/>
-          <p:cNvSpPr/>
-          <p:nvPr/>
-        </p:nvSpPr>
-        <p:spPr>
-          <a:xfrm>
-            <a:off x="7909560" y="3977640"/>
-            <a:ext cx="2926080" cy="182880"/>
-          </a:xfrm>
-          <a:prstGeom prst="rect">
-            <a:avLst/>
-          </a:prstGeom>
-          <a:noFill/>
-          <a:ln/>
-        </p:spPr>
-        <p:txBody>
-          <a:bodyPr wrap="square" lIns="0" tIns="0" rIns="0" bIns="0" rtlCol="0" anchor="ctr"/>
-          <a:lstStyle/>
-          <a:p>
-            <a:pPr algn="ctr" indent="0" marL="0">
-              <a:buNone/>
-            </a:pPr>
-            <a:r>
-              <a:rPr lang="en-US" sz="1000" dirty="0">
-                <a:solidFill>
-                  <a:srgbClr val="003A63"/>
-                </a:solidFill>
-                <a:latin typeface="Aptos" pitchFamily="34" charset="0"/>
-                <a:ea typeface="Aptos" pitchFamily="34" charset="-122"/>
-                <a:cs typeface="Aptos" pitchFamily="34" charset="-120"/>
-              </a:rPr>
-              <a:t>Concept to action</a:t>
-            </a:r>
-            <a:endParaRPr lang="en-US" sz="1000" dirty="0"/>
-          </a:p>
-        </p:txBody>
-      </p:sp>
-      <p:sp>
-        <p:nvSpPr>
-          <p:cNvPr id="18" name="Shape 16"/>
           <p:cNvSpPr/>
           <p:nvPr/>
         </p:nvSpPr>
@@ -15628,7 +15015,7 @@
       </p:sp>
       <p:sp>
         <p:nvSpPr>
-          <p:cNvPr id="19" name="Text 17"/>
+          <p:cNvPr id="17" name="Text 15"/>
           <p:cNvSpPr/>
           <p:nvPr/>
         </p:nvSpPr>
@@ -15667,7 +15054,7 @@
       </p:sp>
       <p:sp>
         <p:nvSpPr>
-          <p:cNvPr id="20" name="Text 18"/>
+          <p:cNvPr id="18" name="Text 16"/>
           <p:cNvSpPr/>
           <p:nvPr/>
         </p:nvSpPr>
@@ -16175,13 +15562,11 @@
             </a:avLst>
           </a:prstGeom>
           <a:solidFill>
-            <a:srgbClr val="FFFFFF">
-              <a:alpha val="88000"/>
-            </a:srgbClr>
+            <a:srgbClr val="FFFFFF"/>
           </a:solidFill>
           <a:ln w="12700">
             <a:solidFill>
-              <a:srgbClr val="D6E8F2"/>
+              <a:srgbClr val="B9D7E6"/>
             </a:solidFill>
             <a:prstDash val="solid"/>
           </a:ln>
@@ -16189,119 +15574,112 @@
       </p:sp>
       <p:sp>
         <p:nvSpPr>
-          <p:cNvPr id="14" name="Shape 12"/>
-          <p:cNvSpPr/>
-          <p:nvPr/>
-        </p:nvSpPr>
-        <p:spPr>
-          <a:xfrm>
-            <a:off x="8074152" y="3291840"/>
-            <a:ext cx="2596896" cy="749808"/>
-          </a:xfrm>
-          <a:prstGeom prst="rect">
-            <a:avLst/>
-          </a:prstGeom>
-          <a:solidFill>
-            <a:srgbClr val="EAF6F8"/>
-          </a:solidFill>
-          <a:ln w="12700">
-            <a:solidFill>
-              <a:srgbClr val="8ABBD8"/>
-            </a:solidFill>
-            <a:prstDash val="solid"/>
-          </a:ln>
-        </p:spPr>
-      </p:sp>
-      <p:sp>
-        <p:nvSpPr>
-          <p:cNvPr id="15" name="Shape 13"/>
-          <p:cNvSpPr/>
-          <p:nvPr/>
-        </p:nvSpPr>
-        <p:spPr>
-          <a:xfrm>
-            <a:off x="8202168" y="3721608"/>
-            <a:ext cx="2340864" cy="0"/>
-          </a:xfrm>
-          <a:prstGeom prst="line">
-            <a:avLst/>
-          </a:prstGeom>
-          <a:noFill/>
-          <a:ln w="19050">
-            <a:solidFill>
-              <a:srgbClr val="0068B7"/>
-            </a:solidFill>
-            <a:prstDash val="solid"/>
-          </a:ln>
-        </p:spPr>
+          <p:cNvPr id="14" name="Text 12"/>
+          <p:cNvSpPr/>
+          <p:nvPr/>
+        </p:nvSpPr>
+        <p:spPr>
+          <a:xfrm>
+            <a:off x="7799832" y="2935224"/>
+            <a:ext cx="3145536" cy="256032"/>
+          </a:xfrm>
+          <a:prstGeom prst="rect">
+            <a:avLst/>
+          </a:prstGeom>
+          <a:noFill/>
+          <a:ln/>
+        </p:spPr>
+        <p:txBody>
+          <a:bodyPr wrap="square" lIns="0" tIns="0" rIns="0" bIns="0" rtlCol="0" anchor="ctr"/>
+          <a:lstStyle/>
+          <a:p>
+            <a:pPr indent="0" marL="0">
+              <a:buNone/>
+            </a:pPr>
+            <a:r>
+              <a:rPr lang="en-US" sz="1300" b="1" dirty="0">
+                <a:solidFill>
+                  <a:srgbClr val="0068B7"/>
+                </a:solidFill>
+                <a:latin typeface="Aptos" pitchFamily="34" charset="0"/>
+                <a:ea typeface="Aptos" pitchFamily="34" charset="-122"/>
+                <a:cs typeface="Aptos" pitchFamily="34" charset="-120"/>
+              </a:rPr>
+              <a:t>Concept checkpoints</a:t>
+            </a:r>
+            <a:endParaRPr lang="en-US" sz="1300" dirty="0"/>
+          </a:p>
+        </p:txBody>
+      </p:sp>
+      <p:sp>
+        <p:nvSpPr>
+          <p:cNvPr id="15" name="Text 13"/>
+          <p:cNvSpPr/>
+          <p:nvPr/>
+        </p:nvSpPr>
+        <p:spPr>
+          <a:xfrm>
+            <a:off x="7818120" y="3300984"/>
+            <a:ext cx="3090672" cy="877824"/>
+          </a:xfrm>
+          <a:prstGeom prst="rect">
+            <a:avLst/>
+          </a:prstGeom>
+          <a:noFill/>
+          <a:ln/>
+        </p:spPr>
+        <p:txBody>
+          <a:bodyPr wrap="square" lIns="254" tIns="254" rIns="254" bIns="254" rtlCol="0" anchor="t">
+            <a:normAutofit/>
+          </a:bodyPr>
+          <a:lstStyle/>
+          <a:p>
+            <a:r>
+              <a:rPr lang="en-US" sz="1380" dirty="0">
+                <a:solidFill>
+                  <a:srgbClr val="17364A"/>
+                </a:solidFill>
+                <a:latin typeface="Aptos" pitchFamily="34" charset="0"/>
+                <a:ea typeface="Aptos" pitchFamily="34" charset="-122"/>
+                <a:cs typeface="Aptos" pitchFamily="34" charset="-120"/>
+              </a:rPr>
+              <a:t>A vital records linkage may support maternal and child health analysis.</a:t>
+            </a:r>
+            <a:endParaRPr lang="en-US" sz="1380" dirty="0"/>
+          </a:p>
+          <a:p>
+            <a:r>
+              <a:rPr lang="en-US" sz="1380" dirty="0">
+                <a:solidFill>
+                  <a:srgbClr val="17364A"/>
+                </a:solidFill>
+                <a:latin typeface="Aptos" pitchFamily="34" charset="0"/>
+                <a:ea typeface="Aptos" pitchFamily="34" charset="-122"/>
+                <a:cs typeface="Aptos" pitchFamily="34" charset="-120"/>
+              </a:rPr>
+              <a:t>An AI tool using these linked records may summarize history, predict risk, classify cases,.</a:t>
+            </a:r>
+            <a:endParaRPr lang="en-US" sz="1380" dirty="0"/>
+          </a:p>
+          <a:p>
+            <a:r>
+              <a:rPr lang="en-US" sz="1380" dirty="0">
+                <a:solidFill>
+                  <a:srgbClr val="17364A"/>
+                </a:solidFill>
+                <a:latin typeface="Aptos" pitchFamily="34" charset="0"/>
+                <a:ea typeface="Aptos" pitchFamily="34" charset="-122"/>
+                <a:cs typeface="Aptos" pitchFamily="34" charset="-120"/>
+              </a:rPr>
+              <a:t>If linkage is wrong, the AI output may be wrong.</a:t>
+            </a:r>
+            <a:endParaRPr lang="en-US" sz="1380" dirty="0"/>
+          </a:p>
+        </p:txBody>
       </p:sp>
       <p:sp>
         <p:nvSpPr>
           <p:cNvPr id="16" name="Shape 14"/>
-          <p:cNvSpPr/>
-          <p:nvPr/>
-        </p:nvSpPr>
-        <p:spPr>
-          <a:xfrm>
-            <a:off x="9198864" y="4206240"/>
-            <a:ext cx="347472" cy="347472"/>
-          </a:xfrm>
-          <a:prstGeom prst="ellipse">
-            <a:avLst/>
-          </a:prstGeom>
-          <a:solidFill>
-            <a:srgbClr val="2F8A28"/>
-          </a:solidFill>
-          <a:ln w="12700">
-            <a:solidFill>
-              <a:srgbClr val="2F8A28"/>
-            </a:solidFill>
-            <a:prstDash val="solid"/>
-          </a:ln>
-        </p:spPr>
-      </p:sp>
-      <p:sp>
-        <p:nvSpPr>
-          <p:cNvPr id="17" name="Text 15"/>
-          <p:cNvSpPr/>
-          <p:nvPr/>
-        </p:nvSpPr>
-        <p:spPr>
-          <a:xfrm>
-            <a:off x="7909560" y="3977640"/>
-            <a:ext cx="2926080" cy="182880"/>
-          </a:xfrm>
-          <a:prstGeom prst="rect">
-            <a:avLst/>
-          </a:prstGeom>
-          <a:noFill/>
-          <a:ln/>
-        </p:spPr>
-        <p:txBody>
-          <a:bodyPr wrap="square" lIns="0" tIns="0" rIns="0" bIns="0" rtlCol="0" anchor="ctr"/>
-          <a:lstStyle/>
-          <a:p>
-            <a:pPr algn="ctr" indent="0" marL="0">
-              <a:buNone/>
-            </a:pPr>
-            <a:r>
-              <a:rPr lang="en-US" sz="1000" dirty="0">
-                <a:solidFill>
-                  <a:srgbClr val="003A63"/>
-                </a:solidFill>
-                <a:latin typeface="Aptos" pitchFamily="34" charset="0"/>
-                <a:ea typeface="Aptos" pitchFamily="34" charset="-122"/>
-                <a:cs typeface="Aptos" pitchFamily="34" charset="-120"/>
-              </a:rPr>
-              <a:t>Concept to action</a:t>
-            </a:r>
-            <a:endParaRPr lang="en-US" sz="1000" dirty="0"/>
-          </a:p>
-        </p:txBody>
-      </p:sp>
-      <p:sp>
-        <p:nvSpPr>
-          <p:cNvPr id="18" name="Shape 16"/>
           <p:cNvSpPr/>
           <p:nvPr/>
         </p:nvSpPr>
@@ -16328,7 +15706,7 @@
       </p:sp>
       <p:sp>
         <p:nvSpPr>
-          <p:cNvPr id="19" name="Text 17"/>
+          <p:cNvPr id="17" name="Text 15"/>
           <p:cNvSpPr/>
           <p:nvPr/>
         </p:nvSpPr>
@@ -16367,7 +15745,7 @@
       </p:sp>
       <p:sp>
         <p:nvSpPr>
-          <p:cNvPr id="20" name="Text 18"/>
+          <p:cNvPr id="18" name="Text 16"/>
           <p:cNvSpPr/>
           <p:nvPr/>
         </p:nvSpPr>
@@ -16875,13 +16253,11 @@
             </a:avLst>
           </a:prstGeom>
           <a:solidFill>
-            <a:srgbClr val="FFFFFF">
-              <a:alpha val="88000"/>
-            </a:srgbClr>
+            <a:srgbClr val="FFFFFF"/>
           </a:solidFill>
           <a:ln w="12700">
             <a:solidFill>
-              <a:srgbClr val="D6E8F2"/>
+              <a:srgbClr val="B9D7E6"/>
             </a:solidFill>
             <a:prstDash val="solid"/>
           </a:ln>
@@ -16889,119 +16265,112 @@
       </p:sp>
       <p:sp>
         <p:nvSpPr>
-          <p:cNvPr id="14" name="Shape 12"/>
-          <p:cNvSpPr/>
-          <p:nvPr/>
-        </p:nvSpPr>
-        <p:spPr>
-          <a:xfrm>
-            <a:off x="8074152" y="3291840"/>
-            <a:ext cx="2596896" cy="749808"/>
-          </a:xfrm>
-          <a:prstGeom prst="rect">
-            <a:avLst/>
-          </a:prstGeom>
-          <a:solidFill>
-            <a:srgbClr val="EAF6F8"/>
-          </a:solidFill>
-          <a:ln w="12700">
-            <a:solidFill>
-              <a:srgbClr val="8ABBD8"/>
-            </a:solidFill>
-            <a:prstDash val="solid"/>
-          </a:ln>
-        </p:spPr>
-      </p:sp>
-      <p:sp>
-        <p:nvSpPr>
-          <p:cNvPr id="15" name="Shape 13"/>
-          <p:cNvSpPr/>
-          <p:nvPr/>
-        </p:nvSpPr>
-        <p:spPr>
-          <a:xfrm>
-            <a:off x="8202168" y="3721608"/>
-            <a:ext cx="2340864" cy="0"/>
-          </a:xfrm>
-          <a:prstGeom prst="line">
-            <a:avLst/>
-          </a:prstGeom>
-          <a:noFill/>
-          <a:ln w="19050">
-            <a:solidFill>
-              <a:srgbClr val="0068B7"/>
-            </a:solidFill>
-            <a:prstDash val="solid"/>
-          </a:ln>
-        </p:spPr>
+          <p:cNvPr id="14" name="Text 12"/>
+          <p:cNvSpPr/>
+          <p:nvPr/>
+        </p:nvSpPr>
+        <p:spPr>
+          <a:xfrm>
+            <a:off x="7799832" y="2935224"/>
+            <a:ext cx="3145536" cy="256032"/>
+          </a:xfrm>
+          <a:prstGeom prst="rect">
+            <a:avLst/>
+          </a:prstGeom>
+          <a:noFill/>
+          <a:ln/>
+        </p:spPr>
+        <p:txBody>
+          <a:bodyPr wrap="square" lIns="0" tIns="0" rIns="0" bIns="0" rtlCol="0" anchor="ctr"/>
+          <a:lstStyle/>
+          <a:p>
+            <a:pPr indent="0" marL="0">
+              <a:buNone/>
+            </a:pPr>
+            <a:r>
+              <a:rPr lang="en-US" sz="1300" b="1" dirty="0">
+                <a:solidFill>
+                  <a:srgbClr val="0068B7"/>
+                </a:solidFill>
+                <a:latin typeface="Aptos" pitchFamily="34" charset="0"/>
+                <a:ea typeface="Aptos" pitchFamily="34" charset="-122"/>
+                <a:cs typeface="Aptos" pitchFamily="34" charset="-120"/>
+              </a:rPr>
+              <a:t>Concept checkpoints</a:t>
+            </a:r>
+            <a:endParaRPr lang="en-US" sz="1300" dirty="0"/>
+          </a:p>
+        </p:txBody>
+      </p:sp>
+      <p:sp>
+        <p:nvSpPr>
+          <p:cNvPr id="15" name="Text 13"/>
+          <p:cNvSpPr/>
+          <p:nvPr/>
+        </p:nvSpPr>
+        <p:spPr>
+          <a:xfrm>
+            <a:off x="7818120" y="3300984"/>
+            <a:ext cx="3090672" cy="877824"/>
+          </a:xfrm>
+          <a:prstGeom prst="rect">
+            <a:avLst/>
+          </a:prstGeom>
+          <a:noFill/>
+          <a:ln/>
+        </p:spPr>
+        <p:txBody>
+          <a:bodyPr wrap="square" lIns="254" tIns="254" rIns="254" bIns="254" rtlCol="0" anchor="t">
+            <a:normAutofit/>
+          </a:bodyPr>
+          <a:lstStyle/>
+          <a:p>
+            <a:r>
+              <a:rPr lang="en-US" sz="1380" dirty="0">
+                <a:solidFill>
+                  <a:srgbClr val="17364A"/>
+                </a:solidFill>
+                <a:latin typeface="Aptos" pitchFamily="34" charset="0"/>
+                <a:ea typeface="Aptos" pitchFamily="34" charset="-122"/>
+                <a:cs typeface="Aptos" pitchFamily="34" charset="-120"/>
+              </a:rPr>
+              <a:t>Record linkage is the process of determining whether records from one or more sources.</a:t>
+            </a:r>
+            <a:endParaRPr lang="en-US" sz="1380" dirty="0"/>
+          </a:p>
+          <a:p>
+            <a:r>
+              <a:rPr lang="en-US" sz="1380" dirty="0">
+                <a:solidFill>
+                  <a:srgbClr val="17364A"/>
+                </a:solidFill>
+                <a:latin typeface="Aptos" pitchFamily="34" charset="0"/>
+                <a:ea typeface="Aptos" pitchFamily="34" charset="-122"/>
+                <a:cs typeface="Aptos" pitchFamily="34" charset="-120"/>
+              </a:rPr>
+              <a:t>Entity resolution.</a:t>
+            </a:r>
+            <a:endParaRPr lang="en-US" sz="1380" dirty="0"/>
+          </a:p>
+          <a:p>
+            <a:r>
+              <a:rPr lang="en-US" sz="1380" dirty="0">
+                <a:solidFill>
+                  <a:srgbClr val="17364A"/>
+                </a:solidFill>
+                <a:latin typeface="Aptos" pitchFamily="34" charset="0"/>
+                <a:ea typeface="Aptos" pitchFamily="34" charset="-122"/>
+                <a:cs typeface="Aptos" pitchFamily="34" charset="-120"/>
+              </a:rPr>
+              <a:t>Entity resolution is the broader process of identifying, matching, merging, separating,.</a:t>
+            </a:r>
+            <a:endParaRPr lang="en-US" sz="1380" dirty="0"/>
+          </a:p>
+        </p:txBody>
       </p:sp>
       <p:sp>
         <p:nvSpPr>
           <p:cNvPr id="16" name="Shape 14"/>
-          <p:cNvSpPr/>
-          <p:nvPr/>
-        </p:nvSpPr>
-        <p:spPr>
-          <a:xfrm>
-            <a:off x="9198864" y="4206240"/>
-            <a:ext cx="347472" cy="347472"/>
-          </a:xfrm>
-          <a:prstGeom prst="ellipse">
-            <a:avLst/>
-          </a:prstGeom>
-          <a:solidFill>
-            <a:srgbClr val="2F8A28"/>
-          </a:solidFill>
-          <a:ln w="12700">
-            <a:solidFill>
-              <a:srgbClr val="2F8A28"/>
-            </a:solidFill>
-            <a:prstDash val="solid"/>
-          </a:ln>
-        </p:spPr>
-      </p:sp>
-      <p:sp>
-        <p:nvSpPr>
-          <p:cNvPr id="17" name="Text 15"/>
-          <p:cNvSpPr/>
-          <p:nvPr/>
-        </p:nvSpPr>
-        <p:spPr>
-          <a:xfrm>
-            <a:off x="7909560" y="3977640"/>
-            <a:ext cx="2926080" cy="182880"/>
-          </a:xfrm>
-          <a:prstGeom prst="rect">
-            <a:avLst/>
-          </a:prstGeom>
-          <a:noFill/>
-          <a:ln/>
-        </p:spPr>
-        <p:txBody>
-          <a:bodyPr wrap="square" lIns="0" tIns="0" rIns="0" bIns="0" rtlCol="0" anchor="ctr"/>
-          <a:lstStyle/>
-          <a:p>
-            <a:pPr algn="ctr" indent="0" marL="0">
-              <a:buNone/>
-            </a:pPr>
-            <a:r>
-              <a:rPr lang="en-US" sz="1000" dirty="0">
-                <a:solidFill>
-                  <a:srgbClr val="003A63"/>
-                </a:solidFill>
-                <a:latin typeface="Aptos" pitchFamily="34" charset="0"/>
-                <a:ea typeface="Aptos" pitchFamily="34" charset="-122"/>
-                <a:cs typeface="Aptos" pitchFamily="34" charset="-120"/>
-              </a:rPr>
-              <a:t>Concept to action</a:t>
-            </a:r>
-            <a:endParaRPr lang="en-US" sz="1000" dirty="0"/>
-          </a:p>
-        </p:txBody>
-      </p:sp>
-      <p:sp>
-        <p:nvSpPr>
-          <p:cNvPr id="18" name="Shape 16"/>
           <p:cNvSpPr/>
           <p:nvPr/>
         </p:nvSpPr>
@@ -17028,7 +16397,7 @@
       </p:sp>
       <p:sp>
         <p:nvSpPr>
-          <p:cNvPr id="19" name="Text 17"/>
+          <p:cNvPr id="17" name="Text 15"/>
           <p:cNvSpPr/>
           <p:nvPr/>
         </p:nvSpPr>
@@ -17067,7 +16436,7 @@
       </p:sp>
       <p:sp>
         <p:nvSpPr>
-          <p:cNvPr id="20" name="Text 18"/>
+          <p:cNvPr id="18" name="Text 16"/>
           <p:cNvSpPr/>
           <p:nvPr/>
         </p:nvSpPr>
@@ -17575,13 +16944,11 @@
             </a:avLst>
           </a:prstGeom>
           <a:solidFill>
-            <a:srgbClr val="FFFFFF">
-              <a:alpha val="88000"/>
-            </a:srgbClr>
+            <a:srgbClr val="FFFFFF"/>
           </a:solidFill>
           <a:ln w="12700">
             <a:solidFill>
-              <a:srgbClr val="D6E8F2"/>
+              <a:srgbClr val="B9D7E6"/>
             </a:solidFill>
             <a:prstDash val="solid"/>
           </a:ln>
@@ -17589,119 +16956,112 @@
       </p:sp>
       <p:sp>
         <p:nvSpPr>
-          <p:cNvPr id="14" name="Shape 12"/>
-          <p:cNvSpPr/>
-          <p:nvPr/>
-        </p:nvSpPr>
-        <p:spPr>
-          <a:xfrm>
-            <a:off x="8074152" y="3291840"/>
-            <a:ext cx="2596896" cy="749808"/>
-          </a:xfrm>
-          <a:prstGeom prst="rect">
-            <a:avLst/>
-          </a:prstGeom>
-          <a:solidFill>
-            <a:srgbClr val="EAF6F8"/>
-          </a:solidFill>
-          <a:ln w="12700">
-            <a:solidFill>
-              <a:srgbClr val="8ABBD8"/>
-            </a:solidFill>
-            <a:prstDash val="solid"/>
-          </a:ln>
-        </p:spPr>
-      </p:sp>
-      <p:sp>
-        <p:nvSpPr>
-          <p:cNvPr id="15" name="Shape 13"/>
-          <p:cNvSpPr/>
-          <p:nvPr/>
-        </p:nvSpPr>
-        <p:spPr>
-          <a:xfrm>
-            <a:off x="8202168" y="3721608"/>
-            <a:ext cx="2340864" cy="0"/>
-          </a:xfrm>
-          <a:prstGeom prst="line">
-            <a:avLst/>
-          </a:prstGeom>
-          <a:noFill/>
-          <a:ln w="19050">
-            <a:solidFill>
-              <a:srgbClr val="0068B7"/>
-            </a:solidFill>
-            <a:prstDash val="solid"/>
-          </a:ln>
-        </p:spPr>
+          <p:cNvPr id="14" name="Text 12"/>
+          <p:cNvSpPr/>
+          <p:nvPr/>
+        </p:nvSpPr>
+        <p:spPr>
+          <a:xfrm>
+            <a:off x="7799832" y="2935224"/>
+            <a:ext cx="3145536" cy="256032"/>
+          </a:xfrm>
+          <a:prstGeom prst="rect">
+            <a:avLst/>
+          </a:prstGeom>
+          <a:noFill/>
+          <a:ln/>
+        </p:spPr>
+        <p:txBody>
+          <a:bodyPr wrap="square" lIns="0" tIns="0" rIns="0" bIns="0" rtlCol="0" anchor="ctr"/>
+          <a:lstStyle/>
+          <a:p>
+            <a:pPr indent="0" marL="0">
+              <a:buNone/>
+            </a:pPr>
+            <a:r>
+              <a:rPr lang="en-US" sz="1300" b="1" dirty="0">
+                <a:solidFill>
+                  <a:srgbClr val="0068B7"/>
+                </a:solidFill>
+                <a:latin typeface="Aptos" pitchFamily="34" charset="0"/>
+                <a:ea typeface="Aptos" pitchFamily="34" charset="-122"/>
+                <a:cs typeface="Aptos" pitchFamily="34" charset="-120"/>
+              </a:rPr>
+              <a:t>Concept checkpoints</a:t>
+            </a:r>
+            <a:endParaRPr lang="en-US" sz="1300" dirty="0"/>
+          </a:p>
+        </p:txBody>
+      </p:sp>
+      <p:sp>
+        <p:nvSpPr>
+          <p:cNvPr id="15" name="Text 13"/>
+          <p:cNvSpPr/>
+          <p:nvPr/>
+        </p:nvSpPr>
+        <p:spPr>
+          <a:xfrm>
+            <a:off x="7818120" y="3300984"/>
+            <a:ext cx="3090672" cy="877824"/>
+          </a:xfrm>
+          <a:prstGeom prst="rect">
+            <a:avLst/>
+          </a:prstGeom>
+          <a:noFill/>
+          <a:ln/>
+        </p:spPr>
+        <p:txBody>
+          <a:bodyPr wrap="square" lIns="254" tIns="254" rIns="254" bIns="254" rtlCol="0" anchor="t">
+            <a:normAutofit/>
+          </a:bodyPr>
+          <a:lstStyle/>
+          <a:p>
+            <a:r>
+              <a:rPr lang="en-US" sz="1380" dirty="0">
+                <a:solidFill>
+                  <a:srgbClr val="17364A"/>
+                </a:solidFill>
+                <a:latin typeface="Aptos" pitchFamily="34" charset="0"/>
+                <a:ea typeface="Aptos" pitchFamily="34" charset="-122"/>
+                <a:cs typeface="Aptos" pitchFamily="34" charset="-120"/>
+              </a:rPr>
+              <a:t>Probabilistic matching estimates the likelihood that records refer to the same entity even.</a:t>
+            </a:r>
+            <a:endParaRPr lang="en-US" sz="1380" dirty="0"/>
+          </a:p>
+          <a:p>
+            <a:r>
+              <a:rPr lang="en-US" sz="1380" dirty="0">
+                <a:solidFill>
+                  <a:srgbClr val="17364A"/>
+                </a:solidFill>
+                <a:latin typeface="Aptos" pitchFamily="34" charset="0"/>
+                <a:ea typeface="Aptos" pitchFamily="34" charset="-122"/>
+                <a:cs typeface="Aptos" pitchFamily="34" charset="-120"/>
+              </a:rPr>
+              <a:t>Clerical review.</a:t>
+            </a:r>
+            <a:endParaRPr lang="en-US" sz="1380" dirty="0"/>
+          </a:p>
+          <a:p>
+            <a:r>
+              <a:rPr lang="en-US" sz="1380" dirty="0">
+                <a:solidFill>
+                  <a:srgbClr val="17364A"/>
+                </a:solidFill>
+                <a:latin typeface="Aptos" pitchFamily="34" charset="0"/>
+                <a:ea typeface="Aptos" pitchFamily="34" charset="-122"/>
+                <a:cs typeface="Aptos" pitchFamily="34" charset="-120"/>
+              </a:rPr>
+              <a:t>Clerical review is human review of uncertain matches.</a:t>
+            </a:r>
+            <a:endParaRPr lang="en-US" sz="1380" dirty="0"/>
+          </a:p>
+        </p:txBody>
       </p:sp>
       <p:sp>
         <p:nvSpPr>
           <p:cNvPr id="16" name="Shape 14"/>
-          <p:cNvSpPr/>
-          <p:nvPr/>
-        </p:nvSpPr>
-        <p:spPr>
-          <a:xfrm>
-            <a:off x="9198864" y="4206240"/>
-            <a:ext cx="347472" cy="347472"/>
-          </a:xfrm>
-          <a:prstGeom prst="ellipse">
-            <a:avLst/>
-          </a:prstGeom>
-          <a:solidFill>
-            <a:srgbClr val="2F8A28"/>
-          </a:solidFill>
-          <a:ln w="12700">
-            <a:solidFill>
-              <a:srgbClr val="2F8A28"/>
-            </a:solidFill>
-            <a:prstDash val="solid"/>
-          </a:ln>
-        </p:spPr>
-      </p:sp>
-      <p:sp>
-        <p:nvSpPr>
-          <p:cNvPr id="17" name="Text 15"/>
-          <p:cNvSpPr/>
-          <p:nvPr/>
-        </p:nvSpPr>
-        <p:spPr>
-          <a:xfrm>
-            <a:off x="7909560" y="3977640"/>
-            <a:ext cx="2926080" cy="182880"/>
-          </a:xfrm>
-          <a:prstGeom prst="rect">
-            <a:avLst/>
-          </a:prstGeom>
-          <a:noFill/>
-          <a:ln/>
-        </p:spPr>
-        <p:txBody>
-          <a:bodyPr wrap="square" lIns="0" tIns="0" rIns="0" bIns="0" rtlCol="0" anchor="ctr"/>
-          <a:lstStyle/>
-          <a:p>
-            <a:pPr algn="ctr" indent="0" marL="0">
-              <a:buNone/>
-            </a:pPr>
-            <a:r>
-              <a:rPr lang="en-US" sz="1000" dirty="0">
-                <a:solidFill>
-                  <a:srgbClr val="003A63"/>
-                </a:solidFill>
-                <a:latin typeface="Aptos" pitchFamily="34" charset="0"/>
-                <a:ea typeface="Aptos" pitchFamily="34" charset="-122"/>
-                <a:cs typeface="Aptos" pitchFamily="34" charset="-120"/>
-              </a:rPr>
-              <a:t>Concept to action</a:t>
-            </a:r>
-            <a:endParaRPr lang="en-US" sz="1000" dirty="0"/>
-          </a:p>
-        </p:txBody>
-      </p:sp>
-      <p:sp>
-        <p:nvSpPr>
-          <p:cNvPr id="18" name="Shape 16"/>
           <p:cNvSpPr/>
           <p:nvPr/>
         </p:nvSpPr>
@@ -17728,7 +17088,7 @@
       </p:sp>
       <p:sp>
         <p:nvSpPr>
-          <p:cNvPr id="19" name="Text 17"/>
+          <p:cNvPr id="17" name="Text 15"/>
           <p:cNvSpPr/>
           <p:nvPr/>
         </p:nvSpPr>
@@ -17767,7 +17127,7 @@
       </p:sp>
       <p:sp>
         <p:nvSpPr>
-          <p:cNvPr id="20" name="Text 18"/>
+          <p:cNvPr id="18" name="Text 16"/>
           <p:cNvSpPr/>
           <p:nvPr/>
         </p:nvSpPr>

--- a/downloads/presentations/modules/ops-210.pptx
+++ b/downloads/presentations/modules/ops-210.pptx
@@ -3351,49 +3351,58 @@
           <a:ln/>
         </p:spPr>
         <p:txBody>
-          <a:bodyPr wrap="square" lIns="635" tIns="635" rIns="635" bIns="635" rtlCol="0" anchor="t">
+          <a:bodyPr wrap="square" lIns="1016" tIns="1016" rIns="1016" bIns="1016" rtlCol="0" anchor="t">
             <a:normAutofit/>
           </a:bodyPr>
           <a:lstStyle/>
           <a:p>
+            <a:pPr indent="0" marL="0">
+              <a:buNone/>
+            </a:pPr>
             <a:r>
               <a:rPr lang="en-US" sz="2100" dirty="0">
                 <a:solidFill>
-                  <a:srgbClr val="17364A"/>
-                </a:solidFill>
-                <a:latin typeface="Aptos" pitchFamily="34" charset="0"/>
-                <a:ea typeface="Aptos" pitchFamily="34" charset="-122"/>
-                <a:cs typeface="Aptos" pitchFamily="34" charset="-120"/>
-              </a:rPr>
-              <a:t>An AI-supported case summary may pull together lab reports, case notes, hospitalization information,.</a:t>
+                  <a:srgbClr val="003A63"/>
+                </a:solidFill>
+                <a:latin typeface="Aptos" pitchFamily="34" charset="0"/>
+                <a:ea typeface="Aptos" pitchFamily="34" charset="-122"/>
+                <a:cs typeface="Aptos" pitchFamily="34" charset="-120"/>
+              </a:rPr>
+              <a:t>• An AI-supported case summary may pull together lab reports, case notes, hospitalization.</a:t>
             </a:r>
             <a:endParaRPr lang="en-US" sz="2100" dirty="0"/>
           </a:p>
           <a:p>
+            <a:pPr indent="0" marL="0">
+              <a:buNone/>
+            </a:pPr>
             <a:r>
               <a:rPr lang="en-US" sz="2100" dirty="0">
                 <a:solidFill>
-                  <a:srgbClr val="17364A"/>
-                </a:solidFill>
-                <a:latin typeface="Aptos" pitchFamily="34" charset="0"/>
-                <a:ea typeface="Aptos" pitchFamily="34" charset="-122"/>
-                <a:cs typeface="Aptos" pitchFamily="34" charset="-120"/>
-              </a:rPr>
-              <a:t>If the person matching process incorrectly combines two people, the summary may include information.</a:t>
+                  <a:srgbClr val="003A63"/>
+                </a:solidFill>
+                <a:latin typeface="Aptos" pitchFamily="34" charset="0"/>
+                <a:ea typeface="Aptos" pitchFamily="34" charset="-122"/>
+                <a:cs typeface="Aptos" pitchFamily="34" charset="-120"/>
+              </a:rPr>
+              <a:t>• If the person matching process incorrectly combines two people, the summary may include.</a:t>
             </a:r>
             <a:endParaRPr lang="en-US" sz="2100" dirty="0"/>
           </a:p>
           <a:p>
+            <a:pPr indent="0" marL="0">
+              <a:buNone/>
+            </a:pPr>
             <a:r>
               <a:rPr lang="en-US" sz="2100" dirty="0">
                 <a:solidFill>
-                  <a:srgbClr val="17364A"/>
-                </a:solidFill>
-                <a:latin typeface="Aptos" pitchFamily="34" charset="0"/>
-                <a:ea typeface="Aptos" pitchFamily="34" charset="-122"/>
-                <a:cs typeface="Aptos" pitchFamily="34" charset="-120"/>
-              </a:rPr>
-              <a:t>If the process misses a prior record, the summary may omit important history.</a:t>
+                  <a:srgbClr val="003A63"/>
+                </a:solidFill>
+                <a:latin typeface="Aptos" pitchFamily="34" charset="0"/>
+                <a:ea typeface="Aptos" pitchFamily="34" charset="-122"/>
+                <a:cs typeface="Aptos" pitchFamily="34" charset="-120"/>
+              </a:rPr>
+              <a:t>• If the process misses a prior record, the summary may omit important history.</a:t>
             </a:r>
             <a:endParaRPr lang="en-US" sz="2100" dirty="0"/>
           </a:p>
@@ -3473,17 +3482,17 @@
         </p:nvSpPr>
         <p:spPr>
           <a:xfrm>
-            <a:off x="7799832" y="1828800"/>
-            <a:ext cx="3145536" cy="685800"/>
-          </a:xfrm>
-          <a:prstGeom prst="rect">
-            <a:avLst/>
-          </a:prstGeom>
-          <a:noFill/>
-          <a:ln/>
-        </p:spPr>
-        <p:txBody>
-          <a:bodyPr wrap="square" lIns="0" tIns="0" rIns="0" bIns="0" rtlCol="0" anchor="t">
+            <a:off x="7799832" y="1801368"/>
+            <a:ext cx="3145536" cy="758952"/>
+          </a:xfrm>
+          <a:prstGeom prst="rect">
+            <a:avLst/>
+          </a:prstGeom>
+          <a:noFill/>
+          <a:ln/>
+        </p:spPr>
+        <p:txBody>
+          <a:bodyPr wrap="square" lIns="254" tIns="254" rIns="254" bIns="254" rtlCol="0" anchor="t">
             <a:normAutofit/>
           </a:bodyPr>
           <a:lstStyle/>
@@ -3492,7 +3501,7 @@
               <a:buNone/>
             </a:pPr>
             <a:r>
-              <a:rPr lang="en-US" sz="1550" dirty="0">
+              <a:rPr lang="en-US" sz="1320" dirty="0">
                 <a:solidFill>
                   <a:srgbClr val="17364A"/>
                 </a:solidFill>
@@ -3502,7 +3511,7 @@
               </a:rPr>
               <a:t>An AI-supported case summary may pull together lab reports, case notes, hospitalization information,.</a:t>
             </a:r>
-            <a:endParaRPr lang="en-US" sz="1550" dirty="0"/>
+            <a:endParaRPr lang="en-US" sz="1320" dirty="0"/>
           </a:p>
         </p:txBody>
       </p:sp>
@@ -3590,13 +3599,16 @@
           <a:ln/>
         </p:spPr>
         <p:txBody>
-          <a:bodyPr wrap="square" lIns="254" tIns="254" rIns="254" bIns="254" rtlCol="0" anchor="t">
+          <a:bodyPr wrap="square" lIns="508" tIns="508" rIns="508" bIns="508" rtlCol="0" anchor="t">
             <a:normAutofit/>
           </a:bodyPr>
           <a:lstStyle/>
           <a:p>
-            <a:r>
-              <a:rPr lang="en-US" sz="1380" dirty="0">
+            <a:pPr indent="0" marL="0">
+              <a:buNone/>
+            </a:pPr>
+            <a:r>
+              <a:rPr lang="en-US" sz="1220" dirty="0">
                 <a:solidFill>
                   <a:srgbClr val="17364A"/>
                 </a:solidFill>
@@ -3604,13 +3616,16 @@
                 <a:ea typeface="Aptos" pitchFamily="34" charset="-122"/>
                 <a:cs typeface="Aptos" pitchFamily="34" charset="-120"/>
               </a:rPr>
-              <a:t>An AI-supported case summary may pull together lab reports, case notes, hospitalization.</a:t>
-            </a:r>
-            <a:endParaRPr lang="en-US" sz="1380" dirty="0"/>
-          </a:p>
-          <a:p>
-            <a:r>
-              <a:rPr lang="en-US" sz="1380" dirty="0">
+              <a:t>An AI-supported case summary may pull together lab reports, case.</a:t>
+            </a:r>
+            <a:endParaRPr lang="en-US" sz="1220" dirty="0"/>
+          </a:p>
+          <a:p>
+            <a:pPr indent="0" marL="0">
+              <a:buNone/>
+            </a:pPr>
+            <a:r>
+              <a:rPr lang="en-US" sz="1220" dirty="0">
                 <a:solidFill>
                   <a:srgbClr val="17364A"/>
                 </a:solidFill>
@@ -3618,13 +3633,16 @@
                 <a:ea typeface="Aptos" pitchFamily="34" charset="-122"/>
                 <a:cs typeface="Aptos" pitchFamily="34" charset="-120"/>
               </a:rPr>
-              <a:t>If the person matching process incorrectly combines two people, the summary may include.</a:t>
-            </a:r>
-            <a:endParaRPr lang="en-US" sz="1380" dirty="0"/>
-          </a:p>
-          <a:p>
-            <a:r>
-              <a:rPr lang="en-US" sz="1380" dirty="0">
+              <a:t>If the person matching process incorrectly combines two people,.</a:t>
+            </a:r>
+            <a:endParaRPr lang="en-US" sz="1220" dirty="0"/>
+          </a:p>
+          <a:p>
+            <a:pPr indent="0" marL="0">
+              <a:buNone/>
+            </a:pPr>
+            <a:r>
+              <a:rPr lang="en-US" sz="1220" dirty="0">
                 <a:solidFill>
                   <a:srgbClr val="17364A"/>
                 </a:solidFill>
@@ -3632,9 +3650,9 @@
                 <a:ea typeface="Aptos" pitchFamily="34" charset="-122"/>
                 <a:cs typeface="Aptos" pitchFamily="34" charset="-120"/>
               </a:rPr>
-              <a:t>The investigator needs visibility into linkage confidence and source records.</a:t>
-            </a:r>
-            <a:endParaRPr lang="en-US" sz="1380" dirty="0"/>
+              <a:t>The investigator needs visibility into linkage confidence and.</a:t>
+            </a:r>
+            <a:endParaRPr lang="en-US" sz="1220" dirty="0"/>
           </a:p>
         </p:txBody>
       </p:sp>
@@ -3712,17 +3730,17 @@
         </p:nvSpPr>
         <p:spPr>
           <a:xfrm>
-            <a:off x="7799832" y="5001768"/>
-            <a:ext cx="3145536" cy="502920"/>
-          </a:xfrm>
-          <a:prstGeom prst="rect">
-            <a:avLst/>
-          </a:prstGeom>
-          <a:noFill/>
-          <a:ln/>
-        </p:spPr>
-        <p:txBody>
-          <a:bodyPr wrap="square" lIns="0" tIns="0" rIns="0" bIns="0" rtlCol="0" anchor="t">
+            <a:off x="7799832" y="4974336"/>
+            <a:ext cx="3145536" cy="576072"/>
+          </a:xfrm>
+          <a:prstGeom prst="rect">
+            <a:avLst/>
+          </a:prstGeom>
+          <a:noFill/>
+          <a:ln/>
+        </p:spPr>
+        <p:txBody>
+          <a:bodyPr wrap="square" lIns="254" tIns="254" rIns="254" bIns="254" rtlCol="0" anchor="t">
             <a:normAutofit/>
           </a:bodyPr>
           <a:lstStyle/>
@@ -3731,7 +3749,7 @@
               <a:buNone/>
             </a:pPr>
             <a:r>
-              <a:rPr lang="en-US" sz="1550" dirty="0">
+              <a:rPr lang="en-US" sz="1320" dirty="0">
                 <a:solidFill>
                   <a:srgbClr val="17364A"/>
                 </a:solidFill>
@@ -3739,9 +3757,9 @@
                 <a:ea typeface="Aptos" pitchFamily="34" charset="-122"/>
                 <a:cs typeface="Aptos" pitchFamily="34" charset="-120"/>
               </a:rPr>
-              <a:t>Connect the concept to public health purpose, responsible use, required safeguards, documentation, and the next action a department should take.</a:t>
-            </a:r>
-            <a:endParaRPr lang="en-US" sz="1550" dirty="0"/>
+              <a:t>Connect the concept to public health purpose, responsible use, required safeguards, documentation, and the next action a.</a:t>
+            </a:r>
+            <a:endParaRPr lang="en-US" sz="1320" dirty="0"/>
           </a:p>
         </p:txBody>
       </p:sp>
@@ -4042,49 +4060,58 @@
           <a:ln/>
         </p:spPr>
         <p:txBody>
-          <a:bodyPr wrap="square" lIns="635" tIns="635" rIns="635" bIns="635" rtlCol="0" anchor="t">
+          <a:bodyPr wrap="square" lIns="1016" tIns="1016" rIns="1016" bIns="1016" rtlCol="0" anchor="t">
             <a:normAutofit/>
           </a:bodyPr>
           <a:lstStyle/>
           <a:p>
+            <a:pPr indent="0" marL="0">
+              <a:buNone/>
+            </a:pPr>
             <a:r>
               <a:rPr lang="en-US" sz="2100" dirty="0">
                 <a:solidFill>
-                  <a:srgbClr val="17364A"/>
-                </a:solidFill>
-                <a:latin typeface="Aptos" pitchFamily="34" charset="0"/>
-                <a:ea typeface="Aptos" pitchFamily="34" charset="-122"/>
-                <a:cs typeface="Aptos" pitchFamily="34" charset="-120"/>
-              </a:rPr>
-              <a:t>Matching design begins with the entity being matched and the decision that depends on the match.</a:t>
+                  <a:srgbClr val="003A63"/>
+                </a:solidFill>
+                <a:latin typeface="Aptos" pitchFamily="34" charset="0"/>
+                <a:ea typeface="Aptos" pitchFamily="34" charset="-122"/>
+                <a:cs typeface="Aptos" pitchFamily="34" charset="-120"/>
+              </a:rPr>
+              <a:t>• Matching design begins with the entity being matched and the decision that depends on the match.</a:t>
             </a:r>
             <a:endParaRPr lang="en-US" sz="2100" dirty="0"/>
           </a:p>
           <a:p>
+            <a:pPr indent="0" marL="0">
+              <a:buNone/>
+            </a:pPr>
             <a:r>
               <a:rPr lang="en-US" sz="2100" dirty="0">
                 <a:solidFill>
-                  <a:srgbClr val="17364A"/>
-                </a:solidFill>
-                <a:latin typeface="Aptos" pitchFamily="34" charset="0"/>
-                <a:ea typeface="Aptos" pitchFamily="34" charset="-122"/>
-                <a:cs typeface="Aptos" pitchFamily="34" charset="-120"/>
-              </a:rPr>
-              <a:t>Person matching may use name, date of birth, address, phone, medical record number, email, sex, or.</a:t>
+                  <a:srgbClr val="003A63"/>
+                </a:solidFill>
+                <a:latin typeface="Aptos" pitchFamily="34" charset="0"/>
+                <a:ea typeface="Aptos" pitchFamily="34" charset="-122"/>
+                <a:cs typeface="Aptos" pitchFamily="34" charset="-120"/>
+              </a:rPr>
+              <a:t>• Person matching may use name, date of birth, address, phone, medical record number, email,.</a:t>
             </a:r>
             <a:endParaRPr lang="en-US" sz="2100" dirty="0"/>
           </a:p>
           <a:p>
+            <a:pPr indent="0" marL="0">
+              <a:buNone/>
+            </a:pPr>
             <a:r>
               <a:rPr lang="en-US" sz="2100" dirty="0">
                 <a:solidFill>
-                  <a:srgbClr val="17364A"/>
-                </a:solidFill>
-                <a:latin typeface="Aptos" pitchFamily="34" charset="0"/>
-                <a:ea typeface="Aptos" pitchFamily="34" charset="-122"/>
-                <a:cs typeface="Aptos" pitchFamily="34" charset="-120"/>
-              </a:rPr>
-              <a:t>Facility matching may use name, address, license number, geocode, and ownership information.</a:t>
+                  <a:srgbClr val="003A63"/>
+                </a:solidFill>
+                <a:latin typeface="Aptos" pitchFamily="34" charset="0"/>
+                <a:ea typeface="Aptos" pitchFamily="34" charset="-122"/>
+                <a:cs typeface="Aptos" pitchFamily="34" charset="-120"/>
+              </a:rPr>
+              <a:t>• Facility matching may use name, address, license number, geocode, and ownership information.</a:t>
             </a:r>
             <a:endParaRPr lang="en-US" sz="2100" dirty="0"/>
           </a:p>
@@ -4164,17 +4191,17 @@
         </p:nvSpPr>
         <p:spPr>
           <a:xfrm>
-            <a:off x="7799832" y="1828800"/>
-            <a:ext cx="3145536" cy="685800"/>
-          </a:xfrm>
-          <a:prstGeom prst="rect">
-            <a:avLst/>
-          </a:prstGeom>
-          <a:noFill/>
-          <a:ln/>
-        </p:spPr>
-        <p:txBody>
-          <a:bodyPr wrap="square" lIns="0" tIns="0" rIns="0" bIns="0" rtlCol="0" anchor="t">
+            <a:off x="7799832" y="1801368"/>
+            <a:ext cx="3145536" cy="758952"/>
+          </a:xfrm>
+          <a:prstGeom prst="rect">
+            <a:avLst/>
+          </a:prstGeom>
+          <a:noFill/>
+          <a:ln/>
+        </p:spPr>
+        <p:txBody>
+          <a:bodyPr wrap="square" lIns="254" tIns="254" rIns="254" bIns="254" rtlCol="0" anchor="t">
             <a:normAutofit/>
           </a:bodyPr>
           <a:lstStyle/>
@@ -4183,7 +4210,7 @@
               <a:buNone/>
             </a:pPr>
             <a:r>
-              <a:rPr lang="en-US" sz="1550" dirty="0">
+              <a:rPr lang="en-US" sz="1320" dirty="0">
                 <a:solidFill>
                   <a:srgbClr val="17364A"/>
                 </a:solidFill>
@@ -4193,7 +4220,7 @@
               </a:rPr>
               <a:t>Matching design begins with the entity being matched and the decision that depends on the match.</a:t>
             </a:r>
-            <a:endParaRPr lang="en-US" sz="1550" dirty="0"/>
+            <a:endParaRPr lang="en-US" sz="1320" dirty="0"/>
           </a:p>
         </p:txBody>
       </p:sp>
@@ -4281,13 +4308,16 @@
           <a:ln/>
         </p:spPr>
         <p:txBody>
-          <a:bodyPr wrap="square" lIns="254" tIns="254" rIns="254" bIns="254" rtlCol="0" anchor="t">
+          <a:bodyPr wrap="square" lIns="508" tIns="508" rIns="508" bIns="508" rtlCol="0" anchor="t">
             <a:normAutofit/>
           </a:bodyPr>
           <a:lstStyle/>
           <a:p>
-            <a:r>
-              <a:rPr lang="en-US" sz="1380" dirty="0">
+            <a:pPr indent="0" marL="0">
+              <a:buNone/>
+            </a:pPr>
+            <a:r>
+              <a:rPr lang="en-US" sz="1220" dirty="0">
                 <a:solidFill>
                   <a:srgbClr val="17364A"/>
                 </a:solidFill>
@@ -4295,13 +4325,16 @@
                 <a:ea typeface="Aptos" pitchFamily="34" charset="-122"/>
                 <a:cs typeface="Aptos" pitchFamily="34" charset="-120"/>
               </a:rPr>
-              <a:t>Person matching may use name, date of birth, address, phone, medical record number, email,.</a:t>
-            </a:r>
-            <a:endParaRPr lang="en-US" sz="1380" dirty="0"/>
-          </a:p>
-          <a:p>
-            <a:r>
-              <a:rPr lang="en-US" sz="1380" dirty="0">
+              <a:t>Person matching may use name, date of birth, address, phone,.</a:t>
+            </a:r>
+            <a:endParaRPr lang="en-US" sz="1220" dirty="0"/>
+          </a:p>
+          <a:p>
+            <a:pPr indent="0" marL="0">
+              <a:buNone/>
+            </a:pPr>
+            <a:r>
+              <a:rPr lang="en-US" sz="1220" dirty="0">
                 <a:solidFill>
                   <a:srgbClr val="17364A"/>
                 </a:solidFill>
@@ -4309,13 +4342,16 @@
                 <a:ea typeface="Aptos" pitchFamily="34" charset="-122"/>
                 <a:cs typeface="Aptos" pitchFamily="34" charset="-120"/>
               </a:rPr>
-              <a:t>Event matching may use dates, locations, condition, exposure, and related records.</a:t>
-            </a:r>
-            <a:endParaRPr lang="en-US" sz="1380" dirty="0"/>
-          </a:p>
-          <a:p>
-            <a:r>
-              <a:rPr lang="en-US" sz="1380" dirty="0">
+              <a:t>Event matching may use dates, locations, condition, exposure, and.</a:t>
+            </a:r>
+            <a:endParaRPr lang="en-US" sz="1220" dirty="0"/>
+          </a:p>
+          <a:p>
+            <a:pPr indent="0" marL="0">
+              <a:buNone/>
+            </a:pPr>
+            <a:r>
+              <a:rPr lang="en-US" sz="1220" dirty="0">
                 <a:solidFill>
                   <a:srgbClr val="17364A"/>
                 </a:solidFill>
@@ -4323,9 +4359,9 @@
                 <a:ea typeface="Aptos" pitchFamily="34" charset="-122"/>
                 <a:cs typeface="Aptos" pitchFamily="34" charset="-120"/>
               </a:rPr>
-              <a:t>Thresholds determine when records are automatically linked, automatically separated, or.</a:t>
-            </a:r>
-            <a:endParaRPr lang="en-US" sz="1380" dirty="0"/>
+              <a:t>Thresholds determine when records are automatically linked,.</a:t>
+            </a:r>
+            <a:endParaRPr lang="en-US" sz="1220" dirty="0"/>
           </a:p>
         </p:txBody>
       </p:sp>
@@ -4403,17 +4439,17 @@
         </p:nvSpPr>
         <p:spPr>
           <a:xfrm>
-            <a:off x="7799832" y="5001768"/>
-            <a:ext cx="3145536" cy="502920"/>
-          </a:xfrm>
-          <a:prstGeom prst="rect">
-            <a:avLst/>
-          </a:prstGeom>
-          <a:noFill/>
-          <a:ln/>
-        </p:spPr>
-        <p:txBody>
-          <a:bodyPr wrap="square" lIns="0" tIns="0" rIns="0" bIns="0" rtlCol="0" anchor="t">
+            <a:off x="7799832" y="4974336"/>
+            <a:ext cx="3145536" cy="576072"/>
+          </a:xfrm>
+          <a:prstGeom prst="rect">
+            <a:avLst/>
+          </a:prstGeom>
+          <a:noFill/>
+          <a:ln/>
+        </p:spPr>
+        <p:txBody>
+          <a:bodyPr wrap="square" lIns="254" tIns="254" rIns="254" bIns="254" rtlCol="0" anchor="t">
             <a:normAutofit/>
           </a:bodyPr>
           <a:lstStyle/>
@@ -4422,7 +4458,7 @@
               <a:buNone/>
             </a:pPr>
             <a:r>
-              <a:rPr lang="en-US" sz="1550" dirty="0">
+              <a:rPr lang="en-US" sz="1320" dirty="0">
                 <a:solidFill>
                   <a:srgbClr val="17364A"/>
                 </a:solidFill>
@@ -4430,9 +4466,9 @@
                 <a:ea typeface="Aptos" pitchFamily="34" charset="-122"/>
                 <a:cs typeface="Aptos" pitchFamily="34" charset="-120"/>
               </a:rPr>
-              <a:t>Connect the concept to public health purpose, responsible use, required safeguards, documentation, and the next action a department should take.</a:t>
-            </a:r>
-            <a:endParaRPr lang="en-US" sz="1550" dirty="0"/>
+              <a:t>Connect the concept to public health purpose, responsible use, required safeguards, documentation, and the next action a.</a:t>
+            </a:r>
+            <a:endParaRPr lang="en-US" sz="1320" dirty="0"/>
           </a:p>
         </p:txBody>
       </p:sp>
@@ -4733,49 +4769,58 @@
           <a:ln/>
         </p:spPr>
         <p:txBody>
-          <a:bodyPr wrap="square" lIns="635" tIns="635" rIns="635" bIns="635" rtlCol="0" anchor="t">
+          <a:bodyPr wrap="square" lIns="1016" tIns="1016" rIns="1016" bIns="1016" rtlCol="0" anchor="t">
             <a:normAutofit/>
           </a:bodyPr>
           <a:lstStyle/>
           <a:p>
+            <a:pPr indent="0" marL="0">
+              <a:buNone/>
+            </a:pPr>
             <a:r>
               <a:rPr lang="en-US" sz="2100" dirty="0">
                 <a:solidFill>
-                  <a:srgbClr val="17364A"/>
-                </a:solidFill>
-                <a:latin typeface="Aptos" pitchFamily="34" charset="0"/>
-                <a:ea typeface="Aptos" pitchFamily="34" charset="-122"/>
-                <a:cs typeface="Aptos" pitchFamily="34" charset="-120"/>
-              </a:rPr>
-              <a:t>False matches.</a:t>
+                  <a:srgbClr val="003A63"/>
+                </a:solidFill>
+                <a:latin typeface="Aptos" pitchFamily="34" charset="0"/>
+                <a:ea typeface="Aptos" pitchFamily="34" charset="-122"/>
+                <a:cs typeface="Aptos" pitchFamily="34" charset="-120"/>
+              </a:rPr>
+              <a:t>• False matches.</a:t>
             </a:r>
             <a:endParaRPr lang="en-US" sz="2100" dirty="0"/>
           </a:p>
           <a:p>
+            <a:pPr indent="0" marL="0">
+              <a:buNone/>
+            </a:pPr>
             <a:r>
               <a:rPr lang="en-US" sz="2100" dirty="0">
                 <a:solidFill>
-                  <a:srgbClr val="17364A"/>
-                </a:solidFill>
-                <a:latin typeface="Aptos" pitchFamily="34" charset="0"/>
-                <a:ea typeface="Aptos" pitchFamily="34" charset="-122"/>
-                <a:cs typeface="Aptos" pitchFamily="34" charset="-120"/>
-              </a:rPr>
-              <a:t>False matches can combine data from different people or entities.</a:t>
+                  <a:srgbClr val="003A63"/>
+                </a:solidFill>
+                <a:latin typeface="Aptos" pitchFamily="34" charset="0"/>
+                <a:ea typeface="Aptos" pitchFamily="34" charset="-122"/>
+                <a:cs typeface="Aptos" pitchFamily="34" charset="-120"/>
+              </a:rPr>
+              <a:t>• False matches can combine data from different people or entities.</a:t>
             </a:r>
             <a:endParaRPr lang="en-US" sz="2100" dirty="0"/>
           </a:p>
           <a:p>
+            <a:pPr indent="0" marL="0">
+              <a:buNone/>
+            </a:pPr>
             <a:r>
               <a:rPr lang="en-US" sz="2100" dirty="0">
                 <a:solidFill>
-                  <a:srgbClr val="17364A"/>
-                </a:solidFill>
-                <a:latin typeface="Aptos" pitchFamily="34" charset="0"/>
-                <a:ea typeface="Aptos" pitchFamily="34" charset="-122"/>
-                <a:cs typeface="Aptos" pitchFamily="34" charset="-120"/>
-              </a:rPr>
-              <a:t>Guardrails include conservative thresholds for consequential uses, clerical review, and source display.</a:t>
+                  <a:srgbClr val="003A63"/>
+                </a:solidFill>
+                <a:latin typeface="Aptos" pitchFamily="34" charset="0"/>
+                <a:ea typeface="Aptos" pitchFamily="34" charset="-122"/>
+                <a:cs typeface="Aptos" pitchFamily="34" charset="-120"/>
+              </a:rPr>
+              <a:t>• Guardrails include conservative thresholds for consequential uses, clerical review, and source.</a:t>
             </a:r>
             <a:endParaRPr lang="en-US" sz="2100" dirty="0"/>
           </a:p>
@@ -4855,17 +4900,17 @@
         </p:nvSpPr>
         <p:spPr>
           <a:xfrm>
-            <a:off x="7799832" y="1828800"/>
-            <a:ext cx="3145536" cy="685800"/>
-          </a:xfrm>
-          <a:prstGeom prst="rect">
-            <a:avLst/>
-          </a:prstGeom>
-          <a:noFill/>
-          <a:ln/>
-        </p:spPr>
-        <p:txBody>
-          <a:bodyPr wrap="square" lIns="0" tIns="0" rIns="0" bIns="0" rtlCol="0" anchor="t">
+            <a:off x="7799832" y="1801368"/>
+            <a:ext cx="3145536" cy="758952"/>
+          </a:xfrm>
+          <a:prstGeom prst="rect">
+            <a:avLst/>
+          </a:prstGeom>
+          <a:noFill/>
+          <a:ln/>
+        </p:spPr>
+        <p:txBody>
+          <a:bodyPr wrap="square" lIns="254" tIns="254" rIns="254" bIns="254" rtlCol="0" anchor="t">
             <a:normAutofit/>
           </a:bodyPr>
           <a:lstStyle/>
@@ -4874,7 +4919,7 @@
               <a:buNone/>
             </a:pPr>
             <a:r>
-              <a:rPr lang="en-US" sz="1550" dirty="0">
+              <a:rPr lang="en-US" sz="1320" dirty="0">
                 <a:solidFill>
                   <a:srgbClr val="17364A"/>
                 </a:solidFill>
@@ -4884,7 +4929,7 @@
               </a:rPr>
               <a:t>False matches.</a:t>
             </a:r>
-            <a:endParaRPr lang="en-US" sz="1550" dirty="0"/>
+            <a:endParaRPr lang="en-US" sz="1320" dirty="0"/>
           </a:p>
         </p:txBody>
       </p:sp>
@@ -4972,13 +5017,16 @@
           <a:ln/>
         </p:spPr>
         <p:txBody>
-          <a:bodyPr wrap="square" lIns="254" tIns="254" rIns="254" bIns="254" rtlCol="0" anchor="t">
+          <a:bodyPr wrap="square" lIns="508" tIns="508" rIns="508" bIns="508" rtlCol="0" anchor="t">
             <a:normAutofit/>
           </a:bodyPr>
           <a:lstStyle/>
           <a:p>
-            <a:r>
-              <a:rPr lang="en-US" sz="1380" dirty="0">
+            <a:pPr indent="0" marL="0">
+              <a:buNone/>
+            </a:pPr>
+            <a:r>
+              <a:rPr lang="en-US" sz="1220" dirty="0">
                 <a:solidFill>
                   <a:srgbClr val="17364A"/>
                 </a:solidFill>
@@ -4988,11 +5036,14 @@
               </a:rPr>
               <a:t>Missed matches.</a:t>
             </a:r>
-            <a:endParaRPr lang="en-US" sz="1380" dirty="0"/>
-          </a:p>
-          <a:p>
-            <a:r>
-              <a:rPr lang="en-US" sz="1380" dirty="0">
+            <a:endParaRPr lang="en-US" sz="1220" dirty="0"/>
+          </a:p>
+          <a:p>
+            <a:pPr indent="0" marL="0">
+              <a:buNone/>
+            </a:pPr>
+            <a:r>
+              <a:rPr lang="en-US" sz="1220" dirty="0">
                 <a:solidFill>
                   <a:srgbClr val="17364A"/>
                 </a:solidFill>
@@ -5002,11 +5053,14 @@
               </a:rPr>
               <a:t>Missed matches can fragment histories and create duplicate work.</a:t>
             </a:r>
-            <a:endParaRPr lang="en-US" sz="1380" dirty="0"/>
-          </a:p>
-          <a:p>
-            <a:r>
-              <a:rPr lang="en-US" sz="1380" dirty="0">
+            <a:endParaRPr lang="en-US" sz="1220" dirty="0"/>
+          </a:p>
+          <a:p>
+            <a:pPr indent="0" marL="0">
+              <a:buNone/>
+            </a:pPr>
+            <a:r>
+              <a:rPr lang="en-US" sz="1220" dirty="0">
                 <a:solidFill>
                   <a:srgbClr val="17364A"/>
                 </a:solidFill>
@@ -5014,9 +5068,9 @@
                 <a:ea typeface="Aptos" pitchFamily="34" charset="-122"/>
                 <a:cs typeface="Aptos" pitchFamily="34" charset="-120"/>
               </a:rPr>
-              <a:t>Guardrails include matching quality monitoring, feedback loops, and review queues.</a:t>
-            </a:r>
-            <a:endParaRPr lang="en-US" sz="1380" dirty="0"/>
+              <a:t>Guardrails include matching quality monitoring, feedback loops,.</a:t>
+            </a:r>
+            <a:endParaRPr lang="en-US" sz="1220" dirty="0"/>
           </a:p>
         </p:txBody>
       </p:sp>
@@ -5094,17 +5148,17 @@
         </p:nvSpPr>
         <p:spPr>
           <a:xfrm>
-            <a:off x="7799832" y="5001768"/>
-            <a:ext cx="3145536" cy="502920"/>
-          </a:xfrm>
-          <a:prstGeom prst="rect">
-            <a:avLst/>
-          </a:prstGeom>
-          <a:noFill/>
-          <a:ln/>
-        </p:spPr>
-        <p:txBody>
-          <a:bodyPr wrap="square" lIns="0" tIns="0" rIns="0" bIns="0" rtlCol="0" anchor="t">
+            <a:off x="7799832" y="4974336"/>
+            <a:ext cx="3145536" cy="576072"/>
+          </a:xfrm>
+          <a:prstGeom prst="rect">
+            <a:avLst/>
+          </a:prstGeom>
+          <a:noFill/>
+          <a:ln/>
+        </p:spPr>
+        <p:txBody>
+          <a:bodyPr wrap="square" lIns="254" tIns="254" rIns="254" bIns="254" rtlCol="0" anchor="t">
             <a:normAutofit/>
           </a:bodyPr>
           <a:lstStyle/>
@@ -5113,7 +5167,7 @@
               <a:buNone/>
             </a:pPr>
             <a:r>
-              <a:rPr lang="en-US" sz="1550" dirty="0">
+              <a:rPr lang="en-US" sz="1320" dirty="0">
                 <a:solidFill>
                   <a:srgbClr val="17364A"/>
                 </a:solidFill>
@@ -5121,9 +5175,9 @@
                 <a:ea typeface="Aptos" pitchFamily="34" charset="-122"/>
                 <a:cs typeface="Aptos" pitchFamily="34" charset="-120"/>
               </a:rPr>
-              <a:t>Identify what could go wrong, who could be affected, what safeguards are needed, and what evidence should be reviewed before use expands.</a:t>
-            </a:r>
-            <a:endParaRPr lang="en-US" sz="1550" dirty="0"/>
+              <a:t>Identify what could go wrong, who could be affected, what safeguards are needed, and what evidence should be reviewed.</a:t>
+            </a:r>
+            <a:endParaRPr lang="en-US" sz="1320" dirty="0"/>
           </a:p>
         </p:txBody>
       </p:sp>
@@ -5424,49 +5478,58 @@
           <a:ln/>
         </p:spPr>
         <p:txBody>
-          <a:bodyPr wrap="square" lIns="635" tIns="635" rIns="635" bIns="635" rtlCol="0" anchor="t">
+          <a:bodyPr wrap="square" lIns="1016" tIns="1016" rIns="1016" bIns="1016" rtlCol="0" anchor="t">
             <a:normAutofit/>
           </a:bodyPr>
           <a:lstStyle/>
           <a:p>
+            <a:pPr indent="0" marL="0">
+              <a:buNone/>
+            </a:pPr>
             <a:r>
               <a:rPr lang="en-US" sz="2100" dirty="0">
                 <a:solidFill>
-                  <a:srgbClr val="17364A"/>
-                </a:solidFill>
-                <a:latin typeface="Aptos" pitchFamily="34" charset="0"/>
-                <a:ea typeface="Aptos" pitchFamily="34" charset="-122"/>
-                <a:cs typeface="Aptos" pitchFamily="34" charset="-120"/>
-              </a:rPr>
-              <a:t>Hidden linkage uncertainty.</a:t>
+                  <a:srgbClr val="003A63"/>
+                </a:solidFill>
+                <a:latin typeface="Aptos" pitchFamily="34" charset="0"/>
+                <a:ea typeface="Aptos" pitchFamily="34" charset="-122"/>
+                <a:cs typeface="Aptos" pitchFamily="34" charset="-120"/>
+              </a:rPr>
+              <a:t>• Hidden linkage uncertainty.</a:t>
             </a:r>
             <a:endParaRPr lang="en-US" sz="2100" dirty="0"/>
           </a:p>
           <a:p>
+            <a:pPr indent="0" marL="0">
+              <a:buNone/>
+            </a:pPr>
             <a:r>
               <a:rPr lang="en-US" sz="2100" dirty="0">
                 <a:solidFill>
-                  <a:srgbClr val="17364A"/>
-                </a:solidFill>
-                <a:latin typeface="Aptos" pitchFamily="34" charset="0"/>
-                <a:ea typeface="Aptos" pitchFamily="34" charset="-122"/>
-                <a:cs typeface="Aptos" pitchFamily="34" charset="-120"/>
-              </a:rPr>
-              <a:t>AI outputs may present linked data as certain.</a:t>
+                  <a:srgbClr val="003A63"/>
+                </a:solidFill>
+                <a:latin typeface="Aptos" pitchFamily="34" charset="0"/>
+                <a:ea typeface="Aptos" pitchFamily="34" charset="-122"/>
+                <a:cs typeface="Aptos" pitchFamily="34" charset="-120"/>
+              </a:rPr>
+              <a:t>• AI outputs may present linked data as certain.</a:t>
             </a:r>
             <a:endParaRPr lang="en-US" sz="2100" dirty="0"/>
           </a:p>
           <a:p>
+            <a:pPr indent="0" marL="0">
+              <a:buNone/>
+            </a:pPr>
             <a:r>
               <a:rPr lang="en-US" sz="2100" dirty="0">
                 <a:solidFill>
-                  <a:srgbClr val="17364A"/>
-                </a:solidFill>
-                <a:latin typeface="Aptos" pitchFamily="34" charset="0"/>
-                <a:ea typeface="Aptos" pitchFamily="34" charset="-122"/>
-                <a:cs typeface="Aptos" pitchFamily="34" charset="-120"/>
-              </a:rPr>
-              <a:t>Guardrails include confidence indicators, source records, and user review of uncertain matches.</a:t>
+                  <a:srgbClr val="003A63"/>
+                </a:solidFill>
+                <a:latin typeface="Aptos" pitchFamily="34" charset="0"/>
+                <a:ea typeface="Aptos" pitchFamily="34" charset="-122"/>
+                <a:cs typeface="Aptos" pitchFamily="34" charset="-120"/>
+              </a:rPr>
+              <a:t>• Guardrails include confidence indicators, source records, and user review of uncertain matches.</a:t>
             </a:r>
             <a:endParaRPr lang="en-US" sz="2100" dirty="0"/>
           </a:p>
@@ -5546,17 +5609,17 @@
         </p:nvSpPr>
         <p:spPr>
           <a:xfrm>
-            <a:off x="7799832" y="1828800"/>
-            <a:ext cx="3145536" cy="685800"/>
-          </a:xfrm>
-          <a:prstGeom prst="rect">
-            <a:avLst/>
-          </a:prstGeom>
-          <a:noFill/>
-          <a:ln/>
-        </p:spPr>
-        <p:txBody>
-          <a:bodyPr wrap="square" lIns="0" tIns="0" rIns="0" bIns="0" rtlCol="0" anchor="t">
+            <a:off x="7799832" y="1801368"/>
+            <a:ext cx="3145536" cy="758952"/>
+          </a:xfrm>
+          <a:prstGeom prst="rect">
+            <a:avLst/>
+          </a:prstGeom>
+          <a:noFill/>
+          <a:ln/>
+        </p:spPr>
+        <p:txBody>
+          <a:bodyPr wrap="square" lIns="254" tIns="254" rIns="254" bIns="254" rtlCol="0" anchor="t">
             <a:normAutofit/>
           </a:bodyPr>
           <a:lstStyle/>
@@ -5565,7 +5628,7 @@
               <a:buNone/>
             </a:pPr>
             <a:r>
-              <a:rPr lang="en-US" sz="1550" dirty="0">
+              <a:rPr lang="en-US" sz="1320" dirty="0">
                 <a:solidFill>
                   <a:srgbClr val="17364A"/>
                 </a:solidFill>
@@ -5575,7 +5638,7 @@
               </a:rPr>
               <a:t>Hidden linkage uncertainty.</a:t>
             </a:r>
-            <a:endParaRPr lang="en-US" sz="1550" dirty="0"/>
+            <a:endParaRPr lang="en-US" sz="1320" dirty="0"/>
           </a:p>
         </p:txBody>
       </p:sp>
@@ -5663,13 +5726,16 @@
           <a:ln/>
         </p:spPr>
         <p:txBody>
-          <a:bodyPr wrap="square" lIns="254" tIns="254" rIns="254" bIns="254" rtlCol="0" anchor="t">
+          <a:bodyPr wrap="square" lIns="508" tIns="508" rIns="508" bIns="508" rtlCol="0" anchor="t">
             <a:normAutofit/>
           </a:bodyPr>
           <a:lstStyle/>
           <a:p>
-            <a:r>
-              <a:rPr lang="en-US" sz="1380" dirty="0">
+            <a:pPr indent="0" marL="0">
+              <a:buNone/>
+            </a:pPr>
+            <a:r>
+              <a:rPr lang="en-US" sz="1220" dirty="0">
                 <a:solidFill>
                   <a:srgbClr val="17364A"/>
                 </a:solidFill>
@@ -5679,11 +5745,14 @@
               </a:rPr>
               <a:t>Hidden linkage uncertainty.</a:t>
             </a:r>
-            <a:endParaRPr lang="en-US" sz="1380" dirty="0"/>
-          </a:p>
-          <a:p>
-            <a:r>
-              <a:rPr lang="en-US" sz="1380" dirty="0">
+            <a:endParaRPr lang="en-US" sz="1220" dirty="0"/>
+          </a:p>
+          <a:p>
+            <a:pPr indent="0" marL="0">
+              <a:buNone/>
+            </a:pPr>
+            <a:r>
+              <a:rPr lang="en-US" sz="1220" dirty="0">
                 <a:solidFill>
                   <a:srgbClr val="17364A"/>
                 </a:solidFill>
@@ -5693,11 +5762,14 @@
               </a:rPr>
               <a:t>AI outputs may present linked data as certain.</a:t>
             </a:r>
-            <a:endParaRPr lang="en-US" sz="1380" dirty="0"/>
-          </a:p>
-          <a:p>
-            <a:r>
-              <a:rPr lang="en-US" sz="1380" dirty="0">
+            <a:endParaRPr lang="en-US" sz="1220" dirty="0"/>
+          </a:p>
+          <a:p>
+            <a:pPr indent="0" marL="0">
+              <a:buNone/>
+            </a:pPr>
+            <a:r>
+              <a:rPr lang="en-US" sz="1220" dirty="0">
                 <a:solidFill>
                   <a:srgbClr val="17364A"/>
                 </a:solidFill>
@@ -5705,9 +5777,9 @@
                 <a:ea typeface="Aptos" pitchFamily="34" charset="-122"/>
                 <a:cs typeface="Aptos" pitchFamily="34" charset="-120"/>
               </a:rPr>
-              <a:t>Guardrails include confidence indicators, source records, and user review of uncertain.</a:t>
-            </a:r>
-            <a:endParaRPr lang="en-US" sz="1380" dirty="0"/>
+              <a:t>Guardrails include confidence indicators, source records, and user.</a:t>
+            </a:r>
+            <a:endParaRPr lang="en-US" sz="1220" dirty="0"/>
           </a:p>
         </p:txBody>
       </p:sp>
@@ -5785,17 +5857,17 @@
         </p:nvSpPr>
         <p:spPr>
           <a:xfrm>
-            <a:off x="7799832" y="5001768"/>
-            <a:ext cx="3145536" cy="502920"/>
-          </a:xfrm>
-          <a:prstGeom prst="rect">
-            <a:avLst/>
-          </a:prstGeom>
-          <a:noFill/>
-          <a:ln/>
-        </p:spPr>
-        <p:txBody>
-          <a:bodyPr wrap="square" lIns="0" tIns="0" rIns="0" bIns="0" rtlCol="0" anchor="t">
+            <a:off x="7799832" y="4974336"/>
+            <a:ext cx="3145536" cy="576072"/>
+          </a:xfrm>
+          <a:prstGeom prst="rect">
+            <a:avLst/>
+          </a:prstGeom>
+          <a:noFill/>
+          <a:ln/>
+        </p:spPr>
+        <p:txBody>
+          <a:bodyPr wrap="square" lIns="254" tIns="254" rIns="254" bIns="254" rtlCol="0" anchor="t">
             <a:normAutofit/>
           </a:bodyPr>
           <a:lstStyle/>
@@ -5804,7 +5876,7 @@
               <a:buNone/>
             </a:pPr>
             <a:r>
-              <a:rPr lang="en-US" sz="1550" dirty="0">
+              <a:rPr lang="en-US" sz="1320" dirty="0">
                 <a:solidFill>
                   <a:srgbClr val="17364A"/>
                 </a:solidFill>
@@ -5812,9 +5884,9 @@
                 <a:ea typeface="Aptos" pitchFamily="34" charset="-122"/>
                 <a:cs typeface="Aptos" pitchFamily="34" charset="-120"/>
               </a:rPr>
-              <a:t>Identify what could go wrong, who could be affected, what safeguards are needed, and what evidence should be reviewed before use expands.</a:t>
-            </a:r>
-            <a:endParaRPr lang="en-US" sz="1550" dirty="0"/>
+              <a:t>Identify what could go wrong, who could be affected, what safeguards are needed, and what evidence should be reviewed.</a:t>
+            </a:r>
+            <a:endParaRPr lang="en-US" sz="1320" dirty="0"/>
           </a:p>
         </p:txBody>
       </p:sp>
@@ -6115,49 +6187,58 @@
           <a:ln/>
         </p:spPr>
         <p:txBody>
-          <a:bodyPr wrap="square" lIns="635" tIns="635" rIns="635" bIns="635" rtlCol="0" anchor="t">
+          <a:bodyPr wrap="square" lIns="1016" tIns="1016" rIns="1016" bIns="1016" rtlCol="0" anchor="t">
             <a:normAutofit/>
           </a:bodyPr>
           <a:lstStyle/>
           <a:p>
+            <a:pPr indent="0" marL="0">
+              <a:buNone/>
+            </a:pPr>
             <a:r>
               <a:rPr lang="en-US" sz="2100" dirty="0">
                 <a:solidFill>
-                  <a:srgbClr val="17364A"/>
-                </a:solidFill>
-                <a:latin typeface="Aptos" pitchFamily="34" charset="0"/>
-                <a:ea typeface="Aptos" pitchFamily="34" charset="-122"/>
-                <a:cs typeface="Aptos" pitchFamily="34" charset="-120"/>
-              </a:rPr>
-              <a:t>Generative AI may summarize linked records, so source attribution and linkage confidence should be.</a:t>
+                  <a:srgbClr val="003A63"/>
+                </a:solidFill>
+                <a:latin typeface="Aptos" pitchFamily="34" charset="0"/>
+                <a:ea typeface="Aptos" pitchFamily="34" charset="-122"/>
+                <a:cs typeface="Aptos" pitchFamily="34" charset="-120"/>
+              </a:rPr>
+              <a:t>• Generative AI may summarize linked records, so source attribution and linkage confidence.</a:t>
             </a:r>
             <a:endParaRPr lang="en-US" sz="2100" dirty="0"/>
           </a:p>
           <a:p>
+            <a:pPr indent="0" marL="0">
+              <a:buNone/>
+            </a:pPr>
             <a:r>
               <a:rPr lang="en-US" sz="2100" dirty="0">
                 <a:solidFill>
-                  <a:srgbClr val="17364A"/>
-                </a:solidFill>
-                <a:latin typeface="Aptos" pitchFamily="34" charset="0"/>
-                <a:ea typeface="Aptos" pitchFamily="34" charset="-122"/>
-                <a:cs typeface="Aptos" pitchFamily="34" charset="-120"/>
-              </a:rPr>
-              <a:t>Predictive analytics may use features created from linked records, making match quality part of model.</a:t>
+                  <a:srgbClr val="003A63"/>
+                </a:solidFill>
+                <a:latin typeface="Aptos" pitchFamily="34" charset="0"/>
+                <a:ea typeface="Aptos" pitchFamily="34" charset="-122"/>
+                <a:cs typeface="Aptos" pitchFamily="34" charset="-120"/>
+              </a:rPr>
+              <a:t>• Predictive analytics may use features created from linked records, making match quality part.</a:t>
             </a:r>
             <a:endParaRPr lang="en-US" sz="2100" dirty="0"/>
           </a:p>
           <a:p>
+            <a:pPr indent="0" marL="0">
+              <a:buNone/>
+            </a:pPr>
             <a:r>
               <a:rPr lang="en-US" sz="2100" dirty="0">
                 <a:solidFill>
-                  <a:srgbClr val="17364A"/>
-                </a:solidFill>
-                <a:latin typeface="Aptos" pitchFamily="34" charset="0"/>
-                <a:ea typeface="Aptos" pitchFamily="34" charset="-122"/>
-                <a:cs typeface="Aptos" pitchFamily="34" charset="-120"/>
-              </a:rPr>
-              <a:t>NLP may extract identifiers from text to support linkage, which requires privacy and accuracy review.</a:t>
+                  <a:srgbClr val="003A63"/>
+                </a:solidFill>
+                <a:latin typeface="Aptos" pitchFamily="34" charset="0"/>
+                <a:ea typeface="Aptos" pitchFamily="34" charset="-122"/>
+                <a:cs typeface="Aptos" pitchFamily="34" charset="-120"/>
+              </a:rPr>
+              <a:t>• NLP may extract identifiers from text to support linkage, which requires privacy and accuracy.</a:t>
             </a:r>
             <a:endParaRPr lang="en-US" sz="2100" dirty="0"/>
           </a:p>
@@ -6237,17 +6318,17 @@
         </p:nvSpPr>
         <p:spPr>
           <a:xfrm>
-            <a:off x="7799832" y="1828800"/>
-            <a:ext cx="3145536" cy="685800"/>
-          </a:xfrm>
-          <a:prstGeom prst="rect">
-            <a:avLst/>
-          </a:prstGeom>
-          <a:noFill/>
-          <a:ln/>
-        </p:spPr>
-        <p:txBody>
-          <a:bodyPr wrap="square" lIns="0" tIns="0" rIns="0" bIns="0" rtlCol="0" anchor="t">
+            <a:off x="7799832" y="1801368"/>
+            <a:ext cx="3145536" cy="758952"/>
+          </a:xfrm>
+          <a:prstGeom prst="rect">
+            <a:avLst/>
+          </a:prstGeom>
+          <a:noFill/>
+          <a:ln/>
+        </p:spPr>
+        <p:txBody>
+          <a:bodyPr wrap="square" lIns="254" tIns="254" rIns="254" bIns="254" rtlCol="0" anchor="t">
             <a:normAutofit/>
           </a:bodyPr>
           <a:lstStyle/>
@@ -6256,7 +6337,7 @@
               <a:buNone/>
             </a:pPr>
             <a:r>
-              <a:rPr lang="en-US" sz="1550" dirty="0">
+              <a:rPr lang="en-US" sz="1320" dirty="0">
                 <a:solidFill>
                   <a:srgbClr val="17364A"/>
                 </a:solidFill>
@@ -6266,7 +6347,7 @@
               </a:rPr>
               <a:t>Generative AI may summarize linked records, so source attribution and linkage confidence should be.</a:t>
             </a:r>
-            <a:endParaRPr lang="en-US" sz="1550" dirty="0"/>
+            <a:endParaRPr lang="en-US" sz="1320" dirty="0"/>
           </a:p>
         </p:txBody>
       </p:sp>
@@ -6354,13 +6435,16 @@
           <a:ln/>
         </p:spPr>
         <p:txBody>
-          <a:bodyPr wrap="square" lIns="254" tIns="254" rIns="254" bIns="254" rtlCol="0" anchor="t">
+          <a:bodyPr wrap="square" lIns="508" tIns="508" rIns="508" bIns="508" rtlCol="0" anchor="t">
             <a:normAutofit/>
           </a:bodyPr>
           <a:lstStyle/>
           <a:p>
-            <a:r>
-              <a:rPr lang="en-US" sz="1380" dirty="0">
+            <a:pPr indent="0" marL="0">
+              <a:buNone/>
+            </a:pPr>
+            <a:r>
+              <a:rPr lang="en-US" sz="1220" dirty="0">
                 <a:solidFill>
                   <a:srgbClr val="17364A"/>
                 </a:solidFill>
@@ -6368,13 +6452,16 @@
                 <a:ea typeface="Aptos" pitchFamily="34" charset="-122"/>
                 <a:cs typeface="Aptos" pitchFamily="34" charset="-120"/>
               </a:rPr>
-              <a:t>Generative AI may summarize linked records, so source attribution and linkage confidence.</a:t>
-            </a:r>
-            <a:endParaRPr lang="en-US" sz="1380" dirty="0"/>
-          </a:p>
-          <a:p>
-            <a:r>
-              <a:rPr lang="en-US" sz="1380" dirty="0">
+              <a:t>Generative AI may summarize linked records, so source attribution.</a:t>
+            </a:r>
+            <a:endParaRPr lang="en-US" sz="1220" dirty="0"/>
+          </a:p>
+          <a:p>
+            <a:pPr indent="0" marL="0">
+              <a:buNone/>
+            </a:pPr>
+            <a:r>
+              <a:rPr lang="en-US" sz="1220" dirty="0">
                 <a:solidFill>
                   <a:srgbClr val="17364A"/>
                 </a:solidFill>
@@ -6382,13 +6469,16 @@
                 <a:ea typeface="Aptos" pitchFamily="34" charset="-122"/>
                 <a:cs typeface="Aptos" pitchFamily="34" charset="-120"/>
               </a:rPr>
-              <a:t>Predictive analytics may use features created from linked records, making match quality.</a:t>
-            </a:r>
-            <a:endParaRPr lang="en-US" sz="1380" dirty="0"/>
-          </a:p>
-          <a:p>
-            <a:r>
-              <a:rPr lang="en-US" sz="1380" dirty="0">
+              <a:t>Predictive analytics may use features created from linked records,.</a:t>
+            </a:r>
+            <a:endParaRPr lang="en-US" sz="1220" dirty="0"/>
+          </a:p>
+          <a:p>
+            <a:pPr indent="0" marL="0">
+              <a:buNone/>
+            </a:pPr>
+            <a:r>
+              <a:rPr lang="en-US" sz="1220" dirty="0">
                 <a:solidFill>
                   <a:srgbClr val="17364A"/>
                 </a:solidFill>
@@ -6396,9 +6486,9 @@
                 <a:ea typeface="Aptos" pitchFamily="34" charset="-122"/>
                 <a:cs typeface="Aptos" pitchFamily="34" charset="-120"/>
               </a:rPr>
-              <a:t>Agentic AI should not automatically merge or update records without strong approval and.</a:t>
-            </a:r>
-            <a:endParaRPr lang="en-US" sz="1380" dirty="0"/>
+              <a:t>Agentic AI should not automatically merge or update records.</a:t>
+            </a:r>
+            <a:endParaRPr lang="en-US" sz="1220" dirty="0"/>
           </a:p>
         </p:txBody>
       </p:sp>
@@ -6476,17 +6566,17 @@
         </p:nvSpPr>
         <p:spPr>
           <a:xfrm>
-            <a:off x="7799832" y="5001768"/>
-            <a:ext cx="3145536" cy="502920"/>
-          </a:xfrm>
-          <a:prstGeom prst="rect">
-            <a:avLst/>
-          </a:prstGeom>
-          <a:noFill/>
-          <a:ln/>
-        </p:spPr>
-        <p:txBody>
-          <a:bodyPr wrap="square" lIns="0" tIns="0" rIns="0" bIns="0" rtlCol="0" anchor="t">
+            <a:off x="7799832" y="4974336"/>
+            <a:ext cx="3145536" cy="576072"/>
+          </a:xfrm>
+          <a:prstGeom prst="rect">
+            <a:avLst/>
+          </a:prstGeom>
+          <a:noFill/>
+          <a:ln/>
+        </p:spPr>
+        <p:txBody>
+          <a:bodyPr wrap="square" lIns="254" tIns="254" rIns="254" bIns="254" rtlCol="0" anchor="t">
             <a:normAutofit/>
           </a:bodyPr>
           <a:lstStyle/>
@@ -6495,7 +6585,7 @@
               <a:buNone/>
             </a:pPr>
             <a:r>
-              <a:rPr lang="en-US" sz="1550" dirty="0">
+              <a:rPr lang="en-US" sz="1320" dirty="0">
                 <a:solidFill>
                   <a:srgbClr val="17364A"/>
                 </a:solidFill>
@@ -6503,9 +6593,9 @@
                 <a:ea typeface="Aptos" pitchFamily="34" charset="-122"/>
                 <a:cs typeface="Aptos" pitchFamily="34" charset="-120"/>
               </a:rPr>
-              <a:t>Use the concept to clarify workflow changes, dependencies, staffing, procurement requirements, training needs, and implementation checkpoints.</a:t>
-            </a:r>
-            <a:endParaRPr lang="en-US" sz="1550" dirty="0"/>
+              <a:t>Use the concept to clarify workflow changes, dependencies, staffing, procurement requirements, training needs, and.</a:t>
+            </a:r>
+            <a:endParaRPr lang="en-US" sz="1320" dirty="0"/>
           </a:p>
         </p:txBody>
       </p:sp>
@@ -6806,49 +6896,58 @@
           <a:ln/>
         </p:spPr>
         <p:txBody>
-          <a:bodyPr wrap="square" lIns="635" tIns="635" rIns="635" bIns="635" rtlCol="0" anchor="t">
+          <a:bodyPr wrap="square" lIns="1016" tIns="1016" rIns="1016" bIns="1016" rtlCol="0" anchor="t">
             <a:normAutofit/>
           </a:bodyPr>
           <a:lstStyle/>
           <a:p>
+            <a:pPr indent="0" marL="0">
+              <a:buNone/>
+            </a:pPr>
             <a:r>
               <a:rPr lang="en-US" sz="2100" dirty="0">
                 <a:solidFill>
-                  <a:srgbClr val="17364A"/>
-                </a:solidFill>
-                <a:latin typeface="Aptos" pitchFamily="34" charset="0"/>
-                <a:ea typeface="Aptos" pitchFamily="34" charset="-122"/>
-                <a:cs typeface="Aptos" pitchFamily="34" charset="-120"/>
-              </a:rPr>
-              <a:t>Which workflows in your agency depend on matching records across systems?</a:t>
+                  <a:srgbClr val="003A63"/>
+                </a:solidFill>
+                <a:latin typeface="Aptos" pitchFamily="34" charset="0"/>
+                <a:ea typeface="Aptos" pitchFamily="34" charset="-122"/>
+                <a:cs typeface="Aptos" pitchFamily="34" charset="-120"/>
+              </a:rPr>
+              <a:t>• Which workflows in your agency depend on matching records across systems?</a:t>
             </a:r>
             <a:endParaRPr lang="en-US" sz="2100" dirty="0"/>
           </a:p>
           <a:p>
+            <a:pPr indent="0" marL="0">
+              <a:buNone/>
+            </a:pPr>
             <a:r>
               <a:rPr lang="en-US" sz="2100" dirty="0">
                 <a:solidFill>
-                  <a:srgbClr val="17364A"/>
-                </a:solidFill>
-                <a:latin typeface="Aptos" pitchFamily="34" charset="0"/>
-                <a:ea typeface="Aptos" pitchFamily="34" charset="-122"/>
-                <a:cs typeface="Aptos" pitchFamily="34" charset="-120"/>
-              </a:rPr>
-              <a:t>What fields are used for matching, and how complete are they?</a:t>
+                  <a:srgbClr val="003A63"/>
+                </a:solidFill>
+                <a:latin typeface="Aptos" pitchFamily="34" charset="0"/>
+                <a:ea typeface="Aptos" pitchFamily="34" charset="-122"/>
+                <a:cs typeface="Aptos" pitchFamily="34" charset="-120"/>
+              </a:rPr>
+              <a:t>• What fields are used for matching, and how complete are they?</a:t>
             </a:r>
             <a:endParaRPr lang="en-US" sz="2100" dirty="0"/>
           </a:p>
           <a:p>
+            <a:pPr indent="0" marL="0">
+              <a:buNone/>
+            </a:pPr>
             <a:r>
               <a:rPr lang="en-US" sz="2100" dirty="0">
                 <a:solidFill>
-                  <a:srgbClr val="17364A"/>
-                </a:solidFill>
-                <a:latin typeface="Aptos" pitchFamily="34" charset="0"/>
-                <a:ea typeface="Aptos" pitchFamily="34" charset="-122"/>
-                <a:cs typeface="Aptos" pitchFamily="34" charset="-120"/>
-              </a:rPr>
-              <a:t>Which populations may be more likely to experience missed or incorrect matches?</a:t>
+                  <a:srgbClr val="003A63"/>
+                </a:solidFill>
+                <a:latin typeface="Aptos" pitchFamily="34" charset="0"/>
+                <a:ea typeface="Aptos" pitchFamily="34" charset="-122"/>
+                <a:cs typeface="Aptos" pitchFamily="34" charset="-120"/>
+              </a:rPr>
+              <a:t>• Which populations may be more likely to experience missed or incorrect matches?</a:t>
             </a:r>
             <a:endParaRPr lang="en-US" sz="2100" dirty="0"/>
           </a:p>
@@ -6928,17 +7027,17 @@
         </p:nvSpPr>
         <p:spPr>
           <a:xfrm>
-            <a:off x="7799832" y="1828800"/>
-            <a:ext cx="3145536" cy="685800"/>
-          </a:xfrm>
-          <a:prstGeom prst="rect">
-            <a:avLst/>
-          </a:prstGeom>
-          <a:noFill/>
-          <a:ln/>
-        </p:spPr>
-        <p:txBody>
-          <a:bodyPr wrap="square" lIns="0" tIns="0" rIns="0" bIns="0" rtlCol="0" anchor="t">
+            <a:off x="7799832" y="1801368"/>
+            <a:ext cx="3145536" cy="758952"/>
+          </a:xfrm>
+          <a:prstGeom prst="rect">
+            <a:avLst/>
+          </a:prstGeom>
+          <a:noFill/>
+          <a:ln/>
+        </p:spPr>
+        <p:txBody>
+          <a:bodyPr wrap="square" lIns="254" tIns="254" rIns="254" bIns="254" rtlCol="0" anchor="t">
             <a:normAutofit/>
           </a:bodyPr>
           <a:lstStyle/>
@@ -6947,7 +7046,7 @@
               <a:buNone/>
             </a:pPr>
             <a:r>
-              <a:rPr lang="en-US" sz="1550" dirty="0">
+              <a:rPr lang="en-US" sz="1320" dirty="0">
                 <a:solidFill>
                   <a:srgbClr val="17364A"/>
                 </a:solidFill>
@@ -6957,7 +7056,7 @@
               </a:rPr>
               <a:t>Which workflows in your agency depend on matching records across systems?</a:t>
             </a:r>
-            <a:endParaRPr lang="en-US" sz="1550" dirty="0"/>
+            <a:endParaRPr lang="en-US" sz="1320" dirty="0"/>
           </a:p>
         </p:txBody>
       </p:sp>
@@ -7045,13 +7144,16 @@
           <a:ln/>
         </p:spPr>
         <p:txBody>
-          <a:bodyPr wrap="square" lIns="254" tIns="254" rIns="254" bIns="254" rtlCol="0" anchor="t">
+          <a:bodyPr wrap="square" lIns="508" tIns="508" rIns="508" bIns="508" rtlCol="0" anchor="t">
             <a:normAutofit/>
           </a:bodyPr>
           <a:lstStyle/>
           <a:p>
-            <a:r>
-              <a:rPr lang="en-US" sz="1380" dirty="0">
+            <a:pPr indent="0" marL="0">
+              <a:buNone/>
+            </a:pPr>
+            <a:r>
+              <a:rPr lang="en-US" sz="1220" dirty="0">
                 <a:solidFill>
                   <a:srgbClr val="17364A"/>
                 </a:solidFill>
@@ -7059,13 +7161,16 @@
                 <a:ea typeface="Aptos" pitchFamily="34" charset="-122"/>
                 <a:cs typeface="Aptos" pitchFamily="34" charset="-120"/>
               </a:rPr>
-              <a:t>Which workflows in your agency depend on matching records across systems?</a:t>
-            </a:r>
-            <a:endParaRPr lang="en-US" sz="1380" dirty="0"/>
-          </a:p>
-          <a:p>
-            <a:r>
-              <a:rPr lang="en-US" sz="1380" dirty="0">
+              <a:t>Which workflows in your agency depend on matching records across.</a:t>
+            </a:r>
+            <a:endParaRPr lang="en-US" sz="1220" dirty="0"/>
+          </a:p>
+          <a:p>
+            <a:pPr indent="0" marL="0">
+              <a:buNone/>
+            </a:pPr>
+            <a:r>
+              <a:rPr lang="en-US" sz="1220" dirty="0">
                 <a:solidFill>
                   <a:srgbClr val="17364A"/>
                 </a:solidFill>
@@ -7075,11 +7180,14 @@
               </a:rPr>
               <a:t>What fields are used for matching, and how complete are they?</a:t>
             </a:r>
-            <a:endParaRPr lang="en-US" sz="1380" dirty="0"/>
-          </a:p>
-          <a:p>
-            <a:r>
-              <a:rPr lang="en-US" sz="1380" dirty="0">
+            <a:endParaRPr lang="en-US" sz="1220" dirty="0"/>
+          </a:p>
+          <a:p>
+            <a:pPr indent="0" marL="0">
+              <a:buNone/>
+            </a:pPr>
+            <a:r>
+              <a:rPr lang="en-US" sz="1220" dirty="0">
                 <a:solidFill>
                   <a:srgbClr val="17364A"/>
                 </a:solidFill>
@@ -7087,9 +7195,9 @@
                 <a:ea typeface="Aptos" pitchFamily="34" charset="-122"/>
                 <a:cs typeface="Aptos" pitchFamily="34" charset="-120"/>
               </a:rPr>
-              <a:t>Which populations may be more likely to experience missed or incorrect matches?</a:t>
-            </a:r>
-            <a:endParaRPr lang="en-US" sz="1380" dirty="0"/>
+              <a:t>Which populations may be more likely to experience missed or.</a:t>
+            </a:r>
+            <a:endParaRPr lang="en-US" sz="1220" dirty="0"/>
           </a:p>
         </p:txBody>
       </p:sp>
@@ -7167,17 +7275,17 @@
         </p:nvSpPr>
         <p:spPr>
           <a:xfrm>
-            <a:off x="7799832" y="5001768"/>
-            <a:ext cx="3145536" cy="502920"/>
-          </a:xfrm>
-          <a:prstGeom prst="rect">
-            <a:avLst/>
-          </a:prstGeom>
-          <a:noFill/>
-          <a:ln/>
-        </p:spPr>
-        <p:txBody>
-          <a:bodyPr wrap="square" lIns="0" tIns="0" rIns="0" bIns="0" rtlCol="0" anchor="t">
+            <a:off x="7799832" y="4974336"/>
+            <a:ext cx="3145536" cy="576072"/>
+          </a:xfrm>
+          <a:prstGeom prst="rect">
+            <a:avLst/>
+          </a:prstGeom>
+          <a:noFill/>
+          <a:ln/>
+        </p:spPr>
+        <p:txBody>
+          <a:bodyPr wrap="square" lIns="254" tIns="254" rIns="254" bIns="254" rtlCol="0" anchor="t">
             <a:normAutofit/>
           </a:bodyPr>
           <a:lstStyle/>
@@ -7186,7 +7294,7 @@
               <a:buNone/>
             </a:pPr>
             <a:r>
-              <a:rPr lang="en-US" sz="1550" dirty="0">
+              <a:rPr lang="en-US" sz="1320" dirty="0">
                 <a:solidFill>
                   <a:srgbClr val="17364A"/>
                 </a:solidFill>
@@ -7194,9 +7302,9 @@
                 <a:ea typeface="Aptos" pitchFamily="34" charset="-122"/>
                 <a:cs typeface="Aptos" pitchFamily="34" charset="-120"/>
               </a:rPr>
-              <a:t>Connect the concept to public health purpose, responsible use, required safeguards, documentation, and the next action a department should take.</a:t>
-            </a:r>
-            <a:endParaRPr lang="en-US" sz="1550" dirty="0"/>
+              <a:t>Connect the concept to public health purpose, responsible use, required safeguards, documentation, and the next action a.</a:t>
+            </a:r>
+            <a:endParaRPr lang="en-US" sz="1320" dirty="0"/>
           </a:p>
         </p:txBody>
       </p:sp>
@@ -7497,35 +7605,41 @@
           <a:ln/>
         </p:spPr>
         <p:txBody>
-          <a:bodyPr wrap="square" lIns="635" tIns="635" rIns="635" bIns="635" rtlCol="0" anchor="t">
+          <a:bodyPr wrap="square" lIns="1016" tIns="1016" rIns="1016" bIns="1016" rtlCol="0" anchor="t">
             <a:normAutofit/>
           </a:bodyPr>
           <a:lstStyle/>
           <a:p>
+            <a:pPr indent="0" marL="0">
+              <a:buNone/>
+            </a:pPr>
             <a:r>
               <a:rPr lang="en-US" sz="2100" dirty="0">
                 <a:solidFill>
-                  <a:srgbClr val="17364A"/>
-                </a:solidFill>
-                <a:latin typeface="Aptos" pitchFamily="34" charset="0"/>
-                <a:ea typeface="Aptos" pitchFamily="34" charset="-122"/>
-                <a:cs typeface="Aptos" pitchFamily="34" charset="-120"/>
-              </a:rPr>
-              <a:t>What happens when records are incorrectly merged or not merged?</a:t>
+                  <a:srgbClr val="003A63"/>
+                </a:solidFill>
+                <a:latin typeface="Aptos" pitchFamily="34" charset="0"/>
+                <a:ea typeface="Aptos" pitchFamily="34" charset="-122"/>
+                <a:cs typeface="Aptos" pitchFamily="34" charset="-120"/>
+              </a:rPr>
+              <a:t>• What happens when records are incorrectly merged or not merged?</a:t>
             </a:r>
             <a:endParaRPr lang="en-US" sz="2100" dirty="0"/>
           </a:p>
           <a:p>
+            <a:pPr indent="0" marL="0">
+              <a:buNone/>
+            </a:pPr>
             <a:r>
               <a:rPr lang="en-US" sz="2100" dirty="0">
                 <a:solidFill>
-                  <a:srgbClr val="17364A"/>
-                </a:solidFill>
-                <a:latin typeface="Aptos" pitchFamily="34" charset="0"/>
-                <a:ea typeface="Aptos" pitchFamily="34" charset="-122"/>
-                <a:cs typeface="Aptos" pitchFamily="34" charset="-120"/>
-              </a:rPr>
-              <a:t>Where should human review be required?</a:t>
+                  <a:srgbClr val="003A63"/>
+                </a:solidFill>
+                <a:latin typeface="Aptos" pitchFamily="34" charset="0"/>
+                <a:ea typeface="Aptos" pitchFamily="34" charset="-122"/>
+                <a:cs typeface="Aptos" pitchFamily="34" charset="-120"/>
+              </a:rPr>
+              <a:t>• Where should human review be required?</a:t>
             </a:r>
             <a:endParaRPr lang="en-US" sz="2100" dirty="0"/>
           </a:p>
@@ -7605,17 +7719,17 @@
         </p:nvSpPr>
         <p:spPr>
           <a:xfrm>
-            <a:off x="7799832" y="1828800"/>
-            <a:ext cx="3145536" cy="685800"/>
-          </a:xfrm>
-          <a:prstGeom prst="rect">
-            <a:avLst/>
-          </a:prstGeom>
-          <a:noFill/>
-          <a:ln/>
-        </p:spPr>
-        <p:txBody>
-          <a:bodyPr wrap="square" lIns="0" tIns="0" rIns="0" bIns="0" rtlCol="0" anchor="t">
+            <a:off x="7799832" y="1801368"/>
+            <a:ext cx="3145536" cy="758952"/>
+          </a:xfrm>
+          <a:prstGeom prst="rect">
+            <a:avLst/>
+          </a:prstGeom>
+          <a:noFill/>
+          <a:ln/>
+        </p:spPr>
+        <p:txBody>
+          <a:bodyPr wrap="square" lIns="254" tIns="254" rIns="254" bIns="254" rtlCol="0" anchor="t">
             <a:normAutofit/>
           </a:bodyPr>
           <a:lstStyle/>
@@ -7624,7 +7738,7 @@
               <a:buNone/>
             </a:pPr>
             <a:r>
-              <a:rPr lang="en-US" sz="1550" dirty="0">
+              <a:rPr lang="en-US" sz="1320" dirty="0">
                 <a:solidFill>
                   <a:srgbClr val="17364A"/>
                 </a:solidFill>
@@ -7634,7 +7748,7 @@
               </a:rPr>
               <a:t>What happens when records are incorrectly merged or not merged?</a:t>
             </a:r>
-            <a:endParaRPr lang="en-US" sz="1550" dirty="0"/>
+            <a:endParaRPr lang="en-US" sz="1320" dirty="0"/>
           </a:p>
         </p:txBody>
       </p:sp>
@@ -7722,13 +7836,16 @@
           <a:ln/>
         </p:spPr>
         <p:txBody>
-          <a:bodyPr wrap="square" lIns="254" tIns="254" rIns="254" bIns="254" rtlCol="0" anchor="t">
+          <a:bodyPr wrap="square" lIns="508" tIns="508" rIns="508" bIns="508" rtlCol="0" anchor="t">
             <a:normAutofit/>
           </a:bodyPr>
           <a:lstStyle/>
           <a:p>
-            <a:r>
-              <a:rPr lang="en-US" sz="1380" dirty="0">
+            <a:pPr indent="0" marL="0">
+              <a:buNone/>
+            </a:pPr>
+            <a:r>
+              <a:rPr lang="en-US" sz="1220" dirty="0">
                 <a:solidFill>
                   <a:srgbClr val="17364A"/>
                 </a:solidFill>
@@ -7738,11 +7855,14 @@
               </a:rPr>
               <a:t>What happens when records are incorrectly merged or not merged?</a:t>
             </a:r>
-            <a:endParaRPr lang="en-US" sz="1380" dirty="0"/>
-          </a:p>
-          <a:p>
-            <a:r>
-              <a:rPr lang="en-US" sz="1380" dirty="0">
+            <a:endParaRPr lang="en-US" sz="1220" dirty="0"/>
+          </a:p>
+          <a:p>
+            <a:pPr indent="0" marL="0">
+              <a:buNone/>
+            </a:pPr>
+            <a:r>
+              <a:rPr lang="en-US" sz="1220" dirty="0">
                 <a:solidFill>
                   <a:srgbClr val="17364A"/>
                 </a:solidFill>
@@ -7752,7 +7872,7 @@
               </a:rPr>
               <a:t>Where should human review be required?</a:t>
             </a:r>
-            <a:endParaRPr lang="en-US" sz="1380" dirty="0"/>
+            <a:endParaRPr lang="en-US" sz="1220" dirty="0"/>
           </a:p>
         </p:txBody>
       </p:sp>
@@ -7830,17 +7950,17 @@
         </p:nvSpPr>
         <p:spPr>
           <a:xfrm>
-            <a:off x="7799832" y="5001768"/>
-            <a:ext cx="3145536" cy="502920"/>
-          </a:xfrm>
-          <a:prstGeom prst="rect">
-            <a:avLst/>
-          </a:prstGeom>
-          <a:noFill/>
-          <a:ln/>
-        </p:spPr>
-        <p:txBody>
-          <a:bodyPr wrap="square" lIns="0" tIns="0" rIns="0" bIns="0" rtlCol="0" anchor="t">
+            <a:off x="7799832" y="4974336"/>
+            <a:ext cx="3145536" cy="576072"/>
+          </a:xfrm>
+          <a:prstGeom prst="rect">
+            <a:avLst/>
+          </a:prstGeom>
+          <a:noFill/>
+          <a:ln/>
+        </p:spPr>
+        <p:txBody>
+          <a:bodyPr wrap="square" lIns="254" tIns="254" rIns="254" bIns="254" rtlCol="0" anchor="t">
             <a:normAutofit/>
           </a:bodyPr>
           <a:lstStyle/>
@@ -7849,7 +7969,7 @@
               <a:buNone/>
             </a:pPr>
             <a:r>
-              <a:rPr lang="en-US" sz="1550" dirty="0">
+              <a:rPr lang="en-US" sz="1320" dirty="0">
                 <a:solidFill>
                   <a:srgbClr val="17364A"/>
                 </a:solidFill>
@@ -7857,9 +7977,9 @@
                 <a:ea typeface="Aptos" pitchFamily="34" charset="-122"/>
                 <a:cs typeface="Aptos" pitchFamily="34" charset="-120"/>
               </a:rPr>
-              <a:t>Connect the concept to public health purpose, responsible use, required safeguards, documentation, and the next action a department should take.</a:t>
-            </a:r>
-            <a:endParaRPr lang="en-US" sz="1550" dirty="0"/>
+              <a:t>Connect the concept to public health purpose, responsible use, required safeguards, documentation, and the next action a.</a:t>
+            </a:r>
+            <a:endParaRPr lang="en-US" sz="1320" dirty="0"/>
           </a:p>
         </p:txBody>
       </p:sp>
@@ -8160,35 +8280,41 @@
           <a:ln/>
         </p:spPr>
         <p:txBody>
-          <a:bodyPr wrap="square" lIns="635" tIns="635" rIns="635" bIns="635" rtlCol="0" anchor="t">
+          <a:bodyPr wrap="square" lIns="1016" tIns="1016" rIns="1016" bIns="1016" rtlCol="0" anchor="t">
             <a:normAutofit/>
           </a:bodyPr>
           <a:lstStyle/>
           <a:p>
+            <a:pPr indent="0" marL="0">
+              <a:buNone/>
+            </a:pPr>
             <a:r>
               <a:rPr lang="en-US" sz="2100" dirty="0">
                 <a:solidFill>
-                  <a:srgbClr val="17364A"/>
-                </a:solidFill>
-                <a:latin typeface="Aptos" pitchFamily="34" charset="0"/>
-                <a:ea typeface="Aptos" pitchFamily="34" charset="-122"/>
-                <a:cs typeface="Aptos" pitchFamily="34" charset="-120"/>
-              </a:rPr>
-              <a:t>Create a linkage risk review for one AI-supported public health workflow.</a:t>
+                  <a:srgbClr val="003A63"/>
+                </a:solidFill>
+                <a:latin typeface="Aptos" pitchFamily="34" charset="0"/>
+                <a:ea typeface="Aptos" pitchFamily="34" charset="-122"/>
+                <a:cs typeface="Aptos" pitchFamily="34" charset="-120"/>
+              </a:rPr>
+              <a:t>• Create a linkage risk review for one AI-supported public health workflow.</a:t>
             </a:r>
             <a:endParaRPr lang="en-US" sz="2100" dirty="0"/>
           </a:p>
           <a:p>
+            <a:pPr indent="0" marL="0">
+              <a:buNone/>
+            </a:pPr>
             <a:r>
               <a:rPr lang="en-US" sz="2100" dirty="0">
                 <a:solidFill>
-                  <a:srgbClr val="17364A"/>
-                </a:solidFill>
-                <a:latin typeface="Aptos" pitchFamily="34" charset="0"/>
-                <a:ea typeface="Aptos" pitchFamily="34" charset="-122"/>
-                <a:cs typeface="Aptos" pitchFamily="34" charset="-120"/>
-              </a:rPr>
-              <a:t>Include the matching purpose, data sources, matching fields, known field quality issues, match method,.</a:t>
+                  <a:srgbClr val="003A63"/>
+                </a:solidFill>
+                <a:latin typeface="Aptos" pitchFamily="34" charset="0"/>
+                <a:ea typeface="Aptos" pitchFamily="34" charset="-122"/>
+                <a:cs typeface="Aptos" pitchFamily="34" charset="-120"/>
+              </a:rPr>
+              <a:t>• Include the matching purpose, data sources, matching fields, known field quality issues, match.</a:t>
             </a:r>
             <a:endParaRPr lang="en-US" sz="2100" dirty="0"/>
           </a:p>
@@ -8268,17 +8394,17 @@
         </p:nvSpPr>
         <p:spPr>
           <a:xfrm>
-            <a:off x="7799832" y="1828800"/>
-            <a:ext cx="3145536" cy="685800"/>
-          </a:xfrm>
-          <a:prstGeom prst="rect">
-            <a:avLst/>
-          </a:prstGeom>
-          <a:noFill/>
-          <a:ln/>
-        </p:spPr>
-        <p:txBody>
-          <a:bodyPr wrap="square" lIns="0" tIns="0" rIns="0" bIns="0" rtlCol="0" anchor="t">
+            <a:off x="7799832" y="1801368"/>
+            <a:ext cx="3145536" cy="758952"/>
+          </a:xfrm>
+          <a:prstGeom prst="rect">
+            <a:avLst/>
+          </a:prstGeom>
+          <a:noFill/>
+          <a:ln/>
+        </p:spPr>
+        <p:txBody>
+          <a:bodyPr wrap="square" lIns="254" tIns="254" rIns="254" bIns="254" rtlCol="0" anchor="t">
             <a:normAutofit/>
           </a:bodyPr>
           <a:lstStyle/>
@@ -8287,7 +8413,7 @@
               <a:buNone/>
             </a:pPr>
             <a:r>
-              <a:rPr lang="en-US" sz="1550" dirty="0">
+              <a:rPr lang="en-US" sz="1320" dirty="0">
                 <a:solidFill>
                   <a:srgbClr val="17364A"/>
                 </a:solidFill>
@@ -8297,7 +8423,7 @@
               </a:rPr>
               <a:t>Create a linkage risk review for one AI-supported public health workflow.</a:t>
             </a:r>
-            <a:endParaRPr lang="en-US" sz="1550" dirty="0"/>
+            <a:endParaRPr lang="en-US" sz="1320" dirty="0"/>
           </a:p>
         </p:txBody>
       </p:sp>
@@ -8385,13 +8511,16 @@
           <a:ln/>
         </p:spPr>
         <p:txBody>
-          <a:bodyPr wrap="square" lIns="254" tIns="254" rIns="254" bIns="254" rtlCol="0" anchor="t">
+          <a:bodyPr wrap="square" lIns="508" tIns="508" rIns="508" bIns="508" rtlCol="0" anchor="t">
             <a:normAutofit/>
           </a:bodyPr>
           <a:lstStyle/>
           <a:p>
-            <a:r>
-              <a:rPr lang="en-US" sz="1380" dirty="0">
+            <a:pPr indent="0" marL="0">
+              <a:buNone/>
+            </a:pPr>
+            <a:r>
+              <a:rPr lang="en-US" sz="1220" dirty="0">
                 <a:solidFill>
                   <a:srgbClr val="17364A"/>
                 </a:solidFill>
@@ -8399,13 +8528,16 @@
                 <a:ea typeface="Aptos" pitchFamily="34" charset="-122"/>
                 <a:cs typeface="Aptos" pitchFamily="34" charset="-120"/>
               </a:rPr>
-              <a:t>Create a linkage risk review for one AI-supported public health workflow.</a:t>
-            </a:r>
-            <a:endParaRPr lang="en-US" sz="1380" dirty="0"/>
-          </a:p>
-          <a:p>
-            <a:r>
-              <a:rPr lang="en-US" sz="1380" dirty="0">
+              <a:t>Create a linkage risk review for one AI-supported public health.</a:t>
+            </a:r>
+            <a:endParaRPr lang="en-US" sz="1220" dirty="0"/>
+          </a:p>
+          <a:p>
+            <a:pPr indent="0" marL="0">
+              <a:buNone/>
+            </a:pPr>
+            <a:r>
+              <a:rPr lang="en-US" sz="1220" dirty="0">
                 <a:solidFill>
                   <a:srgbClr val="17364A"/>
                 </a:solidFill>
@@ -8413,9 +8545,9 @@
                 <a:ea typeface="Aptos" pitchFamily="34" charset="-122"/>
                 <a:cs typeface="Aptos" pitchFamily="34" charset="-120"/>
               </a:rPr>
-              <a:t>Include the matching purpose, data sources, matching fields, known field quality issues,.</a:t>
-            </a:r>
-            <a:endParaRPr lang="en-US" sz="1380" dirty="0"/>
+              <a:t>Include the matching purpose, data sources, matching fields, known.</a:t>
+            </a:r>
+            <a:endParaRPr lang="en-US" sz="1220" dirty="0"/>
           </a:p>
         </p:txBody>
       </p:sp>
@@ -8493,17 +8625,17 @@
         </p:nvSpPr>
         <p:spPr>
           <a:xfrm>
-            <a:off x="7799832" y="5001768"/>
-            <a:ext cx="3145536" cy="502920"/>
-          </a:xfrm>
-          <a:prstGeom prst="rect">
-            <a:avLst/>
-          </a:prstGeom>
-          <a:noFill/>
-          <a:ln/>
-        </p:spPr>
-        <p:txBody>
-          <a:bodyPr wrap="square" lIns="0" tIns="0" rIns="0" bIns="0" rtlCol="0" anchor="t">
+            <a:off x="7799832" y="4974336"/>
+            <a:ext cx="3145536" cy="576072"/>
+          </a:xfrm>
+          <a:prstGeom prst="rect">
+            <a:avLst/>
+          </a:prstGeom>
+          <a:noFill/>
+          <a:ln/>
+        </p:spPr>
+        <p:txBody>
+          <a:bodyPr wrap="square" lIns="254" tIns="254" rIns="254" bIns="254" rtlCol="0" anchor="t">
             <a:normAutofit/>
           </a:bodyPr>
           <a:lstStyle/>
@@ -8512,7 +8644,7 @@
               <a:buNone/>
             </a:pPr>
             <a:r>
-              <a:rPr lang="en-US" sz="1550" dirty="0">
+              <a:rPr lang="en-US" sz="1320" dirty="0">
                 <a:solidFill>
                   <a:srgbClr val="17364A"/>
                 </a:solidFill>
@@ -8520,9 +8652,9 @@
                 <a:ea typeface="Aptos" pitchFamily="34" charset="-122"/>
                 <a:cs typeface="Aptos" pitchFamily="34" charset="-120"/>
               </a:rPr>
-              <a:t>Use the assignment to test whether you can explain the concept, apply it to a realistic public health situation, and identify what would need review before the work moves forward.</a:t>
-            </a:r>
-            <a:endParaRPr lang="en-US" sz="1550" dirty="0"/>
+              <a:t>Use the assignment to test whether you can explain the concept, apply it to a realistic public health situation, and.</a:t>
+            </a:r>
+            <a:endParaRPr lang="en-US" sz="1320" dirty="0"/>
           </a:p>
         </p:txBody>
       </p:sp>
@@ -8823,49 +8955,58 @@
           <a:ln/>
         </p:spPr>
         <p:txBody>
-          <a:bodyPr wrap="square" lIns="635" tIns="635" rIns="635" bIns="635" rtlCol="0" anchor="t">
+          <a:bodyPr wrap="square" lIns="1016" tIns="1016" rIns="1016" bIns="1016" rtlCol="0" anchor="t">
             <a:normAutofit/>
           </a:bodyPr>
           <a:lstStyle/>
           <a:p>
+            <a:pPr indent="0" marL="0">
+              <a:buNone/>
+            </a:pPr>
             <a:r>
               <a:rPr lang="en-US" sz="2100" dirty="0">
                 <a:solidFill>
-                  <a:srgbClr val="17364A"/>
-                </a:solidFill>
-                <a:latin typeface="Aptos" pitchFamily="34" charset="0"/>
-                <a:ea typeface="Aptos" pitchFamily="34" charset="-122"/>
-                <a:cs typeface="Aptos" pitchFamily="34" charset="-120"/>
-              </a:rPr>
-              <a:t>Linkage risk review</a:t>
+                  <a:srgbClr val="003A63"/>
+                </a:solidFill>
+                <a:latin typeface="Aptos" pitchFamily="34" charset="0"/>
+                <a:ea typeface="Aptos" pitchFamily="34" charset="-122"/>
+                <a:cs typeface="Aptos" pitchFamily="34" charset="-120"/>
+              </a:rPr>
+              <a:t>• Linkage risk review</a:t>
             </a:r>
             <a:endParaRPr lang="en-US" sz="2100" dirty="0"/>
           </a:p>
           <a:p>
+            <a:pPr indent="0" marL="0">
+              <a:buNone/>
+            </a:pPr>
             <a:r>
               <a:rPr lang="en-US" sz="2100" dirty="0">
                 <a:solidFill>
-                  <a:srgbClr val="17364A"/>
-                </a:solidFill>
-                <a:latin typeface="Aptos" pitchFamily="34" charset="0"/>
-                <a:ea typeface="Aptos" pitchFamily="34" charset="-122"/>
-                <a:cs typeface="Aptos" pitchFamily="34" charset="-120"/>
-              </a:rPr>
-              <a:t>Deduplication workflow map</a:t>
+                  <a:srgbClr val="003A63"/>
+                </a:solidFill>
+                <a:latin typeface="Aptos" pitchFamily="34" charset="0"/>
+                <a:ea typeface="Aptos" pitchFamily="34" charset="-122"/>
+                <a:cs typeface="Aptos" pitchFamily="34" charset="-120"/>
+              </a:rPr>
+              <a:t>• Deduplication workflow map</a:t>
             </a:r>
             <a:endParaRPr lang="en-US" sz="2100" dirty="0"/>
           </a:p>
           <a:p>
+            <a:pPr indent="0" marL="0">
+              <a:buNone/>
+            </a:pPr>
             <a:r>
               <a:rPr lang="en-US" sz="2100" dirty="0">
                 <a:solidFill>
-                  <a:srgbClr val="17364A"/>
-                </a:solidFill>
-                <a:latin typeface="Aptos" pitchFamily="34" charset="0"/>
-                <a:ea typeface="Aptos" pitchFamily="34" charset="-122"/>
-                <a:cs typeface="Aptos" pitchFamily="34" charset="-120"/>
-              </a:rPr>
-              <a:t>Match review questions</a:t>
+                  <a:srgbClr val="003A63"/>
+                </a:solidFill>
+                <a:latin typeface="Aptos" pitchFamily="34" charset="0"/>
+                <a:ea typeface="Aptos" pitchFamily="34" charset="-122"/>
+                <a:cs typeface="Aptos" pitchFamily="34" charset="-120"/>
+              </a:rPr>
+              <a:t>• Match review questions</a:t>
             </a:r>
             <a:endParaRPr lang="en-US" sz="2100" dirty="0"/>
           </a:p>
@@ -8945,17 +9086,17 @@
         </p:nvSpPr>
         <p:spPr>
           <a:xfrm>
-            <a:off x="7799832" y="1828800"/>
-            <a:ext cx="3145536" cy="685800"/>
-          </a:xfrm>
-          <a:prstGeom prst="rect">
-            <a:avLst/>
-          </a:prstGeom>
-          <a:noFill/>
-          <a:ln/>
-        </p:spPr>
-        <p:txBody>
-          <a:bodyPr wrap="square" lIns="0" tIns="0" rIns="0" bIns="0" rtlCol="0" anchor="t">
+            <a:off x="7799832" y="1801368"/>
+            <a:ext cx="3145536" cy="758952"/>
+          </a:xfrm>
+          <a:prstGeom prst="rect">
+            <a:avLst/>
+          </a:prstGeom>
+          <a:noFill/>
+          <a:ln/>
+        </p:spPr>
+        <p:txBody>
+          <a:bodyPr wrap="square" lIns="254" tIns="254" rIns="254" bIns="254" rtlCol="0" anchor="t">
             <a:normAutofit/>
           </a:bodyPr>
           <a:lstStyle/>
@@ -8964,7 +9105,7 @@
               <a:buNone/>
             </a:pPr>
             <a:r>
-              <a:rPr lang="en-US" sz="1550" dirty="0">
+              <a:rPr lang="en-US" sz="1320" dirty="0">
                 <a:solidFill>
                   <a:srgbClr val="17364A"/>
                 </a:solidFill>
@@ -8974,7 +9115,7 @@
               </a:rPr>
               <a:t>Linkage risk review</a:t>
             </a:r>
-            <a:endParaRPr lang="en-US" sz="1550" dirty="0"/>
+            <a:endParaRPr lang="en-US" sz="1320" dirty="0"/>
           </a:p>
         </p:txBody>
       </p:sp>
@@ -9062,13 +9203,16 @@
           <a:ln/>
         </p:spPr>
         <p:txBody>
-          <a:bodyPr wrap="square" lIns="254" tIns="254" rIns="254" bIns="254" rtlCol="0" anchor="t">
+          <a:bodyPr wrap="square" lIns="508" tIns="508" rIns="508" bIns="508" rtlCol="0" anchor="t">
             <a:normAutofit/>
           </a:bodyPr>
           <a:lstStyle/>
           <a:p>
-            <a:r>
-              <a:rPr lang="en-US" sz="1380" dirty="0">
+            <a:pPr indent="0" marL="0">
+              <a:buNone/>
+            </a:pPr>
+            <a:r>
+              <a:rPr lang="en-US" sz="1220" dirty="0">
                 <a:solidFill>
                   <a:srgbClr val="17364A"/>
                 </a:solidFill>
@@ -9078,11 +9222,14 @@
               </a:rPr>
               <a:t>Linkage risk review</a:t>
             </a:r>
-            <a:endParaRPr lang="en-US" sz="1380" dirty="0"/>
-          </a:p>
-          <a:p>
-            <a:r>
-              <a:rPr lang="en-US" sz="1380" dirty="0">
+            <a:endParaRPr lang="en-US" sz="1220" dirty="0"/>
+          </a:p>
+          <a:p>
+            <a:pPr indent="0" marL="0">
+              <a:buNone/>
+            </a:pPr>
+            <a:r>
+              <a:rPr lang="en-US" sz="1220" dirty="0">
                 <a:solidFill>
                   <a:srgbClr val="17364A"/>
                 </a:solidFill>
@@ -9092,11 +9239,14 @@
               </a:rPr>
               <a:t>Deduplication workflow map</a:t>
             </a:r>
-            <a:endParaRPr lang="en-US" sz="1380" dirty="0"/>
-          </a:p>
-          <a:p>
-            <a:r>
-              <a:rPr lang="en-US" sz="1380" dirty="0">
+            <a:endParaRPr lang="en-US" sz="1220" dirty="0"/>
+          </a:p>
+          <a:p>
+            <a:pPr indent="0" marL="0">
+              <a:buNone/>
+            </a:pPr>
+            <a:r>
+              <a:rPr lang="en-US" sz="1220" dirty="0">
                 <a:solidFill>
                   <a:srgbClr val="17364A"/>
                 </a:solidFill>
@@ -9106,7 +9256,7 @@
               </a:rPr>
               <a:t>Match review questions</a:t>
             </a:r>
-            <a:endParaRPr lang="en-US" sz="1380" dirty="0"/>
+            <a:endParaRPr lang="en-US" sz="1220" dirty="0"/>
           </a:p>
         </p:txBody>
       </p:sp>
@@ -9184,17 +9334,17 @@
         </p:nvSpPr>
         <p:spPr>
           <a:xfrm>
-            <a:off x="7799832" y="5001768"/>
-            <a:ext cx="3145536" cy="502920"/>
-          </a:xfrm>
-          <a:prstGeom prst="rect">
-            <a:avLst/>
-          </a:prstGeom>
-          <a:noFill/>
-          <a:ln/>
-        </p:spPr>
-        <p:txBody>
-          <a:bodyPr wrap="square" lIns="0" tIns="0" rIns="0" bIns="0" rtlCol="0" anchor="t">
+            <a:off x="7799832" y="4974336"/>
+            <a:ext cx="3145536" cy="576072"/>
+          </a:xfrm>
+          <a:prstGeom prst="rect">
+            <a:avLst/>
+          </a:prstGeom>
+          <a:noFill/>
+          <a:ln/>
+        </p:spPr>
+        <p:txBody>
+          <a:bodyPr wrap="square" lIns="254" tIns="254" rIns="254" bIns="254" rtlCol="0" anchor="t">
             <a:normAutofit/>
           </a:bodyPr>
           <a:lstStyle/>
@@ -9203,7 +9353,7 @@
               <a:buNone/>
             </a:pPr>
             <a:r>
-              <a:rPr lang="en-US" sz="1550" dirty="0">
+              <a:rPr lang="en-US" sz="1320" dirty="0">
                 <a:solidFill>
                   <a:srgbClr val="17364A"/>
                 </a:solidFill>
@@ -9211,9 +9361,9 @@
                 <a:ea typeface="Aptos" pitchFamily="34" charset="-122"/>
                 <a:cs typeface="Aptos" pitchFamily="34" charset="-120"/>
               </a:rPr>
-              <a:t>Connect the concept to public health purpose, responsible use, required safeguards, documentation, and the next action a department should take.</a:t>
-            </a:r>
-            <a:endParaRPr lang="en-US" sz="1550" dirty="0"/>
+              <a:t>Connect the concept to public health purpose, responsible use, required safeguards, documentation, and the next action a.</a:t>
+            </a:r>
+            <a:endParaRPr lang="en-US" sz="1320" dirty="0"/>
           </a:p>
         </p:txBody>
       </p:sp>
@@ -9514,21 +9664,24 @@
           <a:ln/>
         </p:spPr>
         <p:txBody>
-          <a:bodyPr wrap="square" lIns="635" tIns="635" rIns="635" bIns="635" rtlCol="0" anchor="t">
+          <a:bodyPr wrap="square" lIns="1016" tIns="1016" rIns="1016" bIns="1016" rtlCol="0" anchor="t">
             <a:normAutofit/>
           </a:bodyPr>
           <a:lstStyle/>
           <a:p>
+            <a:pPr indent="0" marL="0">
+              <a:buNone/>
+            </a:pPr>
             <a:r>
               <a:rPr lang="en-US" sz="2100" dirty="0">
                 <a:solidFill>
-                  <a:srgbClr val="17364A"/>
-                </a:solidFill>
-                <a:latin typeface="Aptos" pitchFamily="34" charset="0"/>
-                <a:ea typeface="Aptos" pitchFamily="34" charset="-122"/>
-                <a:cs typeface="Aptos" pitchFamily="34" charset="-120"/>
-              </a:rPr>
-              <a:t>Equity and escalation notes</a:t>
+                  <a:srgbClr val="003A63"/>
+                </a:solidFill>
+                <a:latin typeface="Aptos" pitchFamily="34" charset="0"/>
+                <a:ea typeface="Aptos" pitchFamily="34" charset="-122"/>
+                <a:cs typeface="Aptos" pitchFamily="34" charset="-120"/>
+              </a:rPr>
+              <a:t>• Equity and escalation notes</a:t>
             </a:r>
             <a:endParaRPr lang="en-US" sz="2100" dirty="0"/>
           </a:p>
@@ -9608,17 +9761,17 @@
         </p:nvSpPr>
         <p:spPr>
           <a:xfrm>
-            <a:off x="7799832" y="1828800"/>
-            <a:ext cx="3145536" cy="685800"/>
-          </a:xfrm>
-          <a:prstGeom prst="rect">
-            <a:avLst/>
-          </a:prstGeom>
-          <a:noFill/>
-          <a:ln/>
-        </p:spPr>
-        <p:txBody>
-          <a:bodyPr wrap="square" lIns="0" tIns="0" rIns="0" bIns="0" rtlCol="0" anchor="t">
+            <a:off x="7799832" y="1801368"/>
+            <a:ext cx="3145536" cy="758952"/>
+          </a:xfrm>
+          <a:prstGeom prst="rect">
+            <a:avLst/>
+          </a:prstGeom>
+          <a:noFill/>
+          <a:ln/>
+        </p:spPr>
+        <p:txBody>
+          <a:bodyPr wrap="square" lIns="254" tIns="254" rIns="254" bIns="254" rtlCol="0" anchor="t">
             <a:normAutofit/>
           </a:bodyPr>
           <a:lstStyle/>
@@ -9627,7 +9780,7 @@
               <a:buNone/>
             </a:pPr>
             <a:r>
-              <a:rPr lang="en-US" sz="1550" dirty="0">
+              <a:rPr lang="en-US" sz="1320" dirty="0">
                 <a:solidFill>
                   <a:srgbClr val="17364A"/>
                 </a:solidFill>
@@ -9637,7 +9790,7 @@
               </a:rPr>
               <a:t>Equity and escalation notes</a:t>
             </a:r>
-            <a:endParaRPr lang="en-US" sz="1550" dirty="0"/>
+            <a:endParaRPr lang="en-US" sz="1320" dirty="0"/>
           </a:p>
         </p:txBody>
       </p:sp>
@@ -9725,13 +9878,16 @@
           <a:ln/>
         </p:spPr>
         <p:txBody>
-          <a:bodyPr wrap="square" lIns="254" tIns="254" rIns="254" bIns="254" rtlCol="0" anchor="t">
+          <a:bodyPr wrap="square" lIns="508" tIns="508" rIns="508" bIns="508" rtlCol="0" anchor="t">
             <a:normAutofit/>
           </a:bodyPr>
           <a:lstStyle/>
           <a:p>
-            <a:r>
-              <a:rPr lang="en-US" sz="1380" dirty="0">
+            <a:pPr indent="0" marL="0">
+              <a:buNone/>
+            </a:pPr>
+            <a:r>
+              <a:rPr lang="en-US" sz="1220" dirty="0">
                 <a:solidFill>
                   <a:srgbClr val="17364A"/>
                 </a:solidFill>
@@ -9741,7 +9897,7 @@
               </a:rPr>
               <a:t>Equity and escalation notes</a:t>
             </a:r>
-            <a:endParaRPr lang="en-US" sz="1380" dirty="0"/>
+            <a:endParaRPr lang="en-US" sz="1220" dirty="0"/>
           </a:p>
         </p:txBody>
       </p:sp>
@@ -9819,17 +9975,17 @@
         </p:nvSpPr>
         <p:spPr>
           <a:xfrm>
-            <a:off x="7799832" y="5001768"/>
-            <a:ext cx="3145536" cy="502920"/>
-          </a:xfrm>
-          <a:prstGeom prst="rect">
-            <a:avLst/>
-          </a:prstGeom>
-          <a:noFill/>
-          <a:ln/>
-        </p:spPr>
-        <p:txBody>
-          <a:bodyPr wrap="square" lIns="0" tIns="0" rIns="0" bIns="0" rtlCol="0" anchor="t">
+            <a:off x="7799832" y="4974336"/>
+            <a:ext cx="3145536" cy="576072"/>
+          </a:xfrm>
+          <a:prstGeom prst="rect">
+            <a:avLst/>
+          </a:prstGeom>
+          <a:noFill/>
+          <a:ln/>
+        </p:spPr>
+        <p:txBody>
+          <a:bodyPr wrap="square" lIns="254" tIns="254" rIns="254" bIns="254" rtlCol="0" anchor="t">
             <a:normAutofit/>
           </a:bodyPr>
           <a:lstStyle/>
@@ -9838,7 +9994,7 @@
               <a:buNone/>
             </a:pPr>
             <a:r>
-              <a:rPr lang="en-US" sz="1550" dirty="0">
+              <a:rPr lang="en-US" sz="1320" dirty="0">
                 <a:solidFill>
                   <a:srgbClr val="17364A"/>
                 </a:solidFill>
@@ -9846,9 +10002,9 @@
                 <a:ea typeface="Aptos" pitchFamily="34" charset="-122"/>
                 <a:cs typeface="Aptos" pitchFamily="34" charset="-120"/>
               </a:rPr>
-              <a:t>Connect the concept to public health purpose, responsible use, required safeguards, documentation, and the next action a department should take.</a:t>
-            </a:r>
-            <a:endParaRPr lang="en-US" sz="1550" dirty="0"/>
+              <a:t>Connect the concept to public health purpose, responsible use, required safeguards, documentation, and the next action a.</a:t>
+            </a:r>
+            <a:endParaRPr lang="en-US" sz="1320" dirty="0"/>
           </a:p>
         </p:txBody>
       </p:sp>
@@ -10149,49 +10305,58 @@
           <a:ln/>
         </p:spPr>
         <p:txBody>
-          <a:bodyPr wrap="square" lIns="635" tIns="635" rIns="635" bIns="635" rtlCol="0" anchor="t">
+          <a:bodyPr wrap="square" lIns="1016" tIns="1016" rIns="1016" bIns="1016" rtlCol="0" anchor="t">
             <a:normAutofit/>
           </a:bodyPr>
           <a:lstStyle/>
           <a:p>
+            <a:pPr indent="0" marL="0">
+              <a:buNone/>
+            </a:pPr>
             <a:r>
               <a:rPr lang="en-US" sz="2100" dirty="0">
                 <a:solidFill>
-                  <a:srgbClr val="17364A"/>
-                </a:solidFill>
-                <a:latin typeface="Aptos" pitchFamily="34" charset="0"/>
-                <a:ea typeface="Aptos" pitchFamily="34" charset="-122"/>
-                <a:cs typeface="Aptos" pitchFamily="34" charset="-120"/>
-              </a:rPr>
-              <a:t>Record linkage and entity resolution help public health systems determine whether records refer to the same.</a:t>
+                  <a:srgbClr val="003A63"/>
+                </a:solidFill>
+                <a:latin typeface="Aptos" pitchFamily="34" charset="0"/>
+                <a:ea typeface="Aptos" pitchFamily="34" charset="-122"/>
+                <a:cs typeface="Aptos" pitchFamily="34" charset="-120"/>
+              </a:rPr>
+              <a:t>• Record linkage and entity resolution help public health systems determine whether records.</a:t>
             </a:r>
             <a:endParaRPr lang="en-US" sz="2100" dirty="0"/>
           </a:p>
           <a:p>
+            <a:pPr indent="0" marL="0">
+              <a:buNone/>
+            </a:pPr>
             <a:r>
               <a:rPr lang="en-US" sz="2100" dirty="0">
                 <a:solidFill>
-                  <a:srgbClr val="17364A"/>
-                </a:solidFill>
-                <a:latin typeface="Aptos" pitchFamily="34" charset="0"/>
-                <a:ea typeface="Aptos" pitchFamily="34" charset="-122"/>
-                <a:cs typeface="Aptos" pitchFamily="34" charset="-120"/>
-              </a:rPr>
-              <a:t>AI tools often rely on linked data even when the linkage process is invisible to users.</a:t>
+                  <a:srgbClr val="003A63"/>
+                </a:solidFill>
+                <a:latin typeface="Aptos" pitchFamily="34" charset="0"/>
+                <a:ea typeface="Aptos" pitchFamily="34" charset="-122"/>
+                <a:cs typeface="Aptos" pitchFamily="34" charset="-120"/>
+              </a:rPr>
+              <a:t>• AI tools often rely on linked data even when the linkage process is invisible to users.</a:t>
             </a:r>
             <a:endParaRPr lang="en-US" sz="2100" dirty="0"/>
           </a:p>
           <a:p>
+            <a:pPr indent="0" marL="0">
+              <a:buNone/>
+            </a:pPr>
             <a:r>
               <a:rPr lang="en-US" sz="2100" dirty="0">
                 <a:solidFill>
-                  <a:srgbClr val="17364A"/>
-                </a:solidFill>
-                <a:latin typeface="Aptos" pitchFamily="34" charset="0"/>
-                <a:ea typeface="Aptos" pitchFamily="34" charset="-122"/>
-                <a:cs typeface="Aptos" pitchFamily="34" charset="-120"/>
-              </a:rPr>
-              <a:t>This module teaches learners how matching and deduplication affect AI outputs, surveillance quality, and equity.</a:t>
+                  <a:srgbClr val="003A63"/>
+                </a:solidFill>
+                <a:latin typeface="Aptos" pitchFamily="34" charset="0"/>
+                <a:ea typeface="Aptos" pitchFamily="34" charset="-122"/>
+                <a:cs typeface="Aptos" pitchFamily="34" charset="-120"/>
+              </a:rPr>
+              <a:t>• This module teaches learners how matching and deduplication affect AI outputs, surveillance.</a:t>
             </a:r>
             <a:endParaRPr lang="en-US" sz="2100" dirty="0"/>
           </a:p>
@@ -10271,17 +10436,17 @@
         </p:nvSpPr>
         <p:spPr>
           <a:xfrm>
-            <a:off x="8074152" y="1920240"/>
-            <a:ext cx="2825496" cy="1280160"/>
-          </a:xfrm>
-          <a:prstGeom prst="rect">
-            <a:avLst/>
-          </a:prstGeom>
-          <a:noFill/>
-          <a:ln/>
-        </p:spPr>
-        <p:txBody>
-          <a:bodyPr wrap="square" lIns="0" tIns="0" rIns="0" bIns="0" rtlCol="0" anchor="t">
+            <a:off x="8074152" y="1892808"/>
+            <a:ext cx="2825496" cy="1353312"/>
+          </a:xfrm>
+          <a:prstGeom prst="rect">
+            <a:avLst/>
+          </a:prstGeom>
+          <a:noFill/>
+          <a:ln/>
+        </p:spPr>
+        <p:txBody>
+          <a:bodyPr wrap="square" lIns="254" tIns="254" rIns="254" bIns="254" rtlCol="0" anchor="t">
             <a:normAutofit/>
           </a:bodyPr>
           <a:lstStyle/>
@@ -10290,7 +10455,7 @@
               <a:buNone/>
             </a:pPr>
             <a:r>
-              <a:rPr lang="en-US" sz="1550" dirty="0">
+              <a:rPr lang="en-US" sz="1320" dirty="0">
                 <a:solidFill>
                   <a:srgbClr val="17364A"/>
                 </a:solidFill>
@@ -10298,43 +10463,9 @@
                 <a:ea typeface="Aptos" pitchFamily="34" charset="-122"/>
                 <a:cs typeface="Aptos" pitchFamily="34" charset="-120"/>
               </a:rPr>
-              <a:t>Level: applied/foundational</a:t>
-            </a:r>
-            <a:endParaRPr lang="en-US" sz="1550" dirty="0"/>
-          </a:p>
-          <a:p>
-            <a:pPr indent="0" marL="0">
-              <a:buNone/>
-            </a:pPr>
-            <a:r>
-              <a:rPr lang="en-US" sz="1550" dirty="0">
-                <a:solidFill>
-                  <a:srgbClr val="17364A"/>
-                </a:solidFill>
-                <a:latin typeface="Aptos" pitchFamily="34" charset="0"/>
-                <a:ea typeface="Aptos" pitchFamily="34" charset="-122"/>
-                <a:cs typeface="Aptos" pitchFamily="34" charset="-120"/>
-              </a:rPr>
-              <a:t>Primary track: Operations and Data Quality Track</a:t>
-            </a:r>
-            <a:endParaRPr lang="en-US" sz="1550" dirty="0"/>
-          </a:p>
-          <a:p>
-            <a:pPr indent="0" marL="0">
-              <a:buNone/>
-            </a:pPr>
-            <a:r>
-              <a:rPr lang="en-US" sz="1550" dirty="0">
-                <a:solidFill>
-                  <a:srgbClr val="17364A"/>
-                </a:solidFill>
-                <a:latin typeface="Aptos" pitchFamily="34" charset="0"/>
-                <a:ea typeface="Aptos" pitchFamily="34" charset="-122"/>
-                <a:cs typeface="Aptos" pitchFamily="34" charset="-120"/>
-              </a:rPr>
-              <a:t>Appears in tracks: technical-architecture</a:t>
-            </a:r>
-            <a:endParaRPr lang="en-US" sz="1550" dirty="0"/>
+              <a:t>Level: applied/foundational Primary track: Operations and Data Quality Track Appears in tracks: technical-architecture</a:t>
+            </a:r>
+            <a:endParaRPr lang="en-US" sz="1320" dirty="0"/>
           </a:p>
         </p:txBody>
       </p:sp>
@@ -10422,13 +10553,16 @@
           <a:ln/>
         </p:spPr>
         <p:txBody>
-          <a:bodyPr wrap="square" lIns="254" tIns="254" rIns="254" bIns="254" rtlCol="0" anchor="t">
+          <a:bodyPr wrap="square" lIns="508" tIns="508" rIns="508" bIns="508" rtlCol="0" anchor="t">
             <a:normAutofit/>
           </a:bodyPr>
           <a:lstStyle/>
           <a:p>
-            <a:r>
-              <a:rPr lang="en-US" sz="1380" dirty="0">
+            <a:pPr indent="0" marL="0">
+              <a:buNone/>
+            </a:pPr>
+            <a:r>
+              <a:rPr lang="en-US" sz="1220" dirty="0">
                 <a:solidFill>
                   <a:srgbClr val="17364A"/>
                 </a:solidFill>
@@ -10438,11 +10572,14 @@
               </a:rPr>
               <a:t>Read the module for shared vocabulary and context.</a:t>
             </a:r>
-            <a:endParaRPr lang="en-US" sz="1380" dirty="0"/>
-          </a:p>
-          <a:p>
-            <a:r>
-              <a:rPr lang="en-US" sz="1380" dirty="0">
+            <a:endParaRPr lang="en-US" sz="1220" dirty="0"/>
+          </a:p>
+          <a:p>
+            <a:pPr indent="0" marL="0">
+              <a:buNone/>
+            </a:pPr>
+            <a:r>
+              <a:rPr lang="en-US" sz="1220" dirty="0">
                 <a:solidFill>
                   <a:srgbClr val="17364A"/>
                 </a:solidFill>
@@ -10452,11 +10589,14 @@
               </a:rPr>
               <a:t>Complete the practical exercise to apply the concept.</a:t>
             </a:r>
-            <a:endParaRPr lang="en-US" sz="1380" dirty="0"/>
-          </a:p>
-          <a:p>
-            <a:r>
-              <a:rPr lang="en-US" sz="1380" dirty="0">
+            <a:endParaRPr lang="en-US" sz="1220" dirty="0"/>
+          </a:p>
+          <a:p>
+            <a:pPr indent="0" marL="0">
+              <a:buNone/>
+            </a:pPr>
+            <a:r>
+              <a:rPr lang="en-US" sz="1220" dirty="0">
                 <a:solidFill>
                   <a:srgbClr val="17364A"/>
                 </a:solidFill>
@@ -10466,7 +10606,7 @@
               </a:rPr>
               <a:t>Use the notes and references for deeper review.</a:t>
             </a:r>
-            <a:endParaRPr lang="en-US" sz="1380" dirty="0"/>
+            <a:endParaRPr lang="en-US" sz="1220" dirty="0"/>
           </a:p>
         </p:txBody>
       </p:sp>
@@ -10767,49 +10907,58 @@
           <a:ln/>
         </p:spPr>
         <p:txBody>
-          <a:bodyPr wrap="square" lIns="635" tIns="635" rIns="635" bIns="635" rtlCol="0" anchor="t">
+          <a:bodyPr wrap="square" lIns="1016" tIns="1016" rIns="1016" bIns="1016" rtlCol="0" anchor="t">
             <a:normAutofit/>
           </a:bodyPr>
           <a:lstStyle/>
           <a:p>
+            <a:pPr indent="0" marL="0">
+              <a:buNone/>
+            </a:pPr>
             <a:r>
               <a:rPr lang="en-US" sz="2100" dirty="0">
                 <a:solidFill>
-                  <a:srgbClr val="17364A"/>
-                </a:solidFill>
-                <a:latin typeface="Aptos" pitchFamily="34" charset="0"/>
-                <a:ea typeface="Aptos" pitchFamily="34" charset="-122"/>
-                <a:cs typeface="Aptos" pitchFamily="34" charset="-120"/>
-              </a:rPr>
-              <a:t>Linkage risk review</a:t>
+                  <a:srgbClr val="003A63"/>
+                </a:solidFill>
+                <a:latin typeface="Aptos" pitchFamily="34" charset="0"/>
+                <a:ea typeface="Aptos" pitchFamily="34" charset="-122"/>
+                <a:cs typeface="Aptos" pitchFamily="34" charset="-120"/>
+              </a:rPr>
+              <a:t>• Linkage risk review</a:t>
             </a:r>
             <a:endParaRPr lang="en-US" sz="2100" dirty="0"/>
           </a:p>
           <a:p>
+            <a:pPr indent="0" marL="0">
+              <a:buNone/>
+            </a:pPr>
             <a:r>
               <a:rPr lang="en-US" sz="2100" dirty="0">
                 <a:solidFill>
-                  <a:srgbClr val="17364A"/>
-                </a:solidFill>
-                <a:latin typeface="Aptos" pitchFamily="34" charset="0"/>
-                <a:ea typeface="Aptos" pitchFamily="34" charset="-122"/>
-                <a:cs typeface="Aptos" pitchFamily="34" charset="-120"/>
-              </a:rPr>
-              <a:t>Deduplication workflow map</a:t>
+                  <a:srgbClr val="003A63"/>
+                </a:solidFill>
+                <a:latin typeface="Aptos" pitchFamily="34" charset="0"/>
+                <a:ea typeface="Aptos" pitchFamily="34" charset="-122"/>
+                <a:cs typeface="Aptos" pitchFamily="34" charset="-120"/>
+              </a:rPr>
+              <a:t>• Deduplication workflow map</a:t>
             </a:r>
             <a:endParaRPr lang="en-US" sz="2100" dirty="0"/>
           </a:p>
           <a:p>
+            <a:pPr indent="0" marL="0">
+              <a:buNone/>
+            </a:pPr>
             <a:r>
               <a:rPr lang="en-US" sz="2100" dirty="0">
                 <a:solidFill>
-                  <a:srgbClr val="17364A"/>
-                </a:solidFill>
-                <a:latin typeface="Aptos" pitchFamily="34" charset="0"/>
-                <a:ea typeface="Aptos" pitchFamily="34" charset="-122"/>
-                <a:cs typeface="Aptos" pitchFamily="34" charset="-120"/>
-              </a:rPr>
-              <a:t>Match review questions</a:t>
+                  <a:srgbClr val="003A63"/>
+                </a:solidFill>
+                <a:latin typeface="Aptos" pitchFamily="34" charset="0"/>
+                <a:ea typeface="Aptos" pitchFamily="34" charset="-122"/>
+                <a:cs typeface="Aptos" pitchFamily="34" charset="-120"/>
+              </a:rPr>
+              <a:t>• Match review questions</a:t>
             </a:r>
             <a:endParaRPr lang="en-US" sz="2100" dirty="0"/>
           </a:p>
@@ -10889,17 +11038,17 @@
         </p:nvSpPr>
         <p:spPr>
           <a:xfrm>
-            <a:off x="7799832" y="1828800"/>
-            <a:ext cx="3145536" cy="685800"/>
-          </a:xfrm>
-          <a:prstGeom prst="rect">
-            <a:avLst/>
-          </a:prstGeom>
-          <a:noFill/>
-          <a:ln/>
-        </p:spPr>
-        <p:txBody>
-          <a:bodyPr wrap="square" lIns="0" tIns="0" rIns="0" bIns="0" rtlCol="0" anchor="t">
+            <a:off x="7799832" y="1801368"/>
+            <a:ext cx="3145536" cy="758952"/>
+          </a:xfrm>
+          <a:prstGeom prst="rect">
+            <a:avLst/>
+          </a:prstGeom>
+          <a:noFill/>
+          <a:ln/>
+        </p:spPr>
+        <p:txBody>
+          <a:bodyPr wrap="square" lIns="254" tIns="254" rIns="254" bIns="254" rtlCol="0" anchor="t">
             <a:normAutofit/>
           </a:bodyPr>
           <a:lstStyle/>
@@ -10908,7 +11057,7 @@
               <a:buNone/>
             </a:pPr>
             <a:r>
-              <a:rPr lang="en-US" sz="1550" dirty="0">
+              <a:rPr lang="en-US" sz="1320" dirty="0">
                 <a:solidFill>
                   <a:srgbClr val="17364A"/>
                 </a:solidFill>
@@ -10918,7 +11067,7 @@
               </a:rPr>
               <a:t>Linkage risk review</a:t>
             </a:r>
-            <a:endParaRPr lang="en-US" sz="1550" dirty="0"/>
+            <a:endParaRPr lang="en-US" sz="1320" dirty="0"/>
           </a:p>
         </p:txBody>
       </p:sp>
@@ -11006,13 +11155,16 @@
           <a:ln/>
         </p:spPr>
         <p:txBody>
-          <a:bodyPr wrap="square" lIns="254" tIns="254" rIns="254" bIns="254" rtlCol="0" anchor="t">
+          <a:bodyPr wrap="square" lIns="508" tIns="508" rIns="508" bIns="508" rtlCol="0" anchor="t">
             <a:normAutofit/>
           </a:bodyPr>
           <a:lstStyle/>
           <a:p>
-            <a:r>
-              <a:rPr lang="en-US" sz="1380" dirty="0">
+            <a:pPr indent="0" marL="0">
+              <a:buNone/>
+            </a:pPr>
+            <a:r>
+              <a:rPr lang="en-US" sz="1220" dirty="0">
                 <a:solidFill>
                   <a:srgbClr val="17364A"/>
                 </a:solidFill>
@@ -11022,11 +11174,14 @@
               </a:rPr>
               <a:t>Linkage risk review</a:t>
             </a:r>
-            <a:endParaRPr lang="en-US" sz="1380" dirty="0"/>
-          </a:p>
-          <a:p>
-            <a:r>
-              <a:rPr lang="en-US" sz="1380" dirty="0">
+            <a:endParaRPr lang="en-US" sz="1220" dirty="0"/>
+          </a:p>
+          <a:p>
+            <a:pPr indent="0" marL="0">
+              <a:buNone/>
+            </a:pPr>
+            <a:r>
+              <a:rPr lang="en-US" sz="1220" dirty="0">
                 <a:solidFill>
                   <a:srgbClr val="17364A"/>
                 </a:solidFill>
@@ -11036,11 +11191,14 @@
               </a:rPr>
               <a:t>Deduplication workflow map</a:t>
             </a:r>
-            <a:endParaRPr lang="en-US" sz="1380" dirty="0"/>
-          </a:p>
-          <a:p>
-            <a:r>
-              <a:rPr lang="en-US" sz="1380" dirty="0">
+            <a:endParaRPr lang="en-US" sz="1220" dirty="0"/>
+          </a:p>
+          <a:p>
+            <a:pPr indent="0" marL="0">
+              <a:buNone/>
+            </a:pPr>
+            <a:r>
+              <a:rPr lang="en-US" sz="1220" dirty="0">
                 <a:solidFill>
                   <a:srgbClr val="17364A"/>
                 </a:solidFill>
@@ -11050,7 +11208,7 @@
               </a:rPr>
               <a:t>Match review questions</a:t>
             </a:r>
-            <a:endParaRPr lang="en-US" sz="1380" dirty="0"/>
+            <a:endParaRPr lang="en-US" sz="1220" dirty="0"/>
           </a:p>
         </p:txBody>
       </p:sp>
@@ -11128,17 +11286,17 @@
         </p:nvSpPr>
         <p:spPr>
           <a:xfrm>
-            <a:off x="7799832" y="5001768"/>
-            <a:ext cx="3145536" cy="502920"/>
-          </a:xfrm>
-          <a:prstGeom prst="rect">
-            <a:avLst/>
-          </a:prstGeom>
-          <a:noFill/>
-          <a:ln/>
-        </p:spPr>
-        <p:txBody>
-          <a:bodyPr wrap="square" lIns="0" tIns="0" rIns="0" bIns="0" rtlCol="0" anchor="t">
+            <a:off x="7799832" y="4974336"/>
+            <a:ext cx="3145536" cy="576072"/>
+          </a:xfrm>
+          <a:prstGeom prst="rect">
+            <a:avLst/>
+          </a:prstGeom>
+          <a:noFill/>
+          <a:ln/>
+        </p:spPr>
+        <p:txBody>
+          <a:bodyPr wrap="square" lIns="254" tIns="254" rIns="254" bIns="254" rtlCol="0" anchor="t">
             <a:normAutofit/>
           </a:bodyPr>
           <a:lstStyle/>
@@ -11147,7 +11305,7 @@
               <a:buNone/>
             </a:pPr>
             <a:r>
-              <a:rPr lang="en-US" sz="1550" dirty="0">
+              <a:rPr lang="en-US" sz="1320" dirty="0">
                 <a:solidFill>
                   <a:srgbClr val="17364A"/>
                 </a:solidFill>
@@ -11155,9 +11313,9 @@
                 <a:ea typeface="Aptos" pitchFamily="34" charset="-122"/>
                 <a:cs typeface="Aptos" pitchFamily="34" charset="-120"/>
               </a:rPr>
-              <a:t>Use the assignment to test whether you can explain the concept, apply it to a realistic public health situation, and identify what would need review before the work moves forward.</a:t>
-            </a:r>
-            <a:endParaRPr lang="en-US" sz="1550" dirty="0"/>
+              <a:t>Use the assignment to test whether you can explain the concept, apply it to a realistic public health situation, and.</a:t>
+            </a:r>
+            <a:endParaRPr lang="en-US" sz="1320" dirty="0"/>
           </a:p>
         </p:txBody>
       </p:sp>
@@ -11458,49 +11616,58 @@
           <a:ln/>
         </p:spPr>
         <p:txBody>
-          <a:bodyPr wrap="square" lIns="635" tIns="635" rIns="635" bIns="635" rtlCol="0" anchor="t">
+          <a:bodyPr wrap="square" lIns="1016" tIns="1016" rIns="1016" bIns="1016" rtlCol="0" anchor="t">
             <a:normAutofit/>
           </a:bodyPr>
           <a:lstStyle/>
           <a:p>
+            <a:pPr indent="0" marL="0">
+              <a:buNone/>
+            </a:pPr>
             <a:r>
               <a:rPr lang="en-US" sz="2100" dirty="0">
                 <a:solidFill>
-                  <a:srgbClr val="17364A"/>
-                </a:solidFill>
-                <a:latin typeface="Aptos" pitchFamily="34" charset="0"/>
-                <a:ea typeface="Aptos" pitchFamily="34" charset="-122"/>
-                <a:cs typeface="Aptos" pitchFamily="34" charset="-120"/>
-              </a:rPr>
-              <a:t>1. What is a false match?</a:t>
+                  <a:srgbClr val="003A63"/>
+                </a:solidFill>
+                <a:latin typeface="Aptos" pitchFamily="34" charset="0"/>
+                <a:ea typeface="Aptos" pitchFamily="34" charset="-122"/>
+                <a:cs typeface="Aptos" pitchFamily="34" charset="-120"/>
+              </a:rPr>
+              <a:t>• 1. What is a false match?</a:t>
             </a:r>
             <a:endParaRPr lang="en-US" sz="2100" dirty="0"/>
           </a:p>
           <a:p>
+            <a:pPr indent="0" marL="0">
+              <a:buNone/>
+            </a:pPr>
             <a:r>
               <a:rPr lang="en-US" sz="2100" dirty="0">
                 <a:solidFill>
-                  <a:srgbClr val="17364A"/>
-                </a:solidFill>
-                <a:latin typeface="Aptos" pitchFamily="34" charset="0"/>
-                <a:ea typeface="Aptos" pitchFamily="34" charset="-122"/>
-                <a:cs typeface="Aptos" pitchFamily="34" charset="-120"/>
-              </a:rPr>
-              <a:t>2. What is a missed match?</a:t>
+                  <a:srgbClr val="003A63"/>
+                </a:solidFill>
+                <a:latin typeface="Aptos" pitchFamily="34" charset="0"/>
+                <a:ea typeface="Aptos" pitchFamily="34" charset="-122"/>
+                <a:cs typeface="Aptos" pitchFamily="34" charset="-120"/>
+              </a:rPr>
+              <a:t>• 2. What is a missed match?</a:t>
             </a:r>
             <a:endParaRPr lang="en-US" sz="2100" dirty="0"/>
           </a:p>
           <a:p>
+            <a:pPr indent="0" marL="0">
+              <a:buNone/>
+            </a:pPr>
             <a:r>
               <a:rPr lang="en-US" sz="2100" dirty="0">
                 <a:solidFill>
-                  <a:srgbClr val="17364A"/>
-                </a:solidFill>
-                <a:latin typeface="Aptos" pitchFamily="34" charset="0"/>
-                <a:ea typeface="Aptos" pitchFamily="34" charset="-122"/>
-                <a:cs typeface="Aptos" pitchFamily="34" charset="-120"/>
-              </a:rPr>
-              <a:t>3. Why does record linkage matter for AI?</a:t>
+                  <a:srgbClr val="003A63"/>
+                </a:solidFill>
+                <a:latin typeface="Aptos" pitchFamily="34" charset="0"/>
+                <a:ea typeface="Aptos" pitchFamily="34" charset="-122"/>
+                <a:cs typeface="Aptos" pitchFamily="34" charset="-120"/>
+              </a:rPr>
+              <a:t>• 3. Why does record linkage matter for AI?</a:t>
             </a:r>
             <a:endParaRPr lang="en-US" sz="2100" dirty="0"/>
           </a:p>
@@ -11580,17 +11747,17 @@
         </p:nvSpPr>
         <p:spPr>
           <a:xfrm>
-            <a:off x="7799832" y="1828800"/>
-            <a:ext cx="3145536" cy="685800"/>
-          </a:xfrm>
-          <a:prstGeom prst="rect">
-            <a:avLst/>
-          </a:prstGeom>
-          <a:noFill/>
-          <a:ln/>
-        </p:spPr>
-        <p:txBody>
-          <a:bodyPr wrap="square" lIns="0" tIns="0" rIns="0" bIns="0" rtlCol="0" anchor="t">
+            <a:off x="7799832" y="1801368"/>
+            <a:ext cx="3145536" cy="758952"/>
+          </a:xfrm>
+          <a:prstGeom prst="rect">
+            <a:avLst/>
+          </a:prstGeom>
+          <a:noFill/>
+          <a:ln/>
+        </p:spPr>
+        <p:txBody>
+          <a:bodyPr wrap="square" lIns="254" tIns="254" rIns="254" bIns="254" rtlCol="0" anchor="t">
             <a:normAutofit/>
           </a:bodyPr>
           <a:lstStyle/>
@@ -11599,7 +11766,7 @@
               <a:buNone/>
             </a:pPr>
             <a:r>
-              <a:rPr lang="en-US" sz="1550" dirty="0">
+              <a:rPr lang="en-US" sz="1320" dirty="0">
                 <a:solidFill>
                   <a:srgbClr val="17364A"/>
                 </a:solidFill>
@@ -11609,7 +11776,7 @@
               </a:rPr>
               <a:t>1. What is a false match?</a:t>
             </a:r>
-            <a:endParaRPr lang="en-US" sz="1550" dirty="0"/>
+            <a:endParaRPr lang="en-US" sz="1320" dirty="0"/>
           </a:p>
         </p:txBody>
       </p:sp>
@@ -11697,13 +11864,16 @@
           <a:ln/>
         </p:spPr>
         <p:txBody>
-          <a:bodyPr wrap="square" lIns="254" tIns="254" rIns="254" bIns="254" rtlCol="0" anchor="t">
+          <a:bodyPr wrap="square" lIns="508" tIns="508" rIns="508" bIns="508" rtlCol="0" anchor="t">
             <a:normAutofit/>
           </a:bodyPr>
           <a:lstStyle/>
           <a:p>
-            <a:r>
-              <a:rPr lang="en-US" sz="1380" dirty="0">
+            <a:pPr indent="0" marL="0">
+              <a:buNone/>
+            </a:pPr>
+            <a:r>
+              <a:rPr lang="en-US" sz="1220" dirty="0">
                 <a:solidFill>
                   <a:srgbClr val="17364A"/>
                 </a:solidFill>
@@ -11713,11 +11883,14 @@
               </a:rPr>
               <a:t>1.</a:t>
             </a:r>
-            <a:endParaRPr lang="en-US" sz="1380" dirty="0"/>
-          </a:p>
-          <a:p>
-            <a:r>
-              <a:rPr lang="en-US" sz="1380" dirty="0">
+            <a:endParaRPr lang="en-US" sz="1220" dirty="0"/>
+          </a:p>
+          <a:p>
+            <a:pPr indent="0" marL="0">
+              <a:buNone/>
+            </a:pPr>
+            <a:r>
+              <a:rPr lang="en-US" sz="1220" dirty="0">
                 <a:solidFill>
                   <a:srgbClr val="17364A"/>
                 </a:solidFill>
@@ -11727,11 +11900,14 @@
               </a:rPr>
               <a:t>What is a false match?</a:t>
             </a:r>
-            <a:endParaRPr lang="en-US" sz="1380" dirty="0"/>
-          </a:p>
-          <a:p>
-            <a:r>
-              <a:rPr lang="en-US" sz="1380" dirty="0">
+            <a:endParaRPr lang="en-US" sz="1220" dirty="0"/>
+          </a:p>
+          <a:p>
+            <a:pPr indent="0" marL="0">
+              <a:buNone/>
+            </a:pPr>
+            <a:r>
+              <a:rPr lang="en-US" sz="1220" dirty="0">
                 <a:solidFill>
                   <a:srgbClr val="17364A"/>
                 </a:solidFill>
@@ -11741,7 +11917,7 @@
               </a:rPr>
               <a:t>2.</a:t>
             </a:r>
-            <a:endParaRPr lang="en-US" sz="1380" dirty="0"/>
+            <a:endParaRPr lang="en-US" sz="1220" dirty="0"/>
           </a:p>
         </p:txBody>
       </p:sp>
@@ -11819,17 +11995,17 @@
         </p:nvSpPr>
         <p:spPr>
           <a:xfrm>
-            <a:off x="7799832" y="5001768"/>
-            <a:ext cx="3145536" cy="502920"/>
-          </a:xfrm>
-          <a:prstGeom prst="rect">
-            <a:avLst/>
-          </a:prstGeom>
-          <a:noFill/>
-          <a:ln/>
-        </p:spPr>
-        <p:txBody>
-          <a:bodyPr wrap="square" lIns="0" tIns="0" rIns="0" bIns="0" rtlCol="0" anchor="t">
+            <a:off x="7799832" y="4974336"/>
+            <a:ext cx="3145536" cy="576072"/>
+          </a:xfrm>
+          <a:prstGeom prst="rect">
+            <a:avLst/>
+          </a:prstGeom>
+          <a:noFill/>
+          <a:ln/>
+        </p:spPr>
+        <p:txBody>
+          <a:bodyPr wrap="square" lIns="254" tIns="254" rIns="254" bIns="254" rtlCol="0" anchor="t">
             <a:normAutofit/>
           </a:bodyPr>
           <a:lstStyle/>
@@ -11838,7 +12014,7 @@
               <a:buNone/>
             </a:pPr>
             <a:r>
-              <a:rPr lang="en-US" sz="1550" dirty="0">
+              <a:rPr lang="en-US" sz="1320" dirty="0">
                 <a:solidFill>
                   <a:srgbClr val="17364A"/>
                 </a:solidFill>
@@ -11846,9 +12022,9 @@
                 <a:ea typeface="Aptos" pitchFamily="34" charset="-122"/>
                 <a:cs typeface="Aptos" pitchFamily="34" charset="-120"/>
               </a:rPr>
-              <a:t>Use the assignment to test whether you can explain the concept, apply it to a realistic public health situation, and identify what would need review before the work moves forward.</a:t>
-            </a:r>
-            <a:endParaRPr lang="en-US" sz="1550" dirty="0"/>
+              <a:t>Use the assignment to test whether you can explain the concept, apply it to a realistic public health situation, and.</a:t>
+            </a:r>
+            <a:endParaRPr lang="en-US" sz="1320" dirty="0"/>
           </a:p>
         </p:txBody>
       </p:sp>
@@ -12149,49 +12325,58 @@
           <a:ln/>
         </p:spPr>
         <p:txBody>
-          <a:bodyPr wrap="square" lIns="635" tIns="635" rIns="635" bIns="635" rtlCol="0" anchor="t">
+          <a:bodyPr wrap="square" lIns="1016" tIns="1016" rIns="1016" bIns="1016" rtlCol="0" anchor="t">
             <a:normAutofit/>
           </a:bodyPr>
           <a:lstStyle/>
           <a:p>
+            <a:pPr indent="0" marL="0">
+              <a:buNone/>
+            </a:pPr>
             <a:r>
               <a:rPr lang="en-US" sz="2100" dirty="0">
                 <a:solidFill>
-                  <a:srgbClr val="17364A"/>
-                </a:solidFill>
-                <a:latin typeface="Aptos" pitchFamily="34" charset="0"/>
-                <a:ea typeface="Aptos" pitchFamily="34" charset="-122"/>
-                <a:cs typeface="Aptos" pitchFamily="34" charset="-120"/>
-              </a:rPr>
-              <a:t>Public health IIS and surveillance data quality resources</a:t>
+                  <a:srgbClr val="003A63"/>
+                </a:solidFill>
+                <a:latin typeface="Aptos" pitchFamily="34" charset="0"/>
+                <a:ea typeface="Aptos" pitchFamily="34" charset="-122"/>
+                <a:cs typeface="Aptos" pitchFamily="34" charset="-120"/>
+              </a:rPr>
+              <a:t>• Public health IIS and surveillance data quality resources</a:t>
             </a:r>
             <a:endParaRPr lang="en-US" sz="2100" dirty="0"/>
           </a:p>
           <a:p>
+            <a:pPr indent="0" marL="0">
+              <a:buNone/>
+            </a:pPr>
             <a:r>
               <a:rPr lang="en-US" sz="2100" dirty="0">
                 <a:solidFill>
-                  <a:srgbClr val="17364A"/>
-                </a:solidFill>
-                <a:latin typeface="Aptos" pitchFamily="34" charset="0"/>
-                <a:ea typeface="Aptos" pitchFamily="34" charset="-122"/>
-                <a:cs typeface="Aptos" pitchFamily="34" charset="-120"/>
-              </a:rPr>
-              <a:t>CDC data modernization resources</a:t>
+                  <a:srgbClr val="003A63"/>
+                </a:solidFill>
+                <a:latin typeface="Aptos" pitchFamily="34" charset="0"/>
+                <a:ea typeface="Aptos" pitchFamily="34" charset="-122"/>
+                <a:cs typeface="Aptos" pitchFamily="34" charset="-120"/>
+              </a:rPr>
+              <a:t>• CDC data modernization resources</a:t>
             </a:r>
             <a:endParaRPr lang="en-US" sz="2100" dirty="0"/>
           </a:p>
           <a:p>
+            <a:pPr indent="0" marL="0">
+              <a:buNone/>
+            </a:pPr>
             <a:r>
               <a:rPr lang="en-US" sz="2100" dirty="0">
                 <a:solidFill>
-                  <a:srgbClr val="17364A"/>
-                </a:solidFill>
-                <a:latin typeface="Aptos" pitchFamily="34" charset="0"/>
-                <a:ea typeface="Aptos" pitchFamily="34" charset="-122"/>
-                <a:cs typeface="Aptos" pitchFamily="34" charset="-120"/>
-              </a:rPr>
-              <a:t>Health information exchange data quality materials</a:t>
+                  <a:srgbClr val="003A63"/>
+                </a:solidFill>
+                <a:latin typeface="Aptos" pitchFamily="34" charset="0"/>
+                <a:ea typeface="Aptos" pitchFamily="34" charset="-122"/>
+                <a:cs typeface="Aptos" pitchFamily="34" charset="-120"/>
+              </a:rPr>
+              <a:t>• Health information exchange data quality materials</a:t>
             </a:r>
             <a:endParaRPr lang="en-US" sz="2100" dirty="0"/>
           </a:p>
@@ -12271,17 +12456,17 @@
         </p:nvSpPr>
         <p:spPr>
           <a:xfrm>
-            <a:off x="7799832" y="1828800"/>
-            <a:ext cx="3145536" cy="685800"/>
-          </a:xfrm>
-          <a:prstGeom prst="rect">
-            <a:avLst/>
-          </a:prstGeom>
-          <a:noFill/>
-          <a:ln/>
-        </p:spPr>
-        <p:txBody>
-          <a:bodyPr wrap="square" lIns="0" tIns="0" rIns="0" bIns="0" rtlCol="0" anchor="t">
+            <a:off x="7799832" y="1801368"/>
+            <a:ext cx="3145536" cy="758952"/>
+          </a:xfrm>
+          <a:prstGeom prst="rect">
+            <a:avLst/>
+          </a:prstGeom>
+          <a:noFill/>
+          <a:ln/>
+        </p:spPr>
+        <p:txBody>
+          <a:bodyPr wrap="square" lIns="254" tIns="254" rIns="254" bIns="254" rtlCol="0" anchor="t">
             <a:normAutofit/>
           </a:bodyPr>
           <a:lstStyle/>
@@ -12290,7 +12475,7 @@
               <a:buNone/>
             </a:pPr>
             <a:r>
-              <a:rPr lang="en-US" sz="1550" dirty="0">
+              <a:rPr lang="en-US" sz="1320" dirty="0">
                 <a:solidFill>
                   <a:srgbClr val="17364A"/>
                 </a:solidFill>
@@ -12300,7 +12485,7 @@
               </a:rPr>
               <a:t>Public health IIS and surveillance data quality resources</a:t>
             </a:r>
-            <a:endParaRPr lang="en-US" sz="1550" dirty="0"/>
+            <a:endParaRPr lang="en-US" sz="1320" dirty="0"/>
           </a:p>
         </p:txBody>
       </p:sp>
@@ -12388,13 +12573,16 @@
           <a:ln/>
         </p:spPr>
         <p:txBody>
-          <a:bodyPr wrap="square" lIns="254" tIns="254" rIns="254" bIns="254" rtlCol="0" anchor="t">
+          <a:bodyPr wrap="square" lIns="508" tIns="508" rIns="508" bIns="508" rtlCol="0" anchor="t">
             <a:normAutofit/>
           </a:bodyPr>
           <a:lstStyle/>
           <a:p>
-            <a:r>
-              <a:rPr lang="en-US" sz="1380" dirty="0">
+            <a:pPr indent="0" marL="0">
+              <a:buNone/>
+            </a:pPr>
+            <a:r>
+              <a:rPr lang="en-US" sz="1220" dirty="0">
                 <a:solidFill>
                   <a:srgbClr val="17364A"/>
                 </a:solidFill>
@@ -12404,11 +12592,14 @@
               </a:rPr>
               <a:t>Public health IIS and surveillance data quality resources</a:t>
             </a:r>
-            <a:endParaRPr lang="en-US" sz="1380" dirty="0"/>
-          </a:p>
-          <a:p>
-            <a:r>
-              <a:rPr lang="en-US" sz="1380" dirty="0">
+            <a:endParaRPr lang="en-US" sz="1220" dirty="0"/>
+          </a:p>
+          <a:p>
+            <a:pPr indent="0" marL="0">
+              <a:buNone/>
+            </a:pPr>
+            <a:r>
+              <a:rPr lang="en-US" sz="1220" dirty="0">
                 <a:solidFill>
                   <a:srgbClr val="17364A"/>
                 </a:solidFill>
@@ -12418,11 +12609,14 @@
               </a:rPr>
               <a:t>CDC data modernization resources</a:t>
             </a:r>
-            <a:endParaRPr lang="en-US" sz="1380" dirty="0"/>
-          </a:p>
-          <a:p>
-            <a:r>
-              <a:rPr lang="en-US" sz="1380" dirty="0">
+            <a:endParaRPr lang="en-US" sz="1220" dirty="0"/>
+          </a:p>
+          <a:p>
+            <a:pPr indent="0" marL="0">
+              <a:buNone/>
+            </a:pPr>
+            <a:r>
+              <a:rPr lang="en-US" sz="1220" dirty="0">
                 <a:solidFill>
                   <a:srgbClr val="17364A"/>
                 </a:solidFill>
@@ -12432,7 +12626,7 @@
               </a:rPr>
               <a:t>Health information exchange data quality materials</a:t>
             </a:r>
-            <a:endParaRPr lang="en-US" sz="1380" dirty="0"/>
+            <a:endParaRPr lang="en-US" sz="1220" dirty="0"/>
           </a:p>
         </p:txBody>
       </p:sp>
@@ -12510,17 +12704,17 @@
         </p:nvSpPr>
         <p:spPr>
           <a:xfrm>
-            <a:off x="7799832" y="5001768"/>
-            <a:ext cx="3145536" cy="502920"/>
-          </a:xfrm>
-          <a:prstGeom prst="rect">
-            <a:avLst/>
-          </a:prstGeom>
-          <a:noFill/>
-          <a:ln/>
-        </p:spPr>
-        <p:txBody>
-          <a:bodyPr wrap="square" lIns="0" tIns="0" rIns="0" bIns="0" rtlCol="0" anchor="t">
+            <a:off x="7799832" y="4974336"/>
+            <a:ext cx="3145536" cy="576072"/>
+          </a:xfrm>
+          <a:prstGeom prst="rect">
+            <a:avLst/>
+          </a:prstGeom>
+          <a:noFill/>
+          <a:ln/>
+        </p:spPr>
+        <p:txBody>
+          <a:bodyPr wrap="square" lIns="254" tIns="254" rIns="254" bIns="254" rtlCol="0" anchor="t">
             <a:normAutofit/>
           </a:bodyPr>
           <a:lstStyle/>
@@ -12529,7 +12723,7 @@
               <a:buNone/>
             </a:pPr>
             <a:r>
-              <a:rPr lang="en-US" sz="1550" dirty="0">
+              <a:rPr lang="en-US" sz="1320" dirty="0">
                 <a:solidFill>
                   <a:srgbClr val="17364A"/>
                 </a:solidFill>
@@ -12537,9 +12731,9 @@
                 <a:ea typeface="Aptos" pitchFamily="34" charset="-122"/>
                 <a:cs typeface="Aptos" pitchFamily="34" charset="-120"/>
               </a:rPr>
-              <a:t>Connect the concept to public health purpose, responsible use, required safeguards, documentation, and the next action a department should take.</a:t>
-            </a:r>
-            <a:endParaRPr lang="en-US" sz="1550" dirty="0"/>
+              <a:t>Connect the concept to public health purpose, responsible use, required safeguards, documentation, and the next action a.</a:t>
+            </a:r>
+            <a:endParaRPr lang="en-US" sz="1320" dirty="0"/>
           </a:p>
         </p:txBody>
       </p:sp>
@@ -12840,63 +13034,75 @@
           <a:ln/>
         </p:spPr>
         <p:txBody>
-          <a:bodyPr wrap="square" lIns="635" tIns="635" rIns="635" bIns="635" rtlCol="0" anchor="t">
+          <a:bodyPr wrap="square" lIns="1016" tIns="1016" rIns="1016" bIns="1016" rtlCol="0" anchor="t">
             <a:normAutofit/>
           </a:bodyPr>
           <a:lstStyle/>
           <a:p>
+            <a:pPr indent="0" marL="0">
+              <a:buNone/>
+            </a:pPr>
             <a:r>
               <a:rPr lang="en-US" sz="1900" dirty="0">
                 <a:solidFill>
-                  <a:srgbClr val="17364A"/>
-                </a:solidFill>
-                <a:latin typeface="Aptos" pitchFamily="34" charset="0"/>
-                <a:ea typeface="Aptos" pitchFamily="34" charset="-122"/>
-                <a:cs typeface="Aptos" pitchFamily="34" charset="-120"/>
-              </a:rPr>
-              <a:t>Play 7: Prioritize Use Cases - This lesson informs Play 7 by helping learners connect the lesson topic to.</a:t>
+                  <a:srgbClr val="003A63"/>
+                </a:solidFill>
+                <a:latin typeface="Aptos" pitchFamily="34" charset="0"/>
+                <a:ea typeface="Aptos" pitchFamily="34" charset="-122"/>
+                <a:cs typeface="Aptos" pitchFamily="34" charset="-120"/>
+              </a:rPr>
+              <a:t>• Play 7: Prioritize Use Cases - This lesson informs Play 7 by helping learners connect the.</a:t>
             </a:r>
             <a:endParaRPr lang="en-US" sz="1900" dirty="0"/>
           </a:p>
           <a:p>
+            <a:pPr indent="0" marL="0">
+              <a:buNone/>
+            </a:pPr>
             <a:r>
               <a:rPr lang="en-US" sz="1900" dirty="0">
                 <a:solidFill>
-                  <a:srgbClr val="17364A"/>
-                </a:solidFill>
-                <a:latin typeface="Aptos" pitchFamily="34" charset="0"/>
-                <a:ea typeface="Aptos" pitchFamily="34" charset="-122"/>
-                <a:cs typeface="Aptos" pitchFamily="34" charset="-120"/>
-              </a:rPr>
-              <a:t>Play 11: Build and Deploy AI Solutions - This lesson informs Play 11 by helping learners connect the lesson.</a:t>
+                  <a:srgbClr val="003A63"/>
+                </a:solidFill>
+                <a:latin typeface="Aptos" pitchFamily="34" charset="0"/>
+                <a:ea typeface="Aptos" pitchFamily="34" charset="-122"/>
+                <a:cs typeface="Aptos" pitchFamily="34" charset="-120"/>
+              </a:rPr>
+              <a:t>• Play 11: Build and Deploy AI Solutions - This lesson informs Play 11 by helping learners.</a:t>
             </a:r>
             <a:endParaRPr lang="en-US" sz="1900" dirty="0"/>
           </a:p>
           <a:p>
+            <a:pPr indent="0" marL="0">
+              <a:buNone/>
+            </a:pPr>
             <a:r>
               <a:rPr lang="en-US" sz="1900" dirty="0">
                 <a:solidFill>
-                  <a:srgbClr val="17364A"/>
-                </a:solidFill>
-                <a:latin typeface="Aptos" pitchFamily="34" charset="0"/>
-                <a:ea typeface="Aptos" pitchFamily="34" charset="-122"/>
-                <a:cs typeface="Aptos" pitchFamily="34" charset="-120"/>
-              </a:rPr>
-              <a:t>Play 1: Vision &amp; Guardrails - This lesson informs Play 1 by helping learners connect the lesson topic to.</a:t>
+                  <a:srgbClr val="003A63"/>
+                </a:solidFill>
+                <a:latin typeface="Aptos" pitchFamily="34" charset="0"/>
+                <a:ea typeface="Aptos" pitchFamily="34" charset="-122"/>
+                <a:cs typeface="Aptos" pitchFamily="34" charset="-120"/>
+              </a:rPr>
+              <a:t>• Play 1: Vision &amp; Guardrails - This lesson informs Play 1 by helping learners connect the.</a:t>
             </a:r>
             <a:endParaRPr lang="en-US" sz="1900" dirty="0"/>
           </a:p>
           <a:p>
+            <a:pPr indent="0" marL="0">
+              <a:buNone/>
+            </a:pPr>
             <a:r>
               <a:rPr lang="en-US" sz="1900" dirty="0">
                 <a:solidFill>
-                  <a:srgbClr val="17364A"/>
-                </a:solidFill>
-                <a:latin typeface="Aptos" pitchFamily="34" charset="0"/>
-                <a:ea typeface="Aptos" pitchFamily="34" charset="-122"/>
-                <a:cs typeface="Aptos" pitchFamily="34" charset="-120"/>
-              </a:rPr>
-              <a:t>Play 2: Readiness Assessment - This lesson informs Play 2 by helping learners connect the lesson topic to.</a:t>
+                  <a:srgbClr val="003A63"/>
+                </a:solidFill>
+                <a:latin typeface="Aptos" pitchFamily="34" charset="0"/>
+                <a:ea typeface="Aptos" pitchFamily="34" charset="-122"/>
+                <a:cs typeface="Aptos" pitchFamily="34" charset="-120"/>
+              </a:rPr>
+              <a:t>• Play 2: Readiness Assessment - This lesson informs Play 2 by helping learners connect the.</a:t>
             </a:r>
             <a:endParaRPr lang="en-US" sz="1900" dirty="0"/>
           </a:p>
@@ -12976,17 +13182,17 @@
         </p:nvSpPr>
         <p:spPr>
           <a:xfrm>
-            <a:off x="8211312" y="1920240"/>
-            <a:ext cx="2734056" cy="1463040"/>
-          </a:xfrm>
-          <a:prstGeom prst="rect">
-            <a:avLst/>
-          </a:prstGeom>
-          <a:noFill/>
-          <a:ln/>
-        </p:spPr>
-        <p:txBody>
-          <a:bodyPr wrap="square" lIns="0" tIns="0" rIns="0" bIns="0" rtlCol="0" anchor="t">
+            <a:off x="8211312" y="1892808"/>
+            <a:ext cx="2734056" cy="1536192"/>
+          </a:xfrm>
+          <a:prstGeom prst="rect">
+            <a:avLst/>
+          </a:prstGeom>
+          <a:noFill/>
+          <a:ln/>
+        </p:spPr>
+        <p:txBody>
+          <a:bodyPr wrap="square" lIns="254" tIns="254" rIns="254" bIns="254" rtlCol="0" anchor="t">
             <a:normAutofit/>
           </a:bodyPr>
           <a:lstStyle/>
@@ -12995,7 +13201,7 @@
               <a:buNone/>
             </a:pPr>
             <a:r>
-              <a:rPr lang="en-US" sz="1550" dirty="0">
+              <a:rPr lang="en-US" sz="1320" dirty="0">
                 <a:solidFill>
                   <a:srgbClr val="17364A"/>
                 </a:solidFill>
@@ -13003,9 +13209,9 @@
                 <a:ea typeface="Aptos" pitchFamily="34" charset="-122"/>
                 <a:cs typeface="Aptos" pitchFamily="34" charset="-120"/>
               </a:rPr>
-              <a:t>Use the related plays to identify decisions, participants, timing, approvals, and documentation needed for responsible implementation.</a:t>
-            </a:r>
-            <a:endParaRPr lang="en-US" sz="1550" dirty="0"/>
+              <a:t>Use the related plays to identify decisions, participants, timing, approvals, and documentation needed for responsible.</a:t>
+            </a:r>
+            <a:endParaRPr lang="en-US" sz="1320" dirty="0"/>
           </a:p>
         </p:txBody>
       </p:sp>
@@ -13093,13 +13299,16 @@
           <a:ln/>
         </p:spPr>
         <p:txBody>
-          <a:bodyPr wrap="square" lIns="254" tIns="254" rIns="254" bIns="254" rtlCol="0" anchor="t">
+          <a:bodyPr wrap="square" lIns="508" tIns="508" rIns="508" bIns="508" rtlCol="0" anchor="t">
             <a:normAutofit/>
           </a:bodyPr>
           <a:lstStyle/>
           <a:p>
-            <a:r>
-              <a:rPr lang="en-US" sz="1380" dirty="0">
+            <a:pPr indent="0" marL="0">
+              <a:buNone/>
+            </a:pPr>
+            <a:r>
+              <a:rPr lang="en-US" sz="1220" dirty="0">
                 <a:solidFill>
                   <a:srgbClr val="17364A"/>
                 </a:solidFill>
@@ -13109,11 +13318,14 @@
               </a:rPr>
               <a:t>Locate the decision point in the playbook sequence.</a:t>
             </a:r>
-            <a:endParaRPr lang="en-US" sz="1380" dirty="0"/>
-          </a:p>
-          <a:p>
-            <a:r>
-              <a:rPr lang="en-US" sz="1380" dirty="0">
+            <a:endParaRPr lang="en-US" sz="1220" dirty="0"/>
+          </a:p>
+          <a:p>
+            <a:pPr indent="0" marL="0">
+              <a:buNone/>
+            </a:pPr>
+            <a:r>
+              <a:rPr lang="en-US" sz="1220" dirty="0">
                 <a:solidFill>
                   <a:srgbClr val="17364A"/>
                 </a:solidFill>
@@ -13123,11 +13335,14 @@
               </a:rPr>
               <a:t>Identify who should participate in the work.</a:t>
             </a:r>
-            <a:endParaRPr lang="en-US" sz="1380" dirty="0"/>
-          </a:p>
-          <a:p>
-            <a:r>
-              <a:rPr lang="en-US" sz="1380" dirty="0">
+            <a:endParaRPr lang="en-US" sz="1220" dirty="0"/>
+          </a:p>
+          <a:p>
+            <a:pPr indent="0" marL="0">
+              <a:buNone/>
+            </a:pPr>
+            <a:r>
+              <a:rPr lang="en-US" sz="1220" dirty="0">
                 <a:solidFill>
                   <a:srgbClr val="17364A"/>
                 </a:solidFill>
@@ -13137,7 +13352,7 @@
               </a:rPr>
               <a:t>Document the review, approval, or implementation step.</a:t>
             </a:r>
-            <a:endParaRPr lang="en-US" sz="1380" dirty="0"/>
+            <a:endParaRPr lang="en-US" sz="1220" dirty="0"/>
           </a:p>
         </p:txBody>
       </p:sp>
@@ -13438,63 +13653,75 @@
           <a:ln/>
         </p:spPr>
         <p:txBody>
-          <a:bodyPr wrap="square" lIns="635" tIns="635" rIns="635" bIns="635" rtlCol="0" anchor="t">
+          <a:bodyPr wrap="square" lIns="1016" tIns="1016" rIns="1016" bIns="1016" rtlCol="0" anchor="t">
             <a:normAutofit/>
           </a:bodyPr>
           <a:lstStyle/>
           <a:p>
+            <a:pPr indent="0" marL="0">
+              <a:buNone/>
+            </a:pPr>
             <a:r>
               <a:rPr lang="en-US" sz="1850" dirty="0">
                 <a:solidFill>
-                  <a:srgbClr val="17364A"/>
-                </a:solidFill>
-                <a:latin typeface="Aptos" pitchFamily="34" charset="0"/>
-                <a:ea typeface="Aptos" pitchFamily="34" charset="-122"/>
-                <a:cs typeface="Aptos" pitchFamily="34" charset="-120"/>
-              </a:rPr>
-              <a:t>Tool 3: Equity Impact Assessment Checklist (Checklist) - Use this tool to complete or strengthen the.</a:t>
+                  <a:srgbClr val="003A63"/>
+                </a:solidFill>
+                <a:latin typeface="Aptos" pitchFamily="34" charset="0"/>
+                <a:ea typeface="Aptos" pitchFamily="34" charset="-122"/>
+                <a:cs typeface="Aptos" pitchFamily="34" charset="-120"/>
+              </a:rPr>
+              <a:t>• Tool 3: Equity Impact Assessment Checklist (Checklist) - Use this tool to complete or.</a:t>
             </a:r>
             <a:endParaRPr lang="en-US" sz="1850" dirty="0"/>
           </a:p>
           <a:p>
+            <a:pPr indent="0" marL="0">
+              <a:buNone/>
+            </a:pPr>
             <a:r>
               <a:rPr lang="en-US" sz="1850" dirty="0">
                 <a:solidFill>
-                  <a:srgbClr val="17364A"/>
-                </a:solidFill>
-                <a:latin typeface="Aptos" pitchFamily="34" charset="0"/>
-                <a:ea typeface="Aptos" pitchFamily="34" charset="-122"/>
-                <a:cs typeface="Aptos" pitchFamily="34" charset="-120"/>
-              </a:rPr>
-              <a:t>Tool 4: AI Policy Landscape Scan (Worksheet) - Use AI Policy Landscape Scan to translate this lesson into a.</a:t>
+                  <a:srgbClr val="003A63"/>
+                </a:solidFill>
+                <a:latin typeface="Aptos" pitchFamily="34" charset="0"/>
+                <a:ea typeface="Aptos" pitchFamily="34" charset="-122"/>
+                <a:cs typeface="Aptos" pitchFamily="34" charset="-120"/>
+              </a:rPr>
+              <a:t>• Tool 4: AI Policy Landscape Scan (Worksheet) - Use AI Policy Landscape Scan to translate this.</a:t>
             </a:r>
             <a:endParaRPr lang="en-US" sz="1850" dirty="0"/>
           </a:p>
           <a:p>
+            <a:pPr indent="0" marL="0">
+              <a:buNone/>
+            </a:pPr>
             <a:r>
               <a:rPr lang="en-US" sz="1850" dirty="0">
                 <a:solidFill>
-                  <a:srgbClr val="17364A"/>
-                </a:solidFill>
-                <a:latin typeface="Aptos" pitchFamily="34" charset="0"/>
-                <a:ea typeface="Aptos" pitchFamily="34" charset="-122"/>
-                <a:cs typeface="Aptos" pitchFamily="34" charset="-120"/>
-              </a:rPr>
-              <a:t>Tool 5: AI Environmental and Resource Impact Review (Checklist) - Use AI Environmental and Resource Impact.</a:t>
+                  <a:srgbClr val="003A63"/>
+                </a:solidFill>
+                <a:latin typeface="Aptos" pitchFamily="34" charset="0"/>
+                <a:ea typeface="Aptos" pitchFamily="34" charset="-122"/>
+                <a:cs typeface="Aptos" pitchFamily="34" charset="-120"/>
+              </a:rPr>
+              <a:t>• Tool 5: AI Environmental and Resource Impact Review (Checklist) - Use AI Environmental and.</a:t>
             </a:r>
             <a:endParaRPr lang="en-US" sz="1850" dirty="0"/>
           </a:p>
           <a:p>
+            <a:pPr indent="0" marL="0">
+              <a:buNone/>
+            </a:pPr>
             <a:r>
               <a:rPr lang="en-US" sz="1850" dirty="0">
                 <a:solidFill>
-                  <a:srgbClr val="17364A"/>
-                </a:solidFill>
-                <a:latin typeface="Aptos" pitchFamily="34" charset="0"/>
-                <a:ea typeface="Aptos" pitchFamily="34" charset="-122"/>
-                <a:cs typeface="Aptos" pitchFamily="34" charset="-120"/>
-              </a:rPr>
-              <a:t>Tool 6: Human-Centered AI Decision Rule Checklist (Checklist) - Use Human-Centered AI Decision Rule.</a:t>
+                  <a:srgbClr val="003A63"/>
+                </a:solidFill>
+                <a:latin typeface="Aptos" pitchFamily="34" charset="0"/>
+                <a:ea typeface="Aptos" pitchFamily="34" charset="-122"/>
+                <a:cs typeface="Aptos" pitchFamily="34" charset="-120"/>
+              </a:rPr>
+              <a:t>• Tool 6: Human-Centered AI Decision Rule Checklist (Checklist) - Use Human-Centered AI Decision.</a:t>
             </a:r>
             <a:endParaRPr lang="en-US" sz="1850" dirty="0"/>
           </a:p>
@@ -13574,17 +13801,17 @@
         </p:nvSpPr>
         <p:spPr>
           <a:xfrm>
-            <a:off x="8211312" y="1920240"/>
-            <a:ext cx="2734056" cy="1463040"/>
-          </a:xfrm>
-          <a:prstGeom prst="rect">
-            <a:avLst/>
-          </a:prstGeom>
-          <a:noFill/>
-          <a:ln/>
-        </p:spPr>
-        <p:txBody>
-          <a:bodyPr wrap="square" lIns="0" tIns="0" rIns="0" bIns="0" rtlCol="0" anchor="t">
+            <a:off x="8211312" y="1892808"/>
+            <a:ext cx="2734056" cy="1536192"/>
+          </a:xfrm>
+          <a:prstGeom prst="rect">
+            <a:avLst/>
+          </a:prstGeom>
+          <a:noFill/>
+          <a:ln/>
+        </p:spPr>
+        <p:txBody>
+          <a:bodyPr wrap="square" lIns="254" tIns="254" rIns="254" bIns="254" rtlCol="0" anchor="t">
             <a:normAutofit/>
           </a:bodyPr>
           <a:lstStyle/>
@@ -13593,7 +13820,7 @@
               <a:buNone/>
             </a:pPr>
             <a:r>
-              <a:rPr lang="en-US" sz="1550" dirty="0">
+              <a:rPr lang="en-US" sz="1320" dirty="0">
                 <a:solidFill>
                   <a:srgbClr val="17364A"/>
                 </a:solidFill>
@@ -13601,9 +13828,9 @@
                 <a:ea typeface="Aptos" pitchFamily="34" charset="-122"/>
                 <a:cs typeface="Aptos" pitchFamily="34" charset="-120"/>
               </a:rPr>
-              <a:t>Use linked tools when your department needs a structured worksheet, template, checklist, review process, or documentation artifact.</a:t>
-            </a:r>
-            <a:endParaRPr lang="en-US" sz="1550" dirty="0"/>
+              <a:t>Use linked tools when your department needs a structured worksheet, template, checklist, review process, or.</a:t>
+            </a:r>
+            <a:endParaRPr lang="en-US" sz="1320" dirty="0"/>
           </a:p>
         </p:txBody>
       </p:sp>
@@ -13691,13 +13918,16 @@
           <a:ln/>
         </p:spPr>
         <p:txBody>
-          <a:bodyPr wrap="square" lIns="254" tIns="254" rIns="254" bIns="254" rtlCol="0" anchor="t">
+          <a:bodyPr wrap="square" lIns="508" tIns="508" rIns="508" bIns="508" rtlCol="0" anchor="t">
             <a:normAutofit/>
           </a:bodyPr>
           <a:lstStyle/>
           <a:p>
-            <a:r>
-              <a:rPr lang="en-US" sz="1380" dirty="0">
+            <a:pPr indent="0" marL="0">
+              <a:buNone/>
+            </a:pPr>
+            <a:r>
+              <a:rPr lang="en-US" sz="1220" dirty="0">
                 <a:solidFill>
                   <a:srgbClr val="17364A"/>
                 </a:solidFill>
@@ -13707,11 +13937,14 @@
               </a:rPr>
               <a:t>Use a tool when no comparable local process exists.</a:t>
             </a:r>
-            <a:endParaRPr lang="en-US" sz="1380" dirty="0"/>
-          </a:p>
-          <a:p>
-            <a:r>
-              <a:rPr lang="en-US" sz="1380" dirty="0">
+            <a:endParaRPr lang="en-US" sz="1220" dirty="0"/>
+          </a:p>
+          <a:p>
+            <a:pPr indent="0" marL="0">
+              <a:buNone/>
+            </a:pPr>
+            <a:r>
+              <a:rPr lang="en-US" sz="1220" dirty="0">
                 <a:solidFill>
                   <a:srgbClr val="17364A"/>
                 </a:solidFill>
@@ -13719,13 +13952,16 @@
                 <a:ea typeface="Aptos" pitchFamily="34" charset="-122"/>
                 <a:cs typeface="Aptos" pitchFamily="34" charset="-120"/>
               </a:rPr>
-              <a:t>Adapt existing department templates when they already fit the purpose.</a:t>
-            </a:r>
-            <a:endParaRPr lang="en-US" sz="1380" dirty="0"/>
-          </a:p>
-          <a:p>
-            <a:r>
-              <a:rPr lang="en-US" sz="1380" dirty="0">
+              <a:t>Adapt existing department templates when they already fit the.</a:t>
+            </a:r>
+            <a:endParaRPr lang="en-US" sz="1220" dirty="0"/>
+          </a:p>
+          <a:p>
+            <a:pPr indent="0" marL="0">
+              <a:buNone/>
+            </a:pPr>
+            <a:r>
+              <a:rPr lang="en-US" sz="1220" dirty="0">
                 <a:solidFill>
                   <a:srgbClr val="17364A"/>
                 </a:solidFill>
@@ -13735,7 +13971,7 @@
               </a:rPr>
               <a:t>Save the completed artifact as evidence of the decision.</a:t>
             </a:r>
-            <a:endParaRPr lang="en-US" sz="1380" dirty="0"/>
+            <a:endParaRPr lang="en-US" sz="1220" dirty="0"/>
           </a:p>
         </p:txBody>
       </p:sp>
@@ -14036,49 +14272,58 @@
           <a:ln/>
         </p:spPr>
         <p:txBody>
-          <a:bodyPr wrap="square" lIns="635" tIns="635" rIns="635" bIns="635" rtlCol="0" anchor="t">
+          <a:bodyPr wrap="square" lIns="1016" tIns="1016" rIns="1016" bIns="1016" rtlCol="0" anchor="t">
             <a:normAutofit/>
           </a:bodyPr>
           <a:lstStyle/>
           <a:p>
+            <a:pPr indent="0" marL="0">
+              <a:buNone/>
+            </a:pPr>
             <a:r>
               <a:rPr lang="en-US" sz="2100" dirty="0">
                 <a:solidFill>
-                  <a:srgbClr val="17364A"/>
-                </a:solidFill>
-                <a:latin typeface="Aptos" pitchFamily="34" charset="0"/>
-                <a:ea typeface="Aptos" pitchFamily="34" charset="-122"/>
-                <a:cs typeface="Aptos" pitchFamily="34" charset="-120"/>
-              </a:rPr>
-              <a:t>Explain why record linkage matters for public health AI.</a:t>
+                  <a:srgbClr val="003A63"/>
+                </a:solidFill>
+                <a:latin typeface="Aptos" pitchFamily="34" charset="0"/>
+                <a:ea typeface="Aptos" pitchFamily="34" charset="-122"/>
+                <a:cs typeface="Aptos" pitchFamily="34" charset="-120"/>
+              </a:rPr>
+              <a:t>• Explain why record linkage matters for public health AI.</a:t>
             </a:r>
             <a:endParaRPr lang="en-US" sz="2100" dirty="0"/>
           </a:p>
           <a:p>
+            <a:pPr indent="0" marL="0">
+              <a:buNone/>
+            </a:pPr>
             <a:r>
               <a:rPr lang="en-US" sz="2100" dirty="0">
                 <a:solidFill>
-                  <a:srgbClr val="17364A"/>
-                </a:solidFill>
-                <a:latin typeface="Aptos" pitchFamily="34" charset="0"/>
-                <a:ea typeface="Aptos" pitchFamily="34" charset="-122"/>
-                <a:cs typeface="Aptos" pitchFamily="34" charset="-120"/>
-              </a:rPr>
-              <a:t>Distinguish between deterministic matching, probabilistic matching, entity resolution, and deduplication.</a:t>
+                  <a:srgbClr val="003A63"/>
+                </a:solidFill>
+                <a:latin typeface="Aptos" pitchFamily="34" charset="0"/>
+                <a:ea typeface="Aptos" pitchFamily="34" charset="-122"/>
+                <a:cs typeface="Aptos" pitchFamily="34" charset="-120"/>
+              </a:rPr>
+              <a:t>• Distinguish between deterministic matching, probabilistic matching, entity resolution, and.</a:t>
             </a:r>
             <a:endParaRPr lang="en-US" sz="2100" dirty="0"/>
           </a:p>
           <a:p>
+            <a:pPr indent="0" marL="0">
+              <a:buNone/>
+            </a:pPr>
             <a:r>
               <a:rPr lang="en-US" sz="2100" dirty="0">
                 <a:solidFill>
-                  <a:srgbClr val="17364A"/>
-                </a:solidFill>
-                <a:latin typeface="Aptos" pitchFamily="34" charset="0"/>
-                <a:ea typeface="Aptos" pitchFamily="34" charset="-122"/>
-                <a:cs typeface="Aptos" pitchFamily="34" charset="-120"/>
-              </a:rPr>
-              <a:t>Identify risks from false matches and missed matches.</a:t>
+                  <a:srgbClr val="003A63"/>
+                </a:solidFill>
+                <a:latin typeface="Aptos" pitchFamily="34" charset="0"/>
+                <a:ea typeface="Aptos" pitchFamily="34" charset="-122"/>
+                <a:cs typeface="Aptos" pitchFamily="34" charset="-120"/>
+              </a:rPr>
+              <a:t>• Identify risks from false matches and missed matches.</a:t>
             </a:r>
             <a:endParaRPr lang="en-US" sz="2100" dirty="0"/>
           </a:p>
@@ -14158,17 +14403,17 @@
         </p:nvSpPr>
         <p:spPr>
           <a:xfrm>
-            <a:off x="7799832" y="1828800"/>
-            <a:ext cx="3145536" cy="685800"/>
-          </a:xfrm>
-          <a:prstGeom prst="rect">
-            <a:avLst/>
-          </a:prstGeom>
-          <a:noFill/>
-          <a:ln/>
-        </p:spPr>
-        <p:txBody>
-          <a:bodyPr wrap="square" lIns="0" tIns="0" rIns="0" bIns="0" rtlCol="0" anchor="t">
+            <a:off x="7799832" y="1801368"/>
+            <a:ext cx="3145536" cy="758952"/>
+          </a:xfrm>
+          <a:prstGeom prst="rect">
+            <a:avLst/>
+          </a:prstGeom>
+          <a:noFill/>
+          <a:ln/>
+        </p:spPr>
+        <p:txBody>
+          <a:bodyPr wrap="square" lIns="254" tIns="254" rIns="254" bIns="254" rtlCol="0" anchor="t">
             <a:normAutofit/>
           </a:bodyPr>
           <a:lstStyle/>
@@ -14177,7 +14422,7 @@
               <a:buNone/>
             </a:pPr>
             <a:r>
-              <a:rPr lang="en-US" sz="1550" dirty="0">
+              <a:rPr lang="en-US" sz="1320" dirty="0">
                 <a:solidFill>
                   <a:srgbClr val="17364A"/>
                 </a:solidFill>
@@ -14187,7 +14432,7 @@
               </a:rPr>
               <a:t>Explain why record linkage matters for public health AI.</a:t>
             </a:r>
-            <a:endParaRPr lang="en-US" sz="1550" dirty="0"/>
+            <a:endParaRPr lang="en-US" sz="1320" dirty="0"/>
           </a:p>
         </p:txBody>
       </p:sp>
@@ -14275,13 +14520,16 @@
           <a:ln/>
         </p:spPr>
         <p:txBody>
-          <a:bodyPr wrap="square" lIns="254" tIns="254" rIns="254" bIns="254" rtlCol="0" anchor="t">
+          <a:bodyPr wrap="square" lIns="508" tIns="508" rIns="508" bIns="508" rtlCol="0" anchor="t">
             <a:normAutofit/>
           </a:bodyPr>
           <a:lstStyle/>
           <a:p>
-            <a:r>
-              <a:rPr lang="en-US" sz="1380" dirty="0">
+            <a:pPr indent="0" marL="0">
+              <a:buNone/>
+            </a:pPr>
+            <a:r>
+              <a:rPr lang="en-US" sz="1220" dirty="0">
                 <a:solidFill>
                   <a:srgbClr val="17364A"/>
                 </a:solidFill>
@@ -14289,13 +14537,16 @@
                 <a:ea typeface="Aptos" pitchFamily="34" charset="-122"/>
                 <a:cs typeface="Aptos" pitchFamily="34" charset="-120"/>
               </a:rPr>
-              <a:t>Describe how thresholds, clerical review, and data quality affect matching.</a:t>
-            </a:r>
-            <a:endParaRPr lang="en-US" sz="1380" dirty="0"/>
-          </a:p>
-          <a:p>
-            <a:r>
-              <a:rPr lang="en-US" sz="1380" dirty="0">
+              <a:t>Describe how thresholds, clerical review, and data quality affect.</a:t>
+            </a:r>
+            <a:endParaRPr lang="en-US" sz="1220" dirty="0"/>
+          </a:p>
+          <a:p>
+            <a:pPr indent="0" marL="0">
+              <a:buNone/>
+            </a:pPr>
+            <a:r>
+              <a:rPr lang="en-US" sz="1220" dirty="0">
                 <a:solidFill>
                   <a:srgbClr val="17364A"/>
                 </a:solidFill>
@@ -14305,7 +14556,7 @@
               </a:rPr>
               <a:t>Produce a linkage risk review for an AI-supported workflow.</a:t>
             </a:r>
-            <a:endParaRPr lang="en-US" sz="1380" dirty="0"/>
+            <a:endParaRPr lang="en-US" sz="1220" dirty="0"/>
           </a:p>
         </p:txBody>
       </p:sp>
@@ -14383,17 +14634,17 @@
         </p:nvSpPr>
         <p:spPr>
           <a:xfrm>
-            <a:off x="7799832" y="5001768"/>
-            <a:ext cx="3145536" cy="502920"/>
-          </a:xfrm>
-          <a:prstGeom prst="rect">
-            <a:avLst/>
-          </a:prstGeom>
-          <a:noFill/>
-          <a:ln/>
-        </p:spPr>
-        <p:txBody>
-          <a:bodyPr wrap="square" lIns="0" tIns="0" rIns="0" bIns="0" rtlCol="0" anchor="t">
+            <a:off x="7799832" y="4974336"/>
+            <a:ext cx="3145536" cy="576072"/>
+          </a:xfrm>
+          <a:prstGeom prst="rect">
+            <a:avLst/>
+          </a:prstGeom>
+          <a:noFill/>
+          <a:ln/>
+        </p:spPr>
+        <p:txBody>
+          <a:bodyPr wrap="square" lIns="254" tIns="254" rIns="254" bIns="254" rtlCol="0" anchor="t">
             <a:normAutofit/>
           </a:bodyPr>
           <a:lstStyle/>
@@ -14402,7 +14653,7 @@
               <a:buNone/>
             </a:pPr>
             <a:r>
-              <a:rPr lang="en-US" sz="1550" dirty="0">
+              <a:rPr lang="en-US" sz="1320" dirty="0">
                 <a:solidFill>
                   <a:srgbClr val="17364A"/>
                 </a:solidFill>
@@ -14410,9 +14661,9 @@
                 <a:ea typeface="Aptos" pitchFamily="34" charset="-122"/>
                 <a:cs typeface="Aptos" pitchFamily="34" charset="-120"/>
               </a:rPr>
-              <a:t>Use the assignment to test whether you can explain the concept, apply it to a realistic public health situation, and identify what would need review before the work moves forward.</a:t>
-            </a:r>
-            <a:endParaRPr lang="en-US" sz="1550" dirty="0"/>
+              <a:t>Use the assignment to test whether you can explain the concept, apply it to a realistic public health situation, and.</a:t>
+            </a:r>
+            <a:endParaRPr lang="en-US" sz="1320" dirty="0"/>
           </a:p>
         </p:txBody>
       </p:sp>
@@ -14713,49 +14964,58 @@
           <a:ln/>
         </p:spPr>
         <p:txBody>
-          <a:bodyPr wrap="square" lIns="635" tIns="635" rIns="635" bIns="635" rtlCol="0" anchor="t">
+          <a:bodyPr wrap="square" lIns="1016" tIns="1016" rIns="1016" bIns="1016" rtlCol="0" anchor="t">
             <a:normAutofit/>
           </a:bodyPr>
           <a:lstStyle/>
           <a:p>
+            <a:pPr indent="0" marL="0">
+              <a:buNone/>
+            </a:pPr>
             <a:r>
               <a:rPr lang="en-US" sz="2100" dirty="0">
                 <a:solidFill>
-                  <a:srgbClr val="17364A"/>
-                </a:solidFill>
-                <a:latin typeface="Aptos" pitchFamily="34" charset="0"/>
-                <a:ea typeface="Aptos" pitchFamily="34" charset="-122"/>
-                <a:cs typeface="Aptos" pitchFamily="34" charset="-120"/>
-              </a:rPr>
-              <a:t>Record linkage and entity resolution help public health systems determine whether records refer to the.</a:t>
+                  <a:srgbClr val="003A63"/>
+                </a:solidFill>
+                <a:latin typeface="Aptos" pitchFamily="34" charset="0"/>
+                <a:ea typeface="Aptos" pitchFamily="34" charset="-122"/>
+                <a:cs typeface="Aptos" pitchFamily="34" charset="-120"/>
+              </a:rPr>
+              <a:t>• Record linkage and entity resolution help public health systems determine whether records.</a:t>
             </a:r>
             <a:endParaRPr lang="en-US" sz="2100" dirty="0"/>
           </a:p>
           <a:p>
+            <a:pPr indent="0" marL="0">
+              <a:buNone/>
+            </a:pPr>
             <a:r>
               <a:rPr lang="en-US" sz="2100" dirty="0">
                 <a:solidFill>
-                  <a:srgbClr val="17364A"/>
-                </a:solidFill>
-                <a:latin typeface="Aptos" pitchFamily="34" charset="0"/>
-                <a:ea typeface="Aptos" pitchFamily="34" charset="-122"/>
-                <a:cs typeface="Aptos" pitchFamily="34" charset="-120"/>
-              </a:rPr>
-              <a:t>AI tools often rely on linked data even when the linkage process is invisible to users.</a:t>
+                  <a:srgbClr val="003A63"/>
+                </a:solidFill>
+                <a:latin typeface="Aptos" pitchFamily="34" charset="0"/>
+                <a:ea typeface="Aptos" pitchFamily="34" charset="-122"/>
+                <a:cs typeface="Aptos" pitchFamily="34" charset="-120"/>
+              </a:rPr>
+              <a:t>• AI tools often rely on linked data even when the linkage process is invisible to users.</a:t>
             </a:r>
             <a:endParaRPr lang="en-US" sz="2100" dirty="0"/>
           </a:p>
           <a:p>
+            <a:pPr indent="0" marL="0">
+              <a:buNone/>
+            </a:pPr>
             <a:r>
               <a:rPr lang="en-US" sz="2100" dirty="0">
                 <a:solidFill>
-                  <a:srgbClr val="17364A"/>
-                </a:solidFill>
-                <a:latin typeface="Aptos" pitchFamily="34" charset="0"/>
-                <a:ea typeface="Aptos" pitchFamily="34" charset="-122"/>
-                <a:cs typeface="Aptos" pitchFamily="34" charset="-120"/>
-              </a:rPr>
-              <a:t>This module teaches learners how matching and deduplication affect AI outputs, surveillance quality,.</a:t>
+                  <a:srgbClr val="003A63"/>
+                </a:solidFill>
+                <a:latin typeface="Aptos" pitchFamily="34" charset="0"/>
+                <a:ea typeface="Aptos" pitchFamily="34" charset="-122"/>
+                <a:cs typeface="Aptos" pitchFamily="34" charset="-120"/>
+              </a:rPr>
+              <a:t>• This module teaches learners how matching and deduplication affect AI outputs, surveillance.</a:t>
             </a:r>
             <a:endParaRPr lang="en-US" sz="2100" dirty="0"/>
           </a:p>
@@ -14835,17 +15095,17 @@
         </p:nvSpPr>
         <p:spPr>
           <a:xfrm>
-            <a:off x="7799832" y="1828800"/>
-            <a:ext cx="3145536" cy="685800"/>
-          </a:xfrm>
-          <a:prstGeom prst="rect">
-            <a:avLst/>
-          </a:prstGeom>
-          <a:noFill/>
-          <a:ln/>
-        </p:spPr>
-        <p:txBody>
-          <a:bodyPr wrap="square" lIns="0" tIns="0" rIns="0" bIns="0" rtlCol="0" anchor="t">
+            <a:off x="7799832" y="1801368"/>
+            <a:ext cx="3145536" cy="758952"/>
+          </a:xfrm>
+          <a:prstGeom prst="rect">
+            <a:avLst/>
+          </a:prstGeom>
+          <a:noFill/>
+          <a:ln/>
+        </p:spPr>
+        <p:txBody>
+          <a:bodyPr wrap="square" lIns="254" tIns="254" rIns="254" bIns="254" rtlCol="0" anchor="t">
             <a:normAutofit/>
           </a:bodyPr>
           <a:lstStyle/>
@@ -14854,7 +15114,7 @@
               <a:buNone/>
             </a:pPr>
             <a:r>
-              <a:rPr lang="en-US" sz="1550" dirty="0">
+              <a:rPr lang="en-US" sz="1320" dirty="0">
                 <a:solidFill>
                   <a:srgbClr val="17364A"/>
                 </a:solidFill>
@@ -14864,7 +15124,7 @@
               </a:rPr>
               <a:t>Record linkage and entity resolution help public health systems determine whether records refer to the.</a:t>
             </a:r>
-            <a:endParaRPr lang="en-US" sz="1550" dirty="0"/>
+            <a:endParaRPr lang="en-US" sz="1320" dirty="0"/>
           </a:p>
         </p:txBody>
       </p:sp>
@@ -14952,13 +15212,16 @@
           <a:ln/>
         </p:spPr>
         <p:txBody>
-          <a:bodyPr wrap="square" lIns="254" tIns="254" rIns="254" bIns="254" rtlCol="0" anchor="t">
+          <a:bodyPr wrap="square" lIns="508" tIns="508" rIns="508" bIns="508" rtlCol="0" anchor="t">
             <a:normAutofit/>
           </a:bodyPr>
           <a:lstStyle/>
           <a:p>
-            <a:r>
-              <a:rPr lang="en-US" sz="1380" dirty="0">
+            <a:pPr indent="0" marL="0">
+              <a:buNone/>
+            </a:pPr>
+            <a:r>
+              <a:rPr lang="en-US" sz="1220" dirty="0">
                 <a:solidFill>
                   <a:srgbClr val="17364A"/>
                 </a:solidFill>
@@ -14966,13 +15229,16 @@
                 <a:ea typeface="Aptos" pitchFamily="34" charset="-122"/>
                 <a:cs typeface="Aptos" pitchFamily="34" charset="-120"/>
               </a:rPr>
-              <a:t>Record linkage and entity resolution help public health systems determine whether records.</a:t>
-            </a:r>
-            <a:endParaRPr lang="en-US" sz="1380" dirty="0"/>
-          </a:p>
-          <a:p>
-            <a:r>
-              <a:rPr lang="en-US" sz="1380" dirty="0">
+              <a:t>Record linkage and entity resolution help public health systems.</a:t>
+            </a:r>
+            <a:endParaRPr lang="en-US" sz="1220" dirty="0"/>
+          </a:p>
+          <a:p>
+            <a:pPr indent="0" marL="0">
+              <a:buNone/>
+            </a:pPr>
+            <a:r>
+              <a:rPr lang="en-US" sz="1220" dirty="0">
                 <a:solidFill>
                   <a:srgbClr val="17364A"/>
                 </a:solidFill>
@@ -14980,9 +15246,9 @@
                 <a:ea typeface="Aptos" pitchFamily="34" charset="-122"/>
                 <a:cs typeface="Aptos" pitchFamily="34" charset="-120"/>
               </a:rPr>
-              <a:t>This module teaches learners how matching and deduplication affect AI outputs,.</a:t>
-            </a:r>
-            <a:endParaRPr lang="en-US" sz="1380" dirty="0"/>
+              <a:t>This module teaches learners how matching and deduplication affect.</a:t>
+            </a:r>
+            <a:endParaRPr lang="en-US" sz="1220" dirty="0"/>
           </a:p>
         </p:txBody>
       </p:sp>
@@ -15060,17 +15326,17 @@
         </p:nvSpPr>
         <p:spPr>
           <a:xfrm>
-            <a:off x="7799832" y="5001768"/>
-            <a:ext cx="3145536" cy="502920"/>
-          </a:xfrm>
-          <a:prstGeom prst="rect">
-            <a:avLst/>
-          </a:prstGeom>
-          <a:noFill/>
-          <a:ln/>
-        </p:spPr>
-        <p:txBody>
-          <a:bodyPr wrap="square" lIns="0" tIns="0" rIns="0" bIns="0" rtlCol="0" anchor="t">
+            <a:off x="7799832" y="4974336"/>
+            <a:ext cx="3145536" cy="576072"/>
+          </a:xfrm>
+          <a:prstGeom prst="rect">
+            <a:avLst/>
+          </a:prstGeom>
+          <a:noFill/>
+          <a:ln/>
+        </p:spPr>
+        <p:txBody>
+          <a:bodyPr wrap="square" lIns="254" tIns="254" rIns="254" bIns="254" rtlCol="0" anchor="t">
             <a:normAutofit/>
           </a:bodyPr>
           <a:lstStyle/>
@@ -15079,7 +15345,7 @@
               <a:buNone/>
             </a:pPr>
             <a:r>
-              <a:rPr lang="en-US" sz="1550" dirty="0">
+              <a:rPr lang="en-US" sz="1320" dirty="0">
                 <a:solidFill>
                   <a:srgbClr val="17364A"/>
                 </a:solidFill>
@@ -15087,9 +15353,9 @@
                 <a:ea typeface="Aptos" pitchFamily="34" charset="-122"/>
                 <a:cs typeface="Aptos" pitchFamily="34" charset="-120"/>
               </a:rPr>
-              <a:t>Connect the concept to public health purpose, responsible use, required safeguards, documentation, and the next action a department should take.</a:t>
-            </a:r>
-            <a:endParaRPr lang="en-US" sz="1550" dirty="0"/>
+              <a:t>Connect the concept to public health purpose, responsible use, required safeguards, documentation, and the next action a.</a:t>
+            </a:r>
+            <a:endParaRPr lang="en-US" sz="1320" dirty="0"/>
           </a:p>
         </p:txBody>
       </p:sp>
@@ -15390,49 +15656,58 @@
           <a:ln/>
         </p:spPr>
         <p:txBody>
-          <a:bodyPr wrap="square" lIns="635" tIns="635" rIns="635" bIns="635" rtlCol="0" anchor="t">
+          <a:bodyPr wrap="square" lIns="1016" tIns="1016" rIns="1016" bIns="1016" rtlCol="0" anchor="t">
             <a:normAutofit/>
           </a:bodyPr>
           <a:lstStyle/>
           <a:p>
+            <a:pPr indent="0" marL="0">
+              <a:buNone/>
+            </a:pPr>
             <a:r>
               <a:rPr lang="en-US" sz="2100" dirty="0">
                 <a:solidFill>
-                  <a:srgbClr val="17364A"/>
-                </a:solidFill>
-                <a:latin typeface="Aptos" pitchFamily="34" charset="0"/>
-                <a:ea typeface="Aptos" pitchFamily="34" charset="-122"/>
-                <a:cs typeface="Aptos" pitchFamily="34" charset="-120"/>
-              </a:rPr>
-              <a:t>Record linkage matters because public health work often depends on combining information across systems.</a:t>
+                  <a:srgbClr val="003A63"/>
+                </a:solidFill>
+                <a:latin typeface="Aptos" pitchFamily="34" charset="0"/>
+                <a:ea typeface="Aptos" pitchFamily="34" charset="-122"/>
+                <a:cs typeface="Aptos" pitchFamily="34" charset="-120"/>
+              </a:rPr>
+              <a:t>• Record linkage matters because public health work often depends on combining information.</a:t>
             </a:r>
             <a:endParaRPr lang="en-US" sz="2100" dirty="0"/>
           </a:p>
           <a:p>
+            <a:pPr indent="0" marL="0">
+              <a:buNone/>
+            </a:pPr>
             <a:r>
               <a:rPr lang="en-US" sz="2100" dirty="0">
                 <a:solidFill>
-                  <a:srgbClr val="17364A"/>
-                </a:solidFill>
-                <a:latin typeface="Aptos" pitchFamily="34" charset="0"/>
-                <a:ea typeface="Aptos" pitchFamily="34" charset="-122"/>
-                <a:cs typeface="Aptos" pitchFamily="34" charset="-120"/>
-              </a:rPr>
-              <a:t>A surveillance system may need to associate a lab report with an existing case.</a:t>
+                  <a:srgbClr val="003A63"/>
+                </a:solidFill>
+                <a:latin typeface="Aptos" pitchFamily="34" charset="0"/>
+                <a:ea typeface="Aptos" pitchFamily="34" charset="-122"/>
+                <a:cs typeface="Aptos" pitchFamily="34" charset="-120"/>
+              </a:rPr>
+              <a:t>• A surveillance system may need to associate a lab report with an existing case.</a:t>
             </a:r>
             <a:endParaRPr lang="en-US" sz="2100" dirty="0"/>
           </a:p>
           <a:p>
+            <a:pPr indent="0" marL="0">
+              <a:buNone/>
+            </a:pPr>
             <a:r>
               <a:rPr lang="en-US" sz="2100" dirty="0">
                 <a:solidFill>
-                  <a:srgbClr val="17364A"/>
-                </a:solidFill>
-                <a:latin typeface="Aptos" pitchFamily="34" charset="0"/>
-                <a:ea typeface="Aptos" pitchFamily="34" charset="-122"/>
-                <a:cs typeface="Aptos" pitchFamily="34" charset="-120"/>
-              </a:rPr>
-              <a:t>An IIS may need to match vaccination records from multiple providers.</a:t>
+                  <a:srgbClr val="003A63"/>
+                </a:solidFill>
+                <a:latin typeface="Aptos" pitchFamily="34" charset="0"/>
+                <a:ea typeface="Aptos" pitchFamily="34" charset="-122"/>
+                <a:cs typeface="Aptos" pitchFamily="34" charset="-120"/>
+              </a:rPr>
+              <a:t>• An IIS may need to match vaccination records from multiple providers.</a:t>
             </a:r>
             <a:endParaRPr lang="en-US" sz="2100" dirty="0"/>
           </a:p>
@@ -15512,17 +15787,17 @@
         </p:nvSpPr>
         <p:spPr>
           <a:xfrm>
-            <a:off x="7799832" y="1828800"/>
-            <a:ext cx="3145536" cy="685800"/>
-          </a:xfrm>
-          <a:prstGeom prst="rect">
-            <a:avLst/>
-          </a:prstGeom>
-          <a:noFill/>
-          <a:ln/>
-        </p:spPr>
-        <p:txBody>
-          <a:bodyPr wrap="square" lIns="0" tIns="0" rIns="0" bIns="0" rtlCol="0" anchor="t">
+            <a:off x="7799832" y="1801368"/>
+            <a:ext cx="3145536" cy="758952"/>
+          </a:xfrm>
+          <a:prstGeom prst="rect">
+            <a:avLst/>
+          </a:prstGeom>
+          <a:noFill/>
+          <a:ln/>
+        </p:spPr>
+        <p:txBody>
+          <a:bodyPr wrap="square" lIns="254" tIns="254" rIns="254" bIns="254" rtlCol="0" anchor="t">
             <a:normAutofit/>
           </a:bodyPr>
           <a:lstStyle/>
@@ -15531,7 +15806,7 @@
               <a:buNone/>
             </a:pPr>
             <a:r>
-              <a:rPr lang="en-US" sz="1550" dirty="0">
+              <a:rPr lang="en-US" sz="1320" dirty="0">
                 <a:solidFill>
                   <a:srgbClr val="17364A"/>
                 </a:solidFill>
@@ -15541,7 +15816,7 @@
               </a:rPr>
               <a:t>Record linkage matters because public health work often depends on combining information across systems.</a:t>
             </a:r>
-            <a:endParaRPr lang="en-US" sz="1550" dirty="0"/>
+            <a:endParaRPr lang="en-US" sz="1320" dirty="0"/>
           </a:p>
         </p:txBody>
       </p:sp>
@@ -15629,13 +15904,16 @@
           <a:ln/>
         </p:spPr>
         <p:txBody>
-          <a:bodyPr wrap="square" lIns="254" tIns="254" rIns="254" bIns="254" rtlCol="0" anchor="t">
+          <a:bodyPr wrap="square" lIns="508" tIns="508" rIns="508" bIns="508" rtlCol="0" anchor="t">
             <a:normAutofit/>
           </a:bodyPr>
           <a:lstStyle/>
           <a:p>
-            <a:r>
-              <a:rPr lang="en-US" sz="1380" dirty="0">
+            <a:pPr indent="0" marL="0">
+              <a:buNone/>
+            </a:pPr>
+            <a:r>
+              <a:rPr lang="en-US" sz="1220" dirty="0">
                 <a:solidFill>
                   <a:srgbClr val="17364A"/>
                 </a:solidFill>
@@ -15643,13 +15921,16 @@
                 <a:ea typeface="Aptos" pitchFamily="34" charset="-122"/>
                 <a:cs typeface="Aptos" pitchFamily="34" charset="-120"/>
               </a:rPr>
-              <a:t>A vital records linkage may support maternal and child health analysis.</a:t>
-            </a:r>
-            <a:endParaRPr lang="en-US" sz="1380" dirty="0"/>
-          </a:p>
-          <a:p>
-            <a:r>
-              <a:rPr lang="en-US" sz="1380" dirty="0">
+              <a:t>A vital records linkage may support maternal and child health.</a:t>
+            </a:r>
+            <a:endParaRPr lang="en-US" sz="1220" dirty="0"/>
+          </a:p>
+          <a:p>
+            <a:pPr indent="0" marL="0">
+              <a:buNone/>
+            </a:pPr>
+            <a:r>
+              <a:rPr lang="en-US" sz="1220" dirty="0">
                 <a:solidFill>
                   <a:srgbClr val="17364A"/>
                 </a:solidFill>
@@ -15657,13 +15938,16 @@
                 <a:ea typeface="Aptos" pitchFamily="34" charset="-122"/>
                 <a:cs typeface="Aptos" pitchFamily="34" charset="-120"/>
               </a:rPr>
-              <a:t>An AI tool using these linked records may summarize history, predict risk, classify cases,.</a:t>
-            </a:r>
-            <a:endParaRPr lang="en-US" sz="1380" dirty="0"/>
-          </a:p>
-          <a:p>
-            <a:r>
-              <a:rPr lang="en-US" sz="1380" dirty="0">
+              <a:t>An AI tool using these linked records may summarize history,.</a:t>
+            </a:r>
+            <a:endParaRPr lang="en-US" sz="1220" dirty="0"/>
+          </a:p>
+          <a:p>
+            <a:pPr indent="0" marL="0">
+              <a:buNone/>
+            </a:pPr>
+            <a:r>
+              <a:rPr lang="en-US" sz="1220" dirty="0">
                 <a:solidFill>
                   <a:srgbClr val="17364A"/>
                 </a:solidFill>
@@ -15673,7 +15957,7 @@
               </a:rPr>
               <a:t>If linkage is wrong, the AI output may be wrong.</a:t>
             </a:r>
-            <a:endParaRPr lang="en-US" sz="1380" dirty="0"/>
+            <a:endParaRPr lang="en-US" sz="1220" dirty="0"/>
           </a:p>
         </p:txBody>
       </p:sp>
@@ -15751,17 +16035,17 @@
         </p:nvSpPr>
         <p:spPr>
           <a:xfrm>
-            <a:off x="7799832" y="5001768"/>
-            <a:ext cx="3145536" cy="502920"/>
-          </a:xfrm>
-          <a:prstGeom prst="rect">
-            <a:avLst/>
-          </a:prstGeom>
-          <a:noFill/>
-          <a:ln/>
-        </p:spPr>
-        <p:txBody>
-          <a:bodyPr wrap="square" lIns="0" tIns="0" rIns="0" bIns="0" rtlCol="0" anchor="t">
+            <a:off x="7799832" y="4974336"/>
+            <a:ext cx="3145536" cy="576072"/>
+          </a:xfrm>
+          <a:prstGeom prst="rect">
+            <a:avLst/>
+          </a:prstGeom>
+          <a:noFill/>
+          <a:ln/>
+        </p:spPr>
+        <p:txBody>
+          <a:bodyPr wrap="square" lIns="254" tIns="254" rIns="254" bIns="254" rtlCol="0" anchor="t">
             <a:normAutofit/>
           </a:bodyPr>
           <a:lstStyle/>
@@ -15770,7 +16054,7 @@
               <a:buNone/>
             </a:pPr>
             <a:r>
-              <a:rPr lang="en-US" sz="1550" dirty="0">
+              <a:rPr lang="en-US" sz="1320" dirty="0">
                 <a:solidFill>
                   <a:srgbClr val="17364A"/>
                 </a:solidFill>
@@ -15778,9 +16062,9 @@
                 <a:ea typeface="Aptos" pitchFamily="34" charset="-122"/>
                 <a:cs typeface="Aptos" pitchFamily="34" charset="-120"/>
               </a:rPr>
-              <a:t>Connect the concept to public health purpose, responsible use, required safeguards, documentation, and the next action a department should take.</a:t>
-            </a:r>
-            <a:endParaRPr lang="en-US" sz="1550" dirty="0"/>
+              <a:t>Connect the concept to public health purpose, responsible use, required safeguards, documentation, and the next action a.</a:t>
+            </a:r>
+            <a:endParaRPr lang="en-US" sz="1320" dirty="0"/>
           </a:p>
         </p:txBody>
       </p:sp>
@@ -16081,49 +16365,58 @@
           <a:ln/>
         </p:spPr>
         <p:txBody>
-          <a:bodyPr wrap="square" lIns="635" tIns="635" rIns="635" bIns="635" rtlCol="0" anchor="t">
+          <a:bodyPr wrap="square" lIns="1016" tIns="1016" rIns="1016" bIns="1016" rtlCol="0" anchor="t">
             <a:normAutofit/>
           </a:bodyPr>
           <a:lstStyle/>
           <a:p>
+            <a:pPr indent="0" marL="0">
+              <a:buNone/>
+            </a:pPr>
             <a:r>
               <a:rPr lang="en-US" sz="2100" dirty="0">
                 <a:solidFill>
-                  <a:srgbClr val="17364A"/>
-                </a:solidFill>
-                <a:latin typeface="Aptos" pitchFamily="34" charset="0"/>
-                <a:ea typeface="Aptos" pitchFamily="34" charset="-122"/>
-                <a:cs typeface="Aptos" pitchFamily="34" charset="-120"/>
-              </a:rPr>
-              <a:t>Record linkage.</a:t>
+                  <a:srgbClr val="003A63"/>
+                </a:solidFill>
+                <a:latin typeface="Aptos" pitchFamily="34" charset="0"/>
+                <a:ea typeface="Aptos" pitchFamily="34" charset="-122"/>
+                <a:cs typeface="Aptos" pitchFamily="34" charset="-120"/>
+              </a:rPr>
+              <a:t>• Record linkage.</a:t>
             </a:r>
             <a:endParaRPr lang="en-US" sz="2100" dirty="0"/>
           </a:p>
           <a:p>
+            <a:pPr indent="0" marL="0">
+              <a:buNone/>
+            </a:pPr>
             <a:r>
               <a:rPr lang="en-US" sz="2100" dirty="0">
                 <a:solidFill>
-                  <a:srgbClr val="17364A"/>
-                </a:solidFill>
-                <a:latin typeface="Aptos" pitchFamily="34" charset="0"/>
-                <a:ea typeface="Aptos" pitchFamily="34" charset="-122"/>
-                <a:cs typeface="Aptos" pitchFamily="34" charset="-120"/>
-              </a:rPr>
-              <a:t>Record linkage is the process of determining whether records from one or more sources refer to the same.</a:t>
+                  <a:srgbClr val="003A63"/>
+                </a:solidFill>
+                <a:latin typeface="Aptos" pitchFamily="34" charset="0"/>
+                <a:ea typeface="Aptos" pitchFamily="34" charset="-122"/>
+                <a:cs typeface="Aptos" pitchFamily="34" charset="-120"/>
+              </a:rPr>
+              <a:t>• Record linkage is the process of determining whether records from one or more sources refer to.</a:t>
             </a:r>
             <a:endParaRPr lang="en-US" sz="2100" dirty="0"/>
           </a:p>
           <a:p>
+            <a:pPr indent="0" marL="0">
+              <a:buNone/>
+            </a:pPr>
             <a:r>
               <a:rPr lang="en-US" sz="2100" dirty="0">
                 <a:solidFill>
-                  <a:srgbClr val="17364A"/>
-                </a:solidFill>
-                <a:latin typeface="Aptos" pitchFamily="34" charset="0"/>
-                <a:ea typeface="Aptos" pitchFamily="34" charset="-122"/>
-                <a:cs typeface="Aptos" pitchFamily="34" charset="-120"/>
-              </a:rPr>
-              <a:t>The entity may be a person, provider, facility, address, organization, event, or outbreak.</a:t>
+                  <a:srgbClr val="003A63"/>
+                </a:solidFill>
+                <a:latin typeface="Aptos" pitchFamily="34" charset="0"/>
+                <a:ea typeface="Aptos" pitchFamily="34" charset="-122"/>
+                <a:cs typeface="Aptos" pitchFamily="34" charset="-120"/>
+              </a:rPr>
+              <a:t>• The entity may be a person, provider, facility, address, organization, event, or outbreak.</a:t>
             </a:r>
             <a:endParaRPr lang="en-US" sz="2100" dirty="0"/>
           </a:p>
@@ -16203,17 +16496,17 @@
         </p:nvSpPr>
         <p:spPr>
           <a:xfrm>
-            <a:off x="7799832" y="1828800"/>
-            <a:ext cx="3145536" cy="685800"/>
-          </a:xfrm>
-          <a:prstGeom prst="rect">
-            <a:avLst/>
-          </a:prstGeom>
-          <a:noFill/>
-          <a:ln/>
-        </p:spPr>
-        <p:txBody>
-          <a:bodyPr wrap="square" lIns="0" tIns="0" rIns="0" bIns="0" rtlCol="0" anchor="t">
+            <a:off x="7799832" y="1801368"/>
+            <a:ext cx="3145536" cy="758952"/>
+          </a:xfrm>
+          <a:prstGeom prst="rect">
+            <a:avLst/>
+          </a:prstGeom>
+          <a:noFill/>
+          <a:ln/>
+        </p:spPr>
+        <p:txBody>
+          <a:bodyPr wrap="square" lIns="254" tIns="254" rIns="254" bIns="254" rtlCol="0" anchor="t">
             <a:normAutofit/>
           </a:bodyPr>
           <a:lstStyle/>
@@ -16222,7 +16515,7 @@
               <a:buNone/>
             </a:pPr>
             <a:r>
-              <a:rPr lang="en-US" sz="1550" dirty="0">
+              <a:rPr lang="en-US" sz="1320" dirty="0">
                 <a:solidFill>
                   <a:srgbClr val="17364A"/>
                 </a:solidFill>
@@ -16232,7 +16525,7 @@
               </a:rPr>
               <a:t>Record linkage.</a:t>
             </a:r>
-            <a:endParaRPr lang="en-US" sz="1550" dirty="0"/>
+            <a:endParaRPr lang="en-US" sz="1320" dirty="0"/>
           </a:p>
         </p:txBody>
       </p:sp>
@@ -16320,13 +16613,16 @@
           <a:ln/>
         </p:spPr>
         <p:txBody>
-          <a:bodyPr wrap="square" lIns="254" tIns="254" rIns="254" bIns="254" rtlCol="0" anchor="t">
+          <a:bodyPr wrap="square" lIns="508" tIns="508" rIns="508" bIns="508" rtlCol="0" anchor="t">
             <a:normAutofit/>
           </a:bodyPr>
           <a:lstStyle/>
           <a:p>
-            <a:r>
-              <a:rPr lang="en-US" sz="1380" dirty="0">
+            <a:pPr indent="0" marL="0">
+              <a:buNone/>
+            </a:pPr>
+            <a:r>
+              <a:rPr lang="en-US" sz="1220" dirty="0">
                 <a:solidFill>
                   <a:srgbClr val="17364A"/>
                 </a:solidFill>
@@ -16334,13 +16630,16 @@
                 <a:ea typeface="Aptos" pitchFamily="34" charset="-122"/>
                 <a:cs typeface="Aptos" pitchFamily="34" charset="-120"/>
               </a:rPr>
-              <a:t>Record linkage is the process of determining whether records from one or more sources.</a:t>
-            </a:r>
-            <a:endParaRPr lang="en-US" sz="1380" dirty="0"/>
-          </a:p>
-          <a:p>
-            <a:r>
-              <a:rPr lang="en-US" sz="1380" dirty="0">
+              <a:t>Record linkage is the process of determining whether records from.</a:t>
+            </a:r>
+            <a:endParaRPr lang="en-US" sz="1220" dirty="0"/>
+          </a:p>
+          <a:p>
+            <a:pPr indent="0" marL="0">
+              <a:buNone/>
+            </a:pPr>
+            <a:r>
+              <a:rPr lang="en-US" sz="1220" dirty="0">
                 <a:solidFill>
                   <a:srgbClr val="17364A"/>
                 </a:solidFill>
@@ -16350,11 +16649,14 @@
               </a:rPr>
               <a:t>Entity resolution.</a:t>
             </a:r>
-            <a:endParaRPr lang="en-US" sz="1380" dirty="0"/>
-          </a:p>
-          <a:p>
-            <a:r>
-              <a:rPr lang="en-US" sz="1380" dirty="0">
+            <a:endParaRPr lang="en-US" sz="1220" dirty="0"/>
+          </a:p>
+          <a:p>
+            <a:pPr indent="0" marL="0">
+              <a:buNone/>
+            </a:pPr>
+            <a:r>
+              <a:rPr lang="en-US" sz="1220" dirty="0">
                 <a:solidFill>
                   <a:srgbClr val="17364A"/>
                 </a:solidFill>
@@ -16362,9 +16664,9 @@
                 <a:ea typeface="Aptos" pitchFamily="34" charset="-122"/>
                 <a:cs typeface="Aptos" pitchFamily="34" charset="-120"/>
               </a:rPr>
-              <a:t>Entity resolution is the broader process of identifying, matching, merging, separating,.</a:t>
-            </a:r>
-            <a:endParaRPr lang="en-US" sz="1380" dirty="0"/>
+              <a:t>Entity resolution is the broader process of identifying, matching,.</a:t>
+            </a:r>
+            <a:endParaRPr lang="en-US" sz="1220" dirty="0"/>
           </a:p>
         </p:txBody>
       </p:sp>
@@ -16442,17 +16744,17 @@
         </p:nvSpPr>
         <p:spPr>
           <a:xfrm>
-            <a:off x="7799832" y="5001768"/>
-            <a:ext cx="3145536" cy="502920"/>
-          </a:xfrm>
-          <a:prstGeom prst="rect">
-            <a:avLst/>
-          </a:prstGeom>
-          <a:noFill/>
-          <a:ln/>
-        </p:spPr>
-        <p:txBody>
-          <a:bodyPr wrap="square" lIns="0" tIns="0" rIns="0" bIns="0" rtlCol="0" anchor="t">
+            <a:off x="7799832" y="4974336"/>
+            <a:ext cx="3145536" cy="576072"/>
+          </a:xfrm>
+          <a:prstGeom prst="rect">
+            <a:avLst/>
+          </a:prstGeom>
+          <a:noFill/>
+          <a:ln/>
+        </p:spPr>
+        <p:txBody>
+          <a:bodyPr wrap="square" lIns="254" tIns="254" rIns="254" bIns="254" rtlCol="0" anchor="t">
             <a:normAutofit/>
           </a:bodyPr>
           <a:lstStyle/>
@@ -16461,7 +16763,7 @@
               <a:buNone/>
             </a:pPr>
             <a:r>
-              <a:rPr lang="en-US" sz="1550" dirty="0">
+              <a:rPr lang="en-US" sz="1320" dirty="0">
                 <a:solidFill>
                   <a:srgbClr val="17364A"/>
                 </a:solidFill>
@@ -16469,9 +16771,9 @@
                 <a:ea typeface="Aptos" pitchFamily="34" charset="-122"/>
                 <a:cs typeface="Aptos" pitchFamily="34" charset="-120"/>
               </a:rPr>
-              <a:t>Connect the concept to public health purpose, responsible use, required safeguards, documentation, and the next action a department should take.</a:t>
-            </a:r>
-            <a:endParaRPr lang="en-US" sz="1550" dirty="0"/>
+              <a:t>Connect the concept to public health purpose, responsible use, required safeguards, documentation, and the next action a.</a:t>
+            </a:r>
+            <a:endParaRPr lang="en-US" sz="1320" dirty="0"/>
           </a:p>
         </p:txBody>
       </p:sp>
@@ -16772,49 +17074,58 @@
           <a:ln/>
         </p:spPr>
         <p:txBody>
-          <a:bodyPr wrap="square" lIns="635" tIns="635" rIns="635" bIns="635" rtlCol="0" anchor="t">
+          <a:bodyPr wrap="square" lIns="1016" tIns="1016" rIns="1016" bIns="1016" rtlCol="0" anchor="t">
             <a:normAutofit/>
           </a:bodyPr>
           <a:lstStyle/>
           <a:p>
+            <a:pPr indent="0" marL="0">
+              <a:buNone/>
+            </a:pPr>
             <a:r>
               <a:rPr lang="en-US" sz="2100" dirty="0">
                 <a:solidFill>
-                  <a:srgbClr val="17364A"/>
-                </a:solidFill>
-                <a:latin typeface="Aptos" pitchFamily="34" charset="0"/>
-                <a:ea typeface="Aptos" pitchFamily="34" charset="-122"/>
-                <a:cs typeface="Aptos" pitchFamily="34" charset="-120"/>
-              </a:rPr>
-              <a:t>Probabilistic matching.</a:t>
+                  <a:srgbClr val="003A63"/>
+                </a:solidFill>
+                <a:latin typeface="Aptos" pitchFamily="34" charset="0"/>
+                <a:ea typeface="Aptos" pitchFamily="34" charset="-122"/>
+                <a:cs typeface="Aptos" pitchFamily="34" charset="-120"/>
+              </a:rPr>
+              <a:t>• Probabilistic matching.</a:t>
             </a:r>
             <a:endParaRPr lang="en-US" sz="2100" dirty="0"/>
           </a:p>
           <a:p>
+            <a:pPr indent="0" marL="0">
+              <a:buNone/>
+            </a:pPr>
             <a:r>
               <a:rPr lang="en-US" sz="2100" dirty="0">
                 <a:solidFill>
-                  <a:srgbClr val="17364A"/>
-                </a:solidFill>
-                <a:latin typeface="Aptos" pitchFamily="34" charset="0"/>
-                <a:ea typeface="Aptos" pitchFamily="34" charset="-122"/>
-                <a:cs typeface="Aptos" pitchFamily="34" charset="-120"/>
-              </a:rPr>
-              <a:t>Probabilistic matching estimates the likelihood that records refer to the same entity even when fields.</a:t>
+                  <a:srgbClr val="003A63"/>
+                </a:solidFill>
+                <a:latin typeface="Aptos" pitchFamily="34" charset="0"/>
+                <a:ea typeface="Aptos" pitchFamily="34" charset="-122"/>
+                <a:cs typeface="Aptos" pitchFamily="34" charset="-120"/>
+              </a:rPr>
+              <a:t>• Probabilistic matching estimates the likelihood that records refer to the same entity even.</a:t>
             </a:r>
             <a:endParaRPr lang="en-US" sz="2100" dirty="0"/>
           </a:p>
           <a:p>
+            <a:pPr indent="0" marL="0">
+              <a:buNone/>
+            </a:pPr>
             <a:r>
               <a:rPr lang="en-US" sz="2100" dirty="0">
                 <a:solidFill>
-                  <a:srgbClr val="17364A"/>
-                </a:solidFill>
-                <a:latin typeface="Aptos" pitchFamily="34" charset="0"/>
-                <a:ea typeface="Aptos" pitchFamily="34" charset="-122"/>
-                <a:cs typeface="Aptos" pitchFamily="34" charset="-120"/>
-              </a:rPr>
-              <a:t>It can improve recall but requires thresholds, validation, and review.</a:t>
+                  <a:srgbClr val="003A63"/>
+                </a:solidFill>
+                <a:latin typeface="Aptos" pitchFamily="34" charset="0"/>
+                <a:ea typeface="Aptos" pitchFamily="34" charset="-122"/>
+                <a:cs typeface="Aptos" pitchFamily="34" charset="-120"/>
+              </a:rPr>
+              <a:t>• It can improve recall but requires thresholds, validation, and review.</a:t>
             </a:r>
             <a:endParaRPr lang="en-US" sz="2100" dirty="0"/>
           </a:p>
@@ -16894,17 +17205,17 @@
         </p:nvSpPr>
         <p:spPr>
           <a:xfrm>
-            <a:off x="7799832" y="1828800"/>
-            <a:ext cx="3145536" cy="685800"/>
-          </a:xfrm>
-          <a:prstGeom prst="rect">
-            <a:avLst/>
-          </a:prstGeom>
-          <a:noFill/>
-          <a:ln/>
-        </p:spPr>
-        <p:txBody>
-          <a:bodyPr wrap="square" lIns="0" tIns="0" rIns="0" bIns="0" rtlCol="0" anchor="t">
+            <a:off x="7799832" y="1801368"/>
+            <a:ext cx="3145536" cy="758952"/>
+          </a:xfrm>
+          <a:prstGeom prst="rect">
+            <a:avLst/>
+          </a:prstGeom>
+          <a:noFill/>
+          <a:ln/>
+        </p:spPr>
+        <p:txBody>
+          <a:bodyPr wrap="square" lIns="254" tIns="254" rIns="254" bIns="254" rtlCol="0" anchor="t">
             <a:normAutofit/>
           </a:bodyPr>
           <a:lstStyle/>
@@ -16913,7 +17224,7 @@
               <a:buNone/>
             </a:pPr>
             <a:r>
-              <a:rPr lang="en-US" sz="1550" dirty="0">
+              <a:rPr lang="en-US" sz="1320" dirty="0">
                 <a:solidFill>
                   <a:srgbClr val="17364A"/>
                 </a:solidFill>
@@ -16923,7 +17234,7 @@
               </a:rPr>
               <a:t>Probabilistic matching.</a:t>
             </a:r>
-            <a:endParaRPr lang="en-US" sz="1550" dirty="0"/>
+            <a:endParaRPr lang="en-US" sz="1320" dirty="0"/>
           </a:p>
         </p:txBody>
       </p:sp>
@@ -17011,13 +17322,16 @@
           <a:ln/>
         </p:spPr>
         <p:txBody>
-          <a:bodyPr wrap="square" lIns="254" tIns="254" rIns="254" bIns="254" rtlCol="0" anchor="t">
+          <a:bodyPr wrap="square" lIns="508" tIns="508" rIns="508" bIns="508" rtlCol="0" anchor="t">
             <a:normAutofit/>
           </a:bodyPr>
           <a:lstStyle/>
           <a:p>
-            <a:r>
-              <a:rPr lang="en-US" sz="1380" dirty="0">
+            <a:pPr indent="0" marL="0">
+              <a:buNone/>
+            </a:pPr>
+            <a:r>
+              <a:rPr lang="en-US" sz="1220" dirty="0">
                 <a:solidFill>
                   <a:srgbClr val="17364A"/>
                 </a:solidFill>
@@ -17025,13 +17339,16 @@
                 <a:ea typeface="Aptos" pitchFamily="34" charset="-122"/>
                 <a:cs typeface="Aptos" pitchFamily="34" charset="-120"/>
               </a:rPr>
-              <a:t>Probabilistic matching estimates the likelihood that records refer to the same entity even.</a:t>
-            </a:r>
-            <a:endParaRPr lang="en-US" sz="1380" dirty="0"/>
-          </a:p>
-          <a:p>
-            <a:r>
-              <a:rPr lang="en-US" sz="1380" dirty="0">
+              <a:t>Probabilistic matching estimates the likelihood that records refer.</a:t>
+            </a:r>
+            <a:endParaRPr lang="en-US" sz="1220" dirty="0"/>
+          </a:p>
+          <a:p>
+            <a:pPr indent="0" marL="0">
+              <a:buNone/>
+            </a:pPr>
+            <a:r>
+              <a:rPr lang="en-US" sz="1220" dirty="0">
                 <a:solidFill>
                   <a:srgbClr val="17364A"/>
                 </a:solidFill>
@@ -17041,11 +17358,14 @@
               </a:rPr>
               <a:t>Clerical review.</a:t>
             </a:r>
-            <a:endParaRPr lang="en-US" sz="1380" dirty="0"/>
-          </a:p>
-          <a:p>
-            <a:r>
-              <a:rPr lang="en-US" sz="1380" dirty="0">
+            <a:endParaRPr lang="en-US" sz="1220" dirty="0"/>
+          </a:p>
+          <a:p>
+            <a:pPr indent="0" marL="0">
+              <a:buNone/>
+            </a:pPr>
+            <a:r>
+              <a:rPr lang="en-US" sz="1220" dirty="0">
                 <a:solidFill>
                   <a:srgbClr val="17364A"/>
                 </a:solidFill>
@@ -17055,7 +17375,7 @@
               </a:rPr>
               <a:t>Clerical review is human review of uncertain matches.</a:t>
             </a:r>
-            <a:endParaRPr lang="en-US" sz="1380" dirty="0"/>
+            <a:endParaRPr lang="en-US" sz="1220" dirty="0"/>
           </a:p>
         </p:txBody>
       </p:sp>
@@ -17133,17 +17453,17 @@
         </p:nvSpPr>
         <p:spPr>
           <a:xfrm>
-            <a:off x="7799832" y="5001768"/>
-            <a:ext cx="3145536" cy="502920"/>
-          </a:xfrm>
-          <a:prstGeom prst="rect">
-            <a:avLst/>
-          </a:prstGeom>
-          <a:noFill/>
-          <a:ln/>
-        </p:spPr>
-        <p:txBody>
-          <a:bodyPr wrap="square" lIns="0" tIns="0" rIns="0" bIns="0" rtlCol="0" anchor="t">
+            <a:off x="7799832" y="4974336"/>
+            <a:ext cx="3145536" cy="576072"/>
+          </a:xfrm>
+          <a:prstGeom prst="rect">
+            <a:avLst/>
+          </a:prstGeom>
+          <a:noFill/>
+          <a:ln/>
+        </p:spPr>
+        <p:txBody>
+          <a:bodyPr wrap="square" lIns="254" tIns="254" rIns="254" bIns="254" rtlCol="0" anchor="t">
             <a:normAutofit/>
           </a:bodyPr>
           <a:lstStyle/>
@@ -17152,7 +17472,7 @@
               <a:buNone/>
             </a:pPr>
             <a:r>
-              <a:rPr lang="en-US" sz="1550" dirty="0">
+              <a:rPr lang="en-US" sz="1320" dirty="0">
                 <a:solidFill>
                   <a:srgbClr val="17364A"/>
                 </a:solidFill>
@@ -17160,9 +17480,9 @@
                 <a:ea typeface="Aptos" pitchFamily="34" charset="-122"/>
                 <a:cs typeface="Aptos" pitchFamily="34" charset="-120"/>
               </a:rPr>
-              <a:t>Connect the concept to public health purpose, responsible use, required safeguards, documentation, and the next action a department should take.</a:t>
-            </a:r>
-            <a:endParaRPr lang="en-US" sz="1550" dirty="0"/>
+              <a:t>Connect the concept to public health purpose, responsible use, required safeguards, documentation, and the next action a.</a:t>
+            </a:r>
+            <a:endParaRPr lang="en-US" sz="1320" dirty="0"/>
           </a:p>
         </p:txBody>
       </p:sp>

--- a/downloads/presentations/modules/ops-210.pptx
+++ b/downloads/presentations/modules/ops-210.pptx
@@ -3417,11 +3417,11 @@
         <p:spPr>
           <a:xfrm>
             <a:off x="7635240" y="1325880"/>
-            <a:ext cx="3474720" cy="1325880"/>
+            <a:ext cx="3474720" cy="1255471"/>
           </a:xfrm>
           <a:prstGeom prst="roundRect">
             <a:avLst>
-              <a:gd name="adj" fmla="val 8276"/>
+              <a:gd name="adj" fmla="val 8740"/>
             </a:avLst>
           </a:prstGeom>
           <a:solidFill>
@@ -3483,7 +3483,7 @@
         <p:spPr>
           <a:xfrm>
             <a:off x="7799832" y="1801368"/>
-            <a:ext cx="3145536" cy="758952"/>
+            <a:ext cx="3145536" cy="688543"/>
           </a:xfrm>
           <a:prstGeom prst="rect">
             <a:avLst/>
@@ -3523,12 +3523,12 @@
         </p:nvSpPr>
         <p:spPr>
           <a:xfrm>
-            <a:off x="7635240" y="2788920"/>
-            <a:ext cx="3474720" cy="1536192"/>
+            <a:off x="7635240" y="2718511"/>
+            <a:ext cx="3474720" cy="1328623"/>
           </a:xfrm>
           <a:prstGeom prst="roundRect">
             <a:avLst>
-              <a:gd name="adj" fmla="val 7143"/>
+              <a:gd name="adj" fmla="val 8259"/>
             </a:avLst>
           </a:prstGeom>
           <a:solidFill>
@@ -3550,7 +3550,7 @@
         </p:nvSpPr>
         <p:spPr>
           <a:xfrm>
-            <a:off x="7799832" y="2935224"/>
+            <a:off x="7799832" y="2864815"/>
             <a:ext cx="3145536" cy="256032"/>
           </a:xfrm>
           <a:prstGeom prst="rect">
@@ -3589,8 +3589,8 @@
         </p:nvSpPr>
         <p:spPr>
           <a:xfrm>
-            <a:off x="7818120" y="3300984"/>
-            <a:ext cx="3090672" cy="877824"/>
+            <a:off x="7818120" y="3230575"/>
+            <a:ext cx="3090672" cy="670255"/>
           </a:xfrm>
           <a:prstGeom prst="rect">
             <a:avLst/>
@@ -3664,12 +3664,12 @@
         </p:nvSpPr>
         <p:spPr>
           <a:xfrm>
-            <a:off x="7635240" y="4498848"/>
-            <a:ext cx="3474720" cy="1143000"/>
+            <a:off x="7635240" y="4184294"/>
+            <a:ext cx="3474720" cy="1466698"/>
           </a:xfrm>
           <a:prstGeom prst="roundRect">
             <a:avLst>
-              <a:gd name="adj" fmla="val 9600"/>
+              <a:gd name="adj" fmla="val 7481"/>
             </a:avLst>
           </a:prstGeom>
           <a:solidFill>
@@ -3691,7 +3691,7 @@
         </p:nvSpPr>
         <p:spPr>
           <a:xfrm>
-            <a:off x="7799832" y="4645152"/>
+            <a:off x="7799832" y="4330598"/>
             <a:ext cx="3145536" cy="256032"/>
           </a:xfrm>
           <a:prstGeom prst="rect">
@@ -3730,8 +3730,8 @@
         </p:nvSpPr>
         <p:spPr>
           <a:xfrm>
-            <a:off x="7799832" y="4974336"/>
-            <a:ext cx="3145536" cy="576072"/>
+            <a:off x="7799832" y="4659782"/>
+            <a:ext cx="3145536" cy="899770"/>
           </a:xfrm>
           <a:prstGeom prst="rect">
             <a:avLst/>
@@ -3757,7 +3757,7 @@
                 <a:ea typeface="Aptos" pitchFamily="34" charset="-122"/>
                 <a:cs typeface="Aptos" pitchFamily="34" charset="-120"/>
               </a:rPr>
-              <a:t>Connect the concept to public health purpose, responsible use, required safeguards, documentation, and the next action a.</a:t>
+              <a:t>Connect the concept to public health purpose, responsible use, required safeguards, documentation, and the next action a department should take.</a:t>
             </a:r>
             <a:endParaRPr lang="en-US" sz="1320" dirty="0"/>
           </a:p>
@@ -4126,11 +4126,11 @@
         <p:spPr>
           <a:xfrm>
             <a:off x="7635240" y="1325880"/>
-            <a:ext cx="3474720" cy="1325880"/>
+            <a:ext cx="3474720" cy="1255471"/>
           </a:xfrm>
           <a:prstGeom prst="roundRect">
             <a:avLst>
-              <a:gd name="adj" fmla="val 8276"/>
+              <a:gd name="adj" fmla="val 8740"/>
             </a:avLst>
           </a:prstGeom>
           <a:solidFill>
@@ -4192,7 +4192,7 @@
         <p:spPr>
           <a:xfrm>
             <a:off x="7799832" y="1801368"/>
-            <a:ext cx="3145536" cy="758952"/>
+            <a:ext cx="3145536" cy="688543"/>
           </a:xfrm>
           <a:prstGeom prst="rect">
             <a:avLst/>
@@ -4232,12 +4232,12 @@
         </p:nvSpPr>
         <p:spPr>
           <a:xfrm>
-            <a:off x="7635240" y="2788920"/>
-            <a:ext cx="3474720" cy="1536192"/>
+            <a:off x="7635240" y="2718511"/>
+            <a:ext cx="3474720" cy="1328623"/>
           </a:xfrm>
           <a:prstGeom prst="roundRect">
             <a:avLst>
-              <a:gd name="adj" fmla="val 7143"/>
+              <a:gd name="adj" fmla="val 8259"/>
             </a:avLst>
           </a:prstGeom>
           <a:solidFill>
@@ -4259,7 +4259,7 @@
         </p:nvSpPr>
         <p:spPr>
           <a:xfrm>
-            <a:off x="7799832" y="2935224"/>
+            <a:off x="7799832" y="2864815"/>
             <a:ext cx="3145536" cy="256032"/>
           </a:xfrm>
           <a:prstGeom prst="rect">
@@ -4298,8 +4298,8 @@
         </p:nvSpPr>
         <p:spPr>
           <a:xfrm>
-            <a:off x="7818120" y="3300984"/>
-            <a:ext cx="3090672" cy="877824"/>
+            <a:off x="7818120" y="3230575"/>
+            <a:ext cx="3090672" cy="670255"/>
           </a:xfrm>
           <a:prstGeom prst="rect">
             <a:avLst/>
@@ -4373,12 +4373,12 @@
         </p:nvSpPr>
         <p:spPr>
           <a:xfrm>
-            <a:off x="7635240" y="4498848"/>
-            <a:ext cx="3474720" cy="1143000"/>
+            <a:off x="7635240" y="4184294"/>
+            <a:ext cx="3474720" cy="1466698"/>
           </a:xfrm>
           <a:prstGeom prst="roundRect">
             <a:avLst>
-              <a:gd name="adj" fmla="val 9600"/>
+              <a:gd name="adj" fmla="val 7481"/>
             </a:avLst>
           </a:prstGeom>
           <a:solidFill>
@@ -4400,7 +4400,7 @@
         </p:nvSpPr>
         <p:spPr>
           <a:xfrm>
-            <a:off x="7799832" y="4645152"/>
+            <a:off x="7799832" y="4330598"/>
             <a:ext cx="3145536" cy="256032"/>
           </a:xfrm>
           <a:prstGeom prst="rect">
@@ -4439,8 +4439,8 @@
         </p:nvSpPr>
         <p:spPr>
           <a:xfrm>
-            <a:off x="7799832" y="4974336"/>
-            <a:ext cx="3145536" cy="576072"/>
+            <a:off x="7799832" y="4659782"/>
+            <a:ext cx="3145536" cy="899770"/>
           </a:xfrm>
           <a:prstGeom prst="rect">
             <a:avLst/>
@@ -4466,7 +4466,7 @@
                 <a:ea typeface="Aptos" pitchFamily="34" charset="-122"/>
                 <a:cs typeface="Aptos" pitchFamily="34" charset="-120"/>
               </a:rPr>
-              <a:t>Connect the concept to public health purpose, responsible use, required safeguards, documentation, and the next action a.</a:t>
+              <a:t>Connect the concept to public health purpose, responsible use, required safeguards, documentation, and the next action a department should take.</a:t>
             </a:r>
             <a:endParaRPr lang="en-US" sz="1320" dirty="0"/>
           </a:p>
@@ -4835,11 +4835,11 @@
         <p:spPr>
           <a:xfrm>
             <a:off x="7635240" y="1325880"/>
-            <a:ext cx="3474720" cy="1325880"/>
+            <a:ext cx="3474720" cy="1207008"/>
           </a:xfrm>
           <a:prstGeom prst="roundRect">
             <a:avLst>
-              <a:gd name="adj" fmla="val 8276"/>
+              <a:gd name="adj" fmla="val 9091"/>
             </a:avLst>
           </a:prstGeom>
           <a:solidFill>
@@ -4901,7 +4901,7 @@
         <p:spPr>
           <a:xfrm>
             <a:off x="7799832" y="1801368"/>
-            <a:ext cx="3145536" cy="758952"/>
+            <a:ext cx="3145536" cy="640080"/>
           </a:xfrm>
           <a:prstGeom prst="rect">
             <a:avLst/>
@@ -4941,7 +4941,7 @@
         </p:nvSpPr>
         <p:spPr>
           <a:xfrm>
-            <a:off x="7635240" y="2788920"/>
+            <a:off x="7635240" y="2670048"/>
             <a:ext cx="3474720" cy="1536192"/>
           </a:xfrm>
           <a:prstGeom prst="roundRect">
@@ -4968,8 +4968,8 @@
         </p:nvSpPr>
         <p:spPr>
           <a:xfrm>
-            <a:off x="7799832" y="2935224"/>
-            <a:ext cx="3145536" cy="256032"/>
+            <a:off x="7799832" y="2798064"/>
+            <a:ext cx="3145536" cy="237744"/>
           </a:xfrm>
           <a:prstGeom prst="rect">
             <a:avLst/>
@@ -4985,7 +4985,7 @@
               <a:buNone/>
             </a:pPr>
             <a:r>
-              <a:rPr lang="en-US" sz="1300" b="1" dirty="0">
+              <a:rPr lang="en-US" sz="1250" b="1" dirty="0">
                 <a:solidFill>
                   <a:srgbClr val="0068B7"/>
                 </a:solidFill>
@@ -4993,101 +4993,317 @@
                 <a:ea typeface="Aptos" pitchFamily="34" charset="-122"/>
                 <a:cs typeface="Aptos" pitchFamily="34" charset="-120"/>
               </a:rPr>
-              <a:t>Concept checkpoints</a:t>
-            </a:r>
-            <a:endParaRPr lang="en-US" sz="1300" dirty="0"/>
-          </a:p>
-        </p:txBody>
-      </p:sp>
-      <p:sp>
-        <p:nvSpPr>
-          <p:cNvPr id="15" name="Text 13"/>
-          <p:cNvSpPr/>
-          <p:nvPr/>
-        </p:nvSpPr>
-        <p:spPr>
-          <a:xfrm>
-            <a:off x="7818120" y="3300984"/>
-            <a:ext cx="3090672" cy="877824"/>
-          </a:xfrm>
-          <a:prstGeom prst="rect">
-            <a:avLst/>
-          </a:prstGeom>
-          <a:noFill/>
-          <a:ln/>
-        </p:spPr>
-        <p:txBody>
-          <a:bodyPr wrap="square" lIns="508" tIns="508" rIns="508" bIns="508" rtlCol="0" anchor="t">
+              <a:t>Risk control loop</a:t>
+            </a:r>
+            <a:endParaRPr lang="en-US" sz="1250" dirty="0"/>
+          </a:p>
+        </p:txBody>
+      </p:sp>
+      <p:sp>
+        <p:nvSpPr>
+          <p:cNvPr id="15" name="Shape 13"/>
+          <p:cNvSpPr/>
+          <p:nvPr/>
+        </p:nvSpPr>
+        <p:spPr>
+          <a:xfrm>
+            <a:off x="8763000" y="3351276"/>
+            <a:ext cx="164592" cy="0"/>
+          </a:xfrm>
+          <a:prstGeom prst="line">
+            <a:avLst/>
+          </a:prstGeom>
+          <a:noFill/>
+          <a:ln w="15240">
+            <a:solidFill>
+              <a:srgbClr val="8ABBD8"/>
+            </a:solidFill>
+            <a:prstDash val="solid"/>
+          </a:ln>
+        </p:spPr>
+      </p:sp>
+      <p:sp>
+        <p:nvSpPr>
+          <p:cNvPr id="16" name="Shape 14"/>
+          <p:cNvSpPr/>
+          <p:nvPr/>
+        </p:nvSpPr>
+        <p:spPr>
+          <a:xfrm>
+            <a:off x="7872984" y="3200400"/>
+            <a:ext cx="890016" cy="301752"/>
+          </a:xfrm>
+          <a:prstGeom prst="roundRect">
+            <a:avLst>
+              <a:gd name="adj" fmla="val 24242"/>
+            </a:avLst>
+          </a:prstGeom>
+          <a:solidFill>
+            <a:srgbClr val="0068B7"/>
+          </a:solidFill>
+          <a:ln w="12700">
+            <a:solidFill>
+              <a:srgbClr val="0068B7"/>
+            </a:solidFill>
+            <a:prstDash val="solid"/>
+          </a:ln>
+        </p:spPr>
+      </p:sp>
+      <p:sp>
+        <p:nvSpPr>
+          <p:cNvPr id="17" name="Text 15"/>
+          <p:cNvSpPr/>
+          <p:nvPr/>
+        </p:nvSpPr>
+        <p:spPr>
+          <a:xfrm>
+            <a:off x="7909560" y="3273552"/>
+            <a:ext cx="816864" cy="146304"/>
+          </a:xfrm>
+          <a:prstGeom prst="rect">
+            <a:avLst/>
+          </a:prstGeom>
+          <a:noFill/>
+          <a:ln/>
+        </p:spPr>
+        <p:txBody>
+          <a:bodyPr wrap="square" lIns="0" tIns="0" rIns="0" bIns="0" rtlCol="0" anchor="ctr">
             <a:normAutofit/>
           </a:bodyPr>
           <a:lstStyle/>
           <a:p>
-            <a:pPr indent="0" marL="0">
-              <a:buNone/>
-            </a:pPr>
-            <a:r>
-              <a:rPr lang="en-US" sz="1220" dirty="0">
-                <a:solidFill>
-                  <a:srgbClr val="17364A"/>
-                </a:solidFill>
-                <a:latin typeface="Aptos" pitchFamily="34" charset="0"/>
-                <a:ea typeface="Aptos" pitchFamily="34" charset="-122"/>
-                <a:cs typeface="Aptos" pitchFamily="34" charset="-120"/>
-              </a:rPr>
-              <a:t>Missed matches.</a:t>
-            </a:r>
-            <a:endParaRPr lang="en-US" sz="1220" dirty="0"/>
-          </a:p>
-          <a:p>
-            <a:pPr indent="0" marL="0">
-              <a:buNone/>
-            </a:pPr>
-            <a:r>
-              <a:rPr lang="en-US" sz="1220" dirty="0">
-                <a:solidFill>
-                  <a:srgbClr val="17364A"/>
-                </a:solidFill>
-                <a:latin typeface="Aptos" pitchFamily="34" charset="0"/>
-                <a:ea typeface="Aptos" pitchFamily="34" charset="-122"/>
-                <a:cs typeface="Aptos" pitchFamily="34" charset="-120"/>
-              </a:rPr>
-              <a:t>Missed matches can fragment histories and create duplicate work.</a:t>
-            </a:r>
-            <a:endParaRPr lang="en-US" sz="1220" dirty="0"/>
-          </a:p>
-          <a:p>
-            <a:pPr indent="0" marL="0">
-              <a:buNone/>
-            </a:pPr>
-            <a:r>
-              <a:rPr lang="en-US" sz="1220" dirty="0">
-                <a:solidFill>
-                  <a:srgbClr val="17364A"/>
-                </a:solidFill>
-                <a:latin typeface="Aptos" pitchFamily="34" charset="0"/>
-                <a:ea typeface="Aptos" pitchFamily="34" charset="-122"/>
-                <a:cs typeface="Aptos" pitchFamily="34" charset="-120"/>
-              </a:rPr>
-              <a:t>Guardrails include matching quality monitoring, feedback loops,.</a:t>
-            </a:r>
-            <a:endParaRPr lang="en-US" sz="1220" dirty="0"/>
-          </a:p>
-        </p:txBody>
-      </p:sp>
-      <p:sp>
-        <p:nvSpPr>
-          <p:cNvPr id="16" name="Shape 14"/>
-          <p:cNvSpPr/>
-          <p:nvPr/>
-        </p:nvSpPr>
-        <p:spPr>
-          <a:xfrm>
-            <a:off x="7635240" y="4498848"/>
-            <a:ext cx="3474720" cy="1143000"/>
+            <a:pPr algn="ctr" indent="0" marL="0">
+              <a:buNone/>
+            </a:pPr>
+            <a:r>
+              <a:rPr lang="en-US" sz="880" b="1" dirty="0">
+                <a:solidFill>
+                  <a:srgbClr val="FFFFFF"/>
+                </a:solidFill>
+                <a:latin typeface="Aptos" pitchFamily="34" charset="0"/>
+                <a:ea typeface="Aptos" pitchFamily="34" charset="-122"/>
+                <a:cs typeface="Aptos" pitchFamily="34" charset="-120"/>
+              </a:rPr>
+              <a:t>Identify</a:t>
+            </a:r>
+            <a:endParaRPr lang="en-US" sz="880" dirty="0"/>
+          </a:p>
+        </p:txBody>
+      </p:sp>
+      <p:sp>
+        <p:nvSpPr>
+          <p:cNvPr id="18" name="Shape 16"/>
+          <p:cNvSpPr/>
+          <p:nvPr/>
+        </p:nvSpPr>
+        <p:spPr>
+          <a:xfrm>
+            <a:off x="9817608" y="3351276"/>
+            <a:ext cx="164592" cy="0"/>
+          </a:xfrm>
+          <a:prstGeom prst="line">
+            <a:avLst/>
+          </a:prstGeom>
+          <a:noFill/>
+          <a:ln w="15240">
+            <a:solidFill>
+              <a:srgbClr val="8ABBD8"/>
+            </a:solidFill>
+            <a:prstDash val="solid"/>
+          </a:ln>
+        </p:spPr>
+      </p:sp>
+      <p:sp>
+        <p:nvSpPr>
+          <p:cNvPr id="19" name="Shape 17"/>
+          <p:cNvSpPr/>
+          <p:nvPr/>
+        </p:nvSpPr>
+        <p:spPr>
+          <a:xfrm>
+            <a:off x="8927592" y="3200400"/>
+            <a:ext cx="890016" cy="301752"/>
           </a:xfrm>
           <a:prstGeom prst="roundRect">
             <a:avLst>
-              <a:gd name="adj" fmla="val 9600"/>
+              <a:gd name="adj" fmla="val 24242"/>
+            </a:avLst>
+          </a:prstGeom>
+          <a:solidFill>
+            <a:srgbClr val="2F8A28"/>
+          </a:solidFill>
+          <a:ln w="12700">
+            <a:solidFill>
+              <a:srgbClr val="2F8A28"/>
+            </a:solidFill>
+            <a:prstDash val="solid"/>
+          </a:ln>
+        </p:spPr>
+      </p:sp>
+      <p:sp>
+        <p:nvSpPr>
+          <p:cNvPr id="20" name="Text 18"/>
+          <p:cNvSpPr/>
+          <p:nvPr/>
+        </p:nvSpPr>
+        <p:spPr>
+          <a:xfrm>
+            <a:off x="8964168" y="3273552"/>
+            <a:ext cx="816864" cy="146304"/>
+          </a:xfrm>
+          <a:prstGeom prst="rect">
+            <a:avLst/>
+          </a:prstGeom>
+          <a:noFill/>
+          <a:ln/>
+        </p:spPr>
+        <p:txBody>
+          <a:bodyPr wrap="square" lIns="0" tIns="0" rIns="0" bIns="0" rtlCol="0" anchor="ctr">
+            <a:normAutofit/>
+          </a:bodyPr>
+          <a:lstStyle/>
+          <a:p>
+            <a:pPr algn="ctr" indent="0" marL="0">
+              <a:buNone/>
+            </a:pPr>
+            <a:r>
+              <a:rPr lang="en-US" sz="880" b="1" dirty="0">
+                <a:solidFill>
+                  <a:srgbClr val="FFFFFF"/>
+                </a:solidFill>
+                <a:latin typeface="Aptos" pitchFamily="34" charset="0"/>
+                <a:ea typeface="Aptos" pitchFamily="34" charset="-122"/>
+                <a:cs typeface="Aptos" pitchFamily="34" charset="-120"/>
+              </a:rPr>
+              <a:t>Control</a:t>
+            </a:r>
+            <a:endParaRPr lang="en-US" sz="880" dirty="0"/>
+          </a:p>
+        </p:txBody>
+      </p:sp>
+      <p:sp>
+        <p:nvSpPr>
+          <p:cNvPr id="21" name="Shape 19"/>
+          <p:cNvSpPr/>
+          <p:nvPr/>
+        </p:nvSpPr>
+        <p:spPr>
+          <a:xfrm>
+            <a:off x="9982200" y="3200400"/>
+            <a:ext cx="890016" cy="301752"/>
+          </a:xfrm>
+          <a:prstGeom prst="roundRect">
+            <a:avLst>
+              <a:gd name="adj" fmla="val 24242"/>
+            </a:avLst>
+          </a:prstGeom>
+          <a:solidFill>
+            <a:srgbClr val="6A4CA3"/>
+          </a:solidFill>
+          <a:ln w="12700">
+            <a:solidFill>
+              <a:srgbClr val="6A4CA3"/>
+            </a:solidFill>
+            <a:prstDash val="solid"/>
+          </a:ln>
+        </p:spPr>
+      </p:sp>
+      <p:sp>
+        <p:nvSpPr>
+          <p:cNvPr id="22" name="Text 20"/>
+          <p:cNvSpPr/>
+          <p:nvPr/>
+        </p:nvSpPr>
+        <p:spPr>
+          <a:xfrm>
+            <a:off x="10018776" y="3273552"/>
+            <a:ext cx="816864" cy="146304"/>
+          </a:xfrm>
+          <a:prstGeom prst="rect">
+            <a:avLst/>
+          </a:prstGeom>
+          <a:noFill/>
+          <a:ln/>
+        </p:spPr>
+        <p:txBody>
+          <a:bodyPr wrap="square" lIns="0" tIns="0" rIns="0" bIns="0" rtlCol="0" anchor="ctr">
+            <a:normAutofit/>
+          </a:bodyPr>
+          <a:lstStyle/>
+          <a:p>
+            <a:pPr algn="ctr" indent="0" marL="0">
+              <a:buNone/>
+            </a:pPr>
+            <a:r>
+              <a:rPr lang="en-US" sz="880" b="1" dirty="0">
+                <a:solidFill>
+                  <a:srgbClr val="FFFFFF"/>
+                </a:solidFill>
+                <a:latin typeface="Aptos" pitchFamily="34" charset="0"/>
+                <a:ea typeface="Aptos" pitchFamily="34" charset="-122"/>
+                <a:cs typeface="Aptos" pitchFamily="34" charset="-120"/>
+              </a:rPr>
+              <a:t>Monitor</a:t>
+            </a:r>
+            <a:endParaRPr lang="en-US" sz="880" dirty="0"/>
+          </a:p>
+        </p:txBody>
+      </p:sp>
+      <p:sp>
+        <p:nvSpPr>
+          <p:cNvPr id="23" name="Text 21"/>
+          <p:cNvSpPr/>
+          <p:nvPr/>
+        </p:nvSpPr>
+        <p:spPr>
+          <a:xfrm>
+            <a:off x="7854696" y="3694176"/>
+            <a:ext cx="3035808" cy="365760"/>
+          </a:xfrm>
+          <a:prstGeom prst="rect">
+            <a:avLst/>
+          </a:prstGeom>
+          <a:noFill/>
+          <a:ln/>
+        </p:spPr>
+        <p:txBody>
+          <a:bodyPr wrap="square" lIns="254" tIns="254" rIns="254" bIns="254" rtlCol="0" anchor="t">
+            <a:normAutofit/>
+          </a:bodyPr>
+          <a:lstStyle/>
+          <a:p>
+            <a:pPr indent="0" marL="0">
+              <a:buNone/>
+            </a:pPr>
+            <a:r>
+              <a:rPr lang="en-US" sz="1120" dirty="0">
+                <a:solidFill>
+                  <a:srgbClr val="17364A"/>
+                </a:solidFill>
+                <a:latin typeface="Aptos" pitchFamily="34" charset="0"/>
+                <a:ea typeface="Aptos" pitchFamily="34" charset="-122"/>
+                <a:cs typeface="Aptos" pitchFamily="34" charset="-120"/>
+              </a:rPr>
+              <a:t>Responsible use depends on finding risks early, applying safeguards, and watching for drift or harm over time.</a:t>
+            </a:r>
+            <a:endParaRPr lang="en-US" sz="1120" dirty="0"/>
+          </a:p>
+        </p:txBody>
+      </p:sp>
+      <p:sp>
+        <p:nvSpPr>
+          <p:cNvPr id="24" name="Shape 22"/>
+          <p:cNvSpPr/>
+          <p:nvPr/>
+        </p:nvSpPr>
+        <p:spPr>
+          <a:xfrm>
+            <a:off x="7635240" y="4343400"/>
+            <a:ext cx="3474720" cy="1255471"/>
+          </a:xfrm>
+          <a:prstGeom prst="roundRect">
+            <a:avLst>
+              <a:gd name="adj" fmla="val 8740"/>
             </a:avLst>
           </a:prstGeom>
           <a:solidFill>
@@ -5103,13 +5319,13 @@
       </p:sp>
       <p:sp>
         <p:nvSpPr>
-          <p:cNvPr id="17" name="Text 15"/>
-          <p:cNvSpPr/>
-          <p:nvPr/>
-        </p:nvSpPr>
-        <p:spPr>
-          <a:xfrm>
-            <a:off x="7799832" y="4645152"/>
+          <p:cNvPr id="25" name="Text 23"/>
+          <p:cNvSpPr/>
+          <p:nvPr/>
+        </p:nvSpPr>
+        <p:spPr>
+          <a:xfrm>
+            <a:off x="7799832" y="4489704"/>
             <a:ext cx="3145536" cy="256032"/>
           </a:xfrm>
           <a:prstGeom prst="rect">
@@ -5142,14 +5358,14 @@
       </p:sp>
       <p:sp>
         <p:nvSpPr>
-          <p:cNvPr id="18" name="Text 16"/>
-          <p:cNvSpPr/>
-          <p:nvPr/>
-        </p:nvSpPr>
-        <p:spPr>
-          <a:xfrm>
-            <a:off x="7799832" y="4974336"/>
-            <a:ext cx="3145536" cy="576072"/>
+          <p:cNvPr id="26" name="Text 24"/>
+          <p:cNvSpPr/>
+          <p:nvPr/>
+        </p:nvSpPr>
+        <p:spPr>
+          <a:xfrm>
+            <a:off x="7799832" y="4818888"/>
+            <a:ext cx="3145536" cy="688543"/>
           </a:xfrm>
           <a:prstGeom prst="rect">
             <a:avLst/>
@@ -5175,7 +5391,7 @@
                 <a:ea typeface="Aptos" pitchFamily="34" charset="-122"/>
                 <a:cs typeface="Aptos" pitchFamily="34" charset="-120"/>
               </a:rPr>
-              <a:t>Identify what could go wrong, who could be affected, what safeguards are needed, and what evidence should be reviewed.</a:t>
+              <a:t>Identify what could go wrong, who could be affected, what safeguards are needed, and what evidence should be reviewed before use.</a:t>
             </a:r>
             <a:endParaRPr lang="en-US" sz="1320" dirty="0"/>
           </a:p>
@@ -5544,11 +5760,11 @@
         <p:spPr>
           <a:xfrm>
             <a:off x="7635240" y="1325880"/>
-            <a:ext cx="3474720" cy="1325880"/>
+            <a:ext cx="3474720" cy="1207008"/>
           </a:xfrm>
           <a:prstGeom prst="roundRect">
             <a:avLst>
-              <a:gd name="adj" fmla="val 8276"/>
+              <a:gd name="adj" fmla="val 9091"/>
             </a:avLst>
           </a:prstGeom>
           <a:solidFill>
@@ -5610,7 +5826,7 @@
         <p:spPr>
           <a:xfrm>
             <a:off x="7799832" y="1801368"/>
-            <a:ext cx="3145536" cy="758952"/>
+            <a:ext cx="3145536" cy="640080"/>
           </a:xfrm>
           <a:prstGeom prst="rect">
             <a:avLst/>
@@ -5650,7 +5866,7 @@
         </p:nvSpPr>
         <p:spPr>
           <a:xfrm>
-            <a:off x="7635240" y="2788920"/>
+            <a:off x="7635240" y="2670048"/>
             <a:ext cx="3474720" cy="1536192"/>
           </a:xfrm>
           <a:prstGeom prst="roundRect">
@@ -5677,8 +5893,8 @@
         </p:nvSpPr>
         <p:spPr>
           <a:xfrm>
-            <a:off x="7799832" y="2935224"/>
-            <a:ext cx="3145536" cy="256032"/>
+            <a:off x="7799832" y="2798064"/>
+            <a:ext cx="3145536" cy="237744"/>
           </a:xfrm>
           <a:prstGeom prst="rect">
             <a:avLst/>
@@ -5694,7 +5910,7 @@
               <a:buNone/>
             </a:pPr>
             <a:r>
-              <a:rPr lang="en-US" sz="1300" b="1" dirty="0">
+              <a:rPr lang="en-US" sz="1250" b="1" dirty="0">
                 <a:solidFill>
                   <a:srgbClr val="0068B7"/>
                 </a:solidFill>
@@ -5702,101 +5918,317 @@
                 <a:ea typeface="Aptos" pitchFamily="34" charset="-122"/>
                 <a:cs typeface="Aptos" pitchFamily="34" charset="-120"/>
               </a:rPr>
-              <a:t>Concept checkpoints</a:t>
-            </a:r>
-            <a:endParaRPr lang="en-US" sz="1300" dirty="0"/>
-          </a:p>
-        </p:txBody>
-      </p:sp>
-      <p:sp>
-        <p:nvSpPr>
-          <p:cNvPr id="15" name="Text 13"/>
-          <p:cNvSpPr/>
-          <p:nvPr/>
-        </p:nvSpPr>
-        <p:spPr>
-          <a:xfrm>
-            <a:off x="7818120" y="3300984"/>
-            <a:ext cx="3090672" cy="877824"/>
-          </a:xfrm>
-          <a:prstGeom prst="rect">
-            <a:avLst/>
-          </a:prstGeom>
-          <a:noFill/>
-          <a:ln/>
-        </p:spPr>
-        <p:txBody>
-          <a:bodyPr wrap="square" lIns="508" tIns="508" rIns="508" bIns="508" rtlCol="0" anchor="t">
+              <a:t>Risk control loop</a:t>
+            </a:r>
+            <a:endParaRPr lang="en-US" sz="1250" dirty="0"/>
+          </a:p>
+        </p:txBody>
+      </p:sp>
+      <p:sp>
+        <p:nvSpPr>
+          <p:cNvPr id="15" name="Shape 13"/>
+          <p:cNvSpPr/>
+          <p:nvPr/>
+        </p:nvSpPr>
+        <p:spPr>
+          <a:xfrm>
+            <a:off x="8763000" y="3351276"/>
+            <a:ext cx="164592" cy="0"/>
+          </a:xfrm>
+          <a:prstGeom prst="line">
+            <a:avLst/>
+          </a:prstGeom>
+          <a:noFill/>
+          <a:ln w="15240">
+            <a:solidFill>
+              <a:srgbClr val="8ABBD8"/>
+            </a:solidFill>
+            <a:prstDash val="solid"/>
+          </a:ln>
+        </p:spPr>
+      </p:sp>
+      <p:sp>
+        <p:nvSpPr>
+          <p:cNvPr id="16" name="Shape 14"/>
+          <p:cNvSpPr/>
+          <p:nvPr/>
+        </p:nvSpPr>
+        <p:spPr>
+          <a:xfrm>
+            <a:off x="7872984" y="3200400"/>
+            <a:ext cx="890016" cy="301752"/>
+          </a:xfrm>
+          <a:prstGeom prst="roundRect">
+            <a:avLst>
+              <a:gd name="adj" fmla="val 24242"/>
+            </a:avLst>
+          </a:prstGeom>
+          <a:solidFill>
+            <a:srgbClr val="0068B7"/>
+          </a:solidFill>
+          <a:ln w="12700">
+            <a:solidFill>
+              <a:srgbClr val="0068B7"/>
+            </a:solidFill>
+            <a:prstDash val="solid"/>
+          </a:ln>
+        </p:spPr>
+      </p:sp>
+      <p:sp>
+        <p:nvSpPr>
+          <p:cNvPr id="17" name="Text 15"/>
+          <p:cNvSpPr/>
+          <p:nvPr/>
+        </p:nvSpPr>
+        <p:spPr>
+          <a:xfrm>
+            <a:off x="7909560" y="3273552"/>
+            <a:ext cx="816864" cy="146304"/>
+          </a:xfrm>
+          <a:prstGeom prst="rect">
+            <a:avLst/>
+          </a:prstGeom>
+          <a:noFill/>
+          <a:ln/>
+        </p:spPr>
+        <p:txBody>
+          <a:bodyPr wrap="square" lIns="0" tIns="0" rIns="0" bIns="0" rtlCol="0" anchor="ctr">
             <a:normAutofit/>
           </a:bodyPr>
           <a:lstStyle/>
           <a:p>
-            <a:pPr indent="0" marL="0">
-              <a:buNone/>
-            </a:pPr>
-            <a:r>
-              <a:rPr lang="en-US" sz="1220" dirty="0">
-                <a:solidFill>
-                  <a:srgbClr val="17364A"/>
-                </a:solidFill>
-                <a:latin typeface="Aptos" pitchFamily="34" charset="0"/>
-                <a:ea typeface="Aptos" pitchFamily="34" charset="-122"/>
-                <a:cs typeface="Aptos" pitchFamily="34" charset="-120"/>
-              </a:rPr>
-              <a:t>Hidden linkage uncertainty.</a:t>
-            </a:r>
-            <a:endParaRPr lang="en-US" sz="1220" dirty="0"/>
-          </a:p>
-          <a:p>
-            <a:pPr indent="0" marL="0">
-              <a:buNone/>
-            </a:pPr>
-            <a:r>
-              <a:rPr lang="en-US" sz="1220" dirty="0">
-                <a:solidFill>
-                  <a:srgbClr val="17364A"/>
-                </a:solidFill>
-                <a:latin typeface="Aptos" pitchFamily="34" charset="0"/>
-                <a:ea typeface="Aptos" pitchFamily="34" charset="-122"/>
-                <a:cs typeface="Aptos" pitchFamily="34" charset="-120"/>
-              </a:rPr>
-              <a:t>AI outputs may present linked data as certain.</a:t>
-            </a:r>
-            <a:endParaRPr lang="en-US" sz="1220" dirty="0"/>
-          </a:p>
-          <a:p>
-            <a:pPr indent="0" marL="0">
-              <a:buNone/>
-            </a:pPr>
-            <a:r>
-              <a:rPr lang="en-US" sz="1220" dirty="0">
-                <a:solidFill>
-                  <a:srgbClr val="17364A"/>
-                </a:solidFill>
-                <a:latin typeface="Aptos" pitchFamily="34" charset="0"/>
-                <a:ea typeface="Aptos" pitchFamily="34" charset="-122"/>
-                <a:cs typeface="Aptos" pitchFamily="34" charset="-120"/>
-              </a:rPr>
-              <a:t>Guardrails include confidence indicators, source records, and user.</a:t>
-            </a:r>
-            <a:endParaRPr lang="en-US" sz="1220" dirty="0"/>
-          </a:p>
-        </p:txBody>
-      </p:sp>
-      <p:sp>
-        <p:nvSpPr>
-          <p:cNvPr id="16" name="Shape 14"/>
-          <p:cNvSpPr/>
-          <p:nvPr/>
-        </p:nvSpPr>
-        <p:spPr>
-          <a:xfrm>
-            <a:off x="7635240" y="4498848"/>
-            <a:ext cx="3474720" cy="1143000"/>
+            <a:pPr algn="ctr" indent="0" marL="0">
+              <a:buNone/>
+            </a:pPr>
+            <a:r>
+              <a:rPr lang="en-US" sz="880" b="1" dirty="0">
+                <a:solidFill>
+                  <a:srgbClr val="FFFFFF"/>
+                </a:solidFill>
+                <a:latin typeface="Aptos" pitchFamily="34" charset="0"/>
+                <a:ea typeface="Aptos" pitchFamily="34" charset="-122"/>
+                <a:cs typeface="Aptos" pitchFamily="34" charset="-120"/>
+              </a:rPr>
+              <a:t>Identify</a:t>
+            </a:r>
+            <a:endParaRPr lang="en-US" sz="880" dirty="0"/>
+          </a:p>
+        </p:txBody>
+      </p:sp>
+      <p:sp>
+        <p:nvSpPr>
+          <p:cNvPr id="18" name="Shape 16"/>
+          <p:cNvSpPr/>
+          <p:nvPr/>
+        </p:nvSpPr>
+        <p:spPr>
+          <a:xfrm>
+            <a:off x="9817608" y="3351276"/>
+            <a:ext cx="164592" cy="0"/>
+          </a:xfrm>
+          <a:prstGeom prst="line">
+            <a:avLst/>
+          </a:prstGeom>
+          <a:noFill/>
+          <a:ln w="15240">
+            <a:solidFill>
+              <a:srgbClr val="8ABBD8"/>
+            </a:solidFill>
+            <a:prstDash val="solid"/>
+          </a:ln>
+        </p:spPr>
+      </p:sp>
+      <p:sp>
+        <p:nvSpPr>
+          <p:cNvPr id="19" name="Shape 17"/>
+          <p:cNvSpPr/>
+          <p:nvPr/>
+        </p:nvSpPr>
+        <p:spPr>
+          <a:xfrm>
+            <a:off x="8927592" y="3200400"/>
+            <a:ext cx="890016" cy="301752"/>
           </a:xfrm>
           <a:prstGeom prst="roundRect">
             <a:avLst>
-              <a:gd name="adj" fmla="val 9600"/>
+              <a:gd name="adj" fmla="val 24242"/>
+            </a:avLst>
+          </a:prstGeom>
+          <a:solidFill>
+            <a:srgbClr val="2F8A28"/>
+          </a:solidFill>
+          <a:ln w="12700">
+            <a:solidFill>
+              <a:srgbClr val="2F8A28"/>
+            </a:solidFill>
+            <a:prstDash val="solid"/>
+          </a:ln>
+        </p:spPr>
+      </p:sp>
+      <p:sp>
+        <p:nvSpPr>
+          <p:cNvPr id="20" name="Text 18"/>
+          <p:cNvSpPr/>
+          <p:nvPr/>
+        </p:nvSpPr>
+        <p:spPr>
+          <a:xfrm>
+            <a:off x="8964168" y="3273552"/>
+            <a:ext cx="816864" cy="146304"/>
+          </a:xfrm>
+          <a:prstGeom prst="rect">
+            <a:avLst/>
+          </a:prstGeom>
+          <a:noFill/>
+          <a:ln/>
+        </p:spPr>
+        <p:txBody>
+          <a:bodyPr wrap="square" lIns="0" tIns="0" rIns="0" bIns="0" rtlCol="0" anchor="ctr">
+            <a:normAutofit/>
+          </a:bodyPr>
+          <a:lstStyle/>
+          <a:p>
+            <a:pPr algn="ctr" indent="0" marL="0">
+              <a:buNone/>
+            </a:pPr>
+            <a:r>
+              <a:rPr lang="en-US" sz="880" b="1" dirty="0">
+                <a:solidFill>
+                  <a:srgbClr val="FFFFFF"/>
+                </a:solidFill>
+                <a:latin typeface="Aptos" pitchFamily="34" charset="0"/>
+                <a:ea typeface="Aptos" pitchFamily="34" charset="-122"/>
+                <a:cs typeface="Aptos" pitchFamily="34" charset="-120"/>
+              </a:rPr>
+              <a:t>Control</a:t>
+            </a:r>
+            <a:endParaRPr lang="en-US" sz="880" dirty="0"/>
+          </a:p>
+        </p:txBody>
+      </p:sp>
+      <p:sp>
+        <p:nvSpPr>
+          <p:cNvPr id="21" name="Shape 19"/>
+          <p:cNvSpPr/>
+          <p:nvPr/>
+        </p:nvSpPr>
+        <p:spPr>
+          <a:xfrm>
+            <a:off x="9982200" y="3200400"/>
+            <a:ext cx="890016" cy="301752"/>
+          </a:xfrm>
+          <a:prstGeom prst="roundRect">
+            <a:avLst>
+              <a:gd name="adj" fmla="val 24242"/>
+            </a:avLst>
+          </a:prstGeom>
+          <a:solidFill>
+            <a:srgbClr val="6A4CA3"/>
+          </a:solidFill>
+          <a:ln w="12700">
+            <a:solidFill>
+              <a:srgbClr val="6A4CA3"/>
+            </a:solidFill>
+            <a:prstDash val="solid"/>
+          </a:ln>
+        </p:spPr>
+      </p:sp>
+      <p:sp>
+        <p:nvSpPr>
+          <p:cNvPr id="22" name="Text 20"/>
+          <p:cNvSpPr/>
+          <p:nvPr/>
+        </p:nvSpPr>
+        <p:spPr>
+          <a:xfrm>
+            <a:off x="10018776" y="3273552"/>
+            <a:ext cx="816864" cy="146304"/>
+          </a:xfrm>
+          <a:prstGeom prst="rect">
+            <a:avLst/>
+          </a:prstGeom>
+          <a:noFill/>
+          <a:ln/>
+        </p:spPr>
+        <p:txBody>
+          <a:bodyPr wrap="square" lIns="0" tIns="0" rIns="0" bIns="0" rtlCol="0" anchor="ctr">
+            <a:normAutofit/>
+          </a:bodyPr>
+          <a:lstStyle/>
+          <a:p>
+            <a:pPr algn="ctr" indent="0" marL="0">
+              <a:buNone/>
+            </a:pPr>
+            <a:r>
+              <a:rPr lang="en-US" sz="880" b="1" dirty="0">
+                <a:solidFill>
+                  <a:srgbClr val="FFFFFF"/>
+                </a:solidFill>
+                <a:latin typeface="Aptos" pitchFamily="34" charset="0"/>
+                <a:ea typeface="Aptos" pitchFamily="34" charset="-122"/>
+                <a:cs typeface="Aptos" pitchFamily="34" charset="-120"/>
+              </a:rPr>
+              <a:t>Monitor</a:t>
+            </a:r>
+            <a:endParaRPr lang="en-US" sz="880" dirty="0"/>
+          </a:p>
+        </p:txBody>
+      </p:sp>
+      <p:sp>
+        <p:nvSpPr>
+          <p:cNvPr id="23" name="Text 21"/>
+          <p:cNvSpPr/>
+          <p:nvPr/>
+        </p:nvSpPr>
+        <p:spPr>
+          <a:xfrm>
+            <a:off x="7854696" y="3694176"/>
+            <a:ext cx="3035808" cy="365760"/>
+          </a:xfrm>
+          <a:prstGeom prst="rect">
+            <a:avLst/>
+          </a:prstGeom>
+          <a:noFill/>
+          <a:ln/>
+        </p:spPr>
+        <p:txBody>
+          <a:bodyPr wrap="square" lIns="254" tIns="254" rIns="254" bIns="254" rtlCol="0" anchor="t">
+            <a:normAutofit/>
+          </a:bodyPr>
+          <a:lstStyle/>
+          <a:p>
+            <a:pPr indent="0" marL="0">
+              <a:buNone/>
+            </a:pPr>
+            <a:r>
+              <a:rPr lang="en-US" sz="1120" dirty="0">
+                <a:solidFill>
+                  <a:srgbClr val="17364A"/>
+                </a:solidFill>
+                <a:latin typeface="Aptos" pitchFamily="34" charset="0"/>
+                <a:ea typeface="Aptos" pitchFamily="34" charset="-122"/>
+                <a:cs typeface="Aptos" pitchFamily="34" charset="-120"/>
+              </a:rPr>
+              <a:t>Responsible use depends on finding risks early, applying safeguards, and watching for drift or harm over time.</a:t>
+            </a:r>
+            <a:endParaRPr lang="en-US" sz="1120" dirty="0"/>
+          </a:p>
+        </p:txBody>
+      </p:sp>
+      <p:sp>
+        <p:nvSpPr>
+          <p:cNvPr id="24" name="Shape 22"/>
+          <p:cNvSpPr/>
+          <p:nvPr/>
+        </p:nvSpPr>
+        <p:spPr>
+          <a:xfrm>
+            <a:off x="7635240" y="4343400"/>
+            <a:ext cx="3474720" cy="1255471"/>
+          </a:xfrm>
+          <a:prstGeom prst="roundRect">
+            <a:avLst>
+              <a:gd name="adj" fmla="val 8740"/>
             </a:avLst>
           </a:prstGeom>
           <a:solidFill>
@@ -5812,13 +6244,13 @@
       </p:sp>
       <p:sp>
         <p:nvSpPr>
-          <p:cNvPr id="17" name="Text 15"/>
-          <p:cNvSpPr/>
-          <p:nvPr/>
-        </p:nvSpPr>
-        <p:spPr>
-          <a:xfrm>
-            <a:off x="7799832" y="4645152"/>
+          <p:cNvPr id="25" name="Text 23"/>
+          <p:cNvSpPr/>
+          <p:nvPr/>
+        </p:nvSpPr>
+        <p:spPr>
+          <a:xfrm>
+            <a:off x="7799832" y="4489704"/>
             <a:ext cx="3145536" cy="256032"/>
           </a:xfrm>
           <a:prstGeom prst="rect">
@@ -5851,14 +6283,14 @@
       </p:sp>
       <p:sp>
         <p:nvSpPr>
-          <p:cNvPr id="18" name="Text 16"/>
-          <p:cNvSpPr/>
-          <p:nvPr/>
-        </p:nvSpPr>
-        <p:spPr>
-          <a:xfrm>
-            <a:off x="7799832" y="4974336"/>
-            <a:ext cx="3145536" cy="576072"/>
+          <p:cNvPr id="26" name="Text 24"/>
+          <p:cNvSpPr/>
+          <p:nvPr/>
+        </p:nvSpPr>
+        <p:spPr>
+          <a:xfrm>
+            <a:off x="7799832" y="4818888"/>
+            <a:ext cx="3145536" cy="688543"/>
           </a:xfrm>
           <a:prstGeom prst="rect">
             <a:avLst/>
@@ -5884,7 +6316,7 @@
                 <a:ea typeface="Aptos" pitchFamily="34" charset="-122"/>
                 <a:cs typeface="Aptos" pitchFamily="34" charset="-120"/>
               </a:rPr>
-              <a:t>Identify what could go wrong, who could be affected, what safeguards are needed, and what evidence should be reviewed.</a:t>
+              <a:t>Identify what could go wrong, who could be affected, what safeguards are needed, and what evidence should be reviewed before use.</a:t>
             </a:r>
             <a:endParaRPr lang="en-US" sz="1320" dirty="0"/>
           </a:p>
@@ -6253,11 +6685,11 @@
         <p:spPr>
           <a:xfrm>
             <a:off x="7635240" y="1325880"/>
-            <a:ext cx="3474720" cy="1325880"/>
+            <a:ext cx="3474720" cy="1255471"/>
           </a:xfrm>
           <a:prstGeom prst="roundRect">
             <a:avLst>
-              <a:gd name="adj" fmla="val 8276"/>
+              <a:gd name="adj" fmla="val 8740"/>
             </a:avLst>
           </a:prstGeom>
           <a:solidFill>
@@ -6319,7 +6751,7 @@
         <p:spPr>
           <a:xfrm>
             <a:off x="7799832" y="1801368"/>
-            <a:ext cx="3145536" cy="758952"/>
+            <a:ext cx="3145536" cy="688543"/>
           </a:xfrm>
           <a:prstGeom prst="rect">
             <a:avLst/>
@@ -6359,12 +6791,12 @@
         </p:nvSpPr>
         <p:spPr>
           <a:xfrm>
-            <a:off x="7635240" y="2788920"/>
-            <a:ext cx="3474720" cy="1536192"/>
+            <a:off x="7635240" y="2718511"/>
+            <a:ext cx="3474720" cy="1328623"/>
           </a:xfrm>
           <a:prstGeom prst="roundRect">
             <a:avLst>
-              <a:gd name="adj" fmla="val 7143"/>
+              <a:gd name="adj" fmla="val 8259"/>
             </a:avLst>
           </a:prstGeom>
           <a:solidFill>
@@ -6386,8 +6818,8 @@
         </p:nvSpPr>
         <p:spPr>
           <a:xfrm>
-            <a:off x="7799832" y="2935224"/>
-            <a:ext cx="3145536" cy="256032"/>
+            <a:off x="7799832" y="2846527"/>
+            <a:ext cx="3145536" cy="237744"/>
           </a:xfrm>
           <a:prstGeom prst="rect">
             <a:avLst/>
@@ -6403,7 +6835,7 @@
               <a:buNone/>
             </a:pPr>
             <a:r>
-              <a:rPr lang="en-US" sz="1300" b="1" dirty="0">
+              <a:rPr lang="en-US" sz="1250" b="1" dirty="0">
                 <a:solidFill>
                   <a:srgbClr val="0068B7"/>
                 </a:solidFill>
@@ -6411,101 +6843,317 @@
                 <a:ea typeface="Aptos" pitchFamily="34" charset="-122"/>
                 <a:cs typeface="Aptos" pitchFamily="34" charset="-120"/>
               </a:rPr>
-              <a:t>Concept checkpoints</a:t>
-            </a:r>
-            <a:endParaRPr lang="en-US" sz="1300" dirty="0"/>
-          </a:p>
-        </p:txBody>
-      </p:sp>
-      <p:sp>
-        <p:nvSpPr>
-          <p:cNvPr id="15" name="Text 13"/>
-          <p:cNvSpPr/>
-          <p:nvPr/>
-        </p:nvSpPr>
-        <p:spPr>
-          <a:xfrm>
-            <a:off x="7818120" y="3300984"/>
-            <a:ext cx="3090672" cy="877824"/>
-          </a:xfrm>
-          <a:prstGeom prst="rect">
-            <a:avLst/>
-          </a:prstGeom>
-          <a:noFill/>
-          <a:ln/>
-        </p:spPr>
-        <p:txBody>
-          <a:bodyPr wrap="square" lIns="508" tIns="508" rIns="508" bIns="508" rtlCol="0" anchor="t">
+              <a:t>Implementation path</a:t>
+            </a:r>
+            <a:endParaRPr lang="en-US" sz="1250" dirty="0"/>
+          </a:p>
+        </p:txBody>
+      </p:sp>
+      <p:sp>
+        <p:nvSpPr>
+          <p:cNvPr id="15" name="Shape 13"/>
+          <p:cNvSpPr/>
+          <p:nvPr/>
+        </p:nvSpPr>
+        <p:spPr>
+          <a:xfrm>
+            <a:off x="8763000" y="3399739"/>
+            <a:ext cx="164592" cy="0"/>
+          </a:xfrm>
+          <a:prstGeom prst="line">
+            <a:avLst/>
+          </a:prstGeom>
+          <a:noFill/>
+          <a:ln w="15240">
+            <a:solidFill>
+              <a:srgbClr val="8ABBD8"/>
+            </a:solidFill>
+            <a:prstDash val="solid"/>
+          </a:ln>
+        </p:spPr>
+      </p:sp>
+      <p:sp>
+        <p:nvSpPr>
+          <p:cNvPr id="16" name="Shape 14"/>
+          <p:cNvSpPr/>
+          <p:nvPr/>
+        </p:nvSpPr>
+        <p:spPr>
+          <a:xfrm>
+            <a:off x="7872984" y="3248863"/>
+            <a:ext cx="890016" cy="301752"/>
+          </a:xfrm>
+          <a:prstGeom prst="roundRect">
+            <a:avLst>
+              <a:gd name="adj" fmla="val 24242"/>
+            </a:avLst>
+          </a:prstGeom>
+          <a:solidFill>
+            <a:srgbClr val="0068B7"/>
+          </a:solidFill>
+          <a:ln w="12700">
+            <a:solidFill>
+              <a:srgbClr val="0068B7"/>
+            </a:solidFill>
+            <a:prstDash val="solid"/>
+          </a:ln>
+        </p:spPr>
+      </p:sp>
+      <p:sp>
+        <p:nvSpPr>
+          <p:cNvPr id="17" name="Text 15"/>
+          <p:cNvSpPr/>
+          <p:nvPr/>
+        </p:nvSpPr>
+        <p:spPr>
+          <a:xfrm>
+            <a:off x="7909560" y="3322015"/>
+            <a:ext cx="816864" cy="146304"/>
+          </a:xfrm>
+          <a:prstGeom prst="rect">
+            <a:avLst/>
+          </a:prstGeom>
+          <a:noFill/>
+          <a:ln/>
+        </p:spPr>
+        <p:txBody>
+          <a:bodyPr wrap="square" lIns="0" tIns="0" rIns="0" bIns="0" rtlCol="0" anchor="ctr">
             <a:normAutofit/>
           </a:bodyPr>
           <a:lstStyle/>
           <a:p>
-            <a:pPr indent="0" marL="0">
-              <a:buNone/>
-            </a:pPr>
-            <a:r>
-              <a:rPr lang="en-US" sz="1220" dirty="0">
-                <a:solidFill>
-                  <a:srgbClr val="17364A"/>
-                </a:solidFill>
-                <a:latin typeface="Aptos" pitchFamily="34" charset="0"/>
-                <a:ea typeface="Aptos" pitchFamily="34" charset="-122"/>
-                <a:cs typeface="Aptos" pitchFamily="34" charset="-120"/>
-              </a:rPr>
-              <a:t>Generative AI may summarize linked records, so source attribution.</a:t>
-            </a:r>
-            <a:endParaRPr lang="en-US" sz="1220" dirty="0"/>
-          </a:p>
-          <a:p>
-            <a:pPr indent="0" marL="0">
-              <a:buNone/>
-            </a:pPr>
-            <a:r>
-              <a:rPr lang="en-US" sz="1220" dirty="0">
-                <a:solidFill>
-                  <a:srgbClr val="17364A"/>
-                </a:solidFill>
-                <a:latin typeface="Aptos" pitchFamily="34" charset="0"/>
-                <a:ea typeface="Aptos" pitchFamily="34" charset="-122"/>
-                <a:cs typeface="Aptos" pitchFamily="34" charset="-120"/>
-              </a:rPr>
-              <a:t>Predictive analytics may use features created from linked records,.</a:t>
-            </a:r>
-            <a:endParaRPr lang="en-US" sz="1220" dirty="0"/>
-          </a:p>
-          <a:p>
-            <a:pPr indent="0" marL="0">
-              <a:buNone/>
-            </a:pPr>
-            <a:r>
-              <a:rPr lang="en-US" sz="1220" dirty="0">
-                <a:solidFill>
-                  <a:srgbClr val="17364A"/>
-                </a:solidFill>
-                <a:latin typeface="Aptos" pitchFamily="34" charset="0"/>
-                <a:ea typeface="Aptos" pitchFamily="34" charset="-122"/>
-                <a:cs typeface="Aptos" pitchFamily="34" charset="-120"/>
-              </a:rPr>
-              <a:t>Agentic AI should not automatically merge or update records.</a:t>
-            </a:r>
-            <a:endParaRPr lang="en-US" sz="1220" dirty="0"/>
-          </a:p>
-        </p:txBody>
-      </p:sp>
-      <p:sp>
-        <p:nvSpPr>
-          <p:cNvPr id="16" name="Shape 14"/>
-          <p:cNvSpPr/>
-          <p:nvPr/>
-        </p:nvSpPr>
-        <p:spPr>
-          <a:xfrm>
-            <a:off x="7635240" y="4498848"/>
-            <a:ext cx="3474720" cy="1143000"/>
+            <a:pPr algn="ctr" indent="0" marL="0">
+              <a:buNone/>
+            </a:pPr>
+            <a:r>
+              <a:rPr lang="en-US" sz="880" b="1" dirty="0">
+                <a:solidFill>
+                  <a:srgbClr val="FFFFFF"/>
+                </a:solidFill>
+                <a:latin typeface="Aptos" pitchFamily="34" charset="0"/>
+                <a:ea typeface="Aptos" pitchFamily="34" charset="-122"/>
+                <a:cs typeface="Aptos" pitchFamily="34" charset="-120"/>
+              </a:rPr>
+              <a:t>Need</a:t>
+            </a:r>
+            <a:endParaRPr lang="en-US" sz="880" dirty="0"/>
+          </a:p>
+        </p:txBody>
+      </p:sp>
+      <p:sp>
+        <p:nvSpPr>
+          <p:cNvPr id="18" name="Shape 16"/>
+          <p:cNvSpPr/>
+          <p:nvPr/>
+        </p:nvSpPr>
+        <p:spPr>
+          <a:xfrm>
+            <a:off x="9817608" y="3399739"/>
+            <a:ext cx="164592" cy="0"/>
+          </a:xfrm>
+          <a:prstGeom prst="line">
+            <a:avLst/>
+          </a:prstGeom>
+          <a:noFill/>
+          <a:ln w="15240">
+            <a:solidFill>
+              <a:srgbClr val="8ABBD8"/>
+            </a:solidFill>
+            <a:prstDash val="solid"/>
+          </a:ln>
+        </p:spPr>
+      </p:sp>
+      <p:sp>
+        <p:nvSpPr>
+          <p:cNvPr id="19" name="Shape 17"/>
+          <p:cNvSpPr/>
+          <p:nvPr/>
+        </p:nvSpPr>
+        <p:spPr>
+          <a:xfrm>
+            <a:off x="8927592" y="3248863"/>
+            <a:ext cx="890016" cy="301752"/>
           </a:xfrm>
           <a:prstGeom prst="roundRect">
             <a:avLst>
-              <a:gd name="adj" fmla="val 9600"/>
+              <a:gd name="adj" fmla="val 24242"/>
+            </a:avLst>
+          </a:prstGeom>
+          <a:solidFill>
+            <a:srgbClr val="2F8A28"/>
+          </a:solidFill>
+          <a:ln w="12700">
+            <a:solidFill>
+              <a:srgbClr val="2F8A28"/>
+            </a:solidFill>
+            <a:prstDash val="solid"/>
+          </a:ln>
+        </p:spPr>
+      </p:sp>
+      <p:sp>
+        <p:nvSpPr>
+          <p:cNvPr id="20" name="Text 18"/>
+          <p:cNvSpPr/>
+          <p:nvPr/>
+        </p:nvSpPr>
+        <p:spPr>
+          <a:xfrm>
+            <a:off x="8964168" y="3322015"/>
+            <a:ext cx="816864" cy="146304"/>
+          </a:xfrm>
+          <a:prstGeom prst="rect">
+            <a:avLst/>
+          </a:prstGeom>
+          <a:noFill/>
+          <a:ln/>
+        </p:spPr>
+        <p:txBody>
+          <a:bodyPr wrap="square" lIns="0" tIns="0" rIns="0" bIns="0" rtlCol="0" anchor="ctr">
+            <a:normAutofit/>
+          </a:bodyPr>
+          <a:lstStyle/>
+          <a:p>
+            <a:pPr algn="ctr" indent="0" marL="0">
+              <a:buNone/>
+            </a:pPr>
+            <a:r>
+              <a:rPr lang="en-US" sz="880" b="1" dirty="0">
+                <a:solidFill>
+                  <a:srgbClr val="FFFFFF"/>
+                </a:solidFill>
+                <a:latin typeface="Aptos" pitchFamily="34" charset="0"/>
+                <a:ea typeface="Aptos" pitchFamily="34" charset="-122"/>
+                <a:cs typeface="Aptos" pitchFamily="34" charset="-120"/>
+              </a:rPr>
+              <a:t>Build</a:t>
+            </a:r>
+            <a:endParaRPr lang="en-US" sz="880" dirty="0"/>
+          </a:p>
+        </p:txBody>
+      </p:sp>
+      <p:sp>
+        <p:nvSpPr>
+          <p:cNvPr id="21" name="Shape 19"/>
+          <p:cNvSpPr/>
+          <p:nvPr/>
+        </p:nvSpPr>
+        <p:spPr>
+          <a:xfrm>
+            <a:off x="9982200" y="3248863"/>
+            <a:ext cx="890016" cy="301752"/>
+          </a:xfrm>
+          <a:prstGeom prst="roundRect">
+            <a:avLst>
+              <a:gd name="adj" fmla="val 24242"/>
+            </a:avLst>
+          </a:prstGeom>
+          <a:solidFill>
+            <a:srgbClr val="6A4CA3"/>
+          </a:solidFill>
+          <a:ln w="12700">
+            <a:solidFill>
+              <a:srgbClr val="6A4CA3"/>
+            </a:solidFill>
+            <a:prstDash val="solid"/>
+          </a:ln>
+        </p:spPr>
+      </p:sp>
+      <p:sp>
+        <p:nvSpPr>
+          <p:cNvPr id="22" name="Text 20"/>
+          <p:cNvSpPr/>
+          <p:nvPr/>
+        </p:nvSpPr>
+        <p:spPr>
+          <a:xfrm>
+            <a:off x="10018776" y="3322015"/>
+            <a:ext cx="816864" cy="146304"/>
+          </a:xfrm>
+          <a:prstGeom prst="rect">
+            <a:avLst/>
+          </a:prstGeom>
+          <a:noFill/>
+          <a:ln/>
+        </p:spPr>
+        <p:txBody>
+          <a:bodyPr wrap="square" lIns="0" tIns="0" rIns="0" bIns="0" rtlCol="0" anchor="ctr">
+            <a:normAutofit/>
+          </a:bodyPr>
+          <a:lstStyle/>
+          <a:p>
+            <a:pPr algn="ctr" indent="0" marL="0">
+              <a:buNone/>
+            </a:pPr>
+            <a:r>
+              <a:rPr lang="en-US" sz="880" b="1" dirty="0">
+                <a:solidFill>
+                  <a:srgbClr val="FFFFFF"/>
+                </a:solidFill>
+                <a:latin typeface="Aptos" pitchFamily="34" charset="0"/>
+                <a:ea typeface="Aptos" pitchFamily="34" charset="-122"/>
+                <a:cs typeface="Aptos" pitchFamily="34" charset="-120"/>
+              </a:rPr>
+              <a:t>Adopt</a:t>
+            </a:r>
+            <a:endParaRPr lang="en-US" sz="880" dirty="0"/>
+          </a:p>
+        </p:txBody>
+      </p:sp>
+      <p:sp>
+        <p:nvSpPr>
+          <p:cNvPr id="23" name="Text 21"/>
+          <p:cNvSpPr/>
+          <p:nvPr/>
+        </p:nvSpPr>
+        <p:spPr>
+          <a:xfrm>
+            <a:off x="7854696" y="3742639"/>
+            <a:ext cx="3035808" cy="158191"/>
+          </a:xfrm>
+          <a:prstGeom prst="rect">
+            <a:avLst/>
+          </a:prstGeom>
+          <a:noFill/>
+          <a:ln/>
+        </p:spPr>
+        <p:txBody>
+          <a:bodyPr wrap="square" lIns="254" tIns="254" rIns="254" bIns="254" rtlCol="0" anchor="t">
+            <a:normAutofit/>
+          </a:bodyPr>
+          <a:lstStyle/>
+          <a:p>
+            <a:pPr indent="0" marL="0">
+              <a:buNone/>
+            </a:pPr>
+            <a:r>
+              <a:rPr lang="en-US" sz="1120" dirty="0">
+                <a:solidFill>
+                  <a:srgbClr val="17364A"/>
+                </a:solidFill>
+                <a:latin typeface="Aptos" pitchFamily="34" charset="0"/>
+                <a:ea typeface="Aptos" pitchFamily="34" charset="-122"/>
+                <a:cs typeface="Aptos" pitchFamily="34" charset="-120"/>
+              </a:rPr>
+              <a:t>Implementation work should make dependencies, approvals, training, and sustainment visible before launch.</a:t>
+            </a:r>
+            <a:endParaRPr lang="en-US" sz="1120" dirty="0"/>
+          </a:p>
+        </p:txBody>
+      </p:sp>
+      <p:sp>
+        <p:nvSpPr>
+          <p:cNvPr id="24" name="Shape 22"/>
+          <p:cNvSpPr/>
+          <p:nvPr/>
+        </p:nvSpPr>
+        <p:spPr>
+          <a:xfrm>
+            <a:off x="7635240" y="4184294"/>
+            <a:ext cx="3474720" cy="1466698"/>
+          </a:xfrm>
+          <a:prstGeom prst="roundRect">
+            <a:avLst>
+              <a:gd name="adj" fmla="val 7481"/>
             </a:avLst>
           </a:prstGeom>
           <a:solidFill>
@@ -6521,13 +7169,13 @@
       </p:sp>
       <p:sp>
         <p:nvSpPr>
-          <p:cNvPr id="17" name="Text 15"/>
-          <p:cNvSpPr/>
-          <p:nvPr/>
-        </p:nvSpPr>
-        <p:spPr>
-          <a:xfrm>
-            <a:off x="7799832" y="4645152"/>
+          <p:cNvPr id="25" name="Text 23"/>
+          <p:cNvSpPr/>
+          <p:nvPr/>
+        </p:nvSpPr>
+        <p:spPr>
+          <a:xfrm>
+            <a:off x="7799832" y="4330598"/>
             <a:ext cx="3145536" cy="256032"/>
           </a:xfrm>
           <a:prstGeom prst="rect">
@@ -6560,14 +7208,14 @@
       </p:sp>
       <p:sp>
         <p:nvSpPr>
-          <p:cNvPr id="18" name="Text 16"/>
-          <p:cNvSpPr/>
-          <p:nvPr/>
-        </p:nvSpPr>
-        <p:spPr>
-          <a:xfrm>
-            <a:off x="7799832" y="4974336"/>
-            <a:ext cx="3145536" cy="576072"/>
+          <p:cNvPr id="26" name="Text 24"/>
+          <p:cNvSpPr/>
+          <p:nvPr/>
+        </p:nvSpPr>
+        <p:spPr>
+          <a:xfrm>
+            <a:off x="7799832" y="4659782"/>
+            <a:ext cx="3145536" cy="899770"/>
           </a:xfrm>
           <a:prstGeom prst="rect">
             <a:avLst/>
@@ -6593,7 +7241,7 @@
                 <a:ea typeface="Aptos" pitchFamily="34" charset="-122"/>
                 <a:cs typeface="Aptos" pitchFamily="34" charset="-120"/>
               </a:rPr>
-              <a:t>Use the concept to clarify workflow changes, dependencies, staffing, procurement requirements, training needs, and.</a:t>
+              <a:t>Use the concept to clarify workflow changes, dependencies, staffing, procurement requirements, training needs, and implementation checkpoints.</a:t>
             </a:r>
             <a:endParaRPr lang="en-US" sz="1320" dirty="0"/>
           </a:p>
@@ -6962,11 +7610,11 @@
         <p:spPr>
           <a:xfrm>
             <a:off x="7635240" y="1325880"/>
-            <a:ext cx="3474720" cy="1325880"/>
+            <a:ext cx="3474720" cy="1207008"/>
           </a:xfrm>
           <a:prstGeom prst="roundRect">
             <a:avLst>
-              <a:gd name="adj" fmla="val 8276"/>
+              <a:gd name="adj" fmla="val 9091"/>
             </a:avLst>
           </a:prstGeom>
           <a:solidFill>
@@ -7028,7 +7676,7 @@
         <p:spPr>
           <a:xfrm>
             <a:off x="7799832" y="1801368"/>
-            <a:ext cx="3145536" cy="758952"/>
+            <a:ext cx="3145536" cy="640080"/>
           </a:xfrm>
           <a:prstGeom prst="rect">
             <a:avLst/>
@@ -7068,12 +7716,12 @@
         </p:nvSpPr>
         <p:spPr>
           <a:xfrm>
-            <a:off x="7635240" y="2788920"/>
-            <a:ext cx="3474720" cy="1536192"/>
+            <a:off x="7635240" y="2670048"/>
+            <a:ext cx="3474720" cy="1377086"/>
           </a:xfrm>
           <a:prstGeom prst="roundRect">
             <a:avLst>
-              <a:gd name="adj" fmla="val 7143"/>
+              <a:gd name="adj" fmla="val 7968"/>
             </a:avLst>
           </a:prstGeom>
           <a:solidFill>
@@ -7095,7 +7743,7 @@
         </p:nvSpPr>
         <p:spPr>
           <a:xfrm>
-            <a:off x="7799832" y="2935224"/>
+            <a:off x="7799832" y="2816352"/>
             <a:ext cx="3145536" cy="256032"/>
           </a:xfrm>
           <a:prstGeom prst="rect">
@@ -7134,8 +7782,8 @@
         </p:nvSpPr>
         <p:spPr>
           <a:xfrm>
-            <a:off x="7818120" y="3300984"/>
-            <a:ext cx="3090672" cy="877824"/>
+            <a:off x="7818120" y="3182112"/>
+            <a:ext cx="3090672" cy="718718"/>
           </a:xfrm>
           <a:prstGeom prst="rect">
             <a:avLst/>
@@ -7209,12 +7857,12 @@
         </p:nvSpPr>
         <p:spPr>
           <a:xfrm>
-            <a:off x="7635240" y="4498848"/>
-            <a:ext cx="3474720" cy="1143000"/>
+            <a:off x="7635240" y="4184294"/>
+            <a:ext cx="3474720" cy="1466698"/>
           </a:xfrm>
           <a:prstGeom prst="roundRect">
             <a:avLst>
-              <a:gd name="adj" fmla="val 9600"/>
+              <a:gd name="adj" fmla="val 7481"/>
             </a:avLst>
           </a:prstGeom>
           <a:solidFill>
@@ -7236,7 +7884,7 @@
         </p:nvSpPr>
         <p:spPr>
           <a:xfrm>
-            <a:off x="7799832" y="4645152"/>
+            <a:off x="7799832" y="4330598"/>
             <a:ext cx="3145536" cy="256032"/>
           </a:xfrm>
           <a:prstGeom prst="rect">
@@ -7275,8 +7923,8 @@
         </p:nvSpPr>
         <p:spPr>
           <a:xfrm>
-            <a:off x="7799832" y="4974336"/>
-            <a:ext cx="3145536" cy="576072"/>
+            <a:off x="7799832" y="4659782"/>
+            <a:ext cx="3145536" cy="899770"/>
           </a:xfrm>
           <a:prstGeom prst="rect">
             <a:avLst/>
@@ -7302,7 +7950,7 @@
                 <a:ea typeface="Aptos" pitchFamily="34" charset="-122"/>
                 <a:cs typeface="Aptos" pitchFamily="34" charset="-120"/>
               </a:rPr>
-              <a:t>Connect the concept to public health purpose, responsible use, required safeguards, documentation, and the next action a.</a:t>
+              <a:t>Connect the concept to public health purpose, responsible use, required safeguards, documentation, and the next action a department should take.</a:t>
             </a:r>
             <a:endParaRPr lang="en-US" sz="1320" dirty="0"/>
           </a:p>
@@ -7654,11 +8302,11 @@
         <p:spPr>
           <a:xfrm>
             <a:off x="7635240" y="1325880"/>
-            <a:ext cx="3474720" cy="1325880"/>
+            <a:ext cx="3474720" cy="1207008"/>
           </a:xfrm>
           <a:prstGeom prst="roundRect">
             <a:avLst>
-              <a:gd name="adj" fmla="val 8276"/>
+              <a:gd name="adj" fmla="val 9091"/>
             </a:avLst>
           </a:prstGeom>
           <a:solidFill>
@@ -7720,7 +8368,7 @@
         <p:spPr>
           <a:xfrm>
             <a:off x="7799832" y="1801368"/>
-            <a:ext cx="3145536" cy="758952"/>
+            <a:ext cx="3145536" cy="640080"/>
           </a:xfrm>
           <a:prstGeom prst="rect">
             <a:avLst/>
@@ -7760,12 +8408,12 @@
         </p:nvSpPr>
         <p:spPr>
           <a:xfrm>
-            <a:off x="7635240" y="2788920"/>
-            <a:ext cx="3474720" cy="1536192"/>
+            <a:off x="7635240" y="2670048"/>
+            <a:ext cx="3474720" cy="1377086"/>
           </a:xfrm>
           <a:prstGeom prst="roundRect">
             <a:avLst>
-              <a:gd name="adj" fmla="val 7143"/>
+              <a:gd name="adj" fmla="val 7968"/>
             </a:avLst>
           </a:prstGeom>
           <a:solidFill>
@@ -7787,7 +8435,7 @@
         </p:nvSpPr>
         <p:spPr>
           <a:xfrm>
-            <a:off x="7799832" y="2935224"/>
+            <a:off x="7799832" y="2816352"/>
             <a:ext cx="3145536" cy="256032"/>
           </a:xfrm>
           <a:prstGeom prst="rect">
@@ -7826,8 +8474,8 @@
         </p:nvSpPr>
         <p:spPr>
           <a:xfrm>
-            <a:off x="7818120" y="3300984"/>
-            <a:ext cx="3090672" cy="877824"/>
+            <a:off x="7818120" y="3182112"/>
+            <a:ext cx="3090672" cy="718718"/>
           </a:xfrm>
           <a:prstGeom prst="rect">
             <a:avLst/>
@@ -7884,12 +8532,12 @@
         </p:nvSpPr>
         <p:spPr>
           <a:xfrm>
-            <a:off x="7635240" y="4498848"/>
-            <a:ext cx="3474720" cy="1143000"/>
+            <a:off x="7635240" y="4184294"/>
+            <a:ext cx="3474720" cy="1466698"/>
           </a:xfrm>
           <a:prstGeom prst="roundRect">
             <a:avLst>
-              <a:gd name="adj" fmla="val 9600"/>
+              <a:gd name="adj" fmla="val 7481"/>
             </a:avLst>
           </a:prstGeom>
           <a:solidFill>
@@ -7911,7 +8559,7 @@
         </p:nvSpPr>
         <p:spPr>
           <a:xfrm>
-            <a:off x="7799832" y="4645152"/>
+            <a:off x="7799832" y="4330598"/>
             <a:ext cx="3145536" cy="256032"/>
           </a:xfrm>
           <a:prstGeom prst="rect">
@@ -7950,8 +8598,8 @@
         </p:nvSpPr>
         <p:spPr>
           <a:xfrm>
-            <a:off x="7799832" y="4974336"/>
-            <a:ext cx="3145536" cy="576072"/>
+            <a:off x="7799832" y="4659782"/>
+            <a:ext cx="3145536" cy="899770"/>
           </a:xfrm>
           <a:prstGeom prst="rect">
             <a:avLst/>
@@ -7977,7 +8625,7 @@
                 <a:ea typeface="Aptos" pitchFamily="34" charset="-122"/>
                 <a:cs typeface="Aptos" pitchFamily="34" charset="-120"/>
               </a:rPr>
-              <a:t>Connect the concept to public health purpose, responsible use, required safeguards, documentation, and the next action a.</a:t>
+              <a:t>Connect the concept to public health purpose, responsible use, required safeguards, documentation, and the next action a department should take.</a:t>
             </a:r>
             <a:endParaRPr lang="en-US" sz="1320" dirty="0"/>
           </a:p>
@@ -8329,11 +8977,11 @@
         <p:spPr>
           <a:xfrm>
             <a:off x="7635240" y="1325880"/>
-            <a:ext cx="3474720" cy="1325880"/>
+            <a:ext cx="3474720" cy="1207008"/>
           </a:xfrm>
           <a:prstGeom prst="roundRect">
             <a:avLst>
-              <a:gd name="adj" fmla="val 8276"/>
+              <a:gd name="adj" fmla="val 9091"/>
             </a:avLst>
           </a:prstGeom>
           <a:solidFill>
@@ -8395,7 +9043,7 @@
         <p:spPr>
           <a:xfrm>
             <a:off x="7799832" y="1801368"/>
-            <a:ext cx="3145536" cy="758952"/>
+            <a:ext cx="3145536" cy="640080"/>
           </a:xfrm>
           <a:prstGeom prst="rect">
             <a:avLst/>
@@ -8435,12 +9083,12 @@
         </p:nvSpPr>
         <p:spPr>
           <a:xfrm>
-            <a:off x="7635240" y="2788920"/>
-            <a:ext cx="3474720" cy="1536192"/>
+            <a:off x="7635240" y="2670048"/>
+            <a:ext cx="3474720" cy="1377086"/>
           </a:xfrm>
           <a:prstGeom prst="roundRect">
             <a:avLst>
-              <a:gd name="adj" fmla="val 7143"/>
+              <a:gd name="adj" fmla="val 7968"/>
             </a:avLst>
           </a:prstGeom>
           <a:solidFill>
@@ -8462,7 +9110,7 @@
         </p:nvSpPr>
         <p:spPr>
           <a:xfrm>
-            <a:off x="7799832" y="2935224"/>
+            <a:off x="7799832" y="2816352"/>
             <a:ext cx="3145536" cy="256032"/>
           </a:xfrm>
           <a:prstGeom prst="rect">
@@ -8501,8 +9149,8 @@
         </p:nvSpPr>
         <p:spPr>
           <a:xfrm>
-            <a:off x="7818120" y="3300984"/>
-            <a:ext cx="3090672" cy="877824"/>
+            <a:off x="7818120" y="3182112"/>
+            <a:ext cx="3090672" cy="718718"/>
           </a:xfrm>
           <a:prstGeom prst="rect">
             <a:avLst/>
@@ -8559,12 +9207,12 @@
         </p:nvSpPr>
         <p:spPr>
           <a:xfrm>
-            <a:off x="7635240" y="4498848"/>
-            <a:ext cx="3474720" cy="1143000"/>
+            <a:off x="7635240" y="4184294"/>
+            <a:ext cx="3474720" cy="1466698"/>
           </a:xfrm>
           <a:prstGeom prst="roundRect">
             <a:avLst>
-              <a:gd name="adj" fmla="val 9600"/>
+              <a:gd name="adj" fmla="val 7481"/>
             </a:avLst>
           </a:prstGeom>
           <a:solidFill>
@@ -8586,7 +9234,7 @@
         </p:nvSpPr>
         <p:spPr>
           <a:xfrm>
-            <a:off x="7799832" y="4645152"/>
+            <a:off x="7799832" y="4330598"/>
             <a:ext cx="3145536" cy="256032"/>
           </a:xfrm>
           <a:prstGeom prst="rect">
@@ -8625,8 +9273,8 @@
         </p:nvSpPr>
         <p:spPr>
           <a:xfrm>
-            <a:off x="7799832" y="4974336"/>
-            <a:ext cx="3145536" cy="576072"/>
+            <a:off x="7799832" y="4659782"/>
+            <a:ext cx="3145536" cy="899770"/>
           </a:xfrm>
           <a:prstGeom prst="rect">
             <a:avLst/>
@@ -8652,7 +9300,7 @@
                 <a:ea typeface="Aptos" pitchFamily="34" charset="-122"/>
                 <a:cs typeface="Aptos" pitchFamily="34" charset="-120"/>
               </a:rPr>
-              <a:t>Use the assignment to test whether you can explain the concept, apply it to a realistic public health situation, and.</a:t>
+              <a:t>Use the assignment to test whether you can explain the concept, apply it to a realistic public health situation, and identify what would need review before the work moves forward.</a:t>
             </a:r>
             <a:endParaRPr lang="en-US" sz="1320" dirty="0"/>
           </a:p>
@@ -9021,11 +9669,11 @@
         <p:spPr>
           <a:xfrm>
             <a:off x="7635240" y="1325880"/>
-            <a:ext cx="3474720" cy="1325880"/>
+            <a:ext cx="3474720" cy="1207008"/>
           </a:xfrm>
           <a:prstGeom prst="roundRect">
             <a:avLst>
-              <a:gd name="adj" fmla="val 8276"/>
+              <a:gd name="adj" fmla="val 9091"/>
             </a:avLst>
           </a:prstGeom>
           <a:solidFill>
@@ -9087,7 +9735,7 @@
         <p:spPr>
           <a:xfrm>
             <a:off x="7799832" y="1801368"/>
-            <a:ext cx="3145536" cy="758952"/>
+            <a:ext cx="3145536" cy="640080"/>
           </a:xfrm>
           <a:prstGeom prst="rect">
             <a:avLst/>
@@ -9127,12 +9775,12 @@
         </p:nvSpPr>
         <p:spPr>
           <a:xfrm>
-            <a:off x="7635240" y="2788920"/>
-            <a:ext cx="3474720" cy="1536192"/>
+            <a:off x="7635240" y="2670048"/>
+            <a:ext cx="3474720" cy="1377086"/>
           </a:xfrm>
           <a:prstGeom prst="roundRect">
             <a:avLst>
-              <a:gd name="adj" fmla="val 7143"/>
+              <a:gd name="adj" fmla="val 7968"/>
             </a:avLst>
           </a:prstGeom>
           <a:solidFill>
@@ -9154,7 +9802,7 @@
         </p:nvSpPr>
         <p:spPr>
           <a:xfrm>
-            <a:off x="7799832" y="2935224"/>
+            <a:off x="7799832" y="2816352"/>
             <a:ext cx="3145536" cy="256032"/>
           </a:xfrm>
           <a:prstGeom prst="rect">
@@ -9193,8 +9841,8 @@
         </p:nvSpPr>
         <p:spPr>
           <a:xfrm>
-            <a:off x="7818120" y="3300984"/>
-            <a:ext cx="3090672" cy="877824"/>
+            <a:off x="7818120" y="3182112"/>
+            <a:ext cx="3090672" cy="718718"/>
           </a:xfrm>
           <a:prstGeom prst="rect">
             <a:avLst/>
@@ -9268,12 +9916,12 @@
         </p:nvSpPr>
         <p:spPr>
           <a:xfrm>
-            <a:off x="7635240" y="4498848"/>
-            <a:ext cx="3474720" cy="1143000"/>
+            <a:off x="7635240" y="4184294"/>
+            <a:ext cx="3474720" cy="1466698"/>
           </a:xfrm>
           <a:prstGeom prst="roundRect">
             <a:avLst>
-              <a:gd name="adj" fmla="val 9600"/>
+              <a:gd name="adj" fmla="val 7481"/>
             </a:avLst>
           </a:prstGeom>
           <a:solidFill>
@@ -9295,7 +9943,7 @@
         </p:nvSpPr>
         <p:spPr>
           <a:xfrm>
-            <a:off x="7799832" y="4645152"/>
+            <a:off x="7799832" y="4330598"/>
             <a:ext cx="3145536" cy="256032"/>
           </a:xfrm>
           <a:prstGeom prst="rect">
@@ -9334,8 +9982,8 @@
         </p:nvSpPr>
         <p:spPr>
           <a:xfrm>
-            <a:off x="7799832" y="4974336"/>
-            <a:ext cx="3145536" cy="576072"/>
+            <a:off x="7799832" y="4659782"/>
+            <a:ext cx="3145536" cy="899770"/>
           </a:xfrm>
           <a:prstGeom prst="rect">
             <a:avLst/>
@@ -9361,7 +10009,7 @@
                 <a:ea typeface="Aptos" pitchFamily="34" charset="-122"/>
                 <a:cs typeface="Aptos" pitchFamily="34" charset="-120"/>
               </a:rPr>
-              <a:t>Connect the concept to public health purpose, responsible use, required safeguards, documentation, and the next action a.</a:t>
+              <a:t>Connect the concept to public health purpose, responsible use, required safeguards, documentation, and the next action a department should take.</a:t>
             </a:r>
             <a:endParaRPr lang="en-US" sz="1320" dirty="0"/>
           </a:p>
@@ -9696,11 +10344,11 @@
         <p:spPr>
           <a:xfrm>
             <a:off x="7635240" y="1325880"/>
-            <a:ext cx="3474720" cy="1325880"/>
+            <a:ext cx="3474720" cy="1207008"/>
           </a:xfrm>
           <a:prstGeom prst="roundRect">
             <a:avLst>
-              <a:gd name="adj" fmla="val 8276"/>
+              <a:gd name="adj" fmla="val 9091"/>
             </a:avLst>
           </a:prstGeom>
           <a:solidFill>
@@ -9762,7 +10410,7 @@
         <p:spPr>
           <a:xfrm>
             <a:off x="7799832" y="1801368"/>
-            <a:ext cx="3145536" cy="758952"/>
+            <a:ext cx="3145536" cy="640080"/>
           </a:xfrm>
           <a:prstGeom prst="rect">
             <a:avLst/>
@@ -9802,12 +10450,12 @@
         </p:nvSpPr>
         <p:spPr>
           <a:xfrm>
-            <a:off x="7635240" y="2788920"/>
-            <a:ext cx="3474720" cy="1536192"/>
+            <a:off x="7635240" y="2670048"/>
+            <a:ext cx="3474720" cy="1377086"/>
           </a:xfrm>
           <a:prstGeom prst="roundRect">
             <a:avLst>
-              <a:gd name="adj" fmla="val 7143"/>
+              <a:gd name="adj" fmla="val 7968"/>
             </a:avLst>
           </a:prstGeom>
           <a:solidFill>
@@ -9829,7 +10477,7 @@
         </p:nvSpPr>
         <p:spPr>
           <a:xfrm>
-            <a:off x="7799832" y="2935224"/>
+            <a:off x="7799832" y="2816352"/>
             <a:ext cx="3145536" cy="256032"/>
           </a:xfrm>
           <a:prstGeom prst="rect">
@@ -9868,8 +10516,8 @@
         </p:nvSpPr>
         <p:spPr>
           <a:xfrm>
-            <a:off x="7818120" y="3300984"/>
-            <a:ext cx="3090672" cy="877824"/>
+            <a:off x="7818120" y="3182112"/>
+            <a:ext cx="3090672" cy="718718"/>
           </a:xfrm>
           <a:prstGeom prst="rect">
             <a:avLst/>
@@ -9909,12 +10557,12 @@
         </p:nvSpPr>
         <p:spPr>
           <a:xfrm>
-            <a:off x="7635240" y="4498848"/>
-            <a:ext cx="3474720" cy="1143000"/>
+            <a:off x="7635240" y="4184294"/>
+            <a:ext cx="3474720" cy="1466698"/>
           </a:xfrm>
           <a:prstGeom prst="roundRect">
             <a:avLst>
-              <a:gd name="adj" fmla="val 9600"/>
+              <a:gd name="adj" fmla="val 7481"/>
             </a:avLst>
           </a:prstGeom>
           <a:solidFill>
@@ -9936,7 +10584,7 @@
         </p:nvSpPr>
         <p:spPr>
           <a:xfrm>
-            <a:off x="7799832" y="4645152"/>
+            <a:off x="7799832" y="4330598"/>
             <a:ext cx="3145536" cy="256032"/>
           </a:xfrm>
           <a:prstGeom prst="rect">
@@ -9975,8 +10623,8 @@
         </p:nvSpPr>
         <p:spPr>
           <a:xfrm>
-            <a:off x="7799832" y="4974336"/>
-            <a:ext cx="3145536" cy="576072"/>
+            <a:off x="7799832" y="4659782"/>
+            <a:ext cx="3145536" cy="899770"/>
           </a:xfrm>
           <a:prstGeom prst="rect">
             <a:avLst/>
@@ -10002,7 +10650,7 @@
                 <a:ea typeface="Aptos" pitchFamily="34" charset="-122"/>
                 <a:cs typeface="Aptos" pitchFamily="34" charset="-120"/>
               </a:rPr>
-              <a:t>Connect the concept to public health purpose, responsible use, required safeguards, documentation, and the next action a.</a:t>
+              <a:t>Connect the concept to public health purpose, responsible use, required safeguards, documentation, and the next action a department should take.</a:t>
             </a:r>
             <a:endParaRPr lang="en-US" sz="1320" dirty="0"/>
           </a:p>
@@ -10973,11 +11621,11 @@
         <p:spPr>
           <a:xfrm>
             <a:off x="7635240" y="1325880"/>
-            <a:ext cx="3474720" cy="1325880"/>
+            <a:ext cx="3474720" cy="1207008"/>
           </a:xfrm>
           <a:prstGeom prst="roundRect">
             <a:avLst>
-              <a:gd name="adj" fmla="val 8276"/>
+              <a:gd name="adj" fmla="val 9091"/>
             </a:avLst>
           </a:prstGeom>
           <a:solidFill>
@@ -11039,7 +11687,7 @@
         <p:spPr>
           <a:xfrm>
             <a:off x="7799832" y="1801368"/>
-            <a:ext cx="3145536" cy="758952"/>
+            <a:ext cx="3145536" cy="640080"/>
           </a:xfrm>
           <a:prstGeom prst="rect">
             <a:avLst/>
@@ -11079,12 +11727,12 @@
         </p:nvSpPr>
         <p:spPr>
           <a:xfrm>
-            <a:off x="7635240" y="2788920"/>
-            <a:ext cx="3474720" cy="1536192"/>
+            <a:off x="7635240" y="2670048"/>
+            <a:ext cx="3474720" cy="1377086"/>
           </a:xfrm>
           <a:prstGeom prst="roundRect">
             <a:avLst>
-              <a:gd name="adj" fmla="val 7143"/>
+              <a:gd name="adj" fmla="val 7968"/>
             </a:avLst>
           </a:prstGeom>
           <a:solidFill>
@@ -11106,7 +11754,7 @@
         </p:nvSpPr>
         <p:spPr>
           <a:xfrm>
-            <a:off x="7799832" y="2935224"/>
+            <a:off x="7799832" y="2816352"/>
             <a:ext cx="3145536" cy="256032"/>
           </a:xfrm>
           <a:prstGeom prst="rect">
@@ -11145,8 +11793,8 @@
         </p:nvSpPr>
         <p:spPr>
           <a:xfrm>
-            <a:off x="7818120" y="3300984"/>
-            <a:ext cx="3090672" cy="877824"/>
+            <a:off x="7818120" y="3182112"/>
+            <a:ext cx="3090672" cy="718718"/>
           </a:xfrm>
           <a:prstGeom prst="rect">
             <a:avLst/>
@@ -11220,12 +11868,12 @@
         </p:nvSpPr>
         <p:spPr>
           <a:xfrm>
-            <a:off x="7635240" y="4498848"/>
-            <a:ext cx="3474720" cy="1143000"/>
+            <a:off x="7635240" y="4184294"/>
+            <a:ext cx="3474720" cy="1466698"/>
           </a:xfrm>
           <a:prstGeom prst="roundRect">
             <a:avLst>
-              <a:gd name="adj" fmla="val 9600"/>
+              <a:gd name="adj" fmla="val 7481"/>
             </a:avLst>
           </a:prstGeom>
           <a:solidFill>
@@ -11247,7 +11895,7 @@
         </p:nvSpPr>
         <p:spPr>
           <a:xfrm>
-            <a:off x="7799832" y="4645152"/>
+            <a:off x="7799832" y="4330598"/>
             <a:ext cx="3145536" cy="256032"/>
           </a:xfrm>
           <a:prstGeom prst="rect">
@@ -11286,8 +11934,8 @@
         </p:nvSpPr>
         <p:spPr>
           <a:xfrm>
-            <a:off x="7799832" y="4974336"/>
-            <a:ext cx="3145536" cy="576072"/>
+            <a:off x="7799832" y="4659782"/>
+            <a:ext cx="3145536" cy="899770"/>
           </a:xfrm>
           <a:prstGeom prst="rect">
             <a:avLst/>
@@ -11313,7 +11961,7 @@
                 <a:ea typeface="Aptos" pitchFamily="34" charset="-122"/>
                 <a:cs typeface="Aptos" pitchFamily="34" charset="-120"/>
               </a:rPr>
-              <a:t>Use the assignment to test whether you can explain the concept, apply it to a realistic public health situation, and.</a:t>
+              <a:t>Use the assignment to test whether you can explain the concept, apply it to a realistic public health situation, and identify what would need review before the work moves forward.</a:t>
             </a:r>
             <a:endParaRPr lang="en-US" sz="1320" dirty="0"/>
           </a:p>
@@ -11682,11 +12330,11 @@
         <p:spPr>
           <a:xfrm>
             <a:off x="7635240" y="1325880"/>
-            <a:ext cx="3474720" cy="1325880"/>
+            <a:ext cx="3474720" cy="1207008"/>
           </a:xfrm>
           <a:prstGeom prst="roundRect">
             <a:avLst>
-              <a:gd name="adj" fmla="val 8276"/>
+              <a:gd name="adj" fmla="val 9091"/>
             </a:avLst>
           </a:prstGeom>
           <a:solidFill>
@@ -11748,7 +12396,7 @@
         <p:spPr>
           <a:xfrm>
             <a:off x="7799832" y="1801368"/>
-            <a:ext cx="3145536" cy="758952"/>
+            <a:ext cx="3145536" cy="640080"/>
           </a:xfrm>
           <a:prstGeom prst="rect">
             <a:avLst/>
@@ -11788,12 +12436,12 @@
         </p:nvSpPr>
         <p:spPr>
           <a:xfrm>
-            <a:off x="7635240" y="2788920"/>
-            <a:ext cx="3474720" cy="1536192"/>
+            <a:off x="7635240" y="2670048"/>
+            <a:ext cx="3474720" cy="1377086"/>
           </a:xfrm>
           <a:prstGeom prst="roundRect">
             <a:avLst>
-              <a:gd name="adj" fmla="val 7143"/>
+              <a:gd name="adj" fmla="val 7968"/>
             </a:avLst>
           </a:prstGeom>
           <a:solidFill>
@@ -11815,7 +12463,7 @@
         </p:nvSpPr>
         <p:spPr>
           <a:xfrm>
-            <a:off x="7799832" y="2935224"/>
+            <a:off x="7799832" y="2816352"/>
             <a:ext cx="3145536" cy="256032"/>
           </a:xfrm>
           <a:prstGeom prst="rect">
@@ -11854,8 +12502,8 @@
         </p:nvSpPr>
         <p:spPr>
           <a:xfrm>
-            <a:off x="7818120" y="3300984"/>
-            <a:ext cx="3090672" cy="877824"/>
+            <a:off x="7818120" y="3182112"/>
+            <a:ext cx="3090672" cy="718718"/>
           </a:xfrm>
           <a:prstGeom prst="rect">
             <a:avLst/>
@@ -11929,12 +12577,12 @@
         </p:nvSpPr>
         <p:spPr>
           <a:xfrm>
-            <a:off x="7635240" y="4498848"/>
-            <a:ext cx="3474720" cy="1143000"/>
+            <a:off x="7635240" y="4184294"/>
+            <a:ext cx="3474720" cy="1466698"/>
           </a:xfrm>
           <a:prstGeom prst="roundRect">
             <a:avLst>
-              <a:gd name="adj" fmla="val 9600"/>
+              <a:gd name="adj" fmla="val 7481"/>
             </a:avLst>
           </a:prstGeom>
           <a:solidFill>
@@ -11956,7 +12604,7 @@
         </p:nvSpPr>
         <p:spPr>
           <a:xfrm>
-            <a:off x="7799832" y="4645152"/>
+            <a:off x="7799832" y="4330598"/>
             <a:ext cx="3145536" cy="256032"/>
           </a:xfrm>
           <a:prstGeom prst="rect">
@@ -11995,8 +12643,8 @@
         </p:nvSpPr>
         <p:spPr>
           <a:xfrm>
-            <a:off x="7799832" y="4974336"/>
-            <a:ext cx="3145536" cy="576072"/>
+            <a:off x="7799832" y="4659782"/>
+            <a:ext cx="3145536" cy="899770"/>
           </a:xfrm>
           <a:prstGeom prst="rect">
             <a:avLst/>
@@ -12022,7 +12670,7 @@
                 <a:ea typeface="Aptos" pitchFamily="34" charset="-122"/>
                 <a:cs typeface="Aptos" pitchFamily="34" charset="-120"/>
               </a:rPr>
-              <a:t>Use the assignment to test whether you can explain the concept, apply it to a realistic public health situation, and.</a:t>
+              <a:t>Use the assignment to test whether you can explain the concept, apply it to a realistic public health situation, and identify what would need review before the work moves forward.</a:t>
             </a:r>
             <a:endParaRPr lang="en-US" sz="1320" dirty="0"/>
           </a:p>
@@ -12391,11 +13039,11 @@
         <p:spPr>
           <a:xfrm>
             <a:off x="7635240" y="1325880"/>
-            <a:ext cx="3474720" cy="1325880"/>
+            <a:ext cx="3474720" cy="1207008"/>
           </a:xfrm>
           <a:prstGeom prst="roundRect">
             <a:avLst>
-              <a:gd name="adj" fmla="val 8276"/>
+              <a:gd name="adj" fmla="val 9091"/>
             </a:avLst>
           </a:prstGeom>
           <a:solidFill>
@@ -12457,7 +13105,7 @@
         <p:spPr>
           <a:xfrm>
             <a:off x="7799832" y="1801368"/>
-            <a:ext cx="3145536" cy="758952"/>
+            <a:ext cx="3145536" cy="640080"/>
           </a:xfrm>
           <a:prstGeom prst="rect">
             <a:avLst/>
@@ -12497,12 +13145,12 @@
         </p:nvSpPr>
         <p:spPr>
           <a:xfrm>
-            <a:off x="7635240" y="2788920"/>
-            <a:ext cx="3474720" cy="1536192"/>
+            <a:off x="7635240" y="2670048"/>
+            <a:ext cx="3474720" cy="1377086"/>
           </a:xfrm>
           <a:prstGeom prst="roundRect">
             <a:avLst>
-              <a:gd name="adj" fmla="val 7143"/>
+              <a:gd name="adj" fmla="val 7968"/>
             </a:avLst>
           </a:prstGeom>
           <a:solidFill>
@@ -12524,7 +13172,7 @@
         </p:nvSpPr>
         <p:spPr>
           <a:xfrm>
-            <a:off x="7799832" y="2935224"/>
+            <a:off x="7799832" y="2816352"/>
             <a:ext cx="3145536" cy="256032"/>
           </a:xfrm>
           <a:prstGeom prst="rect">
@@ -12563,8 +13211,8 @@
         </p:nvSpPr>
         <p:spPr>
           <a:xfrm>
-            <a:off x="7818120" y="3300984"/>
-            <a:ext cx="3090672" cy="877824"/>
+            <a:off x="7818120" y="3182112"/>
+            <a:ext cx="3090672" cy="718718"/>
           </a:xfrm>
           <a:prstGeom prst="rect">
             <a:avLst/>
@@ -12638,12 +13286,12 @@
         </p:nvSpPr>
         <p:spPr>
           <a:xfrm>
-            <a:off x="7635240" y="4498848"/>
-            <a:ext cx="3474720" cy="1143000"/>
+            <a:off x="7635240" y="4184294"/>
+            <a:ext cx="3474720" cy="1466698"/>
           </a:xfrm>
           <a:prstGeom prst="roundRect">
             <a:avLst>
-              <a:gd name="adj" fmla="val 9600"/>
+              <a:gd name="adj" fmla="val 7481"/>
             </a:avLst>
           </a:prstGeom>
           <a:solidFill>
@@ -12665,7 +13313,7 @@
         </p:nvSpPr>
         <p:spPr>
           <a:xfrm>
-            <a:off x="7799832" y="4645152"/>
+            <a:off x="7799832" y="4330598"/>
             <a:ext cx="3145536" cy="256032"/>
           </a:xfrm>
           <a:prstGeom prst="rect">
@@ -12704,8 +13352,8 @@
         </p:nvSpPr>
         <p:spPr>
           <a:xfrm>
-            <a:off x="7799832" y="4974336"/>
-            <a:ext cx="3145536" cy="576072"/>
+            <a:off x="7799832" y="4659782"/>
+            <a:ext cx="3145536" cy="899770"/>
           </a:xfrm>
           <a:prstGeom prst="rect">
             <a:avLst/>
@@ -12731,7 +13379,7 @@
                 <a:ea typeface="Aptos" pitchFamily="34" charset="-122"/>
                 <a:cs typeface="Aptos" pitchFamily="34" charset="-120"/>
               </a:rPr>
-              <a:t>Connect the concept to public health purpose, responsible use, required safeguards, documentation, and the next action a.</a:t>
+              <a:t>Connect the concept to public health purpose, responsible use, required safeguards, documentation, and the next action a department should take.</a:t>
             </a:r>
             <a:endParaRPr lang="en-US" sz="1320" dirty="0"/>
           </a:p>
@@ -13209,7 +13857,7 @@
                 <a:ea typeface="Aptos" pitchFamily="34" charset="-122"/>
                 <a:cs typeface="Aptos" pitchFamily="34" charset="-120"/>
               </a:rPr>
-              <a:t>Use the related plays to identify decisions, participants, timing, approvals, and documentation needed for responsible.</a:t>
+              <a:t>Use the related plays to identify decisions, participants, timing, approvals, and documentation needed for responsible implementation.</a:t>
             </a:r>
             <a:endParaRPr lang="en-US" sz="1320" dirty="0"/>
           </a:p>
@@ -13828,7 +14476,7 @@
                 <a:ea typeface="Aptos" pitchFamily="34" charset="-122"/>
                 <a:cs typeface="Aptos" pitchFamily="34" charset="-120"/>
               </a:rPr>
-              <a:t>Use linked tools when your department needs a structured worksheet, template, checklist, review process, or.</a:t>
+              <a:t>Use linked tools when your department needs a structured worksheet, template, checklist, review process, or documentation artifact.</a:t>
             </a:r>
             <a:endParaRPr lang="en-US" sz="1320" dirty="0"/>
           </a:p>
@@ -14338,11 +14986,11 @@
         <p:spPr>
           <a:xfrm>
             <a:off x="7635240" y="1325880"/>
-            <a:ext cx="3474720" cy="1325880"/>
+            <a:ext cx="3474720" cy="1207008"/>
           </a:xfrm>
           <a:prstGeom prst="roundRect">
             <a:avLst>
-              <a:gd name="adj" fmla="val 8276"/>
+              <a:gd name="adj" fmla="val 9091"/>
             </a:avLst>
           </a:prstGeom>
           <a:solidFill>
@@ -14404,7 +15052,7 @@
         <p:spPr>
           <a:xfrm>
             <a:off x="7799832" y="1801368"/>
-            <a:ext cx="3145536" cy="758952"/>
+            <a:ext cx="3145536" cy="640080"/>
           </a:xfrm>
           <a:prstGeom prst="rect">
             <a:avLst/>
@@ -14444,12 +15092,12 @@
         </p:nvSpPr>
         <p:spPr>
           <a:xfrm>
-            <a:off x="7635240" y="2788920"/>
-            <a:ext cx="3474720" cy="1536192"/>
+            <a:off x="7635240" y="2670048"/>
+            <a:ext cx="3474720" cy="1377086"/>
           </a:xfrm>
           <a:prstGeom prst="roundRect">
             <a:avLst>
-              <a:gd name="adj" fmla="val 7143"/>
+              <a:gd name="adj" fmla="val 7968"/>
             </a:avLst>
           </a:prstGeom>
           <a:solidFill>
@@ -14471,7 +15119,7 @@
         </p:nvSpPr>
         <p:spPr>
           <a:xfrm>
-            <a:off x="7799832" y="2935224"/>
+            <a:off x="7799832" y="2816352"/>
             <a:ext cx="3145536" cy="256032"/>
           </a:xfrm>
           <a:prstGeom prst="rect">
@@ -14510,8 +15158,8 @@
         </p:nvSpPr>
         <p:spPr>
           <a:xfrm>
-            <a:off x="7818120" y="3300984"/>
-            <a:ext cx="3090672" cy="877824"/>
+            <a:off x="7818120" y="3182112"/>
+            <a:ext cx="3090672" cy="718718"/>
           </a:xfrm>
           <a:prstGeom prst="rect">
             <a:avLst/>
@@ -14568,12 +15216,12 @@
         </p:nvSpPr>
         <p:spPr>
           <a:xfrm>
-            <a:off x="7635240" y="4498848"/>
-            <a:ext cx="3474720" cy="1143000"/>
+            <a:off x="7635240" y="4184294"/>
+            <a:ext cx="3474720" cy="1466698"/>
           </a:xfrm>
           <a:prstGeom prst="roundRect">
             <a:avLst>
-              <a:gd name="adj" fmla="val 9600"/>
+              <a:gd name="adj" fmla="val 7481"/>
             </a:avLst>
           </a:prstGeom>
           <a:solidFill>
@@ -14595,7 +15243,7 @@
         </p:nvSpPr>
         <p:spPr>
           <a:xfrm>
-            <a:off x="7799832" y="4645152"/>
+            <a:off x="7799832" y="4330598"/>
             <a:ext cx="3145536" cy="256032"/>
           </a:xfrm>
           <a:prstGeom prst="rect">
@@ -14634,8 +15282,8 @@
         </p:nvSpPr>
         <p:spPr>
           <a:xfrm>
-            <a:off x="7799832" y="4974336"/>
-            <a:ext cx="3145536" cy="576072"/>
+            <a:off x="7799832" y="4659782"/>
+            <a:ext cx="3145536" cy="899770"/>
           </a:xfrm>
           <a:prstGeom prst="rect">
             <a:avLst/>
@@ -14661,7 +15309,7 @@
                 <a:ea typeface="Aptos" pitchFamily="34" charset="-122"/>
                 <a:cs typeface="Aptos" pitchFamily="34" charset="-120"/>
               </a:rPr>
-              <a:t>Use the assignment to test whether you can explain the concept, apply it to a realistic public health situation, and.</a:t>
+              <a:t>Use the assignment to test whether you can explain the concept, apply it to a realistic public health situation, and identify what would need review before the work moves forward.</a:t>
             </a:r>
             <a:endParaRPr lang="en-US" sz="1320" dirty="0"/>
           </a:p>
@@ -15030,11 +15678,11 @@
         <p:spPr>
           <a:xfrm>
             <a:off x="7635240" y="1325880"/>
-            <a:ext cx="3474720" cy="1325880"/>
+            <a:ext cx="3474720" cy="1255471"/>
           </a:xfrm>
           <a:prstGeom prst="roundRect">
             <a:avLst>
-              <a:gd name="adj" fmla="val 8276"/>
+              <a:gd name="adj" fmla="val 8740"/>
             </a:avLst>
           </a:prstGeom>
           <a:solidFill>
@@ -15096,7 +15744,7 @@
         <p:spPr>
           <a:xfrm>
             <a:off x="7799832" y="1801368"/>
-            <a:ext cx="3145536" cy="758952"/>
+            <a:ext cx="3145536" cy="688543"/>
           </a:xfrm>
           <a:prstGeom prst="rect">
             <a:avLst/>
@@ -15136,12 +15784,12 @@
         </p:nvSpPr>
         <p:spPr>
           <a:xfrm>
-            <a:off x="7635240" y="2788920"/>
-            <a:ext cx="3474720" cy="1536192"/>
+            <a:off x="7635240" y="2718511"/>
+            <a:ext cx="3474720" cy="1328623"/>
           </a:xfrm>
           <a:prstGeom prst="roundRect">
             <a:avLst>
-              <a:gd name="adj" fmla="val 7143"/>
+              <a:gd name="adj" fmla="val 8259"/>
             </a:avLst>
           </a:prstGeom>
           <a:solidFill>
@@ -15163,7 +15811,7 @@
         </p:nvSpPr>
         <p:spPr>
           <a:xfrm>
-            <a:off x="7799832" y="2935224"/>
+            <a:off x="7799832" y="2864815"/>
             <a:ext cx="3145536" cy="256032"/>
           </a:xfrm>
           <a:prstGeom prst="rect">
@@ -15202,8 +15850,8 @@
         </p:nvSpPr>
         <p:spPr>
           <a:xfrm>
-            <a:off x="7818120" y="3300984"/>
-            <a:ext cx="3090672" cy="877824"/>
+            <a:off x="7818120" y="3230575"/>
+            <a:ext cx="3090672" cy="670255"/>
           </a:xfrm>
           <a:prstGeom prst="rect">
             <a:avLst/>
@@ -15260,12 +15908,12 @@
         </p:nvSpPr>
         <p:spPr>
           <a:xfrm>
-            <a:off x="7635240" y="4498848"/>
-            <a:ext cx="3474720" cy="1143000"/>
+            <a:off x="7635240" y="4184294"/>
+            <a:ext cx="3474720" cy="1466698"/>
           </a:xfrm>
           <a:prstGeom prst="roundRect">
             <a:avLst>
-              <a:gd name="adj" fmla="val 9600"/>
+              <a:gd name="adj" fmla="val 7481"/>
             </a:avLst>
           </a:prstGeom>
           <a:solidFill>
@@ -15287,7 +15935,7 @@
         </p:nvSpPr>
         <p:spPr>
           <a:xfrm>
-            <a:off x="7799832" y="4645152"/>
+            <a:off x="7799832" y="4330598"/>
             <a:ext cx="3145536" cy="256032"/>
           </a:xfrm>
           <a:prstGeom prst="rect">
@@ -15326,8 +15974,8 @@
         </p:nvSpPr>
         <p:spPr>
           <a:xfrm>
-            <a:off x="7799832" y="4974336"/>
-            <a:ext cx="3145536" cy="576072"/>
+            <a:off x="7799832" y="4659782"/>
+            <a:ext cx="3145536" cy="899770"/>
           </a:xfrm>
           <a:prstGeom prst="rect">
             <a:avLst/>
@@ -15353,7 +16001,7 @@
                 <a:ea typeface="Aptos" pitchFamily="34" charset="-122"/>
                 <a:cs typeface="Aptos" pitchFamily="34" charset="-120"/>
               </a:rPr>
-              <a:t>Connect the concept to public health purpose, responsible use, required safeguards, documentation, and the next action a.</a:t>
+              <a:t>Connect the concept to public health purpose, responsible use, required safeguards, documentation, and the next action a department should take.</a:t>
             </a:r>
             <a:endParaRPr lang="en-US" sz="1320" dirty="0"/>
           </a:p>
@@ -15722,11 +16370,11 @@
         <p:spPr>
           <a:xfrm>
             <a:off x="7635240" y="1325880"/>
-            <a:ext cx="3474720" cy="1325880"/>
+            <a:ext cx="3474720" cy="1255471"/>
           </a:xfrm>
           <a:prstGeom prst="roundRect">
             <a:avLst>
-              <a:gd name="adj" fmla="val 8276"/>
+              <a:gd name="adj" fmla="val 8740"/>
             </a:avLst>
           </a:prstGeom>
           <a:solidFill>
@@ -15788,7 +16436,7 @@
         <p:spPr>
           <a:xfrm>
             <a:off x="7799832" y="1801368"/>
-            <a:ext cx="3145536" cy="758952"/>
+            <a:ext cx="3145536" cy="688543"/>
           </a:xfrm>
           <a:prstGeom prst="rect">
             <a:avLst/>
@@ -15828,12 +16476,12 @@
         </p:nvSpPr>
         <p:spPr>
           <a:xfrm>
-            <a:off x="7635240" y="2788920"/>
-            <a:ext cx="3474720" cy="1536192"/>
+            <a:off x="7635240" y="2718511"/>
+            <a:ext cx="3474720" cy="1328623"/>
           </a:xfrm>
           <a:prstGeom prst="roundRect">
             <a:avLst>
-              <a:gd name="adj" fmla="val 7143"/>
+              <a:gd name="adj" fmla="val 8259"/>
             </a:avLst>
           </a:prstGeom>
           <a:solidFill>
@@ -15855,7 +16503,7 @@
         </p:nvSpPr>
         <p:spPr>
           <a:xfrm>
-            <a:off x="7799832" y="2935224"/>
+            <a:off x="7799832" y="2864815"/>
             <a:ext cx="3145536" cy="256032"/>
           </a:xfrm>
           <a:prstGeom prst="rect">
@@ -15894,8 +16542,8 @@
         </p:nvSpPr>
         <p:spPr>
           <a:xfrm>
-            <a:off x="7818120" y="3300984"/>
-            <a:ext cx="3090672" cy="877824"/>
+            <a:off x="7818120" y="3230575"/>
+            <a:ext cx="3090672" cy="670255"/>
           </a:xfrm>
           <a:prstGeom prst="rect">
             <a:avLst/>
@@ -15969,12 +16617,12 @@
         </p:nvSpPr>
         <p:spPr>
           <a:xfrm>
-            <a:off x="7635240" y="4498848"/>
-            <a:ext cx="3474720" cy="1143000"/>
+            <a:off x="7635240" y="4184294"/>
+            <a:ext cx="3474720" cy="1466698"/>
           </a:xfrm>
           <a:prstGeom prst="roundRect">
             <a:avLst>
-              <a:gd name="adj" fmla="val 9600"/>
+              <a:gd name="adj" fmla="val 7481"/>
             </a:avLst>
           </a:prstGeom>
           <a:solidFill>
@@ -15996,7 +16644,7 @@
         </p:nvSpPr>
         <p:spPr>
           <a:xfrm>
-            <a:off x="7799832" y="4645152"/>
+            <a:off x="7799832" y="4330598"/>
             <a:ext cx="3145536" cy="256032"/>
           </a:xfrm>
           <a:prstGeom prst="rect">
@@ -16035,8 +16683,8 @@
         </p:nvSpPr>
         <p:spPr>
           <a:xfrm>
-            <a:off x="7799832" y="4974336"/>
-            <a:ext cx="3145536" cy="576072"/>
+            <a:off x="7799832" y="4659782"/>
+            <a:ext cx="3145536" cy="899770"/>
           </a:xfrm>
           <a:prstGeom prst="rect">
             <a:avLst/>
@@ -16062,7 +16710,7 @@
                 <a:ea typeface="Aptos" pitchFamily="34" charset="-122"/>
                 <a:cs typeface="Aptos" pitchFamily="34" charset="-120"/>
               </a:rPr>
-              <a:t>Connect the concept to public health purpose, responsible use, required safeguards, documentation, and the next action a.</a:t>
+              <a:t>Connect the concept to public health purpose, responsible use, required safeguards, documentation, and the next action a department should take.</a:t>
             </a:r>
             <a:endParaRPr lang="en-US" sz="1320" dirty="0"/>
           </a:p>
@@ -16431,11 +17079,11 @@
         <p:spPr>
           <a:xfrm>
             <a:off x="7635240" y="1325880"/>
-            <a:ext cx="3474720" cy="1325880"/>
+            <a:ext cx="3474720" cy="1207008"/>
           </a:xfrm>
           <a:prstGeom prst="roundRect">
             <a:avLst>
-              <a:gd name="adj" fmla="val 8276"/>
+              <a:gd name="adj" fmla="val 9091"/>
             </a:avLst>
           </a:prstGeom>
           <a:solidFill>
@@ -16497,7 +17145,7 @@
         <p:spPr>
           <a:xfrm>
             <a:off x="7799832" y="1801368"/>
-            <a:ext cx="3145536" cy="758952"/>
+            <a:ext cx="3145536" cy="640080"/>
           </a:xfrm>
           <a:prstGeom prst="rect">
             <a:avLst/>
@@ -16537,12 +17185,12 @@
         </p:nvSpPr>
         <p:spPr>
           <a:xfrm>
-            <a:off x="7635240" y="2788920"/>
-            <a:ext cx="3474720" cy="1536192"/>
+            <a:off x="7635240" y="2670048"/>
+            <a:ext cx="3474720" cy="1377086"/>
           </a:xfrm>
           <a:prstGeom prst="roundRect">
             <a:avLst>
-              <a:gd name="adj" fmla="val 7143"/>
+              <a:gd name="adj" fmla="val 7968"/>
             </a:avLst>
           </a:prstGeom>
           <a:solidFill>
@@ -16564,7 +17212,7 @@
         </p:nvSpPr>
         <p:spPr>
           <a:xfrm>
-            <a:off x="7799832" y="2935224"/>
+            <a:off x="7799832" y="2816352"/>
             <a:ext cx="3145536" cy="256032"/>
           </a:xfrm>
           <a:prstGeom prst="rect">
@@ -16603,8 +17251,8 @@
         </p:nvSpPr>
         <p:spPr>
           <a:xfrm>
-            <a:off x="7818120" y="3300984"/>
-            <a:ext cx="3090672" cy="877824"/>
+            <a:off x="7818120" y="3182112"/>
+            <a:ext cx="3090672" cy="718718"/>
           </a:xfrm>
           <a:prstGeom prst="rect">
             <a:avLst/>
@@ -16678,12 +17326,12 @@
         </p:nvSpPr>
         <p:spPr>
           <a:xfrm>
-            <a:off x="7635240" y="4498848"/>
-            <a:ext cx="3474720" cy="1143000"/>
+            <a:off x="7635240" y="4184294"/>
+            <a:ext cx="3474720" cy="1466698"/>
           </a:xfrm>
           <a:prstGeom prst="roundRect">
             <a:avLst>
-              <a:gd name="adj" fmla="val 9600"/>
+              <a:gd name="adj" fmla="val 7481"/>
             </a:avLst>
           </a:prstGeom>
           <a:solidFill>
@@ -16705,7 +17353,7 @@
         </p:nvSpPr>
         <p:spPr>
           <a:xfrm>
-            <a:off x="7799832" y="4645152"/>
+            <a:off x="7799832" y="4330598"/>
             <a:ext cx="3145536" cy="256032"/>
           </a:xfrm>
           <a:prstGeom prst="rect">
@@ -16744,8 +17392,8 @@
         </p:nvSpPr>
         <p:spPr>
           <a:xfrm>
-            <a:off x="7799832" y="4974336"/>
-            <a:ext cx="3145536" cy="576072"/>
+            <a:off x="7799832" y="4659782"/>
+            <a:ext cx="3145536" cy="899770"/>
           </a:xfrm>
           <a:prstGeom prst="rect">
             <a:avLst/>
@@ -16771,7 +17419,7 @@
                 <a:ea typeface="Aptos" pitchFamily="34" charset="-122"/>
                 <a:cs typeface="Aptos" pitchFamily="34" charset="-120"/>
               </a:rPr>
-              <a:t>Connect the concept to public health purpose, responsible use, required safeguards, documentation, and the next action a.</a:t>
+              <a:t>Connect the concept to public health purpose, responsible use, required safeguards, documentation, and the next action a department should take.</a:t>
             </a:r>
             <a:endParaRPr lang="en-US" sz="1320" dirty="0"/>
           </a:p>
@@ -17140,11 +17788,11 @@
         <p:spPr>
           <a:xfrm>
             <a:off x="7635240" y="1325880"/>
-            <a:ext cx="3474720" cy="1325880"/>
+            <a:ext cx="3474720" cy="1207008"/>
           </a:xfrm>
           <a:prstGeom prst="roundRect">
             <a:avLst>
-              <a:gd name="adj" fmla="val 8276"/>
+              <a:gd name="adj" fmla="val 9091"/>
             </a:avLst>
           </a:prstGeom>
           <a:solidFill>
@@ -17206,7 +17854,7 @@
         <p:spPr>
           <a:xfrm>
             <a:off x="7799832" y="1801368"/>
-            <a:ext cx="3145536" cy="758952"/>
+            <a:ext cx="3145536" cy="640080"/>
           </a:xfrm>
           <a:prstGeom prst="rect">
             <a:avLst/>
@@ -17246,12 +17894,12 @@
         </p:nvSpPr>
         <p:spPr>
           <a:xfrm>
-            <a:off x="7635240" y="2788920"/>
-            <a:ext cx="3474720" cy="1536192"/>
+            <a:off x="7635240" y="2670048"/>
+            <a:ext cx="3474720" cy="1377086"/>
           </a:xfrm>
           <a:prstGeom prst="roundRect">
             <a:avLst>
-              <a:gd name="adj" fmla="val 7143"/>
+              <a:gd name="adj" fmla="val 7968"/>
             </a:avLst>
           </a:prstGeom>
           <a:solidFill>
@@ -17273,7 +17921,7 @@
         </p:nvSpPr>
         <p:spPr>
           <a:xfrm>
-            <a:off x="7799832" y="2935224"/>
+            <a:off x="7799832" y="2816352"/>
             <a:ext cx="3145536" cy="256032"/>
           </a:xfrm>
           <a:prstGeom prst="rect">
@@ -17312,8 +17960,8 @@
         </p:nvSpPr>
         <p:spPr>
           <a:xfrm>
-            <a:off x="7818120" y="3300984"/>
-            <a:ext cx="3090672" cy="877824"/>
+            <a:off x="7818120" y="3182112"/>
+            <a:ext cx="3090672" cy="718718"/>
           </a:xfrm>
           <a:prstGeom prst="rect">
             <a:avLst/>
@@ -17387,12 +18035,12 @@
         </p:nvSpPr>
         <p:spPr>
           <a:xfrm>
-            <a:off x="7635240" y="4498848"/>
-            <a:ext cx="3474720" cy="1143000"/>
+            <a:off x="7635240" y="4184294"/>
+            <a:ext cx="3474720" cy="1466698"/>
           </a:xfrm>
           <a:prstGeom prst="roundRect">
             <a:avLst>
-              <a:gd name="adj" fmla="val 9600"/>
+              <a:gd name="adj" fmla="val 7481"/>
             </a:avLst>
           </a:prstGeom>
           <a:solidFill>
@@ -17414,7 +18062,7 @@
         </p:nvSpPr>
         <p:spPr>
           <a:xfrm>
-            <a:off x="7799832" y="4645152"/>
+            <a:off x="7799832" y="4330598"/>
             <a:ext cx="3145536" cy="256032"/>
           </a:xfrm>
           <a:prstGeom prst="rect">
@@ -17453,8 +18101,8 @@
         </p:nvSpPr>
         <p:spPr>
           <a:xfrm>
-            <a:off x="7799832" y="4974336"/>
-            <a:ext cx="3145536" cy="576072"/>
+            <a:off x="7799832" y="4659782"/>
+            <a:ext cx="3145536" cy="899770"/>
           </a:xfrm>
           <a:prstGeom prst="rect">
             <a:avLst/>
@@ -17480,7 +18128,7 @@
                 <a:ea typeface="Aptos" pitchFamily="34" charset="-122"/>
                 <a:cs typeface="Aptos" pitchFamily="34" charset="-120"/>
               </a:rPr>
-              <a:t>Connect the concept to public health purpose, responsible use, required safeguards, documentation, and the next action a.</a:t>
+              <a:t>Connect the concept to public health purpose, responsible use, required safeguards, documentation, and the next action a department should take.</a:t>
             </a:r>
             <a:endParaRPr lang="en-US" sz="1320" dirty="0"/>
           </a:p>

--- a/downloads/presentations/modules/ops-210.pptx
+++ b/downloads/presentations/modules/ops-210.pptx
@@ -3341,8 +3341,8 @@
         </p:nvSpPr>
         <p:spPr>
           <a:xfrm>
-            <a:off x="868680" y="1508760"/>
-            <a:ext cx="6309360" cy="4160520"/>
+            <a:off x="822960" y="1463040"/>
+            <a:ext cx="6565392" cy="4343400"/>
           </a:xfrm>
           <a:prstGeom prst="rect">
             <a:avLst/>
@@ -3360,7 +3360,7 @@
               <a:buNone/>
             </a:pPr>
             <a:r>
-              <a:rPr lang="en-US" sz="2100" dirty="0">
+              <a:rPr lang="en-US" sz="1920" dirty="0">
                 <a:solidFill>
                   <a:srgbClr val="003A63"/>
                 </a:solidFill>
@@ -3368,16 +3368,16 @@
                 <a:ea typeface="Aptos" pitchFamily="34" charset="-122"/>
                 <a:cs typeface="Aptos" pitchFamily="34" charset="-120"/>
               </a:rPr>
-              <a:t>• An AI-supported case summary may pull together lab reports, case notes, hospitalization.</a:t>
-            </a:r>
-            <a:endParaRPr lang="en-US" sz="2100" dirty="0"/>
-          </a:p>
-          <a:p>
-            <a:pPr indent="0" marL="0">
-              <a:buNone/>
-            </a:pPr>
-            <a:r>
-              <a:rPr lang="en-US" sz="2100" dirty="0">
+              <a:t>• An AI-supported case summary may pull together lab reports, case notes,.</a:t>
+            </a:r>
+            <a:endParaRPr lang="en-US" sz="1920" dirty="0"/>
+          </a:p>
+          <a:p>
+            <a:pPr indent="0" marL="0">
+              <a:buNone/>
+            </a:pPr>
+            <a:r>
+              <a:rPr lang="en-US" sz="1920" dirty="0">
                 <a:solidFill>
                   <a:srgbClr val="003A63"/>
                 </a:solidFill>
@@ -3385,16 +3385,16 @@
                 <a:ea typeface="Aptos" pitchFamily="34" charset="-122"/>
                 <a:cs typeface="Aptos" pitchFamily="34" charset="-120"/>
               </a:rPr>
-              <a:t>• If the person matching process incorrectly combines two people, the summary may include.</a:t>
-            </a:r>
-            <a:endParaRPr lang="en-US" sz="2100" dirty="0"/>
-          </a:p>
-          <a:p>
-            <a:pPr indent="0" marL="0">
-              <a:buNone/>
-            </a:pPr>
-            <a:r>
-              <a:rPr lang="en-US" sz="2100" dirty="0">
+              <a:t>• If the person matching process incorrectly combines two people, the summary.</a:t>
+            </a:r>
+            <a:endParaRPr lang="en-US" sz="1920" dirty="0"/>
+          </a:p>
+          <a:p>
+            <a:pPr indent="0" marL="0">
+              <a:buNone/>
+            </a:pPr>
+            <a:r>
+              <a:rPr lang="en-US" sz="1920" dirty="0">
                 <a:solidFill>
                   <a:srgbClr val="003A63"/>
                 </a:solidFill>
@@ -3404,7 +3404,7 @@
               </a:rPr>
               <a:t>• If the process misses a prior record, the summary may omit important history.</a:t>
             </a:r>
-            <a:endParaRPr lang="en-US" sz="2100" dirty="0"/>
+            <a:endParaRPr lang="en-US" sz="1920" dirty="0"/>
           </a:p>
         </p:txBody>
       </p:sp>
@@ -3416,12 +3416,12 @@
         </p:nvSpPr>
         <p:spPr>
           <a:xfrm>
-            <a:off x="7635240" y="1325880"/>
-            <a:ext cx="3474720" cy="1255471"/>
+            <a:off x="7543800" y="1325880"/>
+            <a:ext cx="3611880" cy="1261872"/>
           </a:xfrm>
           <a:prstGeom prst="roundRect">
             <a:avLst>
-              <a:gd name="adj" fmla="val 8740"/>
+              <a:gd name="adj" fmla="val 8696"/>
             </a:avLst>
           </a:prstGeom>
           <a:solidFill>
@@ -3443,8 +3443,8 @@
         </p:nvSpPr>
         <p:spPr>
           <a:xfrm>
-            <a:off x="7799832" y="1472184"/>
-            <a:ext cx="3145536" cy="256032"/>
+            <a:off x="7708392" y="1453896"/>
+            <a:ext cx="3282696" cy="228600"/>
           </a:xfrm>
           <a:prstGeom prst="rect">
             <a:avLst/>
@@ -3460,7 +3460,7 @@
               <a:buNone/>
             </a:pPr>
             <a:r>
-              <a:rPr lang="en-US" sz="1300" b="1" dirty="0">
+              <a:rPr lang="en-US" sz="1220" b="1" dirty="0">
                 <a:solidFill>
                   <a:srgbClr val="0068B7"/>
                 </a:solidFill>
@@ -3470,7 +3470,7 @@
               </a:rPr>
               <a:t>Core concept</a:t>
             </a:r>
-            <a:endParaRPr lang="en-US" sz="1300" dirty="0"/>
+            <a:endParaRPr lang="en-US" sz="1220" dirty="0"/>
           </a:p>
         </p:txBody>
       </p:sp>
@@ -3482,8 +3482,8 @@
         </p:nvSpPr>
         <p:spPr>
           <a:xfrm>
-            <a:off x="7799832" y="1801368"/>
-            <a:ext cx="3145536" cy="688543"/>
+            <a:off x="7708392" y="1764792"/>
+            <a:ext cx="3282696" cy="749808"/>
           </a:xfrm>
           <a:prstGeom prst="rect">
             <a:avLst/>
@@ -3501,7 +3501,7 @@
               <a:buNone/>
             </a:pPr>
             <a:r>
-              <a:rPr lang="en-US" sz="1320" dirty="0">
+              <a:rPr lang="en-US" sz="1220" dirty="0">
                 <a:solidFill>
                   <a:srgbClr val="17364A"/>
                 </a:solidFill>
@@ -3509,9 +3509,9 @@
                 <a:ea typeface="Aptos" pitchFamily="34" charset="-122"/>
                 <a:cs typeface="Aptos" pitchFamily="34" charset="-120"/>
               </a:rPr>
-              <a:t>An AI-supported case summary may pull together lab reports, case notes, hospitalization information,.</a:t>
-            </a:r>
-            <a:endParaRPr lang="en-US" sz="1320" dirty="0"/>
+              <a:t>An AI-supported case summary may pull together lab reports, case notes,.</a:t>
+            </a:r>
+            <a:endParaRPr lang="en-US" sz="1220" dirty="0"/>
           </a:p>
         </p:txBody>
       </p:sp>
@@ -3523,12 +3523,12 @@
         </p:nvSpPr>
         <p:spPr>
           <a:xfrm>
-            <a:off x="7635240" y="2718511"/>
-            <a:ext cx="3474720" cy="1328623"/>
+            <a:off x="7543800" y="2724912"/>
+            <a:ext cx="3611880" cy="1527048"/>
           </a:xfrm>
           <a:prstGeom prst="roundRect">
             <a:avLst>
-              <a:gd name="adj" fmla="val 8259"/>
+              <a:gd name="adj" fmla="val 7186"/>
             </a:avLst>
           </a:prstGeom>
           <a:solidFill>
@@ -3550,8 +3550,8 @@
         </p:nvSpPr>
         <p:spPr>
           <a:xfrm>
-            <a:off x="7799832" y="2864815"/>
-            <a:ext cx="3145536" cy="256032"/>
+            <a:off x="7708392" y="2852928"/>
+            <a:ext cx="3282696" cy="228600"/>
           </a:xfrm>
           <a:prstGeom prst="rect">
             <a:avLst/>
@@ -3567,7 +3567,7 @@
               <a:buNone/>
             </a:pPr>
             <a:r>
-              <a:rPr lang="en-US" sz="1300" b="1" dirty="0">
+              <a:rPr lang="en-US" sz="1220" b="1" dirty="0">
                 <a:solidFill>
                   <a:srgbClr val="0068B7"/>
                 </a:solidFill>
@@ -3577,7 +3577,7 @@
               </a:rPr>
               <a:t>Concept checkpoints</a:t>
             </a:r>
-            <a:endParaRPr lang="en-US" sz="1300" dirty="0"/>
+            <a:endParaRPr lang="en-US" sz="1220" dirty="0"/>
           </a:p>
         </p:txBody>
       </p:sp>
@@ -3589,8 +3589,8 @@
         </p:nvSpPr>
         <p:spPr>
           <a:xfrm>
-            <a:off x="7818120" y="3230575"/>
-            <a:ext cx="3090672" cy="670255"/>
+            <a:off x="7726680" y="3182112"/>
+            <a:ext cx="3227832" cy="960120"/>
           </a:xfrm>
           <a:prstGeom prst="rect">
             <a:avLst/>
@@ -3608,7 +3608,7 @@
               <a:buNone/>
             </a:pPr>
             <a:r>
-              <a:rPr lang="en-US" sz="1220" dirty="0">
+              <a:rPr lang="en-US" sz="1140" dirty="0">
                 <a:solidFill>
                   <a:srgbClr val="17364A"/>
                 </a:solidFill>
@@ -3616,16 +3616,16 @@
                 <a:ea typeface="Aptos" pitchFamily="34" charset="-122"/>
                 <a:cs typeface="Aptos" pitchFamily="34" charset="-120"/>
               </a:rPr>
-              <a:t>An AI-supported case summary may pull together lab reports, case.</a:t>
-            </a:r>
-            <a:endParaRPr lang="en-US" sz="1220" dirty="0"/>
-          </a:p>
-          <a:p>
-            <a:pPr indent="0" marL="0">
-              <a:buNone/>
-            </a:pPr>
-            <a:r>
-              <a:rPr lang="en-US" sz="1220" dirty="0">
+              <a:t>An AI-supported case summary may pull together lab.</a:t>
+            </a:r>
+            <a:endParaRPr lang="en-US" sz="1140" dirty="0"/>
+          </a:p>
+          <a:p>
+            <a:pPr indent="0" marL="0">
+              <a:buNone/>
+            </a:pPr>
+            <a:r>
+              <a:rPr lang="en-US" sz="1140" dirty="0">
                 <a:solidFill>
                   <a:srgbClr val="17364A"/>
                 </a:solidFill>
@@ -3633,16 +3633,16 @@
                 <a:ea typeface="Aptos" pitchFamily="34" charset="-122"/>
                 <a:cs typeface="Aptos" pitchFamily="34" charset="-120"/>
               </a:rPr>
-              <a:t>If the person matching process incorrectly combines two people,.</a:t>
-            </a:r>
-            <a:endParaRPr lang="en-US" sz="1220" dirty="0"/>
-          </a:p>
-          <a:p>
-            <a:pPr indent="0" marL="0">
-              <a:buNone/>
-            </a:pPr>
-            <a:r>
-              <a:rPr lang="en-US" sz="1220" dirty="0">
+              <a:t>If the person matching process incorrectly.</a:t>
+            </a:r>
+            <a:endParaRPr lang="en-US" sz="1140" dirty="0"/>
+          </a:p>
+          <a:p>
+            <a:pPr indent="0" marL="0">
+              <a:buNone/>
+            </a:pPr>
+            <a:r>
+              <a:rPr lang="en-US" sz="1140" dirty="0">
                 <a:solidFill>
                   <a:srgbClr val="17364A"/>
                 </a:solidFill>
@@ -3650,9 +3650,9 @@
                 <a:ea typeface="Aptos" pitchFamily="34" charset="-122"/>
                 <a:cs typeface="Aptos" pitchFamily="34" charset="-120"/>
               </a:rPr>
-              <a:t>The investigator needs visibility into linkage confidence and.</a:t>
-            </a:r>
-            <a:endParaRPr lang="en-US" sz="1220" dirty="0"/>
+              <a:t>The investigator needs visibility into linkage.</a:t>
+            </a:r>
+            <a:endParaRPr lang="en-US" sz="1140" dirty="0"/>
           </a:p>
         </p:txBody>
       </p:sp>
@@ -3664,12 +3664,12 @@
         </p:nvSpPr>
         <p:spPr>
           <a:xfrm>
-            <a:off x="7635240" y="4184294"/>
-            <a:ext cx="3474720" cy="1466698"/>
+            <a:off x="7543800" y="4389120"/>
+            <a:ext cx="3611880" cy="1261872"/>
           </a:xfrm>
           <a:prstGeom prst="roundRect">
             <a:avLst>
-              <a:gd name="adj" fmla="val 7481"/>
+              <a:gd name="adj" fmla="val 8696"/>
             </a:avLst>
           </a:prstGeom>
           <a:solidFill>
@@ -3691,8 +3691,8 @@
         </p:nvSpPr>
         <p:spPr>
           <a:xfrm>
-            <a:off x="7799832" y="4330598"/>
-            <a:ext cx="3145536" cy="256032"/>
+            <a:off x="7708392" y="4517136"/>
+            <a:ext cx="3282696" cy="228600"/>
           </a:xfrm>
           <a:prstGeom prst="rect">
             <a:avLst/>
@@ -3708,7 +3708,7 @@
               <a:buNone/>
             </a:pPr>
             <a:r>
-              <a:rPr lang="en-US" sz="1300" b="1" dirty="0">
+              <a:rPr lang="en-US" sz="1220" b="1" dirty="0">
                 <a:solidFill>
                   <a:srgbClr val="0068B7"/>
                 </a:solidFill>
@@ -3718,7 +3718,7 @@
               </a:rPr>
               <a:t>Apply it</a:t>
             </a:r>
-            <a:endParaRPr lang="en-US" sz="1300" dirty="0"/>
+            <a:endParaRPr lang="en-US" sz="1220" dirty="0"/>
           </a:p>
         </p:txBody>
       </p:sp>
@@ -3730,8 +3730,8 @@
         </p:nvSpPr>
         <p:spPr>
           <a:xfrm>
-            <a:off x="7799832" y="4659782"/>
-            <a:ext cx="3145536" cy="899770"/>
+            <a:off x="7708392" y="4828032"/>
+            <a:ext cx="3282696" cy="749808"/>
           </a:xfrm>
           <a:prstGeom prst="rect">
             <a:avLst/>
@@ -3749,7 +3749,7 @@
               <a:buNone/>
             </a:pPr>
             <a:r>
-              <a:rPr lang="en-US" sz="1320" dirty="0">
+              <a:rPr lang="en-US" sz="1220" dirty="0">
                 <a:solidFill>
                   <a:srgbClr val="17364A"/>
                 </a:solidFill>
@@ -3757,9 +3757,9 @@
                 <a:ea typeface="Aptos" pitchFamily="34" charset="-122"/>
                 <a:cs typeface="Aptos" pitchFamily="34" charset="-120"/>
               </a:rPr>
-              <a:t>Connect the concept to public health purpose, responsible use, required safeguards, documentation, and the next action a department should take.</a:t>
-            </a:r>
-            <a:endParaRPr lang="en-US" sz="1320" dirty="0"/>
+              <a:t>Connect the concept to public health purpose, responsible use, required.</a:t>
+            </a:r>
+            <a:endParaRPr lang="en-US" sz="1220" dirty="0"/>
           </a:p>
         </p:txBody>
       </p:sp>
@@ -4050,8 +4050,8 @@
         </p:nvSpPr>
         <p:spPr>
           <a:xfrm>
-            <a:off x="868680" y="1508760"/>
-            <a:ext cx="6309360" cy="4160520"/>
+            <a:off x="822960" y="1463040"/>
+            <a:ext cx="6565392" cy="4343400"/>
           </a:xfrm>
           <a:prstGeom prst="rect">
             <a:avLst/>
@@ -4069,7 +4069,7 @@
               <a:buNone/>
             </a:pPr>
             <a:r>
-              <a:rPr lang="en-US" sz="2100" dirty="0">
+              <a:rPr lang="en-US" sz="1920" dirty="0">
                 <a:solidFill>
                   <a:srgbClr val="003A63"/>
                 </a:solidFill>
@@ -4077,16 +4077,16 @@
                 <a:ea typeface="Aptos" pitchFamily="34" charset="-122"/>
                 <a:cs typeface="Aptos" pitchFamily="34" charset="-120"/>
               </a:rPr>
-              <a:t>• Matching design begins with the entity being matched and the decision that depends on the match.</a:t>
-            </a:r>
-            <a:endParaRPr lang="en-US" sz="2100" dirty="0"/>
-          </a:p>
-          <a:p>
-            <a:pPr indent="0" marL="0">
-              <a:buNone/>
-            </a:pPr>
-            <a:r>
-              <a:rPr lang="en-US" sz="2100" dirty="0">
+              <a:t>• Matching design begins with the entity being matched and the decision that.</a:t>
+            </a:r>
+            <a:endParaRPr lang="en-US" sz="1920" dirty="0"/>
+          </a:p>
+          <a:p>
+            <a:pPr indent="0" marL="0">
+              <a:buNone/>
+            </a:pPr>
+            <a:r>
+              <a:rPr lang="en-US" sz="1920" dirty="0">
                 <a:solidFill>
                   <a:srgbClr val="003A63"/>
                 </a:solidFill>
@@ -4094,16 +4094,16 @@
                 <a:ea typeface="Aptos" pitchFamily="34" charset="-122"/>
                 <a:cs typeface="Aptos" pitchFamily="34" charset="-120"/>
               </a:rPr>
-              <a:t>• Person matching may use name, date of birth, address, phone, medical record number, email,.</a:t>
-            </a:r>
-            <a:endParaRPr lang="en-US" sz="2100" dirty="0"/>
-          </a:p>
-          <a:p>
-            <a:pPr indent="0" marL="0">
-              <a:buNone/>
-            </a:pPr>
-            <a:r>
-              <a:rPr lang="en-US" sz="2100" dirty="0">
+              <a:t>• Person matching may use name, date of birth, address, phone, medical record.</a:t>
+            </a:r>
+            <a:endParaRPr lang="en-US" sz="1920" dirty="0"/>
+          </a:p>
+          <a:p>
+            <a:pPr indent="0" marL="0">
+              <a:buNone/>
+            </a:pPr>
+            <a:r>
+              <a:rPr lang="en-US" sz="1920" dirty="0">
                 <a:solidFill>
                   <a:srgbClr val="003A63"/>
                 </a:solidFill>
@@ -4111,9 +4111,9 @@
                 <a:ea typeface="Aptos" pitchFamily="34" charset="-122"/>
                 <a:cs typeface="Aptos" pitchFamily="34" charset="-120"/>
               </a:rPr>
-              <a:t>• Facility matching may use name, address, license number, geocode, and ownership information.</a:t>
-            </a:r>
-            <a:endParaRPr lang="en-US" sz="2100" dirty="0"/>
+              <a:t>• Facility matching may use name, address, license number, geocode, and.</a:t>
+            </a:r>
+            <a:endParaRPr lang="en-US" sz="1920" dirty="0"/>
           </a:p>
         </p:txBody>
       </p:sp>
@@ -4125,12 +4125,12 @@
         </p:nvSpPr>
         <p:spPr>
           <a:xfrm>
-            <a:off x="7635240" y="1325880"/>
-            <a:ext cx="3474720" cy="1255471"/>
+            <a:off x="7543800" y="1325880"/>
+            <a:ext cx="3611880" cy="1261872"/>
           </a:xfrm>
           <a:prstGeom prst="roundRect">
             <a:avLst>
-              <a:gd name="adj" fmla="val 8740"/>
+              <a:gd name="adj" fmla="val 8696"/>
             </a:avLst>
           </a:prstGeom>
           <a:solidFill>
@@ -4152,8 +4152,8 @@
         </p:nvSpPr>
         <p:spPr>
           <a:xfrm>
-            <a:off x="7799832" y="1472184"/>
-            <a:ext cx="3145536" cy="256032"/>
+            <a:off x="7708392" y="1453896"/>
+            <a:ext cx="3282696" cy="228600"/>
           </a:xfrm>
           <a:prstGeom prst="rect">
             <a:avLst/>
@@ -4169,7 +4169,7 @@
               <a:buNone/>
             </a:pPr>
             <a:r>
-              <a:rPr lang="en-US" sz="1300" b="1" dirty="0">
+              <a:rPr lang="en-US" sz="1220" b="1" dirty="0">
                 <a:solidFill>
                   <a:srgbClr val="0068B7"/>
                 </a:solidFill>
@@ -4179,7 +4179,7 @@
               </a:rPr>
               <a:t>Core concept</a:t>
             </a:r>
-            <a:endParaRPr lang="en-US" sz="1300" dirty="0"/>
+            <a:endParaRPr lang="en-US" sz="1220" dirty="0"/>
           </a:p>
         </p:txBody>
       </p:sp>
@@ -4191,8 +4191,8 @@
         </p:nvSpPr>
         <p:spPr>
           <a:xfrm>
-            <a:off x="7799832" y="1801368"/>
-            <a:ext cx="3145536" cy="688543"/>
+            <a:off x="7708392" y="1764792"/>
+            <a:ext cx="3282696" cy="749808"/>
           </a:xfrm>
           <a:prstGeom prst="rect">
             <a:avLst/>
@@ -4210,7 +4210,7 @@
               <a:buNone/>
             </a:pPr>
             <a:r>
-              <a:rPr lang="en-US" sz="1320" dirty="0">
+              <a:rPr lang="en-US" sz="1220" dirty="0">
                 <a:solidFill>
                   <a:srgbClr val="17364A"/>
                 </a:solidFill>
@@ -4218,9 +4218,9 @@
                 <a:ea typeface="Aptos" pitchFamily="34" charset="-122"/>
                 <a:cs typeface="Aptos" pitchFamily="34" charset="-120"/>
               </a:rPr>
-              <a:t>Matching design begins with the entity being matched and the decision that depends on the match.</a:t>
-            </a:r>
-            <a:endParaRPr lang="en-US" sz="1320" dirty="0"/>
+              <a:t>Matching design begins with the entity being matched and the decision that.</a:t>
+            </a:r>
+            <a:endParaRPr lang="en-US" sz="1220" dirty="0"/>
           </a:p>
         </p:txBody>
       </p:sp>
@@ -4232,12 +4232,12 @@
         </p:nvSpPr>
         <p:spPr>
           <a:xfrm>
-            <a:off x="7635240" y="2718511"/>
-            <a:ext cx="3474720" cy="1328623"/>
+            <a:off x="7543800" y="2724912"/>
+            <a:ext cx="3611880" cy="1527048"/>
           </a:xfrm>
           <a:prstGeom prst="roundRect">
             <a:avLst>
-              <a:gd name="adj" fmla="val 8259"/>
+              <a:gd name="adj" fmla="val 7186"/>
             </a:avLst>
           </a:prstGeom>
           <a:solidFill>
@@ -4259,8 +4259,8 @@
         </p:nvSpPr>
         <p:spPr>
           <a:xfrm>
-            <a:off x="7799832" y="2864815"/>
-            <a:ext cx="3145536" cy="256032"/>
+            <a:off x="7708392" y="2852928"/>
+            <a:ext cx="3282696" cy="228600"/>
           </a:xfrm>
           <a:prstGeom prst="rect">
             <a:avLst/>
@@ -4276,7 +4276,7 @@
               <a:buNone/>
             </a:pPr>
             <a:r>
-              <a:rPr lang="en-US" sz="1300" b="1" dirty="0">
+              <a:rPr lang="en-US" sz="1220" b="1" dirty="0">
                 <a:solidFill>
                   <a:srgbClr val="0068B7"/>
                 </a:solidFill>
@@ -4286,7 +4286,7 @@
               </a:rPr>
               <a:t>Concept checkpoints</a:t>
             </a:r>
-            <a:endParaRPr lang="en-US" sz="1300" dirty="0"/>
+            <a:endParaRPr lang="en-US" sz="1220" dirty="0"/>
           </a:p>
         </p:txBody>
       </p:sp>
@@ -4298,8 +4298,8 @@
         </p:nvSpPr>
         <p:spPr>
           <a:xfrm>
-            <a:off x="7818120" y="3230575"/>
-            <a:ext cx="3090672" cy="670255"/>
+            <a:off x="7726680" y="3182112"/>
+            <a:ext cx="3227832" cy="960120"/>
           </a:xfrm>
           <a:prstGeom prst="rect">
             <a:avLst/>
@@ -4317,7 +4317,7 @@
               <a:buNone/>
             </a:pPr>
             <a:r>
-              <a:rPr lang="en-US" sz="1220" dirty="0">
+              <a:rPr lang="en-US" sz="1140" dirty="0">
                 <a:solidFill>
                   <a:srgbClr val="17364A"/>
                 </a:solidFill>
@@ -4325,16 +4325,16 @@
                 <a:ea typeface="Aptos" pitchFamily="34" charset="-122"/>
                 <a:cs typeface="Aptos" pitchFamily="34" charset="-120"/>
               </a:rPr>
-              <a:t>Person matching may use name, date of birth, address, phone,.</a:t>
-            </a:r>
-            <a:endParaRPr lang="en-US" sz="1220" dirty="0"/>
-          </a:p>
-          <a:p>
-            <a:pPr indent="0" marL="0">
-              <a:buNone/>
-            </a:pPr>
-            <a:r>
-              <a:rPr lang="en-US" sz="1220" dirty="0">
+              <a:t>Person matching may use name, date of birth,.</a:t>
+            </a:r>
+            <a:endParaRPr lang="en-US" sz="1140" dirty="0"/>
+          </a:p>
+          <a:p>
+            <a:pPr indent="0" marL="0">
+              <a:buNone/>
+            </a:pPr>
+            <a:r>
+              <a:rPr lang="en-US" sz="1140" dirty="0">
                 <a:solidFill>
                   <a:srgbClr val="17364A"/>
                 </a:solidFill>
@@ -4342,16 +4342,16 @@
                 <a:ea typeface="Aptos" pitchFamily="34" charset="-122"/>
                 <a:cs typeface="Aptos" pitchFamily="34" charset="-120"/>
               </a:rPr>
-              <a:t>Event matching may use dates, locations, condition, exposure, and.</a:t>
-            </a:r>
-            <a:endParaRPr lang="en-US" sz="1220" dirty="0"/>
-          </a:p>
-          <a:p>
-            <a:pPr indent="0" marL="0">
-              <a:buNone/>
-            </a:pPr>
-            <a:r>
-              <a:rPr lang="en-US" sz="1220" dirty="0">
+              <a:t>Event matching may use dates, locations,.</a:t>
+            </a:r>
+            <a:endParaRPr lang="en-US" sz="1140" dirty="0"/>
+          </a:p>
+          <a:p>
+            <a:pPr indent="0" marL="0">
+              <a:buNone/>
+            </a:pPr>
+            <a:r>
+              <a:rPr lang="en-US" sz="1140" dirty="0">
                 <a:solidFill>
                   <a:srgbClr val="17364A"/>
                 </a:solidFill>
@@ -4359,9 +4359,9 @@
                 <a:ea typeface="Aptos" pitchFamily="34" charset="-122"/>
                 <a:cs typeface="Aptos" pitchFamily="34" charset="-120"/>
               </a:rPr>
-              <a:t>Thresholds determine when records are automatically linked,.</a:t>
-            </a:r>
-            <a:endParaRPr lang="en-US" sz="1220" dirty="0"/>
+              <a:t>Thresholds determine when records are.</a:t>
+            </a:r>
+            <a:endParaRPr lang="en-US" sz="1140" dirty="0"/>
           </a:p>
         </p:txBody>
       </p:sp>
@@ -4373,12 +4373,12 @@
         </p:nvSpPr>
         <p:spPr>
           <a:xfrm>
-            <a:off x="7635240" y="4184294"/>
-            <a:ext cx="3474720" cy="1466698"/>
+            <a:off x="7543800" y="4389120"/>
+            <a:ext cx="3611880" cy="1261872"/>
           </a:xfrm>
           <a:prstGeom prst="roundRect">
             <a:avLst>
-              <a:gd name="adj" fmla="val 7481"/>
+              <a:gd name="adj" fmla="val 8696"/>
             </a:avLst>
           </a:prstGeom>
           <a:solidFill>
@@ -4400,8 +4400,8 @@
         </p:nvSpPr>
         <p:spPr>
           <a:xfrm>
-            <a:off x="7799832" y="4330598"/>
-            <a:ext cx="3145536" cy="256032"/>
+            <a:off x="7708392" y="4517136"/>
+            <a:ext cx="3282696" cy="228600"/>
           </a:xfrm>
           <a:prstGeom prst="rect">
             <a:avLst/>
@@ -4417,7 +4417,7 @@
               <a:buNone/>
             </a:pPr>
             <a:r>
-              <a:rPr lang="en-US" sz="1300" b="1" dirty="0">
+              <a:rPr lang="en-US" sz="1220" b="1" dirty="0">
                 <a:solidFill>
                   <a:srgbClr val="0068B7"/>
                 </a:solidFill>
@@ -4427,7 +4427,7 @@
               </a:rPr>
               <a:t>Apply it</a:t>
             </a:r>
-            <a:endParaRPr lang="en-US" sz="1300" dirty="0"/>
+            <a:endParaRPr lang="en-US" sz="1220" dirty="0"/>
           </a:p>
         </p:txBody>
       </p:sp>
@@ -4439,8 +4439,8 @@
         </p:nvSpPr>
         <p:spPr>
           <a:xfrm>
-            <a:off x="7799832" y="4659782"/>
-            <a:ext cx="3145536" cy="899770"/>
+            <a:off x="7708392" y="4828032"/>
+            <a:ext cx="3282696" cy="749808"/>
           </a:xfrm>
           <a:prstGeom prst="rect">
             <a:avLst/>
@@ -4458,7 +4458,7 @@
               <a:buNone/>
             </a:pPr>
             <a:r>
-              <a:rPr lang="en-US" sz="1320" dirty="0">
+              <a:rPr lang="en-US" sz="1220" dirty="0">
                 <a:solidFill>
                   <a:srgbClr val="17364A"/>
                 </a:solidFill>
@@ -4466,9 +4466,9 @@
                 <a:ea typeface="Aptos" pitchFamily="34" charset="-122"/>
                 <a:cs typeface="Aptos" pitchFamily="34" charset="-120"/>
               </a:rPr>
-              <a:t>Connect the concept to public health purpose, responsible use, required safeguards, documentation, and the next action a department should take.</a:t>
-            </a:r>
-            <a:endParaRPr lang="en-US" sz="1320" dirty="0"/>
+              <a:t>Connect the concept to public health purpose, responsible use, required.</a:t>
+            </a:r>
+            <a:endParaRPr lang="en-US" sz="1220" dirty="0"/>
           </a:p>
         </p:txBody>
       </p:sp>
@@ -4759,8 +4759,8 @@
         </p:nvSpPr>
         <p:spPr>
           <a:xfrm>
-            <a:off x="868680" y="1508760"/>
-            <a:ext cx="6309360" cy="4160520"/>
+            <a:off x="822960" y="1463040"/>
+            <a:ext cx="6565392" cy="4343400"/>
           </a:xfrm>
           <a:prstGeom prst="rect">
             <a:avLst/>
@@ -4778,7 +4778,7 @@
               <a:buNone/>
             </a:pPr>
             <a:r>
-              <a:rPr lang="en-US" sz="2100" dirty="0">
+              <a:rPr lang="en-US" sz="1920" dirty="0">
                 <a:solidFill>
                   <a:srgbClr val="003A63"/>
                 </a:solidFill>
@@ -4788,14 +4788,14 @@
               </a:rPr>
               <a:t>• False matches.</a:t>
             </a:r>
-            <a:endParaRPr lang="en-US" sz="2100" dirty="0"/>
-          </a:p>
-          <a:p>
-            <a:pPr indent="0" marL="0">
-              <a:buNone/>
-            </a:pPr>
-            <a:r>
-              <a:rPr lang="en-US" sz="2100" dirty="0">
+            <a:endParaRPr lang="en-US" sz="1920" dirty="0"/>
+          </a:p>
+          <a:p>
+            <a:pPr indent="0" marL="0">
+              <a:buNone/>
+            </a:pPr>
+            <a:r>
+              <a:rPr lang="en-US" sz="1920" dirty="0">
                 <a:solidFill>
                   <a:srgbClr val="003A63"/>
                 </a:solidFill>
@@ -4805,14 +4805,14 @@
               </a:rPr>
               <a:t>• False matches can combine data from different people or entities.</a:t>
             </a:r>
-            <a:endParaRPr lang="en-US" sz="2100" dirty="0"/>
-          </a:p>
-          <a:p>
-            <a:pPr indent="0" marL="0">
-              <a:buNone/>
-            </a:pPr>
-            <a:r>
-              <a:rPr lang="en-US" sz="2100" dirty="0">
+            <a:endParaRPr lang="en-US" sz="1920" dirty="0"/>
+          </a:p>
+          <a:p>
+            <a:pPr indent="0" marL="0">
+              <a:buNone/>
+            </a:pPr>
+            <a:r>
+              <a:rPr lang="en-US" sz="1920" dirty="0">
                 <a:solidFill>
                   <a:srgbClr val="003A63"/>
                 </a:solidFill>
@@ -4820,9 +4820,9 @@
                 <a:ea typeface="Aptos" pitchFamily="34" charset="-122"/>
                 <a:cs typeface="Aptos" pitchFamily="34" charset="-120"/>
               </a:rPr>
-              <a:t>• Guardrails include conservative thresholds for consequential uses, clerical review, and source.</a:t>
-            </a:r>
-            <a:endParaRPr lang="en-US" sz="2100" dirty="0"/>
+              <a:t>• Guardrails include conservative thresholds for consequential uses, clerical.</a:t>
+            </a:r>
+            <a:endParaRPr lang="en-US" sz="1920" dirty="0"/>
           </a:p>
         </p:txBody>
       </p:sp>
@@ -4834,12 +4834,12 @@
         </p:nvSpPr>
         <p:spPr>
           <a:xfrm>
-            <a:off x="7635240" y="1325880"/>
-            <a:ext cx="3474720" cy="1207008"/>
+            <a:off x="7543800" y="1325880"/>
+            <a:ext cx="3611880" cy="1261872"/>
           </a:xfrm>
           <a:prstGeom prst="roundRect">
             <a:avLst>
-              <a:gd name="adj" fmla="val 9091"/>
+              <a:gd name="adj" fmla="val 8696"/>
             </a:avLst>
           </a:prstGeom>
           <a:solidFill>
@@ -4861,8 +4861,8 @@
         </p:nvSpPr>
         <p:spPr>
           <a:xfrm>
-            <a:off x="7799832" y="1472184"/>
-            <a:ext cx="3145536" cy="256032"/>
+            <a:off x="7708392" y="1453896"/>
+            <a:ext cx="3282696" cy="228600"/>
           </a:xfrm>
           <a:prstGeom prst="rect">
             <a:avLst/>
@@ -4878,7 +4878,7 @@
               <a:buNone/>
             </a:pPr>
             <a:r>
-              <a:rPr lang="en-US" sz="1300" b="1" dirty="0">
+              <a:rPr lang="en-US" sz="1220" b="1" dirty="0">
                 <a:solidFill>
                   <a:srgbClr val="0068B7"/>
                 </a:solidFill>
@@ -4888,7 +4888,7 @@
               </a:rPr>
               <a:t>Risk check</a:t>
             </a:r>
-            <a:endParaRPr lang="en-US" sz="1300" dirty="0"/>
+            <a:endParaRPr lang="en-US" sz="1220" dirty="0"/>
           </a:p>
         </p:txBody>
       </p:sp>
@@ -4900,8 +4900,8 @@
         </p:nvSpPr>
         <p:spPr>
           <a:xfrm>
-            <a:off x="7799832" y="1801368"/>
-            <a:ext cx="3145536" cy="640080"/>
+            <a:off x="7708392" y="1764792"/>
+            <a:ext cx="3282696" cy="749808"/>
           </a:xfrm>
           <a:prstGeom prst="rect">
             <a:avLst/>
@@ -4919,7 +4919,7 @@
               <a:buNone/>
             </a:pPr>
             <a:r>
-              <a:rPr lang="en-US" sz="1320" dirty="0">
+              <a:rPr lang="en-US" sz="1220" dirty="0">
                 <a:solidFill>
                   <a:srgbClr val="17364A"/>
                 </a:solidFill>
@@ -4929,7 +4929,7 @@
               </a:rPr>
               <a:t>False matches.</a:t>
             </a:r>
-            <a:endParaRPr lang="en-US" sz="1320" dirty="0"/>
+            <a:endParaRPr lang="en-US" sz="1220" dirty="0"/>
           </a:p>
         </p:txBody>
       </p:sp>
@@ -4941,12 +4941,12 @@
         </p:nvSpPr>
         <p:spPr>
           <a:xfrm>
-            <a:off x="7635240" y="2670048"/>
-            <a:ext cx="3474720" cy="1536192"/>
+            <a:off x="7543800" y="2724912"/>
+            <a:ext cx="3611880" cy="1527048"/>
           </a:xfrm>
           <a:prstGeom prst="roundRect">
             <a:avLst>
-              <a:gd name="adj" fmla="val 7143"/>
+              <a:gd name="adj" fmla="val 7186"/>
             </a:avLst>
           </a:prstGeom>
           <a:solidFill>
@@ -4968,24 +4968,26 @@
         </p:nvSpPr>
         <p:spPr>
           <a:xfrm>
-            <a:off x="7799832" y="2798064"/>
-            <a:ext cx="3145536" cy="237744"/>
-          </a:xfrm>
-          <a:prstGeom prst="rect">
-            <a:avLst/>
-          </a:prstGeom>
-          <a:noFill/>
-          <a:ln/>
-        </p:spPr>
-        <p:txBody>
-          <a:bodyPr wrap="square" lIns="0" tIns="0" rIns="0" bIns="0" rtlCol="0" anchor="ctr"/>
-          <a:lstStyle/>
-          <a:p>
-            <a:pPr indent="0" marL="0">
-              <a:buNone/>
-            </a:pPr>
-            <a:r>
-              <a:rPr lang="en-US" sz="1250" b="1" dirty="0">
+            <a:off x="7708392" y="2852928"/>
+            <a:ext cx="3282696" cy="219456"/>
+          </a:xfrm>
+          <a:prstGeom prst="rect">
+            <a:avLst/>
+          </a:prstGeom>
+          <a:noFill/>
+          <a:ln/>
+        </p:spPr>
+        <p:txBody>
+          <a:bodyPr wrap="square" lIns="0" tIns="0" rIns="0" bIns="0" rtlCol="0" anchor="ctr">
+            <a:normAutofit/>
+          </a:bodyPr>
+          <a:lstStyle/>
+          <a:p>
+            <a:pPr indent="0" marL="0">
+              <a:buNone/>
+            </a:pPr>
+            <a:r>
+              <a:rPr lang="en-US" sz="1160" b="1" dirty="0">
                 <a:solidFill>
                   <a:srgbClr val="0068B7"/>
                 </a:solidFill>
@@ -4995,7 +4997,7 @@
               </a:rPr>
               <a:t>Risk control loop</a:t>
             </a:r>
-            <a:endParaRPr lang="en-US" sz="1250" dirty="0"/>
+            <a:endParaRPr lang="en-US" sz="1160" dirty="0"/>
           </a:p>
         </p:txBody>
       </p:sp>
@@ -5007,7 +5009,7 @@
         </p:nvSpPr>
         <p:spPr>
           <a:xfrm>
-            <a:off x="8763000" y="3351276"/>
+            <a:off x="8717280" y="3406140"/>
             <a:ext cx="164592" cy="0"/>
           </a:xfrm>
           <a:prstGeom prst="line">
@@ -5030,8 +5032,8 @@
         </p:nvSpPr>
         <p:spPr>
           <a:xfrm>
-            <a:off x="7872984" y="3200400"/>
-            <a:ext cx="890016" cy="301752"/>
+            <a:off x="7781544" y="3255264"/>
+            <a:ext cx="935736" cy="301752"/>
           </a:xfrm>
           <a:prstGeom prst="roundRect">
             <a:avLst>
@@ -5057,8 +5059,8 @@
         </p:nvSpPr>
         <p:spPr>
           <a:xfrm>
-            <a:off x="7909560" y="3273552"/>
-            <a:ext cx="816864" cy="146304"/>
+            <a:off x="7818120" y="3328416"/>
+            <a:ext cx="862584" cy="146304"/>
           </a:xfrm>
           <a:prstGeom prst="rect">
             <a:avLst/>
@@ -5098,7 +5100,7 @@
         </p:nvSpPr>
         <p:spPr>
           <a:xfrm>
-            <a:off x="9817608" y="3351276"/>
+            <a:off x="9817608" y="3406140"/>
             <a:ext cx="164592" cy="0"/>
           </a:xfrm>
           <a:prstGeom prst="line">
@@ -5121,8 +5123,8 @@
         </p:nvSpPr>
         <p:spPr>
           <a:xfrm>
-            <a:off x="8927592" y="3200400"/>
-            <a:ext cx="890016" cy="301752"/>
+            <a:off x="8881872" y="3255264"/>
+            <a:ext cx="935736" cy="301752"/>
           </a:xfrm>
           <a:prstGeom prst="roundRect">
             <a:avLst>
@@ -5148,8 +5150,8 @@
         </p:nvSpPr>
         <p:spPr>
           <a:xfrm>
-            <a:off x="8964168" y="3273552"/>
-            <a:ext cx="816864" cy="146304"/>
+            <a:off x="8918448" y="3328416"/>
+            <a:ext cx="862584" cy="146304"/>
           </a:xfrm>
           <a:prstGeom prst="rect">
             <a:avLst/>
@@ -5189,8 +5191,8 @@
         </p:nvSpPr>
         <p:spPr>
           <a:xfrm>
-            <a:off x="9982200" y="3200400"/>
-            <a:ext cx="890016" cy="301752"/>
+            <a:off x="9982200" y="3255264"/>
+            <a:ext cx="935736" cy="301752"/>
           </a:xfrm>
           <a:prstGeom prst="roundRect">
             <a:avLst>
@@ -5216,8 +5218,8 @@
         </p:nvSpPr>
         <p:spPr>
           <a:xfrm>
-            <a:off x="10018776" y="3273552"/>
-            <a:ext cx="816864" cy="146304"/>
+            <a:off x="10018776" y="3328416"/>
+            <a:ext cx="862584" cy="146304"/>
           </a:xfrm>
           <a:prstGeom prst="rect">
             <a:avLst/>
@@ -5257,8 +5259,8 @@
         </p:nvSpPr>
         <p:spPr>
           <a:xfrm>
-            <a:off x="7854696" y="3694176"/>
-            <a:ext cx="3035808" cy="365760"/>
+            <a:off x="7763256" y="3749040"/>
+            <a:ext cx="3172968" cy="356616"/>
           </a:xfrm>
           <a:prstGeom prst="rect">
             <a:avLst/>
@@ -5276,7 +5278,7 @@
               <a:buNone/>
             </a:pPr>
             <a:r>
-              <a:rPr lang="en-US" sz="1120" dirty="0">
+              <a:rPr lang="en-US" sz="1040" dirty="0">
                 <a:solidFill>
                   <a:srgbClr val="17364A"/>
                 </a:solidFill>
@@ -5284,9 +5286,9 @@
                 <a:ea typeface="Aptos" pitchFamily="34" charset="-122"/>
                 <a:cs typeface="Aptos" pitchFamily="34" charset="-120"/>
               </a:rPr>
-              <a:t>Responsible use depends on finding risks early, applying safeguards, and watching for drift or harm over time.</a:t>
-            </a:r>
-            <a:endParaRPr lang="en-US" sz="1120" dirty="0"/>
+              <a:t>Responsible use depends on finding risks early, applying safeguards,.</a:t>
+            </a:r>
+            <a:endParaRPr lang="en-US" sz="1040" dirty="0"/>
           </a:p>
         </p:txBody>
       </p:sp>
@@ -5298,12 +5300,12 @@
         </p:nvSpPr>
         <p:spPr>
           <a:xfrm>
-            <a:off x="7635240" y="4343400"/>
-            <a:ext cx="3474720" cy="1255471"/>
+            <a:off x="7543800" y="4389120"/>
+            <a:ext cx="3611880" cy="1261872"/>
           </a:xfrm>
           <a:prstGeom prst="roundRect">
             <a:avLst>
-              <a:gd name="adj" fmla="val 8740"/>
+              <a:gd name="adj" fmla="val 8696"/>
             </a:avLst>
           </a:prstGeom>
           <a:solidFill>
@@ -5325,8 +5327,8 @@
         </p:nvSpPr>
         <p:spPr>
           <a:xfrm>
-            <a:off x="7799832" y="4489704"/>
-            <a:ext cx="3145536" cy="256032"/>
+            <a:off x="7708392" y="4517136"/>
+            <a:ext cx="3282696" cy="228600"/>
           </a:xfrm>
           <a:prstGeom prst="rect">
             <a:avLst/>
@@ -5342,7 +5344,7 @@
               <a:buNone/>
             </a:pPr>
             <a:r>
-              <a:rPr lang="en-US" sz="1300" b="1" dirty="0">
+              <a:rPr lang="en-US" sz="1220" b="1" dirty="0">
                 <a:solidFill>
                   <a:srgbClr val="0068B7"/>
                 </a:solidFill>
@@ -5352,7 +5354,7 @@
               </a:rPr>
               <a:t>Safeguard to plan</a:t>
             </a:r>
-            <a:endParaRPr lang="en-US" sz="1300" dirty="0"/>
+            <a:endParaRPr lang="en-US" sz="1220" dirty="0"/>
           </a:p>
         </p:txBody>
       </p:sp>
@@ -5364,8 +5366,8 @@
         </p:nvSpPr>
         <p:spPr>
           <a:xfrm>
-            <a:off x="7799832" y="4818888"/>
-            <a:ext cx="3145536" cy="688543"/>
+            <a:off x="7708392" y="4828032"/>
+            <a:ext cx="3282696" cy="749808"/>
           </a:xfrm>
           <a:prstGeom prst="rect">
             <a:avLst/>
@@ -5383,7 +5385,7 @@
               <a:buNone/>
             </a:pPr>
             <a:r>
-              <a:rPr lang="en-US" sz="1320" dirty="0">
+              <a:rPr lang="en-US" sz="1220" dirty="0">
                 <a:solidFill>
                   <a:srgbClr val="17364A"/>
                 </a:solidFill>
@@ -5391,9 +5393,9 @@
                 <a:ea typeface="Aptos" pitchFamily="34" charset="-122"/>
                 <a:cs typeface="Aptos" pitchFamily="34" charset="-120"/>
               </a:rPr>
-              <a:t>Identify what could go wrong, who could be affected, what safeguards are needed, and what evidence should be reviewed before use.</a:t>
-            </a:r>
-            <a:endParaRPr lang="en-US" sz="1320" dirty="0"/>
+              <a:t>Identify what could go wrong, who could be affected, what safeguards are needed,.</a:t>
+            </a:r>
+            <a:endParaRPr lang="en-US" sz="1220" dirty="0"/>
           </a:p>
         </p:txBody>
       </p:sp>
@@ -5684,8 +5686,8 @@
         </p:nvSpPr>
         <p:spPr>
           <a:xfrm>
-            <a:off x="868680" y="1508760"/>
-            <a:ext cx="6309360" cy="4160520"/>
+            <a:off x="822960" y="1463040"/>
+            <a:ext cx="6565392" cy="4343400"/>
           </a:xfrm>
           <a:prstGeom prst="rect">
             <a:avLst/>
@@ -5703,7 +5705,7 @@
               <a:buNone/>
             </a:pPr>
             <a:r>
-              <a:rPr lang="en-US" sz="2100" dirty="0">
+              <a:rPr lang="en-US" sz="1920" dirty="0">
                 <a:solidFill>
                   <a:srgbClr val="003A63"/>
                 </a:solidFill>
@@ -5713,14 +5715,14 @@
               </a:rPr>
               <a:t>• Hidden linkage uncertainty.</a:t>
             </a:r>
-            <a:endParaRPr lang="en-US" sz="2100" dirty="0"/>
-          </a:p>
-          <a:p>
-            <a:pPr indent="0" marL="0">
-              <a:buNone/>
-            </a:pPr>
-            <a:r>
-              <a:rPr lang="en-US" sz="2100" dirty="0">
+            <a:endParaRPr lang="en-US" sz="1920" dirty="0"/>
+          </a:p>
+          <a:p>
+            <a:pPr indent="0" marL="0">
+              <a:buNone/>
+            </a:pPr>
+            <a:r>
+              <a:rPr lang="en-US" sz="1920" dirty="0">
                 <a:solidFill>
                   <a:srgbClr val="003A63"/>
                 </a:solidFill>
@@ -5730,14 +5732,14 @@
               </a:rPr>
               <a:t>• AI outputs may present linked data as certain.</a:t>
             </a:r>
-            <a:endParaRPr lang="en-US" sz="2100" dirty="0"/>
-          </a:p>
-          <a:p>
-            <a:pPr indent="0" marL="0">
-              <a:buNone/>
-            </a:pPr>
-            <a:r>
-              <a:rPr lang="en-US" sz="2100" dirty="0">
+            <a:endParaRPr lang="en-US" sz="1920" dirty="0"/>
+          </a:p>
+          <a:p>
+            <a:pPr indent="0" marL="0">
+              <a:buNone/>
+            </a:pPr>
+            <a:r>
+              <a:rPr lang="en-US" sz="1920" dirty="0">
                 <a:solidFill>
                   <a:srgbClr val="003A63"/>
                 </a:solidFill>
@@ -5745,9 +5747,9 @@
                 <a:ea typeface="Aptos" pitchFamily="34" charset="-122"/>
                 <a:cs typeface="Aptos" pitchFamily="34" charset="-120"/>
               </a:rPr>
-              <a:t>• Guardrails include confidence indicators, source records, and user review of uncertain matches.</a:t>
-            </a:r>
-            <a:endParaRPr lang="en-US" sz="2100" dirty="0"/>
+              <a:t>• Guardrails include confidence indicators, source records, and user review of.</a:t>
+            </a:r>
+            <a:endParaRPr lang="en-US" sz="1920" dirty="0"/>
           </a:p>
         </p:txBody>
       </p:sp>
@@ -5759,12 +5761,12 @@
         </p:nvSpPr>
         <p:spPr>
           <a:xfrm>
-            <a:off x="7635240" y="1325880"/>
-            <a:ext cx="3474720" cy="1207008"/>
+            <a:off x="7543800" y="1325880"/>
+            <a:ext cx="3611880" cy="1261872"/>
           </a:xfrm>
           <a:prstGeom prst="roundRect">
             <a:avLst>
-              <a:gd name="adj" fmla="val 9091"/>
+              <a:gd name="adj" fmla="val 8696"/>
             </a:avLst>
           </a:prstGeom>
           <a:solidFill>
@@ -5786,8 +5788,8 @@
         </p:nvSpPr>
         <p:spPr>
           <a:xfrm>
-            <a:off x="7799832" y="1472184"/>
-            <a:ext cx="3145536" cy="256032"/>
+            <a:off x="7708392" y="1453896"/>
+            <a:ext cx="3282696" cy="228600"/>
           </a:xfrm>
           <a:prstGeom prst="rect">
             <a:avLst/>
@@ -5803,7 +5805,7 @@
               <a:buNone/>
             </a:pPr>
             <a:r>
-              <a:rPr lang="en-US" sz="1300" b="1" dirty="0">
+              <a:rPr lang="en-US" sz="1220" b="1" dirty="0">
                 <a:solidFill>
                   <a:srgbClr val="0068B7"/>
                 </a:solidFill>
@@ -5813,7 +5815,7 @@
               </a:rPr>
               <a:t>Risk check</a:t>
             </a:r>
-            <a:endParaRPr lang="en-US" sz="1300" dirty="0"/>
+            <a:endParaRPr lang="en-US" sz="1220" dirty="0"/>
           </a:p>
         </p:txBody>
       </p:sp>
@@ -5825,8 +5827,8 @@
         </p:nvSpPr>
         <p:spPr>
           <a:xfrm>
-            <a:off x="7799832" y="1801368"/>
-            <a:ext cx="3145536" cy="640080"/>
+            <a:off x="7708392" y="1764792"/>
+            <a:ext cx="3282696" cy="749808"/>
           </a:xfrm>
           <a:prstGeom prst="rect">
             <a:avLst/>
@@ -5844,7 +5846,7 @@
               <a:buNone/>
             </a:pPr>
             <a:r>
-              <a:rPr lang="en-US" sz="1320" dirty="0">
+              <a:rPr lang="en-US" sz="1220" dirty="0">
                 <a:solidFill>
                   <a:srgbClr val="17364A"/>
                 </a:solidFill>
@@ -5854,7 +5856,7 @@
               </a:rPr>
               <a:t>Hidden linkage uncertainty.</a:t>
             </a:r>
-            <a:endParaRPr lang="en-US" sz="1320" dirty="0"/>
+            <a:endParaRPr lang="en-US" sz="1220" dirty="0"/>
           </a:p>
         </p:txBody>
       </p:sp>
@@ -5866,12 +5868,12 @@
         </p:nvSpPr>
         <p:spPr>
           <a:xfrm>
-            <a:off x="7635240" y="2670048"/>
-            <a:ext cx="3474720" cy="1536192"/>
+            <a:off x="7543800" y="2724912"/>
+            <a:ext cx="3611880" cy="1527048"/>
           </a:xfrm>
           <a:prstGeom prst="roundRect">
             <a:avLst>
-              <a:gd name="adj" fmla="val 7143"/>
+              <a:gd name="adj" fmla="val 7186"/>
             </a:avLst>
           </a:prstGeom>
           <a:solidFill>
@@ -5893,24 +5895,26 @@
         </p:nvSpPr>
         <p:spPr>
           <a:xfrm>
-            <a:off x="7799832" y="2798064"/>
-            <a:ext cx="3145536" cy="237744"/>
-          </a:xfrm>
-          <a:prstGeom prst="rect">
-            <a:avLst/>
-          </a:prstGeom>
-          <a:noFill/>
-          <a:ln/>
-        </p:spPr>
-        <p:txBody>
-          <a:bodyPr wrap="square" lIns="0" tIns="0" rIns="0" bIns="0" rtlCol="0" anchor="ctr"/>
-          <a:lstStyle/>
-          <a:p>
-            <a:pPr indent="0" marL="0">
-              <a:buNone/>
-            </a:pPr>
-            <a:r>
-              <a:rPr lang="en-US" sz="1250" b="1" dirty="0">
+            <a:off x="7708392" y="2852928"/>
+            <a:ext cx="3282696" cy="219456"/>
+          </a:xfrm>
+          <a:prstGeom prst="rect">
+            <a:avLst/>
+          </a:prstGeom>
+          <a:noFill/>
+          <a:ln/>
+        </p:spPr>
+        <p:txBody>
+          <a:bodyPr wrap="square" lIns="0" tIns="0" rIns="0" bIns="0" rtlCol="0" anchor="ctr">
+            <a:normAutofit/>
+          </a:bodyPr>
+          <a:lstStyle/>
+          <a:p>
+            <a:pPr indent="0" marL="0">
+              <a:buNone/>
+            </a:pPr>
+            <a:r>
+              <a:rPr lang="en-US" sz="1160" b="1" dirty="0">
                 <a:solidFill>
                   <a:srgbClr val="0068B7"/>
                 </a:solidFill>
@@ -5920,7 +5924,7 @@
               </a:rPr>
               <a:t>Risk control loop</a:t>
             </a:r>
-            <a:endParaRPr lang="en-US" sz="1250" dirty="0"/>
+            <a:endParaRPr lang="en-US" sz="1160" dirty="0"/>
           </a:p>
         </p:txBody>
       </p:sp>
@@ -5932,7 +5936,7 @@
         </p:nvSpPr>
         <p:spPr>
           <a:xfrm>
-            <a:off x="8763000" y="3351276"/>
+            <a:off x="8717280" y="3406140"/>
             <a:ext cx="164592" cy="0"/>
           </a:xfrm>
           <a:prstGeom prst="line">
@@ -5955,8 +5959,8 @@
         </p:nvSpPr>
         <p:spPr>
           <a:xfrm>
-            <a:off x="7872984" y="3200400"/>
-            <a:ext cx="890016" cy="301752"/>
+            <a:off x="7781544" y="3255264"/>
+            <a:ext cx="935736" cy="301752"/>
           </a:xfrm>
           <a:prstGeom prst="roundRect">
             <a:avLst>
@@ -5982,8 +5986,8 @@
         </p:nvSpPr>
         <p:spPr>
           <a:xfrm>
-            <a:off x="7909560" y="3273552"/>
-            <a:ext cx="816864" cy="146304"/>
+            <a:off x="7818120" y="3328416"/>
+            <a:ext cx="862584" cy="146304"/>
           </a:xfrm>
           <a:prstGeom prst="rect">
             <a:avLst/>
@@ -6023,7 +6027,7 @@
         </p:nvSpPr>
         <p:spPr>
           <a:xfrm>
-            <a:off x="9817608" y="3351276"/>
+            <a:off x="9817608" y="3406140"/>
             <a:ext cx="164592" cy="0"/>
           </a:xfrm>
           <a:prstGeom prst="line">
@@ -6046,8 +6050,8 @@
         </p:nvSpPr>
         <p:spPr>
           <a:xfrm>
-            <a:off x="8927592" y="3200400"/>
-            <a:ext cx="890016" cy="301752"/>
+            <a:off x="8881872" y="3255264"/>
+            <a:ext cx="935736" cy="301752"/>
           </a:xfrm>
           <a:prstGeom prst="roundRect">
             <a:avLst>
@@ -6073,8 +6077,8 @@
         </p:nvSpPr>
         <p:spPr>
           <a:xfrm>
-            <a:off x="8964168" y="3273552"/>
-            <a:ext cx="816864" cy="146304"/>
+            <a:off x="8918448" y="3328416"/>
+            <a:ext cx="862584" cy="146304"/>
           </a:xfrm>
           <a:prstGeom prst="rect">
             <a:avLst/>
@@ -6114,8 +6118,8 @@
         </p:nvSpPr>
         <p:spPr>
           <a:xfrm>
-            <a:off x="9982200" y="3200400"/>
-            <a:ext cx="890016" cy="301752"/>
+            <a:off x="9982200" y="3255264"/>
+            <a:ext cx="935736" cy="301752"/>
           </a:xfrm>
           <a:prstGeom prst="roundRect">
             <a:avLst>
@@ -6141,8 +6145,8 @@
         </p:nvSpPr>
         <p:spPr>
           <a:xfrm>
-            <a:off x="10018776" y="3273552"/>
-            <a:ext cx="816864" cy="146304"/>
+            <a:off x="10018776" y="3328416"/>
+            <a:ext cx="862584" cy="146304"/>
           </a:xfrm>
           <a:prstGeom prst="rect">
             <a:avLst/>
@@ -6182,8 +6186,8 @@
         </p:nvSpPr>
         <p:spPr>
           <a:xfrm>
-            <a:off x="7854696" y="3694176"/>
-            <a:ext cx="3035808" cy="365760"/>
+            <a:off x="7763256" y="3749040"/>
+            <a:ext cx="3172968" cy="356616"/>
           </a:xfrm>
           <a:prstGeom prst="rect">
             <a:avLst/>
@@ -6201,7 +6205,7 @@
               <a:buNone/>
             </a:pPr>
             <a:r>
-              <a:rPr lang="en-US" sz="1120" dirty="0">
+              <a:rPr lang="en-US" sz="1040" dirty="0">
                 <a:solidFill>
                   <a:srgbClr val="17364A"/>
                 </a:solidFill>
@@ -6209,9 +6213,9 @@
                 <a:ea typeface="Aptos" pitchFamily="34" charset="-122"/>
                 <a:cs typeface="Aptos" pitchFamily="34" charset="-120"/>
               </a:rPr>
-              <a:t>Responsible use depends on finding risks early, applying safeguards, and watching for drift or harm over time.</a:t>
-            </a:r>
-            <a:endParaRPr lang="en-US" sz="1120" dirty="0"/>
+              <a:t>Responsible use depends on finding risks early, applying safeguards,.</a:t>
+            </a:r>
+            <a:endParaRPr lang="en-US" sz="1040" dirty="0"/>
           </a:p>
         </p:txBody>
       </p:sp>
@@ -6223,12 +6227,12 @@
         </p:nvSpPr>
         <p:spPr>
           <a:xfrm>
-            <a:off x="7635240" y="4343400"/>
-            <a:ext cx="3474720" cy="1255471"/>
+            <a:off x="7543800" y="4389120"/>
+            <a:ext cx="3611880" cy="1261872"/>
           </a:xfrm>
           <a:prstGeom prst="roundRect">
             <a:avLst>
-              <a:gd name="adj" fmla="val 8740"/>
+              <a:gd name="adj" fmla="val 8696"/>
             </a:avLst>
           </a:prstGeom>
           <a:solidFill>
@@ -6250,8 +6254,8 @@
         </p:nvSpPr>
         <p:spPr>
           <a:xfrm>
-            <a:off x="7799832" y="4489704"/>
-            <a:ext cx="3145536" cy="256032"/>
+            <a:off x="7708392" y="4517136"/>
+            <a:ext cx="3282696" cy="228600"/>
           </a:xfrm>
           <a:prstGeom prst="rect">
             <a:avLst/>
@@ -6267,7 +6271,7 @@
               <a:buNone/>
             </a:pPr>
             <a:r>
-              <a:rPr lang="en-US" sz="1300" b="1" dirty="0">
+              <a:rPr lang="en-US" sz="1220" b="1" dirty="0">
                 <a:solidFill>
                   <a:srgbClr val="0068B7"/>
                 </a:solidFill>
@@ -6277,7 +6281,7 @@
               </a:rPr>
               <a:t>Safeguard to plan</a:t>
             </a:r>
-            <a:endParaRPr lang="en-US" sz="1300" dirty="0"/>
+            <a:endParaRPr lang="en-US" sz="1220" dirty="0"/>
           </a:p>
         </p:txBody>
       </p:sp>
@@ -6289,8 +6293,8 @@
         </p:nvSpPr>
         <p:spPr>
           <a:xfrm>
-            <a:off x="7799832" y="4818888"/>
-            <a:ext cx="3145536" cy="688543"/>
+            <a:off x="7708392" y="4828032"/>
+            <a:ext cx="3282696" cy="749808"/>
           </a:xfrm>
           <a:prstGeom prst="rect">
             <a:avLst/>
@@ -6308,7 +6312,7 @@
               <a:buNone/>
             </a:pPr>
             <a:r>
-              <a:rPr lang="en-US" sz="1320" dirty="0">
+              <a:rPr lang="en-US" sz="1220" dirty="0">
                 <a:solidFill>
                   <a:srgbClr val="17364A"/>
                 </a:solidFill>
@@ -6316,9 +6320,9 @@
                 <a:ea typeface="Aptos" pitchFamily="34" charset="-122"/>
                 <a:cs typeface="Aptos" pitchFamily="34" charset="-120"/>
               </a:rPr>
-              <a:t>Identify what could go wrong, who could be affected, what safeguards are needed, and what evidence should be reviewed before use.</a:t>
-            </a:r>
-            <a:endParaRPr lang="en-US" sz="1320" dirty="0"/>
+              <a:t>Identify what could go wrong, who could be affected, what safeguards are needed,.</a:t>
+            </a:r>
+            <a:endParaRPr lang="en-US" sz="1220" dirty="0"/>
           </a:p>
         </p:txBody>
       </p:sp>
@@ -6609,8 +6613,8 @@
         </p:nvSpPr>
         <p:spPr>
           <a:xfrm>
-            <a:off x="868680" y="1508760"/>
-            <a:ext cx="6309360" cy="4160520"/>
+            <a:off x="822960" y="1463040"/>
+            <a:ext cx="6565392" cy="4343400"/>
           </a:xfrm>
           <a:prstGeom prst="rect">
             <a:avLst/>
@@ -6628,7 +6632,7 @@
               <a:buNone/>
             </a:pPr>
             <a:r>
-              <a:rPr lang="en-US" sz="2100" dirty="0">
+              <a:rPr lang="en-US" sz="1920" dirty="0">
                 <a:solidFill>
                   <a:srgbClr val="003A63"/>
                 </a:solidFill>
@@ -6636,16 +6640,16 @@
                 <a:ea typeface="Aptos" pitchFamily="34" charset="-122"/>
                 <a:cs typeface="Aptos" pitchFamily="34" charset="-120"/>
               </a:rPr>
-              <a:t>• Generative AI may summarize linked records, so source attribution and linkage confidence.</a:t>
-            </a:r>
-            <a:endParaRPr lang="en-US" sz="2100" dirty="0"/>
-          </a:p>
-          <a:p>
-            <a:pPr indent="0" marL="0">
-              <a:buNone/>
-            </a:pPr>
-            <a:r>
-              <a:rPr lang="en-US" sz="2100" dirty="0">
+              <a:t>• Generative AI may summarize linked records, so source attribution and.</a:t>
+            </a:r>
+            <a:endParaRPr lang="en-US" sz="1920" dirty="0"/>
+          </a:p>
+          <a:p>
+            <a:pPr indent="0" marL="0">
+              <a:buNone/>
+            </a:pPr>
+            <a:r>
+              <a:rPr lang="en-US" sz="1920" dirty="0">
                 <a:solidFill>
                   <a:srgbClr val="003A63"/>
                 </a:solidFill>
@@ -6653,16 +6657,16 @@
                 <a:ea typeface="Aptos" pitchFamily="34" charset="-122"/>
                 <a:cs typeface="Aptos" pitchFamily="34" charset="-120"/>
               </a:rPr>
-              <a:t>• Predictive analytics may use features created from linked records, making match quality part.</a:t>
-            </a:r>
-            <a:endParaRPr lang="en-US" sz="2100" dirty="0"/>
-          </a:p>
-          <a:p>
-            <a:pPr indent="0" marL="0">
-              <a:buNone/>
-            </a:pPr>
-            <a:r>
-              <a:rPr lang="en-US" sz="2100" dirty="0">
+              <a:t>• Predictive analytics may use features created from linked records, making.</a:t>
+            </a:r>
+            <a:endParaRPr lang="en-US" sz="1920" dirty="0"/>
+          </a:p>
+          <a:p>
+            <a:pPr indent="0" marL="0">
+              <a:buNone/>
+            </a:pPr>
+            <a:r>
+              <a:rPr lang="en-US" sz="1920" dirty="0">
                 <a:solidFill>
                   <a:srgbClr val="003A63"/>
                 </a:solidFill>
@@ -6670,9 +6674,9 @@
                 <a:ea typeface="Aptos" pitchFamily="34" charset="-122"/>
                 <a:cs typeface="Aptos" pitchFamily="34" charset="-120"/>
               </a:rPr>
-              <a:t>• NLP may extract identifiers from text to support linkage, which requires privacy and accuracy.</a:t>
-            </a:r>
-            <a:endParaRPr lang="en-US" sz="2100" dirty="0"/>
+              <a:t>• NLP may extract identifiers from text to support linkage, which requires.</a:t>
+            </a:r>
+            <a:endParaRPr lang="en-US" sz="1920" dirty="0"/>
           </a:p>
         </p:txBody>
       </p:sp>
@@ -6684,12 +6688,12 @@
         </p:nvSpPr>
         <p:spPr>
           <a:xfrm>
-            <a:off x="7635240" y="1325880"/>
-            <a:ext cx="3474720" cy="1255471"/>
+            <a:off x="7543800" y="1325880"/>
+            <a:ext cx="3611880" cy="1261872"/>
           </a:xfrm>
           <a:prstGeom prst="roundRect">
             <a:avLst>
-              <a:gd name="adj" fmla="val 8740"/>
+              <a:gd name="adj" fmla="val 8696"/>
             </a:avLst>
           </a:prstGeom>
           <a:solidFill>
@@ -6711,8 +6715,8 @@
         </p:nvSpPr>
         <p:spPr>
           <a:xfrm>
-            <a:off x="7799832" y="1472184"/>
-            <a:ext cx="3145536" cy="256032"/>
+            <a:off x="7708392" y="1453896"/>
+            <a:ext cx="3282696" cy="228600"/>
           </a:xfrm>
           <a:prstGeom prst="rect">
             <a:avLst/>
@@ -6728,7 +6732,7 @@
               <a:buNone/>
             </a:pPr>
             <a:r>
-              <a:rPr lang="en-US" sz="1300" b="1" dirty="0">
+              <a:rPr lang="en-US" sz="1220" b="1" dirty="0">
                 <a:solidFill>
                   <a:srgbClr val="0068B7"/>
                 </a:solidFill>
@@ -6738,7 +6742,7 @@
               </a:rPr>
               <a:t>Implementation cue</a:t>
             </a:r>
-            <a:endParaRPr lang="en-US" sz="1300" dirty="0"/>
+            <a:endParaRPr lang="en-US" sz="1220" dirty="0"/>
           </a:p>
         </p:txBody>
       </p:sp>
@@ -6750,8 +6754,8 @@
         </p:nvSpPr>
         <p:spPr>
           <a:xfrm>
-            <a:off x="7799832" y="1801368"/>
-            <a:ext cx="3145536" cy="688543"/>
+            <a:off x="7708392" y="1764792"/>
+            <a:ext cx="3282696" cy="749808"/>
           </a:xfrm>
           <a:prstGeom prst="rect">
             <a:avLst/>
@@ -6769,7 +6773,7 @@
               <a:buNone/>
             </a:pPr>
             <a:r>
-              <a:rPr lang="en-US" sz="1320" dirty="0">
+              <a:rPr lang="en-US" sz="1220" dirty="0">
                 <a:solidFill>
                   <a:srgbClr val="17364A"/>
                 </a:solidFill>
@@ -6777,9 +6781,9 @@
                 <a:ea typeface="Aptos" pitchFamily="34" charset="-122"/>
                 <a:cs typeface="Aptos" pitchFamily="34" charset="-120"/>
               </a:rPr>
-              <a:t>Generative AI may summarize linked records, so source attribution and linkage confidence should be.</a:t>
-            </a:r>
-            <a:endParaRPr lang="en-US" sz="1320" dirty="0"/>
+              <a:t>Generative AI may summarize linked records, so source attribution and linkage.</a:t>
+            </a:r>
+            <a:endParaRPr lang="en-US" sz="1220" dirty="0"/>
           </a:p>
         </p:txBody>
       </p:sp>
@@ -6791,12 +6795,12 @@
         </p:nvSpPr>
         <p:spPr>
           <a:xfrm>
-            <a:off x="7635240" y="2718511"/>
-            <a:ext cx="3474720" cy="1328623"/>
+            <a:off x="7543800" y="2724912"/>
+            <a:ext cx="3611880" cy="1527048"/>
           </a:xfrm>
           <a:prstGeom prst="roundRect">
             <a:avLst>
-              <a:gd name="adj" fmla="val 8259"/>
+              <a:gd name="adj" fmla="val 7186"/>
             </a:avLst>
           </a:prstGeom>
           <a:solidFill>
@@ -6818,24 +6822,26 @@
         </p:nvSpPr>
         <p:spPr>
           <a:xfrm>
-            <a:off x="7799832" y="2846527"/>
-            <a:ext cx="3145536" cy="237744"/>
-          </a:xfrm>
-          <a:prstGeom prst="rect">
-            <a:avLst/>
-          </a:prstGeom>
-          <a:noFill/>
-          <a:ln/>
-        </p:spPr>
-        <p:txBody>
-          <a:bodyPr wrap="square" lIns="0" tIns="0" rIns="0" bIns="0" rtlCol="0" anchor="ctr"/>
-          <a:lstStyle/>
-          <a:p>
-            <a:pPr indent="0" marL="0">
-              <a:buNone/>
-            </a:pPr>
-            <a:r>
-              <a:rPr lang="en-US" sz="1250" b="1" dirty="0">
+            <a:off x="7708392" y="2852928"/>
+            <a:ext cx="3282696" cy="219456"/>
+          </a:xfrm>
+          <a:prstGeom prst="rect">
+            <a:avLst/>
+          </a:prstGeom>
+          <a:noFill/>
+          <a:ln/>
+        </p:spPr>
+        <p:txBody>
+          <a:bodyPr wrap="square" lIns="0" tIns="0" rIns="0" bIns="0" rtlCol="0" anchor="ctr">
+            <a:normAutofit/>
+          </a:bodyPr>
+          <a:lstStyle/>
+          <a:p>
+            <a:pPr indent="0" marL="0">
+              <a:buNone/>
+            </a:pPr>
+            <a:r>
+              <a:rPr lang="en-US" sz="1160" b="1" dirty="0">
                 <a:solidFill>
                   <a:srgbClr val="0068B7"/>
                 </a:solidFill>
@@ -6845,7 +6851,7 @@
               </a:rPr>
               <a:t>Implementation path</a:t>
             </a:r>
-            <a:endParaRPr lang="en-US" sz="1250" dirty="0"/>
+            <a:endParaRPr lang="en-US" sz="1160" dirty="0"/>
           </a:p>
         </p:txBody>
       </p:sp>
@@ -6857,7 +6863,7 @@
         </p:nvSpPr>
         <p:spPr>
           <a:xfrm>
-            <a:off x="8763000" y="3399739"/>
+            <a:off x="8717280" y="3406140"/>
             <a:ext cx="164592" cy="0"/>
           </a:xfrm>
           <a:prstGeom prst="line">
@@ -6880,8 +6886,8 @@
         </p:nvSpPr>
         <p:spPr>
           <a:xfrm>
-            <a:off x="7872984" y="3248863"/>
-            <a:ext cx="890016" cy="301752"/>
+            <a:off x="7781544" y="3255264"/>
+            <a:ext cx="935736" cy="301752"/>
           </a:xfrm>
           <a:prstGeom prst="roundRect">
             <a:avLst>
@@ -6907,8 +6913,8 @@
         </p:nvSpPr>
         <p:spPr>
           <a:xfrm>
-            <a:off x="7909560" y="3322015"/>
-            <a:ext cx="816864" cy="146304"/>
+            <a:off x="7818120" y="3328416"/>
+            <a:ext cx="862584" cy="146304"/>
           </a:xfrm>
           <a:prstGeom prst="rect">
             <a:avLst/>
@@ -6948,7 +6954,7 @@
         </p:nvSpPr>
         <p:spPr>
           <a:xfrm>
-            <a:off x="9817608" y="3399739"/>
+            <a:off x="9817608" y="3406140"/>
             <a:ext cx="164592" cy="0"/>
           </a:xfrm>
           <a:prstGeom prst="line">
@@ -6971,8 +6977,8 @@
         </p:nvSpPr>
         <p:spPr>
           <a:xfrm>
-            <a:off x="8927592" y="3248863"/>
-            <a:ext cx="890016" cy="301752"/>
+            <a:off x="8881872" y="3255264"/>
+            <a:ext cx="935736" cy="301752"/>
           </a:xfrm>
           <a:prstGeom prst="roundRect">
             <a:avLst>
@@ -6998,8 +7004,8 @@
         </p:nvSpPr>
         <p:spPr>
           <a:xfrm>
-            <a:off x="8964168" y="3322015"/>
-            <a:ext cx="816864" cy="146304"/>
+            <a:off x="8918448" y="3328416"/>
+            <a:ext cx="862584" cy="146304"/>
           </a:xfrm>
           <a:prstGeom prst="rect">
             <a:avLst/>
@@ -7039,8 +7045,8 @@
         </p:nvSpPr>
         <p:spPr>
           <a:xfrm>
-            <a:off x="9982200" y="3248863"/>
-            <a:ext cx="890016" cy="301752"/>
+            <a:off x="9982200" y="3255264"/>
+            <a:ext cx="935736" cy="301752"/>
           </a:xfrm>
           <a:prstGeom prst="roundRect">
             <a:avLst>
@@ -7066,8 +7072,8 @@
         </p:nvSpPr>
         <p:spPr>
           <a:xfrm>
-            <a:off x="10018776" y="3322015"/>
-            <a:ext cx="816864" cy="146304"/>
+            <a:off x="10018776" y="3328416"/>
+            <a:ext cx="862584" cy="146304"/>
           </a:xfrm>
           <a:prstGeom prst="rect">
             <a:avLst/>
@@ -7107,8 +7113,8 @@
         </p:nvSpPr>
         <p:spPr>
           <a:xfrm>
-            <a:off x="7854696" y="3742639"/>
-            <a:ext cx="3035808" cy="158191"/>
+            <a:off x="7763256" y="3749040"/>
+            <a:ext cx="3172968" cy="356616"/>
           </a:xfrm>
           <a:prstGeom prst="rect">
             <a:avLst/>
@@ -7126,7 +7132,7 @@
               <a:buNone/>
             </a:pPr>
             <a:r>
-              <a:rPr lang="en-US" sz="1120" dirty="0">
+              <a:rPr lang="en-US" sz="1040" dirty="0">
                 <a:solidFill>
                   <a:srgbClr val="17364A"/>
                 </a:solidFill>
@@ -7134,9 +7140,9 @@
                 <a:ea typeface="Aptos" pitchFamily="34" charset="-122"/>
                 <a:cs typeface="Aptos" pitchFamily="34" charset="-120"/>
               </a:rPr>
-              <a:t>Implementation work should make dependencies, approvals, training, and sustainment visible before launch.</a:t>
-            </a:r>
-            <a:endParaRPr lang="en-US" sz="1120" dirty="0"/>
+              <a:t>Implementation work should make dependencies, approvals, training, and.</a:t>
+            </a:r>
+            <a:endParaRPr lang="en-US" sz="1040" dirty="0"/>
           </a:p>
         </p:txBody>
       </p:sp>
@@ -7148,12 +7154,12 @@
         </p:nvSpPr>
         <p:spPr>
           <a:xfrm>
-            <a:off x="7635240" y="4184294"/>
-            <a:ext cx="3474720" cy="1466698"/>
+            <a:off x="7543800" y="4389120"/>
+            <a:ext cx="3611880" cy="1261872"/>
           </a:xfrm>
           <a:prstGeom prst="roundRect">
             <a:avLst>
-              <a:gd name="adj" fmla="val 7481"/>
+              <a:gd name="adj" fmla="val 8696"/>
             </a:avLst>
           </a:prstGeom>
           <a:solidFill>
@@ -7175,8 +7181,8 @@
         </p:nvSpPr>
         <p:spPr>
           <a:xfrm>
-            <a:off x="7799832" y="4330598"/>
-            <a:ext cx="3145536" cy="256032"/>
+            <a:off x="7708392" y="4517136"/>
+            <a:ext cx="3282696" cy="228600"/>
           </a:xfrm>
           <a:prstGeom prst="rect">
             <a:avLst/>
@@ -7192,7 +7198,7 @@
               <a:buNone/>
             </a:pPr>
             <a:r>
-              <a:rPr lang="en-US" sz="1300" b="1" dirty="0">
+              <a:rPr lang="en-US" sz="1220" b="1" dirty="0">
                 <a:solidFill>
                   <a:srgbClr val="0068B7"/>
                 </a:solidFill>
@@ -7202,7 +7208,7 @@
               </a:rPr>
               <a:t>Next action</a:t>
             </a:r>
-            <a:endParaRPr lang="en-US" sz="1300" dirty="0"/>
+            <a:endParaRPr lang="en-US" sz="1220" dirty="0"/>
           </a:p>
         </p:txBody>
       </p:sp>
@@ -7214,8 +7220,8 @@
         </p:nvSpPr>
         <p:spPr>
           <a:xfrm>
-            <a:off x="7799832" y="4659782"/>
-            <a:ext cx="3145536" cy="899770"/>
+            <a:off x="7708392" y="4828032"/>
+            <a:ext cx="3282696" cy="749808"/>
           </a:xfrm>
           <a:prstGeom prst="rect">
             <a:avLst/>
@@ -7233,7 +7239,7 @@
               <a:buNone/>
             </a:pPr>
             <a:r>
-              <a:rPr lang="en-US" sz="1320" dirty="0">
+              <a:rPr lang="en-US" sz="1220" dirty="0">
                 <a:solidFill>
                   <a:srgbClr val="17364A"/>
                 </a:solidFill>
@@ -7241,9 +7247,9 @@
                 <a:ea typeface="Aptos" pitchFamily="34" charset="-122"/>
                 <a:cs typeface="Aptos" pitchFamily="34" charset="-120"/>
               </a:rPr>
-              <a:t>Use the concept to clarify workflow changes, dependencies, staffing, procurement requirements, training needs, and implementation checkpoints.</a:t>
-            </a:r>
-            <a:endParaRPr lang="en-US" sz="1320" dirty="0"/>
+              <a:t>Use the concept to clarify workflow changes, dependencies, staffing, procurement.</a:t>
+            </a:r>
+            <a:endParaRPr lang="en-US" sz="1220" dirty="0"/>
           </a:p>
         </p:txBody>
       </p:sp>
@@ -7534,8 +7540,8 @@
         </p:nvSpPr>
         <p:spPr>
           <a:xfrm>
-            <a:off x="868680" y="1508760"/>
-            <a:ext cx="6309360" cy="4160520"/>
+            <a:off x="822960" y="1463040"/>
+            <a:ext cx="6565392" cy="4343400"/>
           </a:xfrm>
           <a:prstGeom prst="rect">
             <a:avLst/>
@@ -7553,7 +7559,7 @@
               <a:buNone/>
             </a:pPr>
             <a:r>
-              <a:rPr lang="en-US" sz="2100" dirty="0">
+              <a:rPr lang="en-US" sz="1920" dirty="0">
                 <a:solidFill>
                   <a:srgbClr val="003A63"/>
                 </a:solidFill>
@@ -7563,14 +7569,14 @@
               </a:rPr>
               <a:t>• Which workflows in your agency depend on matching records across systems?</a:t>
             </a:r>
-            <a:endParaRPr lang="en-US" sz="2100" dirty="0"/>
-          </a:p>
-          <a:p>
-            <a:pPr indent="0" marL="0">
-              <a:buNone/>
-            </a:pPr>
-            <a:r>
-              <a:rPr lang="en-US" sz="2100" dirty="0">
+            <a:endParaRPr lang="en-US" sz="1920" dirty="0"/>
+          </a:p>
+          <a:p>
+            <a:pPr indent="0" marL="0">
+              <a:buNone/>
+            </a:pPr>
+            <a:r>
+              <a:rPr lang="en-US" sz="1920" dirty="0">
                 <a:solidFill>
                   <a:srgbClr val="003A63"/>
                 </a:solidFill>
@@ -7580,14 +7586,14 @@
               </a:rPr>
               <a:t>• What fields are used for matching, and how complete are they?</a:t>
             </a:r>
-            <a:endParaRPr lang="en-US" sz="2100" dirty="0"/>
-          </a:p>
-          <a:p>
-            <a:pPr indent="0" marL="0">
-              <a:buNone/>
-            </a:pPr>
-            <a:r>
-              <a:rPr lang="en-US" sz="2100" dirty="0">
+            <a:endParaRPr lang="en-US" sz="1920" dirty="0"/>
+          </a:p>
+          <a:p>
+            <a:pPr indent="0" marL="0">
+              <a:buNone/>
+            </a:pPr>
+            <a:r>
+              <a:rPr lang="en-US" sz="1920" dirty="0">
                 <a:solidFill>
                   <a:srgbClr val="003A63"/>
                 </a:solidFill>
@@ -7595,9 +7601,9 @@
                 <a:ea typeface="Aptos" pitchFamily="34" charset="-122"/>
                 <a:cs typeface="Aptos" pitchFamily="34" charset="-120"/>
               </a:rPr>
-              <a:t>• Which populations may be more likely to experience missed or incorrect matches?</a:t>
-            </a:r>
-            <a:endParaRPr lang="en-US" sz="2100" dirty="0"/>
+              <a:t>• Which populations may be more likely to experience missed or incorrect.</a:t>
+            </a:r>
+            <a:endParaRPr lang="en-US" sz="1920" dirty="0"/>
           </a:p>
         </p:txBody>
       </p:sp>
@@ -7609,12 +7615,12 @@
         </p:nvSpPr>
         <p:spPr>
           <a:xfrm>
-            <a:off x="7635240" y="1325880"/>
-            <a:ext cx="3474720" cy="1207008"/>
+            <a:off x="7543800" y="1325880"/>
+            <a:ext cx="3611880" cy="1261872"/>
           </a:xfrm>
           <a:prstGeom prst="roundRect">
             <a:avLst>
-              <a:gd name="adj" fmla="val 9091"/>
+              <a:gd name="adj" fmla="val 8696"/>
             </a:avLst>
           </a:prstGeom>
           <a:solidFill>
@@ -7636,8 +7642,8 @@
         </p:nvSpPr>
         <p:spPr>
           <a:xfrm>
-            <a:off x="7799832" y="1472184"/>
-            <a:ext cx="3145536" cy="256032"/>
+            <a:off x="7708392" y="1453896"/>
+            <a:ext cx="3282696" cy="228600"/>
           </a:xfrm>
           <a:prstGeom prst="rect">
             <a:avLst/>
@@ -7653,7 +7659,7 @@
               <a:buNone/>
             </a:pPr>
             <a:r>
-              <a:rPr lang="en-US" sz="1300" b="1" dirty="0">
+              <a:rPr lang="en-US" sz="1220" b="1" dirty="0">
                 <a:solidFill>
                   <a:srgbClr val="0068B7"/>
                 </a:solidFill>
@@ -7663,7 +7669,7 @@
               </a:rPr>
               <a:t>Core concept</a:t>
             </a:r>
-            <a:endParaRPr lang="en-US" sz="1300" dirty="0"/>
+            <a:endParaRPr lang="en-US" sz="1220" dirty="0"/>
           </a:p>
         </p:txBody>
       </p:sp>
@@ -7675,8 +7681,8 @@
         </p:nvSpPr>
         <p:spPr>
           <a:xfrm>
-            <a:off x="7799832" y="1801368"/>
-            <a:ext cx="3145536" cy="640080"/>
+            <a:off x="7708392" y="1764792"/>
+            <a:ext cx="3282696" cy="749808"/>
           </a:xfrm>
           <a:prstGeom prst="rect">
             <a:avLst/>
@@ -7694,7 +7700,7 @@
               <a:buNone/>
             </a:pPr>
             <a:r>
-              <a:rPr lang="en-US" sz="1320" dirty="0">
+              <a:rPr lang="en-US" sz="1220" dirty="0">
                 <a:solidFill>
                   <a:srgbClr val="17364A"/>
                 </a:solidFill>
@@ -7704,7 +7710,7 @@
               </a:rPr>
               <a:t>Which workflows in your agency depend on matching records across systems?</a:t>
             </a:r>
-            <a:endParaRPr lang="en-US" sz="1320" dirty="0"/>
+            <a:endParaRPr lang="en-US" sz="1220" dirty="0"/>
           </a:p>
         </p:txBody>
       </p:sp>
@@ -7716,12 +7722,12 @@
         </p:nvSpPr>
         <p:spPr>
           <a:xfrm>
-            <a:off x="7635240" y="2670048"/>
-            <a:ext cx="3474720" cy="1377086"/>
+            <a:off x="7543800" y="2724912"/>
+            <a:ext cx="3611880" cy="1527048"/>
           </a:xfrm>
           <a:prstGeom prst="roundRect">
             <a:avLst>
-              <a:gd name="adj" fmla="val 7968"/>
+              <a:gd name="adj" fmla="val 7186"/>
             </a:avLst>
           </a:prstGeom>
           <a:solidFill>
@@ -7743,8 +7749,8 @@
         </p:nvSpPr>
         <p:spPr>
           <a:xfrm>
-            <a:off x="7799832" y="2816352"/>
-            <a:ext cx="3145536" cy="256032"/>
+            <a:off x="7708392" y="2852928"/>
+            <a:ext cx="3282696" cy="228600"/>
           </a:xfrm>
           <a:prstGeom prst="rect">
             <a:avLst/>
@@ -7760,7 +7766,7 @@
               <a:buNone/>
             </a:pPr>
             <a:r>
-              <a:rPr lang="en-US" sz="1300" b="1" dirty="0">
+              <a:rPr lang="en-US" sz="1220" b="1" dirty="0">
                 <a:solidFill>
                   <a:srgbClr val="0068B7"/>
                 </a:solidFill>
@@ -7770,7 +7776,7 @@
               </a:rPr>
               <a:t>Concept checkpoints</a:t>
             </a:r>
-            <a:endParaRPr lang="en-US" sz="1300" dirty="0"/>
+            <a:endParaRPr lang="en-US" sz="1220" dirty="0"/>
           </a:p>
         </p:txBody>
       </p:sp>
@@ -7782,8 +7788,8 @@
         </p:nvSpPr>
         <p:spPr>
           <a:xfrm>
-            <a:off x="7818120" y="3182112"/>
-            <a:ext cx="3090672" cy="718718"/>
+            <a:off x="7726680" y="3182112"/>
+            <a:ext cx="3227832" cy="960120"/>
           </a:xfrm>
           <a:prstGeom prst="rect">
             <a:avLst/>
@@ -7801,7 +7807,7 @@
               <a:buNone/>
             </a:pPr>
             <a:r>
-              <a:rPr lang="en-US" sz="1220" dirty="0">
+              <a:rPr lang="en-US" sz="1140" dirty="0">
                 <a:solidFill>
                   <a:srgbClr val="17364A"/>
                 </a:solidFill>
@@ -7809,16 +7815,16 @@
                 <a:ea typeface="Aptos" pitchFamily="34" charset="-122"/>
                 <a:cs typeface="Aptos" pitchFamily="34" charset="-120"/>
               </a:rPr>
-              <a:t>Which workflows in your agency depend on matching records across.</a:t>
-            </a:r>
-            <a:endParaRPr lang="en-US" sz="1220" dirty="0"/>
-          </a:p>
-          <a:p>
-            <a:pPr indent="0" marL="0">
-              <a:buNone/>
-            </a:pPr>
-            <a:r>
-              <a:rPr lang="en-US" sz="1220" dirty="0">
+              <a:t>Which workflows in your agency depend on matching.</a:t>
+            </a:r>
+            <a:endParaRPr lang="en-US" sz="1140" dirty="0"/>
+          </a:p>
+          <a:p>
+            <a:pPr indent="0" marL="0">
+              <a:buNone/>
+            </a:pPr>
+            <a:r>
+              <a:rPr lang="en-US" sz="1140" dirty="0">
                 <a:solidFill>
                   <a:srgbClr val="17364A"/>
                 </a:solidFill>
@@ -7826,16 +7832,16 @@
                 <a:ea typeface="Aptos" pitchFamily="34" charset="-122"/>
                 <a:cs typeface="Aptos" pitchFamily="34" charset="-120"/>
               </a:rPr>
-              <a:t>What fields are used for matching, and how complete are they?</a:t>
-            </a:r>
-            <a:endParaRPr lang="en-US" sz="1220" dirty="0"/>
-          </a:p>
-          <a:p>
-            <a:pPr indent="0" marL="0">
-              <a:buNone/>
-            </a:pPr>
-            <a:r>
-              <a:rPr lang="en-US" sz="1220" dirty="0">
+              <a:t>What fields are used for matching, and how.</a:t>
+            </a:r>
+            <a:endParaRPr lang="en-US" sz="1140" dirty="0"/>
+          </a:p>
+          <a:p>
+            <a:pPr indent="0" marL="0">
+              <a:buNone/>
+            </a:pPr>
+            <a:r>
+              <a:rPr lang="en-US" sz="1140" dirty="0">
                 <a:solidFill>
                   <a:srgbClr val="17364A"/>
                 </a:solidFill>
@@ -7843,9 +7849,9 @@
                 <a:ea typeface="Aptos" pitchFamily="34" charset="-122"/>
                 <a:cs typeface="Aptos" pitchFamily="34" charset="-120"/>
               </a:rPr>
-              <a:t>Which populations may be more likely to experience missed or.</a:t>
-            </a:r>
-            <a:endParaRPr lang="en-US" sz="1220" dirty="0"/>
+              <a:t>Which populations may be more likely to experience.</a:t>
+            </a:r>
+            <a:endParaRPr lang="en-US" sz="1140" dirty="0"/>
           </a:p>
         </p:txBody>
       </p:sp>
@@ -7857,12 +7863,12 @@
         </p:nvSpPr>
         <p:spPr>
           <a:xfrm>
-            <a:off x="7635240" y="4184294"/>
-            <a:ext cx="3474720" cy="1466698"/>
+            <a:off x="7543800" y="4389120"/>
+            <a:ext cx="3611880" cy="1261872"/>
           </a:xfrm>
           <a:prstGeom prst="roundRect">
             <a:avLst>
-              <a:gd name="adj" fmla="val 7481"/>
+              <a:gd name="adj" fmla="val 8696"/>
             </a:avLst>
           </a:prstGeom>
           <a:solidFill>
@@ -7884,8 +7890,8 @@
         </p:nvSpPr>
         <p:spPr>
           <a:xfrm>
-            <a:off x="7799832" y="4330598"/>
-            <a:ext cx="3145536" cy="256032"/>
+            <a:off x="7708392" y="4517136"/>
+            <a:ext cx="3282696" cy="228600"/>
           </a:xfrm>
           <a:prstGeom prst="rect">
             <a:avLst/>
@@ -7901,7 +7907,7 @@
               <a:buNone/>
             </a:pPr>
             <a:r>
-              <a:rPr lang="en-US" sz="1300" b="1" dirty="0">
+              <a:rPr lang="en-US" sz="1220" b="1" dirty="0">
                 <a:solidFill>
                   <a:srgbClr val="0068B7"/>
                 </a:solidFill>
@@ -7911,7 +7917,7 @@
               </a:rPr>
               <a:t>Apply it</a:t>
             </a:r>
-            <a:endParaRPr lang="en-US" sz="1300" dirty="0"/>
+            <a:endParaRPr lang="en-US" sz="1220" dirty="0"/>
           </a:p>
         </p:txBody>
       </p:sp>
@@ -7923,8 +7929,8 @@
         </p:nvSpPr>
         <p:spPr>
           <a:xfrm>
-            <a:off x="7799832" y="4659782"/>
-            <a:ext cx="3145536" cy="899770"/>
+            <a:off x="7708392" y="4828032"/>
+            <a:ext cx="3282696" cy="749808"/>
           </a:xfrm>
           <a:prstGeom prst="rect">
             <a:avLst/>
@@ -7942,7 +7948,7 @@
               <a:buNone/>
             </a:pPr>
             <a:r>
-              <a:rPr lang="en-US" sz="1320" dirty="0">
+              <a:rPr lang="en-US" sz="1220" dirty="0">
                 <a:solidFill>
                   <a:srgbClr val="17364A"/>
                 </a:solidFill>
@@ -7950,9 +7956,9 @@
                 <a:ea typeface="Aptos" pitchFamily="34" charset="-122"/>
                 <a:cs typeface="Aptos" pitchFamily="34" charset="-120"/>
               </a:rPr>
-              <a:t>Connect the concept to public health purpose, responsible use, required safeguards, documentation, and the next action a department should take.</a:t>
-            </a:r>
-            <a:endParaRPr lang="en-US" sz="1320" dirty="0"/>
+              <a:t>Connect the concept to public health purpose, responsible use, required.</a:t>
+            </a:r>
+            <a:endParaRPr lang="en-US" sz="1220" dirty="0"/>
           </a:p>
         </p:txBody>
       </p:sp>
@@ -8243,8 +8249,8 @@
         </p:nvSpPr>
         <p:spPr>
           <a:xfrm>
-            <a:off x="868680" y="1508760"/>
-            <a:ext cx="6309360" cy="4160520"/>
+            <a:off x="822960" y="1463040"/>
+            <a:ext cx="6565392" cy="4343400"/>
           </a:xfrm>
           <a:prstGeom prst="rect">
             <a:avLst/>
@@ -8262,7 +8268,7 @@
               <a:buNone/>
             </a:pPr>
             <a:r>
-              <a:rPr lang="en-US" sz="2100" dirty="0">
+              <a:rPr lang="en-US" sz="1920" dirty="0">
                 <a:solidFill>
                   <a:srgbClr val="003A63"/>
                 </a:solidFill>
@@ -8272,14 +8278,14 @@
               </a:rPr>
               <a:t>• What happens when records are incorrectly merged or not merged?</a:t>
             </a:r>
-            <a:endParaRPr lang="en-US" sz="2100" dirty="0"/>
-          </a:p>
-          <a:p>
-            <a:pPr indent="0" marL="0">
-              <a:buNone/>
-            </a:pPr>
-            <a:r>
-              <a:rPr lang="en-US" sz="2100" dirty="0">
+            <a:endParaRPr lang="en-US" sz="1920" dirty="0"/>
+          </a:p>
+          <a:p>
+            <a:pPr indent="0" marL="0">
+              <a:buNone/>
+            </a:pPr>
+            <a:r>
+              <a:rPr lang="en-US" sz="1920" dirty="0">
                 <a:solidFill>
                   <a:srgbClr val="003A63"/>
                 </a:solidFill>
@@ -8289,7 +8295,7 @@
               </a:rPr>
               <a:t>• Where should human review be required?</a:t>
             </a:r>
-            <a:endParaRPr lang="en-US" sz="2100" dirty="0"/>
+            <a:endParaRPr lang="en-US" sz="1920" dirty="0"/>
           </a:p>
         </p:txBody>
       </p:sp>
@@ -8301,12 +8307,12 @@
         </p:nvSpPr>
         <p:spPr>
           <a:xfrm>
-            <a:off x="7635240" y="1325880"/>
-            <a:ext cx="3474720" cy="1207008"/>
+            <a:off x="7543800" y="1325880"/>
+            <a:ext cx="3611880" cy="1261872"/>
           </a:xfrm>
           <a:prstGeom prst="roundRect">
             <a:avLst>
-              <a:gd name="adj" fmla="val 9091"/>
+              <a:gd name="adj" fmla="val 8696"/>
             </a:avLst>
           </a:prstGeom>
           <a:solidFill>
@@ -8328,8 +8334,8 @@
         </p:nvSpPr>
         <p:spPr>
           <a:xfrm>
-            <a:off x="7799832" y="1472184"/>
-            <a:ext cx="3145536" cy="256032"/>
+            <a:off x="7708392" y="1453896"/>
+            <a:ext cx="3282696" cy="228600"/>
           </a:xfrm>
           <a:prstGeom prst="rect">
             <a:avLst/>
@@ -8345,7 +8351,7 @@
               <a:buNone/>
             </a:pPr>
             <a:r>
-              <a:rPr lang="en-US" sz="1300" b="1" dirty="0">
+              <a:rPr lang="en-US" sz="1220" b="1" dirty="0">
                 <a:solidFill>
                   <a:srgbClr val="0068B7"/>
                 </a:solidFill>
@@ -8355,7 +8361,7 @@
               </a:rPr>
               <a:t>Core concept</a:t>
             </a:r>
-            <a:endParaRPr lang="en-US" sz="1300" dirty="0"/>
+            <a:endParaRPr lang="en-US" sz="1220" dirty="0"/>
           </a:p>
         </p:txBody>
       </p:sp>
@@ -8367,8 +8373,8 @@
         </p:nvSpPr>
         <p:spPr>
           <a:xfrm>
-            <a:off x="7799832" y="1801368"/>
-            <a:ext cx="3145536" cy="640080"/>
+            <a:off x="7708392" y="1764792"/>
+            <a:ext cx="3282696" cy="749808"/>
           </a:xfrm>
           <a:prstGeom prst="rect">
             <a:avLst/>
@@ -8386,7 +8392,7 @@
               <a:buNone/>
             </a:pPr>
             <a:r>
-              <a:rPr lang="en-US" sz="1320" dirty="0">
+              <a:rPr lang="en-US" sz="1220" dirty="0">
                 <a:solidFill>
                   <a:srgbClr val="17364A"/>
                 </a:solidFill>
@@ -8396,7 +8402,7 @@
               </a:rPr>
               <a:t>What happens when records are incorrectly merged or not merged?</a:t>
             </a:r>
-            <a:endParaRPr lang="en-US" sz="1320" dirty="0"/>
+            <a:endParaRPr lang="en-US" sz="1220" dirty="0"/>
           </a:p>
         </p:txBody>
       </p:sp>
@@ -8408,12 +8414,12 @@
         </p:nvSpPr>
         <p:spPr>
           <a:xfrm>
-            <a:off x="7635240" y="2670048"/>
-            <a:ext cx="3474720" cy="1377086"/>
+            <a:off x="7543800" y="2724912"/>
+            <a:ext cx="3611880" cy="1527048"/>
           </a:xfrm>
           <a:prstGeom prst="roundRect">
             <a:avLst>
-              <a:gd name="adj" fmla="val 7968"/>
+              <a:gd name="adj" fmla="val 7186"/>
             </a:avLst>
           </a:prstGeom>
           <a:solidFill>
@@ -8435,8 +8441,8 @@
         </p:nvSpPr>
         <p:spPr>
           <a:xfrm>
-            <a:off x="7799832" y="2816352"/>
-            <a:ext cx="3145536" cy="256032"/>
+            <a:off x="7708392" y="2852928"/>
+            <a:ext cx="3282696" cy="228600"/>
           </a:xfrm>
           <a:prstGeom prst="rect">
             <a:avLst/>
@@ -8452,7 +8458,7 @@
               <a:buNone/>
             </a:pPr>
             <a:r>
-              <a:rPr lang="en-US" sz="1300" b="1" dirty="0">
+              <a:rPr lang="en-US" sz="1220" b="1" dirty="0">
                 <a:solidFill>
                   <a:srgbClr val="0068B7"/>
                 </a:solidFill>
@@ -8462,7 +8468,7 @@
               </a:rPr>
               <a:t>Concept checkpoints</a:t>
             </a:r>
-            <a:endParaRPr lang="en-US" sz="1300" dirty="0"/>
+            <a:endParaRPr lang="en-US" sz="1220" dirty="0"/>
           </a:p>
         </p:txBody>
       </p:sp>
@@ -8474,8 +8480,8 @@
         </p:nvSpPr>
         <p:spPr>
           <a:xfrm>
-            <a:off x="7818120" y="3182112"/>
-            <a:ext cx="3090672" cy="718718"/>
+            <a:off x="7726680" y="3182112"/>
+            <a:ext cx="3227832" cy="960120"/>
           </a:xfrm>
           <a:prstGeom prst="rect">
             <a:avLst/>
@@ -8493,7 +8499,7 @@
               <a:buNone/>
             </a:pPr>
             <a:r>
-              <a:rPr lang="en-US" sz="1220" dirty="0">
+              <a:rPr lang="en-US" sz="1140" dirty="0">
                 <a:solidFill>
                   <a:srgbClr val="17364A"/>
                 </a:solidFill>
@@ -8501,16 +8507,16 @@
                 <a:ea typeface="Aptos" pitchFamily="34" charset="-122"/>
                 <a:cs typeface="Aptos" pitchFamily="34" charset="-120"/>
               </a:rPr>
-              <a:t>What happens when records are incorrectly merged or not merged?</a:t>
-            </a:r>
-            <a:endParaRPr lang="en-US" sz="1220" dirty="0"/>
-          </a:p>
-          <a:p>
-            <a:pPr indent="0" marL="0">
-              <a:buNone/>
-            </a:pPr>
-            <a:r>
-              <a:rPr lang="en-US" sz="1220" dirty="0">
+              <a:t>What happens when records are incorrectly merged.</a:t>
+            </a:r>
+            <a:endParaRPr lang="en-US" sz="1140" dirty="0"/>
+          </a:p>
+          <a:p>
+            <a:pPr indent="0" marL="0">
+              <a:buNone/>
+            </a:pPr>
+            <a:r>
+              <a:rPr lang="en-US" sz="1140" dirty="0">
                 <a:solidFill>
                   <a:srgbClr val="17364A"/>
                 </a:solidFill>
@@ -8520,7 +8526,7 @@
               </a:rPr>
               <a:t>Where should human review be required?</a:t>
             </a:r>
-            <a:endParaRPr lang="en-US" sz="1220" dirty="0"/>
+            <a:endParaRPr lang="en-US" sz="1140" dirty="0"/>
           </a:p>
         </p:txBody>
       </p:sp>
@@ -8532,12 +8538,12 @@
         </p:nvSpPr>
         <p:spPr>
           <a:xfrm>
-            <a:off x="7635240" y="4184294"/>
-            <a:ext cx="3474720" cy="1466698"/>
+            <a:off x="7543800" y="4389120"/>
+            <a:ext cx="3611880" cy="1261872"/>
           </a:xfrm>
           <a:prstGeom prst="roundRect">
             <a:avLst>
-              <a:gd name="adj" fmla="val 7481"/>
+              <a:gd name="adj" fmla="val 8696"/>
             </a:avLst>
           </a:prstGeom>
           <a:solidFill>
@@ -8559,8 +8565,8 @@
         </p:nvSpPr>
         <p:spPr>
           <a:xfrm>
-            <a:off x="7799832" y="4330598"/>
-            <a:ext cx="3145536" cy="256032"/>
+            <a:off x="7708392" y="4517136"/>
+            <a:ext cx="3282696" cy="228600"/>
           </a:xfrm>
           <a:prstGeom prst="rect">
             <a:avLst/>
@@ -8576,7 +8582,7 @@
               <a:buNone/>
             </a:pPr>
             <a:r>
-              <a:rPr lang="en-US" sz="1300" b="1" dirty="0">
+              <a:rPr lang="en-US" sz="1220" b="1" dirty="0">
                 <a:solidFill>
                   <a:srgbClr val="0068B7"/>
                 </a:solidFill>
@@ -8586,7 +8592,7 @@
               </a:rPr>
               <a:t>Apply it</a:t>
             </a:r>
-            <a:endParaRPr lang="en-US" sz="1300" dirty="0"/>
+            <a:endParaRPr lang="en-US" sz="1220" dirty="0"/>
           </a:p>
         </p:txBody>
       </p:sp>
@@ -8598,8 +8604,8 @@
         </p:nvSpPr>
         <p:spPr>
           <a:xfrm>
-            <a:off x="7799832" y="4659782"/>
-            <a:ext cx="3145536" cy="899770"/>
+            <a:off x="7708392" y="4828032"/>
+            <a:ext cx="3282696" cy="749808"/>
           </a:xfrm>
           <a:prstGeom prst="rect">
             <a:avLst/>
@@ -8617,7 +8623,7 @@
               <a:buNone/>
             </a:pPr>
             <a:r>
-              <a:rPr lang="en-US" sz="1320" dirty="0">
+              <a:rPr lang="en-US" sz="1220" dirty="0">
                 <a:solidFill>
                   <a:srgbClr val="17364A"/>
                 </a:solidFill>
@@ -8625,9 +8631,9 @@
                 <a:ea typeface="Aptos" pitchFamily="34" charset="-122"/>
                 <a:cs typeface="Aptos" pitchFamily="34" charset="-120"/>
               </a:rPr>
-              <a:t>Connect the concept to public health purpose, responsible use, required safeguards, documentation, and the next action a department should take.</a:t>
-            </a:r>
-            <a:endParaRPr lang="en-US" sz="1320" dirty="0"/>
+              <a:t>Connect the concept to public health purpose, responsible use, required.</a:t>
+            </a:r>
+            <a:endParaRPr lang="en-US" sz="1220" dirty="0"/>
           </a:p>
         </p:txBody>
       </p:sp>
@@ -8918,8 +8924,8 @@
         </p:nvSpPr>
         <p:spPr>
           <a:xfrm>
-            <a:off x="868680" y="1508760"/>
-            <a:ext cx="6309360" cy="4160520"/>
+            <a:off x="822960" y="1463040"/>
+            <a:ext cx="6565392" cy="4343400"/>
           </a:xfrm>
           <a:prstGeom prst="rect">
             <a:avLst/>
@@ -8937,7 +8943,7 @@
               <a:buNone/>
             </a:pPr>
             <a:r>
-              <a:rPr lang="en-US" sz="2100" dirty="0">
+              <a:rPr lang="en-US" sz="1920" dirty="0">
                 <a:solidFill>
                   <a:srgbClr val="003A63"/>
                 </a:solidFill>
@@ -8947,14 +8953,14 @@
               </a:rPr>
               <a:t>• Create a linkage risk review for one AI-supported public health workflow.</a:t>
             </a:r>
-            <a:endParaRPr lang="en-US" sz="2100" dirty="0"/>
-          </a:p>
-          <a:p>
-            <a:pPr indent="0" marL="0">
-              <a:buNone/>
-            </a:pPr>
-            <a:r>
-              <a:rPr lang="en-US" sz="2100" dirty="0">
+            <a:endParaRPr lang="en-US" sz="1920" dirty="0"/>
+          </a:p>
+          <a:p>
+            <a:pPr indent="0" marL="0">
+              <a:buNone/>
+            </a:pPr>
+            <a:r>
+              <a:rPr lang="en-US" sz="1920" dirty="0">
                 <a:solidFill>
                   <a:srgbClr val="003A63"/>
                 </a:solidFill>
@@ -8962,9 +8968,9 @@
                 <a:ea typeface="Aptos" pitchFamily="34" charset="-122"/>
                 <a:cs typeface="Aptos" pitchFamily="34" charset="-120"/>
               </a:rPr>
-              <a:t>• Include the matching purpose, data sources, matching fields, known field quality issues, match.</a:t>
-            </a:r>
-            <a:endParaRPr lang="en-US" sz="2100" dirty="0"/>
+              <a:t>• Include the matching purpose, data sources, matching fields, known field.</a:t>
+            </a:r>
+            <a:endParaRPr lang="en-US" sz="1920" dirty="0"/>
           </a:p>
         </p:txBody>
       </p:sp>
@@ -8976,12 +8982,12 @@
         </p:nvSpPr>
         <p:spPr>
           <a:xfrm>
-            <a:off x="7635240" y="1325880"/>
-            <a:ext cx="3474720" cy="1207008"/>
+            <a:off x="7543800" y="1325880"/>
+            <a:ext cx="3611880" cy="1261872"/>
           </a:xfrm>
           <a:prstGeom prst="roundRect">
             <a:avLst>
-              <a:gd name="adj" fmla="val 9091"/>
+              <a:gd name="adj" fmla="val 8696"/>
             </a:avLst>
           </a:prstGeom>
           <a:solidFill>
@@ -9003,8 +9009,8 @@
         </p:nvSpPr>
         <p:spPr>
           <a:xfrm>
-            <a:off x="7799832" y="1472184"/>
-            <a:ext cx="3145536" cy="256032"/>
+            <a:off x="7708392" y="1453896"/>
+            <a:ext cx="3282696" cy="228600"/>
           </a:xfrm>
           <a:prstGeom prst="rect">
             <a:avLst/>
@@ -9020,7 +9026,7 @@
               <a:buNone/>
             </a:pPr>
             <a:r>
-              <a:rPr lang="en-US" sz="1300" b="1" dirty="0">
+              <a:rPr lang="en-US" sz="1220" b="1" dirty="0">
                 <a:solidFill>
                   <a:srgbClr val="0068B7"/>
                 </a:solidFill>
@@ -9030,7 +9036,7 @@
               </a:rPr>
               <a:t>Practice focus</a:t>
             </a:r>
-            <a:endParaRPr lang="en-US" sz="1300" dirty="0"/>
+            <a:endParaRPr lang="en-US" sz="1220" dirty="0"/>
           </a:p>
         </p:txBody>
       </p:sp>
@@ -9042,8 +9048,8 @@
         </p:nvSpPr>
         <p:spPr>
           <a:xfrm>
-            <a:off x="7799832" y="1801368"/>
-            <a:ext cx="3145536" cy="640080"/>
+            <a:off x="7708392" y="1764792"/>
+            <a:ext cx="3282696" cy="749808"/>
           </a:xfrm>
           <a:prstGeom prst="rect">
             <a:avLst/>
@@ -9061,7 +9067,7 @@
               <a:buNone/>
             </a:pPr>
             <a:r>
-              <a:rPr lang="en-US" sz="1320" dirty="0">
+              <a:rPr lang="en-US" sz="1220" dirty="0">
                 <a:solidFill>
                   <a:srgbClr val="17364A"/>
                 </a:solidFill>
@@ -9071,7 +9077,7 @@
               </a:rPr>
               <a:t>Create a linkage risk review for one AI-supported public health workflow.</a:t>
             </a:r>
-            <a:endParaRPr lang="en-US" sz="1320" dirty="0"/>
+            <a:endParaRPr lang="en-US" sz="1220" dirty="0"/>
           </a:p>
         </p:txBody>
       </p:sp>
@@ -9083,12 +9089,12 @@
         </p:nvSpPr>
         <p:spPr>
           <a:xfrm>
-            <a:off x="7635240" y="2670048"/>
-            <a:ext cx="3474720" cy="1377086"/>
+            <a:off x="7543800" y="2724912"/>
+            <a:ext cx="3611880" cy="1527048"/>
           </a:xfrm>
           <a:prstGeom prst="roundRect">
             <a:avLst>
-              <a:gd name="adj" fmla="val 7968"/>
+              <a:gd name="adj" fmla="val 7186"/>
             </a:avLst>
           </a:prstGeom>
           <a:solidFill>
@@ -9110,8 +9116,8 @@
         </p:nvSpPr>
         <p:spPr>
           <a:xfrm>
-            <a:off x="7799832" y="2816352"/>
-            <a:ext cx="3145536" cy="256032"/>
+            <a:off x="7708392" y="2852928"/>
+            <a:ext cx="3282696" cy="228600"/>
           </a:xfrm>
           <a:prstGeom prst="rect">
             <a:avLst/>
@@ -9127,7 +9133,7 @@
               <a:buNone/>
             </a:pPr>
             <a:r>
-              <a:rPr lang="en-US" sz="1300" b="1" dirty="0">
+              <a:rPr lang="en-US" sz="1220" b="1" dirty="0">
                 <a:solidFill>
                   <a:srgbClr val="0068B7"/>
                 </a:solidFill>
@@ -9137,7 +9143,7 @@
               </a:rPr>
               <a:t>Concept checkpoints</a:t>
             </a:r>
-            <a:endParaRPr lang="en-US" sz="1300" dirty="0"/>
+            <a:endParaRPr lang="en-US" sz="1220" dirty="0"/>
           </a:p>
         </p:txBody>
       </p:sp>
@@ -9149,8 +9155,8 @@
         </p:nvSpPr>
         <p:spPr>
           <a:xfrm>
-            <a:off x="7818120" y="3182112"/>
-            <a:ext cx="3090672" cy="718718"/>
+            <a:off x="7726680" y="3182112"/>
+            <a:ext cx="3227832" cy="960120"/>
           </a:xfrm>
           <a:prstGeom prst="rect">
             <a:avLst/>
@@ -9168,7 +9174,7 @@
               <a:buNone/>
             </a:pPr>
             <a:r>
-              <a:rPr lang="en-US" sz="1220" dirty="0">
+              <a:rPr lang="en-US" sz="1140" dirty="0">
                 <a:solidFill>
                   <a:srgbClr val="17364A"/>
                 </a:solidFill>
@@ -9176,16 +9182,16 @@
                 <a:ea typeface="Aptos" pitchFamily="34" charset="-122"/>
                 <a:cs typeface="Aptos" pitchFamily="34" charset="-120"/>
               </a:rPr>
-              <a:t>Create a linkage risk review for one AI-supported public health.</a:t>
-            </a:r>
-            <a:endParaRPr lang="en-US" sz="1220" dirty="0"/>
-          </a:p>
-          <a:p>
-            <a:pPr indent="0" marL="0">
-              <a:buNone/>
-            </a:pPr>
-            <a:r>
-              <a:rPr lang="en-US" sz="1220" dirty="0">
+              <a:t>Create a linkage risk review for one AI-supported.</a:t>
+            </a:r>
+            <a:endParaRPr lang="en-US" sz="1140" dirty="0"/>
+          </a:p>
+          <a:p>
+            <a:pPr indent="0" marL="0">
+              <a:buNone/>
+            </a:pPr>
+            <a:r>
+              <a:rPr lang="en-US" sz="1140" dirty="0">
                 <a:solidFill>
                   <a:srgbClr val="17364A"/>
                 </a:solidFill>
@@ -9193,9 +9199,9 @@
                 <a:ea typeface="Aptos" pitchFamily="34" charset="-122"/>
                 <a:cs typeface="Aptos" pitchFamily="34" charset="-120"/>
               </a:rPr>
-              <a:t>Include the matching purpose, data sources, matching fields, known.</a:t>
-            </a:r>
-            <a:endParaRPr lang="en-US" sz="1220" dirty="0"/>
+              <a:t>Include the matching purpose, data sources,.</a:t>
+            </a:r>
+            <a:endParaRPr lang="en-US" sz="1140" dirty="0"/>
           </a:p>
         </p:txBody>
       </p:sp>
@@ -9207,12 +9213,12 @@
         </p:nvSpPr>
         <p:spPr>
           <a:xfrm>
-            <a:off x="7635240" y="4184294"/>
-            <a:ext cx="3474720" cy="1466698"/>
+            <a:off x="7543800" y="4389120"/>
+            <a:ext cx="3611880" cy="1261872"/>
           </a:xfrm>
           <a:prstGeom prst="roundRect">
             <a:avLst>
-              <a:gd name="adj" fmla="val 7481"/>
+              <a:gd name="adj" fmla="val 8696"/>
             </a:avLst>
           </a:prstGeom>
           <a:solidFill>
@@ -9234,8 +9240,8 @@
         </p:nvSpPr>
         <p:spPr>
           <a:xfrm>
-            <a:off x="7799832" y="4330598"/>
-            <a:ext cx="3145536" cy="256032"/>
+            <a:off x="7708392" y="4517136"/>
+            <a:ext cx="3282696" cy="228600"/>
           </a:xfrm>
           <a:prstGeom prst="rect">
             <a:avLst/>
@@ -9251,7 +9257,7 @@
               <a:buNone/>
             </a:pPr>
             <a:r>
-              <a:rPr lang="en-US" sz="1300" b="1" dirty="0">
+              <a:rPr lang="en-US" sz="1220" b="1" dirty="0">
                 <a:solidFill>
                   <a:srgbClr val="0068B7"/>
                 </a:solidFill>
@@ -9261,7 +9267,7 @@
               </a:rPr>
               <a:t>What to produce</a:t>
             </a:r>
-            <a:endParaRPr lang="en-US" sz="1300" dirty="0"/>
+            <a:endParaRPr lang="en-US" sz="1220" dirty="0"/>
           </a:p>
         </p:txBody>
       </p:sp>
@@ -9273,8 +9279,8 @@
         </p:nvSpPr>
         <p:spPr>
           <a:xfrm>
-            <a:off x="7799832" y="4659782"/>
-            <a:ext cx="3145536" cy="899770"/>
+            <a:off x="7708392" y="4828032"/>
+            <a:ext cx="3282696" cy="749808"/>
           </a:xfrm>
           <a:prstGeom prst="rect">
             <a:avLst/>
@@ -9292,7 +9298,7 @@
               <a:buNone/>
             </a:pPr>
             <a:r>
-              <a:rPr lang="en-US" sz="1320" dirty="0">
+              <a:rPr lang="en-US" sz="1220" dirty="0">
                 <a:solidFill>
                   <a:srgbClr val="17364A"/>
                 </a:solidFill>
@@ -9300,9 +9306,9 @@
                 <a:ea typeface="Aptos" pitchFamily="34" charset="-122"/>
                 <a:cs typeface="Aptos" pitchFamily="34" charset="-120"/>
               </a:rPr>
-              <a:t>Use the assignment to test whether you can explain the concept, apply it to a realistic public health situation, and identify what would need review before the work moves forward.</a:t>
-            </a:r>
-            <a:endParaRPr lang="en-US" sz="1320" dirty="0"/>
+              <a:t>Use the assignment to test whether you can explain the concept, apply it to a.</a:t>
+            </a:r>
+            <a:endParaRPr lang="en-US" sz="1220" dirty="0"/>
           </a:p>
         </p:txBody>
       </p:sp>
@@ -9593,8 +9599,8 @@
         </p:nvSpPr>
         <p:spPr>
           <a:xfrm>
-            <a:off x="868680" y="1508760"/>
-            <a:ext cx="6309360" cy="4160520"/>
+            <a:off x="822960" y="1463040"/>
+            <a:ext cx="6565392" cy="4343400"/>
           </a:xfrm>
           <a:prstGeom prst="rect">
             <a:avLst/>
@@ -9612,7 +9618,7 @@
               <a:buNone/>
             </a:pPr>
             <a:r>
-              <a:rPr lang="en-US" sz="2100" dirty="0">
+              <a:rPr lang="en-US" sz="1920" dirty="0">
                 <a:solidFill>
                   <a:srgbClr val="003A63"/>
                 </a:solidFill>
@@ -9622,14 +9628,14 @@
               </a:rPr>
               <a:t>• Linkage risk review</a:t>
             </a:r>
-            <a:endParaRPr lang="en-US" sz="2100" dirty="0"/>
-          </a:p>
-          <a:p>
-            <a:pPr indent="0" marL="0">
-              <a:buNone/>
-            </a:pPr>
-            <a:r>
-              <a:rPr lang="en-US" sz="2100" dirty="0">
+            <a:endParaRPr lang="en-US" sz="1920" dirty="0"/>
+          </a:p>
+          <a:p>
+            <a:pPr indent="0" marL="0">
+              <a:buNone/>
+            </a:pPr>
+            <a:r>
+              <a:rPr lang="en-US" sz="1920" dirty="0">
                 <a:solidFill>
                   <a:srgbClr val="003A63"/>
                 </a:solidFill>
@@ -9639,14 +9645,14 @@
               </a:rPr>
               <a:t>• Deduplication workflow map</a:t>
             </a:r>
-            <a:endParaRPr lang="en-US" sz="2100" dirty="0"/>
-          </a:p>
-          <a:p>
-            <a:pPr indent="0" marL="0">
-              <a:buNone/>
-            </a:pPr>
-            <a:r>
-              <a:rPr lang="en-US" sz="2100" dirty="0">
+            <a:endParaRPr lang="en-US" sz="1920" dirty="0"/>
+          </a:p>
+          <a:p>
+            <a:pPr indent="0" marL="0">
+              <a:buNone/>
+            </a:pPr>
+            <a:r>
+              <a:rPr lang="en-US" sz="1920" dirty="0">
                 <a:solidFill>
                   <a:srgbClr val="003A63"/>
                 </a:solidFill>
@@ -9656,7 +9662,7 @@
               </a:rPr>
               <a:t>• Match review questions</a:t>
             </a:r>
-            <a:endParaRPr lang="en-US" sz="2100" dirty="0"/>
+            <a:endParaRPr lang="en-US" sz="1920" dirty="0"/>
           </a:p>
         </p:txBody>
       </p:sp>
@@ -9668,12 +9674,12 @@
         </p:nvSpPr>
         <p:spPr>
           <a:xfrm>
-            <a:off x="7635240" y="1325880"/>
-            <a:ext cx="3474720" cy="1207008"/>
+            <a:off x="7543800" y="1325880"/>
+            <a:ext cx="3611880" cy="1261872"/>
           </a:xfrm>
           <a:prstGeom prst="roundRect">
             <a:avLst>
-              <a:gd name="adj" fmla="val 9091"/>
+              <a:gd name="adj" fmla="val 8696"/>
             </a:avLst>
           </a:prstGeom>
           <a:solidFill>
@@ -9695,8 +9701,8 @@
         </p:nvSpPr>
         <p:spPr>
           <a:xfrm>
-            <a:off x="7799832" y="1472184"/>
-            <a:ext cx="3145536" cy="256032"/>
+            <a:off x="7708392" y="1453896"/>
+            <a:ext cx="3282696" cy="228600"/>
           </a:xfrm>
           <a:prstGeom prst="rect">
             <a:avLst/>
@@ -9712,7 +9718,7 @@
               <a:buNone/>
             </a:pPr>
             <a:r>
-              <a:rPr lang="en-US" sz="1300" b="1" dirty="0">
+              <a:rPr lang="en-US" sz="1220" b="1" dirty="0">
                 <a:solidFill>
                   <a:srgbClr val="0068B7"/>
                 </a:solidFill>
@@ -9722,7 +9728,7 @@
               </a:rPr>
               <a:t>Core concept</a:t>
             </a:r>
-            <a:endParaRPr lang="en-US" sz="1300" dirty="0"/>
+            <a:endParaRPr lang="en-US" sz="1220" dirty="0"/>
           </a:p>
         </p:txBody>
       </p:sp>
@@ -9734,8 +9740,8 @@
         </p:nvSpPr>
         <p:spPr>
           <a:xfrm>
-            <a:off x="7799832" y="1801368"/>
-            <a:ext cx="3145536" cy="640080"/>
+            <a:off x="7708392" y="1764792"/>
+            <a:ext cx="3282696" cy="749808"/>
           </a:xfrm>
           <a:prstGeom prst="rect">
             <a:avLst/>
@@ -9753,7 +9759,7 @@
               <a:buNone/>
             </a:pPr>
             <a:r>
-              <a:rPr lang="en-US" sz="1320" dirty="0">
+              <a:rPr lang="en-US" sz="1220" dirty="0">
                 <a:solidFill>
                   <a:srgbClr val="17364A"/>
                 </a:solidFill>
@@ -9763,7 +9769,7 @@
               </a:rPr>
               <a:t>Linkage risk review</a:t>
             </a:r>
-            <a:endParaRPr lang="en-US" sz="1320" dirty="0"/>
+            <a:endParaRPr lang="en-US" sz="1220" dirty="0"/>
           </a:p>
         </p:txBody>
       </p:sp>
@@ -9775,12 +9781,12 @@
         </p:nvSpPr>
         <p:spPr>
           <a:xfrm>
-            <a:off x="7635240" y="2670048"/>
-            <a:ext cx="3474720" cy="1377086"/>
+            <a:off x="7543800" y="2724912"/>
+            <a:ext cx="3611880" cy="1527048"/>
           </a:xfrm>
           <a:prstGeom prst="roundRect">
             <a:avLst>
-              <a:gd name="adj" fmla="val 7968"/>
+              <a:gd name="adj" fmla="val 7186"/>
             </a:avLst>
           </a:prstGeom>
           <a:solidFill>
@@ -9802,8 +9808,8 @@
         </p:nvSpPr>
         <p:spPr>
           <a:xfrm>
-            <a:off x="7799832" y="2816352"/>
-            <a:ext cx="3145536" cy="256032"/>
+            <a:off x="7708392" y="2852928"/>
+            <a:ext cx="3282696" cy="228600"/>
           </a:xfrm>
           <a:prstGeom prst="rect">
             <a:avLst/>
@@ -9819,7 +9825,7 @@
               <a:buNone/>
             </a:pPr>
             <a:r>
-              <a:rPr lang="en-US" sz="1300" b="1" dirty="0">
+              <a:rPr lang="en-US" sz="1220" b="1" dirty="0">
                 <a:solidFill>
                   <a:srgbClr val="0068B7"/>
                 </a:solidFill>
@@ -9829,7 +9835,7 @@
               </a:rPr>
               <a:t>Concept checkpoints</a:t>
             </a:r>
-            <a:endParaRPr lang="en-US" sz="1300" dirty="0"/>
+            <a:endParaRPr lang="en-US" sz="1220" dirty="0"/>
           </a:p>
         </p:txBody>
       </p:sp>
@@ -9841,8 +9847,8 @@
         </p:nvSpPr>
         <p:spPr>
           <a:xfrm>
-            <a:off x="7818120" y="3182112"/>
-            <a:ext cx="3090672" cy="718718"/>
+            <a:off x="7726680" y="3182112"/>
+            <a:ext cx="3227832" cy="960120"/>
           </a:xfrm>
           <a:prstGeom prst="rect">
             <a:avLst/>
@@ -9860,7 +9866,7 @@
               <a:buNone/>
             </a:pPr>
             <a:r>
-              <a:rPr lang="en-US" sz="1220" dirty="0">
+              <a:rPr lang="en-US" sz="1140" dirty="0">
                 <a:solidFill>
                   <a:srgbClr val="17364A"/>
                 </a:solidFill>
@@ -9870,14 +9876,14 @@
               </a:rPr>
               <a:t>Linkage risk review</a:t>
             </a:r>
-            <a:endParaRPr lang="en-US" sz="1220" dirty="0"/>
-          </a:p>
-          <a:p>
-            <a:pPr indent="0" marL="0">
-              <a:buNone/>
-            </a:pPr>
-            <a:r>
-              <a:rPr lang="en-US" sz="1220" dirty="0">
+            <a:endParaRPr lang="en-US" sz="1140" dirty="0"/>
+          </a:p>
+          <a:p>
+            <a:pPr indent="0" marL="0">
+              <a:buNone/>
+            </a:pPr>
+            <a:r>
+              <a:rPr lang="en-US" sz="1140" dirty="0">
                 <a:solidFill>
                   <a:srgbClr val="17364A"/>
                 </a:solidFill>
@@ -9887,14 +9893,14 @@
               </a:rPr>
               <a:t>Deduplication workflow map</a:t>
             </a:r>
-            <a:endParaRPr lang="en-US" sz="1220" dirty="0"/>
-          </a:p>
-          <a:p>
-            <a:pPr indent="0" marL="0">
-              <a:buNone/>
-            </a:pPr>
-            <a:r>
-              <a:rPr lang="en-US" sz="1220" dirty="0">
+            <a:endParaRPr lang="en-US" sz="1140" dirty="0"/>
+          </a:p>
+          <a:p>
+            <a:pPr indent="0" marL="0">
+              <a:buNone/>
+            </a:pPr>
+            <a:r>
+              <a:rPr lang="en-US" sz="1140" dirty="0">
                 <a:solidFill>
                   <a:srgbClr val="17364A"/>
                 </a:solidFill>
@@ -9904,7 +9910,7 @@
               </a:rPr>
               <a:t>Match review questions</a:t>
             </a:r>
-            <a:endParaRPr lang="en-US" sz="1220" dirty="0"/>
+            <a:endParaRPr lang="en-US" sz="1140" dirty="0"/>
           </a:p>
         </p:txBody>
       </p:sp>
@@ -9916,12 +9922,12 @@
         </p:nvSpPr>
         <p:spPr>
           <a:xfrm>
-            <a:off x="7635240" y="4184294"/>
-            <a:ext cx="3474720" cy="1466698"/>
+            <a:off x="7543800" y="4389120"/>
+            <a:ext cx="3611880" cy="1261872"/>
           </a:xfrm>
           <a:prstGeom prst="roundRect">
             <a:avLst>
-              <a:gd name="adj" fmla="val 7481"/>
+              <a:gd name="adj" fmla="val 8696"/>
             </a:avLst>
           </a:prstGeom>
           <a:solidFill>
@@ -9943,8 +9949,8 @@
         </p:nvSpPr>
         <p:spPr>
           <a:xfrm>
-            <a:off x="7799832" y="4330598"/>
-            <a:ext cx="3145536" cy="256032"/>
+            <a:off x="7708392" y="4517136"/>
+            <a:ext cx="3282696" cy="228600"/>
           </a:xfrm>
           <a:prstGeom prst="rect">
             <a:avLst/>
@@ -9960,7 +9966,7 @@
               <a:buNone/>
             </a:pPr>
             <a:r>
-              <a:rPr lang="en-US" sz="1300" b="1" dirty="0">
+              <a:rPr lang="en-US" sz="1220" b="1" dirty="0">
                 <a:solidFill>
                   <a:srgbClr val="0068B7"/>
                 </a:solidFill>
@@ -9970,7 +9976,7 @@
               </a:rPr>
               <a:t>Apply it</a:t>
             </a:r>
-            <a:endParaRPr lang="en-US" sz="1300" dirty="0"/>
+            <a:endParaRPr lang="en-US" sz="1220" dirty="0"/>
           </a:p>
         </p:txBody>
       </p:sp>
@@ -9982,8 +9988,8 @@
         </p:nvSpPr>
         <p:spPr>
           <a:xfrm>
-            <a:off x="7799832" y="4659782"/>
-            <a:ext cx="3145536" cy="899770"/>
+            <a:off x="7708392" y="4828032"/>
+            <a:ext cx="3282696" cy="749808"/>
           </a:xfrm>
           <a:prstGeom prst="rect">
             <a:avLst/>
@@ -10001,7 +10007,7 @@
               <a:buNone/>
             </a:pPr>
             <a:r>
-              <a:rPr lang="en-US" sz="1320" dirty="0">
+              <a:rPr lang="en-US" sz="1220" dirty="0">
                 <a:solidFill>
                   <a:srgbClr val="17364A"/>
                 </a:solidFill>
@@ -10009,9 +10015,9 @@
                 <a:ea typeface="Aptos" pitchFamily="34" charset="-122"/>
                 <a:cs typeface="Aptos" pitchFamily="34" charset="-120"/>
               </a:rPr>
-              <a:t>Connect the concept to public health purpose, responsible use, required safeguards, documentation, and the next action a department should take.</a:t>
-            </a:r>
-            <a:endParaRPr lang="en-US" sz="1320" dirty="0"/>
+              <a:t>Connect the concept to public health purpose, responsible use, required.</a:t>
+            </a:r>
+            <a:endParaRPr lang="en-US" sz="1220" dirty="0"/>
           </a:p>
         </p:txBody>
       </p:sp>
@@ -10302,8 +10308,8 @@
         </p:nvSpPr>
         <p:spPr>
           <a:xfrm>
-            <a:off x="868680" y="1508760"/>
-            <a:ext cx="6309360" cy="4160520"/>
+            <a:off x="822960" y="1463040"/>
+            <a:ext cx="6565392" cy="4343400"/>
           </a:xfrm>
           <a:prstGeom prst="rect">
             <a:avLst/>
@@ -10321,7 +10327,7 @@
               <a:buNone/>
             </a:pPr>
             <a:r>
-              <a:rPr lang="en-US" sz="2100" dirty="0">
+              <a:rPr lang="en-US" sz="1920" dirty="0">
                 <a:solidFill>
                   <a:srgbClr val="003A63"/>
                 </a:solidFill>
@@ -10331,7 +10337,7 @@
               </a:rPr>
               <a:t>• Equity and escalation notes</a:t>
             </a:r>
-            <a:endParaRPr lang="en-US" sz="2100" dirty="0"/>
+            <a:endParaRPr lang="en-US" sz="1920" dirty="0"/>
           </a:p>
         </p:txBody>
       </p:sp>
@@ -10343,12 +10349,12 @@
         </p:nvSpPr>
         <p:spPr>
           <a:xfrm>
-            <a:off x="7635240" y="1325880"/>
-            <a:ext cx="3474720" cy="1207008"/>
+            <a:off x="7543800" y="1325880"/>
+            <a:ext cx="3611880" cy="1261872"/>
           </a:xfrm>
           <a:prstGeom prst="roundRect">
             <a:avLst>
-              <a:gd name="adj" fmla="val 9091"/>
+              <a:gd name="adj" fmla="val 8696"/>
             </a:avLst>
           </a:prstGeom>
           <a:solidFill>
@@ -10370,8 +10376,8 @@
         </p:nvSpPr>
         <p:spPr>
           <a:xfrm>
-            <a:off x="7799832" y="1472184"/>
-            <a:ext cx="3145536" cy="256032"/>
+            <a:off x="7708392" y="1453896"/>
+            <a:ext cx="3282696" cy="228600"/>
           </a:xfrm>
           <a:prstGeom prst="rect">
             <a:avLst/>
@@ -10387,7 +10393,7 @@
               <a:buNone/>
             </a:pPr>
             <a:r>
-              <a:rPr lang="en-US" sz="1300" b="1" dirty="0">
+              <a:rPr lang="en-US" sz="1220" b="1" dirty="0">
                 <a:solidFill>
                   <a:srgbClr val="0068B7"/>
                 </a:solidFill>
@@ -10397,7 +10403,7 @@
               </a:rPr>
               <a:t>Core concept</a:t>
             </a:r>
-            <a:endParaRPr lang="en-US" sz="1300" dirty="0"/>
+            <a:endParaRPr lang="en-US" sz="1220" dirty="0"/>
           </a:p>
         </p:txBody>
       </p:sp>
@@ -10409,8 +10415,8 @@
         </p:nvSpPr>
         <p:spPr>
           <a:xfrm>
-            <a:off x="7799832" y="1801368"/>
-            <a:ext cx="3145536" cy="640080"/>
+            <a:off x="7708392" y="1764792"/>
+            <a:ext cx="3282696" cy="749808"/>
           </a:xfrm>
           <a:prstGeom prst="rect">
             <a:avLst/>
@@ -10428,7 +10434,7 @@
               <a:buNone/>
             </a:pPr>
             <a:r>
-              <a:rPr lang="en-US" sz="1320" dirty="0">
+              <a:rPr lang="en-US" sz="1220" dirty="0">
                 <a:solidFill>
                   <a:srgbClr val="17364A"/>
                 </a:solidFill>
@@ -10438,7 +10444,7 @@
               </a:rPr>
               <a:t>Equity and escalation notes</a:t>
             </a:r>
-            <a:endParaRPr lang="en-US" sz="1320" dirty="0"/>
+            <a:endParaRPr lang="en-US" sz="1220" dirty="0"/>
           </a:p>
         </p:txBody>
       </p:sp>
@@ -10450,12 +10456,12 @@
         </p:nvSpPr>
         <p:spPr>
           <a:xfrm>
-            <a:off x="7635240" y="2670048"/>
-            <a:ext cx="3474720" cy="1377086"/>
+            <a:off x="7543800" y="2724912"/>
+            <a:ext cx="3611880" cy="1527048"/>
           </a:xfrm>
           <a:prstGeom prst="roundRect">
             <a:avLst>
-              <a:gd name="adj" fmla="val 7968"/>
+              <a:gd name="adj" fmla="val 7186"/>
             </a:avLst>
           </a:prstGeom>
           <a:solidFill>
@@ -10477,8 +10483,8 @@
         </p:nvSpPr>
         <p:spPr>
           <a:xfrm>
-            <a:off x="7799832" y="2816352"/>
-            <a:ext cx="3145536" cy="256032"/>
+            <a:off x="7708392" y="2852928"/>
+            <a:ext cx="3282696" cy="228600"/>
           </a:xfrm>
           <a:prstGeom prst="rect">
             <a:avLst/>
@@ -10494,7 +10500,7 @@
               <a:buNone/>
             </a:pPr>
             <a:r>
-              <a:rPr lang="en-US" sz="1300" b="1" dirty="0">
+              <a:rPr lang="en-US" sz="1220" b="1" dirty="0">
                 <a:solidFill>
                   <a:srgbClr val="0068B7"/>
                 </a:solidFill>
@@ -10504,7 +10510,7 @@
               </a:rPr>
               <a:t>Concept checkpoints</a:t>
             </a:r>
-            <a:endParaRPr lang="en-US" sz="1300" dirty="0"/>
+            <a:endParaRPr lang="en-US" sz="1220" dirty="0"/>
           </a:p>
         </p:txBody>
       </p:sp>
@@ -10516,8 +10522,8 @@
         </p:nvSpPr>
         <p:spPr>
           <a:xfrm>
-            <a:off x="7818120" y="3182112"/>
-            <a:ext cx="3090672" cy="718718"/>
+            <a:off x="7726680" y="3182112"/>
+            <a:ext cx="3227832" cy="960120"/>
           </a:xfrm>
           <a:prstGeom prst="rect">
             <a:avLst/>
@@ -10535,7 +10541,7 @@
               <a:buNone/>
             </a:pPr>
             <a:r>
-              <a:rPr lang="en-US" sz="1220" dirty="0">
+              <a:rPr lang="en-US" sz="1140" dirty="0">
                 <a:solidFill>
                   <a:srgbClr val="17364A"/>
                 </a:solidFill>
@@ -10545,7 +10551,7 @@
               </a:rPr>
               <a:t>Equity and escalation notes</a:t>
             </a:r>
-            <a:endParaRPr lang="en-US" sz="1220" dirty="0"/>
+            <a:endParaRPr lang="en-US" sz="1140" dirty="0"/>
           </a:p>
         </p:txBody>
       </p:sp>
@@ -10557,12 +10563,12 @@
         </p:nvSpPr>
         <p:spPr>
           <a:xfrm>
-            <a:off x="7635240" y="4184294"/>
-            <a:ext cx="3474720" cy="1466698"/>
+            <a:off x="7543800" y="4389120"/>
+            <a:ext cx="3611880" cy="1261872"/>
           </a:xfrm>
           <a:prstGeom prst="roundRect">
             <a:avLst>
-              <a:gd name="adj" fmla="val 7481"/>
+              <a:gd name="adj" fmla="val 8696"/>
             </a:avLst>
           </a:prstGeom>
           <a:solidFill>
@@ -10584,8 +10590,8 @@
         </p:nvSpPr>
         <p:spPr>
           <a:xfrm>
-            <a:off x="7799832" y="4330598"/>
-            <a:ext cx="3145536" cy="256032"/>
+            <a:off x="7708392" y="4517136"/>
+            <a:ext cx="3282696" cy="228600"/>
           </a:xfrm>
           <a:prstGeom prst="rect">
             <a:avLst/>
@@ -10601,7 +10607,7 @@
               <a:buNone/>
             </a:pPr>
             <a:r>
-              <a:rPr lang="en-US" sz="1300" b="1" dirty="0">
+              <a:rPr lang="en-US" sz="1220" b="1" dirty="0">
                 <a:solidFill>
                   <a:srgbClr val="0068B7"/>
                 </a:solidFill>
@@ -10611,7 +10617,7 @@
               </a:rPr>
               <a:t>Apply it</a:t>
             </a:r>
-            <a:endParaRPr lang="en-US" sz="1300" dirty="0"/>
+            <a:endParaRPr lang="en-US" sz="1220" dirty="0"/>
           </a:p>
         </p:txBody>
       </p:sp>
@@ -10623,8 +10629,8 @@
         </p:nvSpPr>
         <p:spPr>
           <a:xfrm>
-            <a:off x="7799832" y="4659782"/>
-            <a:ext cx="3145536" cy="899770"/>
+            <a:off x="7708392" y="4828032"/>
+            <a:ext cx="3282696" cy="749808"/>
           </a:xfrm>
           <a:prstGeom prst="rect">
             <a:avLst/>
@@ -10642,7 +10648,7 @@
               <a:buNone/>
             </a:pPr>
             <a:r>
-              <a:rPr lang="en-US" sz="1320" dirty="0">
+              <a:rPr lang="en-US" sz="1220" dirty="0">
                 <a:solidFill>
                   <a:srgbClr val="17364A"/>
                 </a:solidFill>
@@ -10650,9 +10656,9 @@
                 <a:ea typeface="Aptos" pitchFamily="34" charset="-122"/>
                 <a:cs typeface="Aptos" pitchFamily="34" charset="-120"/>
               </a:rPr>
-              <a:t>Connect the concept to public health purpose, responsible use, required safeguards, documentation, and the next action a department should take.</a:t>
-            </a:r>
-            <a:endParaRPr lang="en-US" sz="1320" dirty="0"/>
+              <a:t>Connect the concept to public health purpose, responsible use, required.</a:t>
+            </a:r>
+            <a:endParaRPr lang="en-US" sz="1220" dirty="0"/>
           </a:p>
         </p:txBody>
       </p:sp>
@@ -10970,7 +10976,7 @@
                 <a:ea typeface="Aptos" pitchFamily="34" charset="-122"/>
                 <a:cs typeface="Aptos" pitchFamily="34" charset="-120"/>
               </a:rPr>
-              <a:t>• Record linkage and entity resolution help public health systems determine whether records.</a:t>
+              <a:t>• Record linkage and entity resolution help public health systems determine.</a:t>
             </a:r>
             <a:endParaRPr lang="en-US" sz="2100" dirty="0"/>
           </a:p>
@@ -10987,7 +10993,7 @@
                 <a:ea typeface="Aptos" pitchFamily="34" charset="-122"/>
                 <a:cs typeface="Aptos" pitchFamily="34" charset="-120"/>
               </a:rPr>
-              <a:t>• AI tools often rely on linked data even when the linkage process is invisible to users.</a:t>
+              <a:t>• AI tools often rely on linked data even when the linkage process is.</a:t>
             </a:r>
             <a:endParaRPr lang="en-US" sz="2100" dirty="0"/>
           </a:p>
@@ -11004,7 +11010,7 @@
                 <a:ea typeface="Aptos" pitchFamily="34" charset="-122"/>
                 <a:cs typeface="Aptos" pitchFamily="34" charset="-120"/>
               </a:rPr>
-              <a:t>• This module teaches learners how matching and deduplication affect AI outputs, surveillance.</a:t>
+              <a:t>• This module teaches learners how matching and deduplication affect AI.</a:t>
             </a:r>
             <a:endParaRPr lang="en-US" sz="2100" dirty="0"/>
           </a:p>
@@ -11045,8 +11051,8 @@
         </p:nvSpPr>
         <p:spPr>
           <a:xfrm>
-            <a:off x="8074152" y="1563624"/>
-            <a:ext cx="2825496" cy="256032"/>
+            <a:off x="8074152" y="1545336"/>
+            <a:ext cx="2825496" cy="228600"/>
           </a:xfrm>
           <a:prstGeom prst="rect">
             <a:avLst/>
@@ -11062,7 +11068,7 @@
               <a:buNone/>
             </a:pPr>
             <a:r>
-              <a:rPr lang="en-US" sz="1300" b="1" dirty="0">
+              <a:rPr lang="en-US" sz="1220" b="1" dirty="0">
                 <a:solidFill>
                   <a:srgbClr val="0068B7"/>
                 </a:solidFill>
@@ -11072,7 +11078,7 @@
               </a:rPr>
               <a:t>Module details</a:t>
             </a:r>
-            <a:endParaRPr lang="en-US" sz="1300" dirty="0"/>
+            <a:endParaRPr lang="en-US" sz="1220" dirty="0"/>
           </a:p>
         </p:txBody>
       </p:sp>
@@ -11084,8 +11090,8 @@
         </p:nvSpPr>
         <p:spPr>
           <a:xfrm>
-            <a:off x="8074152" y="1892808"/>
-            <a:ext cx="2825496" cy="1353312"/>
+            <a:off x="8074152" y="1856232"/>
+            <a:ext cx="2825496" cy="1408176"/>
           </a:xfrm>
           <a:prstGeom prst="rect">
             <a:avLst/>
@@ -11103,7 +11109,7 @@
               <a:buNone/>
             </a:pPr>
             <a:r>
-              <a:rPr lang="en-US" sz="1320" dirty="0">
+              <a:rPr lang="en-US" sz="1220" dirty="0">
                 <a:solidFill>
                   <a:srgbClr val="17364A"/>
                 </a:solidFill>
@@ -11111,9 +11117,9 @@
                 <a:ea typeface="Aptos" pitchFamily="34" charset="-122"/>
                 <a:cs typeface="Aptos" pitchFamily="34" charset="-120"/>
               </a:rPr>
-              <a:t>Level: applied/foundational Primary track: Operations and Data Quality Track Appears in tracks: technical-architecture</a:t>
-            </a:r>
-            <a:endParaRPr lang="en-US" sz="1320" dirty="0"/>
+              <a:t>Level: applied/foundational Primary track: Operations and Data Quality Track.</a:t>
+            </a:r>
+            <a:endParaRPr lang="en-US" sz="1220" dirty="0"/>
           </a:p>
         </p:txBody>
       </p:sp>
@@ -11152,8 +11158,8 @@
         </p:nvSpPr>
         <p:spPr>
           <a:xfrm>
-            <a:off x="8074152" y="3822192"/>
-            <a:ext cx="2825496" cy="256032"/>
+            <a:off x="8074152" y="3803904"/>
+            <a:ext cx="2825496" cy="228600"/>
           </a:xfrm>
           <a:prstGeom prst="rect">
             <a:avLst/>
@@ -11169,7 +11175,7 @@
               <a:buNone/>
             </a:pPr>
             <a:r>
-              <a:rPr lang="en-US" sz="1300" b="1" dirty="0">
+              <a:rPr lang="en-US" sz="1220" b="1" dirty="0">
                 <a:solidFill>
                   <a:srgbClr val="0068B7"/>
                 </a:solidFill>
@@ -11179,7 +11185,7 @@
               </a:rPr>
               <a:t>Learning sequence</a:t>
             </a:r>
-            <a:endParaRPr lang="en-US" sz="1300" dirty="0"/>
+            <a:endParaRPr lang="en-US" sz="1220" dirty="0"/>
           </a:p>
         </p:txBody>
       </p:sp>
@@ -11191,8 +11197,8 @@
         </p:nvSpPr>
         <p:spPr>
           <a:xfrm>
-            <a:off x="8092440" y="4187952"/>
-            <a:ext cx="2770632" cy="1033272"/>
+            <a:off x="8092440" y="4133088"/>
+            <a:ext cx="2770632" cy="1124712"/>
           </a:xfrm>
           <a:prstGeom prst="rect">
             <a:avLst/>
@@ -11210,7 +11216,7 @@
               <a:buNone/>
             </a:pPr>
             <a:r>
-              <a:rPr lang="en-US" sz="1220" dirty="0">
+              <a:rPr lang="en-US" sz="1140" dirty="0">
                 <a:solidFill>
                   <a:srgbClr val="17364A"/>
                 </a:solidFill>
@@ -11220,14 +11226,14 @@
               </a:rPr>
               <a:t>Read the module for shared vocabulary and context.</a:t>
             </a:r>
-            <a:endParaRPr lang="en-US" sz="1220" dirty="0"/>
-          </a:p>
-          <a:p>
-            <a:pPr indent="0" marL="0">
-              <a:buNone/>
-            </a:pPr>
-            <a:r>
-              <a:rPr lang="en-US" sz="1220" dirty="0">
+            <a:endParaRPr lang="en-US" sz="1140" dirty="0"/>
+          </a:p>
+          <a:p>
+            <a:pPr indent="0" marL="0">
+              <a:buNone/>
+            </a:pPr>
+            <a:r>
+              <a:rPr lang="en-US" sz="1140" dirty="0">
                 <a:solidFill>
                   <a:srgbClr val="17364A"/>
                 </a:solidFill>
@@ -11235,16 +11241,16 @@
                 <a:ea typeface="Aptos" pitchFamily="34" charset="-122"/>
                 <a:cs typeface="Aptos" pitchFamily="34" charset="-120"/>
               </a:rPr>
-              <a:t>Complete the practical exercise to apply the concept.</a:t>
-            </a:r>
-            <a:endParaRPr lang="en-US" sz="1220" dirty="0"/>
-          </a:p>
-          <a:p>
-            <a:pPr indent="0" marL="0">
-              <a:buNone/>
-            </a:pPr>
-            <a:r>
-              <a:rPr lang="en-US" sz="1220" dirty="0">
+              <a:t>Complete the practical exercise to apply the.</a:t>
+            </a:r>
+            <a:endParaRPr lang="en-US" sz="1140" dirty="0"/>
+          </a:p>
+          <a:p>
+            <a:pPr indent="0" marL="0">
+              <a:buNone/>
+            </a:pPr>
+            <a:r>
+              <a:rPr lang="en-US" sz="1140" dirty="0">
                 <a:solidFill>
                   <a:srgbClr val="17364A"/>
                 </a:solidFill>
@@ -11254,7 +11260,7 @@
               </a:rPr>
               <a:t>Use the notes and references for deeper review.</a:t>
             </a:r>
-            <a:endParaRPr lang="en-US" sz="1220" dirty="0"/>
+            <a:endParaRPr lang="en-US" sz="1140" dirty="0"/>
           </a:p>
         </p:txBody>
       </p:sp>
@@ -11545,8 +11551,8 @@
         </p:nvSpPr>
         <p:spPr>
           <a:xfrm>
-            <a:off x="868680" y="1508760"/>
-            <a:ext cx="6309360" cy="4160520"/>
+            <a:off x="822960" y="1463040"/>
+            <a:ext cx="6565392" cy="4343400"/>
           </a:xfrm>
           <a:prstGeom prst="rect">
             <a:avLst/>
@@ -11564,7 +11570,7 @@
               <a:buNone/>
             </a:pPr>
             <a:r>
-              <a:rPr lang="en-US" sz="2100" dirty="0">
+              <a:rPr lang="en-US" sz="1920" dirty="0">
                 <a:solidFill>
                   <a:srgbClr val="003A63"/>
                 </a:solidFill>
@@ -11574,14 +11580,14 @@
               </a:rPr>
               <a:t>• Linkage risk review</a:t>
             </a:r>
-            <a:endParaRPr lang="en-US" sz="2100" dirty="0"/>
-          </a:p>
-          <a:p>
-            <a:pPr indent="0" marL="0">
-              <a:buNone/>
-            </a:pPr>
-            <a:r>
-              <a:rPr lang="en-US" sz="2100" dirty="0">
+            <a:endParaRPr lang="en-US" sz="1920" dirty="0"/>
+          </a:p>
+          <a:p>
+            <a:pPr indent="0" marL="0">
+              <a:buNone/>
+            </a:pPr>
+            <a:r>
+              <a:rPr lang="en-US" sz="1920" dirty="0">
                 <a:solidFill>
                   <a:srgbClr val="003A63"/>
                 </a:solidFill>
@@ -11591,14 +11597,14 @@
               </a:rPr>
               <a:t>• Deduplication workflow map</a:t>
             </a:r>
-            <a:endParaRPr lang="en-US" sz="2100" dirty="0"/>
-          </a:p>
-          <a:p>
-            <a:pPr indent="0" marL="0">
-              <a:buNone/>
-            </a:pPr>
-            <a:r>
-              <a:rPr lang="en-US" sz="2100" dirty="0">
+            <a:endParaRPr lang="en-US" sz="1920" dirty="0"/>
+          </a:p>
+          <a:p>
+            <a:pPr indent="0" marL="0">
+              <a:buNone/>
+            </a:pPr>
+            <a:r>
+              <a:rPr lang="en-US" sz="1920" dirty="0">
                 <a:solidFill>
                   <a:srgbClr val="003A63"/>
                 </a:solidFill>
@@ -11608,7 +11614,7 @@
               </a:rPr>
               <a:t>• Match review questions</a:t>
             </a:r>
-            <a:endParaRPr lang="en-US" sz="2100" dirty="0"/>
+            <a:endParaRPr lang="en-US" sz="1920" dirty="0"/>
           </a:p>
         </p:txBody>
       </p:sp>
@@ -11620,12 +11626,12 @@
         </p:nvSpPr>
         <p:spPr>
           <a:xfrm>
-            <a:off x="7635240" y="1325880"/>
-            <a:ext cx="3474720" cy="1207008"/>
+            <a:off x="7543800" y="1325880"/>
+            <a:ext cx="3611880" cy="1261872"/>
           </a:xfrm>
           <a:prstGeom prst="roundRect">
             <a:avLst>
-              <a:gd name="adj" fmla="val 9091"/>
+              <a:gd name="adj" fmla="val 8696"/>
             </a:avLst>
           </a:prstGeom>
           <a:solidFill>
@@ -11647,8 +11653,8 @@
         </p:nvSpPr>
         <p:spPr>
           <a:xfrm>
-            <a:off x="7799832" y="1472184"/>
-            <a:ext cx="3145536" cy="256032"/>
+            <a:off x="7708392" y="1453896"/>
+            <a:ext cx="3282696" cy="228600"/>
           </a:xfrm>
           <a:prstGeom prst="rect">
             <a:avLst/>
@@ -11664,7 +11670,7 @@
               <a:buNone/>
             </a:pPr>
             <a:r>
-              <a:rPr lang="en-US" sz="1300" b="1" dirty="0">
+              <a:rPr lang="en-US" sz="1220" b="1" dirty="0">
                 <a:solidFill>
                   <a:srgbClr val="0068B7"/>
                 </a:solidFill>
@@ -11674,7 +11680,7 @@
               </a:rPr>
               <a:t>Practice focus</a:t>
             </a:r>
-            <a:endParaRPr lang="en-US" sz="1300" dirty="0"/>
+            <a:endParaRPr lang="en-US" sz="1220" dirty="0"/>
           </a:p>
         </p:txBody>
       </p:sp>
@@ -11686,8 +11692,8 @@
         </p:nvSpPr>
         <p:spPr>
           <a:xfrm>
-            <a:off x="7799832" y="1801368"/>
-            <a:ext cx="3145536" cy="640080"/>
+            <a:off x="7708392" y="1764792"/>
+            <a:ext cx="3282696" cy="749808"/>
           </a:xfrm>
           <a:prstGeom prst="rect">
             <a:avLst/>
@@ -11705,7 +11711,7 @@
               <a:buNone/>
             </a:pPr>
             <a:r>
-              <a:rPr lang="en-US" sz="1320" dirty="0">
+              <a:rPr lang="en-US" sz="1220" dirty="0">
                 <a:solidFill>
                   <a:srgbClr val="17364A"/>
                 </a:solidFill>
@@ -11715,7 +11721,7 @@
               </a:rPr>
               <a:t>Linkage risk review</a:t>
             </a:r>
-            <a:endParaRPr lang="en-US" sz="1320" dirty="0"/>
+            <a:endParaRPr lang="en-US" sz="1220" dirty="0"/>
           </a:p>
         </p:txBody>
       </p:sp>
@@ -11727,12 +11733,12 @@
         </p:nvSpPr>
         <p:spPr>
           <a:xfrm>
-            <a:off x="7635240" y="2670048"/>
-            <a:ext cx="3474720" cy="1377086"/>
+            <a:off x="7543800" y="2724912"/>
+            <a:ext cx="3611880" cy="1527048"/>
           </a:xfrm>
           <a:prstGeom prst="roundRect">
             <a:avLst>
-              <a:gd name="adj" fmla="val 7968"/>
+              <a:gd name="adj" fmla="val 7186"/>
             </a:avLst>
           </a:prstGeom>
           <a:solidFill>
@@ -11754,8 +11760,8 @@
         </p:nvSpPr>
         <p:spPr>
           <a:xfrm>
-            <a:off x="7799832" y="2816352"/>
-            <a:ext cx="3145536" cy="256032"/>
+            <a:off x="7708392" y="2852928"/>
+            <a:ext cx="3282696" cy="228600"/>
           </a:xfrm>
           <a:prstGeom prst="rect">
             <a:avLst/>
@@ -11771,7 +11777,7 @@
               <a:buNone/>
             </a:pPr>
             <a:r>
-              <a:rPr lang="en-US" sz="1300" b="1" dirty="0">
+              <a:rPr lang="en-US" sz="1220" b="1" dirty="0">
                 <a:solidFill>
                   <a:srgbClr val="0068B7"/>
                 </a:solidFill>
@@ -11781,7 +11787,7 @@
               </a:rPr>
               <a:t>Concept checkpoints</a:t>
             </a:r>
-            <a:endParaRPr lang="en-US" sz="1300" dirty="0"/>
+            <a:endParaRPr lang="en-US" sz="1220" dirty="0"/>
           </a:p>
         </p:txBody>
       </p:sp>
@@ -11793,8 +11799,8 @@
         </p:nvSpPr>
         <p:spPr>
           <a:xfrm>
-            <a:off x="7818120" y="3182112"/>
-            <a:ext cx="3090672" cy="718718"/>
+            <a:off x="7726680" y="3182112"/>
+            <a:ext cx="3227832" cy="960120"/>
           </a:xfrm>
           <a:prstGeom prst="rect">
             <a:avLst/>
@@ -11812,7 +11818,7 @@
               <a:buNone/>
             </a:pPr>
             <a:r>
-              <a:rPr lang="en-US" sz="1220" dirty="0">
+              <a:rPr lang="en-US" sz="1140" dirty="0">
                 <a:solidFill>
                   <a:srgbClr val="17364A"/>
                 </a:solidFill>
@@ -11822,14 +11828,14 @@
               </a:rPr>
               <a:t>Linkage risk review</a:t>
             </a:r>
-            <a:endParaRPr lang="en-US" sz="1220" dirty="0"/>
-          </a:p>
-          <a:p>
-            <a:pPr indent="0" marL="0">
-              <a:buNone/>
-            </a:pPr>
-            <a:r>
-              <a:rPr lang="en-US" sz="1220" dirty="0">
+            <a:endParaRPr lang="en-US" sz="1140" dirty="0"/>
+          </a:p>
+          <a:p>
+            <a:pPr indent="0" marL="0">
+              <a:buNone/>
+            </a:pPr>
+            <a:r>
+              <a:rPr lang="en-US" sz="1140" dirty="0">
                 <a:solidFill>
                   <a:srgbClr val="17364A"/>
                 </a:solidFill>
@@ -11839,14 +11845,14 @@
               </a:rPr>
               <a:t>Deduplication workflow map</a:t>
             </a:r>
-            <a:endParaRPr lang="en-US" sz="1220" dirty="0"/>
-          </a:p>
-          <a:p>
-            <a:pPr indent="0" marL="0">
-              <a:buNone/>
-            </a:pPr>
-            <a:r>
-              <a:rPr lang="en-US" sz="1220" dirty="0">
+            <a:endParaRPr lang="en-US" sz="1140" dirty="0"/>
+          </a:p>
+          <a:p>
+            <a:pPr indent="0" marL="0">
+              <a:buNone/>
+            </a:pPr>
+            <a:r>
+              <a:rPr lang="en-US" sz="1140" dirty="0">
                 <a:solidFill>
                   <a:srgbClr val="17364A"/>
                 </a:solidFill>
@@ -11856,7 +11862,7 @@
               </a:rPr>
               <a:t>Match review questions</a:t>
             </a:r>
-            <a:endParaRPr lang="en-US" sz="1220" dirty="0"/>
+            <a:endParaRPr lang="en-US" sz="1140" dirty="0"/>
           </a:p>
         </p:txBody>
       </p:sp>
@@ -11868,12 +11874,12 @@
         </p:nvSpPr>
         <p:spPr>
           <a:xfrm>
-            <a:off x="7635240" y="4184294"/>
-            <a:ext cx="3474720" cy="1466698"/>
+            <a:off x="7543800" y="4389120"/>
+            <a:ext cx="3611880" cy="1261872"/>
           </a:xfrm>
           <a:prstGeom prst="roundRect">
             <a:avLst>
-              <a:gd name="adj" fmla="val 7481"/>
+              <a:gd name="adj" fmla="val 8696"/>
             </a:avLst>
           </a:prstGeom>
           <a:solidFill>
@@ -11895,8 +11901,8 @@
         </p:nvSpPr>
         <p:spPr>
           <a:xfrm>
-            <a:off x="7799832" y="4330598"/>
-            <a:ext cx="3145536" cy="256032"/>
+            <a:off x="7708392" y="4517136"/>
+            <a:ext cx="3282696" cy="228600"/>
           </a:xfrm>
           <a:prstGeom prst="rect">
             <a:avLst/>
@@ -11912,7 +11918,7 @@
               <a:buNone/>
             </a:pPr>
             <a:r>
-              <a:rPr lang="en-US" sz="1300" b="1" dirty="0">
+              <a:rPr lang="en-US" sz="1220" b="1" dirty="0">
                 <a:solidFill>
                   <a:srgbClr val="0068B7"/>
                 </a:solidFill>
@@ -11922,7 +11928,7 @@
               </a:rPr>
               <a:t>What to produce</a:t>
             </a:r>
-            <a:endParaRPr lang="en-US" sz="1300" dirty="0"/>
+            <a:endParaRPr lang="en-US" sz="1220" dirty="0"/>
           </a:p>
         </p:txBody>
       </p:sp>
@@ -11934,8 +11940,8 @@
         </p:nvSpPr>
         <p:spPr>
           <a:xfrm>
-            <a:off x="7799832" y="4659782"/>
-            <a:ext cx="3145536" cy="899770"/>
+            <a:off x="7708392" y="4828032"/>
+            <a:ext cx="3282696" cy="749808"/>
           </a:xfrm>
           <a:prstGeom prst="rect">
             <a:avLst/>
@@ -11953,7 +11959,7 @@
               <a:buNone/>
             </a:pPr>
             <a:r>
-              <a:rPr lang="en-US" sz="1320" dirty="0">
+              <a:rPr lang="en-US" sz="1220" dirty="0">
                 <a:solidFill>
                   <a:srgbClr val="17364A"/>
                 </a:solidFill>
@@ -11961,9 +11967,9 @@
                 <a:ea typeface="Aptos" pitchFamily="34" charset="-122"/>
                 <a:cs typeface="Aptos" pitchFamily="34" charset="-120"/>
               </a:rPr>
-              <a:t>Use the assignment to test whether you can explain the concept, apply it to a realistic public health situation, and identify what would need review before the work moves forward.</a:t>
-            </a:r>
-            <a:endParaRPr lang="en-US" sz="1320" dirty="0"/>
+              <a:t>Use the assignment to test whether you can explain the concept, apply it to a.</a:t>
+            </a:r>
+            <a:endParaRPr lang="en-US" sz="1220" dirty="0"/>
           </a:p>
         </p:txBody>
       </p:sp>
@@ -12254,8 +12260,8 @@
         </p:nvSpPr>
         <p:spPr>
           <a:xfrm>
-            <a:off x="868680" y="1508760"/>
-            <a:ext cx="6309360" cy="4160520"/>
+            <a:off x="822960" y="1463040"/>
+            <a:ext cx="6565392" cy="4343400"/>
           </a:xfrm>
           <a:prstGeom prst="rect">
             <a:avLst/>
@@ -12273,7 +12279,7 @@
               <a:buNone/>
             </a:pPr>
             <a:r>
-              <a:rPr lang="en-US" sz="2100" dirty="0">
+              <a:rPr lang="en-US" sz="1920" dirty="0">
                 <a:solidFill>
                   <a:srgbClr val="003A63"/>
                 </a:solidFill>
@@ -12283,14 +12289,14 @@
               </a:rPr>
               <a:t>• 1. What is a false match?</a:t>
             </a:r>
-            <a:endParaRPr lang="en-US" sz="2100" dirty="0"/>
-          </a:p>
-          <a:p>
-            <a:pPr indent="0" marL="0">
-              <a:buNone/>
-            </a:pPr>
-            <a:r>
-              <a:rPr lang="en-US" sz="2100" dirty="0">
+            <a:endParaRPr lang="en-US" sz="1920" dirty="0"/>
+          </a:p>
+          <a:p>
+            <a:pPr indent="0" marL="0">
+              <a:buNone/>
+            </a:pPr>
+            <a:r>
+              <a:rPr lang="en-US" sz="1920" dirty="0">
                 <a:solidFill>
                   <a:srgbClr val="003A63"/>
                 </a:solidFill>
@@ -12300,14 +12306,14 @@
               </a:rPr>
               <a:t>• 2. What is a missed match?</a:t>
             </a:r>
-            <a:endParaRPr lang="en-US" sz="2100" dirty="0"/>
-          </a:p>
-          <a:p>
-            <a:pPr indent="0" marL="0">
-              <a:buNone/>
-            </a:pPr>
-            <a:r>
-              <a:rPr lang="en-US" sz="2100" dirty="0">
+            <a:endParaRPr lang="en-US" sz="1920" dirty="0"/>
+          </a:p>
+          <a:p>
+            <a:pPr indent="0" marL="0">
+              <a:buNone/>
+            </a:pPr>
+            <a:r>
+              <a:rPr lang="en-US" sz="1920" dirty="0">
                 <a:solidFill>
                   <a:srgbClr val="003A63"/>
                 </a:solidFill>
@@ -12317,7 +12323,7 @@
               </a:rPr>
               <a:t>• 3. Why does record linkage matter for AI?</a:t>
             </a:r>
-            <a:endParaRPr lang="en-US" sz="2100" dirty="0"/>
+            <a:endParaRPr lang="en-US" sz="1920" dirty="0"/>
           </a:p>
         </p:txBody>
       </p:sp>
@@ -12329,12 +12335,12 @@
         </p:nvSpPr>
         <p:spPr>
           <a:xfrm>
-            <a:off x="7635240" y="1325880"/>
-            <a:ext cx="3474720" cy="1207008"/>
+            <a:off x="7543800" y="1325880"/>
+            <a:ext cx="3611880" cy="1261872"/>
           </a:xfrm>
           <a:prstGeom prst="roundRect">
             <a:avLst>
-              <a:gd name="adj" fmla="val 9091"/>
+              <a:gd name="adj" fmla="val 8696"/>
             </a:avLst>
           </a:prstGeom>
           <a:solidFill>
@@ -12356,8 +12362,8 @@
         </p:nvSpPr>
         <p:spPr>
           <a:xfrm>
-            <a:off x="7799832" y="1472184"/>
-            <a:ext cx="3145536" cy="256032"/>
+            <a:off x="7708392" y="1453896"/>
+            <a:ext cx="3282696" cy="228600"/>
           </a:xfrm>
           <a:prstGeom prst="rect">
             <a:avLst/>
@@ -12373,7 +12379,7 @@
               <a:buNone/>
             </a:pPr>
             <a:r>
-              <a:rPr lang="en-US" sz="1300" b="1" dirty="0">
+              <a:rPr lang="en-US" sz="1220" b="1" dirty="0">
                 <a:solidFill>
                   <a:srgbClr val="0068B7"/>
                 </a:solidFill>
@@ -12383,7 +12389,7 @@
               </a:rPr>
               <a:t>Practice focus</a:t>
             </a:r>
-            <a:endParaRPr lang="en-US" sz="1300" dirty="0"/>
+            <a:endParaRPr lang="en-US" sz="1220" dirty="0"/>
           </a:p>
         </p:txBody>
       </p:sp>
@@ -12395,8 +12401,8 @@
         </p:nvSpPr>
         <p:spPr>
           <a:xfrm>
-            <a:off x="7799832" y="1801368"/>
-            <a:ext cx="3145536" cy="640080"/>
+            <a:off x="7708392" y="1764792"/>
+            <a:ext cx="3282696" cy="749808"/>
           </a:xfrm>
           <a:prstGeom prst="rect">
             <a:avLst/>
@@ -12414,7 +12420,7 @@
               <a:buNone/>
             </a:pPr>
             <a:r>
-              <a:rPr lang="en-US" sz="1320" dirty="0">
+              <a:rPr lang="en-US" sz="1220" dirty="0">
                 <a:solidFill>
                   <a:srgbClr val="17364A"/>
                 </a:solidFill>
@@ -12424,7 +12430,7 @@
               </a:rPr>
               <a:t>1. What is a false match?</a:t>
             </a:r>
-            <a:endParaRPr lang="en-US" sz="1320" dirty="0"/>
+            <a:endParaRPr lang="en-US" sz="1220" dirty="0"/>
           </a:p>
         </p:txBody>
       </p:sp>
@@ -12436,12 +12442,12 @@
         </p:nvSpPr>
         <p:spPr>
           <a:xfrm>
-            <a:off x="7635240" y="2670048"/>
-            <a:ext cx="3474720" cy="1377086"/>
+            <a:off x="7543800" y="2724912"/>
+            <a:ext cx="3611880" cy="1527048"/>
           </a:xfrm>
           <a:prstGeom prst="roundRect">
             <a:avLst>
-              <a:gd name="adj" fmla="val 7968"/>
+              <a:gd name="adj" fmla="val 7186"/>
             </a:avLst>
           </a:prstGeom>
           <a:solidFill>
@@ -12463,8 +12469,8 @@
         </p:nvSpPr>
         <p:spPr>
           <a:xfrm>
-            <a:off x="7799832" y="2816352"/>
-            <a:ext cx="3145536" cy="256032"/>
+            <a:off x="7708392" y="2852928"/>
+            <a:ext cx="3282696" cy="228600"/>
           </a:xfrm>
           <a:prstGeom prst="rect">
             <a:avLst/>
@@ -12480,7 +12486,7 @@
               <a:buNone/>
             </a:pPr>
             <a:r>
-              <a:rPr lang="en-US" sz="1300" b="1" dirty="0">
+              <a:rPr lang="en-US" sz="1220" b="1" dirty="0">
                 <a:solidFill>
                   <a:srgbClr val="0068B7"/>
                 </a:solidFill>
@@ -12490,7 +12496,7 @@
               </a:rPr>
               <a:t>Concept checkpoints</a:t>
             </a:r>
-            <a:endParaRPr lang="en-US" sz="1300" dirty="0"/>
+            <a:endParaRPr lang="en-US" sz="1220" dirty="0"/>
           </a:p>
         </p:txBody>
       </p:sp>
@@ -12502,8 +12508,8 @@
         </p:nvSpPr>
         <p:spPr>
           <a:xfrm>
-            <a:off x="7818120" y="3182112"/>
-            <a:ext cx="3090672" cy="718718"/>
+            <a:off x="7726680" y="3182112"/>
+            <a:ext cx="3227832" cy="960120"/>
           </a:xfrm>
           <a:prstGeom prst="rect">
             <a:avLst/>
@@ -12521,7 +12527,7 @@
               <a:buNone/>
             </a:pPr>
             <a:r>
-              <a:rPr lang="en-US" sz="1220" dirty="0">
+              <a:rPr lang="en-US" sz="1140" dirty="0">
                 <a:solidFill>
                   <a:srgbClr val="17364A"/>
                 </a:solidFill>
@@ -12531,14 +12537,14 @@
               </a:rPr>
               <a:t>1.</a:t>
             </a:r>
-            <a:endParaRPr lang="en-US" sz="1220" dirty="0"/>
-          </a:p>
-          <a:p>
-            <a:pPr indent="0" marL="0">
-              <a:buNone/>
-            </a:pPr>
-            <a:r>
-              <a:rPr lang="en-US" sz="1220" dirty="0">
+            <a:endParaRPr lang="en-US" sz="1140" dirty="0"/>
+          </a:p>
+          <a:p>
+            <a:pPr indent="0" marL="0">
+              <a:buNone/>
+            </a:pPr>
+            <a:r>
+              <a:rPr lang="en-US" sz="1140" dirty="0">
                 <a:solidFill>
                   <a:srgbClr val="17364A"/>
                 </a:solidFill>
@@ -12548,14 +12554,14 @@
               </a:rPr>
               <a:t>What is a false match?</a:t>
             </a:r>
-            <a:endParaRPr lang="en-US" sz="1220" dirty="0"/>
-          </a:p>
-          <a:p>
-            <a:pPr indent="0" marL="0">
-              <a:buNone/>
-            </a:pPr>
-            <a:r>
-              <a:rPr lang="en-US" sz="1220" dirty="0">
+            <a:endParaRPr lang="en-US" sz="1140" dirty="0"/>
+          </a:p>
+          <a:p>
+            <a:pPr indent="0" marL="0">
+              <a:buNone/>
+            </a:pPr>
+            <a:r>
+              <a:rPr lang="en-US" sz="1140" dirty="0">
                 <a:solidFill>
                   <a:srgbClr val="17364A"/>
                 </a:solidFill>
@@ -12565,7 +12571,7 @@
               </a:rPr>
               <a:t>2.</a:t>
             </a:r>
-            <a:endParaRPr lang="en-US" sz="1220" dirty="0"/>
+            <a:endParaRPr lang="en-US" sz="1140" dirty="0"/>
           </a:p>
         </p:txBody>
       </p:sp>
@@ -12577,12 +12583,12 @@
         </p:nvSpPr>
         <p:spPr>
           <a:xfrm>
-            <a:off x="7635240" y="4184294"/>
-            <a:ext cx="3474720" cy="1466698"/>
+            <a:off x="7543800" y="4389120"/>
+            <a:ext cx="3611880" cy="1261872"/>
           </a:xfrm>
           <a:prstGeom prst="roundRect">
             <a:avLst>
-              <a:gd name="adj" fmla="val 7481"/>
+              <a:gd name="adj" fmla="val 8696"/>
             </a:avLst>
           </a:prstGeom>
           <a:solidFill>
@@ -12604,8 +12610,8 @@
         </p:nvSpPr>
         <p:spPr>
           <a:xfrm>
-            <a:off x="7799832" y="4330598"/>
-            <a:ext cx="3145536" cy="256032"/>
+            <a:off x="7708392" y="4517136"/>
+            <a:ext cx="3282696" cy="228600"/>
           </a:xfrm>
           <a:prstGeom prst="rect">
             <a:avLst/>
@@ -12621,7 +12627,7 @@
               <a:buNone/>
             </a:pPr>
             <a:r>
-              <a:rPr lang="en-US" sz="1300" b="1" dirty="0">
+              <a:rPr lang="en-US" sz="1220" b="1" dirty="0">
                 <a:solidFill>
                   <a:srgbClr val="0068B7"/>
                 </a:solidFill>
@@ -12631,7 +12637,7 @@
               </a:rPr>
               <a:t>What to produce</a:t>
             </a:r>
-            <a:endParaRPr lang="en-US" sz="1300" dirty="0"/>
+            <a:endParaRPr lang="en-US" sz="1220" dirty="0"/>
           </a:p>
         </p:txBody>
       </p:sp>
@@ -12643,8 +12649,8 @@
         </p:nvSpPr>
         <p:spPr>
           <a:xfrm>
-            <a:off x="7799832" y="4659782"/>
-            <a:ext cx="3145536" cy="899770"/>
+            <a:off x="7708392" y="4828032"/>
+            <a:ext cx="3282696" cy="749808"/>
           </a:xfrm>
           <a:prstGeom prst="rect">
             <a:avLst/>
@@ -12662,7 +12668,7 @@
               <a:buNone/>
             </a:pPr>
             <a:r>
-              <a:rPr lang="en-US" sz="1320" dirty="0">
+              <a:rPr lang="en-US" sz="1220" dirty="0">
                 <a:solidFill>
                   <a:srgbClr val="17364A"/>
                 </a:solidFill>
@@ -12670,9 +12676,9 @@
                 <a:ea typeface="Aptos" pitchFamily="34" charset="-122"/>
                 <a:cs typeface="Aptos" pitchFamily="34" charset="-120"/>
               </a:rPr>
-              <a:t>Use the assignment to test whether you can explain the concept, apply it to a realistic public health situation, and identify what would need review before the work moves forward.</a:t>
-            </a:r>
-            <a:endParaRPr lang="en-US" sz="1320" dirty="0"/>
+              <a:t>Use the assignment to test whether you can explain the concept, apply it to a.</a:t>
+            </a:r>
+            <a:endParaRPr lang="en-US" sz="1220" dirty="0"/>
           </a:p>
         </p:txBody>
       </p:sp>
@@ -12963,8 +12969,8 @@
         </p:nvSpPr>
         <p:spPr>
           <a:xfrm>
-            <a:off x="868680" y="1508760"/>
-            <a:ext cx="6309360" cy="4160520"/>
+            <a:off x="822960" y="1463040"/>
+            <a:ext cx="6565392" cy="4343400"/>
           </a:xfrm>
           <a:prstGeom prst="rect">
             <a:avLst/>
@@ -12982,7 +12988,7 @@
               <a:buNone/>
             </a:pPr>
             <a:r>
-              <a:rPr lang="en-US" sz="2100" dirty="0">
+              <a:rPr lang="en-US" sz="1920" dirty="0">
                 <a:solidFill>
                   <a:srgbClr val="003A63"/>
                 </a:solidFill>
@@ -12992,14 +12998,14 @@
               </a:rPr>
               <a:t>• Public health IIS and surveillance data quality resources</a:t>
             </a:r>
-            <a:endParaRPr lang="en-US" sz="2100" dirty="0"/>
-          </a:p>
-          <a:p>
-            <a:pPr indent="0" marL="0">
-              <a:buNone/>
-            </a:pPr>
-            <a:r>
-              <a:rPr lang="en-US" sz="2100" dirty="0">
+            <a:endParaRPr lang="en-US" sz="1920" dirty="0"/>
+          </a:p>
+          <a:p>
+            <a:pPr indent="0" marL="0">
+              <a:buNone/>
+            </a:pPr>
+            <a:r>
+              <a:rPr lang="en-US" sz="1920" dirty="0">
                 <a:solidFill>
                   <a:srgbClr val="003A63"/>
                 </a:solidFill>
@@ -13009,14 +13015,14 @@
               </a:rPr>
               <a:t>• CDC data modernization resources</a:t>
             </a:r>
-            <a:endParaRPr lang="en-US" sz="2100" dirty="0"/>
-          </a:p>
-          <a:p>
-            <a:pPr indent="0" marL="0">
-              <a:buNone/>
-            </a:pPr>
-            <a:r>
-              <a:rPr lang="en-US" sz="2100" dirty="0">
+            <a:endParaRPr lang="en-US" sz="1920" dirty="0"/>
+          </a:p>
+          <a:p>
+            <a:pPr indent="0" marL="0">
+              <a:buNone/>
+            </a:pPr>
+            <a:r>
+              <a:rPr lang="en-US" sz="1920" dirty="0">
                 <a:solidFill>
                   <a:srgbClr val="003A63"/>
                 </a:solidFill>
@@ -13026,7 +13032,7 @@
               </a:rPr>
               <a:t>• Health information exchange data quality materials</a:t>
             </a:r>
-            <a:endParaRPr lang="en-US" sz="2100" dirty="0"/>
+            <a:endParaRPr lang="en-US" sz="1920" dirty="0"/>
           </a:p>
         </p:txBody>
       </p:sp>
@@ -13038,12 +13044,12 @@
         </p:nvSpPr>
         <p:spPr>
           <a:xfrm>
-            <a:off x="7635240" y="1325880"/>
-            <a:ext cx="3474720" cy="1207008"/>
+            <a:off x="7543800" y="1325880"/>
+            <a:ext cx="3611880" cy="1261872"/>
           </a:xfrm>
           <a:prstGeom prst="roundRect">
             <a:avLst>
-              <a:gd name="adj" fmla="val 9091"/>
+              <a:gd name="adj" fmla="val 8696"/>
             </a:avLst>
           </a:prstGeom>
           <a:solidFill>
@@ -13065,8 +13071,8 @@
         </p:nvSpPr>
         <p:spPr>
           <a:xfrm>
-            <a:off x="7799832" y="1472184"/>
-            <a:ext cx="3145536" cy="256032"/>
+            <a:off x="7708392" y="1453896"/>
+            <a:ext cx="3282696" cy="228600"/>
           </a:xfrm>
           <a:prstGeom prst="rect">
             <a:avLst/>
@@ -13082,7 +13088,7 @@
               <a:buNone/>
             </a:pPr>
             <a:r>
-              <a:rPr lang="en-US" sz="1300" b="1" dirty="0">
+              <a:rPr lang="en-US" sz="1220" b="1" dirty="0">
                 <a:solidFill>
                   <a:srgbClr val="0068B7"/>
                 </a:solidFill>
@@ -13092,7 +13098,7 @@
               </a:rPr>
               <a:t>Core concept</a:t>
             </a:r>
-            <a:endParaRPr lang="en-US" sz="1300" dirty="0"/>
+            <a:endParaRPr lang="en-US" sz="1220" dirty="0"/>
           </a:p>
         </p:txBody>
       </p:sp>
@@ -13104,8 +13110,8 @@
         </p:nvSpPr>
         <p:spPr>
           <a:xfrm>
-            <a:off x="7799832" y="1801368"/>
-            <a:ext cx="3145536" cy="640080"/>
+            <a:off x="7708392" y="1764792"/>
+            <a:ext cx="3282696" cy="749808"/>
           </a:xfrm>
           <a:prstGeom prst="rect">
             <a:avLst/>
@@ -13123,7 +13129,7 @@
               <a:buNone/>
             </a:pPr>
             <a:r>
-              <a:rPr lang="en-US" sz="1320" dirty="0">
+              <a:rPr lang="en-US" sz="1220" dirty="0">
                 <a:solidFill>
                   <a:srgbClr val="17364A"/>
                 </a:solidFill>
@@ -13133,7 +13139,7 @@
               </a:rPr>
               <a:t>Public health IIS and surveillance data quality resources</a:t>
             </a:r>
-            <a:endParaRPr lang="en-US" sz="1320" dirty="0"/>
+            <a:endParaRPr lang="en-US" sz="1220" dirty="0"/>
           </a:p>
         </p:txBody>
       </p:sp>
@@ -13145,12 +13151,12 @@
         </p:nvSpPr>
         <p:spPr>
           <a:xfrm>
-            <a:off x="7635240" y="2670048"/>
-            <a:ext cx="3474720" cy="1377086"/>
+            <a:off x="7543800" y="2724912"/>
+            <a:ext cx="3611880" cy="1527048"/>
           </a:xfrm>
           <a:prstGeom prst="roundRect">
             <a:avLst>
-              <a:gd name="adj" fmla="val 7968"/>
+              <a:gd name="adj" fmla="val 7186"/>
             </a:avLst>
           </a:prstGeom>
           <a:solidFill>
@@ -13172,8 +13178,8 @@
         </p:nvSpPr>
         <p:spPr>
           <a:xfrm>
-            <a:off x="7799832" y="2816352"/>
-            <a:ext cx="3145536" cy="256032"/>
+            <a:off x="7708392" y="2852928"/>
+            <a:ext cx="3282696" cy="228600"/>
           </a:xfrm>
           <a:prstGeom prst="rect">
             <a:avLst/>
@@ -13189,7 +13195,7 @@
               <a:buNone/>
             </a:pPr>
             <a:r>
-              <a:rPr lang="en-US" sz="1300" b="1" dirty="0">
+              <a:rPr lang="en-US" sz="1220" b="1" dirty="0">
                 <a:solidFill>
                   <a:srgbClr val="0068B7"/>
                 </a:solidFill>
@@ -13199,7 +13205,7 @@
               </a:rPr>
               <a:t>Concept checkpoints</a:t>
             </a:r>
-            <a:endParaRPr lang="en-US" sz="1300" dirty="0"/>
+            <a:endParaRPr lang="en-US" sz="1220" dirty="0"/>
           </a:p>
         </p:txBody>
       </p:sp>
@@ -13211,8 +13217,8 @@
         </p:nvSpPr>
         <p:spPr>
           <a:xfrm>
-            <a:off x="7818120" y="3182112"/>
-            <a:ext cx="3090672" cy="718718"/>
+            <a:off x="7726680" y="3182112"/>
+            <a:ext cx="3227832" cy="960120"/>
           </a:xfrm>
           <a:prstGeom prst="rect">
             <a:avLst/>
@@ -13230,7 +13236,7 @@
               <a:buNone/>
             </a:pPr>
             <a:r>
-              <a:rPr lang="en-US" sz="1220" dirty="0">
+              <a:rPr lang="en-US" sz="1140" dirty="0">
                 <a:solidFill>
                   <a:srgbClr val="17364A"/>
                 </a:solidFill>
@@ -13238,16 +13244,16 @@
                 <a:ea typeface="Aptos" pitchFamily="34" charset="-122"/>
                 <a:cs typeface="Aptos" pitchFamily="34" charset="-120"/>
               </a:rPr>
-              <a:t>Public health IIS and surveillance data quality resources</a:t>
-            </a:r>
-            <a:endParaRPr lang="en-US" sz="1220" dirty="0"/>
-          </a:p>
-          <a:p>
-            <a:pPr indent="0" marL="0">
-              <a:buNone/>
-            </a:pPr>
-            <a:r>
-              <a:rPr lang="en-US" sz="1220" dirty="0">
+              <a:t>Public health IIS and surveillance data quality.</a:t>
+            </a:r>
+            <a:endParaRPr lang="en-US" sz="1140" dirty="0"/>
+          </a:p>
+          <a:p>
+            <a:pPr indent="0" marL="0">
+              <a:buNone/>
+            </a:pPr>
+            <a:r>
+              <a:rPr lang="en-US" sz="1140" dirty="0">
                 <a:solidFill>
                   <a:srgbClr val="17364A"/>
                 </a:solidFill>
@@ -13257,14 +13263,14 @@
               </a:rPr>
               <a:t>CDC data modernization resources</a:t>
             </a:r>
-            <a:endParaRPr lang="en-US" sz="1220" dirty="0"/>
-          </a:p>
-          <a:p>
-            <a:pPr indent="0" marL="0">
-              <a:buNone/>
-            </a:pPr>
-            <a:r>
-              <a:rPr lang="en-US" sz="1220" dirty="0">
+            <a:endParaRPr lang="en-US" sz="1140" dirty="0"/>
+          </a:p>
+          <a:p>
+            <a:pPr indent="0" marL="0">
+              <a:buNone/>
+            </a:pPr>
+            <a:r>
+              <a:rPr lang="en-US" sz="1140" dirty="0">
                 <a:solidFill>
                   <a:srgbClr val="17364A"/>
                 </a:solidFill>
@@ -13274,7 +13280,7 @@
               </a:rPr>
               <a:t>Health information exchange data quality materials</a:t>
             </a:r>
-            <a:endParaRPr lang="en-US" sz="1220" dirty="0"/>
+            <a:endParaRPr lang="en-US" sz="1140" dirty="0"/>
           </a:p>
         </p:txBody>
       </p:sp>
@@ -13286,12 +13292,12 @@
         </p:nvSpPr>
         <p:spPr>
           <a:xfrm>
-            <a:off x="7635240" y="4184294"/>
-            <a:ext cx="3474720" cy="1466698"/>
+            <a:off x="7543800" y="4389120"/>
+            <a:ext cx="3611880" cy="1261872"/>
           </a:xfrm>
           <a:prstGeom prst="roundRect">
             <a:avLst>
-              <a:gd name="adj" fmla="val 7481"/>
+              <a:gd name="adj" fmla="val 8696"/>
             </a:avLst>
           </a:prstGeom>
           <a:solidFill>
@@ -13313,8 +13319,8 @@
         </p:nvSpPr>
         <p:spPr>
           <a:xfrm>
-            <a:off x="7799832" y="4330598"/>
-            <a:ext cx="3145536" cy="256032"/>
+            <a:off x="7708392" y="4517136"/>
+            <a:ext cx="3282696" cy="228600"/>
           </a:xfrm>
           <a:prstGeom prst="rect">
             <a:avLst/>
@@ -13330,7 +13336,7 @@
               <a:buNone/>
             </a:pPr>
             <a:r>
-              <a:rPr lang="en-US" sz="1300" b="1" dirty="0">
+              <a:rPr lang="en-US" sz="1220" b="1" dirty="0">
                 <a:solidFill>
                   <a:srgbClr val="0068B7"/>
                 </a:solidFill>
@@ -13340,7 +13346,7 @@
               </a:rPr>
               <a:t>Apply it</a:t>
             </a:r>
-            <a:endParaRPr lang="en-US" sz="1300" dirty="0"/>
+            <a:endParaRPr lang="en-US" sz="1220" dirty="0"/>
           </a:p>
         </p:txBody>
       </p:sp>
@@ -13352,8 +13358,8 @@
         </p:nvSpPr>
         <p:spPr>
           <a:xfrm>
-            <a:off x="7799832" y="4659782"/>
-            <a:ext cx="3145536" cy="899770"/>
+            <a:off x="7708392" y="4828032"/>
+            <a:ext cx="3282696" cy="749808"/>
           </a:xfrm>
           <a:prstGeom prst="rect">
             <a:avLst/>
@@ -13371,7 +13377,7 @@
               <a:buNone/>
             </a:pPr>
             <a:r>
-              <a:rPr lang="en-US" sz="1320" dirty="0">
+              <a:rPr lang="en-US" sz="1220" dirty="0">
                 <a:solidFill>
                   <a:srgbClr val="17364A"/>
                 </a:solidFill>
@@ -13379,9 +13385,9 @@
                 <a:ea typeface="Aptos" pitchFamily="34" charset="-122"/>
                 <a:cs typeface="Aptos" pitchFamily="34" charset="-120"/>
               </a:rPr>
-              <a:t>Connect the concept to public health purpose, responsible use, required safeguards, documentation, and the next action a department should take.</a:t>
-            </a:r>
-            <a:endParaRPr lang="en-US" sz="1320" dirty="0"/>
+              <a:t>Connect the concept to public health purpose, responsible use, required.</a:t>
+            </a:r>
+            <a:endParaRPr lang="en-US" sz="1220" dirty="0"/>
           </a:p>
         </p:txBody>
       </p:sp>
@@ -13699,7 +13705,7 @@
                 <a:ea typeface="Aptos" pitchFamily="34" charset="-122"/>
                 <a:cs typeface="Aptos" pitchFamily="34" charset="-120"/>
               </a:rPr>
-              <a:t>• Play 7: Prioritize Use Cases - This lesson informs Play 7 by helping learners connect the.</a:t>
+              <a:t>• Play 7: Prioritize Use Cases - This lesson informs Play 7 by helping.</a:t>
             </a:r>
             <a:endParaRPr lang="en-US" sz="1900" dirty="0"/>
           </a:p>
@@ -13716,7 +13722,7 @@
                 <a:ea typeface="Aptos" pitchFamily="34" charset="-122"/>
                 <a:cs typeface="Aptos" pitchFamily="34" charset="-120"/>
               </a:rPr>
-              <a:t>• Play 11: Build and Deploy AI Solutions - This lesson informs Play 11 by helping learners.</a:t>
+              <a:t>• Play 11: Build and Deploy AI Solutions - This lesson informs Play 11 by.</a:t>
             </a:r>
             <a:endParaRPr lang="en-US" sz="1900" dirty="0"/>
           </a:p>
@@ -13733,7 +13739,7 @@
                 <a:ea typeface="Aptos" pitchFamily="34" charset="-122"/>
                 <a:cs typeface="Aptos" pitchFamily="34" charset="-120"/>
               </a:rPr>
-              <a:t>• Play 1: Vision &amp; Guardrails - This lesson informs Play 1 by helping learners connect the.</a:t>
+              <a:t>• Play 1: Vision &amp; Guardrails - This lesson informs Play 1 by helping learners.</a:t>
             </a:r>
             <a:endParaRPr lang="en-US" sz="1900" dirty="0"/>
           </a:p>
@@ -13750,7 +13756,7 @@
                 <a:ea typeface="Aptos" pitchFamily="34" charset="-122"/>
                 <a:cs typeface="Aptos" pitchFamily="34" charset="-120"/>
               </a:rPr>
-              <a:t>• Play 2: Readiness Assessment - This lesson informs Play 2 by helping learners connect the.</a:t>
+              <a:t>• Play 2: Readiness Assessment - This lesson informs Play 2 by helping.</a:t>
             </a:r>
             <a:endParaRPr lang="en-US" sz="1900" dirty="0"/>
           </a:p>
@@ -13791,8 +13797,8 @@
         </p:nvSpPr>
         <p:spPr>
           <a:xfrm>
-            <a:off x="8211312" y="1563624"/>
-            <a:ext cx="2734056" cy="256032"/>
+            <a:off x="8211312" y="1545336"/>
+            <a:ext cx="2734056" cy="228600"/>
           </a:xfrm>
           <a:prstGeom prst="rect">
             <a:avLst/>
@@ -13808,7 +13814,7 @@
               <a:buNone/>
             </a:pPr>
             <a:r>
-              <a:rPr lang="en-US" sz="1300" b="1" dirty="0">
+              <a:rPr lang="en-US" sz="1220" b="1" dirty="0">
                 <a:solidFill>
                   <a:srgbClr val="0068B7"/>
                 </a:solidFill>
@@ -13818,7 +13824,7 @@
               </a:rPr>
               <a:t>Apply the lesson</a:t>
             </a:r>
-            <a:endParaRPr lang="en-US" sz="1300" dirty="0"/>
+            <a:endParaRPr lang="en-US" sz="1220" dirty="0"/>
           </a:p>
         </p:txBody>
       </p:sp>
@@ -13830,8 +13836,8 @@
         </p:nvSpPr>
         <p:spPr>
           <a:xfrm>
-            <a:off x="8211312" y="1892808"/>
-            <a:ext cx="2734056" cy="1536192"/>
+            <a:off x="8211312" y="1856232"/>
+            <a:ext cx="2734056" cy="1591056"/>
           </a:xfrm>
           <a:prstGeom prst="rect">
             <a:avLst/>
@@ -13849,7 +13855,7 @@
               <a:buNone/>
             </a:pPr>
             <a:r>
-              <a:rPr lang="en-US" sz="1320" dirty="0">
+              <a:rPr lang="en-US" sz="1220" dirty="0">
                 <a:solidFill>
                   <a:srgbClr val="17364A"/>
                 </a:solidFill>
@@ -13857,9 +13863,9 @@
                 <a:ea typeface="Aptos" pitchFamily="34" charset="-122"/>
                 <a:cs typeface="Aptos" pitchFamily="34" charset="-120"/>
               </a:rPr>
-              <a:t>Use the related plays to identify decisions, participants, timing, approvals, and documentation needed for responsible implementation.</a:t>
-            </a:r>
-            <a:endParaRPr lang="en-US" sz="1320" dirty="0"/>
+              <a:t>Use the related plays to identify decisions, participants, timing, approvals,.</a:t>
+            </a:r>
+            <a:endParaRPr lang="en-US" sz="1220" dirty="0"/>
           </a:p>
         </p:txBody>
       </p:sp>
@@ -13898,8 +13904,8 @@
         </p:nvSpPr>
         <p:spPr>
           <a:xfrm>
-            <a:off x="8211312" y="3941064"/>
-            <a:ext cx="2734056" cy="256032"/>
+            <a:off x="8211312" y="3922776"/>
+            <a:ext cx="2734056" cy="228600"/>
           </a:xfrm>
           <a:prstGeom prst="rect">
             <a:avLst/>
@@ -13915,7 +13921,7 @@
               <a:buNone/>
             </a:pPr>
             <a:r>
-              <a:rPr lang="en-US" sz="1300" b="1" dirty="0">
+              <a:rPr lang="en-US" sz="1220" b="1" dirty="0">
                 <a:solidFill>
                   <a:srgbClr val="0068B7"/>
                 </a:solidFill>
@@ -13925,7 +13931,7 @@
               </a:rPr>
               <a:t>Use the play links to</a:t>
             </a:r>
-            <a:endParaRPr lang="en-US" sz="1300" dirty="0"/>
+            <a:endParaRPr lang="en-US" sz="1220" dirty="0"/>
           </a:p>
         </p:txBody>
       </p:sp>
@@ -13937,8 +13943,8 @@
         </p:nvSpPr>
         <p:spPr>
           <a:xfrm>
-            <a:off x="8229600" y="4306824"/>
-            <a:ext cx="2679192" cy="941832"/>
+            <a:off x="8229600" y="4251960"/>
+            <a:ext cx="2679192" cy="1033272"/>
           </a:xfrm>
           <a:prstGeom prst="rect">
             <a:avLst/>
@@ -13956,7 +13962,7 @@
               <a:buNone/>
             </a:pPr>
             <a:r>
-              <a:rPr lang="en-US" sz="1220" dirty="0">
+              <a:rPr lang="en-US" sz="1140" dirty="0">
                 <a:solidFill>
                   <a:srgbClr val="17364A"/>
                 </a:solidFill>
@@ -13966,14 +13972,14 @@
               </a:rPr>
               <a:t>Locate the decision point in the playbook sequence.</a:t>
             </a:r>
-            <a:endParaRPr lang="en-US" sz="1220" dirty="0"/>
-          </a:p>
-          <a:p>
-            <a:pPr indent="0" marL="0">
-              <a:buNone/>
-            </a:pPr>
-            <a:r>
-              <a:rPr lang="en-US" sz="1220" dirty="0">
+            <a:endParaRPr lang="en-US" sz="1140" dirty="0"/>
+          </a:p>
+          <a:p>
+            <a:pPr indent="0" marL="0">
+              <a:buNone/>
+            </a:pPr>
+            <a:r>
+              <a:rPr lang="en-US" sz="1140" dirty="0">
                 <a:solidFill>
                   <a:srgbClr val="17364A"/>
                 </a:solidFill>
@@ -13983,14 +13989,14 @@
               </a:rPr>
               <a:t>Identify who should participate in the work.</a:t>
             </a:r>
-            <a:endParaRPr lang="en-US" sz="1220" dirty="0"/>
-          </a:p>
-          <a:p>
-            <a:pPr indent="0" marL="0">
-              <a:buNone/>
-            </a:pPr>
-            <a:r>
-              <a:rPr lang="en-US" sz="1220" dirty="0">
+            <a:endParaRPr lang="en-US" sz="1140" dirty="0"/>
+          </a:p>
+          <a:p>
+            <a:pPr indent="0" marL="0">
+              <a:buNone/>
+            </a:pPr>
+            <a:r>
+              <a:rPr lang="en-US" sz="1140" dirty="0">
                 <a:solidFill>
                   <a:srgbClr val="17364A"/>
                 </a:solidFill>
@@ -13998,9 +14004,9 @@
                 <a:ea typeface="Aptos" pitchFamily="34" charset="-122"/>
                 <a:cs typeface="Aptos" pitchFamily="34" charset="-120"/>
               </a:rPr>
-              <a:t>Document the review, approval, or implementation step.</a:t>
-            </a:r>
-            <a:endParaRPr lang="en-US" sz="1220" dirty="0"/>
+              <a:t>Document the review, approval, or implementation.</a:t>
+            </a:r>
+            <a:endParaRPr lang="en-US" sz="1140" dirty="0"/>
           </a:p>
         </p:txBody>
       </p:sp>
@@ -14318,7 +14324,7 @@
                 <a:ea typeface="Aptos" pitchFamily="34" charset="-122"/>
                 <a:cs typeface="Aptos" pitchFamily="34" charset="-120"/>
               </a:rPr>
-              <a:t>• Tool 3: Equity Impact Assessment Checklist (Checklist) - Use this tool to complete or.</a:t>
+              <a:t>• Tool 3: Equity Impact Assessment Checklist (Checklist) - Use this tool to.</a:t>
             </a:r>
             <a:endParaRPr lang="en-US" sz="1850" dirty="0"/>
           </a:p>
@@ -14335,7 +14341,7 @@
                 <a:ea typeface="Aptos" pitchFamily="34" charset="-122"/>
                 <a:cs typeface="Aptos" pitchFamily="34" charset="-120"/>
               </a:rPr>
-              <a:t>• Tool 4: AI Policy Landscape Scan (Worksheet) - Use AI Policy Landscape Scan to translate this.</a:t>
+              <a:t>• Tool 4: AI Policy Landscape Scan (Worksheet) - Use AI Policy Landscape Scan.</a:t>
             </a:r>
             <a:endParaRPr lang="en-US" sz="1850" dirty="0"/>
           </a:p>
@@ -14352,7 +14358,7 @@
                 <a:ea typeface="Aptos" pitchFamily="34" charset="-122"/>
                 <a:cs typeface="Aptos" pitchFamily="34" charset="-120"/>
               </a:rPr>
-              <a:t>• Tool 5: AI Environmental and Resource Impact Review (Checklist) - Use AI Environmental and.</a:t>
+              <a:t>• Tool 5: AI Environmental and Resource Impact Review (Checklist) - Use AI.</a:t>
             </a:r>
             <a:endParaRPr lang="en-US" sz="1850" dirty="0"/>
           </a:p>
@@ -14369,7 +14375,7 @@
                 <a:ea typeface="Aptos" pitchFamily="34" charset="-122"/>
                 <a:cs typeface="Aptos" pitchFamily="34" charset="-120"/>
               </a:rPr>
-              <a:t>• Tool 6: Human-Centered AI Decision Rule Checklist (Checklist) - Use Human-Centered AI Decision.</a:t>
+              <a:t>• Tool 6: Human-Centered AI Decision Rule Checklist (Checklist) - Use.</a:t>
             </a:r>
             <a:endParaRPr lang="en-US" sz="1850" dirty="0"/>
           </a:p>
@@ -14410,8 +14416,8 @@
         </p:nvSpPr>
         <p:spPr>
           <a:xfrm>
-            <a:off x="8211312" y="1563624"/>
-            <a:ext cx="2734056" cy="256032"/>
+            <a:off x="8211312" y="1545336"/>
+            <a:ext cx="2734056" cy="228600"/>
           </a:xfrm>
           <a:prstGeom prst="rect">
             <a:avLst/>
@@ -14427,7 +14433,7 @@
               <a:buNone/>
             </a:pPr>
             <a:r>
-              <a:rPr lang="en-US" sz="1300" b="1" dirty="0">
+              <a:rPr lang="en-US" sz="1220" b="1" dirty="0">
                 <a:solidFill>
                   <a:srgbClr val="0068B7"/>
                 </a:solidFill>
@@ -14437,7 +14443,7 @@
               </a:rPr>
               <a:t>Use the tools</a:t>
             </a:r>
-            <a:endParaRPr lang="en-US" sz="1300" dirty="0"/>
+            <a:endParaRPr lang="en-US" sz="1220" dirty="0"/>
           </a:p>
         </p:txBody>
       </p:sp>
@@ -14449,8 +14455,8 @@
         </p:nvSpPr>
         <p:spPr>
           <a:xfrm>
-            <a:off x="8211312" y="1892808"/>
-            <a:ext cx="2734056" cy="1536192"/>
+            <a:off x="8211312" y="1856232"/>
+            <a:ext cx="2734056" cy="1591056"/>
           </a:xfrm>
           <a:prstGeom prst="rect">
             <a:avLst/>
@@ -14468,7 +14474,7 @@
               <a:buNone/>
             </a:pPr>
             <a:r>
-              <a:rPr lang="en-US" sz="1320" dirty="0">
+              <a:rPr lang="en-US" sz="1220" dirty="0">
                 <a:solidFill>
                   <a:srgbClr val="17364A"/>
                 </a:solidFill>
@@ -14476,9 +14482,9 @@
                 <a:ea typeface="Aptos" pitchFamily="34" charset="-122"/>
                 <a:cs typeface="Aptos" pitchFamily="34" charset="-120"/>
               </a:rPr>
-              <a:t>Use linked tools when your department needs a structured worksheet, template, checklist, review process, or documentation artifact.</a:t>
-            </a:r>
-            <a:endParaRPr lang="en-US" sz="1320" dirty="0"/>
+              <a:t>Use linked tools when your department needs a structured worksheet, template,.</a:t>
+            </a:r>
+            <a:endParaRPr lang="en-US" sz="1220" dirty="0"/>
           </a:p>
         </p:txBody>
       </p:sp>
@@ -14517,8 +14523,8 @@
         </p:nvSpPr>
         <p:spPr>
           <a:xfrm>
-            <a:off x="8211312" y="3941064"/>
-            <a:ext cx="2734056" cy="256032"/>
+            <a:off x="8211312" y="3922776"/>
+            <a:ext cx="2734056" cy="228600"/>
           </a:xfrm>
           <a:prstGeom prst="rect">
             <a:avLst/>
@@ -14534,7 +14540,7 @@
               <a:buNone/>
             </a:pPr>
             <a:r>
-              <a:rPr lang="en-US" sz="1300" b="1" dirty="0">
+              <a:rPr lang="en-US" sz="1220" b="1" dirty="0">
                 <a:solidFill>
                   <a:srgbClr val="0068B7"/>
                 </a:solidFill>
@@ -14544,7 +14550,7 @@
               </a:rPr>
               <a:t>Tool selection cues</a:t>
             </a:r>
-            <a:endParaRPr lang="en-US" sz="1300" dirty="0"/>
+            <a:endParaRPr lang="en-US" sz="1220" dirty="0"/>
           </a:p>
         </p:txBody>
       </p:sp>
@@ -14556,8 +14562,8 @@
         </p:nvSpPr>
         <p:spPr>
           <a:xfrm>
-            <a:off x="8229600" y="4306824"/>
-            <a:ext cx="2679192" cy="941832"/>
+            <a:off x="8229600" y="4251960"/>
+            <a:ext cx="2679192" cy="1033272"/>
           </a:xfrm>
           <a:prstGeom prst="rect">
             <a:avLst/>
@@ -14575,7 +14581,7 @@
               <a:buNone/>
             </a:pPr>
             <a:r>
-              <a:rPr lang="en-US" sz="1220" dirty="0">
+              <a:rPr lang="en-US" sz="1140" dirty="0">
                 <a:solidFill>
                   <a:srgbClr val="17364A"/>
                 </a:solidFill>
@@ -14585,14 +14591,14 @@
               </a:rPr>
               <a:t>Use a tool when no comparable local process exists.</a:t>
             </a:r>
-            <a:endParaRPr lang="en-US" sz="1220" dirty="0"/>
-          </a:p>
-          <a:p>
-            <a:pPr indent="0" marL="0">
-              <a:buNone/>
-            </a:pPr>
-            <a:r>
-              <a:rPr lang="en-US" sz="1220" dirty="0">
+            <a:endParaRPr lang="en-US" sz="1140" dirty="0"/>
+          </a:p>
+          <a:p>
+            <a:pPr indent="0" marL="0">
+              <a:buNone/>
+            </a:pPr>
+            <a:r>
+              <a:rPr lang="en-US" sz="1140" dirty="0">
                 <a:solidFill>
                   <a:srgbClr val="17364A"/>
                 </a:solidFill>
@@ -14600,16 +14606,16 @@
                 <a:ea typeface="Aptos" pitchFamily="34" charset="-122"/>
                 <a:cs typeface="Aptos" pitchFamily="34" charset="-120"/>
               </a:rPr>
-              <a:t>Adapt existing department templates when they already fit the.</a:t>
-            </a:r>
-            <a:endParaRPr lang="en-US" sz="1220" dirty="0"/>
-          </a:p>
-          <a:p>
-            <a:pPr indent="0" marL="0">
-              <a:buNone/>
-            </a:pPr>
-            <a:r>
-              <a:rPr lang="en-US" sz="1220" dirty="0">
+              <a:t>Adapt existing department templates when they.</a:t>
+            </a:r>
+            <a:endParaRPr lang="en-US" sz="1140" dirty="0"/>
+          </a:p>
+          <a:p>
+            <a:pPr indent="0" marL="0">
+              <a:buNone/>
+            </a:pPr>
+            <a:r>
+              <a:rPr lang="en-US" sz="1140" dirty="0">
                 <a:solidFill>
                   <a:srgbClr val="17364A"/>
                 </a:solidFill>
@@ -14617,9 +14623,9 @@
                 <a:ea typeface="Aptos" pitchFamily="34" charset="-122"/>
                 <a:cs typeface="Aptos" pitchFamily="34" charset="-120"/>
               </a:rPr>
-              <a:t>Save the completed artifact as evidence of the decision.</a:t>
-            </a:r>
-            <a:endParaRPr lang="en-US" sz="1220" dirty="0"/>
+              <a:t>Save the completed artifact as evidence of the.</a:t>
+            </a:r>
+            <a:endParaRPr lang="en-US" sz="1140" dirty="0"/>
           </a:p>
         </p:txBody>
       </p:sp>
@@ -14910,8 +14916,8 @@
         </p:nvSpPr>
         <p:spPr>
           <a:xfrm>
-            <a:off x="868680" y="1508760"/>
-            <a:ext cx="6309360" cy="4160520"/>
+            <a:off x="822960" y="1463040"/>
+            <a:ext cx="6565392" cy="4343400"/>
           </a:xfrm>
           <a:prstGeom prst="rect">
             <a:avLst/>
@@ -14929,7 +14935,7 @@
               <a:buNone/>
             </a:pPr>
             <a:r>
-              <a:rPr lang="en-US" sz="2100" dirty="0">
+              <a:rPr lang="en-US" sz="1920" dirty="0">
                 <a:solidFill>
                   <a:srgbClr val="003A63"/>
                 </a:solidFill>
@@ -14939,14 +14945,14 @@
               </a:rPr>
               <a:t>• Explain why record linkage matters for public health AI.</a:t>
             </a:r>
-            <a:endParaRPr lang="en-US" sz="2100" dirty="0"/>
-          </a:p>
-          <a:p>
-            <a:pPr indent="0" marL="0">
-              <a:buNone/>
-            </a:pPr>
-            <a:r>
-              <a:rPr lang="en-US" sz="2100" dirty="0">
+            <a:endParaRPr lang="en-US" sz="1920" dirty="0"/>
+          </a:p>
+          <a:p>
+            <a:pPr indent="0" marL="0">
+              <a:buNone/>
+            </a:pPr>
+            <a:r>
+              <a:rPr lang="en-US" sz="1920" dirty="0">
                 <a:solidFill>
                   <a:srgbClr val="003A63"/>
                 </a:solidFill>
@@ -14954,16 +14960,16 @@
                 <a:ea typeface="Aptos" pitchFamily="34" charset="-122"/>
                 <a:cs typeface="Aptos" pitchFamily="34" charset="-120"/>
               </a:rPr>
-              <a:t>• Distinguish between deterministic matching, probabilistic matching, entity resolution, and.</a:t>
-            </a:r>
-            <a:endParaRPr lang="en-US" sz="2100" dirty="0"/>
-          </a:p>
-          <a:p>
-            <a:pPr indent="0" marL="0">
-              <a:buNone/>
-            </a:pPr>
-            <a:r>
-              <a:rPr lang="en-US" sz="2100" dirty="0">
+              <a:t>• Distinguish between deterministic matching, probabilistic matching, entity.</a:t>
+            </a:r>
+            <a:endParaRPr lang="en-US" sz="1920" dirty="0"/>
+          </a:p>
+          <a:p>
+            <a:pPr indent="0" marL="0">
+              <a:buNone/>
+            </a:pPr>
+            <a:r>
+              <a:rPr lang="en-US" sz="1920" dirty="0">
                 <a:solidFill>
                   <a:srgbClr val="003A63"/>
                 </a:solidFill>
@@ -14973,7 +14979,7 @@
               </a:rPr>
               <a:t>• Identify risks from false matches and missed matches.</a:t>
             </a:r>
-            <a:endParaRPr lang="en-US" sz="2100" dirty="0"/>
+            <a:endParaRPr lang="en-US" sz="1920" dirty="0"/>
           </a:p>
         </p:txBody>
       </p:sp>
@@ -14985,12 +14991,12 @@
         </p:nvSpPr>
         <p:spPr>
           <a:xfrm>
-            <a:off x="7635240" y="1325880"/>
-            <a:ext cx="3474720" cy="1207008"/>
+            <a:off x="7543800" y="1325880"/>
+            <a:ext cx="3611880" cy="1261872"/>
           </a:xfrm>
           <a:prstGeom prst="roundRect">
             <a:avLst>
-              <a:gd name="adj" fmla="val 9091"/>
+              <a:gd name="adj" fmla="val 8696"/>
             </a:avLst>
           </a:prstGeom>
           <a:solidFill>
@@ -15012,8 +15018,8 @@
         </p:nvSpPr>
         <p:spPr>
           <a:xfrm>
-            <a:off x="7799832" y="1472184"/>
-            <a:ext cx="3145536" cy="256032"/>
+            <a:off x="7708392" y="1453896"/>
+            <a:ext cx="3282696" cy="228600"/>
           </a:xfrm>
           <a:prstGeom prst="rect">
             <a:avLst/>
@@ -15029,7 +15035,7 @@
               <a:buNone/>
             </a:pPr>
             <a:r>
-              <a:rPr lang="en-US" sz="1300" b="1" dirty="0">
+              <a:rPr lang="en-US" sz="1220" b="1" dirty="0">
                 <a:solidFill>
                   <a:srgbClr val="0068B7"/>
                 </a:solidFill>
@@ -15039,7 +15045,7 @@
               </a:rPr>
               <a:t>Practice focus</a:t>
             </a:r>
-            <a:endParaRPr lang="en-US" sz="1300" dirty="0"/>
+            <a:endParaRPr lang="en-US" sz="1220" dirty="0"/>
           </a:p>
         </p:txBody>
       </p:sp>
@@ -15051,8 +15057,8 @@
         </p:nvSpPr>
         <p:spPr>
           <a:xfrm>
-            <a:off x="7799832" y="1801368"/>
-            <a:ext cx="3145536" cy="640080"/>
+            <a:off x="7708392" y="1764792"/>
+            <a:ext cx="3282696" cy="749808"/>
           </a:xfrm>
           <a:prstGeom prst="rect">
             <a:avLst/>
@@ -15070,7 +15076,7 @@
               <a:buNone/>
             </a:pPr>
             <a:r>
-              <a:rPr lang="en-US" sz="1320" dirty="0">
+              <a:rPr lang="en-US" sz="1220" dirty="0">
                 <a:solidFill>
                   <a:srgbClr val="17364A"/>
                 </a:solidFill>
@@ -15080,7 +15086,7 @@
               </a:rPr>
               <a:t>Explain why record linkage matters for public health AI.</a:t>
             </a:r>
-            <a:endParaRPr lang="en-US" sz="1320" dirty="0"/>
+            <a:endParaRPr lang="en-US" sz="1220" dirty="0"/>
           </a:p>
         </p:txBody>
       </p:sp>
@@ -15092,12 +15098,12 @@
         </p:nvSpPr>
         <p:spPr>
           <a:xfrm>
-            <a:off x="7635240" y="2670048"/>
-            <a:ext cx="3474720" cy="1377086"/>
+            <a:off x="7543800" y="2724912"/>
+            <a:ext cx="3611880" cy="1527048"/>
           </a:xfrm>
           <a:prstGeom prst="roundRect">
             <a:avLst>
-              <a:gd name="adj" fmla="val 7968"/>
+              <a:gd name="adj" fmla="val 7186"/>
             </a:avLst>
           </a:prstGeom>
           <a:solidFill>
@@ -15119,8 +15125,8 @@
         </p:nvSpPr>
         <p:spPr>
           <a:xfrm>
-            <a:off x="7799832" y="2816352"/>
-            <a:ext cx="3145536" cy="256032"/>
+            <a:off x="7708392" y="2852928"/>
+            <a:ext cx="3282696" cy="228600"/>
           </a:xfrm>
           <a:prstGeom prst="rect">
             <a:avLst/>
@@ -15136,7 +15142,7 @@
               <a:buNone/>
             </a:pPr>
             <a:r>
-              <a:rPr lang="en-US" sz="1300" b="1" dirty="0">
+              <a:rPr lang="en-US" sz="1220" b="1" dirty="0">
                 <a:solidFill>
                   <a:srgbClr val="0068B7"/>
                 </a:solidFill>
@@ -15146,7 +15152,7 @@
               </a:rPr>
               <a:t>Concept checkpoints</a:t>
             </a:r>
-            <a:endParaRPr lang="en-US" sz="1300" dirty="0"/>
+            <a:endParaRPr lang="en-US" sz="1220" dirty="0"/>
           </a:p>
         </p:txBody>
       </p:sp>
@@ -15158,8 +15164,8 @@
         </p:nvSpPr>
         <p:spPr>
           <a:xfrm>
-            <a:off x="7818120" y="3182112"/>
-            <a:ext cx="3090672" cy="718718"/>
+            <a:off x="7726680" y="3182112"/>
+            <a:ext cx="3227832" cy="960120"/>
           </a:xfrm>
           <a:prstGeom prst="rect">
             <a:avLst/>
@@ -15177,7 +15183,7 @@
               <a:buNone/>
             </a:pPr>
             <a:r>
-              <a:rPr lang="en-US" sz="1220" dirty="0">
+              <a:rPr lang="en-US" sz="1140" dirty="0">
                 <a:solidFill>
                   <a:srgbClr val="17364A"/>
                 </a:solidFill>
@@ -15185,16 +15191,16 @@
                 <a:ea typeface="Aptos" pitchFamily="34" charset="-122"/>
                 <a:cs typeface="Aptos" pitchFamily="34" charset="-120"/>
               </a:rPr>
-              <a:t>Describe how thresholds, clerical review, and data quality affect.</a:t>
-            </a:r>
-            <a:endParaRPr lang="en-US" sz="1220" dirty="0"/>
-          </a:p>
-          <a:p>
-            <a:pPr indent="0" marL="0">
-              <a:buNone/>
-            </a:pPr>
-            <a:r>
-              <a:rPr lang="en-US" sz="1220" dirty="0">
+              <a:t>Describe how thresholds, clerical review, and data.</a:t>
+            </a:r>
+            <a:endParaRPr lang="en-US" sz="1140" dirty="0"/>
+          </a:p>
+          <a:p>
+            <a:pPr indent="0" marL="0">
+              <a:buNone/>
+            </a:pPr>
+            <a:r>
+              <a:rPr lang="en-US" sz="1140" dirty="0">
                 <a:solidFill>
                   <a:srgbClr val="17364A"/>
                 </a:solidFill>
@@ -15202,9 +15208,9 @@
                 <a:ea typeface="Aptos" pitchFamily="34" charset="-122"/>
                 <a:cs typeface="Aptos" pitchFamily="34" charset="-120"/>
               </a:rPr>
-              <a:t>Produce a linkage risk review for an AI-supported workflow.</a:t>
-            </a:r>
-            <a:endParaRPr lang="en-US" sz="1220" dirty="0"/>
+              <a:t>Produce a linkage risk review for an AI-supported.</a:t>
+            </a:r>
+            <a:endParaRPr lang="en-US" sz="1140" dirty="0"/>
           </a:p>
         </p:txBody>
       </p:sp>
@@ -15216,12 +15222,12 @@
         </p:nvSpPr>
         <p:spPr>
           <a:xfrm>
-            <a:off x="7635240" y="4184294"/>
-            <a:ext cx="3474720" cy="1466698"/>
+            <a:off x="7543800" y="4389120"/>
+            <a:ext cx="3611880" cy="1261872"/>
           </a:xfrm>
           <a:prstGeom prst="roundRect">
             <a:avLst>
-              <a:gd name="adj" fmla="val 7481"/>
+              <a:gd name="adj" fmla="val 8696"/>
             </a:avLst>
           </a:prstGeom>
           <a:solidFill>
@@ -15243,8 +15249,8 @@
         </p:nvSpPr>
         <p:spPr>
           <a:xfrm>
-            <a:off x="7799832" y="4330598"/>
-            <a:ext cx="3145536" cy="256032"/>
+            <a:off x="7708392" y="4517136"/>
+            <a:ext cx="3282696" cy="228600"/>
           </a:xfrm>
           <a:prstGeom prst="rect">
             <a:avLst/>
@@ -15260,7 +15266,7 @@
               <a:buNone/>
             </a:pPr>
             <a:r>
-              <a:rPr lang="en-US" sz="1300" b="1" dirty="0">
+              <a:rPr lang="en-US" sz="1220" b="1" dirty="0">
                 <a:solidFill>
                   <a:srgbClr val="0068B7"/>
                 </a:solidFill>
@@ -15270,7 +15276,7 @@
               </a:rPr>
               <a:t>What to produce</a:t>
             </a:r>
-            <a:endParaRPr lang="en-US" sz="1300" dirty="0"/>
+            <a:endParaRPr lang="en-US" sz="1220" dirty="0"/>
           </a:p>
         </p:txBody>
       </p:sp>
@@ -15282,8 +15288,8 @@
         </p:nvSpPr>
         <p:spPr>
           <a:xfrm>
-            <a:off x="7799832" y="4659782"/>
-            <a:ext cx="3145536" cy="899770"/>
+            <a:off x="7708392" y="4828032"/>
+            <a:ext cx="3282696" cy="749808"/>
           </a:xfrm>
           <a:prstGeom prst="rect">
             <a:avLst/>
@@ -15301,7 +15307,7 @@
               <a:buNone/>
             </a:pPr>
             <a:r>
-              <a:rPr lang="en-US" sz="1320" dirty="0">
+              <a:rPr lang="en-US" sz="1220" dirty="0">
                 <a:solidFill>
                   <a:srgbClr val="17364A"/>
                 </a:solidFill>
@@ -15309,9 +15315,9 @@
                 <a:ea typeface="Aptos" pitchFamily="34" charset="-122"/>
                 <a:cs typeface="Aptos" pitchFamily="34" charset="-120"/>
               </a:rPr>
-              <a:t>Use the assignment to test whether you can explain the concept, apply it to a realistic public health situation, and identify what would need review before the work moves forward.</a:t>
-            </a:r>
-            <a:endParaRPr lang="en-US" sz="1320" dirty="0"/>
+              <a:t>Use the assignment to test whether you can explain the concept, apply it to a.</a:t>
+            </a:r>
+            <a:endParaRPr lang="en-US" sz="1220" dirty="0"/>
           </a:p>
         </p:txBody>
       </p:sp>
@@ -15602,8 +15608,8 @@
         </p:nvSpPr>
         <p:spPr>
           <a:xfrm>
-            <a:off x="868680" y="1508760"/>
-            <a:ext cx="6309360" cy="4160520"/>
+            <a:off x="822960" y="1463040"/>
+            <a:ext cx="6565392" cy="4343400"/>
           </a:xfrm>
           <a:prstGeom prst="rect">
             <a:avLst/>
@@ -15621,7 +15627,7 @@
               <a:buNone/>
             </a:pPr>
             <a:r>
-              <a:rPr lang="en-US" sz="2100" dirty="0">
+              <a:rPr lang="en-US" sz="1920" dirty="0">
                 <a:solidFill>
                   <a:srgbClr val="003A63"/>
                 </a:solidFill>
@@ -15629,16 +15635,16 @@
                 <a:ea typeface="Aptos" pitchFamily="34" charset="-122"/>
                 <a:cs typeface="Aptos" pitchFamily="34" charset="-120"/>
               </a:rPr>
-              <a:t>• Record linkage and entity resolution help public health systems determine whether records.</a:t>
-            </a:r>
-            <a:endParaRPr lang="en-US" sz="2100" dirty="0"/>
-          </a:p>
-          <a:p>
-            <a:pPr indent="0" marL="0">
-              <a:buNone/>
-            </a:pPr>
-            <a:r>
-              <a:rPr lang="en-US" sz="2100" dirty="0">
+              <a:t>• Record linkage and entity resolution help public health systems determine.</a:t>
+            </a:r>
+            <a:endParaRPr lang="en-US" sz="1920" dirty="0"/>
+          </a:p>
+          <a:p>
+            <a:pPr indent="0" marL="0">
+              <a:buNone/>
+            </a:pPr>
+            <a:r>
+              <a:rPr lang="en-US" sz="1920" dirty="0">
                 <a:solidFill>
                   <a:srgbClr val="003A63"/>
                 </a:solidFill>
@@ -15646,16 +15652,16 @@
                 <a:ea typeface="Aptos" pitchFamily="34" charset="-122"/>
                 <a:cs typeface="Aptos" pitchFamily="34" charset="-120"/>
               </a:rPr>
-              <a:t>• AI tools often rely on linked data even when the linkage process is invisible to users.</a:t>
-            </a:r>
-            <a:endParaRPr lang="en-US" sz="2100" dirty="0"/>
-          </a:p>
-          <a:p>
-            <a:pPr indent="0" marL="0">
-              <a:buNone/>
-            </a:pPr>
-            <a:r>
-              <a:rPr lang="en-US" sz="2100" dirty="0">
+              <a:t>• AI tools often rely on linked data even when the linkage process is.</a:t>
+            </a:r>
+            <a:endParaRPr lang="en-US" sz="1920" dirty="0"/>
+          </a:p>
+          <a:p>
+            <a:pPr indent="0" marL="0">
+              <a:buNone/>
+            </a:pPr>
+            <a:r>
+              <a:rPr lang="en-US" sz="1920" dirty="0">
                 <a:solidFill>
                   <a:srgbClr val="003A63"/>
                 </a:solidFill>
@@ -15663,9 +15669,9 @@
                 <a:ea typeface="Aptos" pitchFamily="34" charset="-122"/>
                 <a:cs typeface="Aptos" pitchFamily="34" charset="-120"/>
               </a:rPr>
-              <a:t>• This module teaches learners how matching and deduplication affect AI outputs, surveillance.</a:t>
-            </a:r>
-            <a:endParaRPr lang="en-US" sz="2100" dirty="0"/>
+              <a:t>• This module teaches learners how matching and deduplication affect AI.</a:t>
+            </a:r>
+            <a:endParaRPr lang="en-US" sz="1920" dirty="0"/>
           </a:p>
         </p:txBody>
       </p:sp>
@@ -15677,12 +15683,12 @@
         </p:nvSpPr>
         <p:spPr>
           <a:xfrm>
-            <a:off x="7635240" y="1325880"/>
-            <a:ext cx="3474720" cy="1255471"/>
+            <a:off x="7543800" y="1325880"/>
+            <a:ext cx="3611880" cy="1261872"/>
           </a:xfrm>
           <a:prstGeom prst="roundRect">
             <a:avLst>
-              <a:gd name="adj" fmla="val 8740"/>
+              <a:gd name="adj" fmla="val 8696"/>
             </a:avLst>
           </a:prstGeom>
           <a:solidFill>
@@ -15704,8 +15710,8 @@
         </p:nvSpPr>
         <p:spPr>
           <a:xfrm>
-            <a:off x="7799832" y="1472184"/>
-            <a:ext cx="3145536" cy="256032"/>
+            <a:off x="7708392" y="1453896"/>
+            <a:ext cx="3282696" cy="228600"/>
           </a:xfrm>
           <a:prstGeom prst="rect">
             <a:avLst/>
@@ -15721,7 +15727,7 @@
               <a:buNone/>
             </a:pPr>
             <a:r>
-              <a:rPr lang="en-US" sz="1300" b="1" dirty="0">
+              <a:rPr lang="en-US" sz="1220" b="1" dirty="0">
                 <a:solidFill>
                   <a:srgbClr val="0068B7"/>
                 </a:solidFill>
@@ -15731,7 +15737,7 @@
               </a:rPr>
               <a:t>Core concept</a:t>
             </a:r>
-            <a:endParaRPr lang="en-US" sz="1300" dirty="0"/>
+            <a:endParaRPr lang="en-US" sz="1220" dirty="0"/>
           </a:p>
         </p:txBody>
       </p:sp>
@@ -15743,8 +15749,8 @@
         </p:nvSpPr>
         <p:spPr>
           <a:xfrm>
-            <a:off x="7799832" y="1801368"/>
-            <a:ext cx="3145536" cy="688543"/>
+            <a:off x="7708392" y="1764792"/>
+            <a:ext cx="3282696" cy="749808"/>
           </a:xfrm>
           <a:prstGeom prst="rect">
             <a:avLst/>
@@ -15762,7 +15768,7 @@
               <a:buNone/>
             </a:pPr>
             <a:r>
-              <a:rPr lang="en-US" sz="1320" dirty="0">
+              <a:rPr lang="en-US" sz="1220" dirty="0">
                 <a:solidFill>
                   <a:srgbClr val="17364A"/>
                 </a:solidFill>
@@ -15770,9 +15776,9 @@
                 <a:ea typeface="Aptos" pitchFamily="34" charset="-122"/>
                 <a:cs typeface="Aptos" pitchFamily="34" charset="-120"/>
               </a:rPr>
-              <a:t>Record linkage and entity resolution help public health systems determine whether records refer to the.</a:t>
-            </a:r>
-            <a:endParaRPr lang="en-US" sz="1320" dirty="0"/>
+              <a:t>Record linkage and entity resolution help public health systems determine.</a:t>
+            </a:r>
+            <a:endParaRPr lang="en-US" sz="1220" dirty="0"/>
           </a:p>
         </p:txBody>
       </p:sp>
@@ -15784,12 +15790,12 @@
         </p:nvSpPr>
         <p:spPr>
           <a:xfrm>
-            <a:off x="7635240" y="2718511"/>
-            <a:ext cx="3474720" cy="1328623"/>
+            <a:off x="7543800" y="2724912"/>
+            <a:ext cx="3611880" cy="1527048"/>
           </a:xfrm>
           <a:prstGeom prst="roundRect">
             <a:avLst>
-              <a:gd name="adj" fmla="val 8259"/>
+              <a:gd name="adj" fmla="val 7186"/>
             </a:avLst>
           </a:prstGeom>
           <a:solidFill>
@@ -15811,8 +15817,8 @@
         </p:nvSpPr>
         <p:spPr>
           <a:xfrm>
-            <a:off x="7799832" y="2864815"/>
-            <a:ext cx="3145536" cy="256032"/>
+            <a:off x="7708392" y="2852928"/>
+            <a:ext cx="3282696" cy="228600"/>
           </a:xfrm>
           <a:prstGeom prst="rect">
             <a:avLst/>
@@ -15828,7 +15834,7 @@
               <a:buNone/>
             </a:pPr>
             <a:r>
-              <a:rPr lang="en-US" sz="1300" b="1" dirty="0">
+              <a:rPr lang="en-US" sz="1220" b="1" dirty="0">
                 <a:solidFill>
                   <a:srgbClr val="0068B7"/>
                 </a:solidFill>
@@ -15838,7 +15844,7 @@
               </a:rPr>
               <a:t>Concept checkpoints</a:t>
             </a:r>
-            <a:endParaRPr lang="en-US" sz="1300" dirty="0"/>
+            <a:endParaRPr lang="en-US" sz="1220" dirty="0"/>
           </a:p>
         </p:txBody>
       </p:sp>
@@ -15850,8 +15856,8 @@
         </p:nvSpPr>
         <p:spPr>
           <a:xfrm>
-            <a:off x="7818120" y="3230575"/>
-            <a:ext cx="3090672" cy="670255"/>
+            <a:off x="7726680" y="3182112"/>
+            <a:ext cx="3227832" cy="960120"/>
           </a:xfrm>
           <a:prstGeom prst="rect">
             <a:avLst/>
@@ -15869,7 +15875,7 @@
               <a:buNone/>
             </a:pPr>
             <a:r>
-              <a:rPr lang="en-US" sz="1220" dirty="0">
+              <a:rPr lang="en-US" sz="1140" dirty="0">
                 <a:solidFill>
                   <a:srgbClr val="17364A"/>
                 </a:solidFill>
@@ -15877,16 +15883,16 @@
                 <a:ea typeface="Aptos" pitchFamily="34" charset="-122"/>
                 <a:cs typeface="Aptos" pitchFamily="34" charset="-120"/>
               </a:rPr>
-              <a:t>Record linkage and entity resolution help public health systems.</a:t>
-            </a:r>
-            <a:endParaRPr lang="en-US" sz="1220" dirty="0"/>
-          </a:p>
-          <a:p>
-            <a:pPr indent="0" marL="0">
-              <a:buNone/>
-            </a:pPr>
-            <a:r>
-              <a:rPr lang="en-US" sz="1220" dirty="0">
+              <a:t>Record linkage and entity resolution help public.</a:t>
+            </a:r>
+            <a:endParaRPr lang="en-US" sz="1140" dirty="0"/>
+          </a:p>
+          <a:p>
+            <a:pPr indent="0" marL="0">
+              <a:buNone/>
+            </a:pPr>
+            <a:r>
+              <a:rPr lang="en-US" sz="1140" dirty="0">
                 <a:solidFill>
                   <a:srgbClr val="17364A"/>
                 </a:solidFill>
@@ -15894,9 +15900,9 @@
                 <a:ea typeface="Aptos" pitchFamily="34" charset="-122"/>
                 <a:cs typeface="Aptos" pitchFamily="34" charset="-120"/>
               </a:rPr>
-              <a:t>This module teaches learners how matching and deduplication affect.</a:t>
-            </a:r>
-            <a:endParaRPr lang="en-US" sz="1220" dirty="0"/>
+              <a:t>This module teaches learners how matching and.</a:t>
+            </a:r>
+            <a:endParaRPr lang="en-US" sz="1140" dirty="0"/>
           </a:p>
         </p:txBody>
       </p:sp>
@@ -15908,12 +15914,12 @@
         </p:nvSpPr>
         <p:spPr>
           <a:xfrm>
-            <a:off x="7635240" y="4184294"/>
-            <a:ext cx="3474720" cy="1466698"/>
+            <a:off x="7543800" y="4389120"/>
+            <a:ext cx="3611880" cy="1261872"/>
           </a:xfrm>
           <a:prstGeom prst="roundRect">
             <a:avLst>
-              <a:gd name="adj" fmla="val 7481"/>
+              <a:gd name="adj" fmla="val 8696"/>
             </a:avLst>
           </a:prstGeom>
           <a:solidFill>
@@ -15935,8 +15941,8 @@
         </p:nvSpPr>
         <p:spPr>
           <a:xfrm>
-            <a:off x="7799832" y="4330598"/>
-            <a:ext cx="3145536" cy="256032"/>
+            <a:off x="7708392" y="4517136"/>
+            <a:ext cx="3282696" cy="228600"/>
           </a:xfrm>
           <a:prstGeom prst="rect">
             <a:avLst/>
@@ -15952,7 +15958,7 @@
               <a:buNone/>
             </a:pPr>
             <a:r>
-              <a:rPr lang="en-US" sz="1300" b="1" dirty="0">
+              <a:rPr lang="en-US" sz="1220" b="1" dirty="0">
                 <a:solidFill>
                   <a:srgbClr val="0068B7"/>
                 </a:solidFill>
@@ -15962,7 +15968,7 @@
               </a:rPr>
               <a:t>Apply it</a:t>
             </a:r>
-            <a:endParaRPr lang="en-US" sz="1300" dirty="0"/>
+            <a:endParaRPr lang="en-US" sz="1220" dirty="0"/>
           </a:p>
         </p:txBody>
       </p:sp>
@@ -15974,8 +15980,8 @@
         </p:nvSpPr>
         <p:spPr>
           <a:xfrm>
-            <a:off x="7799832" y="4659782"/>
-            <a:ext cx="3145536" cy="899770"/>
+            <a:off x="7708392" y="4828032"/>
+            <a:ext cx="3282696" cy="749808"/>
           </a:xfrm>
           <a:prstGeom prst="rect">
             <a:avLst/>
@@ -15993,7 +15999,7 @@
               <a:buNone/>
             </a:pPr>
             <a:r>
-              <a:rPr lang="en-US" sz="1320" dirty="0">
+              <a:rPr lang="en-US" sz="1220" dirty="0">
                 <a:solidFill>
                   <a:srgbClr val="17364A"/>
                 </a:solidFill>
@@ -16001,9 +16007,9 @@
                 <a:ea typeface="Aptos" pitchFamily="34" charset="-122"/>
                 <a:cs typeface="Aptos" pitchFamily="34" charset="-120"/>
               </a:rPr>
-              <a:t>Connect the concept to public health purpose, responsible use, required safeguards, documentation, and the next action a department should take.</a:t>
-            </a:r>
-            <a:endParaRPr lang="en-US" sz="1320" dirty="0"/>
+              <a:t>Connect the concept to public health purpose, responsible use, required.</a:t>
+            </a:r>
+            <a:endParaRPr lang="en-US" sz="1220" dirty="0"/>
           </a:p>
         </p:txBody>
       </p:sp>
@@ -16294,8 +16300,8 @@
         </p:nvSpPr>
         <p:spPr>
           <a:xfrm>
-            <a:off x="868680" y="1508760"/>
-            <a:ext cx="6309360" cy="4160520"/>
+            <a:off x="822960" y="1463040"/>
+            <a:ext cx="6565392" cy="4343400"/>
           </a:xfrm>
           <a:prstGeom prst="rect">
             <a:avLst/>
@@ -16313,7 +16319,7 @@
               <a:buNone/>
             </a:pPr>
             <a:r>
-              <a:rPr lang="en-US" sz="2100" dirty="0">
+              <a:rPr lang="en-US" sz="1920" dirty="0">
                 <a:solidFill>
                   <a:srgbClr val="003A63"/>
                 </a:solidFill>
@@ -16321,16 +16327,16 @@
                 <a:ea typeface="Aptos" pitchFamily="34" charset="-122"/>
                 <a:cs typeface="Aptos" pitchFamily="34" charset="-120"/>
               </a:rPr>
-              <a:t>• Record linkage matters because public health work often depends on combining information.</a:t>
-            </a:r>
-            <a:endParaRPr lang="en-US" sz="2100" dirty="0"/>
-          </a:p>
-          <a:p>
-            <a:pPr indent="0" marL="0">
-              <a:buNone/>
-            </a:pPr>
-            <a:r>
-              <a:rPr lang="en-US" sz="2100" dirty="0">
+              <a:t>• Record linkage matters because public health work often depends on combining.</a:t>
+            </a:r>
+            <a:endParaRPr lang="en-US" sz="1920" dirty="0"/>
+          </a:p>
+          <a:p>
+            <a:pPr indent="0" marL="0">
+              <a:buNone/>
+            </a:pPr>
+            <a:r>
+              <a:rPr lang="en-US" sz="1920" dirty="0">
                 <a:solidFill>
                   <a:srgbClr val="003A63"/>
                 </a:solidFill>
@@ -16338,16 +16344,16 @@
                 <a:ea typeface="Aptos" pitchFamily="34" charset="-122"/>
                 <a:cs typeface="Aptos" pitchFamily="34" charset="-120"/>
               </a:rPr>
-              <a:t>• A surveillance system may need to associate a lab report with an existing case.</a:t>
-            </a:r>
-            <a:endParaRPr lang="en-US" sz="2100" dirty="0"/>
-          </a:p>
-          <a:p>
-            <a:pPr indent="0" marL="0">
-              <a:buNone/>
-            </a:pPr>
-            <a:r>
-              <a:rPr lang="en-US" sz="2100" dirty="0">
+              <a:t>• A surveillance system may need to associate a lab report with an existing.</a:t>
+            </a:r>
+            <a:endParaRPr lang="en-US" sz="1920" dirty="0"/>
+          </a:p>
+          <a:p>
+            <a:pPr indent="0" marL="0">
+              <a:buNone/>
+            </a:pPr>
+            <a:r>
+              <a:rPr lang="en-US" sz="1920" dirty="0">
                 <a:solidFill>
                   <a:srgbClr val="003A63"/>
                 </a:solidFill>
@@ -16357,7 +16363,7 @@
               </a:rPr>
               <a:t>• An IIS may need to match vaccination records from multiple providers.</a:t>
             </a:r>
-            <a:endParaRPr lang="en-US" sz="2100" dirty="0"/>
+            <a:endParaRPr lang="en-US" sz="1920" dirty="0"/>
           </a:p>
         </p:txBody>
       </p:sp>
@@ -16369,12 +16375,12 @@
         </p:nvSpPr>
         <p:spPr>
           <a:xfrm>
-            <a:off x="7635240" y="1325880"/>
-            <a:ext cx="3474720" cy="1255471"/>
+            <a:off x="7543800" y="1325880"/>
+            <a:ext cx="3611880" cy="1261872"/>
           </a:xfrm>
           <a:prstGeom prst="roundRect">
             <a:avLst>
-              <a:gd name="adj" fmla="val 8740"/>
+              <a:gd name="adj" fmla="val 8696"/>
             </a:avLst>
           </a:prstGeom>
           <a:solidFill>
@@ -16396,8 +16402,8 @@
         </p:nvSpPr>
         <p:spPr>
           <a:xfrm>
-            <a:off x="7799832" y="1472184"/>
-            <a:ext cx="3145536" cy="256032"/>
+            <a:off x="7708392" y="1453896"/>
+            <a:ext cx="3282696" cy="228600"/>
           </a:xfrm>
           <a:prstGeom prst="rect">
             <a:avLst/>
@@ -16413,7 +16419,7 @@
               <a:buNone/>
             </a:pPr>
             <a:r>
-              <a:rPr lang="en-US" sz="1300" b="1" dirty="0">
+              <a:rPr lang="en-US" sz="1220" b="1" dirty="0">
                 <a:solidFill>
                   <a:srgbClr val="0068B7"/>
                 </a:solidFill>
@@ -16423,7 +16429,7 @@
               </a:rPr>
               <a:t>Core concept</a:t>
             </a:r>
-            <a:endParaRPr lang="en-US" sz="1300" dirty="0"/>
+            <a:endParaRPr lang="en-US" sz="1220" dirty="0"/>
           </a:p>
         </p:txBody>
       </p:sp>
@@ -16435,8 +16441,8 @@
         </p:nvSpPr>
         <p:spPr>
           <a:xfrm>
-            <a:off x="7799832" y="1801368"/>
-            <a:ext cx="3145536" cy="688543"/>
+            <a:off x="7708392" y="1764792"/>
+            <a:ext cx="3282696" cy="749808"/>
           </a:xfrm>
           <a:prstGeom prst="rect">
             <a:avLst/>
@@ -16454,7 +16460,7 @@
               <a:buNone/>
             </a:pPr>
             <a:r>
-              <a:rPr lang="en-US" sz="1320" dirty="0">
+              <a:rPr lang="en-US" sz="1220" dirty="0">
                 <a:solidFill>
                   <a:srgbClr val="17364A"/>
                 </a:solidFill>
@@ -16462,9 +16468,9 @@
                 <a:ea typeface="Aptos" pitchFamily="34" charset="-122"/>
                 <a:cs typeface="Aptos" pitchFamily="34" charset="-120"/>
               </a:rPr>
-              <a:t>Record linkage matters because public health work often depends on combining information across systems.</a:t>
-            </a:r>
-            <a:endParaRPr lang="en-US" sz="1320" dirty="0"/>
+              <a:t>Record linkage matters because public health work often depends on combining.</a:t>
+            </a:r>
+            <a:endParaRPr lang="en-US" sz="1220" dirty="0"/>
           </a:p>
         </p:txBody>
       </p:sp>
@@ -16476,12 +16482,12 @@
         </p:nvSpPr>
         <p:spPr>
           <a:xfrm>
-            <a:off x="7635240" y="2718511"/>
-            <a:ext cx="3474720" cy="1328623"/>
+            <a:off x="7543800" y="2724912"/>
+            <a:ext cx="3611880" cy="1527048"/>
           </a:xfrm>
           <a:prstGeom prst="roundRect">
             <a:avLst>
-              <a:gd name="adj" fmla="val 8259"/>
+              <a:gd name="adj" fmla="val 7186"/>
             </a:avLst>
           </a:prstGeom>
           <a:solidFill>
@@ -16503,8 +16509,8 @@
         </p:nvSpPr>
         <p:spPr>
           <a:xfrm>
-            <a:off x="7799832" y="2864815"/>
-            <a:ext cx="3145536" cy="256032"/>
+            <a:off x="7708392" y="2852928"/>
+            <a:ext cx="3282696" cy="228600"/>
           </a:xfrm>
           <a:prstGeom prst="rect">
             <a:avLst/>
@@ -16520,7 +16526,7 @@
               <a:buNone/>
             </a:pPr>
             <a:r>
-              <a:rPr lang="en-US" sz="1300" b="1" dirty="0">
+              <a:rPr lang="en-US" sz="1220" b="1" dirty="0">
                 <a:solidFill>
                   <a:srgbClr val="0068B7"/>
                 </a:solidFill>
@@ -16530,7 +16536,7 @@
               </a:rPr>
               <a:t>Concept checkpoints</a:t>
             </a:r>
-            <a:endParaRPr lang="en-US" sz="1300" dirty="0"/>
+            <a:endParaRPr lang="en-US" sz="1220" dirty="0"/>
           </a:p>
         </p:txBody>
       </p:sp>
@@ -16542,8 +16548,8 @@
         </p:nvSpPr>
         <p:spPr>
           <a:xfrm>
-            <a:off x="7818120" y="3230575"/>
-            <a:ext cx="3090672" cy="670255"/>
+            <a:off x="7726680" y="3182112"/>
+            <a:ext cx="3227832" cy="960120"/>
           </a:xfrm>
           <a:prstGeom prst="rect">
             <a:avLst/>
@@ -16561,7 +16567,7 @@
               <a:buNone/>
             </a:pPr>
             <a:r>
-              <a:rPr lang="en-US" sz="1220" dirty="0">
+              <a:rPr lang="en-US" sz="1140" dirty="0">
                 <a:solidFill>
                   <a:srgbClr val="17364A"/>
                 </a:solidFill>
@@ -16569,16 +16575,16 @@
                 <a:ea typeface="Aptos" pitchFamily="34" charset="-122"/>
                 <a:cs typeface="Aptos" pitchFamily="34" charset="-120"/>
               </a:rPr>
-              <a:t>A vital records linkage may support maternal and child health.</a:t>
-            </a:r>
-            <a:endParaRPr lang="en-US" sz="1220" dirty="0"/>
-          </a:p>
-          <a:p>
-            <a:pPr indent="0" marL="0">
-              <a:buNone/>
-            </a:pPr>
-            <a:r>
-              <a:rPr lang="en-US" sz="1220" dirty="0">
+              <a:t>A vital records linkage may support maternal and.</a:t>
+            </a:r>
+            <a:endParaRPr lang="en-US" sz="1140" dirty="0"/>
+          </a:p>
+          <a:p>
+            <a:pPr indent="0" marL="0">
+              <a:buNone/>
+            </a:pPr>
+            <a:r>
+              <a:rPr lang="en-US" sz="1140" dirty="0">
                 <a:solidFill>
                   <a:srgbClr val="17364A"/>
                 </a:solidFill>
@@ -16586,16 +16592,16 @@
                 <a:ea typeface="Aptos" pitchFamily="34" charset="-122"/>
                 <a:cs typeface="Aptos" pitchFamily="34" charset="-120"/>
               </a:rPr>
-              <a:t>An AI tool using these linked records may summarize history,.</a:t>
-            </a:r>
-            <a:endParaRPr lang="en-US" sz="1220" dirty="0"/>
-          </a:p>
-          <a:p>
-            <a:pPr indent="0" marL="0">
-              <a:buNone/>
-            </a:pPr>
-            <a:r>
-              <a:rPr lang="en-US" sz="1220" dirty="0">
+              <a:t>An AI tool using these linked records may.</a:t>
+            </a:r>
+            <a:endParaRPr lang="en-US" sz="1140" dirty="0"/>
+          </a:p>
+          <a:p>
+            <a:pPr indent="0" marL="0">
+              <a:buNone/>
+            </a:pPr>
+            <a:r>
+              <a:rPr lang="en-US" sz="1140" dirty="0">
                 <a:solidFill>
                   <a:srgbClr val="17364A"/>
                 </a:solidFill>
@@ -16605,7 +16611,7 @@
               </a:rPr>
               <a:t>If linkage is wrong, the AI output may be wrong.</a:t>
             </a:r>
-            <a:endParaRPr lang="en-US" sz="1220" dirty="0"/>
+            <a:endParaRPr lang="en-US" sz="1140" dirty="0"/>
           </a:p>
         </p:txBody>
       </p:sp>
@@ -16617,12 +16623,12 @@
         </p:nvSpPr>
         <p:spPr>
           <a:xfrm>
-            <a:off x="7635240" y="4184294"/>
-            <a:ext cx="3474720" cy="1466698"/>
+            <a:off x="7543800" y="4389120"/>
+            <a:ext cx="3611880" cy="1261872"/>
           </a:xfrm>
           <a:prstGeom prst="roundRect">
             <a:avLst>
-              <a:gd name="adj" fmla="val 7481"/>
+              <a:gd name="adj" fmla="val 8696"/>
             </a:avLst>
           </a:prstGeom>
           <a:solidFill>
@@ -16644,8 +16650,8 @@
         </p:nvSpPr>
         <p:spPr>
           <a:xfrm>
-            <a:off x="7799832" y="4330598"/>
-            <a:ext cx="3145536" cy="256032"/>
+            <a:off x="7708392" y="4517136"/>
+            <a:ext cx="3282696" cy="228600"/>
           </a:xfrm>
           <a:prstGeom prst="rect">
             <a:avLst/>
@@ -16661,7 +16667,7 @@
               <a:buNone/>
             </a:pPr>
             <a:r>
-              <a:rPr lang="en-US" sz="1300" b="1" dirty="0">
+              <a:rPr lang="en-US" sz="1220" b="1" dirty="0">
                 <a:solidFill>
                   <a:srgbClr val="0068B7"/>
                 </a:solidFill>
@@ -16671,7 +16677,7 @@
               </a:rPr>
               <a:t>Apply it</a:t>
             </a:r>
-            <a:endParaRPr lang="en-US" sz="1300" dirty="0"/>
+            <a:endParaRPr lang="en-US" sz="1220" dirty="0"/>
           </a:p>
         </p:txBody>
       </p:sp>
@@ -16683,8 +16689,8 @@
         </p:nvSpPr>
         <p:spPr>
           <a:xfrm>
-            <a:off x="7799832" y="4659782"/>
-            <a:ext cx="3145536" cy="899770"/>
+            <a:off x="7708392" y="4828032"/>
+            <a:ext cx="3282696" cy="749808"/>
           </a:xfrm>
           <a:prstGeom prst="rect">
             <a:avLst/>
@@ -16702,7 +16708,7 @@
               <a:buNone/>
             </a:pPr>
             <a:r>
-              <a:rPr lang="en-US" sz="1320" dirty="0">
+              <a:rPr lang="en-US" sz="1220" dirty="0">
                 <a:solidFill>
                   <a:srgbClr val="17364A"/>
                 </a:solidFill>
@@ -16710,9 +16716,9 @@
                 <a:ea typeface="Aptos" pitchFamily="34" charset="-122"/>
                 <a:cs typeface="Aptos" pitchFamily="34" charset="-120"/>
               </a:rPr>
-              <a:t>Connect the concept to public health purpose, responsible use, required safeguards, documentation, and the next action a department should take.</a:t>
-            </a:r>
-            <a:endParaRPr lang="en-US" sz="1320" dirty="0"/>
+              <a:t>Connect the concept to public health purpose, responsible use, required.</a:t>
+            </a:r>
+            <a:endParaRPr lang="en-US" sz="1220" dirty="0"/>
           </a:p>
         </p:txBody>
       </p:sp>
@@ -17003,8 +17009,8 @@
         </p:nvSpPr>
         <p:spPr>
           <a:xfrm>
-            <a:off x="868680" y="1508760"/>
-            <a:ext cx="6309360" cy="4160520"/>
+            <a:off x="822960" y="1463040"/>
+            <a:ext cx="6565392" cy="4343400"/>
           </a:xfrm>
           <a:prstGeom prst="rect">
             <a:avLst/>
@@ -17022,7 +17028,7 @@
               <a:buNone/>
             </a:pPr>
             <a:r>
-              <a:rPr lang="en-US" sz="2100" dirty="0">
+              <a:rPr lang="en-US" sz="1920" dirty="0">
                 <a:solidFill>
                   <a:srgbClr val="003A63"/>
                 </a:solidFill>
@@ -17032,14 +17038,14 @@
               </a:rPr>
               <a:t>• Record linkage.</a:t>
             </a:r>
-            <a:endParaRPr lang="en-US" sz="2100" dirty="0"/>
-          </a:p>
-          <a:p>
-            <a:pPr indent="0" marL="0">
-              <a:buNone/>
-            </a:pPr>
-            <a:r>
-              <a:rPr lang="en-US" sz="2100" dirty="0">
+            <a:endParaRPr lang="en-US" sz="1920" dirty="0"/>
+          </a:p>
+          <a:p>
+            <a:pPr indent="0" marL="0">
+              <a:buNone/>
+            </a:pPr>
+            <a:r>
+              <a:rPr lang="en-US" sz="1920" dirty="0">
                 <a:solidFill>
                   <a:srgbClr val="003A63"/>
                 </a:solidFill>
@@ -17047,16 +17053,16 @@
                 <a:ea typeface="Aptos" pitchFamily="34" charset="-122"/>
                 <a:cs typeface="Aptos" pitchFamily="34" charset="-120"/>
               </a:rPr>
-              <a:t>• Record linkage is the process of determining whether records from one or more sources refer to.</a:t>
-            </a:r>
-            <a:endParaRPr lang="en-US" sz="2100" dirty="0"/>
-          </a:p>
-          <a:p>
-            <a:pPr indent="0" marL="0">
-              <a:buNone/>
-            </a:pPr>
-            <a:r>
-              <a:rPr lang="en-US" sz="2100" dirty="0">
+              <a:t>• Record linkage is the process of determining whether records from one or.</a:t>
+            </a:r>
+            <a:endParaRPr lang="en-US" sz="1920" dirty="0"/>
+          </a:p>
+          <a:p>
+            <a:pPr indent="0" marL="0">
+              <a:buNone/>
+            </a:pPr>
+            <a:r>
+              <a:rPr lang="en-US" sz="1920" dirty="0">
                 <a:solidFill>
                   <a:srgbClr val="003A63"/>
                 </a:solidFill>
@@ -17064,9 +17070,9 @@
                 <a:ea typeface="Aptos" pitchFamily="34" charset="-122"/>
                 <a:cs typeface="Aptos" pitchFamily="34" charset="-120"/>
               </a:rPr>
-              <a:t>• The entity may be a person, provider, facility, address, organization, event, or outbreak.</a:t>
-            </a:r>
-            <a:endParaRPr lang="en-US" sz="2100" dirty="0"/>
+              <a:t>• The entity may be a person, provider, facility, address, organization,.</a:t>
+            </a:r>
+            <a:endParaRPr lang="en-US" sz="1920" dirty="0"/>
           </a:p>
         </p:txBody>
       </p:sp>
@@ -17078,12 +17084,12 @@
         </p:nvSpPr>
         <p:spPr>
           <a:xfrm>
-            <a:off x="7635240" y="1325880"/>
-            <a:ext cx="3474720" cy="1207008"/>
+            <a:off x="7543800" y="1325880"/>
+            <a:ext cx="3611880" cy="1261872"/>
           </a:xfrm>
           <a:prstGeom prst="roundRect">
             <a:avLst>
-              <a:gd name="adj" fmla="val 9091"/>
+              <a:gd name="adj" fmla="val 8696"/>
             </a:avLst>
           </a:prstGeom>
           <a:solidFill>
@@ -17105,8 +17111,8 @@
         </p:nvSpPr>
         <p:spPr>
           <a:xfrm>
-            <a:off x="7799832" y="1472184"/>
-            <a:ext cx="3145536" cy="256032"/>
+            <a:off x="7708392" y="1453896"/>
+            <a:ext cx="3282696" cy="228600"/>
           </a:xfrm>
           <a:prstGeom prst="rect">
             <a:avLst/>
@@ -17122,7 +17128,7 @@
               <a:buNone/>
             </a:pPr>
             <a:r>
-              <a:rPr lang="en-US" sz="1300" b="1" dirty="0">
+              <a:rPr lang="en-US" sz="1220" b="1" dirty="0">
                 <a:solidFill>
                   <a:srgbClr val="0068B7"/>
                 </a:solidFill>
@@ -17132,7 +17138,7 @@
               </a:rPr>
               <a:t>Core concept</a:t>
             </a:r>
-            <a:endParaRPr lang="en-US" sz="1300" dirty="0"/>
+            <a:endParaRPr lang="en-US" sz="1220" dirty="0"/>
           </a:p>
         </p:txBody>
       </p:sp>
@@ -17144,8 +17150,8 @@
         </p:nvSpPr>
         <p:spPr>
           <a:xfrm>
-            <a:off x="7799832" y="1801368"/>
-            <a:ext cx="3145536" cy="640080"/>
+            <a:off x="7708392" y="1764792"/>
+            <a:ext cx="3282696" cy="749808"/>
           </a:xfrm>
           <a:prstGeom prst="rect">
             <a:avLst/>
@@ -17163,7 +17169,7 @@
               <a:buNone/>
             </a:pPr>
             <a:r>
-              <a:rPr lang="en-US" sz="1320" dirty="0">
+              <a:rPr lang="en-US" sz="1220" dirty="0">
                 <a:solidFill>
                   <a:srgbClr val="17364A"/>
                 </a:solidFill>
@@ -17173,7 +17179,7 @@
               </a:rPr>
               <a:t>Record linkage.</a:t>
             </a:r>
-            <a:endParaRPr lang="en-US" sz="1320" dirty="0"/>
+            <a:endParaRPr lang="en-US" sz="1220" dirty="0"/>
           </a:p>
         </p:txBody>
       </p:sp>
@@ -17185,12 +17191,12 @@
         </p:nvSpPr>
         <p:spPr>
           <a:xfrm>
-            <a:off x="7635240" y="2670048"/>
-            <a:ext cx="3474720" cy="1377086"/>
+            <a:off x="7543800" y="2724912"/>
+            <a:ext cx="3611880" cy="1527048"/>
           </a:xfrm>
           <a:prstGeom prst="roundRect">
             <a:avLst>
-              <a:gd name="adj" fmla="val 7968"/>
+              <a:gd name="adj" fmla="val 7186"/>
             </a:avLst>
           </a:prstGeom>
           <a:solidFill>
@@ -17212,8 +17218,8 @@
         </p:nvSpPr>
         <p:spPr>
           <a:xfrm>
-            <a:off x="7799832" y="2816352"/>
-            <a:ext cx="3145536" cy="256032"/>
+            <a:off x="7708392" y="2852928"/>
+            <a:ext cx="3282696" cy="228600"/>
           </a:xfrm>
           <a:prstGeom prst="rect">
             <a:avLst/>
@@ -17229,7 +17235,7 @@
               <a:buNone/>
             </a:pPr>
             <a:r>
-              <a:rPr lang="en-US" sz="1300" b="1" dirty="0">
+              <a:rPr lang="en-US" sz="1220" b="1" dirty="0">
                 <a:solidFill>
                   <a:srgbClr val="0068B7"/>
                 </a:solidFill>
@@ -17239,7 +17245,7 @@
               </a:rPr>
               <a:t>Concept checkpoints</a:t>
             </a:r>
-            <a:endParaRPr lang="en-US" sz="1300" dirty="0"/>
+            <a:endParaRPr lang="en-US" sz="1220" dirty="0"/>
           </a:p>
         </p:txBody>
       </p:sp>
@@ -17251,8 +17257,8 @@
         </p:nvSpPr>
         <p:spPr>
           <a:xfrm>
-            <a:off x="7818120" y="3182112"/>
-            <a:ext cx="3090672" cy="718718"/>
+            <a:off x="7726680" y="3182112"/>
+            <a:ext cx="3227832" cy="960120"/>
           </a:xfrm>
           <a:prstGeom prst="rect">
             <a:avLst/>
@@ -17270,7 +17276,7 @@
               <a:buNone/>
             </a:pPr>
             <a:r>
-              <a:rPr lang="en-US" sz="1220" dirty="0">
+              <a:rPr lang="en-US" sz="1140" dirty="0">
                 <a:solidFill>
                   <a:srgbClr val="17364A"/>
                 </a:solidFill>
@@ -17278,16 +17284,16 @@
                 <a:ea typeface="Aptos" pitchFamily="34" charset="-122"/>
                 <a:cs typeface="Aptos" pitchFamily="34" charset="-120"/>
               </a:rPr>
-              <a:t>Record linkage is the process of determining whether records from.</a:t>
-            </a:r>
-            <a:endParaRPr lang="en-US" sz="1220" dirty="0"/>
-          </a:p>
-          <a:p>
-            <a:pPr indent="0" marL="0">
-              <a:buNone/>
-            </a:pPr>
-            <a:r>
-              <a:rPr lang="en-US" sz="1220" dirty="0">
+              <a:t>Record linkage is the process of determining.</a:t>
+            </a:r>
+            <a:endParaRPr lang="en-US" sz="1140" dirty="0"/>
+          </a:p>
+          <a:p>
+            <a:pPr indent="0" marL="0">
+              <a:buNone/>
+            </a:pPr>
+            <a:r>
+              <a:rPr lang="en-US" sz="1140" dirty="0">
                 <a:solidFill>
                   <a:srgbClr val="17364A"/>
                 </a:solidFill>
@@ -17297,14 +17303,14 @@
               </a:rPr>
               <a:t>Entity resolution.</a:t>
             </a:r>
-            <a:endParaRPr lang="en-US" sz="1220" dirty="0"/>
-          </a:p>
-          <a:p>
-            <a:pPr indent="0" marL="0">
-              <a:buNone/>
-            </a:pPr>
-            <a:r>
-              <a:rPr lang="en-US" sz="1220" dirty="0">
+            <a:endParaRPr lang="en-US" sz="1140" dirty="0"/>
+          </a:p>
+          <a:p>
+            <a:pPr indent="0" marL="0">
+              <a:buNone/>
+            </a:pPr>
+            <a:r>
+              <a:rPr lang="en-US" sz="1140" dirty="0">
                 <a:solidFill>
                   <a:srgbClr val="17364A"/>
                 </a:solidFill>
@@ -17312,9 +17318,9 @@
                 <a:ea typeface="Aptos" pitchFamily="34" charset="-122"/>
                 <a:cs typeface="Aptos" pitchFamily="34" charset="-120"/>
               </a:rPr>
-              <a:t>Entity resolution is the broader process of identifying, matching,.</a:t>
-            </a:r>
-            <a:endParaRPr lang="en-US" sz="1220" dirty="0"/>
+              <a:t>Entity resolution is the broader process of.</a:t>
+            </a:r>
+            <a:endParaRPr lang="en-US" sz="1140" dirty="0"/>
           </a:p>
         </p:txBody>
       </p:sp>
@@ -17326,12 +17332,12 @@
         </p:nvSpPr>
         <p:spPr>
           <a:xfrm>
-            <a:off x="7635240" y="4184294"/>
-            <a:ext cx="3474720" cy="1466698"/>
+            <a:off x="7543800" y="4389120"/>
+            <a:ext cx="3611880" cy="1261872"/>
           </a:xfrm>
           <a:prstGeom prst="roundRect">
             <a:avLst>
-              <a:gd name="adj" fmla="val 7481"/>
+              <a:gd name="adj" fmla="val 8696"/>
             </a:avLst>
           </a:prstGeom>
           <a:solidFill>
@@ -17353,8 +17359,8 @@
         </p:nvSpPr>
         <p:spPr>
           <a:xfrm>
-            <a:off x="7799832" y="4330598"/>
-            <a:ext cx="3145536" cy="256032"/>
+            <a:off x="7708392" y="4517136"/>
+            <a:ext cx="3282696" cy="228600"/>
           </a:xfrm>
           <a:prstGeom prst="rect">
             <a:avLst/>
@@ -17370,7 +17376,7 @@
               <a:buNone/>
             </a:pPr>
             <a:r>
-              <a:rPr lang="en-US" sz="1300" b="1" dirty="0">
+              <a:rPr lang="en-US" sz="1220" b="1" dirty="0">
                 <a:solidFill>
                   <a:srgbClr val="0068B7"/>
                 </a:solidFill>
@@ -17380,7 +17386,7 @@
               </a:rPr>
               <a:t>Apply it</a:t>
             </a:r>
-            <a:endParaRPr lang="en-US" sz="1300" dirty="0"/>
+            <a:endParaRPr lang="en-US" sz="1220" dirty="0"/>
           </a:p>
         </p:txBody>
       </p:sp>
@@ -17392,8 +17398,8 @@
         </p:nvSpPr>
         <p:spPr>
           <a:xfrm>
-            <a:off x="7799832" y="4659782"/>
-            <a:ext cx="3145536" cy="899770"/>
+            <a:off x="7708392" y="4828032"/>
+            <a:ext cx="3282696" cy="749808"/>
           </a:xfrm>
           <a:prstGeom prst="rect">
             <a:avLst/>
@@ -17411,7 +17417,7 @@
               <a:buNone/>
             </a:pPr>
             <a:r>
-              <a:rPr lang="en-US" sz="1320" dirty="0">
+              <a:rPr lang="en-US" sz="1220" dirty="0">
                 <a:solidFill>
                   <a:srgbClr val="17364A"/>
                 </a:solidFill>
@@ -17419,9 +17425,9 @@
                 <a:ea typeface="Aptos" pitchFamily="34" charset="-122"/>
                 <a:cs typeface="Aptos" pitchFamily="34" charset="-120"/>
               </a:rPr>
-              <a:t>Connect the concept to public health purpose, responsible use, required safeguards, documentation, and the next action a department should take.</a:t>
-            </a:r>
-            <a:endParaRPr lang="en-US" sz="1320" dirty="0"/>
+              <a:t>Connect the concept to public health purpose, responsible use, required.</a:t>
+            </a:r>
+            <a:endParaRPr lang="en-US" sz="1220" dirty="0"/>
           </a:p>
         </p:txBody>
       </p:sp>
@@ -17712,8 +17718,8 @@
         </p:nvSpPr>
         <p:spPr>
           <a:xfrm>
-            <a:off x="868680" y="1508760"/>
-            <a:ext cx="6309360" cy="4160520"/>
+            <a:off x="822960" y="1463040"/>
+            <a:ext cx="6565392" cy="4343400"/>
           </a:xfrm>
           <a:prstGeom prst="rect">
             <a:avLst/>
@@ -17731,7 +17737,7 @@
               <a:buNone/>
             </a:pPr>
             <a:r>
-              <a:rPr lang="en-US" sz="2100" dirty="0">
+              <a:rPr lang="en-US" sz="1920" dirty="0">
                 <a:solidFill>
                   <a:srgbClr val="003A63"/>
                 </a:solidFill>
@@ -17741,14 +17747,14 @@
               </a:rPr>
               <a:t>• Probabilistic matching.</a:t>
             </a:r>
-            <a:endParaRPr lang="en-US" sz="2100" dirty="0"/>
-          </a:p>
-          <a:p>
-            <a:pPr indent="0" marL="0">
-              <a:buNone/>
-            </a:pPr>
-            <a:r>
-              <a:rPr lang="en-US" sz="2100" dirty="0">
+            <a:endParaRPr lang="en-US" sz="1920" dirty="0"/>
+          </a:p>
+          <a:p>
+            <a:pPr indent="0" marL="0">
+              <a:buNone/>
+            </a:pPr>
+            <a:r>
+              <a:rPr lang="en-US" sz="1920" dirty="0">
                 <a:solidFill>
                   <a:srgbClr val="003A63"/>
                 </a:solidFill>
@@ -17756,16 +17762,16 @@
                 <a:ea typeface="Aptos" pitchFamily="34" charset="-122"/>
                 <a:cs typeface="Aptos" pitchFamily="34" charset="-120"/>
               </a:rPr>
-              <a:t>• Probabilistic matching estimates the likelihood that records refer to the same entity even.</a:t>
-            </a:r>
-            <a:endParaRPr lang="en-US" sz="2100" dirty="0"/>
-          </a:p>
-          <a:p>
-            <a:pPr indent="0" marL="0">
-              <a:buNone/>
-            </a:pPr>
-            <a:r>
-              <a:rPr lang="en-US" sz="2100" dirty="0">
+              <a:t>• Probabilistic matching estimates the likelihood that records refer to the.</a:t>
+            </a:r>
+            <a:endParaRPr lang="en-US" sz="1920" dirty="0"/>
+          </a:p>
+          <a:p>
+            <a:pPr indent="0" marL="0">
+              <a:buNone/>
+            </a:pPr>
+            <a:r>
+              <a:rPr lang="en-US" sz="1920" dirty="0">
                 <a:solidFill>
                   <a:srgbClr val="003A63"/>
                 </a:solidFill>
@@ -17775,7 +17781,7 @@
               </a:rPr>
               <a:t>• It can improve recall but requires thresholds, validation, and review.</a:t>
             </a:r>
-            <a:endParaRPr lang="en-US" sz="2100" dirty="0"/>
+            <a:endParaRPr lang="en-US" sz="1920" dirty="0"/>
           </a:p>
         </p:txBody>
       </p:sp>
@@ -17787,12 +17793,12 @@
         </p:nvSpPr>
         <p:spPr>
           <a:xfrm>
-            <a:off x="7635240" y="1325880"/>
-            <a:ext cx="3474720" cy="1207008"/>
+            <a:off x="7543800" y="1325880"/>
+            <a:ext cx="3611880" cy="1261872"/>
           </a:xfrm>
           <a:prstGeom prst="roundRect">
             <a:avLst>
-              <a:gd name="adj" fmla="val 9091"/>
+              <a:gd name="adj" fmla="val 8696"/>
             </a:avLst>
           </a:prstGeom>
           <a:solidFill>
@@ -17814,8 +17820,8 @@
         </p:nvSpPr>
         <p:spPr>
           <a:xfrm>
-            <a:off x="7799832" y="1472184"/>
-            <a:ext cx="3145536" cy="256032"/>
+            <a:off x="7708392" y="1453896"/>
+            <a:ext cx="3282696" cy="228600"/>
           </a:xfrm>
           <a:prstGeom prst="rect">
             <a:avLst/>
@@ -17831,7 +17837,7 @@
               <a:buNone/>
             </a:pPr>
             <a:r>
-              <a:rPr lang="en-US" sz="1300" b="1" dirty="0">
+              <a:rPr lang="en-US" sz="1220" b="1" dirty="0">
                 <a:solidFill>
                   <a:srgbClr val="0068B7"/>
                 </a:solidFill>
@@ -17841,7 +17847,7 @@
               </a:rPr>
               <a:t>Core concept</a:t>
             </a:r>
-            <a:endParaRPr lang="en-US" sz="1300" dirty="0"/>
+            <a:endParaRPr lang="en-US" sz="1220" dirty="0"/>
           </a:p>
         </p:txBody>
       </p:sp>
@@ -17853,8 +17859,8 @@
         </p:nvSpPr>
         <p:spPr>
           <a:xfrm>
-            <a:off x="7799832" y="1801368"/>
-            <a:ext cx="3145536" cy="640080"/>
+            <a:off x="7708392" y="1764792"/>
+            <a:ext cx="3282696" cy="749808"/>
           </a:xfrm>
           <a:prstGeom prst="rect">
             <a:avLst/>
@@ -17872,7 +17878,7 @@
               <a:buNone/>
             </a:pPr>
             <a:r>
-              <a:rPr lang="en-US" sz="1320" dirty="0">
+              <a:rPr lang="en-US" sz="1220" dirty="0">
                 <a:solidFill>
                   <a:srgbClr val="17364A"/>
                 </a:solidFill>
@@ -17882,7 +17888,7 @@
               </a:rPr>
               <a:t>Probabilistic matching.</a:t>
             </a:r>
-            <a:endParaRPr lang="en-US" sz="1320" dirty="0"/>
+            <a:endParaRPr lang="en-US" sz="1220" dirty="0"/>
           </a:p>
         </p:txBody>
       </p:sp>
@@ -17894,12 +17900,12 @@
         </p:nvSpPr>
         <p:spPr>
           <a:xfrm>
-            <a:off x="7635240" y="2670048"/>
-            <a:ext cx="3474720" cy="1377086"/>
+            <a:off x="7543800" y="2724912"/>
+            <a:ext cx="3611880" cy="1527048"/>
           </a:xfrm>
           <a:prstGeom prst="roundRect">
             <a:avLst>
-              <a:gd name="adj" fmla="val 7968"/>
+              <a:gd name="adj" fmla="val 7186"/>
             </a:avLst>
           </a:prstGeom>
           <a:solidFill>
@@ -17921,8 +17927,8 @@
         </p:nvSpPr>
         <p:spPr>
           <a:xfrm>
-            <a:off x="7799832" y="2816352"/>
-            <a:ext cx="3145536" cy="256032"/>
+            <a:off x="7708392" y="2852928"/>
+            <a:ext cx="3282696" cy="228600"/>
           </a:xfrm>
           <a:prstGeom prst="rect">
             <a:avLst/>
@@ -17938,7 +17944,7 @@
               <a:buNone/>
             </a:pPr>
             <a:r>
-              <a:rPr lang="en-US" sz="1300" b="1" dirty="0">
+              <a:rPr lang="en-US" sz="1220" b="1" dirty="0">
                 <a:solidFill>
                   <a:srgbClr val="0068B7"/>
                 </a:solidFill>
@@ -17948,7 +17954,7 @@
               </a:rPr>
               <a:t>Concept checkpoints</a:t>
             </a:r>
-            <a:endParaRPr lang="en-US" sz="1300" dirty="0"/>
+            <a:endParaRPr lang="en-US" sz="1220" dirty="0"/>
           </a:p>
         </p:txBody>
       </p:sp>
@@ -17960,8 +17966,8 @@
         </p:nvSpPr>
         <p:spPr>
           <a:xfrm>
-            <a:off x="7818120" y="3182112"/>
-            <a:ext cx="3090672" cy="718718"/>
+            <a:off x="7726680" y="3182112"/>
+            <a:ext cx="3227832" cy="960120"/>
           </a:xfrm>
           <a:prstGeom prst="rect">
             <a:avLst/>
@@ -17979,7 +17985,7 @@
               <a:buNone/>
             </a:pPr>
             <a:r>
-              <a:rPr lang="en-US" sz="1220" dirty="0">
+              <a:rPr lang="en-US" sz="1140" dirty="0">
                 <a:solidFill>
                   <a:srgbClr val="17364A"/>
                 </a:solidFill>
@@ -17987,16 +17993,16 @@
                 <a:ea typeface="Aptos" pitchFamily="34" charset="-122"/>
                 <a:cs typeface="Aptos" pitchFamily="34" charset="-120"/>
               </a:rPr>
-              <a:t>Probabilistic matching estimates the likelihood that records refer.</a:t>
-            </a:r>
-            <a:endParaRPr lang="en-US" sz="1220" dirty="0"/>
-          </a:p>
-          <a:p>
-            <a:pPr indent="0" marL="0">
-              <a:buNone/>
-            </a:pPr>
-            <a:r>
-              <a:rPr lang="en-US" sz="1220" dirty="0">
+              <a:t>Probabilistic matching estimates the likelihood.</a:t>
+            </a:r>
+            <a:endParaRPr lang="en-US" sz="1140" dirty="0"/>
+          </a:p>
+          <a:p>
+            <a:pPr indent="0" marL="0">
+              <a:buNone/>
+            </a:pPr>
+            <a:r>
+              <a:rPr lang="en-US" sz="1140" dirty="0">
                 <a:solidFill>
                   <a:srgbClr val="17364A"/>
                 </a:solidFill>
@@ -18006,14 +18012,14 @@
               </a:rPr>
               <a:t>Clerical review.</a:t>
             </a:r>
-            <a:endParaRPr lang="en-US" sz="1220" dirty="0"/>
-          </a:p>
-          <a:p>
-            <a:pPr indent="0" marL="0">
-              <a:buNone/>
-            </a:pPr>
-            <a:r>
-              <a:rPr lang="en-US" sz="1220" dirty="0">
+            <a:endParaRPr lang="en-US" sz="1140" dirty="0"/>
+          </a:p>
+          <a:p>
+            <a:pPr indent="0" marL="0">
+              <a:buNone/>
+            </a:pPr>
+            <a:r>
+              <a:rPr lang="en-US" sz="1140" dirty="0">
                 <a:solidFill>
                   <a:srgbClr val="17364A"/>
                 </a:solidFill>
@@ -18021,9 +18027,9 @@
                 <a:ea typeface="Aptos" pitchFamily="34" charset="-122"/>
                 <a:cs typeface="Aptos" pitchFamily="34" charset="-120"/>
               </a:rPr>
-              <a:t>Clerical review is human review of uncertain matches.</a:t>
-            </a:r>
-            <a:endParaRPr lang="en-US" sz="1220" dirty="0"/>
+              <a:t>Clerical review is human review of uncertain.</a:t>
+            </a:r>
+            <a:endParaRPr lang="en-US" sz="1140" dirty="0"/>
           </a:p>
         </p:txBody>
       </p:sp>
@@ -18035,12 +18041,12 @@
         </p:nvSpPr>
         <p:spPr>
           <a:xfrm>
-            <a:off x="7635240" y="4184294"/>
-            <a:ext cx="3474720" cy="1466698"/>
+            <a:off x="7543800" y="4389120"/>
+            <a:ext cx="3611880" cy="1261872"/>
           </a:xfrm>
           <a:prstGeom prst="roundRect">
             <a:avLst>
-              <a:gd name="adj" fmla="val 7481"/>
+              <a:gd name="adj" fmla="val 8696"/>
             </a:avLst>
           </a:prstGeom>
           <a:solidFill>
@@ -18062,8 +18068,8 @@
         </p:nvSpPr>
         <p:spPr>
           <a:xfrm>
-            <a:off x="7799832" y="4330598"/>
-            <a:ext cx="3145536" cy="256032"/>
+            <a:off x="7708392" y="4517136"/>
+            <a:ext cx="3282696" cy="228600"/>
           </a:xfrm>
           <a:prstGeom prst="rect">
             <a:avLst/>
@@ -18079,7 +18085,7 @@
               <a:buNone/>
             </a:pPr>
             <a:r>
-              <a:rPr lang="en-US" sz="1300" b="1" dirty="0">
+              <a:rPr lang="en-US" sz="1220" b="1" dirty="0">
                 <a:solidFill>
                   <a:srgbClr val="0068B7"/>
                 </a:solidFill>
@@ -18089,7 +18095,7 @@
               </a:rPr>
               <a:t>Apply it</a:t>
             </a:r>
-            <a:endParaRPr lang="en-US" sz="1300" dirty="0"/>
+            <a:endParaRPr lang="en-US" sz="1220" dirty="0"/>
           </a:p>
         </p:txBody>
       </p:sp>
@@ -18101,8 +18107,8 @@
         </p:nvSpPr>
         <p:spPr>
           <a:xfrm>
-            <a:off x="7799832" y="4659782"/>
-            <a:ext cx="3145536" cy="899770"/>
+            <a:off x="7708392" y="4828032"/>
+            <a:ext cx="3282696" cy="749808"/>
           </a:xfrm>
           <a:prstGeom prst="rect">
             <a:avLst/>
@@ -18120,7 +18126,7 @@
               <a:buNone/>
             </a:pPr>
             <a:r>
-              <a:rPr lang="en-US" sz="1320" dirty="0">
+              <a:rPr lang="en-US" sz="1220" dirty="0">
                 <a:solidFill>
                   <a:srgbClr val="17364A"/>
                 </a:solidFill>
@@ -18128,9 +18134,9 @@
                 <a:ea typeface="Aptos" pitchFamily="34" charset="-122"/>
                 <a:cs typeface="Aptos" pitchFamily="34" charset="-120"/>
               </a:rPr>
-              <a:t>Connect the concept to public health purpose, responsible use, required safeguards, documentation, and the next action a department should take.</a:t>
-            </a:r>
-            <a:endParaRPr lang="en-US" sz="1320" dirty="0"/>
+              <a:t>Connect the concept to public health purpose, responsible use, required.</a:t>
+            </a:r>
+            <a:endParaRPr lang="en-US" sz="1220" dirty="0"/>
           </a:p>
         </p:txBody>
       </p:sp>

--- a/downloads/presentations/modules/ops-210.pptx
+++ b/downloads/presentations/modules/ops-210.pptx
@@ -12287,7 +12287,7 @@
                 <a:ea typeface="Aptos" pitchFamily="34" charset="-122"/>
                 <a:cs typeface="Aptos" pitchFamily="34" charset="-120"/>
               </a:rPr>
-              <a:t>• 1. What is a false match?</a:t>
+              <a:t>1. What is a false match?</a:t>
             </a:r>
             <a:endParaRPr lang="en-US" sz="1920" dirty="0"/>
           </a:p>
@@ -12304,7 +12304,7 @@
                 <a:ea typeface="Aptos" pitchFamily="34" charset="-122"/>
                 <a:cs typeface="Aptos" pitchFamily="34" charset="-120"/>
               </a:rPr>
-              <a:t>• 2. What is a missed match?</a:t>
+              <a:t>2. What is a missed match?</a:t>
             </a:r>
             <a:endParaRPr lang="en-US" sz="1920" dirty="0"/>
           </a:p>
@@ -12321,7 +12321,7 @@
                 <a:ea typeface="Aptos" pitchFamily="34" charset="-122"/>
                 <a:cs typeface="Aptos" pitchFamily="34" charset="-120"/>
               </a:rPr>
-              <a:t>• 3. Why does record linkage matter for AI?</a:t>
+              <a:t>3. Why does record linkage matter for AI?</a:t>
             </a:r>
             <a:endParaRPr lang="en-US" sz="1920" dirty="0"/>
           </a:p>
@@ -12428,7 +12428,7 @@
                 <a:ea typeface="Aptos" pitchFamily="34" charset="-122"/>
                 <a:cs typeface="Aptos" pitchFamily="34" charset="-120"/>
               </a:rPr>
-              <a:t>1. What is a false match?</a:t>
+              <a:t>What is a false match?</a:t>
             </a:r>
             <a:endParaRPr lang="en-US" sz="1220" dirty="0"/>
           </a:p>
@@ -12535,41 +12535,7 @@
                 <a:ea typeface="Aptos" pitchFamily="34" charset="-122"/>
                 <a:cs typeface="Aptos" pitchFamily="34" charset="-120"/>
               </a:rPr>
-              <a:t>1.</a:t>
-            </a:r>
-            <a:endParaRPr lang="en-US" sz="1140" dirty="0"/>
-          </a:p>
-          <a:p>
-            <a:pPr indent="0" marL="0">
-              <a:buNone/>
-            </a:pPr>
-            <a:r>
-              <a:rPr lang="en-US" sz="1140" dirty="0">
-                <a:solidFill>
-                  <a:srgbClr val="17364A"/>
-                </a:solidFill>
-                <a:latin typeface="Aptos" pitchFamily="34" charset="0"/>
-                <a:ea typeface="Aptos" pitchFamily="34" charset="-122"/>
-                <a:cs typeface="Aptos" pitchFamily="34" charset="-120"/>
-              </a:rPr>
               <a:t>What is a false match?</a:t>
-            </a:r>
-            <a:endParaRPr lang="en-US" sz="1140" dirty="0"/>
-          </a:p>
-          <a:p>
-            <a:pPr indent="0" marL="0">
-              <a:buNone/>
-            </a:pPr>
-            <a:r>
-              <a:rPr lang="en-US" sz="1140" dirty="0">
-                <a:solidFill>
-                  <a:srgbClr val="17364A"/>
-                </a:solidFill>
-                <a:latin typeface="Aptos" pitchFamily="34" charset="0"/>
-                <a:ea typeface="Aptos" pitchFamily="34" charset="-122"/>
-                <a:cs typeface="Aptos" pitchFamily="34" charset="-120"/>
-              </a:rPr>
-              <a:t>2.</a:t>
             </a:r>
             <a:endParaRPr lang="en-US" sz="1140" dirty="0"/>
           </a:p>
